--- a/thesis-latency-fairness.pptx
+++ b/thesis-latency-fairness.pptx
@@ -7,6 +7,10 @@
   <p:sldIdLst>
     <p:sldId id="256" r:id="rId2"/>
     <p:sldId id="257" r:id="rId3"/>
+    <p:sldId id="258" r:id="rId4"/>
+    <p:sldId id="260" r:id="rId5"/>
+    <p:sldId id="261" r:id="rId6"/>
+    <p:sldId id="262" r:id="rId7"/>
   </p:sldIdLst>
   <p:sldSz cx="12192000" cy="6858000"/>
   <p:notesSz cx="6858000" cy="9144000"/>
@@ -3354,22 +3358,12 @@
             <a:r>
               <a:rPr lang="en-US" sz="4000" dirty="0">
                 <a:solidFill>
-                  <a:schemeClr val="bg1"/>
-                </a:solidFill>
-                <a:latin typeface="Times New Roman" panose="02020603050405020304" pitchFamily="18" charset="0"/>
-                <a:cs typeface="Times New Roman" panose="02020603050405020304" pitchFamily="18" charset="0"/>
-              </a:rPr>
-              <a:t>Latency Fairness</a:t>
-            </a:r>
-            <a:r>
-              <a:rPr lang="en-US" sz="4000" dirty="0">
-                <a:solidFill>
                   <a:srgbClr val="7030A0"/>
                 </a:solidFill>
                 <a:latin typeface="Times New Roman" panose="02020603050405020304" pitchFamily="18" charset="0"/>
                 <a:cs typeface="Times New Roman" panose="02020603050405020304" pitchFamily="18" charset="0"/>
               </a:rPr>
-              <a:t> On </a:t>
+              <a:t>Latency Fairness On </a:t>
             </a:r>
             <a:br>
               <a:rPr lang="en-US" sz="4000" dirty="0">
@@ -3785,47 +3779,6 @@
               <a:latin typeface="Times New Roman" panose="02020603050405020304" pitchFamily="18" charset="0"/>
               <a:cs typeface="Times New Roman" panose="02020603050405020304" pitchFamily="18" charset="0"/>
             </a:endParaRPr>
-          </a:p>
-        </p:txBody>
-      </p:sp>
-      <p:sp>
-        <p:nvSpPr>
-          <p:cNvPr id="11" name="TextBox 10">
-            <a:extLst>
-              <a:ext uri="{FF2B5EF4-FFF2-40B4-BE49-F238E27FC236}">
-                <a16:creationId xmlns:a16="http://schemas.microsoft.com/office/drawing/2014/main" id="{684417CE-26AB-902F-18B6-58243F609CFD}"/>
-              </a:ext>
-            </a:extLst>
-          </p:cNvPr>
-          <p:cNvSpPr txBox="1"/>
-          <p:nvPr/>
-        </p:nvSpPr>
-        <p:spPr>
-          <a:xfrm>
-            <a:off x="772160" y="1330960"/>
-            <a:ext cx="3708400" cy="707886"/>
-          </a:xfrm>
-          <a:prstGeom prst="rect">
-            <a:avLst/>
-          </a:prstGeom>
-          <a:noFill/>
-        </p:spPr>
-        <p:txBody>
-          <a:bodyPr wrap="square" rtlCol="0">
-            <a:spAutoFit/>
-          </a:bodyPr>
-          <a:lstStyle/>
-          <a:p>
-            <a:r>
-              <a:rPr lang="en-US" sz="4000" dirty="0">
-                <a:solidFill>
-                  <a:srgbClr val="7030A0"/>
-                </a:solidFill>
-                <a:latin typeface="Times New Roman" panose="02020603050405020304" pitchFamily="18" charset="0"/>
-                <a:cs typeface="Times New Roman" panose="02020603050405020304" pitchFamily="18" charset="0"/>
-              </a:rPr>
-              <a:t>Latency Fairness</a:t>
-            </a:r>
           </a:p>
         </p:txBody>
       </p:sp>
@@ -3862,56 +3815,50 @@
       </p:grpSpPr>
       <p:sp>
         <p:nvSpPr>
-          <p:cNvPr id="3" name="Content Placeholder 2">
-            <a:extLst>
-              <a:ext uri="{FF2B5EF4-FFF2-40B4-BE49-F238E27FC236}">
-                <a16:creationId xmlns:a16="http://schemas.microsoft.com/office/drawing/2014/main" id="{F2768EB4-B376-37E8-A18F-D4DAE0681795}"/>
-              </a:ext>
-            </a:extLst>
-          </p:cNvPr>
-          <p:cNvSpPr>
-            <a:spLocks noGrp="1"/>
+          <p:cNvPr id="16" name="Title 1">
+            <a:extLst>
+              <a:ext uri="{FF2B5EF4-FFF2-40B4-BE49-F238E27FC236}">
+                <a16:creationId xmlns:a16="http://schemas.microsoft.com/office/drawing/2014/main" id="{D18F4229-C9B6-4487-A584-667F7C25FA64}"/>
+              </a:ext>
+            </a:extLst>
+          </p:cNvPr>
+          <p:cNvSpPr txBox="1">
+            <a:spLocks/>
           </p:cNvSpPr>
-          <p:nvPr>
-            <p:ph idx="1"/>
-          </p:nvPr>
-        </p:nvSpPr>
-        <p:spPr/>
-        <p:txBody>
-          <a:bodyPr/>
-          <a:lstStyle/>
-          <a:p>
-            <a:endParaRPr lang="en-US" dirty="0"/>
-          </a:p>
-        </p:txBody>
-      </p:sp>
-      <p:sp>
-        <p:nvSpPr>
-          <p:cNvPr id="7" name="TextBox 6">
-            <a:extLst>
-              <a:ext uri="{FF2B5EF4-FFF2-40B4-BE49-F238E27FC236}">
-                <a16:creationId xmlns:a16="http://schemas.microsoft.com/office/drawing/2014/main" id="{FA2F8159-6328-A8D7-A607-287244EA43AF}"/>
-              </a:ext>
-            </a:extLst>
-          </p:cNvPr>
-          <p:cNvSpPr txBox="1"/>
           <p:nvPr/>
         </p:nvSpPr>
         <p:spPr>
           <a:xfrm>
-            <a:off x="838200" y="681037"/>
-            <a:ext cx="3708400" cy="707886"/>
+            <a:off x="3190240" y="2006283"/>
+            <a:ext cx="5811520" cy="2387600"/>
           </a:xfrm>
           <a:prstGeom prst="rect">
             <a:avLst/>
           </a:prstGeom>
-          <a:noFill/>
-        </p:spPr>
-        <p:txBody>
-          <a:bodyPr wrap="square" rtlCol="0">
-            <a:spAutoFit/>
+        </p:spPr>
+        <p:txBody>
+          <a:bodyPr vert="horz" lIns="91440" tIns="45720" rIns="91440" bIns="45720" rtlCol="0" anchor="ctr">
+            <a:normAutofit/>
           </a:bodyPr>
-          <a:lstStyle/>
+          <a:lstStyle>
+            <a:lvl1pPr algn="l" defTabSz="914400" rtl="0" eaLnBrk="1" latinLnBrk="0" hangingPunct="1">
+              <a:lnSpc>
+                <a:spcPct val="90000"/>
+              </a:lnSpc>
+              <a:spcBef>
+                <a:spcPct val="0"/>
+              </a:spcBef>
+              <a:buNone/>
+              <a:defRPr sz="4400" kern="1200">
+                <a:solidFill>
+                  <a:schemeClr val="tx1"/>
+                </a:solidFill>
+                <a:latin typeface="+mj-lt"/>
+                <a:ea typeface="+mj-ea"/>
+                <a:cs typeface="+mj-cs"/>
+              </a:defRPr>
+            </a:lvl1pPr>
+          </a:lstStyle>
           <a:p>
             <a:r>
               <a:rPr lang="en-US" sz="4000" dirty="0">
@@ -3921,17 +3868,55 @@
                 <a:latin typeface="Times New Roman" panose="02020603050405020304" pitchFamily="18" charset="0"/>
                 <a:cs typeface="Times New Roman" panose="02020603050405020304" pitchFamily="18" charset="0"/>
               </a:rPr>
-              <a:t>Latency Fairness</a:t>
-            </a:r>
-          </a:p>
-        </p:txBody>
-      </p:sp>
-      <p:sp>
-        <p:nvSpPr>
-          <p:cNvPr id="8" name="Rectangle 7">
-            <a:extLst>
-              <a:ext uri="{FF2B5EF4-FFF2-40B4-BE49-F238E27FC236}">
-                <a16:creationId xmlns:a16="http://schemas.microsoft.com/office/drawing/2014/main" id="{1C5147F3-31B1-AA52-5EF1-942B6E3D3E57}"/>
+              <a:t>Latency Fairness On </a:t>
+            </a:r>
+            <a:br>
+              <a:rPr lang="en-US" sz="4000" dirty="0">
+                <a:solidFill>
+                  <a:srgbClr val="7030A0"/>
+                </a:solidFill>
+                <a:latin typeface="Times New Roman" panose="02020603050405020304" pitchFamily="18" charset="0"/>
+                <a:cs typeface="Times New Roman" panose="02020603050405020304" pitchFamily="18" charset="0"/>
+              </a:rPr>
+            </a:br>
+            <a:r>
+              <a:rPr lang="en-US" sz="4000" dirty="0">
+                <a:solidFill>
+                  <a:srgbClr val="7030A0"/>
+                </a:solidFill>
+                <a:latin typeface="Times New Roman" panose="02020603050405020304" pitchFamily="18" charset="0"/>
+                <a:cs typeface="Times New Roman" panose="02020603050405020304" pitchFamily="18" charset="0"/>
+              </a:rPr>
+              <a:t>Commodity Networking </a:t>
+            </a:r>
+            <a:br>
+              <a:rPr lang="en-US" sz="4000" dirty="0">
+                <a:solidFill>
+                  <a:srgbClr val="7030A0"/>
+                </a:solidFill>
+                <a:latin typeface="Times New Roman" panose="02020603050405020304" pitchFamily="18" charset="0"/>
+                <a:cs typeface="Times New Roman" panose="02020603050405020304" pitchFamily="18" charset="0"/>
+              </a:rPr>
+            </a:br>
+            <a:r>
+              <a:rPr lang="en-US" sz="4000" dirty="0">
+                <a:solidFill>
+                  <a:srgbClr val="7030A0"/>
+                </a:solidFill>
+                <a:latin typeface="Times New Roman" panose="02020603050405020304" pitchFamily="18" charset="0"/>
+                <a:cs typeface="Times New Roman" panose="02020603050405020304" pitchFamily="18" charset="0"/>
+              </a:rPr>
+              <a:t>Infrastructure</a:t>
+            </a:r>
+          </a:p>
+        </p:txBody>
+      </p:sp>
+      <p:sp>
+        <p:nvSpPr>
+          <p:cNvPr id="17" name="Rectangle 16">
+            <a:extLst>
+              <a:ext uri="{FF2B5EF4-FFF2-40B4-BE49-F238E27FC236}">
+                <a16:creationId xmlns:a16="http://schemas.microsoft.com/office/drawing/2014/main" id="{D3CD66FE-DC43-757E-6948-05C58364ECFF}"/>
               </a:ext>
             </a:extLst>
           </p:cNvPr>
@@ -3939,9 +3924,9 @@
           <p:nvPr/>
         </p:nvSpPr>
         <p:spPr>
-          <a:xfrm rot="16200000" flipH="1">
-            <a:off x="2623647" y="-206308"/>
-            <a:ext cx="45722" cy="3250155"/>
+          <a:xfrm>
+            <a:off x="3017520" y="1570633"/>
+            <a:ext cx="45719" cy="1548487"/>
           </a:xfrm>
           <a:prstGeom prst="rect">
             <a:avLst/>
@@ -3985,10 +3970,10 @@
       </p:sp>
       <p:sp>
         <p:nvSpPr>
-          <p:cNvPr id="9" name="Rectangle 8">
-            <a:extLst>
-              <a:ext uri="{FF2B5EF4-FFF2-40B4-BE49-F238E27FC236}">
-                <a16:creationId xmlns:a16="http://schemas.microsoft.com/office/drawing/2014/main" id="{983AD0A8-88A6-8C04-3C4C-BC7E34EBF171}"/>
+          <p:cNvPr id="18" name="Rectangle 17">
+            <a:extLst>
+              <a:ext uri="{FF2B5EF4-FFF2-40B4-BE49-F238E27FC236}">
+                <a16:creationId xmlns:a16="http://schemas.microsoft.com/office/drawing/2014/main" id="{EA1B4587-6474-87E6-7EF6-C8CAFD6C5C41}"/>
               </a:ext>
             </a:extLst>
           </p:cNvPr>
@@ -3996,9 +3981,9 @@
           <p:nvPr/>
         </p:nvSpPr>
         <p:spPr>
-          <a:xfrm rot="16200000">
-            <a:off x="2623647" y="-252033"/>
-            <a:ext cx="45723" cy="3250158"/>
+          <a:xfrm>
+            <a:off x="8422640" y="2814698"/>
+            <a:ext cx="53340" cy="1696342"/>
           </a:xfrm>
           <a:prstGeom prst="rect">
             <a:avLst/>
@@ -4040,6 +4025,82 @@
           </a:p>
         </p:txBody>
       </p:sp>
+      <p:sp>
+        <p:nvSpPr>
+          <p:cNvPr id="19" name="TextBox 18">
+            <a:extLst>
+              <a:ext uri="{FF2B5EF4-FFF2-40B4-BE49-F238E27FC236}">
+                <a16:creationId xmlns:a16="http://schemas.microsoft.com/office/drawing/2014/main" id="{8E356B41-3E9C-A4BC-664F-CCA480C0A1C8}"/>
+              </a:ext>
+            </a:extLst>
+          </p:cNvPr>
+          <p:cNvSpPr txBox="1"/>
+          <p:nvPr/>
+        </p:nvSpPr>
+        <p:spPr>
+          <a:xfrm>
+            <a:off x="3190240" y="1652340"/>
+            <a:ext cx="3677920" cy="707886"/>
+          </a:xfrm>
+          <a:prstGeom prst="rect">
+            <a:avLst/>
+          </a:prstGeom>
+          <a:noFill/>
+        </p:spPr>
+        <p:txBody>
+          <a:bodyPr wrap="square" rtlCol="0">
+            <a:spAutoFit/>
+          </a:bodyPr>
+          <a:lstStyle/>
+          <a:p>
+            <a:r>
+              <a:rPr lang="en-US" sz="4000" dirty="0">
+                <a:latin typeface="Times New Roman" panose="02020603050405020304" pitchFamily="18" charset="0"/>
+                <a:cs typeface="Times New Roman" panose="02020603050405020304" pitchFamily="18" charset="0"/>
+              </a:rPr>
+              <a:t>Can We Achieve</a:t>
+            </a:r>
+          </a:p>
+        </p:txBody>
+      </p:sp>
+      <p:sp>
+        <p:nvSpPr>
+          <p:cNvPr id="20" name="TextBox 19">
+            <a:extLst>
+              <a:ext uri="{FF2B5EF4-FFF2-40B4-BE49-F238E27FC236}">
+                <a16:creationId xmlns:a16="http://schemas.microsoft.com/office/drawing/2014/main" id="{0B305DDE-6A86-84D6-428B-A6B48FB37A03}"/>
+              </a:ext>
+            </a:extLst>
+          </p:cNvPr>
+          <p:cNvSpPr txBox="1"/>
+          <p:nvPr/>
+        </p:nvSpPr>
+        <p:spPr>
+          <a:xfrm>
+            <a:off x="5994400" y="3357880"/>
+            <a:ext cx="680720" cy="707886"/>
+          </a:xfrm>
+          <a:prstGeom prst="rect">
+            <a:avLst/>
+          </a:prstGeom>
+          <a:noFill/>
+        </p:spPr>
+        <p:txBody>
+          <a:bodyPr wrap="square" rtlCol="0">
+            <a:spAutoFit/>
+          </a:bodyPr>
+          <a:lstStyle/>
+          <a:p>
+            <a:r>
+              <a:rPr lang="en-US" sz="4000" dirty="0">
+                <a:latin typeface="Times New Roman" panose="02020603050405020304" pitchFamily="18" charset="0"/>
+                <a:cs typeface="Times New Roman" panose="02020603050405020304" pitchFamily="18" charset="0"/>
+              </a:rPr>
+              <a:t>?</a:t>
+            </a:r>
+          </a:p>
+        </p:txBody>
+      </p:sp>
     </p:spTree>
     <p:extLst>
       <p:ext uri="{BB962C8B-B14F-4D97-AF65-F5344CB8AC3E}">
@@ -4053,7 +4114,2559 @@
   <mc:AlternateContent xmlns:mc="http://schemas.openxmlformats.org/markup-compatibility/2006">
     <mc:Choice xmlns:p159="http://schemas.microsoft.com/office/powerpoint/2015/09/main" Requires="p159">
       <p:transition spd="med">
-        <p159:morph option="byObject"/>
+        <p159:morph option="byWord"/>
+      </p:transition>
+    </mc:Choice>
+    <mc:Fallback>
+      <p:transition spd="med">
+        <p:fade/>
+      </p:transition>
+    </mc:Fallback>
+  </mc:AlternateContent>
+  <p:timing>
+    <p:tnLst>
+      <p:par>
+        <p:cTn id="1" dur="indefinite" restart="never" nodeType="tmRoot">
+          <p:childTnLst>
+            <p:seq concurrent="1" nextAc="seek">
+              <p:cTn id="2" dur="indefinite" nodeType="mainSeq">
+                <p:childTnLst>
+                  <p:par>
+                    <p:cTn id="3" fill="hold">
+                      <p:stCondLst>
+                        <p:cond delay="indefinite"/>
+                      </p:stCondLst>
+                      <p:childTnLst>
+                        <p:par>
+                          <p:cTn id="4" fill="hold">
+                            <p:stCondLst>
+                              <p:cond delay="0"/>
+                            </p:stCondLst>
+                            <p:childTnLst>
+                              <p:par>
+                                <p:cTn id="5" presetID="1" presetClass="entr" presetSubtype="0" fill="hold" grpId="0" nodeType="clickEffect">
+                                  <p:stCondLst>
+                                    <p:cond delay="0"/>
+                                  </p:stCondLst>
+                                  <p:childTnLst>
+                                    <p:set>
+                                      <p:cBhvr>
+                                        <p:cTn id="6" dur="1" fill="hold">
+                                          <p:stCondLst>
+                                            <p:cond delay="0"/>
+                                          </p:stCondLst>
+                                        </p:cTn>
+                                        <p:tgtEl>
+                                          <p:spTgt spid="19"/>
+                                        </p:tgtEl>
+                                        <p:attrNameLst>
+                                          <p:attrName>style.visibility</p:attrName>
+                                        </p:attrNameLst>
+                                      </p:cBhvr>
+                                      <p:to>
+                                        <p:strVal val="visible"/>
+                                      </p:to>
+                                    </p:set>
+                                  </p:childTnLst>
+                                </p:cTn>
+                              </p:par>
+                              <p:par>
+                                <p:cTn id="7" presetID="1" presetClass="entr" presetSubtype="0" fill="hold" grpId="0" nodeType="withEffect">
+                                  <p:stCondLst>
+                                    <p:cond delay="0"/>
+                                  </p:stCondLst>
+                                  <p:childTnLst>
+                                    <p:set>
+                                      <p:cBhvr>
+                                        <p:cTn id="8" dur="1" fill="hold">
+                                          <p:stCondLst>
+                                            <p:cond delay="0"/>
+                                          </p:stCondLst>
+                                        </p:cTn>
+                                        <p:tgtEl>
+                                          <p:spTgt spid="20"/>
+                                        </p:tgtEl>
+                                        <p:attrNameLst>
+                                          <p:attrName>style.visibility</p:attrName>
+                                        </p:attrNameLst>
+                                      </p:cBhvr>
+                                      <p:to>
+                                        <p:strVal val="visible"/>
+                                      </p:to>
+                                    </p:set>
+                                  </p:childTnLst>
+                                </p:cTn>
+                              </p:par>
+                            </p:childTnLst>
+                          </p:cTn>
+                        </p:par>
+                      </p:childTnLst>
+                    </p:cTn>
+                  </p:par>
+                </p:childTnLst>
+              </p:cTn>
+              <p:prevCondLst>
+                <p:cond evt="onPrev" delay="0">
+                  <p:tgtEl>
+                    <p:sldTgt/>
+                  </p:tgtEl>
+                </p:cond>
+              </p:prevCondLst>
+              <p:nextCondLst>
+                <p:cond evt="onNext" delay="0">
+                  <p:tgtEl>
+                    <p:sldTgt/>
+                  </p:tgtEl>
+                </p:cond>
+              </p:nextCondLst>
+            </p:seq>
+          </p:childTnLst>
+        </p:cTn>
+      </p:par>
+    </p:tnLst>
+    <p:bldLst>
+      <p:bldP spid="19" grpId="0"/>
+      <p:bldP spid="20" grpId="0"/>
+    </p:bldLst>
+  </p:timing>
+</p:sld>
+</file>
+
+<file path=ppt/slides/slide3.xml><?xml version="1.0" encoding="utf-8"?>
+<p:sld xmlns:a="http://schemas.openxmlformats.org/drawingml/2006/main" xmlns:r="http://schemas.openxmlformats.org/officeDocument/2006/relationships" xmlns:p="http://schemas.openxmlformats.org/presentationml/2006/main">
+  <p:cSld>
+    <p:spTree>
+      <p:nvGrpSpPr>
+        <p:cNvPr id="1" name="">
+          <a:extLst>
+            <a:ext uri="{FF2B5EF4-FFF2-40B4-BE49-F238E27FC236}">
+              <a16:creationId xmlns:a16="http://schemas.microsoft.com/office/drawing/2014/main" id="{CF17EF22-9C4F-4708-95F5-AC1003B12AD3}"/>
+            </a:ext>
+          </a:extLst>
+        </p:cNvPr>
+        <p:cNvGrpSpPr/>
+        <p:nvPr/>
+      </p:nvGrpSpPr>
+      <p:grpSpPr>
+        <a:xfrm>
+          <a:off x="0" y="0"/>
+          <a:ext cx="0" cy="0"/>
+          <a:chOff x="0" y="0"/>
+          <a:chExt cx="0" cy="0"/>
+        </a:xfrm>
+      </p:grpSpPr>
+      <p:sp>
+        <p:nvSpPr>
+          <p:cNvPr id="16" name="Title 1">
+            <a:extLst>
+              <a:ext uri="{FF2B5EF4-FFF2-40B4-BE49-F238E27FC236}">
+                <a16:creationId xmlns:a16="http://schemas.microsoft.com/office/drawing/2014/main" id="{B7B9327D-73A0-7490-618E-334A9F9DB0B7}"/>
+              </a:ext>
+            </a:extLst>
+          </p:cNvPr>
+          <p:cNvSpPr txBox="1">
+            <a:spLocks/>
+          </p:cNvSpPr>
+          <p:nvPr/>
+        </p:nvSpPr>
+        <p:spPr>
+          <a:xfrm>
+            <a:off x="760549" y="-305842"/>
+            <a:ext cx="5811520" cy="2387600"/>
+          </a:xfrm>
+          <a:prstGeom prst="rect">
+            <a:avLst/>
+          </a:prstGeom>
+        </p:spPr>
+        <p:txBody>
+          <a:bodyPr vert="horz" lIns="91440" tIns="45720" rIns="91440" bIns="45720" rtlCol="0" anchor="ctr">
+            <a:normAutofit/>
+          </a:bodyPr>
+          <a:lstStyle>
+            <a:lvl1pPr algn="l" defTabSz="914400" rtl="0" eaLnBrk="1" latinLnBrk="0" hangingPunct="1">
+              <a:lnSpc>
+                <a:spcPct val="90000"/>
+              </a:lnSpc>
+              <a:spcBef>
+                <a:spcPct val="0"/>
+              </a:spcBef>
+              <a:buNone/>
+              <a:defRPr sz="4400" kern="1200">
+                <a:solidFill>
+                  <a:schemeClr val="tx1"/>
+                </a:solidFill>
+                <a:latin typeface="+mj-lt"/>
+                <a:ea typeface="+mj-ea"/>
+                <a:cs typeface="+mj-cs"/>
+              </a:defRPr>
+            </a:lvl1pPr>
+          </a:lstStyle>
+          <a:p>
+            <a:r>
+              <a:rPr lang="en-US" sz="4000" dirty="0">
+                <a:solidFill>
+                  <a:srgbClr val="7030A0"/>
+                </a:solidFill>
+                <a:latin typeface="Times New Roman" panose="02020603050405020304" pitchFamily="18" charset="0"/>
+                <a:cs typeface="Times New Roman" panose="02020603050405020304" pitchFamily="18" charset="0"/>
+              </a:rPr>
+              <a:t>Latency Fairness</a:t>
+            </a:r>
+          </a:p>
+        </p:txBody>
+      </p:sp>
+      <p:sp>
+        <p:nvSpPr>
+          <p:cNvPr id="17" name="Rectangle 16">
+            <a:extLst>
+              <a:ext uri="{FF2B5EF4-FFF2-40B4-BE49-F238E27FC236}">
+                <a16:creationId xmlns:a16="http://schemas.microsoft.com/office/drawing/2014/main" id="{A38D9987-F4A3-3D6C-FDED-327FC12FE715}"/>
+              </a:ext>
+            </a:extLst>
+          </p:cNvPr>
+          <p:cNvSpPr/>
+          <p:nvPr/>
+        </p:nvSpPr>
+        <p:spPr>
+          <a:xfrm rot="16200000">
+            <a:off x="2522582" y="-387076"/>
+            <a:ext cx="68673" cy="3246390"/>
+          </a:xfrm>
+          <a:prstGeom prst="rect">
+            <a:avLst/>
+          </a:prstGeom>
+          <a:solidFill>
+            <a:srgbClr val="FF0000"/>
+          </a:solidFill>
+          <a:ln>
+            <a:solidFill>
+              <a:srgbClr val="FF0000"/>
+            </a:solidFill>
+          </a:ln>
+        </p:spPr>
+        <p:style>
+          <a:lnRef idx="2">
+            <a:schemeClr val="accent1">
+              <a:shade val="15000"/>
+            </a:schemeClr>
+          </a:lnRef>
+          <a:fillRef idx="1">
+            <a:schemeClr val="accent1"/>
+          </a:fillRef>
+          <a:effectRef idx="0">
+            <a:schemeClr val="accent1"/>
+          </a:effectRef>
+          <a:fontRef idx="minor">
+            <a:schemeClr val="lt1"/>
+          </a:fontRef>
+        </p:style>
+        <p:txBody>
+          <a:bodyPr rtlCol="0" anchor="ctr"/>
+          <a:lstStyle/>
+          <a:p>
+            <a:pPr algn="ctr"/>
+            <a:endParaRPr lang="en-US">
+              <a:latin typeface="Times New Roman" panose="02020603050405020304" pitchFamily="18" charset="0"/>
+              <a:cs typeface="Times New Roman" panose="02020603050405020304" pitchFamily="18" charset="0"/>
+            </a:endParaRPr>
+          </a:p>
+        </p:txBody>
+      </p:sp>
+      <p:sp>
+        <p:nvSpPr>
+          <p:cNvPr id="18" name="Rectangle 17">
+            <a:extLst>
+              <a:ext uri="{FF2B5EF4-FFF2-40B4-BE49-F238E27FC236}">
+                <a16:creationId xmlns:a16="http://schemas.microsoft.com/office/drawing/2014/main" id="{8527C1E5-E704-6387-68B5-7635850AFD8E}"/>
+              </a:ext>
+            </a:extLst>
+          </p:cNvPr>
+          <p:cNvSpPr/>
+          <p:nvPr/>
+        </p:nvSpPr>
+        <p:spPr>
+          <a:xfrm rot="16200000">
+            <a:off x="2522581" y="-318404"/>
+            <a:ext cx="68674" cy="3246390"/>
+          </a:xfrm>
+          <a:prstGeom prst="rect">
+            <a:avLst/>
+          </a:prstGeom>
+          <a:solidFill>
+            <a:srgbClr val="7030A0"/>
+          </a:solidFill>
+          <a:ln>
+            <a:solidFill>
+              <a:srgbClr val="7030A0"/>
+            </a:solidFill>
+          </a:ln>
+        </p:spPr>
+        <p:style>
+          <a:lnRef idx="2">
+            <a:schemeClr val="accent1">
+              <a:shade val="15000"/>
+            </a:schemeClr>
+          </a:lnRef>
+          <a:fillRef idx="1">
+            <a:schemeClr val="accent1"/>
+          </a:fillRef>
+          <a:effectRef idx="0">
+            <a:schemeClr val="accent1"/>
+          </a:effectRef>
+          <a:fontRef idx="minor">
+            <a:schemeClr val="lt1"/>
+          </a:fontRef>
+        </p:style>
+        <p:txBody>
+          <a:bodyPr rtlCol="0" anchor="ctr"/>
+          <a:lstStyle/>
+          <a:p>
+            <a:pPr algn="ctr"/>
+            <a:endParaRPr lang="en-US">
+              <a:latin typeface="Times New Roman" panose="02020603050405020304" pitchFamily="18" charset="0"/>
+              <a:cs typeface="Times New Roman" panose="02020603050405020304" pitchFamily="18" charset="0"/>
+            </a:endParaRPr>
+          </a:p>
+        </p:txBody>
+      </p:sp>
+    </p:spTree>
+    <p:extLst>
+      <p:ext uri="{BB962C8B-B14F-4D97-AF65-F5344CB8AC3E}">
+        <p14:creationId xmlns:p14="http://schemas.microsoft.com/office/powerpoint/2010/main" val="3748874570"/>
+      </p:ext>
+    </p:extLst>
+  </p:cSld>
+  <p:clrMapOvr>
+    <a:masterClrMapping/>
+  </p:clrMapOvr>
+  <mc:AlternateContent xmlns:mc="http://schemas.openxmlformats.org/markup-compatibility/2006">
+    <mc:Choice xmlns:p159="http://schemas.microsoft.com/office/powerpoint/2015/09/main" Requires="p159">
+      <p:transition spd="med">
+        <p159:morph option="byWord"/>
+      </p:transition>
+    </mc:Choice>
+    <mc:Fallback>
+      <p:transition spd="med">
+        <p:fade/>
+      </p:transition>
+    </mc:Fallback>
+  </mc:AlternateContent>
+</p:sld>
+</file>
+
+<file path=ppt/slides/slide4.xml><?xml version="1.0" encoding="utf-8"?>
+<p:sld xmlns:a="http://schemas.openxmlformats.org/drawingml/2006/main" xmlns:r="http://schemas.openxmlformats.org/officeDocument/2006/relationships" xmlns:p="http://schemas.openxmlformats.org/presentationml/2006/main">
+  <p:cSld>
+    <p:spTree>
+      <p:nvGrpSpPr>
+        <p:cNvPr id="1" name="">
+          <a:extLst>
+            <a:ext uri="{FF2B5EF4-FFF2-40B4-BE49-F238E27FC236}">
+              <a16:creationId xmlns:a16="http://schemas.microsoft.com/office/drawing/2014/main" id="{D68AA5B3-712F-6E9A-8E97-5DCC437E4256}"/>
+            </a:ext>
+          </a:extLst>
+        </p:cNvPr>
+        <p:cNvGrpSpPr/>
+        <p:nvPr/>
+      </p:nvGrpSpPr>
+      <p:grpSpPr>
+        <a:xfrm>
+          <a:off x="0" y="0"/>
+          <a:ext cx="0" cy="0"/>
+          <a:chOff x="0" y="0"/>
+          <a:chExt cx="0" cy="0"/>
+        </a:xfrm>
+      </p:grpSpPr>
+      <p:sp>
+        <p:nvSpPr>
+          <p:cNvPr id="16" name="Title 1">
+            <a:extLst>
+              <a:ext uri="{FF2B5EF4-FFF2-40B4-BE49-F238E27FC236}">
+                <a16:creationId xmlns:a16="http://schemas.microsoft.com/office/drawing/2014/main" id="{D549D387-2FAB-8B19-C677-E1367435A065}"/>
+              </a:ext>
+            </a:extLst>
+          </p:cNvPr>
+          <p:cNvSpPr txBox="1">
+            <a:spLocks/>
+          </p:cNvSpPr>
+          <p:nvPr/>
+        </p:nvSpPr>
+        <p:spPr>
+          <a:xfrm>
+            <a:off x="760549" y="-305842"/>
+            <a:ext cx="5811520" cy="2387600"/>
+          </a:xfrm>
+          <a:prstGeom prst="rect">
+            <a:avLst/>
+          </a:prstGeom>
+        </p:spPr>
+        <p:txBody>
+          <a:bodyPr vert="horz" lIns="91440" tIns="45720" rIns="91440" bIns="45720" rtlCol="0" anchor="ctr">
+            <a:normAutofit/>
+          </a:bodyPr>
+          <a:lstStyle>
+            <a:lvl1pPr algn="l" defTabSz="914400" rtl="0" eaLnBrk="1" latinLnBrk="0" hangingPunct="1">
+              <a:lnSpc>
+                <a:spcPct val="90000"/>
+              </a:lnSpc>
+              <a:spcBef>
+                <a:spcPct val="0"/>
+              </a:spcBef>
+              <a:buNone/>
+              <a:defRPr sz="4400" kern="1200">
+                <a:solidFill>
+                  <a:schemeClr val="tx1"/>
+                </a:solidFill>
+                <a:latin typeface="+mj-lt"/>
+                <a:ea typeface="+mj-ea"/>
+                <a:cs typeface="+mj-cs"/>
+              </a:defRPr>
+            </a:lvl1pPr>
+          </a:lstStyle>
+          <a:p>
+            <a:r>
+              <a:rPr lang="en-US" sz="4000" dirty="0">
+                <a:solidFill>
+                  <a:srgbClr val="7030A0"/>
+                </a:solidFill>
+                <a:latin typeface="Times New Roman" panose="02020603050405020304" pitchFamily="18" charset="0"/>
+                <a:cs typeface="Times New Roman" panose="02020603050405020304" pitchFamily="18" charset="0"/>
+              </a:rPr>
+              <a:t>Latency Fairness</a:t>
+            </a:r>
+          </a:p>
+        </p:txBody>
+      </p:sp>
+      <p:sp>
+        <p:nvSpPr>
+          <p:cNvPr id="17" name="Rectangle 16">
+            <a:extLst>
+              <a:ext uri="{FF2B5EF4-FFF2-40B4-BE49-F238E27FC236}">
+                <a16:creationId xmlns:a16="http://schemas.microsoft.com/office/drawing/2014/main" id="{EA057AAD-A7DE-0803-D929-98D54BAD6D27}"/>
+              </a:ext>
+            </a:extLst>
+          </p:cNvPr>
+          <p:cNvSpPr/>
+          <p:nvPr/>
+        </p:nvSpPr>
+        <p:spPr>
+          <a:xfrm rot="16200000">
+            <a:off x="2522582" y="-387076"/>
+            <a:ext cx="68673" cy="3246390"/>
+          </a:xfrm>
+          <a:prstGeom prst="rect">
+            <a:avLst/>
+          </a:prstGeom>
+          <a:solidFill>
+            <a:srgbClr val="FF0000"/>
+          </a:solidFill>
+          <a:ln>
+            <a:solidFill>
+              <a:srgbClr val="FF0000"/>
+            </a:solidFill>
+          </a:ln>
+        </p:spPr>
+        <p:style>
+          <a:lnRef idx="2">
+            <a:schemeClr val="accent1">
+              <a:shade val="15000"/>
+            </a:schemeClr>
+          </a:lnRef>
+          <a:fillRef idx="1">
+            <a:schemeClr val="accent1"/>
+          </a:fillRef>
+          <a:effectRef idx="0">
+            <a:schemeClr val="accent1"/>
+          </a:effectRef>
+          <a:fontRef idx="minor">
+            <a:schemeClr val="lt1"/>
+          </a:fontRef>
+        </p:style>
+        <p:txBody>
+          <a:bodyPr rtlCol="0" anchor="ctr"/>
+          <a:lstStyle/>
+          <a:p>
+            <a:pPr algn="ctr"/>
+            <a:endParaRPr lang="en-US">
+              <a:latin typeface="Times New Roman" panose="02020603050405020304" pitchFamily="18" charset="0"/>
+              <a:cs typeface="Times New Roman" panose="02020603050405020304" pitchFamily="18" charset="0"/>
+            </a:endParaRPr>
+          </a:p>
+        </p:txBody>
+      </p:sp>
+      <p:sp>
+        <p:nvSpPr>
+          <p:cNvPr id="18" name="Rectangle 17">
+            <a:extLst>
+              <a:ext uri="{FF2B5EF4-FFF2-40B4-BE49-F238E27FC236}">
+                <a16:creationId xmlns:a16="http://schemas.microsoft.com/office/drawing/2014/main" id="{164F7254-0CD1-F421-6C43-A847C1E8C362}"/>
+              </a:ext>
+            </a:extLst>
+          </p:cNvPr>
+          <p:cNvSpPr/>
+          <p:nvPr/>
+        </p:nvSpPr>
+        <p:spPr>
+          <a:xfrm rot="16200000">
+            <a:off x="2522581" y="-318404"/>
+            <a:ext cx="68674" cy="3246390"/>
+          </a:xfrm>
+          <a:prstGeom prst="rect">
+            <a:avLst/>
+          </a:prstGeom>
+          <a:solidFill>
+            <a:srgbClr val="7030A0"/>
+          </a:solidFill>
+          <a:ln>
+            <a:solidFill>
+              <a:srgbClr val="7030A0"/>
+            </a:solidFill>
+          </a:ln>
+        </p:spPr>
+        <p:style>
+          <a:lnRef idx="2">
+            <a:schemeClr val="accent1">
+              <a:shade val="15000"/>
+            </a:schemeClr>
+          </a:lnRef>
+          <a:fillRef idx="1">
+            <a:schemeClr val="accent1"/>
+          </a:fillRef>
+          <a:effectRef idx="0">
+            <a:schemeClr val="accent1"/>
+          </a:effectRef>
+          <a:fontRef idx="minor">
+            <a:schemeClr val="lt1"/>
+          </a:fontRef>
+        </p:style>
+        <p:txBody>
+          <a:bodyPr rtlCol="0" anchor="ctr"/>
+          <a:lstStyle/>
+          <a:p>
+            <a:pPr algn="ctr"/>
+            <a:endParaRPr lang="en-US">
+              <a:latin typeface="Times New Roman" panose="02020603050405020304" pitchFamily="18" charset="0"/>
+              <a:cs typeface="Times New Roman" panose="02020603050405020304" pitchFamily="18" charset="0"/>
+            </a:endParaRPr>
+          </a:p>
+        </p:txBody>
+      </p:sp>
+      <p:sp>
+        <p:nvSpPr>
+          <p:cNvPr id="2" name="Oval 1">
+            <a:extLst>
+              <a:ext uri="{FF2B5EF4-FFF2-40B4-BE49-F238E27FC236}">
+                <a16:creationId xmlns:a16="http://schemas.microsoft.com/office/drawing/2014/main" id="{67755810-7970-2604-2BA0-463C072C41F0}"/>
+              </a:ext>
+            </a:extLst>
+          </p:cNvPr>
+          <p:cNvSpPr/>
+          <p:nvPr/>
+        </p:nvSpPr>
+        <p:spPr>
+          <a:xfrm>
+            <a:off x="6183088" y="1737555"/>
+            <a:ext cx="901337" cy="888274"/>
+          </a:xfrm>
+          <a:prstGeom prst="ellipse">
+            <a:avLst/>
+          </a:prstGeom>
+          <a:solidFill>
+            <a:srgbClr val="FF0000"/>
+          </a:solidFill>
+          <a:ln>
+            <a:noFill/>
+          </a:ln>
+        </p:spPr>
+        <p:style>
+          <a:lnRef idx="2">
+            <a:schemeClr val="accent1">
+              <a:shade val="15000"/>
+            </a:schemeClr>
+          </a:lnRef>
+          <a:fillRef idx="1">
+            <a:schemeClr val="accent1"/>
+          </a:fillRef>
+          <a:effectRef idx="0">
+            <a:schemeClr val="accent1"/>
+          </a:effectRef>
+          <a:fontRef idx="minor">
+            <a:schemeClr val="lt1"/>
+          </a:fontRef>
+        </p:style>
+        <p:txBody>
+          <a:bodyPr rtlCol="0" anchor="ctr"/>
+          <a:lstStyle/>
+          <a:p>
+            <a:pPr algn="ctr"/>
+            <a:endParaRPr lang="en-US"/>
+          </a:p>
+        </p:txBody>
+      </p:sp>
+      <p:sp>
+        <p:nvSpPr>
+          <p:cNvPr id="3" name="TextBox 2">
+            <a:extLst>
+              <a:ext uri="{FF2B5EF4-FFF2-40B4-BE49-F238E27FC236}">
+                <a16:creationId xmlns:a16="http://schemas.microsoft.com/office/drawing/2014/main" id="{74796716-0AE6-68E2-8E60-4E43236E5939}"/>
+              </a:ext>
+            </a:extLst>
+          </p:cNvPr>
+          <p:cNvSpPr txBox="1"/>
+          <p:nvPr/>
+        </p:nvSpPr>
+        <p:spPr>
+          <a:xfrm>
+            <a:off x="5844534" y="1201782"/>
+            <a:ext cx="1239891" cy="553998"/>
+          </a:xfrm>
+          <a:prstGeom prst="rect">
+            <a:avLst/>
+          </a:prstGeom>
+          <a:noFill/>
+        </p:spPr>
+        <p:txBody>
+          <a:bodyPr wrap="none" rtlCol="0">
+            <a:spAutoFit/>
+          </a:bodyPr>
+          <a:lstStyle/>
+          <a:p>
+            <a:r>
+              <a:rPr lang="en-US" sz="3000" dirty="0"/>
+              <a:t>Server</a:t>
+            </a:r>
+          </a:p>
+        </p:txBody>
+      </p:sp>
+      <p:sp>
+        <p:nvSpPr>
+          <p:cNvPr id="4" name="Oval 3">
+            <a:extLst>
+              <a:ext uri="{FF2B5EF4-FFF2-40B4-BE49-F238E27FC236}">
+                <a16:creationId xmlns:a16="http://schemas.microsoft.com/office/drawing/2014/main" id="{18707975-C4BE-D24A-3CC2-BA67BA13EECE}"/>
+              </a:ext>
+            </a:extLst>
+          </p:cNvPr>
+          <p:cNvSpPr/>
+          <p:nvPr/>
+        </p:nvSpPr>
+        <p:spPr>
+          <a:xfrm>
+            <a:off x="4236720" y="4332106"/>
+            <a:ext cx="901337" cy="888274"/>
+          </a:xfrm>
+          <a:prstGeom prst="ellipse">
+            <a:avLst/>
+          </a:prstGeom>
+          <a:solidFill>
+            <a:srgbClr val="7030A0"/>
+          </a:solidFill>
+          <a:ln>
+            <a:noFill/>
+          </a:ln>
+        </p:spPr>
+        <p:style>
+          <a:lnRef idx="2">
+            <a:schemeClr val="accent1">
+              <a:shade val="15000"/>
+            </a:schemeClr>
+          </a:lnRef>
+          <a:fillRef idx="1">
+            <a:schemeClr val="accent1"/>
+          </a:fillRef>
+          <a:effectRef idx="0">
+            <a:schemeClr val="accent1"/>
+          </a:effectRef>
+          <a:fontRef idx="minor">
+            <a:schemeClr val="lt1"/>
+          </a:fontRef>
+        </p:style>
+        <p:txBody>
+          <a:bodyPr rtlCol="0" anchor="ctr"/>
+          <a:lstStyle/>
+          <a:p>
+            <a:pPr algn="ctr"/>
+            <a:endParaRPr lang="en-US"/>
+          </a:p>
+        </p:txBody>
+      </p:sp>
+      <p:sp>
+        <p:nvSpPr>
+          <p:cNvPr id="6" name="TextBox 5">
+            <a:extLst>
+              <a:ext uri="{FF2B5EF4-FFF2-40B4-BE49-F238E27FC236}">
+                <a16:creationId xmlns:a16="http://schemas.microsoft.com/office/drawing/2014/main" id="{A81FF857-36DC-8591-7049-277522B60D84}"/>
+              </a:ext>
+            </a:extLst>
+          </p:cNvPr>
+          <p:cNvSpPr txBox="1"/>
+          <p:nvPr/>
+        </p:nvSpPr>
+        <p:spPr>
+          <a:xfrm>
+            <a:off x="4183808" y="5238604"/>
+            <a:ext cx="1180131" cy="1015663"/>
+          </a:xfrm>
+          <a:prstGeom prst="rect">
+            <a:avLst/>
+          </a:prstGeom>
+          <a:noFill/>
+        </p:spPr>
+        <p:txBody>
+          <a:bodyPr wrap="none" rtlCol="0">
+            <a:spAutoFit/>
+          </a:bodyPr>
+          <a:lstStyle/>
+          <a:p>
+            <a:pPr algn="ctr"/>
+            <a:r>
+              <a:rPr lang="en-US" sz="3000" dirty="0"/>
+              <a:t>Client</a:t>
+            </a:r>
+            <a:br>
+              <a:rPr lang="en-US" sz="3000" dirty="0"/>
+            </a:br>
+            <a:r>
+              <a:rPr lang="en-US" sz="3000" dirty="0"/>
+              <a:t>1</a:t>
+            </a:r>
+          </a:p>
+        </p:txBody>
+      </p:sp>
+      <p:sp>
+        <p:nvSpPr>
+          <p:cNvPr id="5" name="Oval 4">
+            <a:extLst>
+              <a:ext uri="{FF2B5EF4-FFF2-40B4-BE49-F238E27FC236}">
+                <a16:creationId xmlns:a16="http://schemas.microsoft.com/office/drawing/2014/main" id="{DDC71D5C-193F-3D78-BAF2-25F30A656584}"/>
+              </a:ext>
+            </a:extLst>
+          </p:cNvPr>
+          <p:cNvSpPr/>
+          <p:nvPr/>
+        </p:nvSpPr>
+        <p:spPr>
+          <a:xfrm>
+            <a:off x="5645331" y="4332106"/>
+            <a:ext cx="901337" cy="888274"/>
+          </a:xfrm>
+          <a:prstGeom prst="ellipse">
+            <a:avLst/>
+          </a:prstGeom>
+          <a:solidFill>
+            <a:srgbClr val="7030A0"/>
+          </a:solidFill>
+          <a:ln>
+            <a:noFill/>
+          </a:ln>
+        </p:spPr>
+        <p:style>
+          <a:lnRef idx="2">
+            <a:schemeClr val="accent1">
+              <a:shade val="15000"/>
+            </a:schemeClr>
+          </a:lnRef>
+          <a:fillRef idx="1">
+            <a:schemeClr val="accent1"/>
+          </a:fillRef>
+          <a:effectRef idx="0">
+            <a:schemeClr val="accent1"/>
+          </a:effectRef>
+          <a:fontRef idx="minor">
+            <a:schemeClr val="lt1"/>
+          </a:fontRef>
+        </p:style>
+        <p:txBody>
+          <a:bodyPr rtlCol="0" anchor="ctr"/>
+          <a:lstStyle/>
+          <a:p>
+            <a:pPr algn="ctr"/>
+            <a:endParaRPr lang="en-US"/>
+          </a:p>
+        </p:txBody>
+      </p:sp>
+      <p:sp>
+        <p:nvSpPr>
+          <p:cNvPr id="10" name="Oval 9">
+            <a:extLst>
+              <a:ext uri="{FF2B5EF4-FFF2-40B4-BE49-F238E27FC236}">
+                <a16:creationId xmlns:a16="http://schemas.microsoft.com/office/drawing/2014/main" id="{CDC26A6F-236C-06F2-6937-9D660F60EE5A}"/>
+              </a:ext>
+            </a:extLst>
+          </p:cNvPr>
+          <p:cNvSpPr/>
+          <p:nvPr/>
+        </p:nvSpPr>
+        <p:spPr>
+          <a:xfrm>
+            <a:off x="7990540" y="4332106"/>
+            <a:ext cx="901337" cy="888274"/>
+          </a:xfrm>
+          <a:prstGeom prst="ellipse">
+            <a:avLst/>
+          </a:prstGeom>
+          <a:solidFill>
+            <a:srgbClr val="7030A0"/>
+          </a:solidFill>
+          <a:ln>
+            <a:noFill/>
+          </a:ln>
+        </p:spPr>
+        <p:style>
+          <a:lnRef idx="2">
+            <a:schemeClr val="accent1">
+              <a:shade val="15000"/>
+            </a:schemeClr>
+          </a:lnRef>
+          <a:fillRef idx="1">
+            <a:schemeClr val="accent1"/>
+          </a:fillRef>
+          <a:effectRef idx="0">
+            <a:schemeClr val="accent1"/>
+          </a:effectRef>
+          <a:fontRef idx="minor">
+            <a:schemeClr val="lt1"/>
+          </a:fontRef>
+        </p:style>
+        <p:txBody>
+          <a:bodyPr rtlCol="0" anchor="ctr"/>
+          <a:lstStyle/>
+          <a:p>
+            <a:pPr algn="ctr"/>
+            <a:endParaRPr lang="en-US"/>
+          </a:p>
+        </p:txBody>
+      </p:sp>
+      <p:cxnSp>
+        <p:nvCxnSpPr>
+          <p:cNvPr id="13" name="Straight Connector 12">
+            <a:extLst>
+              <a:ext uri="{FF2B5EF4-FFF2-40B4-BE49-F238E27FC236}">
+                <a16:creationId xmlns:a16="http://schemas.microsoft.com/office/drawing/2014/main" id="{7070B3DE-C544-43D5-DFE3-D8A2FA526217}"/>
+              </a:ext>
+            </a:extLst>
+          </p:cNvPr>
+          <p:cNvCxnSpPr/>
+          <p:nvPr/>
+        </p:nvCxnSpPr>
+        <p:spPr>
+          <a:xfrm>
+            <a:off x="6772550" y="4820194"/>
+            <a:ext cx="921473" cy="0"/>
+          </a:xfrm>
+          <a:prstGeom prst="line">
+            <a:avLst/>
+          </a:prstGeom>
+          <a:ln w="73025">
+            <a:solidFill>
+              <a:srgbClr val="7030A0"/>
+            </a:solidFill>
+            <a:prstDash val="sysDot"/>
+          </a:ln>
+        </p:spPr>
+        <p:style>
+          <a:lnRef idx="2">
+            <a:schemeClr val="accent1"/>
+          </a:lnRef>
+          <a:fillRef idx="0">
+            <a:schemeClr val="accent1"/>
+          </a:fillRef>
+          <a:effectRef idx="1">
+            <a:schemeClr val="accent1"/>
+          </a:effectRef>
+          <a:fontRef idx="minor">
+            <a:schemeClr val="tx1"/>
+          </a:fontRef>
+        </p:style>
+      </p:cxnSp>
+      <p:sp>
+        <p:nvSpPr>
+          <p:cNvPr id="14" name="TextBox 13">
+            <a:extLst>
+              <a:ext uri="{FF2B5EF4-FFF2-40B4-BE49-F238E27FC236}">
+                <a16:creationId xmlns:a16="http://schemas.microsoft.com/office/drawing/2014/main" id="{954E6A77-61EA-8C76-C1EE-AF3D94B56FC8}"/>
+              </a:ext>
+            </a:extLst>
+          </p:cNvPr>
+          <p:cNvSpPr txBox="1"/>
+          <p:nvPr/>
+        </p:nvSpPr>
+        <p:spPr>
+          <a:xfrm>
+            <a:off x="5505933" y="5238604"/>
+            <a:ext cx="1180131" cy="1015663"/>
+          </a:xfrm>
+          <a:prstGeom prst="rect">
+            <a:avLst/>
+          </a:prstGeom>
+          <a:noFill/>
+        </p:spPr>
+        <p:txBody>
+          <a:bodyPr wrap="none" rtlCol="0">
+            <a:spAutoFit/>
+          </a:bodyPr>
+          <a:lstStyle/>
+          <a:p>
+            <a:pPr algn="ctr"/>
+            <a:r>
+              <a:rPr lang="en-US" sz="3000" dirty="0"/>
+              <a:t>Client</a:t>
+            </a:r>
+            <a:br>
+              <a:rPr lang="en-US" sz="3000" dirty="0"/>
+            </a:br>
+            <a:r>
+              <a:rPr lang="en-US" sz="3000" dirty="0"/>
+              <a:t>2</a:t>
+            </a:r>
+          </a:p>
+        </p:txBody>
+      </p:sp>
+      <p:sp>
+        <p:nvSpPr>
+          <p:cNvPr id="15" name="TextBox 14">
+            <a:extLst>
+              <a:ext uri="{FF2B5EF4-FFF2-40B4-BE49-F238E27FC236}">
+                <a16:creationId xmlns:a16="http://schemas.microsoft.com/office/drawing/2014/main" id="{6C0FA2BA-178F-04BA-4587-5FCB3BAADE52}"/>
+              </a:ext>
+            </a:extLst>
+          </p:cNvPr>
+          <p:cNvSpPr txBox="1"/>
+          <p:nvPr/>
+        </p:nvSpPr>
+        <p:spPr>
+          <a:xfrm>
+            <a:off x="7851142" y="5238604"/>
+            <a:ext cx="1180131" cy="1015663"/>
+          </a:xfrm>
+          <a:prstGeom prst="rect">
+            <a:avLst/>
+          </a:prstGeom>
+          <a:noFill/>
+        </p:spPr>
+        <p:txBody>
+          <a:bodyPr wrap="none" rtlCol="0">
+            <a:spAutoFit/>
+          </a:bodyPr>
+          <a:lstStyle/>
+          <a:p>
+            <a:pPr algn="ctr"/>
+            <a:r>
+              <a:rPr lang="en-US" sz="3000" dirty="0"/>
+              <a:t>Client</a:t>
+            </a:r>
+            <a:br>
+              <a:rPr lang="en-US" sz="3000" dirty="0"/>
+            </a:br>
+            <a:r>
+              <a:rPr lang="en-US" sz="3000" dirty="0"/>
+              <a:t>n</a:t>
+            </a:r>
+          </a:p>
+        </p:txBody>
+      </p:sp>
+    </p:spTree>
+    <p:extLst>
+      <p:ext uri="{BB962C8B-B14F-4D97-AF65-F5344CB8AC3E}">
+        <p14:creationId xmlns:p14="http://schemas.microsoft.com/office/powerpoint/2010/main" val="3495473911"/>
+      </p:ext>
+    </p:extLst>
+  </p:cSld>
+  <p:clrMapOvr>
+    <a:masterClrMapping/>
+  </p:clrMapOvr>
+  <mc:AlternateContent xmlns:mc="http://schemas.openxmlformats.org/markup-compatibility/2006">
+    <mc:Choice xmlns:p159="http://schemas.microsoft.com/office/powerpoint/2015/09/main" Requires="p159">
+      <p:transition spd="med">
+        <p159:morph option="byWord"/>
+      </p:transition>
+    </mc:Choice>
+    <mc:Fallback>
+      <p:transition spd="med">
+        <p:fade/>
+      </p:transition>
+    </mc:Fallback>
+  </mc:AlternateContent>
+</p:sld>
+</file>
+
+<file path=ppt/slides/slide5.xml><?xml version="1.0" encoding="utf-8"?>
+<p:sld xmlns:a="http://schemas.openxmlformats.org/drawingml/2006/main" xmlns:r="http://schemas.openxmlformats.org/officeDocument/2006/relationships" xmlns:p="http://schemas.openxmlformats.org/presentationml/2006/main">
+  <p:cSld>
+    <p:spTree>
+      <p:nvGrpSpPr>
+        <p:cNvPr id="1" name="">
+          <a:extLst>
+            <a:ext uri="{FF2B5EF4-FFF2-40B4-BE49-F238E27FC236}">
+              <a16:creationId xmlns:a16="http://schemas.microsoft.com/office/drawing/2014/main" id="{EA7D8580-20EC-4B90-49EC-4B6942C48A10}"/>
+            </a:ext>
+          </a:extLst>
+        </p:cNvPr>
+        <p:cNvGrpSpPr/>
+        <p:nvPr/>
+      </p:nvGrpSpPr>
+      <p:grpSpPr>
+        <a:xfrm>
+          <a:off x="0" y="0"/>
+          <a:ext cx="0" cy="0"/>
+          <a:chOff x="0" y="0"/>
+          <a:chExt cx="0" cy="0"/>
+        </a:xfrm>
+      </p:grpSpPr>
+      <p:sp>
+        <p:nvSpPr>
+          <p:cNvPr id="16" name="Title 1">
+            <a:extLst>
+              <a:ext uri="{FF2B5EF4-FFF2-40B4-BE49-F238E27FC236}">
+                <a16:creationId xmlns:a16="http://schemas.microsoft.com/office/drawing/2014/main" id="{0ACC840E-3A04-FEFF-E5C9-79DFFCA1BDB3}"/>
+              </a:ext>
+            </a:extLst>
+          </p:cNvPr>
+          <p:cNvSpPr txBox="1">
+            <a:spLocks/>
+          </p:cNvSpPr>
+          <p:nvPr/>
+        </p:nvSpPr>
+        <p:spPr>
+          <a:xfrm>
+            <a:off x="760549" y="-305842"/>
+            <a:ext cx="5811520" cy="2387600"/>
+          </a:xfrm>
+          <a:prstGeom prst="rect">
+            <a:avLst/>
+          </a:prstGeom>
+        </p:spPr>
+        <p:txBody>
+          <a:bodyPr vert="horz" lIns="91440" tIns="45720" rIns="91440" bIns="45720" rtlCol="0" anchor="ctr">
+            <a:normAutofit/>
+          </a:bodyPr>
+          <a:lstStyle>
+            <a:lvl1pPr algn="l" defTabSz="914400" rtl="0" eaLnBrk="1" latinLnBrk="0" hangingPunct="1">
+              <a:lnSpc>
+                <a:spcPct val="90000"/>
+              </a:lnSpc>
+              <a:spcBef>
+                <a:spcPct val="0"/>
+              </a:spcBef>
+              <a:buNone/>
+              <a:defRPr sz="4400" kern="1200">
+                <a:solidFill>
+                  <a:schemeClr val="tx1"/>
+                </a:solidFill>
+                <a:latin typeface="+mj-lt"/>
+                <a:ea typeface="+mj-ea"/>
+                <a:cs typeface="+mj-cs"/>
+              </a:defRPr>
+            </a:lvl1pPr>
+          </a:lstStyle>
+          <a:p>
+            <a:r>
+              <a:rPr lang="en-US" sz="4000" dirty="0">
+                <a:solidFill>
+                  <a:srgbClr val="7030A0"/>
+                </a:solidFill>
+                <a:latin typeface="Times New Roman" panose="02020603050405020304" pitchFamily="18" charset="0"/>
+                <a:cs typeface="Times New Roman" panose="02020603050405020304" pitchFamily="18" charset="0"/>
+              </a:rPr>
+              <a:t>Latency Fairness</a:t>
+            </a:r>
+          </a:p>
+        </p:txBody>
+      </p:sp>
+      <p:sp>
+        <p:nvSpPr>
+          <p:cNvPr id="17" name="Rectangle 16">
+            <a:extLst>
+              <a:ext uri="{FF2B5EF4-FFF2-40B4-BE49-F238E27FC236}">
+                <a16:creationId xmlns:a16="http://schemas.microsoft.com/office/drawing/2014/main" id="{72FA11C3-E33A-8940-834B-1322D127DCA2}"/>
+              </a:ext>
+            </a:extLst>
+          </p:cNvPr>
+          <p:cNvSpPr/>
+          <p:nvPr/>
+        </p:nvSpPr>
+        <p:spPr>
+          <a:xfrm rot="16200000">
+            <a:off x="2522582" y="-387076"/>
+            <a:ext cx="68673" cy="3246390"/>
+          </a:xfrm>
+          <a:prstGeom prst="rect">
+            <a:avLst/>
+          </a:prstGeom>
+          <a:solidFill>
+            <a:srgbClr val="FF0000"/>
+          </a:solidFill>
+          <a:ln>
+            <a:solidFill>
+              <a:srgbClr val="FF0000"/>
+            </a:solidFill>
+          </a:ln>
+        </p:spPr>
+        <p:style>
+          <a:lnRef idx="2">
+            <a:schemeClr val="accent1">
+              <a:shade val="15000"/>
+            </a:schemeClr>
+          </a:lnRef>
+          <a:fillRef idx="1">
+            <a:schemeClr val="accent1"/>
+          </a:fillRef>
+          <a:effectRef idx="0">
+            <a:schemeClr val="accent1"/>
+          </a:effectRef>
+          <a:fontRef idx="minor">
+            <a:schemeClr val="lt1"/>
+          </a:fontRef>
+        </p:style>
+        <p:txBody>
+          <a:bodyPr rtlCol="0" anchor="ctr"/>
+          <a:lstStyle/>
+          <a:p>
+            <a:pPr algn="ctr"/>
+            <a:endParaRPr lang="en-US">
+              <a:latin typeface="Times New Roman" panose="02020603050405020304" pitchFamily="18" charset="0"/>
+              <a:cs typeface="Times New Roman" panose="02020603050405020304" pitchFamily="18" charset="0"/>
+            </a:endParaRPr>
+          </a:p>
+        </p:txBody>
+      </p:sp>
+      <p:sp>
+        <p:nvSpPr>
+          <p:cNvPr id="18" name="Rectangle 17">
+            <a:extLst>
+              <a:ext uri="{FF2B5EF4-FFF2-40B4-BE49-F238E27FC236}">
+                <a16:creationId xmlns:a16="http://schemas.microsoft.com/office/drawing/2014/main" id="{255C11A9-2913-21C6-A686-C1A4684758F5}"/>
+              </a:ext>
+            </a:extLst>
+          </p:cNvPr>
+          <p:cNvSpPr/>
+          <p:nvPr/>
+        </p:nvSpPr>
+        <p:spPr>
+          <a:xfrm rot="16200000">
+            <a:off x="2522581" y="-318404"/>
+            <a:ext cx="68674" cy="3246390"/>
+          </a:xfrm>
+          <a:prstGeom prst="rect">
+            <a:avLst/>
+          </a:prstGeom>
+          <a:solidFill>
+            <a:srgbClr val="7030A0"/>
+          </a:solidFill>
+          <a:ln>
+            <a:solidFill>
+              <a:srgbClr val="7030A0"/>
+            </a:solidFill>
+          </a:ln>
+        </p:spPr>
+        <p:style>
+          <a:lnRef idx="2">
+            <a:schemeClr val="accent1">
+              <a:shade val="15000"/>
+            </a:schemeClr>
+          </a:lnRef>
+          <a:fillRef idx="1">
+            <a:schemeClr val="accent1"/>
+          </a:fillRef>
+          <a:effectRef idx="0">
+            <a:schemeClr val="accent1"/>
+          </a:effectRef>
+          <a:fontRef idx="minor">
+            <a:schemeClr val="lt1"/>
+          </a:fontRef>
+        </p:style>
+        <p:txBody>
+          <a:bodyPr rtlCol="0" anchor="ctr"/>
+          <a:lstStyle/>
+          <a:p>
+            <a:pPr algn="ctr"/>
+            <a:endParaRPr lang="en-US">
+              <a:latin typeface="Times New Roman" panose="02020603050405020304" pitchFamily="18" charset="0"/>
+              <a:cs typeface="Times New Roman" panose="02020603050405020304" pitchFamily="18" charset="0"/>
+            </a:endParaRPr>
+          </a:p>
+        </p:txBody>
+      </p:sp>
+      <p:sp>
+        <p:nvSpPr>
+          <p:cNvPr id="2" name="Oval 1">
+            <a:extLst>
+              <a:ext uri="{FF2B5EF4-FFF2-40B4-BE49-F238E27FC236}">
+                <a16:creationId xmlns:a16="http://schemas.microsoft.com/office/drawing/2014/main" id="{3D6B017D-F5FC-A2B9-EFEF-57D826883593}"/>
+              </a:ext>
+            </a:extLst>
+          </p:cNvPr>
+          <p:cNvSpPr/>
+          <p:nvPr/>
+        </p:nvSpPr>
+        <p:spPr>
+          <a:xfrm>
+            <a:off x="6183088" y="1737555"/>
+            <a:ext cx="901337" cy="888274"/>
+          </a:xfrm>
+          <a:prstGeom prst="ellipse">
+            <a:avLst/>
+          </a:prstGeom>
+          <a:solidFill>
+            <a:srgbClr val="FF0000"/>
+          </a:solidFill>
+          <a:ln>
+            <a:noFill/>
+          </a:ln>
+        </p:spPr>
+        <p:style>
+          <a:lnRef idx="2">
+            <a:schemeClr val="accent1">
+              <a:shade val="15000"/>
+            </a:schemeClr>
+          </a:lnRef>
+          <a:fillRef idx="1">
+            <a:schemeClr val="accent1"/>
+          </a:fillRef>
+          <a:effectRef idx="0">
+            <a:schemeClr val="accent1"/>
+          </a:effectRef>
+          <a:fontRef idx="minor">
+            <a:schemeClr val="lt1"/>
+          </a:fontRef>
+        </p:style>
+        <p:txBody>
+          <a:bodyPr rtlCol="0" anchor="ctr"/>
+          <a:lstStyle/>
+          <a:p>
+            <a:pPr algn="ctr"/>
+            <a:endParaRPr lang="en-US"/>
+          </a:p>
+        </p:txBody>
+      </p:sp>
+      <p:sp>
+        <p:nvSpPr>
+          <p:cNvPr id="3" name="TextBox 2">
+            <a:extLst>
+              <a:ext uri="{FF2B5EF4-FFF2-40B4-BE49-F238E27FC236}">
+                <a16:creationId xmlns:a16="http://schemas.microsoft.com/office/drawing/2014/main" id="{3F24776D-C215-F0C1-2A1F-C8B87596EBEA}"/>
+              </a:ext>
+            </a:extLst>
+          </p:cNvPr>
+          <p:cNvSpPr txBox="1"/>
+          <p:nvPr/>
+        </p:nvSpPr>
+        <p:spPr>
+          <a:xfrm>
+            <a:off x="5844534" y="1201782"/>
+            <a:ext cx="1239891" cy="553998"/>
+          </a:xfrm>
+          <a:prstGeom prst="rect">
+            <a:avLst/>
+          </a:prstGeom>
+          <a:noFill/>
+        </p:spPr>
+        <p:txBody>
+          <a:bodyPr wrap="none" rtlCol="0">
+            <a:spAutoFit/>
+          </a:bodyPr>
+          <a:lstStyle/>
+          <a:p>
+            <a:r>
+              <a:rPr lang="en-US" sz="3000" dirty="0"/>
+              <a:t>Server</a:t>
+            </a:r>
+          </a:p>
+        </p:txBody>
+      </p:sp>
+      <p:sp>
+        <p:nvSpPr>
+          <p:cNvPr id="4" name="Oval 3">
+            <a:extLst>
+              <a:ext uri="{FF2B5EF4-FFF2-40B4-BE49-F238E27FC236}">
+                <a16:creationId xmlns:a16="http://schemas.microsoft.com/office/drawing/2014/main" id="{9A53368C-8D3D-CBF1-4F27-813743688A77}"/>
+              </a:ext>
+            </a:extLst>
+          </p:cNvPr>
+          <p:cNvSpPr/>
+          <p:nvPr/>
+        </p:nvSpPr>
+        <p:spPr>
+          <a:xfrm>
+            <a:off x="4236720" y="4332106"/>
+            <a:ext cx="901337" cy="888274"/>
+          </a:xfrm>
+          <a:prstGeom prst="ellipse">
+            <a:avLst/>
+          </a:prstGeom>
+          <a:solidFill>
+            <a:srgbClr val="7030A0"/>
+          </a:solidFill>
+          <a:ln>
+            <a:noFill/>
+          </a:ln>
+        </p:spPr>
+        <p:style>
+          <a:lnRef idx="2">
+            <a:schemeClr val="accent1">
+              <a:shade val="15000"/>
+            </a:schemeClr>
+          </a:lnRef>
+          <a:fillRef idx="1">
+            <a:schemeClr val="accent1"/>
+          </a:fillRef>
+          <a:effectRef idx="0">
+            <a:schemeClr val="accent1"/>
+          </a:effectRef>
+          <a:fontRef idx="minor">
+            <a:schemeClr val="lt1"/>
+          </a:fontRef>
+        </p:style>
+        <p:txBody>
+          <a:bodyPr rtlCol="0" anchor="ctr"/>
+          <a:lstStyle/>
+          <a:p>
+            <a:pPr algn="ctr"/>
+            <a:endParaRPr lang="en-US"/>
+          </a:p>
+        </p:txBody>
+      </p:sp>
+      <p:sp>
+        <p:nvSpPr>
+          <p:cNvPr id="6" name="TextBox 5">
+            <a:extLst>
+              <a:ext uri="{FF2B5EF4-FFF2-40B4-BE49-F238E27FC236}">
+                <a16:creationId xmlns:a16="http://schemas.microsoft.com/office/drawing/2014/main" id="{B8EE590D-9C9E-C2DD-77B5-CF92E14F7043}"/>
+              </a:ext>
+            </a:extLst>
+          </p:cNvPr>
+          <p:cNvSpPr txBox="1"/>
+          <p:nvPr/>
+        </p:nvSpPr>
+        <p:spPr>
+          <a:xfrm>
+            <a:off x="4183808" y="5238604"/>
+            <a:ext cx="1180131" cy="1015663"/>
+          </a:xfrm>
+          <a:prstGeom prst="rect">
+            <a:avLst/>
+          </a:prstGeom>
+          <a:noFill/>
+        </p:spPr>
+        <p:txBody>
+          <a:bodyPr wrap="none" rtlCol="0">
+            <a:spAutoFit/>
+          </a:bodyPr>
+          <a:lstStyle/>
+          <a:p>
+            <a:pPr algn="ctr"/>
+            <a:r>
+              <a:rPr lang="en-US" sz="3000" dirty="0"/>
+              <a:t>Client</a:t>
+            </a:r>
+            <a:br>
+              <a:rPr lang="en-US" sz="3000" dirty="0"/>
+            </a:br>
+            <a:r>
+              <a:rPr lang="en-US" sz="3000" dirty="0"/>
+              <a:t>1</a:t>
+            </a:r>
+          </a:p>
+        </p:txBody>
+      </p:sp>
+      <p:sp>
+        <p:nvSpPr>
+          <p:cNvPr id="5" name="Oval 4">
+            <a:extLst>
+              <a:ext uri="{FF2B5EF4-FFF2-40B4-BE49-F238E27FC236}">
+                <a16:creationId xmlns:a16="http://schemas.microsoft.com/office/drawing/2014/main" id="{510BC7F5-B638-DEA7-FCAE-9D6DE413FE84}"/>
+              </a:ext>
+            </a:extLst>
+          </p:cNvPr>
+          <p:cNvSpPr/>
+          <p:nvPr/>
+        </p:nvSpPr>
+        <p:spPr>
+          <a:xfrm>
+            <a:off x="5645331" y="4332106"/>
+            <a:ext cx="901337" cy="888274"/>
+          </a:xfrm>
+          <a:prstGeom prst="ellipse">
+            <a:avLst/>
+          </a:prstGeom>
+          <a:solidFill>
+            <a:srgbClr val="7030A0"/>
+          </a:solidFill>
+          <a:ln>
+            <a:noFill/>
+          </a:ln>
+        </p:spPr>
+        <p:style>
+          <a:lnRef idx="2">
+            <a:schemeClr val="accent1">
+              <a:shade val="15000"/>
+            </a:schemeClr>
+          </a:lnRef>
+          <a:fillRef idx="1">
+            <a:schemeClr val="accent1"/>
+          </a:fillRef>
+          <a:effectRef idx="0">
+            <a:schemeClr val="accent1"/>
+          </a:effectRef>
+          <a:fontRef idx="minor">
+            <a:schemeClr val="lt1"/>
+          </a:fontRef>
+        </p:style>
+        <p:txBody>
+          <a:bodyPr rtlCol="0" anchor="ctr"/>
+          <a:lstStyle/>
+          <a:p>
+            <a:pPr algn="ctr"/>
+            <a:endParaRPr lang="en-US"/>
+          </a:p>
+        </p:txBody>
+      </p:sp>
+      <p:sp>
+        <p:nvSpPr>
+          <p:cNvPr id="10" name="Oval 9">
+            <a:extLst>
+              <a:ext uri="{FF2B5EF4-FFF2-40B4-BE49-F238E27FC236}">
+                <a16:creationId xmlns:a16="http://schemas.microsoft.com/office/drawing/2014/main" id="{2ED5185B-EC02-DBA4-B8D6-BCFA0AD5FC30}"/>
+              </a:ext>
+            </a:extLst>
+          </p:cNvPr>
+          <p:cNvSpPr/>
+          <p:nvPr/>
+        </p:nvSpPr>
+        <p:spPr>
+          <a:xfrm>
+            <a:off x="7990540" y="4332106"/>
+            <a:ext cx="901337" cy="888274"/>
+          </a:xfrm>
+          <a:prstGeom prst="ellipse">
+            <a:avLst/>
+          </a:prstGeom>
+          <a:solidFill>
+            <a:srgbClr val="7030A0"/>
+          </a:solidFill>
+          <a:ln>
+            <a:noFill/>
+          </a:ln>
+        </p:spPr>
+        <p:style>
+          <a:lnRef idx="2">
+            <a:schemeClr val="accent1">
+              <a:shade val="15000"/>
+            </a:schemeClr>
+          </a:lnRef>
+          <a:fillRef idx="1">
+            <a:schemeClr val="accent1"/>
+          </a:fillRef>
+          <a:effectRef idx="0">
+            <a:schemeClr val="accent1"/>
+          </a:effectRef>
+          <a:fontRef idx="minor">
+            <a:schemeClr val="lt1"/>
+          </a:fontRef>
+        </p:style>
+        <p:txBody>
+          <a:bodyPr rtlCol="0" anchor="ctr"/>
+          <a:lstStyle/>
+          <a:p>
+            <a:pPr algn="ctr"/>
+            <a:endParaRPr lang="en-US"/>
+          </a:p>
+        </p:txBody>
+      </p:sp>
+      <p:cxnSp>
+        <p:nvCxnSpPr>
+          <p:cNvPr id="13" name="Straight Connector 12">
+            <a:extLst>
+              <a:ext uri="{FF2B5EF4-FFF2-40B4-BE49-F238E27FC236}">
+                <a16:creationId xmlns:a16="http://schemas.microsoft.com/office/drawing/2014/main" id="{25C2855A-FF51-4772-A10F-02FA7B90A0FC}"/>
+              </a:ext>
+            </a:extLst>
+          </p:cNvPr>
+          <p:cNvCxnSpPr/>
+          <p:nvPr/>
+        </p:nvCxnSpPr>
+        <p:spPr>
+          <a:xfrm>
+            <a:off x="6772550" y="4820194"/>
+            <a:ext cx="921473" cy="0"/>
+          </a:xfrm>
+          <a:prstGeom prst="line">
+            <a:avLst/>
+          </a:prstGeom>
+          <a:ln w="73025">
+            <a:solidFill>
+              <a:srgbClr val="7030A0"/>
+            </a:solidFill>
+            <a:prstDash val="sysDot"/>
+          </a:ln>
+        </p:spPr>
+        <p:style>
+          <a:lnRef idx="2">
+            <a:schemeClr val="accent1"/>
+          </a:lnRef>
+          <a:fillRef idx="0">
+            <a:schemeClr val="accent1"/>
+          </a:fillRef>
+          <a:effectRef idx="1">
+            <a:schemeClr val="accent1"/>
+          </a:effectRef>
+          <a:fontRef idx="minor">
+            <a:schemeClr val="tx1"/>
+          </a:fontRef>
+        </p:style>
+      </p:cxnSp>
+      <p:sp>
+        <p:nvSpPr>
+          <p:cNvPr id="14" name="TextBox 13">
+            <a:extLst>
+              <a:ext uri="{FF2B5EF4-FFF2-40B4-BE49-F238E27FC236}">
+                <a16:creationId xmlns:a16="http://schemas.microsoft.com/office/drawing/2014/main" id="{B4E9B50D-C071-5793-712C-B19353E0DDFE}"/>
+              </a:ext>
+            </a:extLst>
+          </p:cNvPr>
+          <p:cNvSpPr txBox="1"/>
+          <p:nvPr/>
+        </p:nvSpPr>
+        <p:spPr>
+          <a:xfrm>
+            <a:off x="5505933" y="5238604"/>
+            <a:ext cx="1180131" cy="1015663"/>
+          </a:xfrm>
+          <a:prstGeom prst="rect">
+            <a:avLst/>
+          </a:prstGeom>
+          <a:noFill/>
+        </p:spPr>
+        <p:txBody>
+          <a:bodyPr wrap="none" rtlCol="0">
+            <a:spAutoFit/>
+          </a:bodyPr>
+          <a:lstStyle/>
+          <a:p>
+            <a:pPr algn="ctr"/>
+            <a:r>
+              <a:rPr lang="en-US" sz="3000" dirty="0"/>
+              <a:t>Client</a:t>
+            </a:r>
+            <a:br>
+              <a:rPr lang="en-US" sz="3000" dirty="0"/>
+            </a:br>
+            <a:r>
+              <a:rPr lang="en-US" sz="3000" dirty="0"/>
+              <a:t>2</a:t>
+            </a:r>
+          </a:p>
+        </p:txBody>
+      </p:sp>
+      <p:sp>
+        <p:nvSpPr>
+          <p:cNvPr id="15" name="TextBox 14">
+            <a:extLst>
+              <a:ext uri="{FF2B5EF4-FFF2-40B4-BE49-F238E27FC236}">
+                <a16:creationId xmlns:a16="http://schemas.microsoft.com/office/drawing/2014/main" id="{783BCA47-097F-7595-4EC8-D901F77AFE42}"/>
+              </a:ext>
+            </a:extLst>
+          </p:cNvPr>
+          <p:cNvSpPr txBox="1"/>
+          <p:nvPr/>
+        </p:nvSpPr>
+        <p:spPr>
+          <a:xfrm>
+            <a:off x="7851142" y="5238604"/>
+            <a:ext cx="1180131" cy="1015663"/>
+          </a:xfrm>
+          <a:prstGeom prst="rect">
+            <a:avLst/>
+          </a:prstGeom>
+          <a:noFill/>
+        </p:spPr>
+        <p:txBody>
+          <a:bodyPr wrap="none" rtlCol="0">
+            <a:spAutoFit/>
+          </a:bodyPr>
+          <a:lstStyle/>
+          <a:p>
+            <a:pPr algn="ctr"/>
+            <a:r>
+              <a:rPr lang="en-US" sz="3000" dirty="0"/>
+              <a:t>Client</a:t>
+            </a:r>
+            <a:br>
+              <a:rPr lang="en-US" sz="3000" dirty="0"/>
+            </a:br>
+            <a:r>
+              <a:rPr lang="en-US" sz="3000" dirty="0"/>
+              <a:t>n</a:t>
+            </a:r>
+          </a:p>
+        </p:txBody>
+      </p:sp>
+      <p:cxnSp>
+        <p:nvCxnSpPr>
+          <p:cNvPr id="8" name="Straight Connector 7">
+            <a:extLst>
+              <a:ext uri="{FF2B5EF4-FFF2-40B4-BE49-F238E27FC236}">
+                <a16:creationId xmlns:a16="http://schemas.microsoft.com/office/drawing/2014/main" id="{09961447-688A-261E-A45E-ED90FA8284AA}"/>
+              </a:ext>
+            </a:extLst>
+          </p:cNvPr>
+          <p:cNvCxnSpPr>
+            <a:cxnSpLocks/>
+          </p:cNvCxnSpPr>
+          <p:nvPr/>
+        </p:nvCxnSpPr>
+        <p:spPr>
+          <a:xfrm flipH="1">
+            <a:off x="4898571" y="2625829"/>
+            <a:ext cx="1648097" cy="1706277"/>
+          </a:xfrm>
+          <a:prstGeom prst="line">
+            <a:avLst/>
+          </a:prstGeom>
+          <a:ln w="73025">
+            <a:solidFill>
+              <a:schemeClr val="tx1"/>
+            </a:solidFill>
+          </a:ln>
+        </p:spPr>
+        <p:style>
+          <a:lnRef idx="2">
+            <a:schemeClr val="accent1"/>
+          </a:lnRef>
+          <a:fillRef idx="0">
+            <a:schemeClr val="accent1"/>
+          </a:fillRef>
+          <a:effectRef idx="1">
+            <a:schemeClr val="accent1"/>
+          </a:effectRef>
+          <a:fontRef idx="minor">
+            <a:schemeClr val="tx1"/>
+          </a:fontRef>
+        </p:style>
+      </p:cxnSp>
+      <p:sp>
+        <p:nvSpPr>
+          <p:cNvPr id="11" name="TextBox 10">
+            <a:extLst>
+              <a:ext uri="{FF2B5EF4-FFF2-40B4-BE49-F238E27FC236}">
+                <a16:creationId xmlns:a16="http://schemas.microsoft.com/office/drawing/2014/main" id="{9BDDC9B8-F36C-2C1B-4F24-86B93D2DB4BA}"/>
+              </a:ext>
+            </a:extLst>
+          </p:cNvPr>
+          <p:cNvSpPr txBox="1"/>
+          <p:nvPr/>
+        </p:nvSpPr>
+        <p:spPr>
+          <a:xfrm>
+            <a:off x="3816350" y="2924970"/>
+            <a:ext cx="2028184" cy="553998"/>
+          </a:xfrm>
+          <a:prstGeom prst="rect">
+            <a:avLst/>
+          </a:prstGeom>
+          <a:noFill/>
+        </p:spPr>
+        <p:txBody>
+          <a:bodyPr wrap="none" rtlCol="0">
+            <a:spAutoFit/>
+          </a:bodyPr>
+          <a:lstStyle/>
+          <a:p>
+            <a:r>
+              <a:rPr lang="en-US" sz="3000" dirty="0"/>
+              <a:t>Latency = x</a:t>
+            </a:r>
+          </a:p>
+        </p:txBody>
+      </p:sp>
+    </p:spTree>
+    <p:extLst>
+      <p:ext uri="{BB962C8B-B14F-4D97-AF65-F5344CB8AC3E}">
+        <p14:creationId xmlns:p14="http://schemas.microsoft.com/office/powerpoint/2010/main" val="4218537305"/>
+      </p:ext>
+    </p:extLst>
+  </p:cSld>
+  <p:clrMapOvr>
+    <a:masterClrMapping/>
+  </p:clrMapOvr>
+  <mc:AlternateContent xmlns:mc="http://schemas.openxmlformats.org/markup-compatibility/2006">
+    <mc:Choice xmlns:p159="http://schemas.microsoft.com/office/powerpoint/2015/09/main" Requires="p159">
+      <p:transition spd="med">
+        <p159:morph option="byWord"/>
+      </p:transition>
+    </mc:Choice>
+    <mc:Fallback>
+      <p:transition spd="med">
+        <p:fade/>
+      </p:transition>
+    </mc:Fallback>
+  </mc:AlternateContent>
+</p:sld>
+</file>
+
+<file path=ppt/slides/slide6.xml><?xml version="1.0" encoding="utf-8"?>
+<p:sld xmlns:a="http://schemas.openxmlformats.org/drawingml/2006/main" xmlns:r="http://schemas.openxmlformats.org/officeDocument/2006/relationships" xmlns:p="http://schemas.openxmlformats.org/presentationml/2006/main">
+  <p:cSld>
+    <p:spTree>
+      <p:nvGrpSpPr>
+        <p:cNvPr id="1" name="">
+          <a:extLst>
+            <a:ext uri="{FF2B5EF4-FFF2-40B4-BE49-F238E27FC236}">
+              <a16:creationId xmlns:a16="http://schemas.microsoft.com/office/drawing/2014/main" id="{A511755E-C173-8AC6-CCB7-88CA41F8BA47}"/>
+            </a:ext>
+          </a:extLst>
+        </p:cNvPr>
+        <p:cNvGrpSpPr/>
+        <p:nvPr/>
+      </p:nvGrpSpPr>
+      <p:grpSpPr>
+        <a:xfrm>
+          <a:off x="0" y="0"/>
+          <a:ext cx="0" cy="0"/>
+          <a:chOff x="0" y="0"/>
+          <a:chExt cx="0" cy="0"/>
+        </a:xfrm>
+      </p:grpSpPr>
+      <p:sp>
+        <p:nvSpPr>
+          <p:cNvPr id="16" name="Title 1">
+            <a:extLst>
+              <a:ext uri="{FF2B5EF4-FFF2-40B4-BE49-F238E27FC236}">
+                <a16:creationId xmlns:a16="http://schemas.microsoft.com/office/drawing/2014/main" id="{0A204BAD-2AE3-2BEB-4251-CED19E078723}"/>
+              </a:ext>
+            </a:extLst>
+          </p:cNvPr>
+          <p:cNvSpPr txBox="1">
+            <a:spLocks/>
+          </p:cNvSpPr>
+          <p:nvPr/>
+        </p:nvSpPr>
+        <p:spPr>
+          <a:xfrm>
+            <a:off x="760549" y="-305842"/>
+            <a:ext cx="5811520" cy="2387600"/>
+          </a:xfrm>
+          <a:prstGeom prst="rect">
+            <a:avLst/>
+          </a:prstGeom>
+        </p:spPr>
+        <p:txBody>
+          <a:bodyPr vert="horz" lIns="91440" tIns="45720" rIns="91440" bIns="45720" rtlCol="0" anchor="ctr">
+            <a:normAutofit/>
+          </a:bodyPr>
+          <a:lstStyle>
+            <a:lvl1pPr algn="l" defTabSz="914400" rtl="0" eaLnBrk="1" latinLnBrk="0" hangingPunct="1">
+              <a:lnSpc>
+                <a:spcPct val="90000"/>
+              </a:lnSpc>
+              <a:spcBef>
+                <a:spcPct val="0"/>
+              </a:spcBef>
+              <a:buNone/>
+              <a:defRPr sz="4400" kern="1200">
+                <a:solidFill>
+                  <a:schemeClr val="tx1"/>
+                </a:solidFill>
+                <a:latin typeface="+mj-lt"/>
+                <a:ea typeface="+mj-ea"/>
+                <a:cs typeface="+mj-cs"/>
+              </a:defRPr>
+            </a:lvl1pPr>
+          </a:lstStyle>
+          <a:p>
+            <a:r>
+              <a:rPr lang="en-US" sz="4000" dirty="0">
+                <a:solidFill>
+                  <a:srgbClr val="7030A0"/>
+                </a:solidFill>
+                <a:latin typeface="Times New Roman" panose="02020603050405020304" pitchFamily="18" charset="0"/>
+                <a:cs typeface="Times New Roman" panose="02020603050405020304" pitchFamily="18" charset="0"/>
+              </a:rPr>
+              <a:t>Latency Fairness</a:t>
+            </a:r>
+          </a:p>
+        </p:txBody>
+      </p:sp>
+      <p:sp>
+        <p:nvSpPr>
+          <p:cNvPr id="17" name="Rectangle 16">
+            <a:extLst>
+              <a:ext uri="{FF2B5EF4-FFF2-40B4-BE49-F238E27FC236}">
+                <a16:creationId xmlns:a16="http://schemas.microsoft.com/office/drawing/2014/main" id="{AFEAA05D-721A-B81E-D08A-B8C7A54AB48D}"/>
+              </a:ext>
+            </a:extLst>
+          </p:cNvPr>
+          <p:cNvSpPr/>
+          <p:nvPr/>
+        </p:nvSpPr>
+        <p:spPr>
+          <a:xfrm rot="16200000">
+            <a:off x="2522582" y="-387076"/>
+            <a:ext cx="68673" cy="3246390"/>
+          </a:xfrm>
+          <a:prstGeom prst="rect">
+            <a:avLst/>
+          </a:prstGeom>
+          <a:solidFill>
+            <a:srgbClr val="FF0000"/>
+          </a:solidFill>
+          <a:ln>
+            <a:solidFill>
+              <a:srgbClr val="FF0000"/>
+            </a:solidFill>
+          </a:ln>
+        </p:spPr>
+        <p:style>
+          <a:lnRef idx="2">
+            <a:schemeClr val="accent1">
+              <a:shade val="15000"/>
+            </a:schemeClr>
+          </a:lnRef>
+          <a:fillRef idx="1">
+            <a:schemeClr val="accent1"/>
+          </a:fillRef>
+          <a:effectRef idx="0">
+            <a:schemeClr val="accent1"/>
+          </a:effectRef>
+          <a:fontRef idx="minor">
+            <a:schemeClr val="lt1"/>
+          </a:fontRef>
+        </p:style>
+        <p:txBody>
+          <a:bodyPr rtlCol="0" anchor="ctr"/>
+          <a:lstStyle/>
+          <a:p>
+            <a:pPr algn="ctr"/>
+            <a:endParaRPr lang="en-US">
+              <a:latin typeface="Times New Roman" panose="02020603050405020304" pitchFamily="18" charset="0"/>
+              <a:cs typeface="Times New Roman" panose="02020603050405020304" pitchFamily="18" charset="0"/>
+            </a:endParaRPr>
+          </a:p>
+        </p:txBody>
+      </p:sp>
+      <p:sp>
+        <p:nvSpPr>
+          <p:cNvPr id="18" name="Rectangle 17">
+            <a:extLst>
+              <a:ext uri="{FF2B5EF4-FFF2-40B4-BE49-F238E27FC236}">
+                <a16:creationId xmlns:a16="http://schemas.microsoft.com/office/drawing/2014/main" id="{132DB8AC-0D90-0E62-F236-97523C8E511B}"/>
+              </a:ext>
+            </a:extLst>
+          </p:cNvPr>
+          <p:cNvSpPr/>
+          <p:nvPr/>
+        </p:nvSpPr>
+        <p:spPr>
+          <a:xfrm rot="16200000">
+            <a:off x="2522581" y="-318404"/>
+            <a:ext cx="68674" cy="3246390"/>
+          </a:xfrm>
+          <a:prstGeom prst="rect">
+            <a:avLst/>
+          </a:prstGeom>
+          <a:solidFill>
+            <a:srgbClr val="7030A0"/>
+          </a:solidFill>
+          <a:ln>
+            <a:solidFill>
+              <a:srgbClr val="7030A0"/>
+            </a:solidFill>
+          </a:ln>
+        </p:spPr>
+        <p:style>
+          <a:lnRef idx="2">
+            <a:schemeClr val="accent1">
+              <a:shade val="15000"/>
+            </a:schemeClr>
+          </a:lnRef>
+          <a:fillRef idx="1">
+            <a:schemeClr val="accent1"/>
+          </a:fillRef>
+          <a:effectRef idx="0">
+            <a:schemeClr val="accent1"/>
+          </a:effectRef>
+          <a:fontRef idx="minor">
+            <a:schemeClr val="lt1"/>
+          </a:fontRef>
+        </p:style>
+        <p:txBody>
+          <a:bodyPr rtlCol="0" anchor="ctr"/>
+          <a:lstStyle/>
+          <a:p>
+            <a:pPr algn="ctr"/>
+            <a:endParaRPr lang="en-US">
+              <a:latin typeface="Times New Roman" panose="02020603050405020304" pitchFamily="18" charset="0"/>
+              <a:cs typeface="Times New Roman" panose="02020603050405020304" pitchFamily="18" charset="0"/>
+            </a:endParaRPr>
+          </a:p>
+        </p:txBody>
+      </p:sp>
+      <p:sp>
+        <p:nvSpPr>
+          <p:cNvPr id="2" name="Oval 1">
+            <a:extLst>
+              <a:ext uri="{FF2B5EF4-FFF2-40B4-BE49-F238E27FC236}">
+                <a16:creationId xmlns:a16="http://schemas.microsoft.com/office/drawing/2014/main" id="{CCBA6EE3-80B4-7C7C-1A75-FDCAC047CF81}"/>
+              </a:ext>
+            </a:extLst>
+          </p:cNvPr>
+          <p:cNvSpPr/>
+          <p:nvPr/>
+        </p:nvSpPr>
+        <p:spPr>
+          <a:xfrm>
+            <a:off x="6183088" y="1737555"/>
+            <a:ext cx="901337" cy="888274"/>
+          </a:xfrm>
+          <a:prstGeom prst="ellipse">
+            <a:avLst/>
+          </a:prstGeom>
+          <a:solidFill>
+            <a:srgbClr val="FF0000"/>
+          </a:solidFill>
+          <a:ln>
+            <a:noFill/>
+          </a:ln>
+        </p:spPr>
+        <p:style>
+          <a:lnRef idx="2">
+            <a:schemeClr val="accent1">
+              <a:shade val="15000"/>
+            </a:schemeClr>
+          </a:lnRef>
+          <a:fillRef idx="1">
+            <a:schemeClr val="accent1"/>
+          </a:fillRef>
+          <a:effectRef idx="0">
+            <a:schemeClr val="accent1"/>
+          </a:effectRef>
+          <a:fontRef idx="minor">
+            <a:schemeClr val="lt1"/>
+          </a:fontRef>
+        </p:style>
+        <p:txBody>
+          <a:bodyPr rtlCol="0" anchor="ctr"/>
+          <a:lstStyle/>
+          <a:p>
+            <a:pPr algn="ctr"/>
+            <a:endParaRPr lang="en-US"/>
+          </a:p>
+        </p:txBody>
+      </p:sp>
+      <p:sp>
+        <p:nvSpPr>
+          <p:cNvPr id="3" name="TextBox 2">
+            <a:extLst>
+              <a:ext uri="{FF2B5EF4-FFF2-40B4-BE49-F238E27FC236}">
+                <a16:creationId xmlns:a16="http://schemas.microsoft.com/office/drawing/2014/main" id="{C53B216C-8C98-A33D-0B07-A8F00229337B}"/>
+              </a:ext>
+            </a:extLst>
+          </p:cNvPr>
+          <p:cNvSpPr txBox="1"/>
+          <p:nvPr/>
+        </p:nvSpPr>
+        <p:spPr>
+          <a:xfrm>
+            <a:off x="5844534" y="1201782"/>
+            <a:ext cx="1239891" cy="553998"/>
+          </a:xfrm>
+          <a:prstGeom prst="rect">
+            <a:avLst/>
+          </a:prstGeom>
+          <a:noFill/>
+        </p:spPr>
+        <p:txBody>
+          <a:bodyPr wrap="none" rtlCol="0">
+            <a:spAutoFit/>
+          </a:bodyPr>
+          <a:lstStyle/>
+          <a:p>
+            <a:r>
+              <a:rPr lang="en-US" sz="3000" dirty="0"/>
+              <a:t>Server</a:t>
+            </a:r>
+          </a:p>
+        </p:txBody>
+      </p:sp>
+      <p:sp>
+        <p:nvSpPr>
+          <p:cNvPr id="4" name="Oval 3">
+            <a:extLst>
+              <a:ext uri="{FF2B5EF4-FFF2-40B4-BE49-F238E27FC236}">
+                <a16:creationId xmlns:a16="http://schemas.microsoft.com/office/drawing/2014/main" id="{84A15F72-1E09-B5EF-D994-3884138E4974}"/>
+              </a:ext>
+            </a:extLst>
+          </p:cNvPr>
+          <p:cNvSpPr/>
+          <p:nvPr/>
+        </p:nvSpPr>
+        <p:spPr>
+          <a:xfrm>
+            <a:off x="4236720" y="4332106"/>
+            <a:ext cx="901337" cy="888274"/>
+          </a:xfrm>
+          <a:prstGeom prst="ellipse">
+            <a:avLst/>
+          </a:prstGeom>
+          <a:solidFill>
+            <a:srgbClr val="7030A0"/>
+          </a:solidFill>
+          <a:ln>
+            <a:noFill/>
+          </a:ln>
+        </p:spPr>
+        <p:style>
+          <a:lnRef idx="2">
+            <a:schemeClr val="accent1">
+              <a:shade val="15000"/>
+            </a:schemeClr>
+          </a:lnRef>
+          <a:fillRef idx="1">
+            <a:schemeClr val="accent1"/>
+          </a:fillRef>
+          <a:effectRef idx="0">
+            <a:schemeClr val="accent1"/>
+          </a:effectRef>
+          <a:fontRef idx="minor">
+            <a:schemeClr val="lt1"/>
+          </a:fontRef>
+        </p:style>
+        <p:txBody>
+          <a:bodyPr rtlCol="0" anchor="ctr"/>
+          <a:lstStyle/>
+          <a:p>
+            <a:pPr algn="ctr"/>
+            <a:endParaRPr lang="en-US"/>
+          </a:p>
+        </p:txBody>
+      </p:sp>
+      <p:sp>
+        <p:nvSpPr>
+          <p:cNvPr id="6" name="TextBox 5">
+            <a:extLst>
+              <a:ext uri="{FF2B5EF4-FFF2-40B4-BE49-F238E27FC236}">
+                <a16:creationId xmlns:a16="http://schemas.microsoft.com/office/drawing/2014/main" id="{B5E4A01B-B7FB-BF8C-2FB7-80B8A6CDE669}"/>
+              </a:ext>
+            </a:extLst>
+          </p:cNvPr>
+          <p:cNvSpPr txBox="1"/>
+          <p:nvPr/>
+        </p:nvSpPr>
+        <p:spPr>
+          <a:xfrm>
+            <a:off x="4183808" y="5238604"/>
+            <a:ext cx="1180131" cy="1015663"/>
+          </a:xfrm>
+          <a:prstGeom prst="rect">
+            <a:avLst/>
+          </a:prstGeom>
+          <a:noFill/>
+        </p:spPr>
+        <p:txBody>
+          <a:bodyPr wrap="none" rtlCol="0">
+            <a:spAutoFit/>
+          </a:bodyPr>
+          <a:lstStyle/>
+          <a:p>
+            <a:pPr algn="ctr"/>
+            <a:r>
+              <a:rPr lang="en-US" sz="3000" dirty="0"/>
+              <a:t>Client</a:t>
+            </a:r>
+            <a:br>
+              <a:rPr lang="en-US" sz="3000" dirty="0"/>
+            </a:br>
+            <a:r>
+              <a:rPr lang="en-US" sz="3000" dirty="0"/>
+              <a:t>1</a:t>
+            </a:r>
+          </a:p>
+        </p:txBody>
+      </p:sp>
+      <p:sp>
+        <p:nvSpPr>
+          <p:cNvPr id="5" name="Oval 4">
+            <a:extLst>
+              <a:ext uri="{FF2B5EF4-FFF2-40B4-BE49-F238E27FC236}">
+                <a16:creationId xmlns:a16="http://schemas.microsoft.com/office/drawing/2014/main" id="{F76A8F01-4F4E-FD58-407B-486E14DB92D5}"/>
+              </a:ext>
+            </a:extLst>
+          </p:cNvPr>
+          <p:cNvSpPr/>
+          <p:nvPr/>
+        </p:nvSpPr>
+        <p:spPr>
+          <a:xfrm>
+            <a:off x="5645331" y="4332106"/>
+            <a:ext cx="901337" cy="888274"/>
+          </a:xfrm>
+          <a:prstGeom prst="ellipse">
+            <a:avLst/>
+          </a:prstGeom>
+          <a:solidFill>
+            <a:srgbClr val="7030A0"/>
+          </a:solidFill>
+          <a:ln>
+            <a:noFill/>
+          </a:ln>
+        </p:spPr>
+        <p:style>
+          <a:lnRef idx="2">
+            <a:schemeClr val="accent1">
+              <a:shade val="15000"/>
+            </a:schemeClr>
+          </a:lnRef>
+          <a:fillRef idx="1">
+            <a:schemeClr val="accent1"/>
+          </a:fillRef>
+          <a:effectRef idx="0">
+            <a:schemeClr val="accent1"/>
+          </a:effectRef>
+          <a:fontRef idx="minor">
+            <a:schemeClr val="lt1"/>
+          </a:fontRef>
+        </p:style>
+        <p:txBody>
+          <a:bodyPr rtlCol="0" anchor="ctr"/>
+          <a:lstStyle/>
+          <a:p>
+            <a:pPr algn="ctr"/>
+            <a:endParaRPr lang="en-US"/>
+          </a:p>
+        </p:txBody>
+      </p:sp>
+      <p:sp>
+        <p:nvSpPr>
+          <p:cNvPr id="10" name="Oval 9">
+            <a:extLst>
+              <a:ext uri="{FF2B5EF4-FFF2-40B4-BE49-F238E27FC236}">
+                <a16:creationId xmlns:a16="http://schemas.microsoft.com/office/drawing/2014/main" id="{7D6B3EC0-216F-51C5-48E9-5B7D8EF9D662}"/>
+              </a:ext>
+            </a:extLst>
+          </p:cNvPr>
+          <p:cNvSpPr/>
+          <p:nvPr/>
+        </p:nvSpPr>
+        <p:spPr>
+          <a:xfrm>
+            <a:off x="7990540" y="4332106"/>
+            <a:ext cx="901337" cy="888274"/>
+          </a:xfrm>
+          <a:prstGeom prst="ellipse">
+            <a:avLst/>
+          </a:prstGeom>
+          <a:solidFill>
+            <a:srgbClr val="7030A0"/>
+          </a:solidFill>
+          <a:ln>
+            <a:noFill/>
+          </a:ln>
+        </p:spPr>
+        <p:style>
+          <a:lnRef idx="2">
+            <a:schemeClr val="accent1">
+              <a:shade val="15000"/>
+            </a:schemeClr>
+          </a:lnRef>
+          <a:fillRef idx="1">
+            <a:schemeClr val="accent1"/>
+          </a:fillRef>
+          <a:effectRef idx="0">
+            <a:schemeClr val="accent1"/>
+          </a:effectRef>
+          <a:fontRef idx="minor">
+            <a:schemeClr val="lt1"/>
+          </a:fontRef>
+        </p:style>
+        <p:txBody>
+          <a:bodyPr rtlCol="0" anchor="ctr"/>
+          <a:lstStyle/>
+          <a:p>
+            <a:pPr algn="ctr"/>
+            <a:endParaRPr lang="en-US"/>
+          </a:p>
+        </p:txBody>
+      </p:sp>
+      <p:cxnSp>
+        <p:nvCxnSpPr>
+          <p:cNvPr id="13" name="Straight Connector 12">
+            <a:extLst>
+              <a:ext uri="{FF2B5EF4-FFF2-40B4-BE49-F238E27FC236}">
+                <a16:creationId xmlns:a16="http://schemas.microsoft.com/office/drawing/2014/main" id="{AF37B989-4F63-9656-1096-6E4DC99977A6}"/>
+              </a:ext>
+            </a:extLst>
+          </p:cNvPr>
+          <p:cNvCxnSpPr/>
+          <p:nvPr/>
+        </p:nvCxnSpPr>
+        <p:spPr>
+          <a:xfrm>
+            <a:off x="6772550" y="4820194"/>
+            <a:ext cx="921473" cy="0"/>
+          </a:xfrm>
+          <a:prstGeom prst="line">
+            <a:avLst/>
+          </a:prstGeom>
+          <a:ln w="73025">
+            <a:solidFill>
+              <a:srgbClr val="7030A0"/>
+            </a:solidFill>
+            <a:prstDash val="sysDot"/>
+          </a:ln>
+        </p:spPr>
+        <p:style>
+          <a:lnRef idx="2">
+            <a:schemeClr val="accent1"/>
+          </a:lnRef>
+          <a:fillRef idx="0">
+            <a:schemeClr val="accent1"/>
+          </a:fillRef>
+          <a:effectRef idx="1">
+            <a:schemeClr val="accent1"/>
+          </a:effectRef>
+          <a:fontRef idx="minor">
+            <a:schemeClr val="tx1"/>
+          </a:fontRef>
+        </p:style>
+      </p:cxnSp>
+      <p:sp>
+        <p:nvSpPr>
+          <p:cNvPr id="14" name="TextBox 13">
+            <a:extLst>
+              <a:ext uri="{FF2B5EF4-FFF2-40B4-BE49-F238E27FC236}">
+                <a16:creationId xmlns:a16="http://schemas.microsoft.com/office/drawing/2014/main" id="{45960A08-4CA2-03E1-E3B8-0CB551BEE301}"/>
+              </a:ext>
+            </a:extLst>
+          </p:cNvPr>
+          <p:cNvSpPr txBox="1"/>
+          <p:nvPr/>
+        </p:nvSpPr>
+        <p:spPr>
+          <a:xfrm>
+            <a:off x="5505933" y="5238604"/>
+            <a:ext cx="1180131" cy="1015663"/>
+          </a:xfrm>
+          <a:prstGeom prst="rect">
+            <a:avLst/>
+          </a:prstGeom>
+          <a:noFill/>
+        </p:spPr>
+        <p:txBody>
+          <a:bodyPr wrap="none" rtlCol="0">
+            <a:spAutoFit/>
+          </a:bodyPr>
+          <a:lstStyle/>
+          <a:p>
+            <a:pPr algn="ctr"/>
+            <a:r>
+              <a:rPr lang="en-US" sz="3000" dirty="0"/>
+              <a:t>Client</a:t>
+            </a:r>
+            <a:br>
+              <a:rPr lang="en-US" sz="3000" dirty="0"/>
+            </a:br>
+            <a:r>
+              <a:rPr lang="en-US" sz="3000" dirty="0"/>
+              <a:t>2</a:t>
+            </a:r>
+          </a:p>
+        </p:txBody>
+      </p:sp>
+      <p:sp>
+        <p:nvSpPr>
+          <p:cNvPr id="15" name="TextBox 14">
+            <a:extLst>
+              <a:ext uri="{FF2B5EF4-FFF2-40B4-BE49-F238E27FC236}">
+                <a16:creationId xmlns:a16="http://schemas.microsoft.com/office/drawing/2014/main" id="{D51F54EF-6EC2-3665-B9C0-DDBFC6FBF13B}"/>
+              </a:ext>
+            </a:extLst>
+          </p:cNvPr>
+          <p:cNvSpPr txBox="1"/>
+          <p:nvPr/>
+        </p:nvSpPr>
+        <p:spPr>
+          <a:xfrm>
+            <a:off x="7851142" y="5238604"/>
+            <a:ext cx="1180131" cy="1015663"/>
+          </a:xfrm>
+          <a:prstGeom prst="rect">
+            <a:avLst/>
+          </a:prstGeom>
+          <a:noFill/>
+        </p:spPr>
+        <p:txBody>
+          <a:bodyPr wrap="none" rtlCol="0">
+            <a:spAutoFit/>
+          </a:bodyPr>
+          <a:lstStyle/>
+          <a:p>
+            <a:pPr algn="ctr"/>
+            <a:r>
+              <a:rPr lang="en-US" sz="3000" dirty="0"/>
+              <a:t>Client</a:t>
+            </a:r>
+            <a:br>
+              <a:rPr lang="en-US" sz="3000" dirty="0"/>
+            </a:br>
+            <a:r>
+              <a:rPr lang="en-US" sz="3000" dirty="0"/>
+              <a:t>n</a:t>
+            </a:r>
+          </a:p>
+        </p:txBody>
+      </p:sp>
+      <p:cxnSp>
+        <p:nvCxnSpPr>
+          <p:cNvPr id="8" name="Straight Connector 7">
+            <a:extLst>
+              <a:ext uri="{FF2B5EF4-FFF2-40B4-BE49-F238E27FC236}">
+                <a16:creationId xmlns:a16="http://schemas.microsoft.com/office/drawing/2014/main" id="{7F46326F-B42F-09AC-29F7-05609C09F5DC}"/>
+              </a:ext>
+            </a:extLst>
+          </p:cNvPr>
+          <p:cNvCxnSpPr>
+            <a:cxnSpLocks/>
+          </p:cNvCxnSpPr>
+          <p:nvPr/>
+        </p:nvCxnSpPr>
+        <p:spPr>
+          <a:xfrm flipH="1">
+            <a:off x="4898571" y="2625829"/>
+            <a:ext cx="1648097" cy="1706277"/>
+          </a:xfrm>
+          <a:prstGeom prst="line">
+            <a:avLst/>
+          </a:prstGeom>
+          <a:ln w="73025">
+            <a:solidFill>
+              <a:schemeClr val="tx1"/>
+            </a:solidFill>
+          </a:ln>
+        </p:spPr>
+        <p:style>
+          <a:lnRef idx="2">
+            <a:schemeClr val="accent1"/>
+          </a:lnRef>
+          <a:fillRef idx="0">
+            <a:schemeClr val="accent1"/>
+          </a:fillRef>
+          <a:effectRef idx="1">
+            <a:schemeClr val="accent1"/>
+          </a:effectRef>
+          <a:fontRef idx="minor">
+            <a:schemeClr val="tx1"/>
+          </a:fontRef>
+        </p:style>
+      </p:cxnSp>
+      <p:sp>
+        <p:nvSpPr>
+          <p:cNvPr id="11" name="TextBox 10">
+            <a:extLst>
+              <a:ext uri="{FF2B5EF4-FFF2-40B4-BE49-F238E27FC236}">
+                <a16:creationId xmlns:a16="http://schemas.microsoft.com/office/drawing/2014/main" id="{6F0017D1-AF53-F59D-E0BF-82AD02E5705A}"/>
+              </a:ext>
+            </a:extLst>
+          </p:cNvPr>
+          <p:cNvSpPr txBox="1"/>
+          <p:nvPr/>
+        </p:nvSpPr>
+        <p:spPr>
+          <a:xfrm>
+            <a:off x="3816350" y="2924970"/>
+            <a:ext cx="2028184" cy="553998"/>
+          </a:xfrm>
+          <a:prstGeom prst="rect">
+            <a:avLst/>
+          </a:prstGeom>
+          <a:noFill/>
+        </p:spPr>
+        <p:txBody>
+          <a:bodyPr wrap="none" rtlCol="0">
+            <a:spAutoFit/>
+          </a:bodyPr>
+          <a:lstStyle/>
+          <a:p>
+            <a:r>
+              <a:rPr lang="en-US" sz="3000" dirty="0"/>
+              <a:t>Latency = x</a:t>
+            </a:r>
+          </a:p>
+        </p:txBody>
+      </p:sp>
+      <p:cxnSp>
+        <p:nvCxnSpPr>
+          <p:cNvPr id="7" name="Straight Connector 6">
+            <a:extLst>
+              <a:ext uri="{FF2B5EF4-FFF2-40B4-BE49-F238E27FC236}">
+                <a16:creationId xmlns:a16="http://schemas.microsoft.com/office/drawing/2014/main" id="{6882A26D-9AD0-F761-DD5F-1B6F1A0FB528}"/>
+              </a:ext>
+            </a:extLst>
+          </p:cNvPr>
+          <p:cNvCxnSpPr>
+            <a:cxnSpLocks/>
+            <a:stCxn id="2" idx="4"/>
+            <a:endCxn id="5" idx="0"/>
+          </p:cNvCxnSpPr>
+          <p:nvPr/>
+        </p:nvCxnSpPr>
+        <p:spPr>
+          <a:xfrm flipH="1">
+            <a:off x="6096000" y="2625829"/>
+            <a:ext cx="537757" cy="1706277"/>
+          </a:xfrm>
+          <a:prstGeom prst="line">
+            <a:avLst/>
+          </a:prstGeom>
+          <a:ln w="73025">
+            <a:solidFill>
+              <a:schemeClr val="tx1"/>
+            </a:solidFill>
+          </a:ln>
+        </p:spPr>
+        <p:style>
+          <a:lnRef idx="2">
+            <a:schemeClr val="accent1"/>
+          </a:lnRef>
+          <a:fillRef idx="0">
+            <a:schemeClr val="accent1"/>
+          </a:fillRef>
+          <a:effectRef idx="1">
+            <a:schemeClr val="accent1"/>
+          </a:effectRef>
+          <a:fontRef idx="minor">
+            <a:schemeClr val="tx1"/>
+          </a:fontRef>
+        </p:style>
+      </p:cxnSp>
+      <p:cxnSp>
+        <p:nvCxnSpPr>
+          <p:cNvPr id="19" name="Straight Connector 18">
+            <a:extLst>
+              <a:ext uri="{FF2B5EF4-FFF2-40B4-BE49-F238E27FC236}">
+                <a16:creationId xmlns:a16="http://schemas.microsoft.com/office/drawing/2014/main" id="{049E8D3C-F351-9100-FF50-FB750F36D49B}"/>
+              </a:ext>
+            </a:extLst>
+          </p:cNvPr>
+          <p:cNvCxnSpPr>
+            <a:cxnSpLocks/>
+            <a:stCxn id="2" idx="4"/>
+            <a:endCxn id="10" idx="0"/>
+          </p:cNvCxnSpPr>
+          <p:nvPr/>
+        </p:nvCxnSpPr>
+        <p:spPr>
+          <a:xfrm>
+            <a:off x="6633757" y="2625829"/>
+            <a:ext cx="1807452" cy="1706277"/>
+          </a:xfrm>
+          <a:prstGeom prst="line">
+            <a:avLst/>
+          </a:prstGeom>
+          <a:ln w="73025">
+            <a:solidFill>
+              <a:schemeClr val="tx1"/>
+            </a:solidFill>
+          </a:ln>
+        </p:spPr>
+        <p:style>
+          <a:lnRef idx="2">
+            <a:schemeClr val="accent1"/>
+          </a:lnRef>
+          <a:fillRef idx="0">
+            <a:schemeClr val="accent1"/>
+          </a:fillRef>
+          <a:effectRef idx="1">
+            <a:schemeClr val="accent1"/>
+          </a:effectRef>
+          <a:fontRef idx="minor">
+            <a:schemeClr val="tx1"/>
+          </a:fontRef>
+        </p:style>
+      </p:cxnSp>
+      <p:sp>
+        <p:nvSpPr>
+          <p:cNvPr id="22" name="TextBox 21">
+            <a:extLst>
+              <a:ext uri="{FF2B5EF4-FFF2-40B4-BE49-F238E27FC236}">
+                <a16:creationId xmlns:a16="http://schemas.microsoft.com/office/drawing/2014/main" id="{67DD44FF-CE97-2CB1-9C9D-896046234F7B}"/>
+              </a:ext>
+            </a:extLst>
+          </p:cNvPr>
+          <p:cNvSpPr txBox="1"/>
+          <p:nvPr/>
+        </p:nvSpPr>
+        <p:spPr>
+          <a:xfrm>
+            <a:off x="5962244" y="3351539"/>
+            <a:ext cx="354584" cy="553998"/>
+          </a:xfrm>
+          <a:prstGeom prst="rect">
+            <a:avLst/>
+          </a:prstGeom>
+          <a:noFill/>
+        </p:spPr>
+        <p:txBody>
+          <a:bodyPr wrap="none" rtlCol="0">
+            <a:spAutoFit/>
+          </a:bodyPr>
+          <a:lstStyle/>
+          <a:p>
+            <a:r>
+              <a:rPr lang="en-US" sz="3000" dirty="0"/>
+              <a:t>x</a:t>
+            </a:r>
+          </a:p>
+        </p:txBody>
+      </p:sp>
+      <p:sp>
+        <p:nvSpPr>
+          <p:cNvPr id="23" name="TextBox 22">
+            <a:extLst>
+              <a:ext uri="{FF2B5EF4-FFF2-40B4-BE49-F238E27FC236}">
+                <a16:creationId xmlns:a16="http://schemas.microsoft.com/office/drawing/2014/main" id="{AD108A5D-E1CA-683A-2BFF-9C7FB884DFA4}"/>
+              </a:ext>
+            </a:extLst>
+          </p:cNvPr>
+          <p:cNvSpPr txBox="1"/>
+          <p:nvPr/>
+        </p:nvSpPr>
+        <p:spPr>
+          <a:xfrm>
+            <a:off x="7231651" y="3351539"/>
+            <a:ext cx="354584" cy="553998"/>
+          </a:xfrm>
+          <a:prstGeom prst="rect">
+            <a:avLst/>
+          </a:prstGeom>
+          <a:noFill/>
+        </p:spPr>
+        <p:txBody>
+          <a:bodyPr wrap="none" rtlCol="0">
+            <a:spAutoFit/>
+          </a:bodyPr>
+          <a:lstStyle/>
+          <a:p>
+            <a:r>
+              <a:rPr lang="en-US" sz="3000" dirty="0"/>
+              <a:t>x</a:t>
+            </a:r>
+          </a:p>
+        </p:txBody>
+      </p:sp>
+    </p:spTree>
+    <p:extLst>
+      <p:ext uri="{BB962C8B-B14F-4D97-AF65-F5344CB8AC3E}">
+        <p14:creationId xmlns:p14="http://schemas.microsoft.com/office/powerpoint/2010/main" val="3086061470"/>
+      </p:ext>
+    </p:extLst>
+  </p:cSld>
+  <p:clrMapOvr>
+    <a:masterClrMapping/>
+  </p:clrMapOvr>
+  <mc:AlternateContent xmlns:mc="http://schemas.openxmlformats.org/markup-compatibility/2006">
+    <mc:Choice xmlns:p159="http://schemas.microsoft.com/office/powerpoint/2015/09/main" Requires="p159">
+      <p:transition spd="med">
+        <p159:morph option="byWord"/>
       </p:transition>
     </mc:Choice>
     <mc:Fallback>

--- a/thesis-latency-fairness.pptx
+++ b/thesis-latency-fairness.pptx
@@ -11,6 +11,8 @@
     <p:sldId id="260" r:id="rId5"/>
     <p:sldId id="261" r:id="rId6"/>
     <p:sldId id="262" r:id="rId7"/>
+    <p:sldId id="263" r:id="rId8"/>
+    <p:sldId id="264" r:id="rId9"/>
   </p:sldIdLst>
   <p:sldSz cx="12192000" cy="6858000"/>
   <p:notesSz cx="6858000" cy="9144000"/>
@@ -777,7 +779,7 @@
           <a:lstStyle/>
           <a:p>
             <a:r>
-              <a:rPr lang="en-US"/>
+              <a:rPr lang="en-US" dirty="0"/>
               <a:t>Click to edit Master title style</a:t>
             </a:r>
           </a:p>
@@ -2795,7 +2797,7 @@
           <a:lstStyle/>
           <a:p>
             <a:r>
-              <a:rPr lang="en-US"/>
+              <a:rPr lang="en-US" dirty="0"/>
               <a:t>Click to edit Master title style</a:t>
             </a:r>
           </a:p>
@@ -2834,35 +2836,35 @@
           <a:p>
             <a:pPr lvl="0"/>
             <a:r>
-              <a:rPr lang="en-US"/>
+              <a:rPr lang="en-US" dirty="0"/>
               <a:t>Click to edit Master text styles</a:t>
             </a:r>
           </a:p>
           <a:p>
             <a:pPr lvl="1"/>
             <a:r>
-              <a:rPr lang="en-US"/>
+              <a:rPr lang="en-US" dirty="0"/>
               <a:t>Second level</a:t>
             </a:r>
           </a:p>
           <a:p>
             <a:pPr lvl="2"/>
             <a:r>
-              <a:rPr lang="en-US"/>
+              <a:rPr lang="en-US" dirty="0"/>
               <a:t>Third level</a:t>
             </a:r>
           </a:p>
           <a:p>
             <a:pPr lvl="3"/>
             <a:r>
-              <a:rPr lang="en-US"/>
+              <a:rPr lang="en-US" dirty="0"/>
               <a:t>Fourth level</a:t>
             </a:r>
           </a:p>
           <a:p>
             <a:pPr lvl="4"/>
             <a:r>
-              <a:rPr lang="en-US"/>
+              <a:rPr lang="en-US" dirty="0"/>
               <a:t>Fifth level</a:t>
             </a:r>
           </a:p>
@@ -2903,12 +2905,15 @@
                     <a:tint val="82000"/>
                   </a:schemeClr>
                 </a:solidFill>
+                <a:latin typeface="Times New Roman" panose="02020603050405020304" pitchFamily="18" charset="0"/>
+                <a:cs typeface="Times New Roman" panose="02020603050405020304" pitchFamily="18" charset="0"/>
               </a:defRPr>
             </a:lvl1pPr>
           </a:lstStyle>
           <a:p>
             <a:fld id="{D76E4002-9283-1F4C-A40A-752C4DF2EDD0}" type="datetimeFigureOut">
               <a:rPr lang="en-US" smtClean="0"/>
+              <a:pPr/>
               <a:t>4/4/26</a:t>
             </a:fld>
             <a:endParaRPr lang="en-US"/>
@@ -2950,6 +2955,8 @@
                     <a:tint val="82000"/>
                   </a:schemeClr>
                 </a:solidFill>
+                <a:latin typeface="Times New Roman" panose="02020603050405020304" pitchFamily="18" charset="0"/>
+                <a:cs typeface="Times New Roman" panose="02020603050405020304" pitchFamily="18" charset="0"/>
               </a:defRPr>
             </a:lvl1pPr>
           </a:lstStyle>
@@ -2993,12 +3000,15 @@
                     <a:tint val="82000"/>
                   </a:schemeClr>
                 </a:solidFill>
+                <a:latin typeface="Times New Roman" panose="02020603050405020304" pitchFamily="18" charset="0"/>
+                <a:cs typeface="Times New Roman" panose="02020603050405020304" pitchFamily="18" charset="0"/>
               </a:defRPr>
             </a:lvl1pPr>
           </a:lstStyle>
           <a:p>
             <a:fld id="{EC77079B-D8A8-4C4F-BE5B-5250A28F918D}" type="slidenum">
               <a:rPr lang="en-US" smtClean="0"/>
+              <a:pPr/>
               <a:t>‹#›</a:t>
             </a:fld>
             <a:endParaRPr lang="en-US"/>
@@ -3040,9 +3050,9 @@
           <a:solidFill>
             <a:schemeClr val="tx1"/>
           </a:solidFill>
-          <a:latin typeface="+mj-lt"/>
+          <a:latin typeface="Times New Roman" panose="02020603050405020304" pitchFamily="18" charset="0"/>
           <a:ea typeface="+mj-ea"/>
-          <a:cs typeface="+mj-cs"/>
+          <a:cs typeface="Times New Roman" panose="02020603050405020304" pitchFamily="18" charset="0"/>
         </a:defRPr>
       </a:lvl1pPr>
     </p:titleStyle>
@@ -3060,9 +3070,9 @@
           <a:solidFill>
             <a:schemeClr val="tx1"/>
           </a:solidFill>
-          <a:latin typeface="+mn-lt"/>
+          <a:latin typeface="Times New Roman" panose="02020603050405020304" pitchFamily="18" charset="0"/>
           <a:ea typeface="+mn-ea"/>
-          <a:cs typeface="+mn-cs"/>
+          <a:cs typeface="Times New Roman" panose="02020603050405020304" pitchFamily="18" charset="0"/>
         </a:defRPr>
       </a:lvl1pPr>
       <a:lvl2pPr marL="685800" indent="-228600" algn="l" defTabSz="914400" rtl="0" eaLnBrk="1" latinLnBrk="0" hangingPunct="1">
@@ -3078,9 +3088,9 @@
           <a:solidFill>
             <a:schemeClr val="tx1"/>
           </a:solidFill>
-          <a:latin typeface="+mn-lt"/>
+          <a:latin typeface="Times New Roman" panose="02020603050405020304" pitchFamily="18" charset="0"/>
           <a:ea typeface="+mn-ea"/>
-          <a:cs typeface="+mn-cs"/>
+          <a:cs typeface="Times New Roman" panose="02020603050405020304" pitchFamily="18" charset="0"/>
         </a:defRPr>
       </a:lvl2pPr>
       <a:lvl3pPr marL="1143000" indent="-228600" algn="l" defTabSz="914400" rtl="0" eaLnBrk="1" latinLnBrk="0" hangingPunct="1">
@@ -3096,9 +3106,9 @@
           <a:solidFill>
             <a:schemeClr val="tx1"/>
           </a:solidFill>
-          <a:latin typeface="+mn-lt"/>
+          <a:latin typeface="Times New Roman" panose="02020603050405020304" pitchFamily="18" charset="0"/>
           <a:ea typeface="+mn-ea"/>
-          <a:cs typeface="+mn-cs"/>
+          <a:cs typeface="Times New Roman" panose="02020603050405020304" pitchFamily="18" charset="0"/>
         </a:defRPr>
       </a:lvl3pPr>
       <a:lvl4pPr marL="1600200" indent="-228600" algn="l" defTabSz="914400" rtl="0" eaLnBrk="1" latinLnBrk="0" hangingPunct="1">
@@ -3114,9 +3124,9 @@
           <a:solidFill>
             <a:schemeClr val="tx1"/>
           </a:solidFill>
-          <a:latin typeface="+mn-lt"/>
+          <a:latin typeface="Times New Roman" panose="02020603050405020304" pitchFamily="18" charset="0"/>
           <a:ea typeface="+mn-ea"/>
-          <a:cs typeface="+mn-cs"/>
+          <a:cs typeface="Times New Roman" panose="02020603050405020304" pitchFamily="18" charset="0"/>
         </a:defRPr>
       </a:lvl4pPr>
       <a:lvl5pPr marL="2057400" indent="-228600" algn="l" defTabSz="914400" rtl="0" eaLnBrk="1" latinLnBrk="0" hangingPunct="1">
@@ -3132,9 +3142,9 @@
           <a:solidFill>
             <a:schemeClr val="tx1"/>
           </a:solidFill>
-          <a:latin typeface="+mn-lt"/>
+          <a:latin typeface="Times New Roman" panose="02020603050405020304" pitchFamily="18" charset="0"/>
           <a:ea typeface="+mn-ea"/>
-          <a:cs typeface="+mn-cs"/>
+          <a:cs typeface="Times New Roman" panose="02020603050405020304" pitchFamily="18" charset="0"/>
         </a:defRPr>
       </a:lvl5pPr>
       <a:lvl6pPr marL="2514600" indent="-228600" algn="l" defTabSz="914400" rtl="0" eaLnBrk="1" latinLnBrk="0" hangingPunct="1">
@@ -4699,7 +4709,10 @@
           <a:lstStyle/>
           <a:p>
             <a:pPr algn="ctr"/>
-            <a:endParaRPr lang="en-US"/>
+            <a:endParaRPr lang="en-US">
+              <a:latin typeface="Times New Roman" panose="02020603050405020304" pitchFamily="18" charset="0"/>
+              <a:cs typeface="Times New Roman" panose="02020603050405020304" pitchFamily="18" charset="0"/>
+            </a:endParaRPr>
           </a:p>
         </p:txBody>
       </p:sp>
@@ -4718,7 +4731,7 @@
         <p:spPr>
           <a:xfrm>
             <a:off x="5844534" y="1201782"/>
-            <a:ext cx="1239891" cy="553998"/>
+            <a:ext cx="1189749" cy="553998"/>
           </a:xfrm>
           <a:prstGeom prst="rect">
             <a:avLst/>
@@ -4732,7 +4745,10 @@
           <a:lstStyle/>
           <a:p>
             <a:r>
-              <a:rPr lang="en-US" sz="3000" dirty="0"/>
+              <a:rPr lang="en-US" sz="3000" dirty="0">
+                <a:latin typeface="Times New Roman" panose="02020603050405020304" pitchFamily="18" charset="0"/>
+                <a:cs typeface="Times New Roman" panose="02020603050405020304" pitchFamily="18" charset="0"/>
+              </a:rPr>
               <a:t>Server</a:t>
             </a:r>
           </a:p>
@@ -4786,7 +4802,10 @@
           <a:lstStyle/>
           <a:p>
             <a:pPr algn="ctr"/>
-            <a:endParaRPr lang="en-US"/>
+            <a:endParaRPr lang="en-US">
+              <a:latin typeface="Times New Roman" panose="02020603050405020304" pitchFamily="18" charset="0"/>
+              <a:cs typeface="Times New Roman" panose="02020603050405020304" pitchFamily="18" charset="0"/>
+            </a:endParaRPr>
           </a:p>
         </p:txBody>
       </p:sp>
@@ -4804,8 +4823,8 @@
         </p:nvSpPr>
         <p:spPr>
           <a:xfrm>
-            <a:off x="4183808" y="5238604"/>
-            <a:ext cx="1180131" cy="1015663"/>
+            <a:off x="4007479" y="5238604"/>
+            <a:ext cx="1532791" cy="1015663"/>
           </a:xfrm>
           <a:prstGeom prst="rect">
             <a:avLst/>
@@ -4820,14 +4839,23 @@
           <a:p>
             <a:pPr algn="ctr"/>
             <a:r>
-              <a:rPr lang="en-US" sz="3000" dirty="0"/>
-              <a:t>Client</a:t>
+              <a:rPr lang="en-US" sz="3000" dirty="0">
+                <a:latin typeface="Times New Roman" panose="02020603050405020304" pitchFamily="18" charset="0"/>
+                <a:cs typeface="Times New Roman" panose="02020603050405020304" pitchFamily="18" charset="0"/>
+              </a:rPr>
+              <a:t>Machine</a:t>
             </a:r>
             <a:br>
-              <a:rPr lang="en-US" sz="3000" dirty="0"/>
+              <a:rPr lang="en-US" sz="3000" dirty="0">
+                <a:latin typeface="Times New Roman" panose="02020603050405020304" pitchFamily="18" charset="0"/>
+                <a:cs typeface="Times New Roman" panose="02020603050405020304" pitchFamily="18" charset="0"/>
+              </a:rPr>
             </a:br>
             <a:r>
-              <a:rPr lang="en-US" sz="3000" dirty="0"/>
+              <a:rPr lang="en-US" sz="3000" dirty="0">
+                <a:latin typeface="Times New Roman" panose="02020603050405020304" pitchFamily="18" charset="0"/>
+                <a:cs typeface="Times New Roman" panose="02020603050405020304" pitchFamily="18" charset="0"/>
+              </a:rPr>
               <a:t>1</a:t>
             </a:r>
           </a:p>
@@ -4881,7 +4909,10 @@
           <a:lstStyle/>
           <a:p>
             <a:pPr algn="ctr"/>
-            <a:endParaRPr lang="en-US"/>
+            <a:endParaRPr lang="en-US">
+              <a:latin typeface="Times New Roman" panose="02020603050405020304" pitchFamily="18" charset="0"/>
+              <a:cs typeface="Times New Roman" panose="02020603050405020304" pitchFamily="18" charset="0"/>
+            </a:endParaRPr>
           </a:p>
         </p:txBody>
       </p:sp>
@@ -4933,7 +4964,10 @@
           <a:lstStyle/>
           <a:p>
             <a:pPr algn="ctr"/>
-            <a:endParaRPr lang="en-US"/>
+            <a:endParaRPr lang="en-US">
+              <a:latin typeface="Times New Roman" panose="02020603050405020304" pitchFamily="18" charset="0"/>
+              <a:cs typeface="Times New Roman" panose="02020603050405020304" pitchFamily="18" charset="0"/>
+            </a:endParaRPr>
           </a:p>
         </p:txBody>
       </p:sp>
@@ -4993,8 +5027,8 @@
         </p:nvSpPr>
         <p:spPr>
           <a:xfrm>
-            <a:off x="5505933" y="5238604"/>
-            <a:ext cx="1180131" cy="1015663"/>
+            <a:off x="5620421" y="5274843"/>
+            <a:ext cx="1532791" cy="1015663"/>
           </a:xfrm>
           <a:prstGeom prst="rect">
             <a:avLst/>
@@ -5009,14 +5043,23 @@
           <a:p>
             <a:pPr algn="ctr"/>
             <a:r>
-              <a:rPr lang="en-US" sz="3000" dirty="0"/>
-              <a:t>Client</a:t>
+              <a:rPr lang="en-US" sz="3000" dirty="0">
+                <a:latin typeface="Times New Roman" panose="02020603050405020304" pitchFamily="18" charset="0"/>
+                <a:cs typeface="Times New Roman" panose="02020603050405020304" pitchFamily="18" charset="0"/>
+              </a:rPr>
+              <a:t>Machine</a:t>
             </a:r>
             <a:br>
-              <a:rPr lang="en-US" sz="3000" dirty="0"/>
+              <a:rPr lang="en-US" sz="3000" dirty="0">
+                <a:latin typeface="Times New Roman" panose="02020603050405020304" pitchFamily="18" charset="0"/>
+                <a:cs typeface="Times New Roman" panose="02020603050405020304" pitchFamily="18" charset="0"/>
+              </a:rPr>
             </a:br>
             <a:r>
-              <a:rPr lang="en-US" sz="3000" dirty="0"/>
+              <a:rPr lang="en-US" sz="3000" dirty="0">
+                <a:latin typeface="Times New Roman" panose="02020603050405020304" pitchFamily="18" charset="0"/>
+                <a:cs typeface="Times New Roman" panose="02020603050405020304" pitchFamily="18" charset="0"/>
+              </a:rPr>
               <a:t>2</a:t>
             </a:r>
           </a:p>
@@ -5036,8 +5079,8 @@
         </p:nvSpPr>
         <p:spPr>
           <a:xfrm>
-            <a:off x="7851142" y="5238604"/>
-            <a:ext cx="1180131" cy="1015663"/>
+            <a:off x="7674812" y="5238604"/>
+            <a:ext cx="1532791" cy="1015663"/>
           </a:xfrm>
           <a:prstGeom prst="rect">
             <a:avLst/>
@@ -5052,14 +5095,23 @@
           <a:p>
             <a:pPr algn="ctr"/>
             <a:r>
-              <a:rPr lang="en-US" sz="3000" dirty="0"/>
-              <a:t>Client</a:t>
+              <a:rPr lang="en-US" sz="3000" dirty="0">
+                <a:latin typeface="Times New Roman" panose="02020603050405020304" pitchFamily="18" charset="0"/>
+                <a:cs typeface="Times New Roman" panose="02020603050405020304" pitchFamily="18" charset="0"/>
+              </a:rPr>
+              <a:t>Machine</a:t>
             </a:r>
             <a:br>
-              <a:rPr lang="en-US" sz="3000" dirty="0"/>
+              <a:rPr lang="en-US" sz="3000" dirty="0">
+                <a:latin typeface="Times New Roman" panose="02020603050405020304" pitchFamily="18" charset="0"/>
+                <a:cs typeface="Times New Roman" panose="02020603050405020304" pitchFamily="18" charset="0"/>
+              </a:rPr>
             </a:br>
             <a:r>
-              <a:rPr lang="en-US" sz="3000" dirty="0"/>
+              <a:rPr lang="en-US" sz="3000" dirty="0">
+                <a:latin typeface="Times New Roman" panose="02020603050405020304" pitchFamily="18" charset="0"/>
+                <a:cs typeface="Times New Roman" panose="02020603050405020304" pitchFamily="18" charset="0"/>
+              </a:rPr>
               <a:t>n</a:t>
             </a:r>
           </a:p>
@@ -5335,7 +5387,10 @@
           <a:lstStyle/>
           <a:p>
             <a:pPr algn="ctr"/>
-            <a:endParaRPr lang="en-US"/>
+            <a:endParaRPr lang="en-US">
+              <a:latin typeface="Times New Roman" panose="02020603050405020304" pitchFamily="18" charset="0"/>
+              <a:cs typeface="Times New Roman" panose="02020603050405020304" pitchFamily="18" charset="0"/>
+            </a:endParaRPr>
           </a:p>
         </p:txBody>
       </p:sp>
@@ -5354,7 +5409,7 @@
         <p:spPr>
           <a:xfrm>
             <a:off x="5844534" y="1201782"/>
-            <a:ext cx="1239891" cy="553998"/>
+            <a:ext cx="1189749" cy="553998"/>
           </a:xfrm>
           <a:prstGeom prst="rect">
             <a:avLst/>
@@ -5368,7 +5423,10 @@
           <a:lstStyle/>
           <a:p>
             <a:r>
-              <a:rPr lang="en-US" sz="3000" dirty="0"/>
+              <a:rPr lang="en-US" sz="3000" dirty="0">
+                <a:latin typeface="Times New Roman" panose="02020603050405020304" pitchFamily="18" charset="0"/>
+                <a:cs typeface="Times New Roman" panose="02020603050405020304" pitchFamily="18" charset="0"/>
+              </a:rPr>
               <a:t>Server</a:t>
             </a:r>
           </a:p>
@@ -5422,50 +5480,10 @@
           <a:lstStyle/>
           <a:p>
             <a:pPr algn="ctr"/>
-            <a:endParaRPr lang="en-US"/>
-          </a:p>
-        </p:txBody>
-      </p:sp>
-      <p:sp>
-        <p:nvSpPr>
-          <p:cNvPr id="6" name="TextBox 5">
-            <a:extLst>
-              <a:ext uri="{FF2B5EF4-FFF2-40B4-BE49-F238E27FC236}">
-                <a16:creationId xmlns:a16="http://schemas.microsoft.com/office/drawing/2014/main" id="{B8EE590D-9C9E-C2DD-77B5-CF92E14F7043}"/>
-              </a:ext>
-            </a:extLst>
-          </p:cNvPr>
-          <p:cNvSpPr txBox="1"/>
-          <p:nvPr/>
-        </p:nvSpPr>
-        <p:spPr>
-          <a:xfrm>
-            <a:off x="4183808" y="5238604"/>
-            <a:ext cx="1180131" cy="1015663"/>
-          </a:xfrm>
-          <a:prstGeom prst="rect">
-            <a:avLst/>
-          </a:prstGeom>
-          <a:noFill/>
-        </p:spPr>
-        <p:txBody>
-          <a:bodyPr wrap="none" rtlCol="0">
-            <a:spAutoFit/>
-          </a:bodyPr>
-          <a:lstStyle/>
-          <a:p>
-            <a:pPr algn="ctr"/>
-            <a:r>
-              <a:rPr lang="en-US" sz="3000" dirty="0"/>
-              <a:t>Client</a:t>
-            </a:r>
-            <a:br>
-              <a:rPr lang="en-US" sz="3000" dirty="0"/>
-            </a:br>
-            <a:r>
-              <a:rPr lang="en-US" sz="3000" dirty="0"/>
-              <a:t>1</a:t>
-            </a:r>
+            <a:endParaRPr lang="en-US">
+              <a:latin typeface="Times New Roman" panose="02020603050405020304" pitchFamily="18" charset="0"/>
+              <a:cs typeface="Times New Roman" panose="02020603050405020304" pitchFamily="18" charset="0"/>
+            </a:endParaRPr>
           </a:p>
         </p:txBody>
       </p:sp>
@@ -5517,7 +5535,10 @@
           <a:lstStyle/>
           <a:p>
             <a:pPr algn="ctr"/>
-            <a:endParaRPr lang="en-US"/>
+            <a:endParaRPr lang="en-US">
+              <a:latin typeface="Times New Roman" panose="02020603050405020304" pitchFamily="18" charset="0"/>
+              <a:cs typeface="Times New Roman" panose="02020603050405020304" pitchFamily="18" charset="0"/>
+            </a:endParaRPr>
           </a:p>
         </p:txBody>
       </p:sp>
@@ -5569,7 +5590,10 @@
           <a:lstStyle/>
           <a:p>
             <a:pPr algn="ctr"/>
-            <a:endParaRPr lang="en-US"/>
+            <a:endParaRPr lang="en-US">
+              <a:latin typeface="Times New Roman" panose="02020603050405020304" pitchFamily="18" charset="0"/>
+              <a:cs typeface="Times New Roman" panose="02020603050405020304" pitchFamily="18" charset="0"/>
+            </a:endParaRPr>
           </a:p>
         </p:txBody>
       </p:sp>
@@ -5615,92 +5639,6 @@
           </a:fontRef>
         </p:style>
       </p:cxnSp>
-      <p:sp>
-        <p:nvSpPr>
-          <p:cNvPr id="14" name="TextBox 13">
-            <a:extLst>
-              <a:ext uri="{FF2B5EF4-FFF2-40B4-BE49-F238E27FC236}">
-                <a16:creationId xmlns:a16="http://schemas.microsoft.com/office/drawing/2014/main" id="{B4E9B50D-C071-5793-712C-B19353E0DDFE}"/>
-              </a:ext>
-            </a:extLst>
-          </p:cNvPr>
-          <p:cNvSpPr txBox="1"/>
-          <p:nvPr/>
-        </p:nvSpPr>
-        <p:spPr>
-          <a:xfrm>
-            <a:off x="5505933" y="5238604"/>
-            <a:ext cx="1180131" cy="1015663"/>
-          </a:xfrm>
-          <a:prstGeom prst="rect">
-            <a:avLst/>
-          </a:prstGeom>
-          <a:noFill/>
-        </p:spPr>
-        <p:txBody>
-          <a:bodyPr wrap="none" rtlCol="0">
-            <a:spAutoFit/>
-          </a:bodyPr>
-          <a:lstStyle/>
-          <a:p>
-            <a:pPr algn="ctr"/>
-            <a:r>
-              <a:rPr lang="en-US" sz="3000" dirty="0"/>
-              <a:t>Client</a:t>
-            </a:r>
-            <a:br>
-              <a:rPr lang="en-US" sz="3000" dirty="0"/>
-            </a:br>
-            <a:r>
-              <a:rPr lang="en-US" sz="3000" dirty="0"/>
-              <a:t>2</a:t>
-            </a:r>
-          </a:p>
-        </p:txBody>
-      </p:sp>
-      <p:sp>
-        <p:nvSpPr>
-          <p:cNvPr id="15" name="TextBox 14">
-            <a:extLst>
-              <a:ext uri="{FF2B5EF4-FFF2-40B4-BE49-F238E27FC236}">
-                <a16:creationId xmlns:a16="http://schemas.microsoft.com/office/drawing/2014/main" id="{783BCA47-097F-7595-4EC8-D901F77AFE42}"/>
-              </a:ext>
-            </a:extLst>
-          </p:cNvPr>
-          <p:cNvSpPr txBox="1"/>
-          <p:nvPr/>
-        </p:nvSpPr>
-        <p:spPr>
-          <a:xfrm>
-            <a:off x="7851142" y="5238604"/>
-            <a:ext cx="1180131" cy="1015663"/>
-          </a:xfrm>
-          <a:prstGeom prst="rect">
-            <a:avLst/>
-          </a:prstGeom>
-          <a:noFill/>
-        </p:spPr>
-        <p:txBody>
-          <a:bodyPr wrap="none" rtlCol="0">
-            <a:spAutoFit/>
-          </a:bodyPr>
-          <a:lstStyle/>
-          <a:p>
-            <a:pPr algn="ctr"/>
-            <a:r>
-              <a:rPr lang="en-US" sz="3000" dirty="0"/>
-              <a:t>Client</a:t>
-            </a:r>
-            <a:br>
-              <a:rPr lang="en-US" sz="3000" dirty="0"/>
-            </a:br>
-            <a:r>
-              <a:rPr lang="en-US" sz="3000" dirty="0"/>
-              <a:t>n</a:t>
-            </a:r>
-          </a:p>
-        </p:txBody>
-      </p:sp>
       <p:cxnSp>
         <p:nvCxnSpPr>
           <p:cNvPr id="8" name="Straight Connector 7">
@@ -5773,8 +5711,167 @@
           <a:lstStyle/>
           <a:p>
             <a:r>
-              <a:rPr lang="en-US" sz="3000" dirty="0"/>
+              <a:rPr lang="en-US" sz="3000" dirty="0">
+                <a:latin typeface="Times New Roman" panose="02020603050405020304" pitchFamily="18" charset="0"/>
+                <a:cs typeface="Times New Roman" panose="02020603050405020304" pitchFamily="18" charset="0"/>
+              </a:rPr>
               <a:t>Latency = x</a:t>
+            </a:r>
+          </a:p>
+        </p:txBody>
+      </p:sp>
+      <p:sp>
+        <p:nvSpPr>
+          <p:cNvPr id="12" name="TextBox 11">
+            <a:extLst>
+              <a:ext uri="{FF2B5EF4-FFF2-40B4-BE49-F238E27FC236}">
+                <a16:creationId xmlns:a16="http://schemas.microsoft.com/office/drawing/2014/main" id="{B81E5939-12FA-CE10-B388-A106748BD7CB}"/>
+              </a:ext>
+            </a:extLst>
+          </p:cNvPr>
+          <p:cNvSpPr txBox="1"/>
+          <p:nvPr/>
+        </p:nvSpPr>
+        <p:spPr>
+          <a:xfrm>
+            <a:off x="4007479" y="5238604"/>
+            <a:ext cx="1532791" cy="1015663"/>
+          </a:xfrm>
+          <a:prstGeom prst="rect">
+            <a:avLst/>
+          </a:prstGeom>
+          <a:noFill/>
+        </p:spPr>
+        <p:txBody>
+          <a:bodyPr wrap="none" rtlCol="0">
+            <a:spAutoFit/>
+          </a:bodyPr>
+          <a:lstStyle/>
+          <a:p>
+            <a:pPr algn="ctr"/>
+            <a:r>
+              <a:rPr lang="en-US" sz="3000" dirty="0">
+                <a:latin typeface="Times New Roman" panose="02020603050405020304" pitchFamily="18" charset="0"/>
+                <a:cs typeface="Times New Roman" panose="02020603050405020304" pitchFamily="18" charset="0"/>
+              </a:rPr>
+              <a:t>Machine</a:t>
+            </a:r>
+            <a:br>
+              <a:rPr lang="en-US" sz="3000" dirty="0">
+                <a:latin typeface="Times New Roman" panose="02020603050405020304" pitchFamily="18" charset="0"/>
+                <a:cs typeface="Times New Roman" panose="02020603050405020304" pitchFamily="18" charset="0"/>
+              </a:rPr>
+            </a:br>
+            <a:r>
+              <a:rPr lang="en-US" sz="3000" dirty="0">
+                <a:latin typeface="Times New Roman" panose="02020603050405020304" pitchFamily="18" charset="0"/>
+                <a:cs typeface="Times New Roman" panose="02020603050405020304" pitchFamily="18" charset="0"/>
+              </a:rPr>
+              <a:t>1</a:t>
+            </a:r>
+          </a:p>
+        </p:txBody>
+      </p:sp>
+      <p:sp>
+        <p:nvSpPr>
+          <p:cNvPr id="19" name="TextBox 18">
+            <a:extLst>
+              <a:ext uri="{FF2B5EF4-FFF2-40B4-BE49-F238E27FC236}">
+                <a16:creationId xmlns:a16="http://schemas.microsoft.com/office/drawing/2014/main" id="{72FB38A1-9623-97A0-250D-AB35EF8DADC2}"/>
+              </a:ext>
+            </a:extLst>
+          </p:cNvPr>
+          <p:cNvSpPr txBox="1"/>
+          <p:nvPr/>
+        </p:nvSpPr>
+        <p:spPr>
+          <a:xfrm>
+            <a:off x="5620421" y="5274843"/>
+            <a:ext cx="1532791" cy="1015663"/>
+          </a:xfrm>
+          <a:prstGeom prst="rect">
+            <a:avLst/>
+          </a:prstGeom>
+          <a:noFill/>
+        </p:spPr>
+        <p:txBody>
+          <a:bodyPr wrap="none" rtlCol="0">
+            <a:spAutoFit/>
+          </a:bodyPr>
+          <a:lstStyle/>
+          <a:p>
+            <a:pPr algn="ctr"/>
+            <a:r>
+              <a:rPr lang="en-US" sz="3000" dirty="0">
+                <a:latin typeface="Times New Roman" panose="02020603050405020304" pitchFamily="18" charset="0"/>
+                <a:cs typeface="Times New Roman" panose="02020603050405020304" pitchFamily="18" charset="0"/>
+              </a:rPr>
+              <a:t>Machine</a:t>
+            </a:r>
+            <a:br>
+              <a:rPr lang="en-US" sz="3000" dirty="0">
+                <a:latin typeface="Times New Roman" panose="02020603050405020304" pitchFamily="18" charset="0"/>
+                <a:cs typeface="Times New Roman" panose="02020603050405020304" pitchFamily="18" charset="0"/>
+              </a:rPr>
+            </a:br>
+            <a:r>
+              <a:rPr lang="en-US" sz="3000" dirty="0">
+                <a:latin typeface="Times New Roman" panose="02020603050405020304" pitchFamily="18" charset="0"/>
+                <a:cs typeface="Times New Roman" panose="02020603050405020304" pitchFamily="18" charset="0"/>
+              </a:rPr>
+              <a:t>2</a:t>
+            </a:r>
+          </a:p>
+        </p:txBody>
+      </p:sp>
+      <p:sp>
+        <p:nvSpPr>
+          <p:cNvPr id="20" name="TextBox 19">
+            <a:extLst>
+              <a:ext uri="{FF2B5EF4-FFF2-40B4-BE49-F238E27FC236}">
+                <a16:creationId xmlns:a16="http://schemas.microsoft.com/office/drawing/2014/main" id="{E47BD87B-5E1F-B131-B8C7-252A6C7C6C19}"/>
+              </a:ext>
+            </a:extLst>
+          </p:cNvPr>
+          <p:cNvSpPr txBox="1"/>
+          <p:nvPr/>
+        </p:nvSpPr>
+        <p:spPr>
+          <a:xfrm>
+            <a:off x="7674812" y="5238604"/>
+            <a:ext cx="1532791" cy="1015663"/>
+          </a:xfrm>
+          <a:prstGeom prst="rect">
+            <a:avLst/>
+          </a:prstGeom>
+          <a:noFill/>
+        </p:spPr>
+        <p:txBody>
+          <a:bodyPr wrap="none" rtlCol="0">
+            <a:spAutoFit/>
+          </a:bodyPr>
+          <a:lstStyle/>
+          <a:p>
+            <a:pPr algn="ctr"/>
+            <a:r>
+              <a:rPr lang="en-US" sz="3000" dirty="0">
+                <a:latin typeface="Times New Roman" panose="02020603050405020304" pitchFamily="18" charset="0"/>
+                <a:cs typeface="Times New Roman" panose="02020603050405020304" pitchFamily="18" charset="0"/>
+              </a:rPr>
+              <a:t>Machine</a:t>
+            </a:r>
+            <a:br>
+              <a:rPr lang="en-US" sz="3000" dirty="0">
+                <a:latin typeface="Times New Roman" panose="02020603050405020304" pitchFamily="18" charset="0"/>
+                <a:cs typeface="Times New Roman" panose="02020603050405020304" pitchFamily="18" charset="0"/>
+              </a:rPr>
+            </a:br>
+            <a:r>
+              <a:rPr lang="en-US" sz="3000" dirty="0">
+                <a:latin typeface="Times New Roman" panose="02020603050405020304" pitchFamily="18" charset="0"/>
+                <a:cs typeface="Times New Roman" panose="02020603050405020304" pitchFamily="18" charset="0"/>
+              </a:rPr>
+              <a:t>n</a:t>
             </a:r>
           </a:p>
         </p:txBody>
@@ -6049,7 +6146,10 @@
           <a:lstStyle/>
           <a:p>
             <a:pPr algn="ctr"/>
-            <a:endParaRPr lang="en-US"/>
+            <a:endParaRPr lang="en-US">
+              <a:latin typeface="Times New Roman" panose="02020603050405020304" pitchFamily="18" charset="0"/>
+              <a:cs typeface="Times New Roman" panose="02020603050405020304" pitchFamily="18" charset="0"/>
+            </a:endParaRPr>
           </a:p>
         </p:txBody>
       </p:sp>
@@ -6068,7 +6168,7 @@
         <p:spPr>
           <a:xfrm>
             <a:off x="5844534" y="1201782"/>
-            <a:ext cx="1239891" cy="553998"/>
+            <a:ext cx="1189749" cy="553998"/>
           </a:xfrm>
           <a:prstGeom prst="rect">
             <a:avLst/>
@@ -6082,7 +6182,10 @@
           <a:lstStyle/>
           <a:p>
             <a:r>
-              <a:rPr lang="en-US" sz="3000" dirty="0"/>
+              <a:rPr lang="en-US" sz="3000" dirty="0">
+                <a:latin typeface="Times New Roman" panose="02020603050405020304" pitchFamily="18" charset="0"/>
+                <a:cs typeface="Times New Roman" panose="02020603050405020304" pitchFamily="18" charset="0"/>
+              </a:rPr>
               <a:t>Server</a:t>
             </a:r>
           </a:p>
@@ -6136,50 +6239,10 @@
           <a:lstStyle/>
           <a:p>
             <a:pPr algn="ctr"/>
-            <a:endParaRPr lang="en-US"/>
-          </a:p>
-        </p:txBody>
-      </p:sp>
-      <p:sp>
-        <p:nvSpPr>
-          <p:cNvPr id="6" name="TextBox 5">
-            <a:extLst>
-              <a:ext uri="{FF2B5EF4-FFF2-40B4-BE49-F238E27FC236}">
-                <a16:creationId xmlns:a16="http://schemas.microsoft.com/office/drawing/2014/main" id="{B5E4A01B-B7FB-BF8C-2FB7-80B8A6CDE669}"/>
-              </a:ext>
-            </a:extLst>
-          </p:cNvPr>
-          <p:cNvSpPr txBox="1"/>
-          <p:nvPr/>
-        </p:nvSpPr>
-        <p:spPr>
-          <a:xfrm>
-            <a:off x="4183808" y="5238604"/>
-            <a:ext cx="1180131" cy="1015663"/>
-          </a:xfrm>
-          <a:prstGeom prst="rect">
-            <a:avLst/>
-          </a:prstGeom>
-          <a:noFill/>
-        </p:spPr>
-        <p:txBody>
-          <a:bodyPr wrap="none" rtlCol="0">
-            <a:spAutoFit/>
-          </a:bodyPr>
-          <a:lstStyle/>
-          <a:p>
-            <a:pPr algn="ctr"/>
-            <a:r>
-              <a:rPr lang="en-US" sz="3000" dirty="0"/>
-              <a:t>Client</a:t>
-            </a:r>
-            <a:br>
-              <a:rPr lang="en-US" sz="3000" dirty="0"/>
-            </a:br>
-            <a:r>
-              <a:rPr lang="en-US" sz="3000" dirty="0"/>
-              <a:t>1</a:t>
-            </a:r>
+            <a:endParaRPr lang="en-US">
+              <a:latin typeface="Times New Roman" panose="02020603050405020304" pitchFamily="18" charset="0"/>
+              <a:cs typeface="Times New Roman" panose="02020603050405020304" pitchFamily="18" charset="0"/>
+            </a:endParaRPr>
           </a:p>
         </p:txBody>
       </p:sp>
@@ -6231,7 +6294,10 @@
           <a:lstStyle/>
           <a:p>
             <a:pPr algn="ctr"/>
-            <a:endParaRPr lang="en-US"/>
+            <a:endParaRPr lang="en-US">
+              <a:latin typeface="Times New Roman" panose="02020603050405020304" pitchFamily="18" charset="0"/>
+              <a:cs typeface="Times New Roman" panose="02020603050405020304" pitchFamily="18" charset="0"/>
+            </a:endParaRPr>
           </a:p>
         </p:txBody>
       </p:sp>
@@ -6283,7 +6349,10 @@
           <a:lstStyle/>
           <a:p>
             <a:pPr algn="ctr"/>
-            <a:endParaRPr lang="en-US"/>
+            <a:endParaRPr lang="en-US">
+              <a:latin typeface="Times New Roman" panose="02020603050405020304" pitchFamily="18" charset="0"/>
+              <a:cs typeface="Times New Roman" panose="02020603050405020304" pitchFamily="18" charset="0"/>
+            </a:endParaRPr>
           </a:p>
         </p:txBody>
       </p:sp>
@@ -6329,92 +6398,6 @@
           </a:fontRef>
         </p:style>
       </p:cxnSp>
-      <p:sp>
-        <p:nvSpPr>
-          <p:cNvPr id="14" name="TextBox 13">
-            <a:extLst>
-              <a:ext uri="{FF2B5EF4-FFF2-40B4-BE49-F238E27FC236}">
-                <a16:creationId xmlns:a16="http://schemas.microsoft.com/office/drawing/2014/main" id="{45960A08-4CA2-03E1-E3B8-0CB551BEE301}"/>
-              </a:ext>
-            </a:extLst>
-          </p:cNvPr>
-          <p:cNvSpPr txBox="1"/>
-          <p:nvPr/>
-        </p:nvSpPr>
-        <p:spPr>
-          <a:xfrm>
-            <a:off x="5505933" y="5238604"/>
-            <a:ext cx="1180131" cy="1015663"/>
-          </a:xfrm>
-          <a:prstGeom prst="rect">
-            <a:avLst/>
-          </a:prstGeom>
-          <a:noFill/>
-        </p:spPr>
-        <p:txBody>
-          <a:bodyPr wrap="none" rtlCol="0">
-            <a:spAutoFit/>
-          </a:bodyPr>
-          <a:lstStyle/>
-          <a:p>
-            <a:pPr algn="ctr"/>
-            <a:r>
-              <a:rPr lang="en-US" sz="3000" dirty="0"/>
-              <a:t>Client</a:t>
-            </a:r>
-            <a:br>
-              <a:rPr lang="en-US" sz="3000" dirty="0"/>
-            </a:br>
-            <a:r>
-              <a:rPr lang="en-US" sz="3000" dirty="0"/>
-              <a:t>2</a:t>
-            </a:r>
-          </a:p>
-        </p:txBody>
-      </p:sp>
-      <p:sp>
-        <p:nvSpPr>
-          <p:cNvPr id="15" name="TextBox 14">
-            <a:extLst>
-              <a:ext uri="{FF2B5EF4-FFF2-40B4-BE49-F238E27FC236}">
-                <a16:creationId xmlns:a16="http://schemas.microsoft.com/office/drawing/2014/main" id="{D51F54EF-6EC2-3665-B9C0-DDBFC6FBF13B}"/>
-              </a:ext>
-            </a:extLst>
-          </p:cNvPr>
-          <p:cNvSpPr txBox="1"/>
-          <p:nvPr/>
-        </p:nvSpPr>
-        <p:spPr>
-          <a:xfrm>
-            <a:off x="7851142" y="5238604"/>
-            <a:ext cx="1180131" cy="1015663"/>
-          </a:xfrm>
-          <a:prstGeom prst="rect">
-            <a:avLst/>
-          </a:prstGeom>
-          <a:noFill/>
-        </p:spPr>
-        <p:txBody>
-          <a:bodyPr wrap="none" rtlCol="0">
-            <a:spAutoFit/>
-          </a:bodyPr>
-          <a:lstStyle/>
-          <a:p>
-            <a:pPr algn="ctr"/>
-            <a:r>
-              <a:rPr lang="en-US" sz="3000" dirty="0"/>
-              <a:t>Client</a:t>
-            </a:r>
-            <a:br>
-              <a:rPr lang="en-US" sz="3000" dirty="0"/>
-            </a:br>
-            <a:r>
-              <a:rPr lang="en-US" sz="3000" dirty="0"/>
-              <a:t>n</a:t>
-            </a:r>
-          </a:p>
-        </p:txBody>
-      </p:sp>
       <p:cxnSp>
         <p:nvCxnSpPr>
           <p:cNvPr id="8" name="Straight Connector 7">
@@ -6487,7 +6470,10 @@
           <a:lstStyle/>
           <a:p>
             <a:r>
-              <a:rPr lang="en-US" sz="3000" dirty="0"/>
+              <a:rPr lang="en-US" sz="3000" dirty="0">
+                <a:latin typeface="Times New Roman" panose="02020603050405020304" pitchFamily="18" charset="0"/>
+                <a:cs typeface="Times New Roman" panose="02020603050405020304" pitchFamily="18" charset="0"/>
+              </a:rPr>
               <a:t>Latency = x</a:t>
             </a:r>
           </a:p>
@@ -6598,7 +6584,7 @@
         <p:spPr>
           <a:xfrm>
             <a:off x="5962244" y="3351539"/>
-            <a:ext cx="354584" cy="553998"/>
+            <a:ext cx="377026" cy="553998"/>
           </a:xfrm>
           <a:prstGeom prst="rect">
             <a:avLst/>
@@ -6612,7 +6598,10 @@
           <a:lstStyle/>
           <a:p>
             <a:r>
-              <a:rPr lang="en-US" sz="3000" dirty="0"/>
+              <a:rPr lang="en-US" sz="3000" dirty="0">
+                <a:latin typeface="Times New Roman" panose="02020603050405020304" pitchFamily="18" charset="0"/>
+                <a:cs typeface="Times New Roman" panose="02020603050405020304" pitchFamily="18" charset="0"/>
+              </a:rPr>
               <a:t>x</a:t>
             </a:r>
           </a:p>
@@ -6633,7 +6622,7 @@
         <p:spPr>
           <a:xfrm>
             <a:off x="7231651" y="3351539"/>
-            <a:ext cx="354584" cy="553998"/>
+            <a:ext cx="377026" cy="553998"/>
           </a:xfrm>
           <a:prstGeom prst="rect">
             <a:avLst/>
@@ -6647,8 +6636,167 @@
           <a:lstStyle/>
           <a:p>
             <a:r>
-              <a:rPr lang="en-US" sz="3000" dirty="0"/>
+              <a:rPr lang="en-US" sz="3000" dirty="0">
+                <a:latin typeface="Times New Roman" panose="02020603050405020304" pitchFamily="18" charset="0"/>
+                <a:cs typeface="Times New Roman" panose="02020603050405020304" pitchFamily="18" charset="0"/>
+              </a:rPr>
               <a:t>x</a:t>
+            </a:r>
+          </a:p>
+        </p:txBody>
+      </p:sp>
+      <p:sp>
+        <p:nvSpPr>
+          <p:cNvPr id="24" name="TextBox 23">
+            <a:extLst>
+              <a:ext uri="{FF2B5EF4-FFF2-40B4-BE49-F238E27FC236}">
+                <a16:creationId xmlns:a16="http://schemas.microsoft.com/office/drawing/2014/main" id="{2391C58C-24F7-1099-CC70-0D8346E614DA}"/>
+              </a:ext>
+            </a:extLst>
+          </p:cNvPr>
+          <p:cNvSpPr txBox="1"/>
+          <p:nvPr/>
+        </p:nvSpPr>
+        <p:spPr>
+          <a:xfrm>
+            <a:off x="4007479" y="5238604"/>
+            <a:ext cx="1532791" cy="1015663"/>
+          </a:xfrm>
+          <a:prstGeom prst="rect">
+            <a:avLst/>
+          </a:prstGeom>
+          <a:noFill/>
+        </p:spPr>
+        <p:txBody>
+          <a:bodyPr wrap="none" rtlCol="0">
+            <a:spAutoFit/>
+          </a:bodyPr>
+          <a:lstStyle/>
+          <a:p>
+            <a:pPr algn="ctr"/>
+            <a:r>
+              <a:rPr lang="en-US" sz="3000" dirty="0">
+                <a:latin typeface="Times New Roman" panose="02020603050405020304" pitchFamily="18" charset="0"/>
+                <a:cs typeface="Times New Roman" panose="02020603050405020304" pitchFamily="18" charset="0"/>
+              </a:rPr>
+              <a:t>Machine</a:t>
+            </a:r>
+            <a:br>
+              <a:rPr lang="en-US" sz="3000" dirty="0">
+                <a:latin typeface="Times New Roman" panose="02020603050405020304" pitchFamily="18" charset="0"/>
+                <a:cs typeface="Times New Roman" panose="02020603050405020304" pitchFamily="18" charset="0"/>
+              </a:rPr>
+            </a:br>
+            <a:r>
+              <a:rPr lang="en-US" sz="3000" dirty="0">
+                <a:latin typeface="Times New Roman" panose="02020603050405020304" pitchFamily="18" charset="0"/>
+                <a:cs typeface="Times New Roman" panose="02020603050405020304" pitchFamily="18" charset="0"/>
+              </a:rPr>
+              <a:t>1</a:t>
+            </a:r>
+          </a:p>
+        </p:txBody>
+      </p:sp>
+      <p:sp>
+        <p:nvSpPr>
+          <p:cNvPr id="25" name="TextBox 24">
+            <a:extLst>
+              <a:ext uri="{FF2B5EF4-FFF2-40B4-BE49-F238E27FC236}">
+                <a16:creationId xmlns:a16="http://schemas.microsoft.com/office/drawing/2014/main" id="{6DE4AA79-253F-0A70-F589-4CB54928CDB3}"/>
+              </a:ext>
+            </a:extLst>
+          </p:cNvPr>
+          <p:cNvSpPr txBox="1"/>
+          <p:nvPr/>
+        </p:nvSpPr>
+        <p:spPr>
+          <a:xfrm>
+            <a:off x="5620421" y="5274843"/>
+            <a:ext cx="1532791" cy="1015663"/>
+          </a:xfrm>
+          <a:prstGeom prst="rect">
+            <a:avLst/>
+          </a:prstGeom>
+          <a:noFill/>
+        </p:spPr>
+        <p:txBody>
+          <a:bodyPr wrap="none" rtlCol="0">
+            <a:spAutoFit/>
+          </a:bodyPr>
+          <a:lstStyle/>
+          <a:p>
+            <a:pPr algn="ctr"/>
+            <a:r>
+              <a:rPr lang="en-US" sz="3000" dirty="0">
+                <a:latin typeface="Times New Roman" panose="02020603050405020304" pitchFamily="18" charset="0"/>
+                <a:cs typeface="Times New Roman" panose="02020603050405020304" pitchFamily="18" charset="0"/>
+              </a:rPr>
+              <a:t>Machine</a:t>
+            </a:r>
+            <a:br>
+              <a:rPr lang="en-US" sz="3000" dirty="0">
+                <a:latin typeface="Times New Roman" panose="02020603050405020304" pitchFamily="18" charset="0"/>
+                <a:cs typeface="Times New Roman" panose="02020603050405020304" pitchFamily="18" charset="0"/>
+              </a:rPr>
+            </a:br>
+            <a:r>
+              <a:rPr lang="en-US" sz="3000" dirty="0">
+                <a:latin typeface="Times New Roman" panose="02020603050405020304" pitchFamily="18" charset="0"/>
+                <a:cs typeface="Times New Roman" panose="02020603050405020304" pitchFamily="18" charset="0"/>
+              </a:rPr>
+              <a:t>2</a:t>
+            </a:r>
+          </a:p>
+        </p:txBody>
+      </p:sp>
+      <p:sp>
+        <p:nvSpPr>
+          <p:cNvPr id="26" name="TextBox 25">
+            <a:extLst>
+              <a:ext uri="{FF2B5EF4-FFF2-40B4-BE49-F238E27FC236}">
+                <a16:creationId xmlns:a16="http://schemas.microsoft.com/office/drawing/2014/main" id="{8D9094E4-F048-C5EE-41E2-6258F9F01387}"/>
+              </a:ext>
+            </a:extLst>
+          </p:cNvPr>
+          <p:cNvSpPr txBox="1"/>
+          <p:nvPr/>
+        </p:nvSpPr>
+        <p:spPr>
+          <a:xfrm>
+            <a:off x="7674812" y="5238604"/>
+            <a:ext cx="1532791" cy="1015663"/>
+          </a:xfrm>
+          <a:prstGeom prst="rect">
+            <a:avLst/>
+          </a:prstGeom>
+          <a:noFill/>
+        </p:spPr>
+        <p:txBody>
+          <a:bodyPr wrap="none" rtlCol="0">
+            <a:spAutoFit/>
+          </a:bodyPr>
+          <a:lstStyle/>
+          <a:p>
+            <a:pPr algn="ctr"/>
+            <a:r>
+              <a:rPr lang="en-US" sz="3000" dirty="0">
+                <a:latin typeface="Times New Roman" panose="02020603050405020304" pitchFamily="18" charset="0"/>
+                <a:cs typeface="Times New Roman" panose="02020603050405020304" pitchFamily="18" charset="0"/>
+              </a:rPr>
+              <a:t>Machine</a:t>
+            </a:r>
+            <a:br>
+              <a:rPr lang="en-US" sz="3000" dirty="0">
+                <a:latin typeface="Times New Roman" panose="02020603050405020304" pitchFamily="18" charset="0"/>
+                <a:cs typeface="Times New Roman" panose="02020603050405020304" pitchFamily="18" charset="0"/>
+              </a:rPr>
+            </a:br>
+            <a:r>
+              <a:rPr lang="en-US" sz="3000" dirty="0">
+                <a:latin typeface="Times New Roman" panose="02020603050405020304" pitchFamily="18" charset="0"/>
+                <a:cs typeface="Times New Roman" panose="02020603050405020304" pitchFamily="18" charset="0"/>
+              </a:rPr>
+              <a:t>n</a:t>
             </a:r>
           </a:p>
         </p:txBody>
@@ -6657,6 +6805,1856 @@
     <p:extLst>
       <p:ext uri="{BB962C8B-B14F-4D97-AF65-F5344CB8AC3E}">
         <p14:creationId xmlns:p14="http://schemas.microsoft.com/office/powerpoint/2010/main" val="3086061470"/>
+      </p:ext>
+    </p:extLst>
+  </p:cSld>
+  <p:clrMapOvr>
+    <a:masterClrMapping/>
+  </p:clrMapOvr>
+  <mc:AlternateContent xmlns:mc="http://schemas.openxmlformats.org/markup-compatibility/2006">
+    <mc:Choice xmlns:p159="http://schemas.microsoft.com/office/powerpoint/2015/09/main" Requires="p159">
+      <p:transition spd="med">
+        <p159:morph option="byWord"/>
+      </p:transition>
+    </mc:Choice>
+    <mc:Fallback>
+      <p:transition spd="med">
+        <p:fade/>
+      </p:transition>
+    </mc:Fallback>
+  </mc:AlternateContent>
+</p:sld>
+</file>
+
+<file path=ppt/slides/slide7.xml><?xml version="1.0" encoding="utf-8"?>
+<p:sld xmlns:a="http://schemas.openxmlformats.org/drawingml/2006/main" xmlns:r="http://schemas.openxmlformats.org/officeDocument/2006/relationships" xmlns:p="http://schemas.openxmlformats.org/presentationml/2006/main">
+  <p:cSld>
+    <p:spTree>
+      <p:nvGrpSpPr>
+        <p:cNvPr id="1" name="">
+          <a:extLst>
+            <a:ext uri="{FF2B5EF4-FFF2-40B4-BE49-F238E27FC236}">
+              <a16:creationId xmlns:a16="http://schemas.microsoft.com/office/drawing/2014/main" id="{A8061B84-C3D2-0512-F238-F96AAFC68B60}"/>
+            </a:ext>
+          </a:extLst>
+        </p:cNvPr>
+        <p:cNvGrpSpPr/>
+        <p:nvPr/>
+      </p:nvGrpSpPr>
+      <p:grpSpPr>
+        <a:xfrm>
+          <a:off x="0" y="0"/>
+          <a:ext cx="0" cy="0"/>
+          <a:chOff x="0" y="0"/>
+          <a:chExt cx="0" cy="0"/>
+        </a:xfrm>
+      </p:grpSpPr>
+      <p:sp>
+        <p:nvSpPr>
+          <p:cNvPr id="16" name="Title 1">
+            <a:extLst>
+              <a:ext uri="{FF2B5EF4-FFF2-40B4-BE49-F238E27FC236}">
+                <a16:creationId xmlns:a16="http://schemas.microsoft.com/office/drawing/2014/main" id="{89A92299-5C6B-2398-C237-A0BF53310FEE}"/>
+              </a:ext>
+            </a:extLst>
+          </p:cNvPr>
+          <p:cNvSpPr txBox="1">
+            <a:spLocks/>
+          </p:cNvSpPr>
+          <p:nvPr/>
+        </p:nvSpPr>
+        <p:spPr>
+          <a:xfrm>
+            <a:off x="760549" y="-305842"/>
+            <a:ext cx="5811520" cy="2387600"/>
+          </a:xfrm>
+          <a:prstGeom prst="rect">
+            <a:avLst/>
+          </a:prstGeom>
+        </p:spPr>
+        <p:txBody>
+          <a:bodyPr vert="horz" lIns="91440" tIns="45720" rIns="91440" bIns="45720" rtlCol="0" anchor="ctr">
+            <a:normAutofit/>
+          </a:bodyPr>
+          <a:lstStyle>
+            <a:lvl1pPr algn="l" defTabSz="914400" rtl="0" eaLnBrk="1" latinLnBrk="0" hangingPunct="1">
+              <a:lnSpc>
+                <a:spcPct val="90000"/>
+              </a:lnSpc>
+              <a:spcBef>
+                <a:spcPct val="0"/>
+              </a:spcBef>
+              <a:buNone/>
+              <a:defRPr sz="4400" kern="1200">
+                <a:solidFill>
+                  <a:schemeClr val="tx1"/>
+                </a:solidFill>
+                <a:latin typeface="+mj-lt"/>
+                <a:ea typeface="+mj-ea"/>
+                <a:cs typeface="+mj-cs"/>
+              </a:defRPr>
+            </a:lvl1pPr>
+          </a:lstStyle>
+          <a:p>
+            <a:r>
+              <a:rPr lang="en-US" sz="4000" dirty="0">
+                <a:solidFill>
+                  <a:srgbClr val="7030A0"/>
+                </a:solidFill>
+                <a:latin typeface="Times New Roman" panose="02020603050405020304" pitchFamily="18" charset="0"/>
+                <a:cs typeface="Times New Roman" panose="02020603050405020304" pitchFamily="18" charset="0"/>
+              </a:rPr>
+              <a:t>Latency Fairness</a:t>
+            </a:r>
+          </a:p>
+        </p:txBody>
+      </p:sp>
+      <p:sp>
+        <p:nvSpPr>
+          <p:cNvPr id="17" name="Rectangle 16">
+            <a:extLst>
+              <a:ext uri="{FF2B5EF4-FFF2-40B4-BE49-F238E27FC236}">
+                <a16:creationId xmlns:a16="http://schemas.microsoft.com/office/drawing/2014/main" id="{5FB9B97A-CDEE-A98E-3709-B0D4FE4B63B4}"/>
+              </a:ext>
+            </a:extLst>
+          </p:cNvPr>
+          <p:cNvSpPr/>
+          <p:nvPr/>
+        </p:nvSpPr>
+        <p:spPr>
+          <a:xfrm rot="16200000">
+            <a:off x="2522582" y="-387076"/>
+            <a:ext cx="68673" cy="3246390"/>
+          </a:xfrm>
+          <a:prstGeom prst="rect">
+            <a:avLst/>
+          </a:prstGeom>
+          <a:solidFill>
+            <a:srgbClr val="FF0000"/>
+          </a:solidFill>
+          <a:ln>
+            <a:solidFill>
+              <a:srgbClr val="FF0000"/>
+            </a:solidFill>
+          </a:ln>
+        </p:spPr>
+        <p:style>
+          <a:lnRef idx="2">
+            <a:schemeClr val="accent1">
+              <a:shade val="15000"/>
+            </a:schemeClr>
+          </a:lnRef>
+          <a:fillRef idx="1">
+            <a:schemeClr val="accent1"/>
+          </a:fillRef>
+          <a:effectRef idx="0">
+            <a:schemeClr val="accent1"/>
+          </a:effectRef>
+          <a:fontRef idx="minor">
+            <a:schemeClr val="lt1"/>
+          </a:fontRef>
+        </p:style>
+        <p:txBody>
+          <a:bodyPr rtlCol="0" anchor="ctr"/>
+          <a:lstStyle/>
+          <a:p>
+            <a:pPr algn="ctr"/>
+            <a:endParaRPr lang="en-US">
+              <a:latin typeface="Times New Roman" panose="02020603050405020304" pitchFamily="18" charset="0"/>
+              <a:cs typeface="Times New Roman" panose="02020603050405020304" pitchFamily="18" charset="0"/>
+            </a:endParaRPr>
+          </a:p>
+        </p:txBody>
+      </p:sp>
+      <p:sp>
+        <p:nvSpPr>
+          <p:cNvPr id="18" name="Rectangle 17">
+            <a:extLst>
+              <a:ext uri="{FF2B5EF4-FFF2-40B4-BE49-F238E27FC236}">
+                <a16:creationId xmlns:a16="http://schemas.microsoft.com/office/drawing/2014/main" id="{D3A324CB-1C92-04A0-9C3E-668334A78F8F}"/>
+              </a:ext>
+            </a:extLst>
+          </p:cNvPr>
+          <p:cNvSpPr/>
+          <p:nvPr/>
+        </p:nvSpPr>
+        <p:spPr>
+          <a:xfrm rot="16200000">
+            <a:off x="2522581" y="-318404"/>
+            <a:ext cx="68674" cy="3246390"/>
+          </a:xfrm>
+          <a:prstGeom prst="rect">
+            <a:avLst/>
+          </a:prstGeom>
+          <a:solidFill>
+            <a:srgbClr val="7030A0"/>
+          </a:solidFill>
+          <a:ln>
+            <a:solidFill>
+              <a:srgbClr val="7030A0"/>
+            </a:solidFill>
+          </a:ln>
+        </p:spPr>
+        <p:style>
+          <a:lnRef idx="2">
+            <a:schemeClr val="accent1">
+              <a:shade val="15000"/>
+            </a:schemeClr>
+          </a:lnRef>
+          <a:fillRef idx="1">
+            <a:schemeClr val="accent1"/>
+          </a:fillRef>
+          <a:effectRef idx="0">
+            <a:schemeClr val="accent1"/>
+          </a:effectRef>
+          <a:fontRef idx="minor">
+            <a:schemeClr val="lt1"/>
+          </a:fontRef>
+        </p:style>
+        <p:txBody>
+          <a:bodyPr rtlCol="0" anchor="ctr"/>
+          <a:lstStyle/>
+          <a:p>
+            <a:pPr algn="ctr"/>
+            <a:endParaRPr lang="en-US">
+              <a:latin typeface="Times New Roman" panose="02020603050405020304" pitchFamily="18" charset="0"/>
+              <a:cs typeface="Times New Roman" panose="02020603050405020304" pitchFamily="18" charset="0"/>
+            </a:endParaRPr>
+          </a:p>
+        </p:txBody>
+      </p:sp>
+      <p:sp>
+        <p:nvSpPr>
+          <p:cNvPr id="2" name="Oval 1">
+            <a:extLst>
+              <a:ext uri="{FF2B5EF4-FFF2-40B4-BE49-F238E27FC236}">
+                <a16:creationId xmlns:a16="http://schemas.microsoft.com/office/drawing/2014/main" id="{9B2FE237-FC45-F917-9B03-7B96BE775EF7}"/>
+              </a:ext>
+            </a:extLst>
+          </p:cNvPr>
+          <p:cNvSpPr/>
+          <p:nvPr/>
+        </p:nvSpPr>
+        <p:spPr>
+          <a:xfrm>
+            <a:off x="8497572" y="1737555"/>
+            <a:ext cx="901337" cy="888274"/>
+          </a:xfrm>
+          <a:prstGeom prst="ellipse">
+            <a:avLst/>
+          </a:prstGeom>
+          <a:solidFill>
+            <a:srgbClr val="FF0000"/>
+          </a:solidFill>
+          <a:ln>
+            <a:noFill/>
+          </a:ln>
+        </p:spPr>
+        <p:style>
+          <a:lnRef idx="2">
+            <a:schemeClr val="accent1">
+              <a:shade val="15000"/>
+            </a:schemeClr>
+          </a:lnRef>
+          <a:fillRef idx="1">
+            <a:schemeClr val="accent1"/>
+          </a:fillRef>
+          <a:effectRef idx="0">
+            <a:schemeClr val="accent1"/>
+          </a:effectRef>
+          <a:fontRef idx="minor">
+            <a:schemeClr val="lt1"/>
+          </a:fontRef>
+        </p:style>
+        <p:txBody>
+          <a:bodyPr rtlCol="0" anchor="ctr"/>
+          <a:lstStyle/>
+          <a:p>
+            <a:pPr algn="ctr"/>
+            <a:endParaRPr lang="en-US">
+              <a:latin typeface="Times New Roman" panose="02020603050405020304" pitchFamily="18" charset="0"/>
+              <a:cs typeface="Times New Roman" panose="02020603050405020304" pitchFamily="18" charset="0"/>
+            </a:endParaRPr>
+          </a:p>
+        </p:txBody>
+      </p:sp>
+      <p:sp>
+        <p:nvSpPr>
+          <p:cNvPr id="3" name="TextBox 2">
+            <a:extLst>
+              <a:ext uri="{FF2B5EF4-FFF2-40B4-BE49-F238E27FC236}">
+                <a16:creationId xmlns:a16="http://schemas.microsoft.com/office/drawing/2014/main" id="{3331760F-3F11-E61A-220F-2D9D5F24420C}"/>
+              </a:ext>
+            </a:extLst>
+          </p:cNvPr>
+          <p:cNvSpPr txBox="1"/>
+          <p:nvPr/>
+        </p:nvSpPr>
+        <p:spPr>
+          <a:xfrm>
+            <a:off x="8159018" y="1201782"/>
+            <a:ext cx="1189749" cy="553998"/>
+          </a:xfrm>
+          <a:prstGeom prst="rect">
+            <a:avLst/>
+          </a:prstGeom>
+          <a:noFill/>
+        </p:spPr>
+        <p:txBody>
+          <a:bodyPr wrap="none" rtlCol="0">
+            <a:spAutoFit/>
+          </a:bodyPr>
+          <a:lstStyle/>
+          <a:p>
+            <a:r>
+              <a:rPr lang="en-US" sz="3000" dirty="0">
+                <a:latin typeface="Times New Roman" panose="02020603050405020304" pitchFamily="18" charset="0"/>
+                <a:cs typeface="Times New Roman" panose="02020603050405020304" pitchFamily="18" charset="0"/>
+              </a:rPr>
+              <a:t>Server</a:t>
+            </a:r>
+          </a:p>
+        </p:txBody>
+      </p:sp>
+      <p:sp>
+        <p:nvSpPr>
+          <p:cNvPr id="4" name="Oval 3">
+            <a:extLst>
+              <a:ext uri="{FF2B5EF4-FFF2-40B4-BE49-F238E27FC236}">
+                <a16:creationId xmlns:a16="http://schemas.microsoft.com/office/drawing/2014/main" id="{3E8A4293-5A06-EB17-6909-2373990365BD}"/>
+              </a:ext>
+            </a:extLst>
+          </p:cNvPr>
+          <p:cNvSpPr/>
+          <p:nvPr/>
+        </p:nvSpPr>
+        <p:spPr>
+          <a:xfrm>
+            <a:off x="6551204" y="4332106"/>
+            <a:ext cx="901337" cy="888274"/>
+          </a:xfrm>
+          <a:prstGeom prst="ellipse">
+            <a:avLst/>
+          </a:prstGeom>
+          <a:solidFill>
+            <a:srgbClr val="7030A0"/>
+          </a:solidFill>
+          <a:ln>
+            <a:noFill/>
+          </a:ln>
+        </p:spPr>
+        <p:style>
+          <a:lnRef idx="2">
+            <a:schemeClr val="accent1">
+              <a:shade val="15000"/>
+            </a:schemeClr>
+          </a:lnRef>
+          <a:fillRef idx="1">
+            <a:schemeClr val="accent1"/>
+          </a:fillRef>
+          <a:effectRef idx="0">
+            <a:schemeClr val="accent1"/>
+          </a:effectRef>
+          <a:fontRef idx="minor">
+            <a:schemeClr val="lt1"/>
+          </a:fontRef>
+        </p:style>
+        <p:txBody>
+          <a:bodyPr rtlCol="0" anchor="ctr"/>
+          <a:lstStyle/>
+          <a:p>
+            <a:pPr algn="ctr"/>
+            <a:endParaRPr lang="en-US">
+              <a:latin typeface="Times New Roman" panose="02020603050405020304" pitchFamily="18" charset="0"/>
+              <a:cs typeface="Times New Roman" panose="02020603050405020304" pitchFamily="18" charset="0"/>
+            </a:endParaRPr>
+          </a:p>
+        </p:txBody>
+      </p:sp>
+      <p:sp>
+        <p:nvSpPr>
+          <p:cNvPr id="5" name="Oval 4">
+            <a:extLst>
+              <a:ext uri="{FF2B5EF4-FFF2-40B4-BE49-F238E27FC236}">
+                <a16:creationId xmlns:a16="http://schemas.microsoft.com/office/drawing/2014/main" id="{A57B0007-8C67-8F7C-D173-D267BE3BFEEE}"/>
+              </a:ext>
+            </a:extLst>
+          </p:cNvPr>
+          <p:cNvSpPr/>
+          <p:nvPr/>
+        </p:nvSpPr>
+        <p:spPr>
+          <a:xfrm>
+            <a:off x="7959815" y="4332106"/>
+            <a:ext cx="901337" cy="888274"/>
+          </a:xfrm>
+          <a:prstGeom prst="ellipse">
+            <a:avLst/>
+          </a:prstGeom>
+          <a:solidFill>
+            <a:srgbClr val="7030A0"/>
+          </a:solidFill>
+          <a:ln>
+            <a:noFill/>
+          </a:ln>
+        </p:spPr>
+        <p:style>
+          <a:lnRef idx="2">
+            <a:schemeClr val="accent1">
+              <a:shade val="15000"/>
+            </a:schemeClr>
+          </a:lnRef>
+          <a:fillRef idx="1">
+            <a:schemeClr val="accent1"/>
+          </a:fillRef>
+          <a:effectRef idx="0">
+            <a:schemeClr val="accent1"/>
+          </a:effectRef>
+          <a:fontRef idx="minor">
+            <a:schemeClr val="lt1"/>
+          </a:fontRef>
+        </p:style>
+        <p:txBody>
+          <a:bodyPr rtlCol="0" anchor="ctr"/>
+          <a:lstStyle/>
+          <a:p>
+            <a:pPr algn="ctr"/>
+            <a:endParaRPr lang="en-US">
+              <a:latin typeface="Times New Roman" panose="02020603050405020304" pitchFamily="18" charset="0"/>
+              <a:cs typeface="Times New Roman" panose="02020603050405020304" pitchFamily="18" charset="0"/>
+            </a:endParaRPr>
+          </a:p>
+        </p:txBody>
+      </p:sp>
+      <p:sp>
+        <p:nvSpPr>
+          <p:cNvPr id="10" name="Oval 9">
+            <a:extLst>
+              <a:ext uri="{FF2B5EF4-FFF2-40B4-BE49-F238E27FC236}">
+                <a16:creationId xmlns:a16="http://schemas.microsoft.com/office/drawing/2014/main" id="{55E5BAF8-3640-C46F-75E6-136B6ADA553B}"/>
+              </a:ext>
+            </a:extLst>
+          </p:cNvPr>
+          <p:cNvSpPr/>
+          <p:nvPr/>
+        </p:nvSpPr>
+        <p:spPr>
+          <a:xfrm>
+            <a:off x="10305024" y="4332106"/>
+            <a:ext cx="901337" cy="888274"/>
+          </a:xfrm>
+          <a:prstGeom prst="ellipse">
+            <a:avLst/>
+          </a:prstGeom>
+          <a:solidFill>
+            <a:srgbClr val="7030A0"/>
+          </a:solidFill>
+          <a:ln>
+            <a:noFill/>
+          </a:ln>
+        </p:spPr>
+        <p:style>
+          <a:lnRef idx="2">
+            <a:schemeClr val="accent1">
+              <a:shade val="15000"/>
+            </a:schemeClr>
+          </a:lnRef>
+          <a:fillRef idx="1">
+            <a:schemeClr val="accent1"/>
+          </a:fillRef>
+          <a:effectRef idx="0">
+            <a:schemeClr val="accent1"/>
+          </a:effectRef>
+          <a:fontRef idx="minor">
+            <a:schemeClr val="lt1"/>
+          </a:fontRef>
+        </p:style>
+        <p:txBody>
+          <a:bodyPr rtlCol="0" anchor="ctr"/>
+          <a:lstStyle/>
+          <a:p>
+            <a:pPr algn="ctr"/>
+            <a:endParaRPr lang="en-US">
+              <a:latin typeface="Times New Roman" panose="02020603050405020304" pitchFamily="18" charset="0"/>
+              <a:cs typeface="Times New Roman" panose="02020603050405020304" pitchFamily="18" charset="0"/>
+            </a:endParaRPr>
+          </a:p>
+        </p:txBody>
+      </p:sp>
+      <p:cxnSp>
+        <p:nvCxnSpPr>
+          <p:cNvPr id="13" name="Straight Connector 12">
+            <a:extLst>
+              <a:ext uri="{FF2B5EF4-FFF2-40B4-BE49-F238E27FC236}">
+                <a16:creationId xmlns:a16="http://schemas.microsoft.com/office/drawing/2014/main" id="{35DF2E18-22EB-5F6C-8F04-D8757765A5A5}"/>
+              </a:ext>
+            </a:extLst>
+          </p:cNvPr>
+          <p:cNvCxnSpPr/>
+          <p:nvPr/>
+        </p:nvCxnSpPr>
+        <p:spPr>
+          <a:xfrm>
+            <a:off x="9087034" y="4820194"/>
+            <a:ext cx="921473" cy="0"/>
+          </a:xfrm>
+          <a:prstGeom prst="line">
+            <a:avLst/>
+          </a:prstGeom>
+          <a:ln w="73025">
+            <a:solidFill>
+              <a:srgbClr val="7030A0"/>
+            </a:solidFill>
+            <a:prstDash val="sysDot"/>
+          </a:ln>
+        </p:spPr>
+        <p:style>
+          <a:lnRef idx="2">
+            <a:schemeClr val="accent1"/>
+          </a:lnRef>
+          <a:fillRef idx="0">
+            <a:schemeClr val="accent1"/>
+          </a:fillRef>
+          <a:effectRef idx="1">
+            <a:schemeClr val="accent1"/>
+          </a:effectRef>
+          <a:fontRef idx="minor">
+            <a:schemeClr val="tx1"/>
+          </a:fontRef>
+        </p:style>
+      </p:cxnSp>
+      <p:cxnSp>
+        <p:nvCxnSpPr>
+          <p:cNvPr id="8" name="Straight Connector 7">
+            <a:extLst>
+              <a:ext uri="{FF2B5EF4-FFF2-40B4-BE49-F238E27FC236}">
+                <a16:creationId xmlns:a16="http://schemas.microsoft.com/office/drawing/2014/main" id="{D8213D92-E999-BBC4-4870-BE36D2EDF770}"/>
+              </a:ext>
+            </a:extLst>
+          </p:cNvPr>
+          <p:cNvCxnSpPr>
+            <a:cxnSpLocks/>
+          </p:cNvCxnSpPr>
+          <p:nvPr/>
+        </p:nvCxnSpPr>
+        <p:spPr>
+          <a:xfrm flipH="1">
+            <a:off x="7213055" y="2625829"/>
+            <a:ext cx="1648097" cy="1706277"/>
+          </a:xfrm>
+          <a:prstGeom prst="line">
+            <a:avLst/>
+          </a:prstGeom>
+          <a:ln w="73025">
+            <a:solidFill>
+              <a:schemeClr val="tx1"/>
+            </a:solidFill>
+          </a:ln>
+        </p:spPr>
+        <p:style>
+          <a:lnRef idx="2">
+            <a:schemeClr val="accent1"/>
+          </a:lnRef>
+          <a:fillRef idx="0">
+            <a:schemeClr val="accent1"/>
+          </a:fillRef>
+          <a:effectRef idx="1">
+            <a:schemeClr val="accent1"/>
+          </a:effectRef>
+          <a:fontRef idx="minor">
+            <a:schemeClr val="tx1"/>
+          </a:fontRef>
+        </p:style>
+      </p:cxnSp>
+      <p:sp>
+        <p:nvSpPr>
+          <p:cNvPr id="11" name="TextBox 10">
+            <a:extLst>
+              <a:ext uri="{FF2B5EF4-FFF2-40B4-BE49-F238E27FC236}">
+                <a16:creationId xmlns:a16="http://schemas.microsoft.com/office/drawing/2014/main" id="{B4CFB281-93FC-0337-C42C-E88DE9BB1BA9}"/>
+              </a:ext>
+            </a:extLst>
+          </p:cNvPr>
+          <p:cNvSpPr txBox="1"/>
+          <p:nvPr/>
+        </p:nvSpPr>
+        <p:spPr>
+          <a:xfrm>
+            <a:off x="6130834" y="2924970"/>
+            <a:ext cx="2028184" cy="553998"/>
+          </a:xfrm>
+          <a:prstGeom prst="rect">
+            <a:avLst/>
+          </a:prstGeom>
+          <a:noFill/>
+        </p:spPr>
+        <p:txBody>
+          <a:bodyPr wrap="none" rtlCol="0">
+            <a:spAutoFit/>
+          </a:bodyPr>
+          <a:lstStyle/>
+          <a:p>
+            <a:r>
+              <a:rPr lang="en-US" sz="3000" dirty="0">
+                <a:latin typeface="Times New Roman" panose="02020603050405020304" pitchFamily="18" charset="0"/>
+                <a:cs typeface="Times New Roman" panose="02020603050405020304" pitchFamily="18" charset="0"/>
+              </a:rPr>
+              <a:t>Latency = x</a:t>
+            </a:r>
+          </a:p>
+        </p:txBody>
+      </p:sp>
+      <p:cxnSp>
+        <p:nvCxnSpPr>
+          <p:cNvPr id="7" name="Straight Connector 6">
+            <a:extLst>
+              <a:ext uri="{FF2B5EF4-FFF2-40B4-BE49-F238E27FC236}">
+                <a16:creationId xmlns:a16="http://schemas.microsoft.com/office/drawing/2014/main" id="{1834301D-D908-2577-872B-C83EF70465A9}"/>
+              </a:ext>
+            </a:extLst>
+          </p:cNvPr>
+          <p:cNvCxnSpPr>
+            <a:cxnSpLocks/>
+            <a:stCxn id="2" idx="4"/>
+            <a:endCxn id="5" idx="0"/>
+          </p:cNvCxnSpPr>
+          <p:nvPr/>
+        </p:nvCxnSpPr>
+        <p:spPr>
+          <a:xfrm flipH="1">
+            <a:off x="8410484" y="2625829"/>
+            <a:ext cx="537757" cy="1706277"/>
+          </a:xfrm>
+          <a:prstGeom prst="line">
+            <a:avLst/>
+          </a:prstGeom>
+          <a:ln w="73025">
+            <a:solidFill>
+              <a:schemeClr val="tx1"/>
+            </a:solidFill>
+          </a:ln>
+        </p:spPr>
+        <p:style>
+          <a:lnRef idx="2">
+            <a:schemeClr val="accent1"/>
+          </a:lnRef>
+          <a:fillRef idx="0">
+            <a:schemeClr val="accent1"/>
+          </a:fillRef>
+          <a:effectRef idx="1">
+            <a:schemeClr val="accent1"/>
+          </a:effectRef>
+          <a:fontRef idx="minor">
+            <a:schemeClr val="tx1"/>
+          </a:fontRef>
+        </p:style>
+      </p:cxnSp>
+      <p:cxnSp>
+        <p:nvCxnSpPr>
+          <p:cNvPr id="19" name="Straight Connector 18">
+            <a:extLst>
+              <a:ext uri="{FF2B5EF4-FFF2-40B4-BE49-F238E27FC236}">
+                <a16:creationId xmlns:a16="http://schemas.microsoft.com/office/drawing/2014/main" id="{3A45D0F6-BFD4-413A-D431-C887B69E4E7A}"/>
+              </a:ext>
+            </a:extLst>
+          </p:cNvPr>
+          <p:cNvCxnSpPr>
+            <a:cxnSpLocks/>
+            <a:stCxn id="2" idx="4"/>
+            <a:endCxn id="10" idx="0"/>
+          </p:cNvCxnSpPr>
+          <p:nvPr/>
+        </p:nvCxnSpPr>
+        <p:spPr>
+          <a:xfrm>
+            <a:off x="8948241" y="2625829"/>
+            <a:ext cx="1807452" cy="1706277"/>
+          </a:xfrm>
+          <a:prstGeom prst="line">
+            <a:avLst/>
+          </a:prstGeom>
+          <a:ln w="73025">
+            <a:solidFill>
+              <a:schemeClr val="tx1"/>
+            </a:solidFill>
+          </a:ln>
+        </p:spPr>
+        <p:style>
+          <a:lnRef idx="2">
+            <a:schemeClr val="accent1"/>
+          </a:lnRef>
+          <a:fillRef idx="0">
+            <a:schemeClr val="accent1"/>
+          </a:fillRef>
+          <a:effectRef idx="1">
+            <a:schemeClr val="accent1"/>
+          </a:effectRef>
+          <a:fontRef idx="minor">
+            <a:schemeClr val="tx1"/>
+          </a:fontRef>
+        </p:style>
+      </p:cxnSp>
+      <p:sp>
+        <p:nvSpPr>
+          <p:cNvPr id="22" name="TextBox 21">
+            <a:extLst>
+              <a:ext uri="{FF2B5EF4-FFF2-40B4-BE49-F238E27FC236}">
+                <a16:creationId xmlns:a16="http://schemas.microsoft.com/office/drawing/2014/main" id="{DD328095-C878-8ED9-2CE4-292AD231B837}"/>
+              </a:ext>
+            </a:extLst>
+          </p:cNvPr>
+          <p:cNvSpPr txBox="1"/>
+          <p:nvPr/>
+        </p:nvSpPr>
+        <p:spPr>
+          <a:xfrm>
+            <a:off x="8276728" y="3351539"/>
+            <a:ext cx="377026" cy="553998"/>
+          </a:xfrm>
+          <a:prstGeom prst="rect">
+            <a:avLst/>
+          </a:prstGeom>
+          <a:noFill/>
+        </p:spPr>
+        <p:txBody>
+          <a:bodyPr wrap="none" rtlCol="0">
+            <a:spAutoFit/>
+          </a:bodyPr>
+          <a:lstStyle/>
+          <a:p>
+            <a:r>
+              <a:rPr lang="en-US" sz="3000" dirty="0">
+                <a:latin typeface="Times New Roman" panose="02020603050405020304" pitchFamily="18" charset="0"/>
+                <a:cs typeface="Times New Roman" panose="02020603050405020304" pitchFamily="18" charset="0"/>
+              </a:rPr>
+              <a:t>x</a:t>
+            </a:r>
+          </a:p>
+        </p:txBody>
+      </p:sp>
+      <p:sp>
+        <p:nvSpPr>
+          <p:cNvPr id="23" name="TextBox 22">
+            <a:extLst>
+              <a:ext uri="{FF2B5EF4-FFF2-40B4-BE49-F238E27FC236}">
+                <a16:creationId xmlns:a16="http://schemas.microsoft.com/office/drawing/2014/main" id="{16BDBEB0-F1ED-B7E0-F43B-CFF2B3EFFB99}"/>
+              </a:ext>
+            </a:extLst>
+          </p:cNvPr>
+          <p:cNvSpPr txBox="1"/>
+          <p:nvPr/>
+        </p:nvSpPr>
+        <p:spPr>
+          <a:xfrm>
+            <a:off x="9546135" y="3351539"/>
+            <a:ext cx="377026" cy="553998"/>
+          </a:xfrm>
+          <a:prstGeom prst="rect">
+            <a:avLst/>
+          </a:prstGeom>
+          <a:noFill/>
+        </p:spPr>
+        <p:txBody>
+          <a:bodyPr wrap="none" rtlCol="0">
+            <a:spAutoFit/>
+          </a:bodyPr>
+          <a:lstStyle/>
+          <a:p>
+            <a:r>
+              <a:rPr lang="en-US" sz="3000" dirty="0">
+                <a:latin typeface="Times New Roman" panose="02020603050405020304" pitchFamily="18" charset="0"/>
+                <a:cs typeface="Times New Roman" panose="02020603050405020304" pitchFamily="18" charset="0"/>
+              </a:rPr>
+              <a:t>x</a:t>
+            </a:r>
+          </a:p>
+        </p:txBody>
+      </p:sp>
+      <p:sp>
+        <p:nvSpPr>
+          <p:cNvPr id="24" name="TextBox 23">
+            <a:extLst>
+              <a:ext uri="{FF2B5EF4-FFF2-40B4-BE49-F238E27FC236}">
+                <a16:creationId xmlns:a16="http://schemas.microsoft.com/office/drawing/2014/main" id="{7F28D4E7-7A82-9381-29DD-B2E25638C142}"/>
+              </a:ext>
+            </a:extLst>
+          </p:cNvPr>
+          <p:cNvSpPr txBox="1"/>
+          <p:nvPr/>
+        </p:nvSpPr>
+        <p:spPr>
+          <a:xfrm>
+            <a:off x="6321963" y="5238604"/>
+            <a:ext cx="1532791" cy="1015663"/>
+          </a:xfrm>
+          <a:prstGeom prst="rect">
+            <a:avLst/>
+          </a:prstGeom>
+          <a:noFill/>
+        </p:spPr>
+        <p:txBody>
+          <a:bodyPr wrap="none" rtlCol="0">
+            <a:spAutoFit/>
+          </a:bodyPr>
+          <a:lstStyle/>
+          <a:p>
+            <a:pPr algn="ctr"/>
+            <a:r>
+              <a:rPr lang="en-US" sz="3000" dirty="0">
+                <a:latin typeface="Times New Roman" panose="02020603050405020304" pitchFamily="18" charset="0"/>
+                <a:cs typeface="Times New Roman" panose="02020603050405020304" pitchFamily="18" charset="0"/>
+              </a:rPr>
+              <a:t>Machine</a:t>
+            </a:r>
+            <a:br>
+              <a:rPr lang="en-US" sz="3000" dirty="0">
+                <a:latin typeface="Times New Roman" panose="02020603050405020304" pitchFamily="18" charset="0"/>
+                <a:cs typeface="Times New Roman" panose="02020603050405020304" pitchFamily="18" charset="0"/>
+              </a:rPr>
+            </a:br>
+            <a:r>
+              <a:rPr lang="en-US" sz="3000" dirty="0">
+                <a:latin typeface="Times New Roman" panose="02020603050405020304" pitchFamily="18" charset="0"/>
+                <a:cs typeface="Times New Roman" panose="02020603050405020304" pitchFamily="18" charset="0"/>
+              </a:rPr>
+              <a:t>1</a:t>
+            </a:r>
+          </a:p>
+        </p:txBody>
+      </p:sp>
+      <p:sp>
+        <p:nvSpPr>
+          <p:cNvPr id="25" name="TextBox 24">
+            <a:extLst>
+              <a:ext uri="{FF2B5EF4-FFF2-40B4-BE49-F238E27FC236}">
+                <a16:creationId xmlns:a16="http://schemas.microsoft.com/office/drawing/2014/main" id="{FFA5D318-D663-0502-66E3-6CB49CD6075E}"/>
+              </a:ext>
+            </a:extLst>
+          </p:cNvPr>
+          <p:cNvSpPr txBox="1"/>
+          <p:nvPr/>
+        </p:nvSpPr>
+        <p:spPr>
+          <a:xfrm>
+            <a:off x="7934905" y="5274843"/>
+            <a:ext cx="1532791" cy="1015663"/>
+          </a:xfrm>
+          <a:prstGeom prst="rect">
+            <a:avLst/>
+          </a:prstGeom>
+          <a:noFill/>
+        </p:spPr>
+        <p:txBody>
+          <a:bodyPr wrap="none" rtlCol="0">
+            <a:spAutoFit/>
+          </a:bodyPr>
+          <a:lstStyle/>
+          <a:p>
+            <a:pPr algn="ctr"/>
+            <a:r>
+              <a:rPr lang="en-US" sz="3000" dirty="0">
+                <a:latin typeface="Times New Roman" panose="02020603050405020304" pitchFamily="18" charset="0"/>
+                <a:cs typeface="Times New Roman" panose="02020603050405020304" pitchFamily="18" charset="0"/>
+              </a:rPr>
+              <a:t>Machine</a:t>
+            </a:r>
+            <a:br>
+              <a:rPr lang="en-US" sz="3000" dirty="0">
+                <a:latin typeface="Times New Roman" panose="02020603050405020304" pitchFamily="18" charset="0"/>
+                <a:cs typeface="Times New Roman" panose="02020603050405020304" pitchFamily="18" charset="0"/>
+              </a:rPr>
+            </a:br>
+            <a:r>
+              <a:rPr lang="en-US" sz="3000" dirty="0">
+                <a:latin typeface="Times New Roman" panose="02020603050405020304" pitchFamily="18" charset="0"/>
+                <a:cs typeface="Times New Roman" panose="02020603050405020304" pitchFamily="18" charset="0"/>
+              </a:rPr>
+              <a:t>2</a:t>
+            </a:r>
+          </a:p>
+        </p:txBody>
+      </p:sp>
+      <p:sp>
+        <p:nvSpPr>
+          <p:cNvPr id="26" name="TextBox 25">
+            <a:extLst>
+              <a:ext uri="{FF2B5EF4-FFF2-40B4-BE49-F238E27FC236}">
+                <a16:creationId xmlns:a16="http://schemas.microsoft.com/office/drawing/2014/main" id="{40164C9E-2226-D901-5F8F-0A41F92D7613}"/>
+              </a:ext>
+            </a:extLst>
+          </p:cNvPr>
+          <p:cNvSpPr txBox="1"/>
+          <p:nvPr/>
+        </p:nvSpPr>
+        <p:spPr>
+          <a:xfrm>
+            <a:off x="9989296" y="5238604"/>
+            <a:ext cx="1532791" cy="1015663"/>
+          </a:xfrm>
+          <a:prstGeom prst="rect">
+            <a:avLst/>
+          </a:prstGeom>
+          <a:noFill/>
+        </p:spPr>
+        <p:txBody>
+          <a:bodyPr wrap="none" rtlCol="0">
+            <a:spAutoFit/>
+          </a:bodyPr>
+          <a:lstStyle/>
+          <a:p>
+            <a:pPr algn="ctr"/>
+            <a:r>
+              <a:rPr lang="en-US" sz="3000" dirty="0">
+                <a:latin typeface="Times New Roman" panose="02020603050405020304" pitchFamily="18" charset="0"/>
+                <a:cs typeface="Times New Roman" panose="02020603050405020304" pitchFamily="18" charset="0"/>
+              </a:rPr>
+              <a:t>Machine</a:t>
+            </a:r>
+            <a:br>
+              <a:rPr lang="en-US" sz="3000" dirty="0">
+                <a:latin typeface="Times New Roman" panose="02020603050405020304" pitchFamily="18" charset="0"/>
+                <a:cs typeface="Times New Roman" panose="02020603050405020304" pitchFamily="18" charset="0"/>
+              </a:rPr>
+            </a:br>
+            <a:r>
+              <a:rPr lang="en-US" sz="3000" dirty="0">
+                <a:latin typeface="Times New Roman" panose="02020603050405020304" pitchFamily="18" charset="0"/>
+                <a:cs typeface="Times New Roman" panose="02020603050405020304" pitchFamily="18" charset="0"/>
+              </a:rPr>
+              <a:t>n</a:t>
+            </a:r>
+          </a:p>
+        </p:txBody>
+      </p:sp>
+    </p:spTree>
+    <p:extLst>
+      <p:ext uri="{BB962C8B-B14F-4D97-AF65-F5344CB8AC3E}">
+        <p14:creationId xmlns:p14="http://schemas.microsoft.com/office/powerpoint/2010/main" val="433049594"/>
+      </p:ext>
+    </p:extLst>
+  </p:cSld>
+  <p:clrMapOvr>
+    <a:masterClrMapping/>
+  </p:clrMapOvr>
+  <mc:AlternateContent xmlns:mc="http://schemas.openxmlformats.org/markup-compatibility/2006">
+    <mc:Choice xmlns:p159="http://schemas.microsoft.com/office/powerpoint/2015/09/main" Requires="p159">
+      <p:transition spd="med">
+        <p159:morph option="byWord"/>
+      </p:transition>
+    </mc:Choice>
+    <mc:Fallback>
+      <p:transition spd="med">
+        <p:fade/>
+      </p:transition>
+    </mc:Fallback>
+  </mc:AlternateContent>
+</p:sld>
+</file>
+
+<file path=ppt/slides/slide8.xml><?xml version="1.0" encoding="utf-8"?>
+<p:sld xmlns:a="http://schemas.openxmlformats.org/drawingml/2006/main" xmlns:r="http://schemas.openxmlformats.org/officeDocument/2006/relationships" xmlns:p="http://schemas.openxmlformats.org/presentationml/2006/main">
+  <p:cSld>
+    <p:spTree>
+      <p:nvGrpSpPr>
+        <p:cNvPr id="1" name="">
+          <a:extLst>
+            <a:ext uri="{FF2B5EF4-FFF2-40B4-BE49-F238E27FC236}">
+              <a16:creationId xmlns:a16="http://schemas.microsoft.com/office/drawing/2014/main" id="{ECEE90AC-5F90-3894-F518-C43A70CDD337}"/>
+            </a:ext>
+          </a:extLst>
+        </p:cNvPr>
+        <p:cNvGrpSpPr/>
+        <p:nvPr/>
+      </p:nvGrpSpPr>
+      <p:grpSpPr>
+        <a:xfrm>
+          <a:off x="0" y="0"/>
+          <a:ext cx="0" cy="0"/>
+          <a:chOff x="0" y="0"/>
+          <a:chExt cx="0" cy="0"/>
+        </a:xfrm>
+      </p:grpSpPr>
+      <p:sp>
+        <p:nvSpPr>
+          <p:cNvPr id="16" name="Title 1">
+            <a:extLst>
+              <a:ext uri="{FF2B5EF4-FFF2-40B4-BE49-F238E27FC236}">
+                <a16:creationId xmlns:a16="http://schemas.microsoft.com/office/drawing/2014/main" id="{67727AF2-4F5C-A202-DE9B-C416D8F490C1}"/>
+              </a:ext>
+            </a:extLst>
+          </p:cNvPr>
+          <p:cNvSpPr txBox="1">
+            <a:spLocks/>
+          </p:cNvSpPr>
+          <p:nvPr/>
+        </p:nvSpPr>
+        <p:spPr>
+          <a:xfrm>
+            <a:off x="760549" y="-305842"/>
+            <a:ext cx="5811520" cy="2387600"/>
+          </a:xfrm>
+          <a:prstGeom prst="rect">
+            <a:avLst/>
+          </a:prstGeom>
+        </p:spPr>
+        <p:txBody>
+          <a:bodyPr vert="horz" lIns="91440" tIns="45720" rIns="91440" bIns="45720" rtlCol="0" anchor="ctr">
+            <a:normAutofit/>
+          </a:bodyPr>
+          <a:lstStyle>
+            <a:lvl1pPr algn="l" defTabSz="914400" rtl="0" eaLnBrk="1" latinLnBrk="0" hangingPunct="1">
+              <a:lnSpc>
+                <a:spcPct val="90000"/>
+              </a:lnSpc>
+              <a:spcBef>
+                <a:spcPct val="0"/>
+              </a:spcBef>
+              <a:buNone/>
+              <a:defRPr sz="4400" kern="1200">
+                <a:solidFill>
+                  <a:schemeClr val="tx1"/>
+                </a:solidFill>
+                <a:latin typeface="+mj-lt"/>
+                <a:ea typeface="+mj-ea"/>
+                <a:cs typeface="+mj-cs"/>
+              </a:defRPr>
+            </a:lvl1pPr>
+          </a:lstStyle>
+          <a:p>
+            <a:r>
+              <a:rPr lang="en-US" sz="4000" dirty="0">
+                <a:solidFill>
+                  <a:srgbClr val="7030A0"/>
+                </a:solidFill>
+                <a:latin typeface="Times New Roman" panose="02020603050405020304" pitchFamily="18" charset="0"/>
+                <a:cs typeface="Times New Roman" panose="02020603050405020304" pitchFamily="18" charset="0"/>
+              </a:rPr>
+              <a:t>Latency Fairness</a:t>
+            </a:r>
+          </a:p>
+        </p:txBody>
+      </p:sp>
+      <p:sp>
+        <p:nvSpPr>
+          <p:cNvPr id="17" name="Rectangle 16">
+            <a:extLst>
+              <a:ext uri="{FF2B5EF4-FFF2-40B4-BE49-F238E27FC236}">
+                <a16:creationId xmlns:a16="http://schemas.microsoft.com/office/drawing/2014/main" id="{E5F89CE2-E7C5-4B87-54D7-7EA7735D1D63}"/>
+              </a:ext>
+            </a:extLst>
+          </p:cNvPr>
+          <p:cNvSpPr/>
+          <p:nvPr/>
+        </p:nvSpPr>
+        <p:spPr>
+          <a:xfrm rot="16200000">
+            <a:off x="2522582" y="-387076"/>
+            <a:ext cx="68673" cy="3246390"/>
+          </a:xfrm>
+          <a:prstGeom prst="rect">
+            <a:avLst/>
+          </a:prstGeom>
+          <a:solidFill>
+            <a:srgbClr val="FF0000"/>
+          </a:solidFill>
+          <a:ln>
+            <a:solidFill>
+              <a:srgbClr val="FF0000"/>
+            </a:solidFill>
+          </a:ln>
+        </p:spPr>
+        <p:style>
+          <a:lnRef idx="2">
+            <a:schemeClr val="accent1">
+              <a:shade val="15000"/>
+            </a:schemeClr>
+          </a:lnRef>
+          <a:fillRef idx="1">
+            <a:schemeClr val="accent1"/>
+          </a:fillRef>
+          <a:effectRef idx="0">
+            <a:schemeClr val="accent1"/>
+          </a:effectRef>
+          <a:fontRef idx="minor">
+            <a:schemeClr val="lt1"/>
+          </a:fontRef>
+        </p:style>
+        <p:txBody>
+          <a:bodyPr rtlCol="0" anchor="ctr"/>
+          <a:lstStyle/>
+          <a:p>
+            <a:pPr algn="ctr"/>
+            <a:endParaRPr lang="en-US">
+              <a:latin typeface="Times New Roman" panose="02020603050405020304" pitchFamily="18" charset="0"/>
+              <a:cs typeface="Times New Roman" panose="02020603050405020304" pitchFamily="18" charset="0"/>
+            </a:endParaRPr>
+          </a:p>
+        </p:txBody>
+      </p:sp>
+      <p:sp>
+        <p:nvSpPr>
+          <p:cNvPr id="18" name="Rectangle 17">
+            <a:extLst>
+              <a:ext uri="{FF2B5EF4-FFF2-40B4-BE49-F238E27FC236}">
+                <a16:creationId xmlns:a16="http://schemas.microsoft.com/office/drawing/2014/main" id="{6C0C3388-5524-C488-48F2-B17650679A49}"/>
+              </a:ext>
+            </a:extLst>
+          </p:cNvPr>
+          <p:cNvSpPr/>
+          <p:nvPr/>
+        </p:nvSpPr>
+        <p:spPr>
+          <a:xfrm rot="16200000">
+            <a:off x="2522581" y="-318404"/>
+            <a:ext cx="68674" cy="3246390"/>
+          </a:xfrm>
+          <a:prstGeom prst="rect">
+            <a:avLst/>
+          </a:prstGeom>
+          <a:solidFill>
+            <a:srgbClr val="7030A0"/>
+          </a:solidFill>
+          <a:ln>
+            <a:solidFill>
+              <a:srgbClr val="7030A0"/>
+            </a:solidFill>
+          </a:ln>
+        </p:spPr>
+        <p:style>
+          <a:lnRef idx="2">
+            <a:schemeClr val="accent1">
+              <a:shade val="15000"/>
+            </a:schemeClr>
+          </a:lnRef>
+          <a:fillRef idx="1">
+            <a:schemeClr val="accent1"/>
+          </a:fillRef>
+          <a:effectRef idx="0">
+            <a:schemeClr val="accent1"/>
+          </a:effectRef>
+          <a:fontRef idx="minor">
+            <a:schemeClr val="lt1"/>
+          </a:fontRef>
+        </p:style>
+        <p:txBody>
+          <a:bodyPr rtlCol="0" anchor="ctr"/>
+          <a:lstStyle/>
+          <a:p>
+            <a:pPr algn="ctr"/>
+            <a:endParaRPr lang="en-US">
+              <a:latin typeface="Times New Roman" panose="02020603050405020304" pitchFamily="18" charset="0"/>
+              <a:cs typeface="Times New Roman" panose="02020603050405020304" pitchFamily="18" charset="0"/>
+            </a:endParaRPr>
+          </a:p>
+        </p:txBody>
+      </p:sp>
+      <p:sp>
+        <p:nvSpPr>
+          <p:cNvPr id="2" name="Oval 1">
+            <a:extLst>
+              <a:ext uri="{FF2B5EF4-FFF2-40B4-BE49-F238E27FC236}">
+                <a16:creationId xmlns:a16="http://schemas.microsoft.com/office/drawing/2014/main" id="{3C447D92-04E5-ABD6-30AB-7B96AA9286B0}"/>
+              </a:ext>
+            </a:extLst>
+          </p:cNvPr>
+          <p:cNvSpPr/>
+          <p:nvPr/>
+        </p:nvSpPr>
+        <p:spPr>
+          <a:xfrm>
+            <a:off x="8497572" y="1737555"/>
+            <a:ext cx="901337" cy="888274"/>
+          </a:xfrm>
+          <a:prstGeom prst="ellipse">
+            <a:avLst/>
+          </a:prstGeom>
+          <a:solidFill>
+            <a:srgbClr val="FF0000"/>
+          </a:solidFill>
+          <a:ln>
+            <a:noFill/>
+          </a:ln>
+        </p:spPr>
+        <p:style>
+          <a:lnRef idx="2">
+            <a:schemeClr val="accent1">
+              <a:shade val="15000"/>
+            </a:schemeClr>
+          </a:lnRef>
+          <a:fillRef idx="1">
+            <a:schemeClr val="accent1"/>
+          </a:fillRef>
+          <a:effectRef idx="0">
+            <a:schemeClr val="accent1"/>
+          </a:effectRef>
+          <a:fontRef idx="minor">
+            <a:schemeClr val="lt1"/>
+          </a:fontRef>
+        </p:style>
+        <p:txBody>
+          <a:bodyPr rtlCol="0" anchor="ctr"/>
+          <a:lstStyle/>
+          <a:p>
+            <a:pPr algn="ctr"/>
+            <a:endParaRPr lang="en-US">
+              <a:latin typeface="Times New Roman" panose="02020603050405020304" pitchFamily="18" charset="0"/>
+              <a:cs typeface="Times New Roman" panose="02020603050405020304" pitchFamily="18" charset="0"/>
+            </a:endParaRPr>
+          </a:p>
+        </p:txBody>
+      </p:sp>
+      <p:sp>
+        <p:nvSpPr>
+          <p:cNvPr id="3" name="TextBox 2">
+            <a:extLst>
+              <a:ext uri="{FF2B5EF4-FFF2-40B4-BE49-F238E27FC236}">
+                <a16:creationId xmlns:a16="http://schemas.microsoft.com/office/drawing/2014/main" id="{A69B8993-2AA7-14EF-D794-B3F1683049A1}"/>
+              </a:ext>
+            </a:extLst>
+          </p:cNvPr>
+          <p:cNvSpPr txBox="1"/>
+          <p:nvPr/>
+        </p:nvSpPr>
+        <p:spPr>
+          <a:xfrm>
+            <a:off x="8159018" y="1201782"/>
+            <a:ext cx="1189749" cy="553998"/>
+          </a:xfrm>
+          <a:prstGeom prst="rect">
+            <a:avLst/>
+          </a:prstGeom>
+          <a:noFill/>
+        </p:spPr>
+        <p:txBody>
+          <a:bodyPr wrap="none" rtlCol="0">
+            <a:spAutoFit/>
+          </a:bodyPr>
+          <a:lstStyle/>
+          <a:p>
+            <a:r>
+              <a:rPr lang="en-US" sz="3000" dirty="0">
+                <a:latin typeface="Times New Roman" panose="02020603050405020304" pitchFamily="18" charset="0"/>
+                <a:cs typeface="Times New Roman" panose="02020603050405020304" pitchFamily="18" charset="0"/>
+              </a:rPr>
+              <a:t>Server</a:t>
+            </a:r>
+          </a:p>
+        </p:txBody>
+      </p:sp>
+      <p:sp>
+        <p:nvSpPr>
+          <p:cNvPr id="4" name="Oval 3">
+            <a:extLst>
+              <a:ext uri="{FF2B5EF4-FFF2-40B4-BE49-F238E27FC236}">
+                <a16:creationId xmlns:a16="http://schemas.microsoft.com/office/drawing/2014/main" id="{D6F38C70-114C-BBD5-C5E0-5B4B24D3A083}"/>
+              </a:ext>
+            </a:extLst>
+          </p:cNvPr>
+          <p:cNvSpPr/>
+          <p:nvPr/>
+        </p:nvSpPr>
+        <p:spPr>
+          <a:xfrm>
+            <a:off x="6551204" y="4332106"/>
+            <a:ext cx="901337" cy="888274"/>
+          </a:xfrm>
+          <a:prstGeom prst="ellipse">
+            <a:avLst/>
+          </a:prstGeom>
+          <a:solidFill>
+            <a:srgbClr val="7030A0"/>
+          </a:solidFill>
+          <a:ln>
+            <a:noFill/>
+          </a:ln>
+        </p:spPr>
+        <p:style>
+          <a:lnRef idx="2">
+            <a:schemeClr val="accent1">
+              <a:shade val="15000"/>
+            </a:schemeClr>
+          </a:lnRef>
+          <a:fillRef idx="1">
+            <a:schemeClr val="accent1"/>
+          </a:fillRef>
+          <a:effectRef idx="0">
+            <a:schemeClr val="accent1"/>
+          </a:effectRef>
+          <a:fontRef idx="minor">
+            <a:schemeClr val="lt1"/>
+          </a:fontRef>
+        </p:style>
+        <p:txBody>
+          <a:bodyPr rtlCol="0" anchor="ctr"/>
+          <a:lstStyle/>
+          <a:p>
+            <a:pPr algn="ctr"/>
+            <a:endParaRPr lang="en-US">
+              <a:latin typeface="Times New Roman" panose="02020603050405020304" pitchFamily="18" charset="0"/>
+              <a:cs typeface="Times New Roman" panose="02020603050405020304" pitchFamily="18" charset="0"/>
+            </a:endParaRPr>
+          </a:p>
+        </p:txBody>
+      </p:sp>
+      <p:sp>
+        <p:nvSpPr>
+          <p:cNvPr id="5" name="Oval 4">
+            <a:extLst>
+              <a:ext uri="{FF2B5EF4-FFF2-40B4-BE49-F238E27FC236}">
+                <a16:creationId xmlns:a16="http://schemas.microsoft.com/office/drawing/2014/main" id="{1808D0C6-204D-B5EF-53A0-6E3AF05A649E}"/>
+              </a:ext>
+            </a:extLst>
+          </p:cNvPr>
+          <p:cNvSpPr/>
+          <p:nvPr/>
+        </p:nvSpPr>
+        <p:spPr>
+          <a:xfrm>
+            <a:off x="7959815" y="4332106"/>
+            <a:ext cx="901337" cy="888274"/>
+          </a:xfrm>
+          <a:prstGeom prst="ellipse">
+            <a:avLst/>
+          </a:prstGeom>
+          <a:solidFill>
+            <a:srgbClr val="7030A0"/>
+          </a:solidFill>
+          <a:ln>
+            <a:noFill/>
+          </a:ln>
+        </p:spPr>
+        <p:style>
+          <a:lnRef idx="2">
+            <a:schemeClr val="accent1">
+              <a:shade val="15000"/>
+            </a:schemeClr>
+          </a:lnRef>
+          <a:fillRef idx="1">
+            <a:schemeClr val="accent1"/>
+          </a:fillRef>
+          <a:effectRef idx="0">
+            <a:schemeClr val="accent1"/>
+          </a:effectRef>
+          <a:fontRef idx="minor">
+            <a:schemeClr val="lt1"/>
+          </a:fontRef>
+        </p:style>
+        <p:txBody>
+          <a:bodyPr rtlCol="0" anchor="ctr"/>
+          <a:lstStyle/>
+          <a:p>
+            <a:pPr algn="ctr"/>
+            <a:endParaRPr lang="en-US">
+              <a:latin typeface="Times New Roman" panose="02020603050405020304" pitchFamily="18" charset="0"/>
+              <a:cs typeface="Times New Roman" panose="02020603050405020304" pitchFamily="18" charset="0"/>
+            </a:endParaRPr>
+          </a:p>
+        </p:txBody>
+      </p:sp>
+      <p:sp>
+        <p:nvSpPr>
+          <p:cNvPr id="10" name="Oval 9">
+            <a:extLst>
+              <a:ext uri="{FF2B5EF4-FFF2-40B4-BE49-F238E27FC236}">
+                <a16:creationId xmlns:a16="http://schemas.microsoft.com/office/drawing/2014/main" id="{61492C4A-8D93-3B31-0806-2032050D884A}"/>
+              </a:ext>
+            </a:extLst>
+          </p:cNvPr>
+          <p:cNvSpPr/>
+          <p:nvPr/>
+        </p:nvSpPr>
+        <p:spPr>
+          <a:xfrm>
+            <a:off x="10305024" y="4332106"/>
+            <a:ext cx="901337" cy="888274"/>
+          </a:xfrm>
+          <a:prstGeom prst="ellipse">
+            <a:avLst/>
+          </a:prstGeom>
+          <a:solidFill>
+            <a:srgbClr val="7030A0"/>
+          </a:solidFill>
+          <a:ln>
+            <a:noFill/>
+          </a:ln>
+        </p:spPr>
+        <p:style>
+          <a:lnRef idx="2">
+            <a:schemeClr val="accent1">
+              <a:shade val="15000"/>
+            </a:schemeClr>
+          </a:lnRef>
+          <a:fillRef idx="1">
+            <a:schemeClr val="accent1"/>
+          </a:fillRef>
+          <a:effectRef idx="0">
+            <a:schemeClr val="accent1"/>
+          </a:effectRef>
+          <a:fontRef idx="minor">
+            <a:schemeClr val="lt1"/>
+          </a:fontRef>
+        </p:style>
+        <p:txBody>
+          <a:bodyPr rtlCol="0" anchor="ctr"/>
+          <a:lstStyle/>
+          <a:p>
+            <a:pPr algn="ctr"/>
+            <a:endParaRPr lang="en-US">
+              <a:latin typeface="Times New Roman" panose="02020603050405020304" pitchFamily="18" charset="0"/>
+              <a:cs typeface="Times New Roman" panose="02020603050405020304" pitchFamily="18" charset="0"/>
+            </a:endParaRPr>
+          </a:p>
+        </p:txBody>
+      </p:sp>
+      <p:cxnSp>
+        <p:nvCxnSpPr>
+          <p:cNvPr id="13" name="Straight Connector 12">
+            <a:extLst>
+              <a:ext uri="{FF2B5EF4-FFF2-40B4-BE49-F238E27FC236}">
+                <a16:creationId xmlns:a16="http://schemas.microsoft.com/office/drawing/2014/main" id="{C6E826D9-4C82-0FD8-BC95-3B5269866D49}"/>
+              </a:ext>
+            </a:extLst>
+          </p:cNvPr>
+          <p:cNvCxnSpPr/>
+          <p:nvPr/>
+        </p:nvCxnSpPr>
+        <p:spPr>
+          <a:xfrm>
+            <a:off x="9087034" y="4820194"/>
+            <a:ext cx="921473" cy="0"/>
+          </a:xfrm>
+          <a:prstGeom prst="line">
+            <a:avLst/>
+          </a:prstGeom>
+          <a:ln w="73025">
+            <a:solidFill>
+              <a:srgbClr val="7030A0"/>
+            </a:solidFill>
+            <a:prstDash val="sysDot"/>
+          </a:ln>
+        </p:spPr>
+        <p:style>
+          <a:lnRef idx="2">
+            <a:schemeClr val="accent1"/>
+          </a:lnRef>
+          <a:fillRef idx="0">
+            <a:schemeClr val="accent1"/>
+          </a:fillRef>
+          <a:effectRef idx="1">
+            <a:schemeClr val="accent1"/>
+          </a:effectRef>
+          <a:fontRef idx="minor">
+            <a:schemeClr val="tx1"/>
+          </a:fontRef>
+        </p:style>
+      </p:cxnSp>
+      <p:cxnSp>
+        <p:nvCxnSpPr>
+          <p:cNvPr id="8" name="Straight Connector 7">
+            <a:extLst>
+              <a:ext uri="{FF2B5EF4-FFF2-40B4-BE49-F238E27FC236}">
+                <a16:creationId xmlns:a16="http://schemas.microsoft.com/office/drawing/2014/main" id="{4F712ABB-41CC-604E-41E0-3B7B839E971D}"/>
+              </a:ext>
+            </a:extLst>
+          </p:cNvPr>
+          <p:cNvCxnSpPr>
+            <a:cxnSpLocks/>
+          </p:cNvCxnSpPr>
+          <p:nvPr/>
+        </p:nvCxnSpPr>
+        <p:spPr>
+          <a:xfrm flipH="1">
+            <a:off x="7213055" y="2625829"/>
+            <a:ext cx="1648097" cy="1706277"/>
+          </a:xfrm>
+          <a:prstGeom prst="line">
+            <a:avLst/>
+          </a:prstGeom>
+          <a:ln w="73025">
+            <a:solidFill>
+              <a:schemeClr val="tx1"/>
+            </a:solidFill>
+          </a:ln>
+        </p:spPr>
+        <p:style>
+          <a:lnRef idx="2">
+            <a:schemeClr val="accent1"/>
+          </a:lnRef>
+          <a:fillRef idx="0">
+            <a:schemeClr val="accent1"/>
+          </a:fillRef>
+          <a:effectRef idx="1">
+            <a:schemeClr val="accent1"/>
+          </a:effectRef>
+          <a:fontRef idx="minor">
+            <a:schemeClr val="tx1"/>
+          </a:fontRef>
+        </p:style>
+      </p:cxnSp>
+      <p:sp>
+        <p:nvSpPr>
+          <p:cNvPr id="11" name="TextBox 10">
+            <a:extLst>
+              <a:ext uri="{FF2B5EF4-FFF2-40B4-BE49-F238E27FC236}">
+                <a16:creationId xmlns:a16="http://schemas.microsoft.com/office/drawing/2014/main" id="{9E5C86ED-DCFD-9B90-3297-6BE9FC63E922}"/>
+              </a:ext>
+            </a:extLst>
+          </p:cNvPr>
+          <p:cNvSpPr txBox="1"/>
+          <p:nvPr/>
+        </p:nvSpPr>
+        <p:spPr>
+          <a:xfrm>
+            <a:off x="6130834" y="2924970"/>
+            <a:ext cx="2028184" cy="553998"/>
+          </a:xfrm>
+          <a:prstGeom prst="rect">
+            <a:avLst/>
+          </a:prstGeom>
+          <a:noFill/>
+        </p:spPr>
+        <p:txBody>
+          <a:bodyPr wrap="none" rtlCol="0">
+            <a:spAutoFit/>
+          </a:bodyPr>
+          <a:lstStyle/>
+          <a:p>
+            <a:r>
+              <a:rPr lang="en-US" sz="3000" dirty="0">
+                <a:latin typeface="Times New Roman" panose="02020603050405020304" pitchFamily="18" charset="0"/>
+                <a:cs typeface="Times New Roman" panose="02020603050405020304" pitchFamily="18" charset="0"/>
+              </a:rPr>
+              <a:t>Latency = x</a:t>
+            </a:r>
+          </a:p>
+        </p:txBody>
+      </p:sp>
+      <p:cxnSp>
+        <p:nvCxnSpPr>
+          <p:cNvPr id="7" name="Straight Connector 6">
+            <a:extLst>
+              <a:ext uri="{FF2B5EF4-FFF2-40B4-BE49-F238E27FC236}">
+                <a16:creationId xmlns:a16="http://schemas.microsoft.com/office/drawing/2014/main" id="{1F9B1823-2EC1-1508-3152-71575FB19E43}"/>
+              </a:ext>
+            </a:extLst>
+          </p:cNvPr>
+          <p:cNvCxnSpPr>
+            <a:cxnSpLocks/>
+            <a:stCxn id="2" idx="4"/>
+            <a:endCxn id="5" idx="0"/>
+          </p:cNvCxnSpPr>
+          <p:nvPr/>
+        </p:nvCxnSpPr>
+        <p:spPr>
+          <a:xfrm flipH="1">
+            <a:off x="8410484" y="2625829"/>
+            <a:ext cx="537757" cy="1706277"/>
+          </a:xfrm>
+          <a:prstGeom prst="line">
+            <a:avLst/>
+          </a:prstGeom>
+          <a:ln w="73025">
+            <a:solidFill>
+              <a:schemeClr val="tx1"/>
+            </a:solidFill>
+          </a:ln>
+        </p:spPr>
+        <p:style>
+          <a:lnRef idx="2">
+            <a:schemeClr val="accent1"/>
+          </a:lnRef>
+          <a:fillRef idx="0">
+            <a:schemeClr val="accent1"/>
+          </a:fillRef>
+          <a:effectRef idx="1">
+            <a:schemeClr val="accent1"/>
+          </a:effectRef>
+          <a:fontRef idx="minor">
+            <a:schemeClr val="tx1"/>
+          </a:fontRef>
+        </p:style>
+      </p:cxnSp>
+      <p:cxnSp>
+        <p:nvCxnSpPr>
+          <p:cNvPr id="19" name="Straight Connector 18">
+            <a:extLst>
+              <a:ext uri="{FF2B5EF4-FFF2-40B4-BE49-F238E27FC236}">
+                <a16:creationId xmlns:a16="http://schemas.microsoft.com/office/drawing/2014/main" id="{C525E116-50E3-046C-317D-138A1C399C9B}"/>
+              </a:ext>
+            </a:extLst>
+          </p:cNvPr>
+          <p:cNvCxnSpPr>
+            <a:cxnSpLocks/>
+            <a:stCxn id="2" idx="4"/>
+            <a:endCxn id="10" idx="0"/>
+          </p:cNvCxnSpPr>
+          <p:nvPr/>
+        </p:nvCxnSpPr>
+        <p:spPr>
+          <a:xfrm>
+            <a:off x="8948241" y="2625829"/>
+            <a:ext cx="1807452" cy="1706277"/>
+          </a:xfrm>
+          <a:prstGeom prst="line">
+            <a:avLst/>
+          </a:prstGeom>
+          <a:ln w="73025">
+            <a:solidFill>
+              <a:schemeClr val="tx1"/>
+            </a:solidFill>
+          </a:ln>
+        </p:spPr>
+        <p:style>
+          <a:lnRef idx="2">
+            <a:schemeClr val="accent1"/>
+          </a:lnRef>
+          <a:fillRef idx="0">
+            <a:schemeClr val="accent1"/>
+          </a:fillRef>
+          <a:effectRef idx="1">
+            <a:schemeClr val="accent1"/>
+          </a:effectRef>
+          <a:fontRef idx="minor">
+            <a:schemeClr val="tx1"/>
+          </a:fontRef>
+        </p:style>
+      </p:cxnSp>
+      <p:sp>
+        <p:nvSpPr>
+          <p:cNvPr id="22" name="TextBox 21">
+            <a:extLst>
+              <a:ext uri="{FF2B5EF4-FFF2-40B4-BE49-F238E27FC236}">
+                <a16:creationId xmlns:a16="http://schemas.microsoft.com/office/drawing/2014/main" id="{AF14C3CB-9347-F813-B9B2-32B6A9A477B1}"/>
+              </a:ext>
+            </a:extLst>
+          </p:cNvPr>
+          <p:cNvSpPr txBox="1"/>
+          <p:nvPr/>
+        </p:nvSpPr>
+        <p:spPr>
+          <a:xfrm>
+            <a:off x="8276728" y="3351539"/>
+            <a:ext cx="377026" cy="553998"/>
+          </a:xfrm>
+          <a:prstGeom prst="rect">
+            <a:avLst/>
+          </a:prstGeom>
+          <a:noFill/>
+        </p:spPr>
+        <p:txBody>
+          <a:bodyPr wrap="none" rtlCol="0">
+            <a:spAutoFit/>
+          </a:bodyPr>
+          <a:lstStyle/>
+          <a:p>
+            <a:r>
+              <a:rPr lang="en-US" sz="3000" dirty="0">
+                <a:latin typeface="Times New Roman" panose="02020603050405020304" pitchFamily="18" charset="0"/>
+                <a:cs typeface="Times New Roman" panose="02020603050405020304" pitchFamily="18" charset="0"/>
+              </a:rPr>
+              <a:t>x</a:t>
+            </a:r>
+          </a:p>
+        </p:txBody>
+      </p:sp>
+      <p:sp>
+        <p:nvSpPr>
+          <p:cNvPr id="23" name="TextBox 22">
+            <a:extLst>
+              <a:ext uri="{FF2B5EF4-FFF2-40B4-BE49-F238E27FC236}">
+                <a16:creationId xmlns:a16="http://schemas.microsoft.com/office/drawing/2014/main" id="{E0E30447-0495-35A7-1FF7-53CB7E824849}"/>
+              </a:ext>
+            </a:extLst>
+          </p:cNvPr>
+          <p:cNvSpPr txBox="1"/>
+          <p:nvPr/>
+        </p:nvSpPr>
+        <p:spPr>
+          <a:xfrm>
+            <a:off x="9546135" y="3351539"/>
+            <a:ext cx="377026" cy="553998"/>
+          </a:xfrm>
+          <a:prstGeom prst="rect">
+            <a:avLst/>
+          </a:prstGeom>
+          <a:noFill/>
+        </p:spPr>
+        <p:txBody>
+          <a:bodyPr wrap="none" rtlCol="0">
+            <a:spAutoFit/>
+          </a:bodyPr>
+          <a:lstStyle/>
+          <a:p>
+            <a:r>
+              <a:rPr lang="en-US" sz="3000" dirty="0">
+                <a:latin typeface="Times New Roman" panose="02020603050405020304" pitchFamily="18" charset="0"/>
+                <a:cs typeface="Times New Roman" panose="02020603050405020304" pitchFamily="18" charset="0"/>
+              </a:rPr>
+              <a:t>x</a:t>
+            </a:r>
+          </a:p>
+        </p:txBody>
+      </p:sp>
+      <p:sp>
+        <p:nvSpPr>
+          <p:cNvPr id="24" name="TextBox 23">
+            <a:extLst>
+              <a:ext uri="{FF2B5EF4-FFF2-40B4-BE49-F238E27FC236}">
+                <a16:creationId xmlns:a16="http://schemas.microsoft.com/office/drawing/2014/main" id="{62D10E4F-278A-F361-E7B6-8B02D12E2AA2}"/>
+              </a:ext>
+            </a:extLst>
+          </p:cNvPr>
+          <p:cNvSpPr txBox="1"/>
+          <p:nvPr/>
+        </p:nvSpPr>
+        <p:spPr>
+          <a:xfrm>
+            <a:off x="6321963" y="5238604"/>
+            <a:ext cx="1532791" cy="1015663"/>
+          </a:xfrm>
+          <a:prstGeom prst="rect">
+            <a:avLst/>
+          </a:prstGeom>
+          <a:noFill/>
+        </p:spPr>
+        <p:txBody>
+          <a:bodyPr wrap="none" rtlCol="0">
+            <a:spAutoFit/>
+          </a:bodyPr>
+          <a:lstStyle/>
+          <a:p>
+            <a:pPr algn="ctr"/>
+            <a:r>
+              <a:rPr lang="en-US" sz="3000" dirty="0">
+                <a:latin typeface="Times New Roman" panose="02020603050405020304" pitchFamily="18" charset="0"/>
+                <a:cs typeface="Times New Roman" panose="02020603050405020304" pitchFamily="18" charset="0"/>
+              </a:rPr>
+              <a:t>Machine</a:t>
+            </a:r>
+            <a:br>
+              <a:rPr lang="en-US" sz="3000" dirty="0">
+                <a:latin typeface="Times New Roman" panose="02020603050405020304" pitchFamily="18" charset="0"/>
+                <a:cs typeface="Times New Roman" panose="02020603050405020304" pitchFamily="18" charset="0"/>
+              </a:rPr>
+            </a:br>
+            <a:r>
+              <a:rPr lang="en-US" sz="3000" dirty="0">
+                <a:latin typeface="Times New Roman" panose="02020603050405020304" pitchFamily="18" charset="0"/>
+                <a:cs typeface="Times New Roman" panose="02020603050405020304" pitchFamily="18" charset="0"/>
+              </a:rPr>
+              <a:t>1</a:t>
+            </a:r>
+          </a:p>
+        </p:txBody>
+      </p:sp>
+      <p:sp>
+        <p:nvSpPr>
+          <p:cNvPr id="25" name="TextBox 24">
+            <a:extLst>
+              <a:ext uri="{FF2B5EF4-FFF2-40B4-BE49-F238E27FC236}">
+                <a16:creationId xmlns:a16="http://schemas.microsoft.com/office/drawing/2014/main" id="{EA8396D4-A697-F022-22A8-6F5C4DB2659A}"/>
+              </a:ext>
+            </a:extLst>
+          </p:cNvPr>
+          <p:cNvSpPr txBox="1"/>
+          <p:nvPr/>
+        </p:nvSpPr>
+        <p:spPr>
+          <a:xfrm>
+            <a:off x="7934905" y="5274843"/>
+            <a:ext cx="1532791" cy="1015663"/>
+          </a:xfrm>
+          <a:prstGeom prst="rect">
+            <a:avLst/>
+          </a:prstGeom>
+          <a:noFill/>
+        </p:spPr>
+        <p:txBody>
+          <a:bodyPr wrap="none" rtlCol="0">
+            <a:spAutoFit/>
+          </a:bodyPr>
+          <a:lstStyle/>
+          <a:p>
+            <a:pPr algn="ctr"/>
+            <a:r>
+              <a:rPr lang="en-US" sz="3000" dirty="0">
+                <a:latin typeface="Times New Roman" panose="02020603050405020304" pitchFamily="18" charset="0"/>
+                <a:cs typeface="Times New Roman" panose="02020603050405020304" pitchFamily="18" charset="0"/>
+              </a:rPr>
+              <a:t>Machine</a:t>
+            </a:r>
+            <a:br>
+              <a:rPr lang="en-US" sz="3000" dirty="0">
+                <a:latin typeface="Times New Roman" panose="02020603050405020304" pitchFamily="18" charset="0"/>
+                <a:cs typeface="Times New Roman" panose="02020603050405020304" pitchFamily="18" charset="0"/>
+              </a:rPr>
+            </a:br>
+            <a:r>
+              <a:rPr lang="en-US" sz="3000" dirty="0">
+                <a:latin typeface="Times New Roman" panose="02020603050405020304" pitchFamily="18" charset="0"/>
+                <a:cs typeface="Times New Roman" panose="02020603050405020304" pitchFamily="18" charset="0"/>
+              </a:rPr>
+              <a:t>2</a:t>
+            </a:r>
+          </a:p>
+        </p:txBody>
+      </p:sp>
+      <p:sp>
+        <p:nvSpPr>
+          <p:cNvPr id="26" name="TextBox 25">
+            <a:extLst>
+              <a:ext uri="{FF2B5EF4-FFF2-40B4-BE49-F238E27FC236}">
+                <a16:creationId xmlns:a16="http://schemas.microsoft.com/office/drawing/2014/main" id="{97B3F969-99E1-DB2C-D2BF-AE9B19F2AA11}"/>
+              </a:ext>
+            </a:extLst>
+          </p:cNvPr>
+          <p:cNvSpPr txBox="1"/>
+          <p:nvPr/>
+        </p:nvSpPr>
+        <p:spPr>
+          <a:xfrm>
+            <a:off x="9989296" y="5238604"/>
+            <a:ext cx="1532791" cy="1015663"/>
+          </a:xfrm>
+          <a:prstGeom prst="rect">
+            <a:avLst/>
+          </a:prstGeom>
+          <a:noFill/>
+        </p:spPr>
+        <p:txBody>
+          <a:bodyPr wrap="none" rtlCol="0">
+            <a:spAutoFit/>
+          </a:bodyPr>
+          <a:lstStyle/>
+          <a:p>
+            <a:pPr algn="ctr"/>
+            <a:r>
+              <a:rPr lang="en-US" sz="3000" dirty="0">
+                <a:latin typeface="Times New Roman" panose="02020603050405020304" pitchFamily="18" charset="0"/>
+                <a:cs typeface="Times New Roman" panose="02020603050405020304" pitchFamily="18" charset="0"/>
+              </a:rPr>
+              <a:t>Machine</a:t>
+            </a:r>
+            <a:br>
+              <a:rPr lang="en-US" sz="3000" dirty="0">
+                <a:latin typeface="Times New Roman" panose="02020603050405020304" pitchFamily="18" charset="0"/>
+                <a:cs typeface="Times New Roman" panose="02020603050405020304" pitchFamily="18" charset="0"/>
+              </a:rPr>
+            </a:br>
+            <a:r>
+              <a:rPr lang="en-US" sz="3000" dirty="0">
+                <a:latin typeface="Times New Roman" panose="02020603050405020304" pitchFamily="18" charset="0"/>
+                <a:cs typeface="Times New Roman" panose="02020603050405020304" pitchFamily="18" charset="0"/>
+              </a:rPr>
+              <a:t>n</a:t>
+            </a:r>
+          </a:p>
+        </p:txBody>
+      </p:sp>
+    </p:spTree>
+    <p:extLst>
+      <p:ext uri="{BB962C8B-B14F-4D97-AF65-F5344CB8AC3E}">
+        <p14:creationId xmlns:p14="http://schemas.microsoft.com/office/powerpoint/2010/main" val="4252485894"/>
       </p:ext>
     </p:extLst>
   </p:cSld>

--- a/thesis-latency-fairness.pptx
+++ b/thesis-latency-fairness.pptx
@@ -4,6 +4,9 @@
   <p:sldMasterIdLst>
     <p:sldMasterId id="2147483648" r:id="rId1"/>
   </p:sldMasterIdLst>
+  <p:notesMasterIdLst>
+    <p:notesMasterId r:id="rId10"/>
+  </p:notesMasterIdLst>
   <p:sldIdLst>
     <p:sldId id="256" r:id="rId2"/>
     <p:sldId id="257" r:id="rId3"/>
@@ -114,6 +117,442 @@
 </p:presentation>
 </file>
 
+<file path=ppt/notesMasters/notesMaster1.xml><?xml version="1.0" encoding="utf-8"?>
+<p:notesMaster xmlns:a="http://schemas.openxmlformats.org/drawingml/2006/main" xmlns:r="http://schemas.openxmlformats.org/officeDocument/2006/relationships" xmlns:p="http://schemas.openxmlformats.org/presentationml/2006/main">
+  <p:cSld>
+    <p:bg>
+      <p:bgRef idx="1001">
+        <a:schemeClr val="bg1"/>
+      </p:bgRef>
+    </p:bg>
+    <p:spTree>
+      <p:nvGrpSpPr>
+        <p:cNvPr id="1" name=""/>
+        <p:cNvGrpSpPr/>
+        <p:nvPr/>
+      </p:nvGrpSpPr>
+      <p:grpSpPr>
+        <a:xfrm>
+          <a:off x="0" y="0"/>
+          <a:ext cx="0" cy="0"/>
+          <a:chOff x="0" y="0"/>
+          <a:chExt cx="0" cy="0"/>
+        </a:xfrm>
+      </p:grpSpPr>
+      <p:sp>
+        <p:nvSpPr>
+          <p:cNvPr id="2" name="Header Placeholder 1"/>
+          <p:cNvSpPr>
+            <a:spLocks noGrp="1"/>
+          </p:cNvSpPr>
+          <p:nvPr>
+            <p:ph type="hdr" sz="quarter"/>
+          </p:nvPr>
+        </p:nvSpPr>
+        <p:spPr>
+          <a:xfrm>
+            <a:off x="0" y="0"/>
+            <a:ext cx="2971800" cy="458788"/>
+          </a:xfrm>
+          <a:prstGeom prst="rect">
+            <a:avLst/>
+          </a:prstGeom>
+        </p:spPr>
+        <p:txBody>
+          <a:bodyPr vert="horz" lIns="91440" tIns="45720" rIns="91440" bIns="45720" rtlCol="0"/>
+          <a:lstStyle>
+            <a:lvl1pPr algn="l">
+              <a:defRPr sz="1200"/>
+            </a:lvl1pPr>
+          </a:lstStyle>
+          <a:p>
+            <a:endParaRPr lang="en-US"/>
+          </a:p>
+        </p:txBody>
+      </p:sp>
+      <p:sp>
+        <p:nvSpPr>
+          <p:cNvPr id="3" name="Date Placeholder 2"/>
+          <p:cNvSpPr>
+            <a:spLocks noGrp="1"/>
+          </p:cNvSpPr>
+          <p:nvPr>
+            <p:ph type="dt" idx="1"/>
+          </p:nvPr>
+        </p:nvSpPr>
+        <p:spPr>
+          <a:xfrm>
+            <a:off x="3884613" y="0"/>
+            <a:ext cx="2971800" cy="458788"/>
+          </a:xfrm>
+          <a:prstGeom prst="rect">
+            <a:avLst/>
+          </a:prstGeom>
+        </p:spPr>
+        <p:txBody>
+          <a:bodyPr vert="horz" lIns="91440" tIns="45720" rIns="91440" bIns="45720" rtlCol="0"/>
+          <a:lstStyle>
+            <a:lvl1pPr algn="r">
+              <a:defRPr sz="1200"/>
+            </a:lvl1pPr>
+          </a:lstStyle>
+          <a:p>
+            <a:fld id="{2A89E14C-4B77-9345-AC7C-9D930EA32606}" type="datetimeFigureOut">
+              <a:rPr lang="en-US" smtClean="0"/>
+              <a:t>4/4/26</a:t>
+            </a:fld>
+            <a:endParaRPr lang="en-US"/>
+          </a:p>
+        </p:txBody>
+      </p:sp>
+      <p:sp>
+        <p:nvSpPr>
+          <p:cNvPr id="4" name="Slide Image Placeholder 3"/>
+          <p:cNvSpPr>
+            <a:spLocks noGrp="1" noRot="1" noChangeAspect="1"/>
+          </p:cNvSpPr>
+          <p:nvPr>
+            <p:ph type="sldImg" idx="2"/>
+          </p:nvPr>
+        </p:nvSpPr>
+        <p:spPr>
+          <a:xfrm>
+            <a:off x="685800" y="1143000"/>
+            <a:ext cx="5486400" cy="3086100"/>
+          </a:xfrm>
+          <a:prstGeom prst="rect">
+            <a:avLst/>
+          </a:prstGeom>
+          <a:noFill/>
+          <a:ln w="12700">
+            <a:solidFill>
+              <a:prstClr val="black"/>
+            </a:solidFill>
+          </a:ln>
+        </p:spPr>
+        <p:txBody>
+          <a:bodyPr vert="horz" lIns="91440" tIns="45720" rIns="91440" bIns="45720" rtlCol="0" anchor="ctr"/>
+          <a:lstStyle/>
+          <a:p>
+            <a:endParaRPr lang="en-US"/>
+          </a:p>
+        </p:txBody>
+      </p:sp>
+      <p:sp>
+        <p:nvSpPr>
+          <p:cNvPr id="5" name="Notes Placeholder 4"/>
+          <p:cNvSpPr>
+            <a:spLocks noGrp="1"/>
+          </p:cNvSpPr>
+          <p:nvPr>
+            <p:ph type="body" sz="quarter" idx="3"/>
+          </p:nvPr>
+        </p:nvSpPr>
+        <p:spPr>
+          <a:xfrm>
+            <a:off x="685800" y="4400550"/>
+            <a:ext cx="5486400" cy="3600450"/>
+          </a:xfrm>
+          <a:prstGeom prst="rect">
+            <a:avLst/>
+          </a:prstGeom>
+        </p:spPr>
+        <p:txBody>
+          <a:bodyPr vert="horz" lIns="91440" tIns="45720" rIns="91440" bIns="45720" rtlCol="0"/>
+          <a:lstStyle/>
+          <a:p>
+            <a:pPr lvl="0"/>
+            <a:r>
+              <a:rPr lang="en-US"/>
+              <a:t>Click to edit Master text styles</a:t>
+            </a:r>
+          </a:p>
+          <a:p>
+            <a:pPr lvl="1"/>
+            <a:r>
+              <a:rPr lang="en-US"/>
+              <a:t>Second level</a:t>
+            </a:r>
+          </a:p>
+          <a:p>
+            <a:pPr lvl="2"/>
+            <a:r>
+              <a:rPr lang="en-US"/>
+              <a:t>Third level</a:t>
+            </a:r>
+          </a:p>
+          <a:p>
+            <a:pPr lvl="3"/>
+            <a:r>
+              <a:rPr lang="en-US"/>
+              <a:t>Fourth level</a:t>
+            </a:r>
+          </a:p>
+          <a:p>
+            <a:pPr lvl="4"/>
+            <a:r>
+              <a:rPr lang="en-US"/>
+              <a:t>Fifth level</a:t>
+            </a:r>
+          </a:p>
+        </p:txBody>
+      </p:sp>
+      <p:sp>
+        <p:nvSpPr>
+          <p:cNvPr id="6" name="Footer Placeholder 5"/>
+          <p:cNvSpPr>
+            <a:spLocks noGrp="1"/>
+          </p:cNvSpPr>
+          <p:nvPr>
+            <p:ph type="ftr" sz="quarter" idx="4"/>
+          </p:nvPr>
+        </p:nvSpPr>
+        <p:spPr>
+          <a:xfrm>
+            <a:off x="0" y="8685213"/>
+            <a:ext cx="2971800" cy="458787"/>
+          </a:xfrm>
+          <a:prstGeom prst="rect">
+            <a:avLst/>
+          </a:prstGeom>
+        </p:spPr>
+        <p:txBody>
+          <a:bodyPr vert="horz" lIns="91440" tIns="45720" rIns="91440" bIns="45720" rtlCol="0" anchor="b"/>
+          <a:lstStyle>
+            <a:lvl1pPr algn="l">
+              <a:defRPr sz="1200"/>
+            </a:lvl1pPr>
+          </a:lstStyle>
+          <a:p>
+            <a:endParaRPr lang="en-US"/>
+          </a:p>
+        </p:txBody>
+      </p:sp>
+      <p:sp>
+        <p:nvSpPr>
+          <p:cNvPr id="7" name="Slide Number Placeholder 6"/>
+          <p:cNvSpPr>
+            <a:spLocks noGrp="1"/>
+          </p:cNvSpPr>
+          <p:nvPr>
+            <p:ph type="sldNum" sz="quarter" idx="5"/>
+          </p:nvPr>
+        </p:nvSpPr>
+        <p:spPr>
+          <a:xfrm>
+            <a:off x="3884613" y="8685213"/>
+            <a:ext cx="2971800" cy="458787"/>
+          </a:xfrm>
+          <a:prstGeom prst="rect">
+            <a:avLst/>
+          </a:prstGeom>
+        </p:spPr>
+        <p:txBody>
+          <a:bodyPr vert="horz" lIns="91440" tIns="45720" rIns="91440" bIns="45720" rtlCol="0" anchor="b"/>
+          <a:lstStyle>
+            <a:lvl1pPr algn="r">
+              <a:defRPr sz="1200"/>
+            </a:lvl1pPr>
+          </a:lstStyle>
+          <a:p>
+            <a:fld id="{5AD2936D-68DF-C34D-84E6-1FDAB4C19BCF}" type="slidenum">
+              <a:rPr lang="en-US" smtClean="0"/>
+              <a:t>‹#›</a:t>
+            </a:fld>
+            <a:endParaRPr lang="en-US"/>
+          </a:p>
+        </p:txBody>
+      </p:sp>
+    </p:spTree>
+    <p:extLst>
+      <p:ext uri="{BB962C8B-B14F-4D97-AF65-F5344CB8AC3E}">
+        <p14:creationId xmlns:p14="http://schemas.microsoft.com/office/powerpoint/2010/main" val="1367195131"/>
+      </p:ext>
+    </p:extLst>
+  </p:cSld>
+  <p:clrMap bg1="lt1" tx1="dk1" bg2="lt2" tx2="dk2" accent1="accent1" accent2="accent2" accent3="accent3" accent4="accent4" accent5="accent5" accent6="accent6" hlink="hlink" folHlink="folHlink"/>
+  <p:notesStyle>
+    <a:lvl1pPr marL="0" algn="l" defTabSz="914400" rtl="0" eaLnBrk="1" latinLnBrk="0" hangingPunct="1">
+      <a:defRPr sz="1200" kern="1200">
+        <a:solidFill>
+          <a:schemeClr val="tx1"/>
+        </a:solidFill>
+        <a:latin typeface="+mn-lt"/>
+        <a:ea typeface="+mn-ea"/>
+        <a:cs typeface="+mn-cs"/>
+      </a:defRPr>
+    </a:lvl1pPr>
+    <a:lvl2pPr marL="457200" algn="l" defTabSz="914400" rtl="0" eaLnBrk="1" latinLnBrk="0" hangingPunct="1">
+      <a:defRPr sz="1200" kern="1200">
+        <a:solidFill>
+          <a:schemeClr val="tx1"/>
+        </a:solidFill>
+        <a:latin typeface="+mn-lt"/>
+        <a:ea typeface="+mn-ea"/>
+        <a:cs typeface="+mn-cs"/>
+      </a:defRPr>
+    </a:lvl2pPr>
+    <a:lvl3pPr marL="914400" algn="l" defTabSz="914400" rtl="0" eaLnBrk="1" latinLnBrk="0" hangingPunct="1">
+      <a:defRPr sz="1200" kern="1200">
+        <a:solidFill>
+          <a:schemeClr val="tx1"/>
+        </a:solidFill>
+        <a:latin typeface="+mn-lt"/>
+        <a:ea typeface="+mn-ea"/>
+        <a:cs typeface="+mn-cs"/>
+      </a:defRPr>
+    </a:lvl3pPr>
+    <a:lvl4pPr marL="1371600" algn="l" defTabSz="914400" rtl="0" eaLnBrk="1" latinLnBrk="0" hangingPunct="1">
+      <a:defRPr sz="1200" kern="1200">
+        <a:solidFill>
+          <a:schemeClr val="tx1"/>
+        </a:solidFill>
+        <a:latin typeface="+mn-lt"/>
+        <a:ea typeface="+mn-ea"/>
+        <a:cs typeface="+mn-cs"/>
+      </a:defRPr>
+    </a:lvl4pPr>
+    <a:lvl5pPr marL="1828800" algn="l" defTabSz="914400" rtl="0" eaLnBrk="1" latinLnBrk="0" hangingPunct="1">
+      <a:defRPr sz="1200" kern="1200">
+        <a:solidFill>
+          <a:schemeClr val="tx1"/>
+        </a:solidFill>
+        <a:latin typeface="+mn-lt"/>
+        <a:ea typeface="+mn-ea"/>
+        <a:cs typeface="+mn-cs"/>
+      </a:defRPr>
+    </a:lvl5pPr>
+    <a:lvl6pPr marL="2286000" algn="l" defTabSz="914400" rtl="0" eaLnBrk="1" latinLnBrk="0" hangingPunct="1">
+      <a:defRPr sz="1200" kern="1200">
+        <a:solidFill>
+          <a:schemeClr val="tx1"/>
+        </a:solidFill>
+        <a:latin typeface="+mn-lt"/>
+        <a:ea typeface="+mn-ea"/>
+        <a:cs typeface="+mn-cs"/>
+      </a:defRPr>
+    </a:lvl6pPr>
+    <a:lvl7pPr marL="2743200" algn="l" defTabSz="914400" rtl="0" eaLnBrk="1" latinLnBrk="0" hangingPunct="1">
+      <a:defRPr sz="1200" kern="1200">
+        <a:solidFill>
+          <a:schemeClr val="tx1"/>
+        </a:solidFill>
+        <a:latin typeface="+mn-lt"/>
+        <a:ea typeface="+mn-ea"/>
+        <a:cs typeface="+mn-cs"/>
+      </a:defRPr>
+    </a:lvl7pPr>
+    <a:lvl8pPr marL="3200400" algn="l" defTabSz="914400" rtl="0" eaLnBrk="1" latinLnBrk="0" hangingPunct="1">
+      <a:defRPr sz="1200" kern="1200">
+        <a:solidFill>
+          <a:schemeClr val="tx1"/>
+        </a:solidFill>
+        <a:latin typeface="+mn-lt"/>
+        <a:ea typeface="+mn-ea"/>
+        <a:cs typeface="+mn-cs"/>
+      </a:defRPr>
+    </a:lvl8pPr>
+    <a:lvl9pPr marL="3657600" algn="l" defTabSz="914400" rtl="0" eaLnBrk="1" latinLnBrk="0" hangingPunct="1">
+      <a:defRPr sz="1200" kern="1200">
+        <a:solidFill>
+          <a:schemeClr val="tx1"/>
+        </a:solidFill>
+        <a:latin typeface="+mn-lt"/>
+        <a:ea typeface="+mn-ea"/>
+        <a:cs typeface="+mn-cs"/>
+      </a:defRPr>
+    </a:lvl9pPr>
+  </p:notesStyle>
+</p:notesMaster>
+</file>
+
+<file path=ppt/notesSlides/notesSlide1.xml><?xml version="1.0" encoding="utf-8"?>
+<p:notes xmlns:a="http://schemas.openxmlformats.org/drawingml/2006/main" xmlns:r="http://schemas.openxmlformats.org/officeDocument/2006/relationships" xmlns:p="http://schemas.openxmlformats.org/presentationml/2006/main">
+  <p:cSld>
+    <p:spTree>
+      <p:nvGrpSpPr>
+        <p:cNvPr id="1" name=""/>
+        <p:cNvGrpSpPr/>
+        <p:nvPr/>
+      </p:nvGrpSpPr>
+      <p:grpSpPr>
+        <a:xfrm>
+          <a:off x="0" y="0"/>
+          <a:ext cx="0" cy="0"/>
+          <a:chOff x="0" y="0"/>
+          <a:chExt cx="0" cy="0"/>
+        </a:xfrm>
+      </p:grpSpPr>
+      <p:sp>
+        <p:nvSpPr>
+          <p:cNvPr id="2" name="Slide Image Placeholder 1"/>
+          <p:cNvSpPr>
+            <a:spLocks noGrp="1" noRot="1" noChangeAspect="1"/>
+          </p:cNvSpPr>
+          <p:nvPr>
+            <p:ph type="sldImg"/>
+          </p:nvPr>
+        </p:nvSpPr>
+        <p:spPr/>
+      </p:sp>
+      <p:sp>
+        <p:nvSpPr>
+          <p:cNvPr id="3" name="Notes Placeholder 2"/>
+          <p:cNvSpPr>
+            <a:spLocks noGrp="1"/>
+          </p:cNvSpPr>
+          <p:nvPr>
+            <p:ph type="body" idx="1"/>
+          </p:nvPr>
+        </p:nvSpPr>
+        <p:spPr/>
+        <p:txBody>
+          <a:bodyPr/>
+          <a:lstStyle/>
+          <a:p>
+            <a:r>
+              <a:rPr lang="en-US" dirty="0"/>
+              <a:t>Not having latency fairness can lead to unwanted unfair competition, users may not come</a:t>
+            </a:r>
+          </a:p>
+        </p:txBody>
+      </p:sp>
+      <p:sp>
+        <p:nvSpPr>
+          <p:cNvPr id="4" name="Slide Number Placeholder 3"/>
+          <p:cNvSpPr>
+            <a:spLocks noGrp="1"/>
+          </p:cNvSpPr>
+          <p:nvPr>
+            <p:ph type="sldNum" sz="quarter" idx="5"/>
+          </p:nvPr>
+        </p:nvSpPr>
+        <p:spPr/>
+        <p:txBody>
+          <a:bodyPr/>
+          <a:lstStyle/>
+          <a:p>
+            <a:fld id="{5AD2936D-68DF-C34D-84E6-1FDAB4C19BCF}" type="slidenum">
+              <a:rPr lang="en-US" smtClean="0"/>
+              <a:t>8</a:t>
+            </a:fld>
+            <a:endParaRPr lang="en-US"/>
+          </a:p>
+        </p:txBody>
+      </p:sp>
+    </p:spTree>
+    <p:extLst>
+      <p:ext uri="{BB962C8B-B14F-4D97-AF65-F5344CB8AC3E}">
+        <p14:creationId xmlns:p14="http://schemas.microsoft.com/office/powerpoint/2010/main" val="572064106"/>
+      </p:ext>
+    </p:extLst>
+  </p:cSld>
+  <p:clrMapOvr>
+    <a:masterClrMapping/>
+  </p:clrMapOvr>
+</p:notes>
+</file>
+
 <file path=ppt/slideLayouts/slideLayout1.xml><?xml version="1.0" encoding="utf-8"?>
 <p:sldLayout xmlns:a="http://schemas.openxmlformats.org/drawingml/2006/main" xmlns:r="http://schemas.openxmlformats.org/officeDocument/2006/relationships" xmlns:p="http://schemas.openxmlformats.org/presentationml/2006/main" type="title" preserve="1">
   <p:cSld name="Title Slide">
@@ -808,35 +1247,35 @@
           <a:p>
             <a:pPr lvl="0"/>
             <a:r>
-              <a:rPr lang="en-US"/>
+              <a:rPr lang="en-US" dirty="0"/>
               <a:t>Click to edit Master text styles</a:t>
             </a:r>
           </a:p>
           <a:p>
             <a:pPr lvl="1"/>
             <a:r>
-              <a:rPr lang="en-US"/>
+              <a:rPr lang="en-US" dirty="0"/>
               <a:t>Second level</a:t>
             </a:r>
           </a:p>
           <a:p>
             <a:pPr lvl="2"/>
             <a:r>
-              <a:rPr lang="en-US"/>
+              <a:rPr lang="en-US" dirty="0"/>
               <a:t>Third level</a:t>
             </a:r>
           </a:p>
           <a:p>
             <a:pPr lvl="3"/>
             <a:r>
-              <a:rPr lang="en-US"/>
+              <a:rPr lang="en-US" dirty="0"/>
               <a:t>Fourth level</a:t>
             </a:r>
           </a:p>
           <a:p>
             <a:pPr lvl="4"/>
             <a:r>
-              <a:rPr lang="en-US"/>
+              <a:rPr lang="en-US" dirty="0"/>
               <a:t>Fifth level</a:t>
             </a:r>
           </a:p>
@@ -5599,10 +6038,247 @@
       </p:sp>
       <p:cxnSp>
         <p:nvCxnSpPr>
-          <p:cNvPr id="13" name="Straight Connector 12">
-            <a:extLst>
-              <a:ext uri="{FF2B5EF4-FFF2-40B4-BE49-F238E27FC236}">
-                <a16:creationId xmlns:a16="http://schemas.microsoft.com/office/drawing/2014/main" id="{25C2855A-FF51-4772-A10F-02FA7B90A0FC}"/>
+          <p:cNvPr id="8" name="Straight Connector 7">
+            <a:extLst>
+              <a:ext uri="{FF2B5EF4-FFF2-40B4-BE49-F238E27FC236}">
+                <a16:creationId xmlns:a16="http://schemas.microsoft.com/office/drawing/2014/main" id="{09961447-688A-261E-A45E-ED90FA8284AA}"/>
+              </a:ext>
+            </a:extLst>
+          </p:cNvPr>
+          <p:cNvCxnSpPr>
+            <a:cxnSpLocks/>
+          </p:cNvCxnSpPr>
+          <p:nvPr/>
+        </p:nvCxnSpPr>
+        <p:spPr>
+          <a:xfrm flipH="1">
+            <a:off x="4898571" y="2625829"/>
+            <a:ext cx="1648097" cy="1706277"/>
+          </a:xfrm>
+          <a:prstGeom prst="line">
+            <a:avLst/>
+          </a:prstGeom>
+          <a:ln w="73025">
+            <a:solidFill>
+              <a:schemeClr val="tx1"/>
+            </a:solidFill>
+          </a:ln>
+        </p:spPr>
+        <p:style>
+          <a:lnRef idx="2">
+            <a:schemeClr val="accent1"/>
+          </a:lnRef>
+          <a:fillRef idx="0">
+            <a:schemeClr val="accent1"/>
+          </a:fillRef>
+          <a:effectRef idx="1">
+            <a:schemeClr val="accent1"/>
+          </a:effectRef>
+          <a:fontRef idx="minor">
+            <a:schemeClr val="tx1"/>
+          </a:fontRef>
+        </p:style>
+      </p:cxnSp>
+      <p:sp>
+        <p:nvSpPr>
+          <p:cNvPr id="11" name="TextBox 10">
+            <a:extLst>
+              <a:ext uri="{FF2B5EF4-FFF2-40B4-BE49-F238E27FC236}">
+                <a16:creationId xmlns:a16="http://schemas.microsoft.com/office/drawing/2014/main" id="{9BDDC9B8-F36C-2C1B-4F24-86B93D2DB4BA}"/>
+              </a:ext>
+            </a:extLst>
+          </p:cNvPr>
+          <p:cNvSpPr txBox="1"/>
+          <p:nvPr/>
+        </p:nvSpPr>
+        <p:spPr>
+          <a:xfrm>
+            <a:off x="3816350" y="2924970"/>
+            <a:ext cx="2028184" cy="553998"/>
+          </a:xfrm>
+          <a:prstGeom prst="rect">
+            <a:avLst/>
+          </a:prstGeom>
+          <a:noFill/>
+        </p:spPr>
+        <p:txBody>
+          <a:bodyPr wrap="none" rtlCol="0">
+            <a:spAutoFit/>
+          </a:bodyPr>
+          <a:lstStyle/>
+          <a:p>
+            <a:r>
+              <a:rPr lang="en-US" sz="3000" dirty="0">
+                <a:latin typeface="Times New Roman" panose="02020603050405020304" pitchFamily="18" charset="0"/>
+                <a:cs typeface="Times New Roman" panose="02020603050405020304" pitchFamily="18" charset="0"/>
+              </a:rPr>
+              <a:t>Latency = x</a:t>
+            </a:r>
+          </a:p>
+        </p:txBody>
+      </p:sp>
+      <p:sp>
+        <p:nvSpPr>
+          <p:cNvPr id="12" name="TextBox 11">
+            <a:extLst>
+              <a:ext uri="{FF2B5EF4-FFF2-40B4-BE49-F238E27FC236}">
+                <a16:creationId xmlns:a16="http://schemas.microsoft.com/office/drawing/2014/main" id="{B81E5939-12FA-CE10-B388-A106748BD7CB}"/>
+              </a:ext>
+            </a:extLst>
+          </p:cNvPr>
+          <p:cNvSpPr txBox="1"/>
+          <p:nvPr/>
+        </p:nvSpPr>
+        <p:spPr>
+          <a:xfrm>
+            <a:off x="4007479" y="5238604"/>
+            <a:ext cx="1532791" cy="1015663"/>
+          </a:xfrm>
+          <a:prstGeom prst="rect">
+            <a:avLst/>
+          </a:prstGeom>
+          <a:noFill/>
+        </p:spPr>
+        <p:txBody>
+          <a:bodyPr wrap="none" rtlCol="0">
+            <a:spAutoFit/>
+          </a:bodyPr>
+          <a:lstStyle/>
+          <a:p>
+            <a:pPr algn="ctr"/>
+            <a:r>
+              <a:rPr lang="en-US" sz="3000" dirty="0">
+                <a:latin typeface="Times New Roman" panose="02020603050405020304" pitchFamily="18" charset="0"/>
+                <a:cs typeface="Times New Roman" panose="02020603050405020304" pitchFamily="18" charset="0"/>
+              </a:rPr>
+              <a:t>Machine</a:t>
+            </a:r>
+            <a:br>
+              <a:rPr lang="en-US" sz="3000" dirty="0">
+                <a:latin typeface="Times New Roman" panose="02020603050405020304" pitchFamily="18" charset="0"/>
+                <a:cs typeface="Times New Roman" panose="02020603050405020304" pitchFamily="18" charset="0"/>
+              </a:rPr>
+            </a:br>
+            <a:r>
+              <a:rPr lang="en-US" sz="3000" dirty="0">
+                <a:latin typeface="Times New Roman" panose="02020603050405020304" pitchFamily="18" charset="0"/>
+                <a:cs typeface="Times New Roman" panose="02020603050405020304" pitchFamily="18" charset="0"/>
+              </a:rPr>
+              <a:t>1</a:t>
+            </a:r>
+          </a:p>
+        </p:txBody>
+      </p:sp>
+      <p:sp>
+        <p:nvSpPr>
+          <p:cNvPr id="19" name="TextBox 18">
+            <a:extLst>
+              <a:ext uri="{FF2B5EF4-FFF2-40B4-BE49-F238E27FC236}">
+                <a16:creationId xmlns:a16="http://schemas.microsoft.com/office/drawing/2014/main" id="{72FB38A1-9623-97A0-250D-AB35EF8DADC2}"/>
+              </a:ext>
+            </a:extLst>
+          </p:cNvPr>
+          <p:cNvSpPr txBox="1"/>
+          <p:nvPr/>
+        </p:nvSpPr>
+        <p:spPr>
+          <a:xfrm>
+            <a:off x="5620421" y="5274843"/>
+            <a:ext cx="1532791" cy="1015663"/>
+          </a:xfrm>
+          <a:prstGeom prst="rect">
+            <a:avLst/>
+          </a:prstGeom>
+          <a:noFill/>
+        </p:spPr>
+        <p:txBody>
+          <a:bodyPr wrap="none" rtlCol="0">
+            <a:spAutoFit/>
+          </a:bodyPr>
+          <a:lstStyle/>
+          <a:p>
+            <a:pPr algn="ctr"/>
+            <a:r>
+              <a:rPr lang="en-US" sz="3000" dirty="0">
+                <a:latin typeface="Times New Roman" panose="02020603050405020304" pitchFamily="18" charset="0"/>
+                <a:cs typeface="Times New Roman" panose="02020603050405020304" pitchFamily="18" charset="0"/>
+              </a:rPr>
+              <a:t>Machine</a:t>
+            </a:r>
+            <a:br>
+              <a:rPr lang="en-US" sz="3000" dirty="0">
+                <a:latin typeface="Times New Roman" panose="02020603050405020304" pitchFamily="18" charset="0"/>
+                <a:cs typeface="Times New Roman" panose="02020603050405020304" pitchFamily="18" charset="0"/>
+              </a:rPr>
+            </a:br>
+            <a:r>
+              <a:rPr lang="en-US" sz="3000" dirty="0">
+                <a:latin typeface="Times New Roman" panose="02020603050405020304" pitchFamily="18" charset="0"/>
+                <a:cs typeface="Times New Roman" panose="02020603050405020304" pitchFamily="18" charset="0"/>
+              </a:rPr>
+              <a:t>2</a:t>
+            </a:r>
+          </a:p>
+        </p:txBody>
+      </p:sp>
+      <p:sp>
+        <p:nvSpPr>
+          <p:cNvPr id="20" name="TextBox 19">
+            <a:extLst>
+              <a:ext uri="{FF2B5EF4-FFF2-40B4-BE49-F238E27FC236}">
+                <a16:creationId xmlns:a16="http://schemas.microsoft.com/office/drawing/2014/main" id="{E47BD87B-5E1F-B131-B8C7-252A6C7C6C19}"/>
+              </a:ext>
+            </a:extLst>
+          </p:cNvPr>
+          <p:cNvSpPr txBox="1"/>
+          <p:nvPr/>
+        </p:nvSpPr>
+        <p:spPr>
+          <a:xfrm>
+            <a:off x="7674812" y="5238604"/>
+            <a:ext cx="1532791" cy="1015663"/>
+          </a:xfrm>
+          <a:prstGeom prst="rect">
+            <a:avLst/>
+          </a:prstGeom>
+          <a:noFill/>
+        </p:spPr>
+        <p:txBody>
+          <a:bodyPr wrap="none" rtlCol="0">
+            <a:spAutoFit/>
+          </a:bodyPr>
+          <a:lstStyle/>
+          <a:p>
+            <a:pPr algn="ctr"/>
+            <a:r>
+              <a:rPr lang="en-US" sz="3000" dirty="0">
+                <a:latin typeface="Times New Roman" panose="02020603050405020304" pitchFamily="18" charset="0"/>
+                <a:cs typeface="Times New Roman" panose="02020603050405020304" pitchFamily="18" charset="0"/>
+              </a:rPr>
+              <a:t>Machine</a:t>
+            </a:r>
+            <a:br>
+              <a:rPr lang="en-US" sz="3000" dirty="0">
+                <a:latin typeface="Times New Roman" panose="02020603050405020304" pitchFamily="18" charset="0"/>
+                <a:cs typeface="Times New Roman" panose="02020603050405020304" pitchFamily="18" charset="0"/>
+              </a:rPr>
+            </a:br>
+            <a:r>
+              <a:rPr lang="en-US" sz="3000" dirty="0">
+                <a:latin typeface="Times New Roman" panose="02020603050405020304" pitchFamily="18" charset="0"/>
+                <a:cs typeface="Times New Roman" panose="02020603050405020304" pitchFamily="18" charset="0"/>
+              </a:rPr>
+              <a:t>n</a:t>
+            </a:r>
+          </a:p>
+        </p:txBody>
+      </p:sp>
+      <p:cxnSp>
+        <p:nvCxnSpPr>
+          <p:cNvPr id="22" name="Straight Connector 21">
+            <a:extLst>
+              <a:ext uri="{FF2B5EF4-FFF2-40B4-BE49-F238E27FC236}">
+                <a16:creationId xmlns:a16="http://schemas.microsoft.com/office/drawing/2014/main" id="{3CEFA76E-074E-2C67-7DBC-58119C1A8115}"/>
               </a:ext>
             </a:extLst>
           </p:cNvPr>
@@ -5639,243 +6315,6 @@
           </a:fontRef>
         </p:style>
       </p:cxnSp>
-      <p:cxnSp>
-        <p:nvCxnSpPr>
-          <p:cNvPr id="8" name="Straight Connector 7">
-            <a:extLst>
-              <a:ext uri="{FF2B5EF4-FFF2-40B4-BE49-F238E27FC236}">
-                <a16:creationId xmlns:a16="http://schemas.microsoft.com/office/drawing/2014/main" id="{09961447-688A-261E-A45E-ED90FA8284AA}"/>
-              </a:ext>
-            </a:extLst>
-          </p:cNvPr>
-          <p:cNvCxnSpPr>
-            <a:cxnSpLocks/>
-          </p:cNvCxnSpPr>
-          <p:nvPr/>
-        </p:nvCxnSpPr>
-        <p:spPr>
-          <a:xfrm flipH="1">
-            <a:off x="4898571" y="2625829"/>
-            <a:ext cx="1648097" cy="1706277"/>
-          </a:xfrm>
-          <a:prstGeom prst="line">
-            <a:avLst/>
-          </a:prstGeom>
-          <a:ln w="73025">
-            <a:solidFill>
-              <a:schemeClr val="tx1"/>
-            </a:solidFill>
-          </a:ln>
-        </p:spPr>
-        <p:style>
-          <a:lnRef idx="2">
-            <a:schemeClr val="accent1"/>
-          </a:lnRef>
-          <a:fillRef idx="0">
-            <a:schemeClr val="accent1"/>
-          </a:fillRef>
-          <a:effectRef idx="1">
-            <a:schemeClr val="accent1"/>
-          </a:effectRef>
-          <a:fontRef idx="minor">
-            <a:schemeClr val="tx1"/>
-          </a:fontRef>
-        </p:style>
-      </p:cxnSp>
-      <p:sp>
-        <p:nvSpPr>
-          <p:cNvPr id="11" name="TextBox 10">
-            <a:extLst>
-              <a:ext uri="{FF2B5EF4-FFF2-40B4-BE49-F238E27FC236}">
-                <a16:creationId xmlns:a16="http://schemas.microsoft.com/office/drawing/2014/main" id="{9BDDC9B8-F36C-2C1B-4F24-86B93D2DB4BA}"/>
-              </a:ext>
-            </a:extLst>
-          </p:cNvPr>
-          <p:cNvSpPr txBox="1"/>
-          <p:nvPr/>
-        </p:nvSpPr>
-        <p:spPr>
-          <a:xfrm>
-            <a:off x="3816350" y="2924970"/>
-            <a:ext cx="2028184" cy="553998"/>
-          </a:xfrm>
-          <a:prstGeom prst="rect">
-            <a:avLst/>
-          </a:prstGeom>
-          <a:noFill/>
-        </p:spPr>
-        <p:txBody>
-          <a:bodyPr wrap="none" rtlCol="0">
-            <a:spAutoFit/>
-          </a:bodyPr>
-          <a:lstStyle/>
-          <a:p>
-            <a:r>
-              <a:rPr lang="en-US" sz="3000" dirty="0">
-                <a:latin typeface="Times New Roman" panose="02020603050405020304" pitchFamily="18" charset="0"/>
-                <a:cs typeface="Times New Roman" panose="02020603050405020304" pitchFamily="18" charset="0"/>
-              </a:rPr>
-              <a:t>Latency = x</a:t>
-            </a:r>
-          </a:p>
-        </p:txBody>
-      </p:sp>
-      <p:sp>
-        <p:nvSpPr>
-          <p:cNvPr id="12" name="TextBox 11">
-            <a:extLst>
-              <a:ext uri="{FF2B5EF4-FFF2-40B4-BE49-F238E27FC236}">
-                <a16:creationId xmlns:a16="http://schemas.microsoft.com/office/drawing/2014/main" id="{B81E5939-12FA-CE10-B388-A106748BD7CB}"/>
-              </a:ext>
-            </a:extLst>
-          </p:cNvPr>
-          <p:cNvSpPr txBox="1"/>
-          <p:nvPr/>
-        </p:nvSpPr>
-        <p:spPr>
-          <a:xfrm>
-            <a:off x="4007479" y="5238604"/>
-            <a:ext cx="1532791" cy="1015663"/>
-          </a:xfrm>
-          <a:prstGeom prst="rect">
-            <a:avLst/>
-          </a:prstGeom>
-          <a:noFill/>
-        </p:spPr>
-        <p:txBody>
-          <a:bodyPr wrap="none" rtlCol="0">
-            <a:spAutoFit/>
-          </a:bodyPr>
-          <a:lstStyle/>
-          <a:p>
-            <a:pPr algn="ctr"/>
-            <a:r>
-              <a:rPr lang="en-US" sz="3000" dirty="0">
-                <a:latin typeface="Times New Roman" panose="02020603050405020304" pitchFamily="18" charset="0"/>
-                <a:cs typeface="Times New Roman" panose="02020603050405020304" pitchFamily="18" charset="0"/>
-              </a:rPr>
-              <a:t>Machine</a:t>
-            </a:r>
-            <a:br>
-              <a:rPr lang="en-US" sz="3000" dirty="0">
-                <a:latin typeface="Times New Roman" panose="02020603050405020304" pitchFamily="18" charset="0"/>
-                <a:cs typeface="Times New Roman" panose="02020603050405020304" pitchFamily="18" charset="0"/>
-              </a:rPr>
-            </a:br>
-            <a:r>
-              <a:rPr lang="en-US" sz="3000" dirty="0">
-                <a:latin typeface="Times New Roman" panose="02020603050405020304" pitchFamily="18" charset="0"/>
-                <a:cs typeface="Times New Roman" panose="02020603050405020304" pitchFamily="18" charset="0"/>
-              </a:rPr>
-              <a:t>1</a:t>
-            </a:r>
-          </a:p>
-        </p:txBody>
-      </p:sp>
-      <p:sp>
-        <p:nvSpPr>
-          <p:cNvPr id="19" name="TextBox 18">
-            <a:extLst>
-              <a:ext uri="{FF2B5EF4-FFF2-40B4-BE49-F238E27FC236}">
-                <a16:creationId xmlns:a16="http://schemas.microsoft.com/office/drawing/2014/main" id="{72FB38A1-9623-97A0-250D-AB35EF8DADC2}"/>
-              </a:ext>
-            </a:extLst>
-          </p:cNvPr>
-          <p:cNvSpPr txBox="1"/>
-          <p:nvPr/>
-        </p:nvSpPr>
-        <p:spPr>
-          <a:xfrm>
-            <a:off x="5620421" y="5274843"/>
-            <a:ext cx="1532791" cy="1015663"/>
-          </a:xfrm>
-          <a:prstGeom prst="rect">
-            <a:avLst/>
-          </a:prstGeom>
-          <a:noFill/>
-        </p:spPr>
-        <p:txBody>
-          <a:bodyPr wrap="none" rtlCol="0">
-            <a:spAutoFit/>
-          </a:bodyPr>
-          <a:lstStyle/>
-          <a:p>
-            <a:pPr algn="ctr"/>
-            <a:r>
-              <a:rPr lang="en-US" sz="3000" dirty="0">
-                <a:latin typeface="Times New Roman" panose="02020603050405020304" pitchFamily="18" charset="0"/>
-                <a:cs typeface="Times New Roman" panose="02020603050405020304" pitchFamily="18" charset="0"/>
-              </a:rPr>
-              <a:t>Machine</a:t>
-            </a:r>
-            <a:br>
-              <a:rPr lang="en-US" sz="3000" dirty="0">
-                <a:latin typeface="Times New Roman" panose="02020603050405020304" pitchFamily="18" charset="0"/>
-                <a:cs typeface="Times New Roman" panose="02020603050405020304" pitchFamily="18" charset="0"/>
-              </a:rPr>
-            </a:br>
-            <a:r>
-              <a:rPr lang="en-US" sz="3000" dirty="0">
-                <a:latin typeface="Times New Roman" panose="02020603050405020304" pitchFamily="18" charset="0"/>
-                <a:cs typeface="Times New Roman" panose="02020603050405020304" pitchFamily="18" charset="0"/>
-              </a:rPr>
-              <a:t>2</a:t>
-            </a:r>
-          </a:p>
-        </p:txBody>
-      </p:sp>
-      <p:sp>
-        <p:nvSpPr>
-          <p:cNvPr id="20" name="TextBox 19">
-            <a:extLst>
-              <a:ext uri="{FF2B5EF4-FFF2-40B4-BE49-F238E27FC236}">
-                <a16:creationId xmlns:a16="http://schemas.microsoft.com/office/drawing/2014/main" id="{E47BD87B-5E1F-B131-B8C7-252A6C7C6C19}"/>
-              </a:ext>
-            </a:extLst>
-          </p:cNvPr>
-          <p:cNvSpPr txBox="1"/>
-          <p:nvPr/>
-        </p:nvSpPr>
-        <p:spPr>
-          <a:xfrm>
-            <a:off x="7674812" y="5238604"/>
-            <a:ext cx="1532791" cy="1015663"/>
-          </a:xfrm>
-          <a:prstGeom prst="rect">
-            <a:avLst/>
-          </a:prstGeom>
-          <a:noFill/>
-        </p:spPr>
-        <p:txBody>
-          <a:bodyPr wrap="none" rtlCol="0">
-            <a:spAutoFit/>
-          </a:bodyPr>
-          <a:lstStyle/>
-          <a:p>
-            <a:pPr algn="ctr"/>
-            <a:r>
-              <a:rPr lang="en-US" sz="3000" dirty="0">
-                <a:latin typeface="Times New Roman" panose="02020603050405020304" pitchFamily="18" charset="0"/>
-                <a:cs typeface="Times New Roman" panose="02020603050405020304" pitchFamily="18" charset="0"/>
-              </a:rPr>
-              <a:t>Machine</a:t>
-            </a:r>
-            <a:br>
-              <a:rPr lang="en-US" sz="3000" dirty="0">
-                <a:latin typeface="Times New Roman" panose="02020603050405020304" pitchFamily="18" charset="0"/>
-                <a:cs typeface="Times New Roman" panose="02020603050405020304" pitchFamily="18" charset="0"/>
-              </a:rPr>
-            </a:br>
-            <a:r>
-              <a:rPr lang="en-US" sz="3000" dirty="0">
-                <a:latin typeface="Times New Roman" panose="02020603050405020304" pitchFamily="18" charset="0"/>
-                <a:cs typeface="Times New Roman" panose="02020603050405020304" pitchFamily="18" charset="0"/>
-              </a:rPr>
-              <a:t>n</a:t>
-            </a:r>
-          </a:p>
-        </p:txBody>
-      </p:sp>
     </p:spTree>
     <p:extLst>
       <p:ext uri="{BB962C8B-B14F-4D97-AF65-F5344CB8AC3E}">
@@ -8647,6 +9086,53 @@
                 <a:cs typeface="Times New Roman" panose="02020603050405020304" pitchFamily="18" charset="0"/>
               </a:rPr>
               <a:t>n</a:t>
+            </a:r>
+          </a:p>
+        </p:txBody>
+      </p:sp>
+      <p:sp>
+        <p:nvSpPr>
+          <p:cNvPr id="12" name="TextBox 11">
+            <a:extLst>
+              <a:ext uri="{FF2B5EF4-FFF2-40B4-BE49-F238E27FC236}">
+                <a16:creationId xmlns:a16="http://schemas.microsoft.com/office/drawing/2014/main" id="{61BC61E1-FB7D-3901-DA55-0912562B0D9E}"/>
+              </a:ext>
+            </a:extLst>
+          </p:cNvPr>
+          <p:cNvSpPr txBox="1"/>
+          <p:nvPr/>
+        </p:nvSpPr>
+        <p:spPr>
+          <a:xfrm>
+            <a:off x="760549" y="2659042"/>
+            <a:ext cx="5095723" cy="1477328"/>
+          </a:xfrm>
+          <a:prstGeom prst="rect">
+            <a:avLst/>
+          </a:prstGeom>
+          <a:noFill/>
+        </p:spPr>
+        <p:txBody>
+          <a:bodyPr wrap="square" rtlCol="0">
+            <a:spAutoFit/>
+          </a:bodyPr>
+          <a:lstStyle/>
+          <a:p>
+            <a:r>
+              <a:rPr lang="en-US" sz="3000" dirty="0">
+                <a:latin typeface="Times New Roman" panose="02020603050405020304" pitchFamily="18" charset="0"/>
+                <a:cs typeface="Times New Roman" panose="02020603050405020304" pitchFamily="18" charset="0"/>
+              </a:rPr>
+              <a:t>Critical for competitive systems</a:t>
+            </a:r>
+          </a:p>
+          <a:p>
+            <a:r>
+              <a:rPr lang="en-US" sz="3000" dirty="0">
+                <a:latin typeface="Times New Roman" panose="02020603050405020304" pitchFamily="18" charset="0"/>
+                <a:cs typeface="Times New Roman" panose="02020603050405020304" pitchFamily="18" charset="0"/>
+              </a:rPr>
+              <a:t>e.g., financial exchanges, ad exchanges.</a:t>
             </a:r>
           </a:p>
         </p:txBody>
@@ -8989,4 +9475,319 @@
     </a:ext>
   </a:extLst>
 </a:theme>
+</file>
+
+<file path=ppt/theme/theme2.xml><?xml version="1.0" encoding="utf-8"?>
+<a:theme xmlns:a="http://schemas.openxmlformats.org/drawingml/2006/main" name="Office Theme">
+  <a:themeElements>
+    <a:clrScheme name="Office">
+      <a:dk1>
+        <a:sysClr val="windowText" lastClr="000000"/>
+      </a:dk1>
+      <a:lt1>
+        <a:sysClr val="window" lastClr="FFFFFF"/>
+      </a:lt1>
+      <a:dk2>
+        <a:srgbClr val="0E2841"/>
+      </a:dk2>
+      <a:lt2>
+        <a:srgbClr val="E8E8E8"/>
+      </a:lt2>
+      <a:accent1>
+        <a:srgbClr val="156082"/>
+      </a:accent1>
+      <a:accent2>
+        <a:srgbClr val="E97132"/>
+      </a:accent2>
+      <a:accent3>
+        <a:srgbClr val="196B24"/>
+      </a:accent3>
+      <a:accent4>
+        <a:srgbClr val="0F9ED5"/>
+      </a:accent4>
+      <a:accent5>
+        <a:srgbClr val="A02B93"/>
+      </a:accent5>
+      <a:accent6>
+        <a:srgbClr val="4EA72E"/>
+      </a:accent6>
+      <a:hlink>
+        <a:srgbClr val="467886"/>
+      </a:hlink>
+      <a:folHlink>
+        <a:srgbClr val="96607D"/>
+      </a:folHlink>
+    </a:clrScheme>
+    <a:fontScheme name="Office">
+      <a:majorFont>
+        <a:latin typeface="Aptos Display" panose="02110004020202020204"/>
+        <a:ea typeface=""/>
+        <a:cs typeface=""/>
+        <a:font script="Jpan" typeface="游ゴシック Light"/>
+        <a:font script="Hang" typeface="맑은 고딕"/>
+        <a:font script="Hans" typeface="等线 Light"/>
+        <a:font script="Hant" typeface="新細明體"/>
+        <a:font script="Arab" typeface="Times New Roman"/>
+        <a:font script="Hebr" typeface="Times New Roman"/>
+        <a:font script="Thai" typeface="Angsana New"/>
+        <a:font script="Ethi" typeface="Nyala"/>
+        <a:font script="Beng" typeface="Vrinda"/>
+        <a:font script="Gujr" typeface="Shruti"/>
+        <a:font script="Khmr" typeface="MoolBoran"/>
+        <a:font script="Knda" typeface="Tunga"/>
+        <a:font script="Guru" typeface="Raavi"/>
+        <a:font script="Cans" typeface="Euphemia"/>
+        <a:font script="Cher" typeface="Plantagenet Cherokee"/>
+        <a:font script="Yiii" typeface="Microsoft Yi Baiti"/>
+        <a:font script="Tibt" typeface="Microsoft Himalaya"/>
+        <a:font script="Thaa" typeface="MV Boli"/>
+        <a:font script="Deva" typeface="Mangal"/>
+        <a:font script="Telu" typeface="Gautami"/>
+        <a:font script="Taml" typeface="Latha"/>
+        <a:font script="Syrc" typeface="Estrangelo Edessa"/>
+        <a:font script="Orya" typeface="Kalinga"/>
+        <a:font script="Mlym" typeface="Kartika"/>
+        <a:font script="Laoo" typeface="DokChampa"/>
+        <a:font script="Sinh" typeface="Iskoola Pota"/>
+        <a:font script="Mong" typeface="Mongolian Baiti"/>
+        <a:font script="Viet" typeface="Times New Roman"/>
+        <a:font script="Uigh" typeface="Microsoft Uighur"/>
+        <a:font script="Geor" typeface="Sylfaen"/>
+        <a:font script="Armn" typeface="Arial"/>
+        <a:font script="Bugi" typeface="Leelawadee UI"/>
+        <a:font script="Bopo" typeface="Microsoft JhengHei"/>
+        <a:font script="Java" typeface="Javanese Text"/>
+        <a:font script="Lisu" typeface="Segoe UI"/>
+        <a:font script="Mymr" typeface="Myanmar Text"/>
+        <a:font script="Nkoo" typeface="Ebrima"/>
+        <a:font script="Olck" typeface="Nirmala UI"/>
+        <a:font script="Osma" typeface="Ebrima"/>
+        <a:font script="Phag" typeface="Phagspa"/>
+        <a:font script="Syrn" typeface="Estrangelo Edessa"/>
+        <a:font script="Syrj" typeface="Estrangelo Edessa"/>
+        <a:font script="Syre" typeface="Estrangelo Edessa"/>
+        <a:font script="Sora" typeface="Nirmala UI"/>
+        <a:font script="Tale" typeface="Microsoft Tai Le"/>
+        <a:font script="Talu" typeface="Microsoft New Tai Lue"/>
+        <a:font script="Tfng" typeface="Ebrima"/>
+      </a:majorFont>
+      <a:minorFont>
+        <a:latin typeface="Aptos" panose="02110004020202020204"/>
+        <a:ea typeface=""/>
+        <a:cs typeface=""/>
+        <a:font script="Jpan" typeface="游ゴシック"/>
+        <a:font script="Hang" typeface="맑은 고딕"/>
+        <a:font script="Hans" typeface="等线"/>
+        <a:font script="Hant" typeface="新細明體"/>
+        <a:font script="Arab" typeface="Arial"/>
+        <a:font script="Hebr" typeface="Arial"/>
+        <a:font script="Thai" typeface="Cordia New"/>
+        <a:font script="Ethi" typeface="Nyala"/>
+        <a:font script="Beng" typeface="Vrinda"/>
+        <a:font script="Gujr" typeface="Shruti"/>
+        <a:font script="Khmr" typeface="DaunPenh"/>
+        <a:font script="Knda" typeface="Tunga"/>
+        <a:font script="Guru" typeface="Raavi"/>
+        <a:font script="Cans" typeface="Euphemia"/>
+        <a:font script="Cher" typeface="Plantagenet Cherokee"/>
+        <a:font script="Yiii" typeface="Microsoft Yi Baiti"/>
+        <a:font script="Tibt" typeface="Microsoft Himalaya"/>
+        <a:font script="Thaa" typeface="MV Boli"/>
+        <a:font script="Deva" typeface="Mangal"/>
+        <a:font script="Telu" typeface="Gautami"/>
+        <a:font script="Taml" typeface="Latha"/>
+        <a:font script="Syrc" typeface="Estrangelo Edessa"/>
+        <a:font script="Orya" typeface="Kalinga"/>
+        <a:font script="Mlym" typeface="Kartika"/>
+        <a:font script="Laoo" typeface="DokChampa"/>
+        <a:font script="Sinh" typeface="Iskoola Pota"/>
+        <a:font script="Mong" typeface="Mongolian Baiti"/>
+        <a:font script="Viet" typeface="Arial"/>
+        <a:font script="Uigh" typeface="Microsoft Uighur"/>
+        <a:font script="Geor" typeface="Sylfaen"/>
+        <a:font script="Armn" typeface="Arial"/>
+        <a:font script="Bugi" typeface="Leelawadee UI"/>
+        <a:font script="Bopo" typeface="Microsoft JhengHei"/>
+        <a:font script="Java" typeface="Javanese Text"/>
+        <a:font script="Lisu" typeface="Segoe UI"/>
+        <a:font script="Mymr" typeface="Myanmar Text"/>
+        <a:font script="Nkoo" typeface="Ebrima"/>
+        <a:font script="Olck" typeface="Nirmala UI"/>
+        <a:font script="Osma" typeface="Ebrima"/>
+        <a:font script="Phag" typeface="Phagspa"/>
+        <a:font script="Syrn" typeface="Estrangelo Edessa"/>
+        <a:font script="Syrj" typeface="Estrangelo Edessa"/>
+        <a:font script="Syre" typeface="Estrangelo Edessa"/>
+        <a:font script="Sora" typeface="Nirmala UI"/>
+        <a:font script="Tale" typeface="Microsoft Tai Le"/>
+        <a:font script="Talu" typeface="Microsoft New Tai Lue"/>
+        <a:font script="Tfng" typeface="Ebrima"/>
+      </a:minorFont>
+    </a:fontScheme>
+    <a:fmtScheme name="Office">
+      <a:fillStyleLst>
+        <a:solidFill>
+          <a:schemeClr val="phClr"/>
+        </a:solidFill>
+        <a:gradFill rotWithShape="1">
+          <a:gsLst>
+            <a:gs pos="0">
+              <a:schemeClr val="phClr">
+                <a:lumMod val="110000"/>
+                <a:satMod val="105000"/>
+                <a:tint val="67000"/>
+              </a:schemeClr>
+            </a:gs>
+            <a:gs pos="50000">
+              <a:schemeClr val="phClr">
+                <a:lumMod val="105000"/>
+                <a:satMod val="103000"/>
+                <a:tint val="73000"/>
+              </a:schemeClr>
+            </a:gs>
+            <a:gs pos="100000">
+              <a:schemeClr val="phClr">
+                <a:lumMod val="105000"/>
+                <a:satMod val="109000"/>
+                <a:tint val="81000"/>
+              </a:schemeClr>
+            </a:gs>
+          </a:gsLst>
+          <a:lin ang="5400000" scaled="0"/>
+        </a:gradFill>
+        <a:gradFill rotWithShape="1">
+          <a:gsLst>
+            <a:gs pos="0">
+              <a:schemeClr val="phClr">
+                <a:satMod val="103000"/>
+                <a:lumMod val="102000"/>
+                <a:tint val="94000"/>
+              </a:schemeClr>
+            </a:gs>
+            <a:gs pos="50000">
+              <a:schemeClr val="phClr">
+                <a:satMod val="110000"/>
+                <a:lumMod val="100000"/>
+                <a:shade val="100000"/>
+              </a:schemeClr>
+            </a:gs>
+            <a:gs pos="100000">
+              <a:schemeClr val="phClr">
+                <a:lumMod val="99000"/>
+                <a:satMod val="120000"/>
+                <a:shade val="78000"/>
+              </a:schemeClr>
+            </a:gs>
+          </a:gsLst>
+          <a:lin ang="5400000" scaled="0"/>
+        </a:gradFill>
+      </a:fillStyleLst>
+      <a:lnStyleLst>
+        <a:ln w="12700" cap="flat" cmpd="sng" algn="ctr">
+          <a:solidFill>
+            <a:schemeClr val="phClr"/>
+          </a:solidFill>
+          <a:prstDash val="solid"/>
+          <a:miter lim="800000"/>
+        </a:ln>
+        <a:ln w="19050" cap="flat" cmpd="sng" algn="ctr">
+          <a:solidFill>
+            <a:schemeClr val="phClr"/>
+          </a:solidFill>
+          <a:prstDash val="solid"/>
+          <a:miter lim="800000"/>
+        </a:ln>
+        <a:ln w="25400" cap="flat" cmpd="sng" algn="ctr">
+          <a:solidFill>
+            <a:schemeClr val="phClr"/>
+          </a:solidFill>
+          <a:prstDash val="solid"/>
+          <a:miter lim="800000"/>
+        </a:ln>
+      </a:lnStyleLst>
+      <a:effectStyleLst>
+        <a:effectStyle>
+          <a:effectLst/>
+        </a:effectStyle>
+        <a:effectStyle>
+          <a:effectLst/>
+        </a:effectStyle>
+        <a:effectStyle>
+          <a:effectLst>
+            <a:outerShdw blurRad="57150" dist="19050" dir="5400000" algn="ctr" rotWithShape="0">
+              <a:srgbClr val="000000">
+                <a:alpha val="63000"/>
+              </a:srgbClr>
+            </a:outerShdw>
+          </a:effectLst>
+        </a:effectStyle>
+      </a:effectStyleLst>
+      <a:bgFillStyleLst>
+        <a:solidFill>
+          <a:schemeClr val="phClr"/>
+        </a:solidFill>
+        <a:solidFill>
+          <a:schemeClr val="phClr">
+            <a:tint val="95000"/>
+            <a:satMod val="170000"/>
+          </a:schemeClr>
+        </a:solidFill>
+        <a:gradFill rotWithShape="1">
+          <a:gsLst>
+            <a:gs pos="0">
+              <a:schemeClr val="phClr">
+                <a:tint val="93000"/>
+                <a:satMod val="150000"/>
+                <a:shade val="98000"/>
+                <a:lumMod val="102000"/>
+              </a:schemeClr>
+            </a:gs>
+            <a:gs pos="50000">
+              <a:schemeClr val="phClr">
+                <a:tint val="98000"/>
+                <a:satMod val="130000"/>
+                <a:shade val="90000"/>
+                <a:lumMod val="103000"/>
+              </a:schemeClr>
+            </a:gs>
+            <a:gs pos="100000">
+              <a:schemeClr val="phClr">
+                <a:shade val="63000"/>
+                <a:satMod val="120000"/>
+              </a:schemeClr>
+            </a:gs>
+          </a:gsLst>
+          <a:lin ang="5400000" scaled="0"/>
+        </a:gradFill>
+      </a:bgFillStyleLst>
+    </a:fmtScheme>
+  </a:themeElements>
+  <a:objectDefaults>
+    <a:lnDef>
+      <a:spPr/>
+      <a:bodyPr/>
+      <a:lstStyle/>
+      <a:style>
+        <a:lnRef idx="2">
+          <a:schemeClr val="accent1"/>
+        </a:lnRef>
+        <a:fillRef idx="0">
+          <a:schemeClr val="accent1"/>
+        </a:fillRef>
+        <a:effectRef idx="1">
+          <a:schemeClr val="accent1"/>
+        </a:effectRef>
+        <a:fontRef idx="minor">
+          <a:schemeClr val="tx1"/>
+        </a:fontRef>
+      </a:style>
+    </a:lnDef>
+  </a:objectDefaults>
+  <a:extraClrSchemeLst/>
+  <a:extLst>
+    <a:ext uri="{05A4C25C-085E-4340-85A3-A5531E510DB2}">
+      <thm15:themeFamily xmlns:thm15="http://schemas.microsoft.com/office/thememl/2012/main" name="Office Theme" id="{2E142A2C-CD16-42D6-873A-C26D2A0506FA}" vid="{1BDDFF52-6CD6-40A5-AB3C-68EB2F1E4D0A}"/>
+    </a:ext>
+  </a:extLst>
+</a:theme>
 </file>
--- a/thesis-latency-fairness.pptx
+++ b/thesis-latency-fairness.pptx
@@ -5,17 +5,19 @@
     <p:sldMasterId id="2147483648" r:id="rId1"/>
   </p:sldMasterIdLst>
   <p:notesMasterIdLst>
-    <p:notesMasterId r:id="rId10"/>
+    <p:notesMasterId r:id="rId12"/>
   </p:notesMasterIdLst>
   <p:sldIdLst>
     <p:sldId id="256" r:id="rId2"/>
     <p:sldId id="257" r:id="rId3"/>
     <p:sldId id="258" r:id="rId4"/>
     <p:sldId id="260" r:id="rId5"/>
-    <p:sldId id="261" r:id="rId6"/>
-    <p:sldId id="262" r:id="rId7"/>
-    <p:sldId id="263" r:id="rId8"/>
-    <p:sldId id="264" r:id="rId9"/>
+    <p:sldId id="262" r:id="rId6"/>
+    <p:sldId id="263" r:id="rId7"/>
+    <p:sldId id="264" r:id="rId8"/>
+    <p:sldId id="265" r:id="rId9"/>
+    <p:sldId id="266" r:id="rId10"/>
+    <p:sldId id="267" r:id="rId11"/>
   </p:sldIdLst>
   <p:sldSz cx="12192000" cy="6858000"/>
   <p:notesSz cx="6858000" cy="9144000"/>
@@ -534,7 +536,7 @@
           <a:p>
             <a:fld id="{5AD2936D-68DF-C34D-84E6-1FDAB4C19BCF}" type="slidenum">
               <a:rPr lang="en-US" smtClean="0"/>
-              <a:t>8</a:t>
+              <a:t>7</a:t>
             </a:fld>
             <a:endParaRPr lang="en-US"/>
           </a:p>
@@ -544,6 +546,339 @@
     <p:extLst>
       <p:ext uri="{BB962C8B-B14F-4D97-AF65-F5344CB8AC3E}">
         <p14:creationId xmlns:p14="http://schemas.microsoft.com/office/powerpoint/2010/main" val="572064106"/>
+      </p:ext>
+    </p:extLst>
+  </p:cSld>
+  <p:clrMapOvr>
+    <a:masterClrMapping/>
+  </p:clrMapOvr>
+</p:notes>
+</file>
+
+<file path=ppt/notesSlides/notesSlide2.xml><?xml version="1.0" encoding="utf-8"?>
+<p:notes xmlns:a="http://schemas.openxmlformats.org/drawingml/2006/main" xmlns:r="http://schemas.openxmlformats.org/officeDocument/2006/relationships" xmlns:p="http://schemas.openxmlformats.org/presentationml/2006/main">
+  <p:cSld>
+    <p:spTree>
+      <p:nvGrpSpPr>
+        <p:cNvPr id="1" name="">
+          <a:extLst>
+            <a:ext uri="{FF2B5EF4-FFF2-40B4-BE49-F238E27FC236}">
+              <a16:creationId xmlns:a16="http://schemas.microsoft.com/office/drawing/2014/main" id="{C87022B6-65E5-2318-A990-AB7A740850AB}"/>
+            </a:ext>
+          </a:extLst>
+        </p:cNvPr>
+        <p:cNvGrpSpPr/>
+        <p:nvPr/>
+      </p:nvGrpSpPr>
+      <p:grpSpPr>
+        <a:xfrm>
+          <a:off x="0" y="0"/>
+          <a:ext cx="0" cy="0"/>
+          <a:chOff x="0" y="0"/>
+          <a:chExt cx="0" cy="0"/>
+        </a:xfrm>
+      </p:grpSpPr>
+      <p:sp>
+        <p:nvSpPr>
+          <p:cNvPr id="2" name="Slide Image Placeholder 1">
+            <a:extLst>
+              <a:ext uri="{FF2B5EF4-FFF2-40B4-BE49-F238E27FC236}">
+                <a16:creationId xmlns:a16="http://schemas.microsoft.com/office/drawing/2014/main" id="{9E304C8E-9FAA-628F-EEE8-3287CB0C2167}"/>
+              </a:ext>
+            </a:extLst>
+          </p:cNvPr>
+          <p:cNvSpPr>
+            <a:spLocks noGrp="1" noRot="1" noChangeAspect="1"/>
+          </p:cNvSpPr>
+          <p:nvPr>
+            <p:ph type="sldImg"/>
+          </p:nvPr>
+        </p:nvSpPr>
+        <p:spPr/>
+      </p:sp>
+      <p:sp>
+        <p:nvSpPr>
+          <p:cNvPr id="3" name="Notes Placeholder 2">
+            <a:extLst>
+              <a:ext uri="{FF2B5EF4-FFF2-40B4-BE49-F238E27FC236}">
+                <a16:creationId xmlns:a16="http://schemas.microsoft.com/office/drawing/2014/main" id="{C4909A3B-0482-FAD7-8EE6-6B9B53012E0A}"/>
+              </a:ext>
+            </a:extLst>
+          </p:cNvPr>
+          <p:cNvSpPr>
+            <a:spLocks noGrp="1"/>
+          </p:cNvSpPr>
+          <p:nvPr>
+            <p:ph type="body" idx="1"/>
+          </p:nvPr>
+        </p:nvSpPr>
+        <p:spPr/>
+        <p:txBody>
+          <a:bodyPr/>
+          <a:lstStyle/>
+          <a:p>
+            <a:r>
+              <a:rPr lang="en-US" dirty="0"/>
+              <a:t>Not having latency fairness can lead to unwanted unfair competition, users may not come</a:t>
+            </a:r>
+          </a:p>
+        </p:txBody>
+      </p:sp>
+      <p:sp>
+        <p:nvSpPr>
+          <p:cNvPr id="4" name="Slide Number Placeholder 3">
+            <a:extLst>
+              <a:ext uri="{FF2B5EF4-FFF2-40B4-BE49-F238E27FC236}">
+                <a16:creationId xmlns:a16="http://schemas.microsoft.com/office/drawing/2014/main" id="{0D521CFE-92B1-DEE7-1D5B-857FC63DB485}"/>
+              </a:ext>
+            </a:extLst>
+          </p:cNvPr>
+          <p:cNvSpPr>
+            <a:spLocks noGrp="1"/>
+          </p:cNvSpPr>
+          <p:nvPr>
+            <p:ph type="sldNum" sz="quarter" idx="5"/>
+          </p:nvPr>
+        </p:nvSpPr>
+        <p:spPr/>
+        <p:txBody>
+          <a:bodyPr/>
+          <a:lstStyle/>
+          <a:p>
+            <a:fld id="{5AD2936D-68DF-C34D-84E6-1FDAB4C19BCF}" type="slidenum">
+              <a:rPr lang="en-US" smtClean="0"/>
+              <a:t>8</a:t>
+            </a:fld>
+            <a:endParaRPr lang="en-US"/>
+          </a:p>
+        </p:txBody>
+      </p:sp>
+    </p:spTree>
+    <p:extLst>
+      <p:ext uri="{BB962C8B-B14F-4D97-AF65-F5344CB8AC3E}">
+        <p14:creationId xmlns:p14="http://schemas.microsoft.com/office/powerpoint/2010/main" val="3648190813"/>
+      </p:ext>
+    </p:extLst>
+  </p:cSld>
+  <p:clrMapOvr>
+    <a:masterClrMapping/>
+  </p:clrMapOvr>
+</p:notes>
+</file>
+
+<file path=ppt/notesSlides/notesSlide3.xml><?xml version="1.0" encoding="utf-8"?>
+<p:notes xmlns:a="http://schemas.openxmlformats.org/drawingml/2006/main" xmlns:r="http://schemas.openxmlformats.org/officeDocument/2006/relationships" xmlns:p="http://schemas.openxmlformats.org/presentationml/2006/main">
+  <p:cSld>
+    <p:spTree>
+      <p:nvGrpSpPr>
+        <p:cNvPr id="1" name="">
+          <a:extLst>
+            <a:ext uri="{FF2B5EF4-FFF2-40B4-BE49-F238E27FC236}">
+              <a16:creationId xmlns:a16="http://schemas.microsoft.com/office/drawing/2014/main" id="{EBF920C4-A110-B0A6-0D9A-CE3A63087256}"/>
+            </a:ext>
+          </a:extLst>
+        </p:cNvPr>
+        <p:cNvGrpSpPr/>
+        <p:nvPr/>
+      </p:nvGrpSpPr>
+      <p:grpSpPr>
+        <a:xfrm>
+          <a:off x="0" y="0"/>
+          <a:ext cx="0" cy="0"/>
+          <a:chOff x="0" y="0"/>
+          <a:chExt cx="0" cy="0"/>
+        </a:xfrm>
+      </p:grpSpPr>
+      <p:sp>
+        <p:nvSpPr>
+          <p:cNvPr id="2" name="Slide Image Placeholder 1">
+            <a:extLst>
+              <a:ext uri="{FF2B5EF4-FFF2-40B4-BE49-F238E27FC236}">
+                <a16:creationId xmlns:a16="http://schemas.microsoft.com/office/drawing/2014/main" id="{A50DBF13-DD74-7F87-98C0-ABF5A2C38497}"/>
+              </a:ext>
+            </a:extLst>
+          </p:cNvPr>
+          <p:cNvSpPr>
+            <a:spLocks noGrp="1" noRot="1" noChangeAspect="1"/>
+          </p:cNvSpPr>
+          <p:nvPr>
+            <p:ph type="sldImg"/>
+          </p:nvPr>
+        </p:nvSpPr>
+        <p:spPr/>
+      </p:sp>
+      <p:sp>
+        <p:nvSpPr>
+          <p:cNvPr id="3" name="Notes Placeholder 2">
+            <a:extLst>
+              <a:ext uri="{FF2B5EF4-FFF2-40B4-BE49-F238E27FC236}">
+                <a16:creationId xmlns:a16="http://schemas.microsoft.com/office/drawing/2014/main" id="{4463F68D-BD19-D82B-D8E0-30DD9CB52748}"/>
+              </a:ext>
+            </a:extLst>
+          </p:cNvPr>
+          <p:cNvSpPr>
+            <a:spLocks noGrp="1"/>
+          </p:cNvSpPr>
+          <p:nvPr>
+            <p:ph type="body" idx="1"/>
+          </p:nvPr>
+        </p:nvSpPr>
+        <p:spPr/>
+        <p:txBody>
+          <a:bodyPr/>
+          <a:lstStyle/>
+          <a:p>
+            <a:r>
+              <a:rPr lang="en-US" dirty="0"/>
+              <a:t>Not having latency fairness can lead to unwanted unfair competition, users may not come</a:t>
+            </a:r>
+          </a:p>
+        </p:txBody>
+      </p:sp>
+      <p:sp>
+        <p:nvSpPr>
+          <p:cNvPr id="4" name="Slide Number Placeholder 3">
+            <a:extLst>
+              <a:ext uri="{FF2B5EF4-FFF2-40B4-BE49-F238E27FC236}">
+                <a16:creationId xmlns:a16="http://schemas.microsoft.com/office/drawing/2014/main" id="{ECBDFB2A-B417-97F6-CCA7-A8732C82F464}"/>
+              </a:ext>
+            </a:extLst>
+          </p:cNvPr>
+          <p:cNvSpPr>
+            <a:spLocks noGrp="1"/>
+          </p:cNvSpPr>
+          <p:nvPr>
+            <p:ph type="sldNum" sz="quarter" idx="5"/>
+          </p:nvPr>
+        </p:nvSpPr>
+        <p:spPr/>
+        <p:txBody>
+          <a:bodyPr/>
+          <a:lstStyle/>
+          <a:p>
+            <a:fld id="{5AD2936D-68DF-C34D-84E6-1FDAB4C19BCF}" type="slidenum">
+              <a:rPr lang="en-US" smtClean="0"/>
+              <a:t>9</a:t>
+            </a:fld>
+            <a:endParaRPr lang="en-US"/>
+          </a:p>
+        </p:txBody>
+      </p:sp>
+    </p:spTree>
+    <p:extLst>
+      <p:ext uri="{BB962C8B-B14F-4D97-AF65-F5344CB8AC3E}">
+        <p14:creationId xmlns:p14="http://schemas.microsoft.com/office/powerpoint/2010/main" val="2395246792"/>
+      </p:ext>
+    </p:extLst>
+  </p:cSld>
+  <p:clrMapOvr>
+    <a:masterClrMapping/>
+  </p:clrMapOvr>
+</p:notes>
+</file>
+
+<file path=ppt/notesSlides/notesSlide4.xml><?xml version="1.0" encoding="utf-8"?>
+<p:notes xmlns:a="http://schemas.openxmlformats.org/drawingml/2006/main" xmlns:r="http://schemas.openxmlformats.org/officeDocument/2006/relationships" xmlns:p="http://schemas.openxmlformats.org/presentationml/2006/main">
+  <p:cSld>
+    <p:spTree>
+      <p:nvGrpSpPr>
+        <p:cNvPr id="1" name="">
+          <a:extLst>
+            <a:ext uri="{FF2B5EF4-FFF2-40B4-BE49-F238E27FC236}">
+              <a16:creationId xmlns:a16="http://schemas.microsoft.com/office/drawing/2014/main" id="{76D600EC-9AA9-ED24-DA66-4B56DBFC5E69}"/>
+            </a:ext>
+          </a:extLst>
+        </p:cNvPr>
+        <p:cNvGrpSpPr/>
+        <p:nvPr/>
+      </p:nvGrpSpPr>
+      <p:grpSpPr>
+        <a:xfrm>
+          <a:off x="0" y="0"/>
+          <a:ext cx="0" cy="0"/>
+          <a:chOff x="0" y="0"/>
+          <a:chExt cx="0" cy="0"/>
+        </a:xfrm>
+      </p:grpSpPr>
+      <p:sp>
+        <p:nvSpPr>
+          <p:cNvPr id="2" name="Slide Image Placeholder 1">
+            <a:extLst>
+              <a:ext uri="{FF2B5EF4-FFF2-40B4-BE49-F238E27FC236}">
+                <a16:creationId xmlns:a16="http://schemas.microsoft.com/office/drawing/2014/main" id="{5C089F1B-9E14-F5A4-1DD3-8DC017DCC3EE}"/>
+              </a:ext>
+            </a:extLst>
+          </p:cNvPr>
+          <p:cNvSpPr>
+            <a:spLocks noGrp="1" noRot="1" noChangeAspect="1"/>
+          </p:cNvSpPr>
+          <p:nvPr>
+            <p:ph type="sldImg"/>
+          </p:nvPr>
+        </p:nvSpPr>
+        <p:spPr/>
+      </p:sp>
+      <p:sp>
+        <p:nvSpPr>
+          <p:cNvPr id="3" name="Notes Placeholder 2">
+            <a:extLst>
+              <a:ext uri="{FF2B5EF4-FFF2-40B4-BE49-F238E27FC236}">
+                <a16:creationId xmlns:a16="http://schemas.microsoft.com/office/drawing/2014/main" id="{8EADAE91-2671-8816-9265-487C57D65D0C}"/>
+              </a:ext>
+            </a:extLst>
+          </p:cNvPr>
+          <p:cNvSpPr>
+            <a:spLocks noGrp="1"/>
+          </p:cNvSpPr>
+          <p:nvPr>
+            <p:ph type="body" idx="1"/>
+          </p:nvPr>
+        </p:nvSpPr>
+        <p:spPr/>
+        <p:txBody>
+          <a:bodyPr/>
+          <a:lstStyle/>
+          <a:p>
+            <a:r>
+              <a:rPr lang="en-US" dirty="0"/>
+              <a:t>Not having latency fairness can lead to unwanted unfair competition, users may not come</a:t>
+            </a:r>
+          </a:p>
+        </p:txBody>
+      </p:sp>
+      <p:sp>
+        <p:nvSpPr>
+          <p:cNvPr id="4" name="Slide Number Placeholder 3">
+            <a:extLst>
+              <a:ext uri="{FF2B5EF4-FFF2-40B4-BE49-F238E27FC236}">
+                <a16:creationId xmlns:a16="http://schemas.microsoft.com/office/drawing/2014/main" id="{CB689BE7-D39F-23CF-8119-82EEBFF9D083}"/>
+              </a:ext>
+            </a:extLst>
+          </p:cNvPr>
+          <p:cNvSpPr>
+            <a:spLocks noGrp="1"/>
+          </p:cNvSpPr>
+          <p:nvPr>
+            <p:ph type="sldNum" sz="quarter" idx="5"/>
+          </p:nvPr>
+        </p:nvSpPr>
+        <p:spPr/>
+        <p:txBody>
+          <a:bodyPr/>
+          <a:lstStyle/>
+          <a:p>
+            <a:fld id="{5AD2936D-68DF-C34D-84E6-1FDAB4C19BCF}" type="slidenum">
+              <a:rPr lang="en-US" smtClean="0"/>
+              <a:t>10</a:t>
+            </a:fld>
+            <a:endParaRPr lang="en-US"/>
+          </a:p>
+        </p:txBody>
+      </p:sp>
+    </p:spTree>
+    <p:extLst>
+      <p:ext uri="{BB962C8B-B14F-4D97-AF65-F5344CB8AC3E}">
+        <p14:creationId xmlns:p14="http://schemas.microsoft.com/office/powerpoint/2010/main" val="3029730274"/>
       </p:ext>
     </p:extLst>
   </p:cSld>
@@ -4245,6 +4580,477 @@
 </p:sld>
 </file>
 
+<file path=ppt/slides/slide10.xml><?xml version="1.0" encoding="utf-8"?>
+<p:sld xmlns:a="http://schemas.openxmlformats.org/drawingml/2006/main" xmlns:r="http://schemas.openxmlformats.org/officeDocument/2006/relationships" xmlns:p="http://schemas.openxmlformats.org/presentationml/2006/main">
+  <p:cSld>
+    <p:spTree>
+      <p:nvGrpSpPr>
+        <p:cNvPr id="1" name="">
+          <a:extLst>
+            <a:ext uri="{FF2B5EF4-FFF2-40B4-BE49-F238E27FC236}">
+              <a16:creationId xmlns:a16="http://schemas.microsoft.com/office/drawing/2014/main" id="{329BDB5B-2EB8-99F1-5D27-B7DE542E1325}"/>
+            </a:ext>
+          </a:extLst>
+        </p:cNvPr>
+        <p:cNvGrpSpPr/>
+        <p:nvPr/>
+      </p:nvGrpSpPr>
+      <p:grpSpPr>
+        <a:xfrm>
+          <a:off x="0" y="0"/>
+          <a:ext cx="0" cy="0"/>
+          <a:chOff x="0" y="0"/>
+          <a:chExt cx="0" cy="0"/>
+        </a:xfrm>
+      </p:grpSpPr>
+      <p:sp>
+        <p:nvSpPr>
+          <p:cNvPr id="17" name="Rectangle 16">
+            <a:extLst>
+              <a:ext uri="{FF2B5EF4-FFF2-40B4-BE49-F238E27FC236}">
+                <a16:creationId xmlns:a16="http://schemas.microsoft.com/office/drawing/2014/main" id="{9D1E2116-853C-CD5A-F31B-40C8B7C615D4}"/>
+              </a:ext>
+            </a:extLst>
+          </p:cNvPr>
+          <p:cNvSpPr/>
+          <p:nvPr/>
+        </p:nvSpPr>
+        <p:spPr>
+          <a:xfrm rot="16200000">
+            <a:off x="2522582" y="-387076"/>
+            <a:ext cx="68673" cy="3246390"/>
+          </a:xfrm>
+          <a:prstGeom prst="rect">
+            <a:avLst/>
+          </a:prstGeom>
+          <a:solidFill>
+            <a:srgbClr val="FF0000"/>
+          </a:solidFill>
+          <a:ln>
+            <a:solidFill>
+              <a:srgbClr val="FF0000"/>
+            </a:solidFill>
+          </a:ln>
+        </p:spPr>
+        <p:style>
+          <a:lnRef idx="2">
+            <a:schemeClr val="accent1">
+              <a:shade val="15000"/>
+            </a:schemeClr>
+          </a:lnRef>
+          <a:fillRef idx="1">
+            <a:schemeClr val="accent1"/>
+          </a:fillRef>
+          <a:effectRef idx="0">
+            <a:schemeClr val="accent1"/>
+          </a:effectRef>
+          <a:fontRef idx="minor">
+            <a:schemeClr val="lt1"/>
+          </a:fontRef>
+        </p:style>
+        <p:txBody>
+          <a:bodyPr rtlCol="0" anchor="ctr"/>
+          <a:lstStyle/>
+          <a:p>
+            <a:pPr algn="ctr"/>
+            <a:endParaRPr lang="en-US">
+              <a:latin typeface="Times New Roman" panose="02020603050405020304" pitchFamily="18" charset="0"/>
+              <a:cs typeface="Times New Roman" panose="02020603050405020304" pitchFamily="18" charset="0"/>
+            </a:endParaRPr>
+          </a:p>
+        </p:txBody>
+      </p:sp>
+      <p:sp>
+        <p:nvSpPr>
+          <p:cNvPr id="18" name="Rectangle 17">
+            <a:extLst>
+              <a:ext uri="{FF2B5EF4-FFF2-40B4-BE49-F238E27FC236}">
+                <a16:creationId xmlns:a16="http://schemas.microsoft.com/office/drawing/2014/main" id="{894DFEED-391B-E6C5-4886-EBE11CA64C84}"/>
+              </a:ext>
+            </a:extLst>
+          </p:cNvPr>
+          <p:cNvSpPr/>
+          <p:nvPr/>
+        </p:nvSpPr>
+        <p:spPr>
+          <a:xfrm rot="16200000">
+            <a:off x="2522581" y="-318404"/>
+            <a:ext cx="68674" cy="3246390"/>
+          </a:xfrm>
+          <a:prstGeom prst="rect">
+            <a:avLst/>
+          </a:prstGeom>
+          <a:solidFill>
+            <a:srgbClr val="7030A0"/>
+          </a:solidFill>
+          <a:ln>
+            <a:solidFill>
+              <a:srgbClr val="7030A0"/>
+            </a:solidFill>
+          </a:ln>
+        </p:spPr>
+        <p:style>
+          <a:lnRef idx="2">
+            <a:schemeClr val="accent1">
+              <a:shade val="15000"/>
+            </a:schemeClr>
+          </a:lnRef>
+          <a:fillRef idx="1">
+            <a:schemeClr val="accent1"/>
+          </a:fillRef>
+          <a:effectRef idx="0">
+            <a:schemeClr val="accent1"/>
+          </a:effectRef>
+          <a:fontRef idx="minor">
+            <a:schemeClr val="lt1"/>
+          </a:fontRef>
+        </p:style>
+        <p:txBody>
+          <a:bodyPr rtlCol="0" anchor="ctr"/>
+          <a:lstStyle/>
+          <a:p>
+            <a:pPr algn="ctr"/>
+            <a:endParaRPr lang="en-US">
+              <a:latin typeface="Times New Roman" panose="02020603050405020304" pitchFamily="18" charset="0"/>
+              <a:cs typeface="Times New Roman" panose="02020603050405020304" pitchFamily="18" charset="0"/>
+            </a:endParaRPr>
+          </a:p>
+        </p:txBody>
+      </p:sp>
+      <p:sp>
+        <p:nvSpPr>
+          <p:cNvPr id="12" name="TextBox 11">
+            <a:extLst>
+              <a:ext uri="{FF2B5EF4-FFF2-40B4-BE49-F238E27FC236}">
+                <a16:creationId xmlns:a16="http://schemas.microsoft.com/office/drawing/2014/main" id="{F37BB2A6-BF16-9B08-08BA-DC9ABBC9C8DB}"/>
+              </a:ext>
+            </a:extLst>
+          </p:cNvPr>
+          <p:cNvSpPr txBox="1"/>
+          <p:nvPr/>
+        </p:nvSpPr>
+        <p:spPr>
+          <a:xfrm>
+            <a:off x="772906" y="405121"/>
+            <a:ext cx="5095723" cy="830997"/>
+          </a:xfrm>
+          <a:prstGeom prst="rect">
+            <a:avLst/>
+          </a:prstGeom>
+          <a:noFill/>
+        </p:spPr>
+        <p:txBody>
+          <a:bodyPr wrap="square" rtlCol="0">
+            <a:spAutoFit/>
+          </a:bodyPr>
+          <a:lstStyle/>
+          <a:p>
+            <a:r>
+              <a:rPr lang="en-US" sz="4800" dirty="0">
+                <a:latin typeface="Times New Roman" panose="02020603050405020304" pitchFamily="18" charset="0"/>
+                <a:cs typeface="Times New Roman" panose="02020603050405020304" pitchFamily="18" charset="0"/>
+              </a:rPr>
+              <a:t>c</a:t>
+            </a:r>
+            <a:r>
+              <a:rPr lang="en-US" sz="3000" dirty="0">
+                <a:latin typeface="Times New Roman" panose="02020603050405020304" pitchFamily="18" charset="0"/>
+                <a:cs typeface="Times New Roman" panose="02020603050405020304" pitchFamily="18" charset="0"/>
+              </a:rPr>
+              <a:t>ompetitive </a:t>
+            </a:r>
+            <a:r>
+              <a:rPr lang="en-US" sz="4800" dirty="0">
+                <a:latin typeface="Times New Roman" panose="02020603050405020304" pitchFamily="18" charset="0"/>
+                <a:cs typeface="Times New Roman" panose="02020603050405020304" pitchFamily="18" charset="0"/>
+              </a:rPr>
+              <a:t>s</a:t>
+            </a:r>
+            <a:r>
+              <a:rPr lang="en-US" sz="3000" dirty="0">
+                <a:latin typeface="Times New Roman" panose="02020603050405020304" pitchFamily="18" charset="0"/>
+                <a:cs typeface="Times New Roman" panose="02020603050405020304" pitchFamily="18" charset="0"/>
+              </a:rPr>
+              <a:t>ystems</a:t>
+            </a:r>
+          </a:p>
+        </p:txBody>
+      </p:sp>
+      <p:sp>
+        <p:nvSpPr>
+          <p:cNvPr id="2" name="TextBox 1">
+            <a:extLst>
+              <a:ext uri="{FF2B5EF4-FFF2-40B4-BE49-F238E27FC236}">
+                <a16:creationId xmlns:a16="http://schemas.microsoft.com/office/drawing/2014/main" id="{04E8E50E-70CE-0C67-BEFD-5DB460BA6A62}"/>
+              </a:ext>
+            </a:extLst>
+          </p:cNvPr>
+          <p:cNvSpPr txBox="1"/>
+          <p:nvPr/>
+        </p:nvSpPr>
+        <p:spPr>
+          <a:xfrm>
+            <a:off x="4806479" y="716456"/>
+            <a:ext cx="6410817" cy="553998"/>
+          </a:xfrm>
+          <a:prstGeom prst="rect">
+            <a:avLst/>
+          </a:prstGeom>
+          <a:noFill/>
+        </p:spPr>
+        <p:txBody>
+          <a:bodyPr wrap="square" rtlCol="0">
+            <a:spAutoFit/>
+          </a:bodyPr>
+          <a:lstStyle/>
+          <a:p>
+            <a:r>
+              <a:rPr lang="en-US" sz="3000" dirty="0">
+                <a:solidFill>
+                  <a:srgbClr val="7030A0"/>
+                </a:solidFill>
+                <a:latin typeface="Times New Roman" panose="02020603050405020304" pitchFamily="18" charset="0"/>
+                <a:cs typeface="Times New Roman" panose="02020603050405020304" pitchFamily="18" charset="0"/>
+              </a:rPr>
+              <a:t>Two Common Communication Patterns</a:t>
+            </a:r>
+          </a:p>
+        </p:txBody>
+      </p:sp>
+      <p:sp>
+        <p:nvSpPr>
+          <p:cNvPr id="3" name="TextBox 2">
+            <a:extLst>
+              <a:ext uri="{FF2B5EF4-FFF2-40B4-BE49-F238E27FC236}">
+                <a16:creationId xmlns:a16="http://schemas.microsoft.com/office/drawing/2014/main" id="{D20ACC30-63CE-B58B-D9B8-9601893F260F}"/>
+              </a:ext>
+            </a:extLst>
+          </p:cNvPr>
+          <p:cNvSpPr txBox="1"/>
+          <p:nvPr/>
+        </p:nvSpPr>
+        <p:spPr>
+          <a:xfrm>
+            <a:off x="2556918" y="2652580"/>
+            <a:ext cx="2830628" cy="1015663"/>
+          </a:xfrm>
+          <a:prstGeom prst="rect">
+            <a:avLst/>
+          </a:prstGeom>
+          <a:noFill/>
+        </p:spPr>
+        <p:txBody>
+          <a:bodyPr wrap="square" rtlCol="0">
+            <a:spAutoFit/>
+          </a:bodyPr>
+          <a:lstStyle/>
+          <a:p>
+            <a:r>
+              <a:rPr lang="en-US" sz="3000" dirty="0">
+                <a:solidFill>
+                  <a:srgbClr val="7030A0"/>
+                </a:solidFill>
+                <a:latin typeface="Times New Roman" panose="02020603050405020304" pitchFamily="18" charset="0"/>
+                <a:cs typeface="Times New Roman" panose="02020603050405020304" pitchFamily="18" charset="0"/>
+              </a:rPr>
+              <a:t>Outbound</a:t>
+            </a:r>
+            <a:br>
+              <a:rPr lang="en-US" sz="3000" dirty="0">
+                <a:solidFill>
+                  <a:srgbClr val="7030A0"/>
+                </a:solidFill>
+                <a:latin typeface="Times New Roman" panose="02020603050405020304" pitchFamily="18" charset="0"/>
+                <a:cs typeface="Times New Roman" panose="02020603050405020304" pitchFamily="18" charset="0"/>
+              </a:rPr>
+            </a:br>
+            <a:r>
+              <a:rPr lang="en-US" sz="3000" dirty="0">
+                <a:solidFill>
+                  <a:srgbClr val="7030A0"/>
+                </a:solidFill>
+                <a:latin typeface="Times New Roman" panose="02020603050405020304" pitchFamily="18" charset="0"/>
+                <a:cs typeface="Times New Roman" panose="02020603050405020304" pitchFamily="18" charset="0"/>
+              </a:rPr>
+              <a:t>Communication</a:t>
+            </a:r>
+          </a:p>
+        </p:txBody>
+      </p:sp>
+      <p:sp>
+        <p:nvSpPr>
+          <p:cNvPr id="4" name="TextBox 3">
+            <a:extLst>
+              <a:ext uri="{FF2B5EF4-FFF2-40B4-BE49-F238E27FC236}">
+                <a16:creationId xmlns:a16="http://schemas.microsoft.com/office/drawing/2014/main" id="{9BF7A295-DD49-24ED-83B7-F936F9CE71F8}"/>
+              </a:ext>
+            </a:extLst>
+          </p:cNvPr>
+          <p:cNvSpPr txBox="1"/>
+          <p:nvPr/>
+        </p:nvSpPr>
+        <p:spPr>
+          <a:xfrm>
+            <a:off x="7047594" y="2652580"/>
+            <a:ext cx="2830628" cy="1015663"/>
+          </a:xfrm>
+          <a:prstGeom prst="rect">
+            <a:avLst/>
+          </a:prstGeom>
+          <a:noFill/>
+        </p:spPr>
+        <p:txBody>
+          <a:bodyPr wrap="square" rtlCol="0">
+            <a:spAutoFit/>
+          </a:bodyPr>
+          <a:lstStyle/>
+          <a:p>
+            <a:r>
+              <a:rPr lang="en-US" sz="3000" dirty="0">
+                <a:solidFill>
+                  <a:srgbClr val="7030A0"/>
+                </a:solidFill>
+                <a:latin typeface="Times New Roman" panose="02020603050405020304" pitchFamily="18" charset="0"/>
+                <a:cs typeface="Times New Roman" panose="02020603050405020304" pitchFamily="18" charset="0"/>
+              </a:rPr>
+              <a:t>Inbound</a:t>
+            </a:r>
+            <a:br>
+              <a:rPr lang="en-US" sz="3000" dirty="0">
+                <a:solidFill>
+                  <a:srgbClr val="7030A0"/>
+                </a:solidFill>
+                <a:latin typeface="Times New Roman" panose="02020603050405020304" pitchFamily="18" charset="0"/>
+                <a:cs typeface="Times New Roman" panose="02020603050405020304" pitchFamily="18" charset="0"/>
+              </a:rPr>
+            </a:br>
+            <a:r>
+              <a:rPr lang="en-US" sz="3000" dirty="0">
+                <a:solidFill>
+                  <a:srgbClr val="7030A0"/>
+                </a:solidFill>
+                <a:latin typeface="Times New Roman" panose="02020603050405020304" pitchFamily="18" charset="0"/>
+                <a:cs typeface="Times New Roman" panose="02020603050405020304" pitchFamily="18" charset="0"/>
+              </a:rPr>
+              <a:t>Communication</a:t>
+            </a:r>
+          </a:p>
+        </p:txBody>
+      </p:sp>
+      <p:sp>
+        <p:nvSpPr>
+          <p:cNvPr id="5" name="TextBox 4">
+            <a:extLst>
+              <a:ext uri="{FF2B5EF4-FFF2-40B4-BE49-F238E27FC236}">
+                <a16:creationId xmlns:a16="http://schemas.microsoft.com/office/drawing/2014/main" id="{A795B2A6-ABA9-9856-4FE9-117B42B4FFBE}"/>
+              </a:ext>
+            </a:extLst>
+          </p:cNvPr>
+          <p:cNvSpPr txBox="1"/>
+          <p:nvPr/>
+        </p:nvSpPr>
+        <p:spPr>
+          <a:xfrm>
+            <a:off x="2556918" y="3651423"/>
+            <a:ext cx="2249561" cy="1477328"/>
+          </a:xfrm>
+          <a:prstGeom prst="rect">
+            <a:avLst/>
+          </a:prstGeom>
+          <a:noFill/>
+        </p:spPr>
+        <p:txBody>
+          <a:bodyPr wrap="square" rtlCol="0">
+            <a:spAutoFit/>
+          </a:bodyPr>
+          <a:lstStyle/>
+          <a:p>
+            <a:r>
+              <a:rPr lang="en-US" sz="3000" dirty="0">
+                <a:latin typeface="Times New Roman" panose="02020603050405020304" pitchFamily="18" charset="0"/>
+                <a:cs typeface="Times New Roman" panose="02020603050405020304" pitchFamily="18" charset="0"/>
+              </a:rPr>
+              <a:t>Multicast from server to machines</a:t>
+            </a:r>
+          </a:p>
+        </p:txBody>
+      </p:sp>
+      <p:sp>
+        <p:nvSpPr>
+          <p:cNvPr id="6" name="TextBox 5">
+            <a:extLst>
+              <a:ext uri="{FF2B5EF4-FFF2-40B4-BE49-F238E27FC236}">
+                <a16:creationId xmlns:a16="http://schemas.microsoft.com/office/drawing/2014/main" id="{BD9D3A62-D515-5D87-98E6-3A77A263F7CF}"/>
+              </a:ext>
+            </a:extLst>
+          </p:cNvPr>
+          <p:cNvSpPr txBox="1"/>
+          <p:nvPr/>
+        </p:nvSpPr>
+        <p:spPr>
+          <a:xfrm>
+            <a:off x="7047593" y="3651422"/>
+            <a:ext cx="2587489" cy="1477328"/>
+          </a:xfrm>
+          <a:prstGeom prst="rect">
+            <a:avLst/>
+          </a:prstGeom>
+          <a:noFill/>
+        </p:spPr>
+        <p:txBody>
+          <a:bodyPr wrap="square" rtlCol="0">
+            <a:spAutoFit/>
+          </a:bodyPr>
+          <a:lstStyle/>
+          <a:p>
+            <a:r>
+              <a:rPr lang="en-US" sz="3000" dirty="0">
+                <a:latin typeface="Times New Roman" panose="02020603050405020304" pitchFamily="18" charset="0"/>
+                <a:cs typeface="Times New Roman" panose="02020603050405020304" pitchFamily="18" charset="0"/>
+              </a:rPr>
+              <a:t>Unicasts </a:t>
+            </a:r>
+            <a:br>
+              <a:rPr lang="en-US" sz="3000" dirty="0">
+                <a:latin typeface="Times New Roman" panose="02020603050405020304" pitchFamily="18" charset="0"/>
+                <a:cs typeface="Times New Roman" panose="02020603050405020304" pitchFamily="18" charset="0"/>
+              </a:rPr>
+            </a:br>
+            <a:r>
+              <a:rPr lang="en-US" sz="3000" dirty="0">
+                <a:latin typeface="Times New Roman" panose="02020603050405020304" pitchFamily="18" charset="0"/>
+                <a:cs typeface="Times New Roman" panose="02020603050405020304" pitchFamily="18" charset="0"/>
+              </a:rPr>
+              <a:t>from machines to server</a:t>
+            </a:r>
+          </a:p>
+        </p:txBody>
+      </p:sp>
+    </p:spTree>
+    <p:extLst>
+      <p:ext uri="{BB962C8B-B14F-4D97-AF65-F5344CB8AC3E}">
+        <p14:creationId xmlns:p14="http://schemas.microsoft.com/office/powerpoint/2010/main" val="956749138"/>
+      </p:ext>
+    </p:extLst>
+  </p:cSld>
+  <p:clrMapOvr>
+    <a:masterClrMapping/>
+  </p:clrMapOvr>
+  <mc:AlternateContent xmlns:mc="http://schemas.openxmlformats.org/markup-compatibility/2006">
+    <mc:Choice xmlns:p159="http://schemas.microsoft.com/office/powerpoint/2015/09/main" Requires="p159">
+      <p:transition spd="med">
+        <p159:morph option="byWord"/>
+      </p:transition>
+    </mc:Choice>
+    <mc:Fallback>
+      <p:transition spd="med">
+        <p:fade/>
+      </p:transition>
+    </mc:Fallback>
+  </mc:AlternateContent>
+</p:sld>
+</file>
+
 <file path=ppt/slides/slide2.xml><?xml version="1.0" encoding="utf-8"?>
 <p:sld xmlns:a="http://schemas.openxmlformats.org/drawingml/2006/main" xmlns:r="http://schemas.openxmlformats.org/officeDocument/2006/relationships" xmlns:p="http://schemas.openxmlformats.org/presentationml/2006/main">
   <p:cSld>
@@ -5556,6 +6362,87 @@
           </a:p>
         </p:txBody>
       </p:sp>
+      <p:cxnSp>
+        <p:nvCxnSpPr>
+          <p:cNvPr id="19" name="Straight Connector 18">
+            <a:extLst>
+              <a:ext uri="{FF2B5EF4-FFF2-40B4-BE49-F238E27FC236}">
+                <a16:creationId xmlns:a16="http://schemas.microsoft.com/office/drawing/2014/main" id="{9957F088-C59F-A5E4-16C6-C407A20D19EB}"/>
+              </a:ext>
+            </a:extLst>
+          </p:cNvPr>
+          <p:cNvCxnSpPr>
+            <a:cxnSpLocks/>
+          </p:cNvCxnSpPr>
+          <p:nvPr/>
+        </p:nvCxnSpPr>
+        <p:spPr>
+          <a:xfrm flipH="1">
+            <a:off x="4898571" y="2625829"/>
+            <a:ext cx="1648097" cy="1706277"/>
+          </a:xfrm>
+          <a:prstGeom prst="line">
+            <a:avLst/>
+          </a:prstGeom>
+          <a:ln w="73025">
+            <a:solidFill>
+              <a:schemeClr val="tx1"/>
+            </a:solidFill>
+          </a:ln>
+        </p:spPr>
+        <p:style>
+          <a:lnRef idx="2">
+            <a:schemeClr val="accent1"/>
+          </a:lnRef>
+          <a:fillRef idx="0">
+            <a:schemeClr val="accent1"/>
+          </a:fillRef>
+          <a:effectRef idx="1">
+            <a:schemeClr val="accent1"/>
+          </a:effectRef>
+          <a:fontRef idx="minor">
+            <a:schemeClr val="tx1"/>
+          </a:fontRef>
+        </p:style>
+      </p:cxnSp>
+      <p:sp>
+        <p:nvSpPr>
+          <p:cNvPr id="20" name="TextBox 19">
+            <a:extLst>
+              <a:ext uri="{FF2B5EF4-FFF2-40B4-BE49-F238E27FC236}">
+                <a16:creationId xmlns:a16="http://schemas.microsoft.com/office/drawing/2014/main" id="{F365D5B6-F420-9EE7-C38D-BCA65796EDC3}"/>
+              </a:ext>
+            </a:extLst>
+          </p:cNvPr>
+          <p:cNvSpPr txBox="1"/>
+          <p:nvPr/>
+        </p:nvSpPr>
+        <p:spPr>
+          <a:xfrm>
+            <a:off x="3816350" y="2924970"/>
+            <a:ext cx="2028184" cy="553998"/>
+          </a:xfrm>
+          <a:prstGeom prst="rect">
+            <a:avLst/>
+          </a:prstGeom>
+          <a:noFill/>
+        </p:spPr>
+        <p:txBody>
+          <a:bodyPr wrap="none" rtlCol="0">
+            <a:spAutoFit/>
+          </a:bodyPr>
+          <a:lstStyle/>
+          <a:p>
+            <a:r>
+              <a:rPr lang="en-US" sz="3000" dirty="0">
+                <a:latin typeface="Times New Roman" panose="02020603050405020304" pitchFamily="18" charset="0"/>
+                <a:cs typeface="Times New Roman" panose="02020603050405020304" pitchFamily="18" charset="0"/>
+              </a:rPr>
+              <a:t>Latency = x</a:t>
+            </a:r>
+          </a:p>
+        </p:txBody>
+      </p:sp>
     </p:spTree>
     <p:extLst>
       <p:ext uri="{BB962C8B-B14F-4D97-AF65-F5344CB8AC3E}">
@@ -5578,6 +6465,111 @@
       </p:transition>
     </mc:Fallback>
   </mc:AlternateContent>
+  <p:timing>
+    <p:tnLst>
+      <p:par>
+        <p:cTn id="1" dur="indefinite" restart="never" nodeType="tmRoot">
+          <p:childTnLst>
+            <p:seq concurrent="1" nextAc="seek">
+              <p:cTn id="2" dur="indefinite" nodeType="mainSeq">
+                <p:childTnLst>
+                  <p:par>
+                    <p:cTn id="3" fill="hold">
+                      <p:stCondLst>
+                        <p:cond delay="indefinite"/>
+                      </p:stCondLst>
+                      <p:childTnLst>
+                        <p:par>
+                          <p:cTn id="4" fill="hold">
+                            <p:stCondLst>
+                              <p:cond delay="0"/>
+                            </p:stCondLst>
+                            <p:childTnLst>
+                              <p:par>
+                                <p:cTn id="5" presetID="1" presetClass="entr" presetSubtype="0" fill="hold" nodeType="clickEffect">
+                                  <p:stCondLst>
+                                    <p:cond delay="0"/>
+                                  </p:stCondLst>
+                                  <p:childTnLst>
+                                    <p:set>
+                                      <p:cBhvr>
+                                        <p:cTn id="6" dur="1" fill="hold">
+                                          <p:stCondLst>
+                                            <p:cond delay="0"/>
+                                          </p:stCondLst>
+                                        </p:cTn>
+                                        <p:tgtEl>
+                                          <p:spTgt spid="19"/>
+                                        </p:tgtEl>
+                                        <p:attrNameLst>
+                                          <p:attrName>style.visibility</p:attrName>
+                                        </p:attrNameLst>
+                                      </p:cBhvr>
+                                      <p:to>
+                                        <p:strVal val="visible"/>
+                                      </p:to>
+                                    </p:set>
+                                  </p:childTnLst>
+                                </p:cTn>
+                              </p:par>
+                              <p:par>
+                                <p:cTn id="7" presetID="1" presetClass="entr" presetSubtype="0" fill="hold" grpId="0" nodeType="withEffect">
+                                  <p:stCondLst>
+                                    <p:cond delay="0"/>
+                                  </p:stCondLst>
+                                  <p:childTnLst>
+                                    <p:set>
+                                      <p:cBhvr>
+                                        <p:cTn id="8" dur="1" fill="hold">
+                                          <p:stCondLst>
+                                            <p:cond delay="0"/>
+                                          </p:stCondLst>
+                                        </p:cTn>
+                                        <p:tgtEl>
+                                          <p:spTgt spid="20"/>
+                                        </p:tgtEl>
+                                        <p:attrNameLst>
+                                          <p:attrName>style.visibility</p:attrName>
+                                        </p:attrNameLst>
+                                      </p:cBhvr>
+                                      <p:to>
+                                        <p:strVal val="visible"/>
+                                      </p:to>
+                                    </p:set>
+                                  </p:childTnLst>
+                                </p:cTn>
+                              </p:par>
+                            </p:childTnLst>
+                          </p:cTn>
+                        </p:par>
+                      </p:childTnLst>
+                    </p:cTn>
+                  </p:par>
+                </p:childTnLst>
+              </p:cTn>
+              <p:prevCondLst>
+                <p:cond evt="onPrev" delay="0">
+                  <p:tgtEl>
+                    <p:sldTgt/>
+                  </p:tgtEl>
+                </p:cond>
+              </p:prevCondLst>
+              <p:nextCondLst>
+                <p:cond evt="onNext" delay="0">
+                  <p:tgtEl>
+                    <p:sldTgt/>
+                  </p:tgtEl>
+                </p:cond>
+              </p:nextCondLst>
+            </p:seq>
+          </p:childTnLst>
+        </p:cTn>
+      </p:par>
+    </p:tnLst>
+    <p:bldLst>
+      <p:bldP spid="20" grpId="0"/>
+    </p:bldLst>
+  </p:timing>
 </p:sld>
 </file>
 
@@ -5589,7 +6581,7 @@
         <p:cNvPr id="1" name="">
           <a:extLst>
             <a:ext uri="{FF2B5EF4-FFF2-40B4-BE49-F238E27FC236}">
-              <a16:creationId xmlns:a16="http://schemas.microsoft.com/office/drawing/2014/main" id="{EA7D8580-20EC-4B90-49EC-4B6942C48A10}"/>
+              <a16:creationId xmlns:a16="http://schemas.microsoft.com/office/drawing/2014/main" id="{A511755E-C173-8AC6-CCB7-88CA41F8BA47}"/>
             </a:ext>
           </a:extLst>
         </p:cNvPr>
@@ -5609,7 +6601,7 @@
           <p:cNvPr id="16" name="Title 1">
             <a:extLst>
               <a:ext uri="{FF2B5EF4-FFF2-40B4-BE49-F238E27FC236}">
-                <a16:creationId xmlns:a16="http://schemas.microsoft.com/office/drawing/2014/main" id="{0ACC840E-3A04-FEFF-E5C9-79DFFCA1BDB3}"/>
+                <a16:creationId xmlns:a16="http://schemas.microsoft.com/office/drawing/2014/main" id="{0A204BAD-2AE3-2BEB-4251-CED19E078723}"/>
               </a:ext>
             </a:extLst>
           </p:cNvPr>
@@ -5669,7 +6661,7 @@
           <p:cNvPr id="17" name="Rectangle 16">
             <a:extLst>
               <a:ext uri="{FF2B5EF4-FFF2-40B4-BE49-F238E27FC236}">
-                <a16:creationId xmlns:a16="http://schemas.microsoft.com/office/drawing/2014/main" id="{72FA11C3-E33A-8940-834B-1322D127DCA2}"/>
+                <a16:creationId xmlns:a16="http://schemas.microsoft.com/office/drawing/2014/main" id="{AFEAA05D-721A-B81E-D08A-B8C7A54AB48D}"/>
               </a:ext>
             </a:extLst>
           </p:cNvPr>
@@ -5726,7 +6718,7 @@
           <p:cNvPr id="18" name="Rectangle 17">
             <a:extLst>
               <a:ext uri="{FF2B5EF4-FFF2-40B4-BE49-F238E27FC236}">
-                <a16:creationId xmlns:a16="http://schemas.microsoft.com/office/drawing/2014/main" id="{255C11A9-2913-21C6-A686-C1A4684758F5}"/>
+                <a16:creationId xmlns:a16="http://schemas.microsoft.com/office/drawing/2014/main" id="{132DB8AC-0D90-0E62-F236-97523C8E511B}"/>
               </a:ext>
             </a:extLst>
           </p:cNvPr>
@@ -5783,7 +6775,7 @@
           <p:cNvPr id="2" name="Oval 1">
             <a:extLst>
               <a:ext uri="{FF2B5EF4-FFF2-40B4-BE49-F238E27FC236}">
-                <a16:creationId xmlns:a16="http://schemas.microsoft.com/office/drawing/2014/main" id="{3D6B017D-F5FC-A2B9-EFEF-57D826883593}"/>
+                <a16:creationId xmlns:a16="http://schemas.microsoft.com/office/drawing/2014/main" id="{CCBA6EE3-80B4-7C7C-1A75-FDCAC047CF81}"/>
               </a:ext>
             </a:extLst>
           </p:cNvPr>
@@ -5838,7 +6830,7 @@
           <p:cNvPr id="3" name="TextBox 2">
             <a:extLst>
               <a:ext uri="{FF2B5EF4-FFF2-40B4-BE49-F238E27FC236}">
-                <a16:creationId xmlns:a16="http://schemas.microsoft.com/office/drawing/2014/main" id="{3F24776D-C215-F0C1-2A1F-C8B87596EBEA}"/>
+                <a16:creationId xmlns:a16="http://schemas.microsoft.com/office/drawing/2014/main" id="{C53B216C-8C98-A33D-0B07-A8F00229337B}"/>
               </a:ext>
             </a:extLst>
           </p:cNvPr>
@@ -5876,7 +6868,7 @@
           <p:cNvPr id="4" name="Oval 3">
             <a:extLst>
               <a:ext uri="{FF2B5EF4-FFF2-40B4-BE49-F238E27FC236}">
-                <a16:creationId xmlns:a16="http://schemas.microsoft.com/office/drawing/2014/main" id="{9A53368C-8D3D-CBF1-4F27-813743688A77}"/>
+                <a16:creationId xmlns:a16="http://schemas.microsoft.com/office/drawing/2014/main" id="{84A15F72-1E09-B5EF-D994-3884138E4974}"/>
               </a:ext>
             </a:extLst>
           </p:cNvPr>
@@ -5931,7 +6923,7 @@
           <p:cNvPr id="5" name="Oval 4">
             <a:extLst>
               <a:ext uri="{FF2B5EF4-FFF2-40B4-BE49-F238E27FC236}">
-                <a16:creationId xmlns:a16="http://schemas.microsoft.com/office/drawing/2014/main" id="{510BC7F5-B638-DEA7-FCAE-9D6DE413FE84}"/>
+                <a16:creationId xmlns:a16="http://schemas.microsoft.com/office/drawing/2014/main" id="{F76A8F01-4F4E-FD58-407B-486E14DB92D5}"/>
               </a:ext>
             </a:extLst>
           </p:cNvPr>
@@ -5986,7 +6978,7 @@
           <p:cNvPr id="10" name="Oval 9">
             <a:extLst>
               <a:ext uri="{FF2B5EF4-FFF2-40B4-BE49-F238E27FC236}">
-                <a16:creationId xmlns:a16="http://schemas.microsoft.com/office/drawing/2014/main" id="{2ED5185B-EC02-DBA4-B8D6-BCFA0AD5FC30}"/>
+                <a16:creationId xmlns:a16="http://schemas.microsoft.com/office/drawing/2014/main" id="{7D6B3EC0-216F-51C5-48E9-5B7D8EF9D662}"/>
               </a:ext>
             </a:extLst>
           </p:cNvPr>
@@ -6038,30 +7030,29 @@
       </p:sp>
       <p:cxnSp>
         <p:nvCxnSpPr>
-          <p:cNvPr id="8" name="Straight Connector 7">
-            <a:extLst>
-              <a:ext uri="{FF2B5EF4-FFF2-40B4-BE49-F238E27FC236}">
-                <a16:creationId xmlns:a16="http://schemas.microsoft.com/office/drawing/2014/main" id="{09961447-688A-261E-A45E-ED90FA8284AA}"/>
-              </a:ext>
-            </a:extLst>
-          </p:cNvPr>
-          <p:cNvCxnSpPr>
-            <a:cxnSpLocks/>
-          </p:cNvCxnSpPr>
+          <p:cNvPr id="13" name="Straight Connector 12">
+            <a:extLst>
+              <a:ext uri="{FF2B5EF4-FFF2-40B4-BE49-F238E27FC236}">
+                <a16:creationId xmlns:a16="http://schemas.microsoft.com/office/drawing/2014/main" id="{AF37B989-4F63-9656-1096-6E4DC99977A6}"/>
+              </a:ext>
+            </a:extLst>
+          </p:cNvPr>
+          <p:cNvCxnSpPr/>
           <p:nvPr/>
         </p:nvCxnSpPr>
         <p:spPr>
-          <a:xfrm flipH="1">
-            <a:off x="4898571" y="2625829"/>
-            <a:ext cx="1648097" cy="1706277"/>
+          <a:xfrm>
+            <a:off x="6772550" y="4820194"/>
+            <a:ext cx="921473" cy="0"/>
           </a:xfrm>
           <a:prstGeom prst="line">
             <a:avLst/>
           </a:prstGeom>
           <a:ln w="73025">
             <a:solidFill>
-              <a:schemeClr val="tx1"/>
+              <a:srgbClr val="7030A0"/>
             </a:solidFill>
+            <a:prstDash val="sysDot"/>
           </a:ln>
         </p:spPr>
         <p:style>
@@ -6079,225 +7070,32 @@
           </a:fontRef>
         </p:style>
       </p:cxnSp>
-      <p:sp>
-        <p:nvSpPr>
-          <p:cNvPr id="11" name="TextBox 10">
-            <a:extLst>
-              <a:ext uri="{FF2B5EF4-FFF2-40B4-BE49-F238E27FC236}">
-                <a16:creationId xmlns:a16="http://schemas.microsoft.com/office/drawing/2014/main" id="{9BDDC9B8-F36C-2C1B-4F24-86B93D2DB4BA}"/>
-              </a:ext>
-            </a:extLst>
-          </p:cNvPr>
-          <p:cNvSpPr txBox="1"/>
-          <p:nvPr/>
-        </p:nvSpPr>
-        <p:spPr>
-          <a:xfrm>
-            <a:off x="3816350" y="2924970"/>
-            <a:ext cx="2028184" cy="553998"/>
-          </a:xfrm>
-          <a:prstGeom prst="rect">
-            <a:avLst/>
-          </a:prstGeom>
-          <a:noFill/>
-        </p:spPr>
-        <p:txBody>
-          <a:bodyPr wrap="none" rtlCol="0">
-            <a:spAutoFit/>
-          </a:bodyPr>
-          <a:lstStyle/>
-          <a:p>
-            <a:r>
-              <a:rPr lang="en-US" sz="3000" dirty="0">
-                <a:latin typeface="Times New Roman" panose="02020603050405020304" pitchFamily="18" charset="0"/>
-                <a:cs typeface="Times New Roman" panose="02020603050405020304" pitchFamily="18" charset="0"/>
-              </a:rPr>
-              <a:t>Latency = x</a:t>
-            </a:r>
-          </a:p>
-        </p:txBody>
-      </p:sp>
-      <p:sp>
-        <p:nvSpPr>
-          <p:cNvPr id="12" name="TextBox 11">
-            <a:extLst>
-              <a:ext uri="{FF2B5EF4-FFF2-40B4-BE49-F238E27FC236}">
-                <a16:creationId xmlns:a16="http://schemas.microsoft.com/office/drawing/2014/main" id="{B81E5939-12FA-CE10-B388-A106748BD7CB}"/>
-              </a:ext>
-            </a:extLst>
-          </p:cNvPr>
-          <p:cNvSpPr txBox="1"/>
-          <p:nvPr/>
-        </p:nvSpPr>
-        <p:spPr>
-          <a:xfrm>
-            <a:off x="4007479" y="5238604"/>
-            <a:ext cx="1532791" cy="1015663"/>
-          </a:xfrm>
-          <a:prstGeom prst="rect">
-            <a:avLst/>
-          </a:prstGeom>
-          <a:noFill/>
-        </p:spPr>
-        <p:txBody>
-          <a:bodyPr wrap="none" rtlCol="0">
-            <a:spAutoFit/>
-          </a:bodyPr>
-          <a:lstStyle/>
-          <a:p>
-            <a:pPr algn="ctr"/>
-            <a:r>
-              <a:rPr lang="en-US" sz="3000" dirty="0">
-                <a:latin typeface="Times New Roman" panose="02020603050405020304" pitchFamily="18" charset="0"/>
-                <a:cs typeface="Times New Roman" panose="02020603050405020304" pitchFamily="18" charset="0"/>
-              </a:rPr>
-              <a:t>Machine</a:t>
-            </a:r>
-            <a:br>
-              <a:rPr lang="en-US" sz="3000" dirty="0">
-                <a:latin typeface="Times New Roman" panose="02020603050405020304" pitchFamily="18" charset="0"/>
-                <a:cs typeface="Times New Roman" panose="02020603050405020304" pitchFamily="18" charset="0"/>
-              </a:rPr>
-            </a:br>
-            <a:r>
-              <a:rPr lang="en-US" sz="3000" dirty="0">
-                <a:latin typeface="Times New Roman" panose="02020603050405020304" pitchFamily="18" charset="0"/>
-                <a:cs typeface="Times New Roman" panose="02020603050405020304" pitchFamily="18" charset="0"/>
-              </a:rPr>
-              <a:t>1</a:t>
-            </a:r>
-          </a:p>
-        </p:txBody>
-      </p:sp>
-      <p:sp>
-        <p:nvSpPr>
-          <p:cNvPr id="19" name="TextBox 18">
-            <a:extLst>
-              <a:ext uri="{FF2B5EF4-FFF2-40B4-BE49-F238E27FC236}">
-                <a16:creationId xmlns:a16="http://schemas.microsoft.com/office/drawing/2014/main" id="{72FB38A1-9623-97A0-250D-AB35EF8DADC2}"/>
-              </a:ext>
-            </a:extLst>
-          </p:cNvPr>
-          <p:cNvSpPr txBox="1"/>
-          <p:nvPr/>
-        </p:nvSpPr>
-        <p:spPr>
-          <a:xfrm>
-            <a:off x="5620421" y="5274843"/>
-            <a:ext cx="1532791" cy="1015663"/>
-          </a:xfrm>
-          <a:prstGeom prst="rect">
-            <a:avLst/>
-          </a:prstGeom>
-          <a:noFill/>
-        </p:spPr>
-        <p:txBody>
-          <a:bodyPr wrap="none" rtlCol="0">
-            <a:spAutoFit/>
-          </a:bodyPr>
-          <a:lstStyle/>
-          <a:p>
-            <a:pPr algn="ctr"/>
-            <a:r>
-              <a:rPr lang="en-US" sz="3000" dirty="0">
-                <a:latin typeface="Times New Roman" panose="02020603050405020304" pitchFamily="18" charset="0"/>
-                <a:cs typeface="Times New Roman" panose="02020603050405020304" pitchFamily="18" charset="0"/>
-              </a:rPr>
-              <a:t>Machine</a:t>
-            </a:r>
-            <a:br>
-              <a:rPr lang="en-US" sz="3000" dirty="0">
-                <a:latin typeface="Times New Roman" panose="02020603050405020304" pitchFamily="18" charset="0"/>
-                <a:cs typeface="Times New Roman" panose="02020603050405020304" pitchFamily="18" charset="0"/>
-              </a:rPr>
-            </a:br>
-            <a:r>
-              <a:rPr lang="en-US" sz="3000" dirty="0">
-                <a:latin typeface="Times New Roman" panose="02020603050405020304" pitchFamily="18" charset="0"/>
-                <a:cs typeface="Times New Roman" panose="02020603050405020304" pitchFamily="18" charset="0"/>
-              </a:rPr>
-              <a:t>2</a:t>
-            </a:r>
-          </a:p>
-        </p:txBody>
-      </p:sp>
-      <p:sp>
-        <p:nvSpPr>
-          <p:cNvPr id="20" name="TextBox 19">
-            <a:extLst>
-              <a:ext uri="{FF2B5EF4-FFF2-40B4-BE49-F238E27FC236}">
-                <a16:creationId xmlns:a16="http://schemas.microsoft.com/office/drawing/2014/main" id="{E47BD87B-5E1F-B131-B8C7-252A6C7C6C19}"/>
-              </a:ext>
-            </a:extLst>
-          </p:cNvPr>
-          <p:cNvSpPr txBox="1"/>
-          <p:nvPr/>
-        </p:nvSpPr>
-        <p:spPr>
-          <a:xfrm>
-            <a:off x="7674812" y="5238604"/>
-            <a:ext cx="1532791" cy="1015663"/>
-          </a:xfrm>
-          <a:prstGeom prst="rect">
-            <a:avLst/>
-          </a:prstGeom>
-          <a:noFill/>
-        </p:spPr>
-        <p:txBody>
-          <a:bodyPr wrap="none" rtlCol="0">
-            <a:spAutoFit/>
-          </a:bodyPr>
-          <a:lstStyle/>
-          <a:p>
-            <a:pPr algn="ctr"/>
-            <a:r>
-              <a:rPr lang="en-US" sz="3000" dirty="0">
-                <a:latin typeface="Times New Roman" panose="02020603050405020304" pitchFamily="18" charset="0"/>
-                <a:cs typeface="Times New Roman" panose="02020603050405020304" pitchFamily="18" charset="0"/>
-              </a:rPr>
-              <a:t>Machine</a:t>
-            </a:r>
-            <a:br>
-              <a:rPr lang="en-US" sz="3000" dirty="0">
-                <a:latin typeface="Times New Roman" panose="02020603050405020304" pitchFamily="18" charset="0"/>
-                <a:cs typeface="Times New Roman" panose="02020603050405020304" pitchFamily="18" charset="0"/>
-              </a:rPr>
-            </a:br>
-            <a:r>
-              <a:rPr lang="en-US" sz="3000" dirty="0">
-                <a:latin typeface="Times New Roman" panose="02020603050405020304" pitchFamily="18" charset="0"/>
-                <a:cs typeface="Times New Roman" panose="02020603050405020304" pitchFamily="18" charset="0"/>
-              </a:rPr>
-              <a:t>n</a:t>
-            </a:r>
-          </a:p>
-        </p:txBody>
-      </p:sp>
       <p:cxnSp>
         <p:nvCxnSpPr>
-          <p:cNvPr id="22" name="Straight Connector 21">
-            <a:extLst>
-              <a:ext uri="{FF2B5EF4-FFF2-40B4-BE49-F238E27FC236}">
-                <a16:creationId xmlns:a16="http://schemas.microsoft.com/office/drawing/2014/main" id="{3CEFA76E-074E-2C67-7DBC-58119C1A8115}"/>
-              </a:ext>
-            </a:extLst>
-          </p:cNvPr>
-          <p:cNvCxnSpPr/>
+          <p:cNvPr id="8" name="Straight Connector 7">
+            <a:extLst>
+              <a:ext uri="{FF2B5EF4-FFF2-40B4-BE49-F238E27FC236}">
+                <a16:creationId xmlns:a16="http://schemas.microsoft.com/office/drawing/2014/main" id="{7F46326F-B42F-09AC-29F7-05609C09F5DC}"/>
+              </a:ext>
+            </a:extLst>
+          </p:cNvPr>
+          <p:cNvCxnSpPr>
+            <a:cxnSpLocks/>
+          </p:cNvCxnSpPr>
           <p:nvPr/>
         </p:nvCxnSpPr>
         <p:spPr>
-          <a:xfrm>
-            <a:off x="6772550" y="4820194"/>
-            <a:ext cx="921473" cy="0"/>
+          <a:xfrm flipH="1">
+            <a:off x="4898571" y="2625829"/>
+            <a:ext cx="1648097" cy="1706277"/>
           </a:xfrm>
           <a:prstGeom prst="line">
             <a:avLst/>
           </a:prstGeom>
           <a:ln w="73025">
             <a:solidFill>
-              <a:srgbClr val="7030A0"/>
+              <a:schemeClr val="tx1"/>
             </a:solidFill>
-            <a:prstDash val="sysDot"/>
           </a:ln>
         </p:spPr>
         <p:style>
@@ -6315,10 +7113,370 @@
           </a:fontRef>
         </p:style>
       </p:cxnSp>
+      <p:sp>
+        <p:nvSpPr>
+          <p:cNvPr id="11" name="TextBox 10">
+            <a:extLst>
+              <a:ext uri="{FF2B5EF4-FFF2-40B4-BE49-F238E27FC236}">
+                <a16:creationId xmlns:a16="http://schemas.microsoft.com/office/drawing/2014/main" id="{6F0017D1-AF53-F59D-E0BF-82AD02E5705A}"/>
+              </a:ext>
+            </a:extLst>
+          </p:cNvPr>
+          <p:cNvSpPr txBox="1"/>
+          <p:nvPr/>
+        </p:nvSpPr>
+        <p:spPr>
+          <a:xfrm>
+            <a:off x="3816350" y="2924970"/>
+            <a:ext cx="2028184" cy="553998"/>
+          </a:xfrm>
+          <a:prstGeom prst="rect">
+            <a:avLst/>
+          </a:prstGeom>
+          <a:noFill/>
+        </p:spPr>
+        <p:txBody>
+          <a:bodyPr wrap="none" rtlCol="0">
+            <a:spAutoFit/>
+          </a:bodyPr>
+          <a:lstStyle/>
+          <a:p>
+            <a:r>
+              <a:rPr lang="en-US" sz="3000" dirty="0">
+                <a:latin typeface="Times New Roman" panose="02020603050405020304" pitchFamily="18" charset="0"/>
+                <a:cs typeface="Times New Roman" panose="02020603050405020304" pitchFamily="18" charset="0"/>
+              </a:rPr>
+              <a:t>Latency = x</a:t>
+            </a:r>
+          </a:p>
+        </p:txBody>
+      </p:sp>
+      <p:cxnSp>
+        <p:nvCxnSpPr>
+          <p:cNvPr id="7" name="Straight Connector 6">
+            <a:extLst>
+              <a:ext uri="{FF2B5EF4-FFF2-40B4-BE49-F238E27FC236}">
+                <a16:creationId xmlns:a16="http://schemas.microsoft.com/office/drawing/2014/main" id="{6882A26D-9AD0-F761-DD5F-1B6F1A0FB528}"/>
+              </a:ext>
+            </a:extLst>
+          </p:cNvPr>
+          <p:cNvCxnSpPr>
+            <a:cxnSpLocks/>
+            <a:stCxn id="2" idx="4"/>
+            <a:endCxn id="5" idx="0"/>
+          </p:cNvCxnSpPr>
+          <p:nvPr/>
+        </p:nvCxnSpPr>
+        <p:spPr>
+          <a:xfrm flipH="1">
+            <a:off x="6096000" y="2625829"/>
+            <a:ext cx="537757" cy="1706277"/>
+          </a:xfrm>
+          <a:prstGeom prst="line">
+            <a:avLst/>
+          </a:prstGeom>
+          <a:ln w="73025">
+            <a:solidFill>
+              <a:schemeClr val="tx1"/>
+            </a:solidFill>
+          </a:ln>
+        </p:spPr>
+        <p:style>
+          <a:lnRef idx="2">
+            <a:schemeClr val="accent1"/>
+          </a:lnRef>
+          <a:fillRef idx="0">
+            <a:schemeClr val="accent1"/>
+          </a:fillRef>
+          <a:effectRef idx="1">
+            <a:schemeClr val="accent1"/>
+          </a:effectRef>
+          <a:fontRef idx="minor">
+            <a:schemeClr val="tx1"/>
+          </a:fontRef>
+        </p:style>
+      </p:cxnSp>
+      <p:cxnSp>
+        <p:nvCxnSpPr>
+          <p:cNvPr id="19" name="Straight Connector 18">
+            <a:extLst>
+              <a:ext uri="{FF2B5EF4-FFF2-40B4-BE49-F238E27FC236}">
+                <a16:creationId xmlns:a16="http://schemas.microsoft.com/office/drawing/2014/main" id="{049E8D3C-F351-9100-FF50-FB750F36D49B}"/>
+              </a:ext>
+            </a:extLst>
+          </p:cNvPr>
+          <p:cNvCxnSpPr>
+            <a:cxnSpLocks/>
+            <a:stCxn id="2" idx="4"/>
+            <a:endCxn id="10" idx="0"/>
+          </p:cNvCxnSpPr>
+          <p:nvPr/>
+        </p:nvCxnSpPr>
+        <p:spPr>
+          <a:xfrm>
+            <a:off x="6633757" y="2625829"/>
+            <a:ext cx="1807452" cy="1706277"/>
+          </a:xfrm>
+          <a:prstGeom prst="line">
+            <a:avLst/>
+          </a:prstGeom>
+          <a:ln w="73025">
+            <a:solidFill>
+              <a:schemeClr val="tx1"/>
+            </a:solidFill>
+          </a:ln>
+        </p:spPr>
+        <p:style>
+          <a:lnRef idx="2">
+            <a:schemeClr val="accent1"/>
+          </a:lnRef>
+          <a:fillRef idx="0">
+            <a:schemeClr val="accent1"/>
+          </a:fillRef>
+          <a:effectRef idx="1">
+            <a:schemeClr val="accent1"/>
+          </a:effectRef>
+          <a:fontRef idx="minor">
+            <a:schemeClr val="tx1"/>
+          </a:fontRef>
+        </p:style>
+      </p:cxnSp>
+      <p:sp>
+        <p:nvSpPr>
+          <p:cNvPr id="22" name="TextBox 21">
+            <a:extLst>
+              <a:ext uri="{FF2B5EF4-FFF2-40B4-BE49-F238E27FC236}">
+                <a16:creationId xmlns:a16="http://schemas.microsoft.com/office/drawing/2014/main" id="{67DD44FF-CE97-2CB1-9C9D-896046234F7B}"/>
+              </a:ext>
+            </a:extLst>
+          </p:cNvPr>
+          <p:cNvSpPr txBox="1"/>
+          <p:nvPr/>
+        </p:nvSpPr>
+        <p:spPr>
+          <a:xfrm>
+            <a:off x="5962244" y="3351539"/>
+            <a:ext cx="377026" cy="553998"/>
+          </a:xfrm>
+          <a:prstGeom prst="rect">
+            <a:avLst/>
+          </a:prstGeom>
+          <a:noFill/>
+        </p:spPr>
+        <p:txBody>
+          <a:bodyPr wrap="none" rtlCol="0">
+            <a:spAutoFit/>
+          </a:bodyPr>
+          <a:lstStyle/>
+          <a:p>
+            <a:r>
+              <a:rPr lang="en-US" sz="3000" dirty="0">
+                <a:latin typeface="Times New Roman" panose="02020603050405020304" pitchFamily="18" charset="0"/>
+                <a:cs typeface="Times New Roman" panose="02020603050405020304" pitchFamily="18" charset="0"/>
+              </a:rPr>
+              <a:t>x</a:t>
+            </a:r>
+          </a:p>
+        </p:txBody>
+      </p:sp>
+      <p:sp>
+        <p:nvSpPr>
+          <p:cNvPr id="23" name="TextBox 22">
+            <a:extLst>
+              <a:ext uri="{FF2B5EF4-FFF2-40B4-BE49-F238E27FC236}">
+                <a16:creationId xmlns:a16="http://schemas.microsoft.com/office/drawing/2014/main" id="{AD108A5D-E1CA-683A-2BFF-9C7FB884DFA4}"/>
+              </a:ext>
+            </a:extLst>
+          </p:cNvPr>
+          <p:cNvSpPr txBox="1"/>
+          <p:nvPr/>
+        </p:nvSpPr>
+        <p:spPr>
+          <a:xfrm>
+            <a:off x="7231651" y="3351539"/>
+            <a:ext cx="377026" cy="553998"/>
+          </a:xfrm>
+          <a:prstGeom prst="rect">
+            <a:avLst/>
+          </a:prstGeom>
+          <a:noFill/>
+        </p:spPr>
+        <p:txBody>
+          <a:bodyPr wrap="none" rtlCol="0">
+            <a:spAutoFit/>
+          </a:bodyPr>
+          <a:lstStyle/>
+          <a:p>
+            <a:r>
+              <a:rPr lang="en-US" sz="3000" dirty="0">
+                <a:latin typeface="Times New Roman" panose="02020603050405020304" pitchFamily="18" charset="0"/>
+                <a:cs typeface="Times New Roman" panose="02020603050405020304" pitchFamily="18" charset="0"/>
+              </a:rPr>
+              <a:t>x</a:t>
+            </a:r>
+          </a:p>
+        </p:txBody>
+      </p:sp>
+      <p:sp>
+        <p:nvSpPr>
+          <p:cNvPr id="24" name="TextBox 23">
+            <a:extLst>
+              <a:ext uri="{FF2B5EF4-FFF2-40B4-BE49-F238E27FC236}">
+                <a16:creationId xmlns:a16="http://schemas.microsoft.com/office/drawing/2014/main" id="{2391C58C-24F7-1099-CC70-0D8346E614DA}"/>
+              </a:ext>
+            </a:extLst>
+          </p:cNvPr>
+          <p:cNvSpPr txBox="1"/>
+          <p:nvPr/>
+        </p:nvSpPr>
+        <p:spPr>
+          <a:xfrm>
+            <a:off x="4007479" y="5238604"/>
+            <a:ext cx="1532791" cy="1015663"/>
+          </a:xfrm>
+          <a:prstGeom prst="rect">
+            <a:avLst/>
+          </a:prstGeom>
+          <a:noFill/>
+        </p:spPr>
+        <p:txBody>
+          <a:bodyPr wrap="none" rtlCol="0">
+            <a:spAutoFit/>
+          </a:bodyPr>
+          <a:lstStyle/>
+          <a:p>
+            <a:pPr algn="ctr"/>
+            <a:r>
+              <a:rPr lang="en-US" sz="3000" dirty="0">
+                <a:latin typeface="Times New Roman" panose="02020603050405020304" pitchFamily="18" charset="0"/>
+                <a:cs typeface="Times New Roman" panose="02020603050405020304" pitchFamily="18" charset="0"/>
+              </a:rPr>
+              <a:t>Machine</a:t>
+            </a:r>
+            <a:br>
+              <a:rPr lang="en-US" sz="3000" dirty="0">
+                <a:latin typeface="Times New Roman" panose="02020603050405020304" pitchFamily="18" charset="0"/>
+                <a:cs typeface="Times New Roman" panose="02020603050405020304" pitchFamily="18" charset="0"/>
+              </a:rPr>
+            </a:br>
+            <a:r>
+              <a:rPr lang="en-US" sz="3000" dirty="0">
+                <a:latin typeface="Times New Roman" panose="02020603050405020304" pitchFamily="18" charset="0"/>
+                <a:cs typeface="Times New Roman" panose="02020603050405020304" pitchFamily="18" charset="0"/>
+              </a:rPr>
+              <a:t>1</a:t>
+            </a:r>
+          </a:p>
+        </p:txBody>
+      </p:sp>
+      <p:sp>
+        <p:nvSpPr>
+          <p:cNvPr id="25" name="TextBox 24">
+            <a:extLst>
+              <a:ext uri="{FF2B5EF4-FFF2-40B4-BE49-F238E27FC236}">
+                <a16:creationId xmlns:a16="http://schemas.microsoft.com/office/drawing/2014/main" id="{6DE4AA79-253F-0A70-F589-4CB54928CDB3}"/>
+              </a:ext>
+            </a:extLst>
+          </p:cNvPr>
+          <p:cNvSpPr txBox="1"/>
+          <p:nvPr/>
+        </p:nvSpPr>
+        <p:spPr>
+          <a:xfrm>
+            <a:off x="5620421" y="5274843"/>
+            <a:ext cx="1532791" cy="1015663"/>
+          </a:xfrm>
+          <a:prstGeom prst="rect">
+            <a:avLst/>
+          </a:prstGeom>
+          <a:noFill/>
+        </p:spPr>
+        <p:txBody>
+          <a:bodyPr wrap="none" rtlCol="0">
+            <a:spAutoFit/>
+          </a:bodyPr>
+          <a:lstStyle/>
+          <a:p>
+            <a:pPr algn="ctr"/>
+            <a:r>
+              <a:rPr lang="en-US" sz="3000" dirty="0">
+                <a:latin typeface="Times New Roman" panose="02020603050405020304" pitchFamily="18" charset="0"/>
+                <a:cs typeface="Times New Roman" panose="02020603050405020304" pitchFamily="18" charset="0"/>
+              </a:rPr>
+              <a:t>Machine</a:t>
+            </a:r>
+            <a:br>
+              <a:rPr lang="en-US" sz="3000" dirty="0">
+                <a:latin typeface="Times New Roman" panose="02020603050405020304" pitchFamily="18" charset="0"/>
+                <a:cs typeface="Times New Roman" panose="02020603050405020304" pitchFamily="18" charset="0"/>
+              </a:rPr>
+            </a:br>
+            <a:r>
+              <a:rPr lang="en-US" sz="3000" dirty="0">
+                <a:latin typeface="Times New Roman" panose="02020603050405020304" pitchFamily="18" charset="0"/>
+                <a:cs typeface="Times New Roman" panose="02020603050405020304" pitchFamily="18" charset="0"/>
+              </a:rPr>
+              <a:t>2</a:t>
+            </a:r>
+          </a:p>
+        </p:txBody>
+      </p:sp>
+      <p:sp>
+        <p:nvSpPr>
+          <p:cNvPr id="26" name="TextBox 25">
+            <a:extLst>
+              <a:ext uri="{FF2B5EF4-FFF2-40B4-BE49-F238E27FC236}">
+                <a16:creationId xmlns:a16="http://schemas.microsoft.com/office/drawing/2014/main" id="{8D9094E4-F048-C5EE-41E2-6258F9F01387}"/>
+              </a:ext>
+            </a:extLst>
+          </p:cNvPr>
+          <p:cNvSpPr txBox="1"/>
+          <p:nvPr/>
+        </p:nvSpPr>
+        <p:spPr>
+          <a:xfrm>
+            <a:off x="7674812" y="5238604"/>
+            <a:ext cx="1532791" cy="1015663"/>
+          </a:xfrm>
+          <a:prstGeom prst="rect">
+            <a:avLst/>
+          </a:prstGeom>
+          <a:noFill/>
+        </p:spPr>
+        <p:txBody>
+          <a:bodyPr wrap="none" rtlCol="0">
+            <a:spAutoFit/>
+          </a:bodyPr>
+          <a:lstStyle/>
+          <a:p>
+            <a:pPr algn="ctr"/>
+            <a:r>
+              <a:rPr lang="en-US" sz="3000" dirty="0">
+                <a:latin typeface="Times New Roman" panose="02020603050405020304" pitchFamily="18" charset="0"/>
+                <a:cs typeface="Times New Roman" panose="02020603050405020304" pitchFamily="18" charset="0"/>
+              </a:rPr>
+              <a:t>Machine</a:t>
+            </a:r>
+            <a:br>
+              <a:rPr lang="en-US" sz="3000" dirty="0">
+                <a:latin typeface="Times New Roman" panose="02020603050405020304" pitchFamily="18" charset="0"/>
+                <a:cs typeface="Times New Roman" panose="02020603050405020304" pitchFamily="18" charset="0"/>
+              </a:rPr>
+            </a:br>
+            <a:r>
+              <a:rPr lang="en-US" sz="3000" dirty="0">
+                <a:latin typeface="Times New Roman" panose="02020603050405020304" pitchFamily="18" charset="0"/>
+                <a:cs typeface="Times New Roman" panose="02020603050405020304" pitchFamily="18" charset="0"/>
+              </a:rPr>
+              <a:t>n</a:t>
+            </a:r>
+          </a:p>
+        </p:txBody>
+      </p:sp>
     </p:spTree>
     <p:extLst>
       <p:ext uri="{BB962C8B-B14F-4D97-AF65-F5344CB8AC3E}">
-        <p14:creationId xmlns:p14="http://schemas.microsoft.com/office/powerpoint/2010/main" val="4218537305"/>
+        <p14:creationId xmlns:p14="http://schemas.microsoft.com/office/powerpoint/2010/main" val="3086061470"/>
       </p:ext>
     </p:extLst>
   </p:cSld>
@@ -6348,7 +7506,7 @@
         <p:cNvPr id="1" name="">
           <a:extLst>
             <a:ext uri="{FF2B5EF4-FFF2-40B4-BE49-F238E27FC236}">
-              <a16:creationId xmlns:a16="http://schemas.microsoft.com/office/drawing/2014/main" id="{A511755E-C173-8AC6-CCB7-88CA41F8BA47}"/>
+              <a16:creationId xmlns:a16="http://schemas.microsoft.com/office/drawing/2014/main" id="{A8061B84-C3D2-0512-F238-F96AAFC68B60}"/>
             </a:ext>
           </a:extLst>
         </p:cNvPr>
@@ -6368,7 +7526,7 @@
           <p:cNvPr id="16" name="Title 1">
             <a:extLst>
               <a:ext uri="{FF2B5EF4-FFF2-40B4-BE49-F238E27FC236}">
-                <a16:creationId xmlns:a16="http://schemas.microsoft.com/office/drawing/2014/main" id="{0A204BAD-2AE3-2BEB-4251-CED19E078723}"/>
+                <a16:creationId xmlns:a16="http://schemas.microsoft.com/office/drawing/2014/main" id="{89A92299-5C6B-2398-C237-A0BF53310FEE}"/>
               </a:ext>
             </a:extLst>
           </p:cNvPr>
@@ -6428,7 +7586,7 @@
           <p:cNvPr id="17" name="Rectangle 16">
             <a:extLst>
               <a:ext uri="{FF2B5EF4-FFF2-40B4-BE49-F238E27FC236}">
-                <a16:creationId xmlns:a16="http://schemas.microsoft.com/office/drawing/2014/main" id="{AFEAA05D-721A-B81E-D08A-B8C7A54AB48D}"/>
+                <a16:creationId xmlns:a16="http://schemas.microsoft.com/office/drawing/2014/main" id="{5FB9B97A-CDEE-A98E-3709-B0D4FE4B63B4}"/>
               </a:ext>
             </a:extLst>
           </p:cNvPr>
@@ -6485,7 +7643,7 @@
           <p:cNvPr id="18" name="Rectangle 17">
             <a:extLst>
               <a:ext uri="{FF2B5EF4-FFF2-40B4-BE49-F238E27FC236}">
-                <a16:creationId xmlns:a16="http://schemas.microsoft.com/office/drawing/2014/main" id="{132DB8AC-0D90-0E62-F236-97523C8E511B}"/>
+                <a16:creationId xmlns:a16="http://schemas.microsoft.com/office/drawing/2014/main" id="{D3A324CB-1C92-04A0-9C3E-668334A78F8F}"/>
               </a:ext>
             </a:extLst>
           </p:cNvPr>
@@ -6542,7 +7700,7 @@
           <p:cNvPr id="2" name="Oval 1">
             <a:extLst>
               <a:ext uri="{FF2B5EF4-FFF2-40B4-BE49-F238E27FC236}">
-                <a16:creationId xmlns:a16="http://schemas.microsoft.com/office/drawing/2014/main" id="{CCBA6EE3-80B4-7C7C-1A75-FDCAC047CF81}"/>
+                <a16:creationId xmlns:a16="http://schemas.microsoft.com/office/drawing/2014/main" id="{9B2FE237-FC45-F917-9B03-7B96BE775EF7}"/>
               </a:ext>
             </a:extLst>
           </p:cNvPr>
@@ -6551,7 +7709,7 @@
         </p:nvSpPr>
         <p:spPr>
           <a:xfrm>
-            <a:off x="6183088" y="1737555"/>
+            <a:off x="8497572" y="1737555"/>
             <a:ext cx="901337" cy="888274"/>
           </a:xfrm>
           <a:prstGeom prst="ellipse">
@@ -6597,7 +7755,7 @@
           <p:cNvPr id="3" name="TextBox 2">
             <a:extLst>
               <a:ext uri="{FF2B5EF4-FFF2-40B4-BE49-F238E27FC236}">
-                <a16:creationId xmlns:a16="http://schemas.microsoft.com/office/drawing/2014/main" id="{C53B216C-8C98-A33D-0B07-A8F00229337B}"/>
+                <a16:creationId xmlns:a16="http://schemas.microsoft.com/office/drawing/2014/main" id="{3331760F-3F11-E61A-220F-2D9D5F24420C}"/>
               </a:ext>
             </a:extLst>
           </p:cNvPr>
@@ -6606,7 +7764,7 @@
         </p:nvSpPr>
         <p:spPr>
           <a:xfrm>
-            <a:off x="5844534" y="1201782"/>
+            <a:off x="8159018" y="1201782"/>
             <a:ext cx="1189749" cy="553998"/>
           </a:xfrm>
           <a:prstGeom prst="rect">
@@ -6635,7 +7793,7 @@
           <p:cNvPr id="4" name="Oval 3">
             <a:extLst>
               <a:ext uri="{FF2B5EF4-FFF2-40B4-BE49-F238E27FC236}">
-                <a16:creationId xmlns:a16="http://schemas.microsoft.com/office/drawing/2014/main" id="{84A15F72-1E09-B5EF-D994-3884138E4974}"/>
+                <a16:creationId xmlns:a16="http://schemas.microsoft.com/office/drawing/2014/main" id="{3E8A4293-5A06-EB17-6909-2373990365BD}"/>
               </a:ext>
             </a:extLst>
           </p:cNvPr>
@@ -6644,7 +7802,7 @@
         </p:nvSpPr>
         <p:spPr>
           <a:xfrm>
-            <a:off x="4236720" y="4332106"/>
+            <a:off x="6551204" y="4332106"/>
             <a:ext cx="901337" cy="888274"/>
           </a:xfrm>
           <a:prstGeom prst="ellipse">
@@ -6690,7 +7848,7 @@
           <p:cNvPr id="5" name="Oval 4">
             <a:extLst>
               <a:ext uri="{FF2B5EF4-FFF2-40B4-BE49-F238E27FC236}">
-                <a16:creationId xmlns:a16="http://schemas.microsoft.com/office/drawing/2014/main" id="{F76A8F01-4F4E-FD58-407B-486E14DB92D5}"/>
+                <a16:creationId xmlns:a16="http://schemas.microsoft.com/office/drawing/2014/main" id="{A57B0007-8C67-8F7C-D173-D267BE3BFEEE}"/>
               </a:ext>
             </a:extLst>
           </p:cNvPr>
@@ -6699,7 +7857,7 @@
         </p:nvSpPr>
         <p:spPr>
           <a:xfrm>
-            <a:off x="5645331" y="4332106"/>
+            <a:off x="7959815" y="4332106"/>
             <a:ext cx="901337" cy="888274"/>
           </a:xfrm>
           <a:prstGeom prst="ellipse">
@@ -6745,7 +7903,7 @@
           <p:cNvPr id="10" name="Oval 9">
             <a:extLst>
               <a:ext uri="{FF2B5EF4-FFF2-40B4-BE49-F238E27FC236}">
-                <a16:creationId xmlns:a16="http://schemas.microsoft.com/office/drawing/2014/main" id="{7D6B3EC0-216F-51C5-48E9-5B7D8EF9D662}"/>
+                <a16:creationId xmlns:a16="http://schemas.microsoft.com/office/drawing/2014/main" id="{55E5BAF8-3640-C46F-75E6-136B6ADA553B}"/>
               </a:ext>
             </a:extLst>
           </p:cNvPr>
@@ -6754,7 +7912,7 @@
         </p:nvSpPr>
         <p:spPr>
           <a:xfrm>
-            <a:off x="7990540" y="4332106"/>
+            <a:off x="10305024" y="4332106"/>
             <a:ext cx="901337" cy="888274"/>
           </a:xfrm>
           <a:prstGeom prst="ellipse">
@@ -6800,7 +7958,7 @@
           <p:cNvPr id="13" name="Straight Connector 12">
             <a:extLst>
               <a:ext uri="{FF2B5EF4-FFF2-40B4-BE49-F238E27FC236}">
-                <a16:creationId xmlns:a16="http://schemas.microsoft.com/office/drawing/2014/main" id="{AF37B989-4F63-9656-1096-6E4DC99977A6}"/>
+                <a16:creationId xmlns:a16="http://schemas.microsoft.com/office/drawing/2014/main" id="{35DF2E18-22EB-5F6C-8F04-D8757765A5A5}"/>
               </a:ext>
             </a:extLst>
           </p:cNvPr>
@@ -6809,7 +7967,7 @@
         </p:nvCxnSpPr>
         <p:spPr>
           <a:xfrm>
-            <a:off x="6772550" y="4820194"/>
+            <a:off x="9087034" y="4820194"/>
             <a:ext cx="921473" cy="0"/>
           </a:xfrm>
           <a:prstGeom prst="line">
@@ -6842,7 +8000,7 @@
           <p:cNvPr id="8" name="Straight Connector 7">
             <a:extLst>
               <a:ext uri="{FF2B5EF4-FFF2-40B4-BE49-F238E27FC236}">
-                <a16:creationId xmlns:a16="http://schemas.microsoft.com/office/drawing/2014/main" id="{7F46326F-B42F-09AC-29F7-05609C09F5DC}"/>
+                <a16:creationId xmlns:a16="http://schemas.microsoft.com/office/drawing/2014/main" id="{D8213D92-E999-BBC4-4870-BE36D2EDF770}"/>
               </a:ext>
             </a:extLst>
           </p:cNvPr>
@@ -6853,7 +8011,7 @@
         </p:nvCxnSpPr>
         <p:spPr>
           <a:xfrm flipH="1">
-            <a:off x="4898571" y="2625829"/>
+            <a:off x="7213055" y="2625829"/>
             <a:ext cx="1648097" cy="1706277"/>
           </a:xfrm>
           <a:prstGeom prst="line">
@@ -6885,7 +8043,7 @@
           <p:cNvPr id="11" name="TextBox 10">
             <a:extLst>
               <a:ext uri="{FF2B5EF4-FFF2-40B4-BE49-F238E27FC236}">
-                <a16:creationId xmlns:a16="http://schemas.microsoft.com/office/drawing/2014/main" id="{6F0017D1-AF53-F59D-E0BF-82AD02E5705A}"/>
+                <a16:creationId xmlns:a16="http://schemas.microsoft.com/office/drawing/2014/main" id="{B4CFB281-93FC-0337-C42C-E88DE9BB1BA9}"/>
               </a:ext>
             </a:extLst>
           </p:cNvPr>
@@ -6894,7 +8052,7 @@
         </p:nvSpPr>
         <p:spPr>
           <a:xfrm>
-            <a:off x="3816350" y="2924970"/>
+            <a:off x="6130834" y="2924970"/>
             <a:ext cx="2028184" cy="553998"/>
           </a:xfrm>
           <a:prstGeom prst="rect">
@@ -6923,7 +8081,7 @@
           <p:cNvPr id="7" name="Straight Connector 6">
             <a:extLst>
               <a:ext uri="{FF2B5EF4-FFF2-40B4-BE49-F238E27FC236}">
-                <a16:creationId xmlns:a16="http://schemas.microsoft.com/office/drawing/2014/main" id="{6882A26D-9AD0-F761-DD5F-1B6F1A0FB528}"/>
+                <a16:creationId xmlns:a16="http://schemas.microsoft.com/office/drawing/2014/main" id="{1834301D-D908-2577-872B-C83EF70465A9}"/>
               </a:ext>
             </a:extLst>
           </p:cNvPr>
@@ -6936,7 +8094,7 @@
         </p:nvCxnSpPr>
         <p:spPr>
           <a:xfrm flipH="1">
-            <a:off x="6096000" y="2625829"/>
+            <a:off x="8410484" y="2625829"/>
             <a:ext cx="537757" cy="1706277"/>
           </a:xfrm>
           <a:prstGeom prst="line">
@@ -6968,7 +8126,7 @@
           <p:cNvPr id="19" name="Straight Connector 18">
             <a:extLst>
               <a:ext uri="{FF2B5EF4-FFF2-40B4-BE49-F238E27FC236}">
-                <a16:creationId xmlns:a16="http://schemas.microsoft.com/office/drawing/2014/main" id="{049E8D3C-F351-9100-FF50-FB750F36D49B}"/>
+                <a16:creationId xmlns:a16="http://schemas.microsoft.com/office/drawing/2014/main" id="{3A45D0F6-BFD4-413A-D431-C887B69E4E7A}"/>
               </a:ext>
             </a:extLst>
           </p:cNvPr>
@@ -6981,7 +8139,7 @@
         </p:nvCxnSpPr>
         <p:spPr>
           <a:xfrm>
-            <a:off x="6633757" y="2625829"/>
+            <a:off x="8948241" y="2625829"/>
             <a:ext cx="1807452" cy="1706277"/>
           </a:xfrm>
           <a:prstGeom prst="line">
@@ -7013,7 +8171,7 @@
           <p:cNvPr id="22" name="TextBox 21">
             <a:extLst>
               <a:ext uri="{FF2B5EF4-FFF2-40B4-BE49-F238E27FC236}">
-                <a16:creationId xmlns:a16="http://schemas.microsoft.com/office/drawing/2014/main" id="{67DD44FF-CE97-2CB1-9C9D-896046234F7B}"/>
+                <a16:creationId xmlns:a16="http://schemas.microsoft.com/office/drawing/2014/main" id="{DD328095-C878-8ED9-2CE4-292AD231B837}"/>
               </a:ext>
             </a:extLst>
           </p:cNvPr>
@@ -7022,7 +8180,7 @@
         </p:nvSpPr>
         <p:spPr>
           <a:xfrm>
-            <a:off x="5962244" y="3351539"/>
+            <a:off x="8276728" y="3351539"/>
             <a:ext cx="377026" cy="553998"/>
           </a:xfrm>
           <a:prstGeom prst="rect">
@@ -7051,7 +8209,7 @@
           <p:cNvPr id="23" name="TextBox 22">
             <a:extLst>
               <a:ext uri="{FF2B5EF4-FFF2-40B4-BE49-F238E27FC236}">
-                <a16:creationId xmlns:a16="http://schemas.microsoft.com/office/drawing/2014/main" id="{AD108A5D-E1CA-683A-2BFF-9C7FB884DFA4}"/>
+                <a16:creationId xmlns:a16="http://schemas.microsoft.com/office/drawing/2014/main" id="{16BDBEB0-F1ED-B7E0-F43B-CFF2B3EFFB99}"/>
               </a:ext>
             </a:extLst>
           </p:cNvPr>
@@ -7060,7 +8218,7 @@
         </p:nvSpPr>
         <p:spPr>
           <a:xfrm>
-            <a:off x="7231651" y="3351539"/>
+            <a:off x="9546135" y="3351539"/>
             <a:ext cx="377026" cy="553998"/>
           </a:xfrm>
           <a:prstGeom prst="rect">
@@ -7089,7 +8247,7 @@
           <p:cNvPr id="24" name="TextBox 23">
             <a:extLst>
               <a:ext uri="{FF2B5EF4-FFF2-40B4-BE49-F238E27FC236}">
-                <a16:creationId xmlns:a16="http://schemas.microsoft.com/office/drawing/2014/main" id="{2391C58C-24F7-1099-CC70-0D8346E614DA}"/>
+                <a16:creationId xmlns:a16="http://schemas.microsoft.com/office/drawing/2014/main" id="{7F28D4E7-7A82-9381-29DD-B2E25638C142}"/>
               </a:ext>
             </a:extLst>
           </p:cNvPr>
@@ -7098,7 +8256,7 @@
         </p:nvSpPr>
         <p:spPr>
           <a:xfrm>
-            <a:off x="4007479" y="5238604"/>
+            <a:off x="6321963" y="5238604"/>
             <a:ext cx="1532791" cy="1015663"/>
           </a:xfrm>
           <a:prstGeom prst="rect">
@@ -7141,7 +8299,7 @@
           <p:cNvPr id="25" name="TextBox 24">
             <a:extLst>
               <a:ext uri="{FF2B5EF4-FFF2-40B4-BE49-F238E27FC236}">
-                <a16:creationId xmlns:a16="http://schemas.microsoft.com/office/drawing/2014/main" id="{6DE4AA79-253F-0A70-F589-4CB54928CDB3}"/>
+                <a16:creationId xmlns:a16="http://schemas.microsoft.com/office/drawing/2014/main" id="{FFA5D318-D663-0502-66E3-6CB49CD6075E}"/>
               </a:ext>
             </a:extLst>
           </p:cNvPr>
@@ -7150,7 +8308,7 @@
         </p:nvSpPr>
         <p:spPr>
           <a:xfrm>
-            <a:off x="5620421" y="5274843"/>
+            <a:off x="7934905" y="5274843"/>
             <a:ext cx="1532791" cy="1015663"/>
           </a:xfrm>
           <a:prstGeom prst="rect">
@@ -7193,7 +8351,7 @@
           <p:cNvPr id="26" name="TextBox 25">
             <a:extLst>
               <a:ext uri="{FF2B5EF4-FFF2-40B4-BE49-F238E27FC236}">
-                <a16:creationId xmlns:a16="http://schemas.microsoft.com/office/drawing/2014/main" id="{8D9094E4-F048-C5EE-41E2-6258F9F01387}"/>
+                <a16:creationId xmlns:a16="http://schemas.microsoft.com/office/drawing/2014/main" id="{40164C9E-2226-D901-5F8F-0A41F92D7613}"/>
               </a:ext>
             </a:extLst>
           </p:cNvPr>
@@ -7202,7 +8360,7 @@
         </p:nvSpPr>
         <p:spPr>
           <a:xfrm>
-            <a:off x="7674812" y="5238604"/>
+            <a:off x="9989296" y="5238604"/>
             <a:ext cx="1532791" cy="1015663"/>
           </a:xfrm>
           <a:prstGeom prst="rect">
@@ -7243,7 +8401,7 @@
     </p:spTree>
     <p:extLst>
       <p:ext uri="{BB962C8B-B14F-4D97-AF65-F5344CB8AC3E}">
-        <p14:creationId xmlns:p14="http://schemas.microsoft.com/office/powerpoint/2010/main" val="3086061470"/>
+        <p14:creationId xmlns:p14="http://schemas.microsoft.com/office/powerpoint/2010/main" val="433049594"/>
       </p:ext>
     </p:extLst>
   </p:cSld>
@@ -7273,7 +8431,7 @@
         <p:cNvPr id="1" name="">
           <a:extLst>
             <a:ext uri="{FF2B5EF4-FFF2-40B4-BE49-F238E27FC236}">
-              <a16:creationId xmlns:a16="http://schemas.microsoft.com/office/drawing/2014/main" id="{A8061B84-C3D2-0512-F238-F96AAFC68B60}"/>
+              <a16:creationId xmlns:a16="http://schemas.microsoft.com/office/drawing/2014/main" id="{ECEE90AC-5F90-3894-F518-C43A70CDD337}"/>
             </a:ext>
           </a:extLst>
         </p:cNvPr>
@@ -7293,7 +8451,7 @@
           <p:cNvPr id="16" name="Title 1">
             <a:extLst>
               <a:ext uri="{FF2B5EF4-FFF2-40B4-BE49-F238E27FC236}">
-                <a16:creationId xmlns:a16="http://schemas.microsoft.com/office/drawing/2014/main" id="{89A92299-5C6B-2398-C237-A0BF53310FEE}"/>
+                <a16:creationId xmlns:a16="http://schemas.microsoft.com/office/drawing/2014/main" id="{67727AF2-4F5C-A202-DE9B-C416D8F490C1}"/>
               </a:ext>
             </a:extLst>
           </p:cNvPr>
@@ -7353,7 +8511,7 @@
           <p:cNvPr id="17" name="Rectangle 16">
             <a:extLst>
               <a:ext uri="{FF2B5EF4-FFF2-40B4-BE49-F238E27FC236}">
-                <a16:creationId xmlns:a16="http://schemas.microsoft.com/office/drawing/2014/main" id="{5FB9B97A-CDEE-A98E-3709-B0D4FE4B63B4}"/>
+                <a16:creationId xmlns:a16="http://schemas.microsoft.com/office/drawing/2014/main" id="{E5F89CE2-E7C5-4B87-54D7-7EA7735D1D63}"/>
               </a:ext>
             </a:extLst>
           </p:cNvPr>
@@ -7410,7 +8568,7 @@
           <p:cNvPr id="18" name="Rectangle 17">
             <a:extLst>
               <a:ext uri="{FF2B5EF4-FFF2-40B4-BE49-F238E27FC236}">
-                <a16:creationId xmlns:a16="http://schemas.microsoft.com/office/drawing/2014/main" id="{D3A324CB-1C92-04A0-9C3E-668334A78F8F}"/>
+                <a16:creationId xmlns:a16="http://schemas.microsoft.com/office/drawing/2014/main" id="{6C0C3388-5524-C488-48F2-B17650679A49}"/>
               </a:ext>
             </a:extLst>
           </p:cNvPr>
@@ -7467,7 +8625,7 @@
           <p:cNvPr id="2" name="Oval 1">
             <a:extLst>
               <a:ext uri="{FF2B5EF4-FFF2-40B4-BE49-F238E27FC236}">
-                <a16:creationId xmlns:a16="http://schemas.microsoft.com/office/drawing/2014/main" id="{9B2FE237-FC45-F917-9B03-7B96BE775EF7}"/>
+                <a16:creationId xmlns:a16="http://schemas.microsoft.com/office/drawing/2014/main" id="{3C447D92-04E5-ABD6-30AB-7B96AA9286B0}"/>
               </a:ext>
             </a:extLst>
           </p:cNvPr>
@@ -7522,7 +8680,7 @@
           <p:cNvPr id="3" name="TextBox 2">
             <a:extLst>
               <a:ext uri="{FF2B5EF4-FFF2-40B4-BE49-F238E27FC236}">
-                <a16:creationId xmlns:a16="http://schemas.microsoft.com/office/drawing/2014/main" id="{3331760F-3F11-E61A-220F-2D9D5F24420C}"/>
+                <a16:creationId xmlns:a16="http://schemas.microsoft.com/office/drawing/2014/main" id="{A69B8993-2AA7-14EF-D794-B3F1683049A1}"/>
               </a:ext>
             </a:extLst>
           </p:cNvPr>
@@ -7560,7 +8718,7 @@
           <p:cNvPr id="4" name="Oval 3">
             <a:extLst>
               <a:ext uri="{FF2B5EF4-FFF2-40B4-BE49-F238E27FC236}">
-                <a16:creationId xmlns:a16="http://schemas.microsoft.com/office/drawing/2014/main" id="{3E8A4293-5A06-EB17-6909-2373990365BD}"/>
+                <a16:creationId xmlns:a16="http://schemas.microsoft.com/office/drawing/2014/main" id="{D6F38C70-114C-BBD5-C5E0-5B4B24D3A083}"/>
               </a:ext>
             </a:extLst>
           </p:cNvPr>
@@ -7615,7 +8773,7 @@
           <p:cNvPr id="5" name="Oval 4">
             <a:extLst>
               <a:ext uri="{FF2B5EF4-FFF2-40B4-BE49-F238E27FC236}">
-                <a16:creationId xmlns:a16="http://schemas.microsoft.com/office/drawing/2014/main" id="{A57B0007-8C67-8F7C-D173-D267BE3BFEEE}"/>
+                <a16:creationId xmlns:a16="http://schemas.microsoft.com/office/drawing/2014/main" id="{1808D0C6-204D-B5EF-53A0-6E3AF05A649E}"/>
               </a:ext>
             </a:extLst>
           </p:cNvPr>
@@ -7670,7 +8828,7 @@
           <p:cNvPr id="10" name="Oval 9">
             <a:extLst>
               <a:ext uri="{FF2B5EF4-FFF2-40B4-BE49-F238E27FC236}">
-                <a16:creationId xmlns:a16="http://schemas.microsoft.com/office/drawing/2014/main" id="{55E5BAF8-3640-C46F-75E6-136B6ADA553B}"/>
+                <a16:creationId xmlns:a16="http://schemas.microsoft.com/office/drawing/2014/main" id="{61492C4A-8D93-3B31-0806-2032050D884A}"/>
               </a:ext>
             </a:extLst>
           </p:cNvPr>
@@ -7725,7 +8883,7 @@
           <p:cNvPr id="13" name="Straight Connector 12">
             <a:extLst>
               <a:ext uri="{FF2B5EF4-FFF2-40B4-BE49-F238E27FC236}">
-                <a16:creationId xmlns:a16="http://schemas.microsoft.com/office/drawing/2014/main" id="{35DF2E18-22EB-5F6C-8F04-D8757765A5A5}"/>
+                <a16:creationId xmlns:a16="http://schemas.microsoft.com/office/drawing/2014/main" id="{C6E826D9-4C82-0FD8-BC95-3B5269866D49}"/>
               </a:ext>
             </a:extLst>
           </p:cNvPr>
@@ -7767,7 +8925,7 @@
           <p:cNvPr id="8" name="Straight Connector 7">
             <a:extLst>
               <a:ext uri="{FF2B5EF4-FFF2-40B4-BE49-F238E27FC236}">
-                <a16:creationId xmlns:a16="http://schemas.microsoft.com/office/drawing/2014/main" id="{D8213D92-E999-BBC4-4870-BE36D2EDF770}"/>
+                <a16:creationId xmlns:a16="http://schemas.microsoft.com/office/drawing/2014/main" id="{4F712ABB-41CC-604E-41E0-3B7B839E971D}"/>
               </a:ext>
             </a:extLst>
           </p:cNvPr>
@@ -7810,7 +8968,7 @@
           <p:cNvPr id="11" name="TextBox 10">
             <a:extLst>
               <a:ext uri="{FF2B5EF4-FFF2-40B4-BE49-F238E27FC236}">
-                <a16:creationId xmlns:a16="http://schemas.microsoft.com/office/drawing/2014/main" id="{B4CFB281-93FC-0337-C42C-E88DE9BB1BA9}"/>
+                <a16:creationId xmlns:a16="http://schemas.microsoft.com/office/drawing/2014/main" id="{9E5C86ED-DCFD-9B90-3297-6BE9FC63E922}"/>
               </a:ext>
             </a:extLst>
           </p:cNvPr>
@@ -7848,7 +9006,7 @@
           <p:cNvPr id="7" name="Straight Connector 6">
             <a:extLst>
               <a:ext uri="{FF2B5EF4-FFF2-40B4-BE49-F238E27FC236}">
-                <a16:creationId xmlns:a16="http://schemas.microsoft.com/office/drawing/2014/main" id="{1834301D-D908-2577-872B-C83EF70465A9}"/>
+                <a16:creationId xmlns:a16="http://schemas.microsoft.com/office/drawing/2014/main" id="{1F9B1823-2EC1-1508-3152-71575FB19E43}"/>
               </a:ext>
             </a:extLst>
           </p:cNvPr>
@@ -7893,7 +9051,7 @@
           <p:cNvPr id="19" name="Straight Connector 18">
             <a:extLst>
               <a:ext uri="{FF2B5EF4-FFF2-40B4-BE49-F238E27FC236}">
-                <a16:creationId xmlns:a16="http://schemas.microsoft.com/office/drawing/2014/main" id="{3A45D0F6-BFD4-413A-D431-C887B69E4E7A}"/>
+                <a16:creationId xmlns:a16="http://schemas.microsoft.com/office/drawing/2014/main" id="{C525E116-50E3-046C-317D-138A1C399C9B}"/>
               </a:ext>
             </a:extLst>
           </p:cNvPr>
@@ -7938,7 +9096,7 @@
           <p:cNvPr id="22" name="TextBox 21">
             <a:extLst>
               <a:ext uri="{FF2B5EF4-FFF2-40B4-BE49-F238E27FC236}">
-                <a16:creationId xmlns:a16="http://schemas.microsoft.com/office/drawing/2014/main" id="{DD328095-C878-8ED9-2CE4-292AD231B837}"/>
+                <a16:creationId xmlns:a16="http://schemas.microsoft.com/office/drawing/2014/main" id="{AF14C3CB-9347-F813-B9B2-32B6A9A477B1}"/>
               </a:ext>
             </a:extLst>
           </p:cNvPr>
@@ -7976,7 +9134,7 @@
           <p:cNvPr id="23" name="TextBox 22">
             <a:extLst>
               <a:ext uri="{FF2B5EF4-FFF2-40B4-BE49-F238E27FC236}">
-                <a16:creationId xmlns:a16="http://schemas.microsoft.com/office/drawing/2014/main" id="{16BDBEB0-F1ED-B7E0-F43B-CFF2B3EFFB99}"/>
+                <a16:creationId xmlns:a16="http://schemas.microsoft.com/office/drawing/2014/main" id="{E0E30447-0495-35A7-1FF7-53CB7E824849}"/>
               </a:ext>
             </a:extLst>
           </p:cNvPr>
@@ -8014,7 +9172,7 @@
           <p:cNvPr id="24" name="TextBox 23">
             <a:extLst>
               <a:ext uri="{FF2B5EF4-FFF2-40B4-BE49-F238E27FC236}">
-                <a16:creationId xmlns:a16="http://schemas.microsoft.com/office/drawing/2014/main" id="{7F28D4E7-7A82-9381-29DD-B2E25638C142}"/>
+                <a16:creationId xmlns:a16="http://schemas.microsoft.com/office/drawing/2014/main" id="{62D10E4F-278A-F361-E7B6-8B02D12E2AA2}"/>
               </a:ext>
             </a:extLst>
           </p:cNvPr>
@@ -8066,7 +9224,7 @@
           <p:cNvPr id="25" name="TextBox 24">
             <a:extLst>
               <a:ext uri="{FF2B5EF4-FFF2-40B4-BE49-F238E27FC236}">
-                <a16:creationId xmlns:a16="http://schemas.microsoft.com/office/drawing/2014/main" id="{FFA5D318-D663-0502-66E3-6CB49CD6075E}"/>
+                <a16:creationId xmlns:a16="http://schemas.microsoft.com/office/drawing/2014/main" id="{EA8396D4-A697-F022-22A8-6F5C4DB2659A}"/>
               </a:ext>
             </a:extLst>
           </p:cNvPr>
@@ -8118,7 +9276,7 @@
           <p:cNvPr id="26" name="TextBox 25">
             <a:extLst>
               <a:ext uri="{FF2B5EF4-FFF2-40B4-BE49-F238E27FC236}">
-                <a16:creationId xmlns:a16="http://schemas.microsoft.com/office/drawing/2014/main" id="{40164C9E-2226-D901-5F8F-0A41F92D7613}"/>
+                <a16:creationId xmlns:a16="http://schemas.microsoft.com/office/drawing/2014/main" id="{97B3F969-99E1-DB2C-D2BF-AE9B19F2AA11}"/>
               </a:ext>
             </a:extLst>
           </p:cNvPr>
@@ -8165,10 +9323,57 @@
           </a:p>
         </p:txBody>
       </p:sp>
+      <p:sp>
+        <p:nvSpPr>
+          <p:cNvPr id="12" name="TextBox 11">
+            <a:extLst>
+              <a:ext uri="{FF2B5EF4-FFF2-40B4-BE49-F238E27FC236}">
+                <a16:creationId xmlns:a16="http://schemas.microsoft.com/office/drawing/2014/main" id="{61BC61E1-FB7D-3901-DA55-0912562B0D9E}"/>
+              </a:ext>
+            </a:extLst>
+          </p:cNvPr>
+          <p:cNvSpPr txBox="1"/>
+          <p:nvPr/>
+        </p:nvSpPr>
+        <p:spPr>
+          <a:xfrm>
+            <a:off x="760549" y="2659042"/>
+            <a:ext cx="5095723" cy="1477328"/>
+          </a:xfrm>
+          <a:prstGeom prst="rect">
+            <a:avLst/>
+          </a:prstGeom>
+          <a:noFill/>
+        </p:spPr>
+        <p:txBody>
+          <a:bodyPr wrap="square" rtlCol="0">
+            <a:spAutoFit/>
+          </a:bodyPr>
+          <a:lstStyle/>
+          <a:p>
+            <a:r>
+              <a:rPr lang="en-US" sz="3000" dirty="0">
+                <a:latin typeface="Times New Roman" panose="02020603050405020304" pitchFamily="18" charset="0"/>
+                <a:cs typeface="Times New Roman" panose="02020603050405020304" pitchFamily="18" charset="0"/>
+              </a:rPr>
+              <a:t>Critical for competitive systems</a:t>
+            </a:r>
+          </a:p>
+          <a:p>
+            <a:r>
+              <a:rPr lang="en-US" sz="3000" dirty="0">
+                <a:latin typeface="Times New Roman" panose="02020603050405020304" pitchFamily="18" charset="0"/>
+                <a:cs typeface="Times New Roman" panose="02020603050405020304" pitchFamily="18" charset="0"/>
+              </a:rPr>
+              <a:t>e.g., financial exchanges, ad exchanges.</a:t>
+            </a:r>
+          </a:p>
+        </p:txBody>
+      </p:sp>
     </p:spTree>
     <p:extLst>
       <p:ext uri="{BB962C8B-B14F-4D97-AF65-F5344CB8AC3E}">
-        <p14:creationId xmlns:p14="http://schemas.microsoft.com/office/powerpoint/2010/main" val="433049594"/>
+        <p14:creationId xmlns:p14="http://schemas.microsoft.com/office/powerpoint/2010/main" val="4252485894"/>
       </p:ext>
     </p:extLst>
   </p:cSld>
@@ -8198,7 +9403,7 @@
         <p:cNvPr id="1" name="">
           <a:extLst>
             <a:ext uri="{FF2B5EF4-FFF2-40B4-BE49-F238E27FC236}">
-              <a16:creationId xmlns:a16="http://schemas.microsoft.com/office/drawing/2014/main" id="{ECEE90AC-5F90-3894-F518-C43A70CDD337}"/>
+              <a16:creationId xmlns:a16="http://schemas.microsoft.com/office/drawing/2014/main" id="{05BB61D3-F707-60BE-A582-D834BDC0DE54}"/>
             </a:ext>
           </a:extLst>
         </p:cNvPr>
@@ -8218,7 +9423,7 @@
           <p:cNvPr id="16" name="Title 1">
             <a:extLst>
               <a:ext uri="{FF2B5EF4-FFF2-40B4-BE49-F238E27FC236}">
-                <a16:creationId xmlns:a16="http://schemas.microsoft.com/office/drawing/2014/main" id="{67727AF2-4F5C-A202-DE9B-C416D8F490C1}"/>
+                <a16:creationId xmlns:a16="http://schemas.microsoft.com/office/drawing/2014/main" id="{8EBCB744-E077-AA56-DD2E-5781D3DAD1D2}"/>
               </a:ext>
             </a:extLst>
           </p:cNvPr>
@@ -8278,7 +9483,7 @@
           <p:cNvPr id="17" name="Rectangle 16">
             <a:extLst>
               <a:ext uri="{FF2B5EF4-FFF2-40B4-BE49-F238E27FC236}">
-                <a16:creationId xmlns:a16="http://schemas.microsoft.com/office/drawing/2014/main" id="{E5F89CE2-E7C5-4B87-54D7-7EA7735D1D63}"/>
+                <a16:creationId xmlns:a16="http://schemas.microsoft.com/office/drawing/2014/main" id="{63AAC567-73B0-AF7E-8CA6-E22EB49EE7E6}"/>
               </a:ext>
             </a:extLst>
           </p:cNvPr>
@@ -8335,7 +9540,7 @@
           <p:cNvPr id="18" name="Rectangle 17">
             <a:extLst>
               <a:ext uri="{FF2B5EF4-FFF2-40B4-BE49-F238E27FC236}">
-                <a16:creationId xmlns:a16="http://schemas.microsoft.com/office/drawing/2014/main" id="{6C0C3388-5524-C488-48F2-B17650679A49}"/>
+                <a16:creationId xmlns:a16="http://schemas.microsoft.com/office/drawing/2014/main" id="{953927F1-53D0-B5A4-674F-2ED2D5D03FEC}"/>
               </a:ext>
             </a:extLst>
           </p:cNvPr>
@@ -8392,7 +9597,7 @@
           <p:cNvPr id="2" name="Oval 1">
             <a:extLst>
               <a:ext uri="{FF2B5EF4-FFF2-40B4-BE49-F238E27FC236}">
-                <a16:creationId xmlns:a16="http://schemas.microsoft.com/office/drawing/2014/main" id="{3C447D92-04E5-ABD6-30AB-7B96AA9286B0}"/>
+                <a16:creationId xmlns:a16="http://schemas.microsoft.com/office/drawing/2014/main" id="{84A45410-7D22-70EE-437F-98D1500F8BA0}"/>
               </a:ext>
             </a:extLst>
           </p:cNvPr>
@@ -8447,7 +9652,7 @@
           <p:cNvPr id="3" name="TextBox 2">
             <a:extLst>
               <a:ext uri="{FF2B5EF4-FFF2-40B4-BE49-F238E27FC236}">
-                <a16:creationId xmlns:a16="http://schemas.microsoft.com/office/drawing/2014/main" id="{A69B8993-2AA7-14EF-D794-B3F1683049A1}"/>
+                <a16:creationId xmlns:a16="http://schemas.microsoft.com/office/drawing/2014/main" id="{A1CDC1E3-9137-3E58-5286-C90629581A63}"/>
               </a:ext>
             </a:extLst>
           </p:cNvPr>
@@ -8485,7 +9690,7 @@
           <p:cNvPr id="4" name="Oval 3">
             <a:extLst>
               <a:ext uri="{FF2B5EF4-FFF2-40B4-BE49-F238E27FC236}">
-                <a16:creationId xmlns:a16="http://schemas.microsoft.com/office/drawing/2014/main" id="{D6F38C70-114C-BBD5-C5E0-5B4B24D3A083}"/>
+                <a16:creationId xmlns:a16="http://schemas.microsoft.com/office/drawing/2014/main" id="{2ECC147A-4F95-5F2E-93D5-691C3BE90F2A}"/>
               </a:ext>
             </a:extLst>
           </p:cNvPr>
@@ -8540,7 +9745,7 @@
           <p:cNvPr id="5" name="Oval 4">
             <a:extLst>
               <a:ext uri="{FF2B5EF4-FFF2-40B4-BE49-F238E27FC236}">
-                <a16:creationId xmlns:a16="http://schemas.microsoft.com/office/drawing/2014/main" id="{1808D0C6-204D-B5EF-53A0-6E3AF05A649E}"/>
+                <a16:creationId xmlns:a16="http://schemas.microsoft.com/office/drawing/2014/main" id="{8EBEA846-AE53-8609-C025-4510011CBCB2}"/>
               </a:ext>
             </a:extLst>
           </p:cNvPr>
@@ -8595,7 +9800,7 @@
           <p:cNvPr id="10" name="Oval 9">
             <a:extLst>
               <a:ext uri="{FF2B5EF4-FFF2-40B4-BE49-F238E27FC236}">
-                <a16:creationId xmlns:a16="http://schemas.microsoft.com/office/drawing/2014/main" id="{61492C4A-8D93-3B31-0806-2032050D884A}"/>
+                <a16:creationId xmlns:a16="http://schemas.microsoft.com/office/drawing/2014/main" id="{FEF1BE27-2C18-8206-6DAB-42731654ECFD}"/>
               </a:ext>
             </a:extLst>
           </p:cNvPr>
@@ -8650,7 +9855,7 @@
           <p:cNvPr id="13" name="Straight Connector 12">
             <a:extLst>
               <a:ext uri="{FF2B5EF4-FFF2-40B4-BE49-F238E27FC236}">
-                <a16:creationId xmlns:a16="http://schemas.microsoft.com/office/drawing/2014/main" id="{C6E826D9-4C82-0FD8-BC95-3B5269866D49}"/>
+                <a16:creationId xmlns:a16="http://schemas.microsoft.com/office/drawing/2014/main" id="{67942988-0894-8864-7954-8771B374B017}"/>
               </a:ext>
             </a:extLst>
           </p:cNvPr>
@@ -8692,7 +9897,7 @@
           <p:cNvPr id="8" name="Straight Connector 7">
             <a:extLst>
               <a:ext uri="{FF2B5EF4-FFF2-40B4-BE49-F238E27FC236}">
-                <a16:creationId xmlns:a16="http://schemas.microsoft.com/office/drawing/2014/main" id="{4F712ABB-41CC-604E-41E0-3B7B839E971D}"/>
+                <a16:creationId xmlns:a16="http://schemas.microsoft.com/office/drawing/2014/main" id="{B7496BBA-646B-4176-C17D-B3EFD77D7D8A}"/>
               </a:ext>
             </a:extLst>
           </p:cNvPr>
@@ -8735,7 +9940,7 @@
           <p:cNvPr id="11" name="TextBox 10">
             <a:extLst>
               <a:ext uri="{FF2B5EF4-FFF2-40B4-BE49-F238E27FC236}">
-                <a16:creationId xmlns:a16="http://schemas.microsoft.com/office/drawing/2014/main" id="{9E5C86ED-DCFD-9B90-3297-6BE9FC63E922}"/>
+                <a16:creationId xmlns:a16="http://schemas.microsoft.com/office/drawing/2014/main" id="{B2DEA32D-A6B5-7CC2-3BA5-9F5E719139FB}"/>
               </a:ext>
             </a:extLst>
           </p:cNvPr>
@@ -8773,7 +9978,7 @@
           <p:cNvPr id="7" name="Straight Connector 6">
             <a:extLst>
               <a:ext uri="{FF2B5EF4-FFF2-40B4-BE49-F238E27FC236}">
-                <a16:creationId xmlns:a16="http://schemas.microsoft.com/office/drawing/2014/main" id="{1F9B1823-2EC1-1508-3152-71575FB19E43}"/>
+                <a16:creationId xmlns:a16="http://schemas.microsoft.com/office/drawing/2014/main" id="{23B2342E-40B7-0A82-A93E-A632BF277510}"/>
               </a:ext>
             </a:extLst>
           </p:cNvPr>
@@ -8818,7 +10023,7 @@
           <p:cNvPr id="19" name="Straight Connector 18">
             <a:extLst>
               <a:ext uri="{FF2B5EF4-FFF2-40B4-BE49-F238E27FC236}">
-                <a16:creationId xmlns:a16="http://schemas.microsoft.com/office/drawing/2014/main" id="{C525E116-50E3-046C-317D-138A1C399C9B}"/>
+                <a16:creationId xmlns:a16="http://schemas.microsoft.com/office/drawing/2014/main" id="{A709A8FF-C9D4-DBCD-32DF-4DAD0A8607EE}"/>
               </a:ext>
             </a:extLst>
           </p:cNvPr>
@@ -8863,7 +10068,7 @@
           <p:cNvPr id="22" name="TextBox 21">
             <a:extLst>
               <a:ext uri="{FF2B5EF4-FFF2-40B4-BE49-F238E27FC236}">
-                <a16:creationId xmlns:a16="http://schemas.microsoft.com/office/drawing/2014/main" id="{AF14C3CB-9347-F813-B9B2-32B6A9A477B1}"/>
+                <a16:creationId xmlns:a16="http://schemas.microsoft.com/office/drawing/2014/main" id="{8ECDF1BC-9E96-E20F-FE19-44E5F2F3271B}"/>
               </a:ext>
             </a:extLst>
           </p:cNvPr>
@@ -8901,7 +10106,7 @@
           <p:cNvPr id="23" name="TextBox 22">
             <a:extLst>
               <a:ext uri="{FF2B5EF4-FFF2-40B4-BE49-F238E27FC236}">
-                <a16:creationId xmlns:a16="http://schemas.microsoft.com/office/drawing/2014/main" id="{E0E30447-0495-35A7-1FF7-53CB7E824849}"/>
+                <a16:creationId xmlns:a16="http://schemas.microsoft.com/office/drawing/2014/main" id="{BBDD467F-AFFD-AFEE-1408-5C56457843C3}"/>
               </a:ext>
             </a:extLst>
           </p:cNvPr>
@@ -8939,7 +10144,7 @@
           <p:cNvPr id="24" name="TextBox 23">
             <a:extLst>
               <a:ext uri="{FF2B5EF4-FFF2-40B4-BE49-F238E27FC236}">
-                <a16:creationId xmlns:a16="http://schemas.microsoft.com/office/drawing/2014/main" id="{62D10E4F-278A-F361-E7B6-8B02D12E2AA2}"/>
+                <a16:creationId xmlns:a16="http://schemas.microsoft.com/office/drawing/2014/main" id="{61C469F5-EDC6-88C3-4CA0-33B5E8271007}"/>
               </a:ext>
             </a:extLst>
           </p:cNvPr>
@@ -8991,7 +10196,7 @@
           <p:cNvPr id="25" name="TextBox 24">
             <a:extLst>
               <a:ext uri="{FF2B5EF4-FFF2-40B4-BE49-F238E27FC236}">
-                <a16:creationId xmlns:a16="http://schemas.microsoft.com/office/drawing/2014/main" id="{EA8396D4-A697-F022-22A8-6F5C4DB2659A}"/>
+                <a16:creationId xmlns:a16="http://schemas.microsoft.com/office/drawing/2014/main" id="{5EA42736-3A77-D627-3E20-DAD995CB3D21}"/>
               </a:ext>
             </a:extLst>
           </p:cNvPr>
@@ -9043,7 +10248,7 @@
           <p:cNvPr id="26" name="TextBox 25">
             <a:extLst>
               <a:ext uri="{FF2B5EF4-FFF2-40B4-BE49-F238E27FC236}">
-                <a16:creationId xmlns:a16="http://schemas.microsoft.com/office/drawing/2014/main" id="{97B3F969-99E1-DB2C-D2BF-AE9B19F2AA11}"/>
+                <a16:creationId xmlns:a16="http://schemas.microsoft.com/office/drawing/2014/main" id="{12018B42-98D2-E24F-F87D-57F4D8CB6179}"/>
               </a:ext>
             </a:extLst>
           </p:cNvPr>
@@ -9095,7 +10300,7 @@
           <p:cNvPr id="12" name="TextBox 11">
             <a:extLst>
               <a:ext uri="{FF2B5EF4-FFF2-40B4-BE49-F238E27FC236}">
-                <a16:creationId xmlns:a16="http://schemas.microsoft.com/office/drawing/2014/main" id="{61BC61E1-FB7D-3901-DA55-0912562B0D9E}"/>
+                <a16:creationId xmlns:a16="http://schemas.microsoft.com/office/drawing/2014/main" id="{DB65EC44-72EE-0640-21EC-23D33EBE9683}"/>
               </a:ext>
             </a:extLst>
           </p:cNvPr>
@@ -9137,10 +10342,395 @@
           </a:p>
         </p:txBody>
       </p:sp>
+      <p:sp>
+        <p:nvSpPr>
+          <p:cNvPr id="14" name="Oval 13">
+            <a:extLst>
+              <a:ext uri="{FF2B5EF4-FFF2-40B4-BE49-F238E27FC236}">
+                <a16:creationId xmlns:a16="http://schemas.microsoft.com/office/drawing/2014/main" id="{92BDDD35-1ADE-1229-9118-E765CEB0C347}"/>
+              </a:ext>
+            </a:extLst>
+          </p:cNvPr>
+          <p:cNvSpPr/>
+          <p:nvPr/>
+        </p:nvSpPr>
+        <p:spPr>
+          <a:xfrm>
+            <a:off x="2436518" y="2599598"/>
+            <a:ext cx="3624649" cy="725710"/>
+          </a:xfrm>
+          <a:custGeom>
+            <a:avLst/>
+            <a:gdLst>
+              <a:gd name="csX0" fmla="*/ 0 w 3624649"/>
+              <a:gd name="csY0" fmla="*/ 362855 h 725710"/>
+              <a:gd name="csX1" fmla="*/ 1812325 w 3624649"/>
+              <a:gd name="csY1" fmla="*/ 0 h 725710"/>
+              <a:gd name="csX2" fmla="*/ 3624650 w 3624649"/>
+              <a:gd name="csY2" fmla="*/ 362855 h 725710"/>
+              <a:gd name="csX3" fmla="*/ 1812325 w 3624649"/>
+              <a:gd name="csY3" fmla="*/ 725710 h 725710"/>
+              <a:gd name="csX4" fmla="*/ 0 w 3624649"/>
+              <a:gd name="csY4" fmla="*/ 362855 h 725710"/>
+            </a:gdLst>
+            <a:ahLst/>
+            <a:cxnLst>
+              <a:cxn ang="0">
+                <a:pos x="csX0" y="csY0"/>
+              </a:cxn>
+              <a:cxn ang="0">
+                <a:pos x="csX1" y="csY1"/>
+              </a:cxn>
+              <a:cxn ang="0">
+                <a:pos x="csX2" y="csY2"/>
+              </a:cxn>
+              <a:cxn ang="0">
+                <a:pos x="csX3" y="csY3"/>
+              </a:cxn>
+              <a:cxn ang="0">
+                <a:pos x="csX4" y="csY4"/>
+              </a:cxn>
+            </a:cxnLst>
+            <a:rect l="l" t="t" r="r" b="b"/>
+            <a:pathLst>
+              <a:path w="3624649" h="725710" extrusionOk="0">
+                <a:moveTo>
+                  <a:pt x="0" y="362855"/>
+                </a:moveTo>
+                <a:cubicBezTo>
+                  <a:pt x="-115163" y="91421"/>
+                  <a:pt x="660948" y="56469"/>
+                  <a:pt x="1812325" y="0"/>
+                </a:cubicBezTo>
+                <a:cubicBezTo>
+                  <a:pt x="2834112" y="4393"/>
+                  <a:pt x="3594571" y="163412"/>
+                  <a:pt x="3624650" y="362855"/>
+                </a:cubicBezTo>
+                <a:cubicBezTo>
+                  <a:pt x="3570103" y="616522"/>
+                  <a:pt x="2802006" y="787829"/>
+                  <a:pt x="1812325" y="725710"/>
+                </a:cubicBezTo>
+                <a:cubicBezTo>
+                  <a:pt x="806512" y="723032"/>
+                  <a:pt x="17732" y="571726"/>
+                  <a:pt x="0" y="362855"/>
+                </a:cubicBezTo>
+                <a:close/>
+              </a:path>
+            </a:pathLst>
+          </a:custGeom>
+          <a:noFill/>
+          <a:ln w="69850">
+            <a:solidFill>
+              <a:srgbClr val="FF0000"/>
+            </a:solidFill>
+            <a:extLst>
+              <a:ext uri="{C807C97D-BFC1-408E-A445-0C87EB9F89A2}">
+                <ask:lineSketchStyleProps xmlns:ask="http://schemas.microsoft.com/office/drawing/2018/sketchyshapes" sd="1219033472">
+                  <a:prstGeom prst="ellipse">
+                    <a:avLst/>
+                  </a:prstGeom>
+                  <ask:type>
+                    <ask:lineSketchCurved/>
+                  </ask:type>
+                </ask:lineSketchStyleProps>
+              </a:ext>
+            </a:extLst>
+          </a:ln>
+        </p:spPr>
+        <p:style>
+          <a:lnRef idx="2">
+            <a:schemeClr val="accent1">
+              <a:shade val="15000"/>
+            </a:schemeClr>
+          </a:lnRef>
+          <a:fillRef idx="1">
+            <a:schemeClr val="accent1"/>
+          </a:fillRef>
+          <a:effectRef idx="0">
+            <a:schemeClr val="accent1"/>
+          </a:effectRef>
+          <a:fontRef idx="minor">
+            <a:schemeClr val="lt1"/>
+          </a:fontRef>
+        </p:style>
+        <p:txBody>
+          <a:bodyPr rtlCol="0" anchor="ctr"/>
+          <a:lstStyle/>
+          <a:p>
+            <a:pPr algn="ctr"/>
+            <a:endParaRPr lang="en-US"/>
+          </a:p>
+        </p:txBody>
+      </p:sp>
+      <p:sp>
+        <p:nvSpPr>
+          <p:cNvPr id="15" name="TextBox 14">
+            <a:extLst>
+              <a:ext uri="{FF2B5EF4-FFF2-40B4-BE49-F238E27FC236}">
+                <a16:creationId xmlns:a16="http://schemas.microsoft.com/office/drawing/2014/main" id="{12B3D87A-E58E-0F06-296E-E9B7F56BCC87}"/>
+              </a:ext>
+            </a:extLst>
+          </p:cNvPr>
+          <p:cNvSpPr txBox="1"/>
+          <p:nvPr/>
+        </p:nvSpPr>
+        <p:spPr>
+          <a:xfrm>
+            <a:off x="3459289" y="3589382"/>
+            <a:ext cx="1797287" cy="553998"/>
+          </a:xfrm>
+          <a:prstGeom prst="rect">
+            <a:avLst/>
+          </a:prstGeom>
+          <a:noFill/>
+        </p:spPr>
+        <p:txBody>
+          <a:bodyPr wrap="none" rtlCol="0">
+            <a:spAutoFit/>
+          </a:bodyPr>
+          <a:lstStyle/>
+          <a:p>
+            <a:r>
+              <a:rPr lang="en-US" sz="3000" dirty="0">
+                <a:solidFill>
+                  <a:srgbClr val="FF0000"/>
+                </a:solidFill>
+                <a:latin typeface="Times New Roman" panose="02020603050405020304" pitchFamily="18" charset="0"/>
+                <a:cs typeface="Times New Roman" panose="02020603050405020304" pitchFamily="18" charset="0"/>
+              </a:rPr>
+              <a:t>Our Focus</a:t>
+            </a:r>
+          </a:p>
+        </p:txBody>
+      </p:sp>
     </p:spTree>
     <p:extLst>
       <p:ext uri="{BB962C8B-B14F-4D97-AF65-F5344CB8AC3E}">
-        <p14:creationId xmlns:p14="http://schemas.microsoft.com/office/powerpoint/2010/main" val="4252485894"/>
+        <p14:creationId xmlns:p14="http://schemas.microsoft.com/office/powerpoint/2010/main" val="2119589616"/>
+      </p:ext>
+    </p:extLst>
+  </p:cSld>
+  <p:clrMapOvr>
+    <a:masterClrMapping/>
+  </p:clrMapOvr>
+  <mc:AlternateContent xmlns:mc="http://schemas.openxmlformats.org/markup-compatibility/2006">
+    <mc:Choice xmlns:p159="http://schemas.microsoft.com/office/powerpoint/2015/09/main" Requires="p159">
+      <p:transition spd="med">
+        <p159:morph option="byWord"/>
+      </p:transition>
+    </mc:Choice>
+    <mc:Fallback>
+      <p:transition spd="med">
+        <p:fade/>
+      </p:transition>
+    </mc:Fallback>
+  </mc:AlternateContent>
+</p:sld>
+</file>
+
+<file path=ppt/slides/slide9.xml><?xml version="1.0" encoding="utf-8"?>
+<p:sld xmlns:a="http://schemas.openxmlformats.org/drawingml/2006/main" xmlns:r="http://schemas.openxmlformats.org/officeDocument/2006/relationships" xmlns:p="http://schemas.openxmlformats.org/presentationml/2006/main">
+  <p:cSld>
+    <p:spTree>
+      <p:nvGrpSpPr>
+        <p:cNvPr id="1" name="">
+          <a:extLst>
+            <a:ext uri="{FF2B5EF4-FFF2-40B4-BE49-F238E27FC236}">
+              <a16:creationId xmlns:a16="http://schemas.microsoft.com/office/drawing/2014/main" id="{174EDE6F-EC31-8FC4-5776-F5DEC79A2E03}"/>
+            </a:ext>
+          </a:extLst>
+        </p:cNvPr>
+        <p:cNvGrpSpPr/>
+        <p:nvPr/>
+      </p:nvGrpSpPr>
+      <p:grpSpPr>
+        <a:xfrm>
+          <a:off x="0" y="0"/>
+          <a:ext cx="0" cy="0"/>
+          <a:chOff x="0" y="0"/>
+          <a:chExt cx="0" cy="0"/>
+        </a:xfrm>
+      </p:grpSpPr>
+      <p:sp>
+        <p:nvSpPr>
+          <p:cNvPr id="17" name="Rectangle 16">
+            <a:extLst>
+              <a:ext uri="{FF2B5EF4-FFF2-40B4-BE49-F238E27FC236}">
+                <a16:creationId xmlns:a16="http://schemas.microsoft.com/office/drawing/2014/main" id="{978C640C-40FE-FCF1-64FB-1C3ECB15BCCE}"/>
+              </a:ext>
+            </a:extLst>
+          </p:cNvPr>
+          <p:cNvSpPr/>
+          <p:nvPr/>
+        </p:nvSpPr>
+        <p:spPr>
+          <a:xfrm rot="16200000">
+            <a:off x="2522582" y="-387076"/>
+            <a:ext cx="68673" cy="3246390"/>
+          </a:xfrm>
+          <a:prstGeom prst="rect">
+            <a:avLst/>
+          </a:prstGeom>
+          <a:solidFill>
+            <a:srgbClr val="FF0000"/>
+          </a:solidFill>
+          <a:ln>
+            <a:solidFill>
+              <a:srgbClr val="FF0000"/>
+            </a:solidFill>
+          </a:ln>
+        </p:spPr>
+        <p:style>
+          <a:lnRef idx="2">
+            <a:schemeClr val="accent1">
+              <a:shade val="15000"/>
+            </a:schemeClr>
+          </a:lnRef>
+          <a:fillRef idx="1">
+            <a:schemeClr val="accent1"/>
+          </a:fillRef>
+          <a:effectRef idx="0">
+            <a:schemeClr val="accent1"/>
+          </a:effectRef>
+          <a:fontRef idx="minor">
+            <a:schemeClr val="lt1"/>
+          </a:fontRef>
+        </p:style>
+        <p:txBody>
+          <a:bodyPr rtlCol="0" anchor="ctr"/>
+          <a:lstStyle/>
+          <a:p>
+            <a:pPr algn="ctr"/>
+            <a:endParaRPr lang="en-US">
+              <a:latin typeface="Times New Roman" panose="02020603050405020304" pitchFamily="18" charset="0"/>
+              <a:cs typeface="Times New Roman" panose="02020603050405020304" pitchFamily="18" charset="0"/>
+            </a:endParaRPr>
+          </a:p>
+        </p:txBody>
+      </p:sp>
+      <p:sp>
+        <p:nvSpPr>
+          <p:cNvPr id="18" name="Rectangle 17">
+            <a:extLst>
+              <a:ext uri="{FF2B5EF4-FFF2-40B4-BE49-F238E27FC236}">
+                <a16:creationId xmlns:a16="http://schemas.microsoft.com/office/drawing/2014/main" id="{2A761770-44DE-0756-A768-2BC3F2BC5A44}"/>
+              </a:ext>
+            </a:extLst>
+          </p:cNvPr>
+          <p:cNvSpPr/>
+          <p:nvPr/>
+        </p:nvSpPr>
+        <p:spPr>
+          <a:xfrm rot="16200000">
+            <a:off x="2522581" y="-318404"/>
+            <a:ext cx="68674" cy="3246390"/>
+          </a:xfrm>
+          <a:prstGeom prst="rect">
+            <a:avLst/>
+          </a:prstGeom>
+          <a:solidFill>
+            <a:srgbClr val="7030A0"/>
+          </a:solidFill>
+          <a:ln>
+            <a:solidFill>
+              <a:srgbClr val="7030A0"/>
+            </a:solidFill>
+          </a:ln>
+        </p:spPr>
+        <p:style>
+          <a:lnRef idx="2">
+            <a:schemeClr val="accent1">
+              <a:shade val="15000"/>
+            </a:schemeClr>
+          </a:lnRef>
+          <a:fillRef idx="1">
+            <a:schemeClr val="accent1"/>
+          </a:fillRef>
+          <a:effectRef idx="0">
+            <a:schemeClr val="accent1"/>
+          </a:effectRef>
+          <a:fontRef idx="minor">
+            <a:schemeClr val="lt1"/>
+          </a:fontRef>
+        </p:style>
+        <p:txBody>
+          <a:bodyPr rtlCol="0" anchor="ctr"/>
+          <a:lstStyle/>
+          <a:p>
+            <a:pPr algn="ctr"/>
+            <a:endParaRPr lang="en-US">
+              <a:latin typeface="Times New Roman" panose="02020603050405020304" pitchFamily="18" charset="0"/>
+              <a:cs typeface="Times New Roman" panose="02020603050405020304" pitchFamily="18" charset="0"/>
+            </a:endParaRPr>
+          </a:p>
+        </p:txBody>
+      </p:sp>
+      <p:sp>
+        <p:nvSpPr>
+          <p:cNvPr id="12" name="TextBox 11">
+            <a:extLst>
+              <a:ext uri="{FF2B5EF4-FFF2-40B4-BE49-F238E27FC236}">
+                <a16:creationId xmlns:a16="http://schemas.microsoft.com/office/drawing/2014/main" id="{C296CDD6-6407-1054-019E-BA411163C2AC}"/>
+              </a:ext>
+            </a:extLst>
+          </p:cNvPr>
+          <p:cNvSpPr txBox="1"/>
+          <p:nvPr/>
+        </p:nvSpPr>
+        <p:spPr>
+          <a:xfrm>
+            <a:off x="772906" y="405121"/>
+            <a:ext cx="5095723" cy="830997"/>
+          </a:xfrm>
+          <a:prstGeom prst="rect">
+            <a:avLst/>
+          </a:prstGeom>
+          <a:noFill/>
+        </p:spPr>
+        <p:txBody>
+          <a:bodyPr wrap="square" rtlCol="0">
+            <a:spAutoFit/>
+          </a:bodyPr>
+          <a:lstStyle/>
+          <a:p>
+            <a:r>
+              <a:rPr lang="en-US" sz="4800" dirty="0">
+                <a:latin typeface="Times New Roman" panose="02020603050405020304" pitchFamily="18" charset="0"/>
+                <a:cs typeface="Times New Roman" panose="02020603050405020304" pitchFamily="18" charset="0"/>
+              </a:rPr>
+              <a:t>c</a:t>
+            </a:r>
+            <a:r>
+              <a:rPr lang="en-US" sz="3000" dirty="0">
+                <a:latin typeface="Times New Roman" panose="02020603050405020304" pitchFamily="18" charset="0"/>
+                <a:cs typeface="Times New Roman" panose="02020603050405020304" pitchFamily="18" charset="0"/>
+              </a:rPr>
+              <a:t>ompetitive </a:t>
+            </a:r>
+            <a:r>
+              <a:rPr lang="en-US" sz="4800" dirty="0">
+                <a:latin typeface="Times New Roman" panose="02020603050405020304" pitchFamily="18" charset="0"/>
+                <a:cs typeface="Times New Roman" panose="02020603050405020304" pitchFamily="18" charset="0"/>
+              </a:rPr>
+              <a:t>s</a:t>
+            </a:r>
+            <a:r>
+              <a:rPr lang="en-US" sz="3000" dirty="0">
+                <a:latin typeface="Times New Roman" panose="02020603050405020304" pitchFamily="18" charset="0"/>
+                <a:cs typeface="Times New Roman" panose="02020603050405020304" pitchFamily="18" charset="0"/>
+              </a:rPr>
+              <a:t>ystems</a:t>
+            </a:r>
+          </a:p>
+        </p:txBody>
+      </p:sp>
+    </p:spTree>
+    <p:extLst>
+      <p:ext uri="{BB962C8B-B14F-4D97-AF65-F5344CB8AC3E}">
+        <p14:creationId xmlns:p14="http://schemas.microsoft.com/office/powerpoint/2010/main" val="1003105891"/>
       </p:ext>
     </p:extLst>
   </p:cSld>

--- a/thesis-latency-fairness.pptx
+++ b/thesis-latency-fairness.pptx
@@ -5,7 +5,7 @@
     <p:sldMasterId id="2147483648" r:id="rId1"/>
   </p:sldMasterIdLst>
   <p:notesMasterIdLst>
-    <p:notesMasterId r:id="rId12"/>
+    <p:notesMasterId r:id="rId13"/>
   </p:notesMasterIdLst>
   <p:sldIdLst>
     <p:sldId id="256" r:id="rId2"/>
@@ -18,6 +18,7 @@
     <p:sldId id="265" r:id="rId9"/>
     <p:sldId id="266" r:id="rId10"/>
     <p:sldId id="267" r:id="rId11"/>
+    <p:sldId id="268" r:id="rId12"/>
   </p:sldIdLst>
   <p:sldSz cx="12192000" cy="6858000"/>
   <p:notesSz cx="6858000" cy="9144000"/>
@@ -879,6 +880,117 @@
     <p:extLst>
       <p:ext uri="{BB962C8B-B14F-4D97-AF65-F5344CB8AC3E}">
         <p14:creationId xmlns:p14="http://schemas.microsoft.com/office/powerpoint/2010/main" val="3029730274"/>
+      </p:ext>
+    </p:extLst>
+  </p:cSld>
+  <p:clrMapOvr>
+    <a:masterClrMapping/>
+  </p:clrMapOvr>
+</p:notes>
+</file>
+
+<file path=ppt/notesSlides/notesSlide5.xml><?xml version="1.0" encoding="utf-8"?>
+<p:notes xmlns:a="http://schemas.openxmlformats.org/drawingml/2006/main" xmlns:r="http://schemas.openxmlformats.org/officeDocument/2006/relationships" xmlns:p="http://schemas.openxmlformats.org/presentationml/2006/main">
+  <p:cSld>
+    <p:spTree>
+      <p:nvGrpSpPr>
+        <p:cNvPr id="1" name="">
+          <a:extLst>
+            <a:ext uri="{FF2B5EF4-FFF2-40B4-BE49-F238E27FC236}">
+              <a16:creationId xmlns:a16="http://schemas.microsoft.com/office/drawing/2014/main" id="{C87E749F-93F4-125D-E541-5C8E5D71FFFE}"/>
+            </a:ext>
+          </a:extLst>
+        </p:cNvPr>
+        <p:cNvGrpSpPr/>
+        <p:nvPr/>
+      </p:nvGrpSpPr>
+      <p:grpSpPr>
+        <a:xfrm>
+          <a:off x="0" y="0"/>
+          <a:ext cx="0" cy="0"/>
+          <a:chOff x="0" y="0"/>
+          <a:chExt cx="0" cy="0"/>
+        </a:xfrm>
+      </p:grpSpPr>
+      <p:sp>
+        <p:nvSpPr>
+          <p:cNvPr id="2" name="Slide Image Placeholder 1">
+            <a:extLst>
+              <a:ext uri="{FF2B5EF4-FFF2-40B4-BE49-F238E27FC236}">
+                <a16:creationId xmlns:a16="http://schemas.microsoft.com/office/drawing/2014/main" id="{E11E8ED6-5EF4-400A-E2C0-A86C94EA1CD8}"/>
+              </a:ext>
+            </a:extLst>
+          </p:cNvPr>
+          <p:cNvSpPr>
+            <a:spLocks noGrp="1" noRot="1" noChangeAspect="1"/>
+          </p:cNvSpPr>
+          <p:nvPr>
+            <p:ph type="sldImg"/>
+          </p:nvPr>
+        </p:nvSpPr>
+        <p:spPr/>
+      </p:sp>
+      <p:sp>
+        <p:nvSpPr>
+          <p:cNvPr id="3" name="Notes Placeholder 2">
+            <a:extLst>
+              <a:ext uri="{FF2B5EF4-FFF2-40B4-BE49-F238E27FC236}">
+                <a16:creationId xmlns:a16="http://schemas.microsoft.com/office/drawing/2014/main" id="{92342344-12F8-A6E3-2055-816BE7BE0C61}"/>
+              </a:ext>
+            </a:extLst>
+          </p:cNvPr>
+          <p:cNvSpPr>
+            <a:spLocks noGrp="1"/>
+          </p:cNvSpPr>
+          <p:nvPr>
+            <p:ph type="body" idx="1"/>
+          </p:nvPr>
+        </p:nvSpPr>
+        <p:spPr/>
+        <p:txBody>
+          <a:bodyPr/>
+          <a:lstStyle/>
+          <a:p>
+            <a:r>
+              <a:rPr lang="en-US" dirty="0"/>
+              <a:t>Not having latency fairness can lead to unwanted unfair competition, users may not come</a:t>
+            </a:r>
+          </a:p>
+        </p:txBody>
+      </p:sp>
+      <p:sp>
+        <p:nvSpPr>
+          <p:cNvPr id="4" name="Slide Number Placeholder 3">
+            <a:extLst>
+              <a:ext uri="{FF2B5EF4-FFF2-40B4-BE49-F238E27FC236}">
+                <a16:creationId xmlns:a16="http://schemas.microsoft.com/office/drawing/2014/main" id="{F7D698C9-EE8C-96FE-DB9A-291287ECEEDC}"/>
+              </a:ext>
+            </a:extLst>
+          </p:cNvPr>
+          <p:cNvSpPr>
+            <a:spLocks noGrp="1"/>
+          </p:cNvSpPr>
+          <p:nvPr>
+            <p:ph type="sldNum" sz="quarter" idx="5"/>
+          </p:nvPr>
+        </p:nvSpPr>
+        <p:spPr/>
+        <p:txBody>
+          <a:bodyPr/>
+          <a:lstStyle/>
+          <a:p>
+            <a:fld id="{5AD2936D-68DF-C34D-84E6-1FDAB4C19BCF}" type="slidenum">
+              <a:rPr lang="en-US" smtClean="0"/>
+              <a:t>11</a:t>
+            </a:fld>
+            <a:endParaRPr lang="en-US"/>
+          </a:p>
+        </p:txBody>
+      </p:sp>
+    </p:spTree>
+    <p:extLst>
+      <p:ext uri="{BB962C8B-B14F-4D97-AF65-F5344CB8AC3E}">
+        <p14:creationId xmlns:p14="http://schemas.microsoft.com/office/powerpoint/2010/main" val="153028718"/>
       </p:ext>
     </p:extLst>
   </p:cSld>
@@ -5030,6 +5142,553 @@
     <p:extLst>
       <p:ext uri="{BB962C8B-B14F-4D97-AF65-F5344CB8AC3E}">
         <p14:creationId xmlns:p14="http://schemas.microsoft.com/office/powerpoint/2010/main" val="956749138"/>
+      </p:ext>
+    </p:extLst>
+  </p:cSld>
+  <p:clrMapOvr>
+    <a:masterClrMapping/>
+  </p:clrMapOvr>
+  <mc:AlternateContent xmlns:mc="http://schemas.openxmlformats.org/markup-compatibility/2006">
+    <mc:Choice xmlns:p159="http://schemas.microsoft.com/office/powerpoint/2015/09/main" Requires="p159">
+      <p:transition spd="med">
+        <p159:morph option="byWord"/>
+      </p:transition>
+    </mc:Choice>
+    <mc:Fallback>
+      <p:transition spd="med">
+        <p:fade/>
+      </p:transition>
+    </mc:Fallback>
+  </mc:AlternateContent>
+</p:sld>
+</file>
+
+<file path=ppt/slides/slide11.xml><?xml version="1.0" encoding="utf-8"?>
+<p:sld xmlns:a="http://schemas.openxmlformats.org/drawingml/2006/main" xmlns:r="http://schemas.openxmlformats.org/officeDocument/2006/relationships" xmlns:p="http://schemas.openxmlformats.org/presentationml/2006/main">
+  <p:cSld>
+    <p:spTree>
+      <p:nvGrpSpPr>
+        <p:cNvPr id="1" name="">
+          <a:extLst>
+            <a:ext uri="{FF2B5EF4-FFF2-40B4-BE49-F238E27FC236}">
+              <a16:creationId xmlns:a16="http://schemas.microsoft.com/office/drawing/2014/main" id="{903B1B1B-7C7F-0D23-FC0A-0191D992B124}"/>
+            </a:ext>
+          </a:extLst>
+        </p:cNvPr>
+        <p:cNvGrpSpPr/>
+        <p:nvPr/>
+      </p:nvGrpSpPr>
+      <p:grpSpPr>
+        <a:xfrm>
+          <a:off x="0" y="0"/>
+          <a:ext cx="0" cy="0"/>
+          <a:chOff x="0" y="0"/>
+          <a:chExt cx="0" cy="0"/>
+        </a:xfrm>
+      </p:grpSpPr>
+      <p:sp>
+        <p:nvSpPr>
+          <p:cNvPr id="17" name="Rectangle 16">
+            <a:extLst>
+              <a:ext uri="{FF2B5EF4-FFF2-40B4-BE49-F238E27FC236}">
+                <a16:creationId xmlns:a16="http://schemas.microsoft.com/office/drawing/2014/main" id="{B3D9B647-F77F-7408-1713-249CDF5F30EE}"/>
+              </a:ext>
+            </a:extLst>
+          </p:cNvPr>
+          <p:cNvSpPr/>
+          <p:nvPr/>
+        </p:nvSpPr>
+        <p:spPr>
+          <a:xfrm rot="16200000">
+            <a:off x="2522582" y="-387076"/>
+            <a:ext cx="68673" cy="3246390"/>
+          </a:xfrm>
+          <a:prstGeom prst="rect">
+            <a:avLst/>
+          </a:prstGeom>
+          <a:solidFill>
+            <a:srgbClr val="FF0000"/>
+          </a:solidFill>
+          <a:ln>
+            <a:solidFill>
+              <a:srgbClr val="FF0000"/>
+            </a:solidFill>
+          </a:ln>
+        </p:spPr>
+        <p:style>
+          <a:lnRef idx="2">
+            <a:schemeClr val="accent1">
+              <a:shade val="15000"/>
+            </a:schemeClr>
+          </a:lnRef>
+          <a:fillRef idx="1">
+            <a:schemeClr val="accent1"/>
+          </a:fillRef>
+          <a:effectRef idx="0">
+            <a:schemeClr val="accent1"/>
+          </a:effectRef>
+          <a:fontRef idx="minor">
+            <a:schemeClr val="lt1"/>
+          </a:fontRef>
+        </p:style>
+        <p:txBody>
+          <a:bodyPr rtlCol="0" anchor="ctr"/>
+          <a:lstStyle/>
+          <a:p>
+            <a:pPr algn="ctr"/>
+            <a:endParaRPr lang="en-US">
+              <a:latin typeface="Times New Roman" panose="02020603050405020304" pitchFamily="18" charset="0"/>
+              <a:cs typeface="Times New Roman" panose="02020603050405020304" pitchFamily="18" charset="0"/>
+            </a:endParaRPr>
+          </a:p>
+        </p:txBody>
+      </p:sp>
+      <p:sp>
+        <p:nvSpPr>
+          <p:cNvPr id="18" name="Rectangle 17">
+            <a:extLst>
+              <a:ext uri="{FF2B5EF4-FFF2-40B4-BE49-F238E27FC236}">
+                <a16:creationId xmlns:a16="http://schemas.microsoft.com/office/drawing/2014/main" id="{62A96CA1-550D-FF52-7A6C-87D4B134651B}"/>
+              </a:ext>
+            </a:extLst>
+          </p:cNvPr>
+          <p:cNvSpPr/>
+          <p:nvPr/>
+        </p:nvSpPr>
+        <p:spPr>
+          <a:xfrm rot="16200000">
+            <a:off x="2522581" y="-318404"/>
+            <a:ext cx="68674" cy="3246390"/>
+          </a:xfrm>
+          <a:prstGeom prst="rect">
+            <a:avLst/>
+          </a:prstGeom>
+          <a:solidFill>
+            <a:srgbClr val="7030A0"/>
+          </a:solidFill>
+          <a:ln>
+            <a:solidFill>
+              <a:srgbClr val="7030A0"/>
+            </a:solidFill>
+          </a:ln>
+        </p:spPr>
+        <p:style>
+          <a:lnRef idx="2">
+            <a:schemeClr val="accent1">
+              <a:shade val="15000"/>
+            </a:schemeClr>
+          </a:lnRef>
+          <a:fillRef idx="1">
+            <a:schemeClr val="accent1"/>
+          </a:fillRef>
+          <a:effectRef idx="0">
+            <a:schemeClr val="accent1"/>
+          </a:effectRef>
+          <a:fontRef idx="minor">
+            <a:schemeClr val="lt1"/>
+          </a:fontRef>
+        </p:style>
+        <p:txBody>
+          <a:bodyPr rtlCol="0" anchor="ctr"/>
+          <a:lstStyle/>
+          <a:p>
+            <a:pPr algn="ctr"/>
+            <a:endParaRPr lang="en-US">
+              <a:latin typeface="Times New Roman" panose="02020603050405020304" pitchFamily="18" charset="0"/>
+              <a:cs typeface="Times New Roman" panose="02020603050405020304" pitchFamily="18" charset="0"/>
+            </a:endParaRPr>
+          </a:p>
+        </p:txBody>
+      </p:sp>
+      <p:sp>
+        <p:nvSpPr>
+          <p:cNvPr id="12" name="TextBox 11">
+            <a:extLst>
+              <a:ext uri="{FF2B5EF4-FFF2-40B4-BE49-F238E27FC236}">
+                <a16:creationId xmlns:a16="http://schemas.microsoft.com/office/drawing/2014/main" id="{67A8BC6A-D1FB-5D5E-F335-368C9AC742C1}"/>
+              </a:ext>
+            </a:extLst>
+          </p:cNvPr>
+          <p:cNvSpPr txBox="1"/>
+          <p:nvPr/>
+        </p:nvSpPr>
+        <p:spPr>
+          <a:xfrm>
+            <a:off x="772906" y="405121"/>
+            <a:ext cx="5095723" cy="830997"/>
+          </a:xfrm>
+          <a:prstGeom prst="rect">
+            <a:avLst/>
+          </a:prstGeom>
+          <a:noFill/>
+        </p:spPr>
+        <p:txBody>
+          <a:bodyPr wrap="square" rtlCol="0">
+            <a:spAutoFit/>
+          </a:bodyPr>
+          <a:lstStyle/>
+          <a:p>
+            <a:r>
+              <a:rPr lang="en-US" sz="4800" dirty="0">
+                <a:latin typeface="Times New Roman" panose="02020603050405020304" pitchFamily="18" charset="0"/>
+                <a:cs typeface="Times New Roman" panose="02020603050405020304" pitchFamily="18" charset="0"/>
+              </a:rPr>
+              <a:t>c</a:t>
+            </a:r>
+            <a:r>
+              <a:rPr lang="en-US" sz="3000" dirty="0">
+                <a:latin typeface="Times New Roman" panose="02020603050405020304" pitchFamily="18" charset="0"/>
+                <a:cs typeface="Times New Roman" panose="02020603050405020304" pitchFamily="18" charset="0"/>
+              </a:rPr>
+              <a:t>ompetitive </a:t>
+            </a:r>
+            <a:r>
+              <a:rPr lang="en-US" sz="4800" dirty="0">
+                <a:latin typeface="Times New Roman" panose="02020603050405020304" pitchFamily="18" charset="0"/>
+                <a:cs typeface="Times New Roman" panose="02020603050405020304" pitchFamily="18" charset="0"/>
+              </a:rPr>
+              <a:t>s</a:t>
+            </a:r>
+            <a:r>
+              <a:rPr lang="en-US" sz="3000" dirty="0">
+                <a:latin typeface="Times New Roman" panose="02020603050405020304" pitchFamily="18" charset="0"/>
+                <a:cs typeface="Times New Roman" panose="02020603050405020304" pitchFamily="18" charset="0"/>
+              </a:rPr>
+              <a:t>ystems</a:t>
+            </a:r>
+          </a:p>
+        </p:txBody>
+      </p:sp>
+      <p:sp>
+        <p:nvSpPr>
+          <p:cNvPr id="2" name="TextBox 1">
+            <a:extLst>
+              <a:ext uri="{FF2B5EF4-FFF2-40B4-BE49-F238E27FC236}">
+                <a16:creationId xmlns:a16="http://schemas.microsoft.com/office/drawing/2014/main" id="{6FEBDB26-6BE4-FDD1-0A01-880F943359F5}"/>
+              </a:ext>
+            </a:extLst>
+          </p:cNvPr>
+          <p:cNvSpPr txBox="1"/>
+          <p:nvPr/>
+        </p:nvSpPr>
+        <p:spPr>
+          <a:xfrm>
+            <a:off x="4806479" y="716456"/>
+            <a:ext cx="6410817" cy="553998"/>
+          </a:xfrm>
+          <a:prstGeom prst="rect">
+            <a:avLst/>
+          </a:prstGeom>
+          <a:noFill/>
+        </p:spPr>
+        <p:txBody>
+          <a:bodyPr wrap="square" rtlCol="0">
+            <a:spAutoFit/>
+          </a:bodyPr>
+          <a:lstStyle/>
+          <a:p>
+            <a:r>
+              <a:rPr lang="en-US" sz="3000" dirty="0">
+                <a:solidFill>
+                  <a:srgbClr val="7030A0"/>
+                </a:solidFill>
+                <a:latin typeface="Times New Roman" panose="02020603050405020304" pitchFamily="18" charset="0"/>
+                <a:cs typeface="Times New Roman" panose="02020603050405020304" pitchFamily="18" charset="0"/>
+              </a:rPr>
+              <a:t>Two Common Communication Patterns</a:t>
+            </a:r>
+          </a:p>
+        </p:txBody>
+      </p:sp>
+      <p:sp>
+        <p:nvSpPr>
+          <p:cNvPr id="3" name="TextBox 2">
+            <a:extLst>
+              <a:ext uri="{FF2B5EF4-FFF2-40B4-BE49-F238E27FC236}">
+                <a16:creationId xmlns:a16="http://schemas.microsoft.com/office/drawing/2014/main" id="{6DBA5A63-7809-A400-5990-42AFFFC24736}"/>
+              </a:ext>
+            </a:extLst>
+          </p:cNvPr>
+          <p:cNvSpPr txBox="1"/>
+          <p:nvPr/>
+        </p:nvSpPr>
+        <p:spPr>
+          <a:xfrm>
+            <a:off x="2556918" y="2652580"/>
+            <a:ext cx="2830628" cy="1015663"/>
+          </a:xfrm>
+          <a:prstGeom prst="rect">
+            <a:avLst/>
+          </a:prstGeom>
+          <a:noFill/>
+        </p:spPr>
+        <p:txBody>
+          <a:bodyPr wrap="square" rtlCol="0">
+            <a:spAutoFit/>
+          </a:bodyPr>
+          <a:lstStyle/>
+          <a:p>
+            <a:r>
+              <a:rPr lang="en-US" sz="3000" dirty="0">
+                <a:solidFill>
+                  <a:srgbClr val="7030A0"/>
+                </a:solidFill>
+                <a:latin typeface="Times New Roman" panose="02020603050405020304" pitchFamily="18" charset="0"/>
+                <a:cs typeface="Times New Roman" panose="02020603050405020304" pitchFamily="18" charset="0"/>
+              </a:rPr>
+              <a:t>Outbound</a:t>
+            </a:r>
+            <a:br>
+              <a:rPr lang="en-US" sz="3000" dirty="0">
+                <a:solidFill>
+                  <a:srgbClr val="7030A0"/>
+                </a:solidFill>
+                <a:latin typeface="Times New Roman" panose="02020603050405020304" pitchFamily="18" charset="0"/>
+                <a:cs typeface="Times New Roman" panose="02020603050405020304" pitchFamily="18" charset="0"/>
+              </a:rPr>
+            </a:br>
+            <a:r>
+              <a:rPr lang="en-US" sz="3000" dirty="0">
+                <a:solidFill>
+                  <a:srgbClr val="7030A0"/>
+                </a:solidFill>
+                <a:latin typeface="Times New Roman" panose="02020603050405020304" pitchFamily="18" charset="0"/>
+                <a:cs typeface="Times New Roman" panose="02020603050405020304" pitchFamily="18" charset="0"/>
+              </a:rPr>
+              <a:t>Communication</a:t>
+            </a:r>
+          </a:p>
+        </p:txBody>
+      </p:sp>
+      <p:sp>
+        <p:nvSpPr>
+          <p:cNvPr id="4" name="TextBox 3">
+            <a:extLst>
+              <a:ext uri="{FF2B5EF4-FFF2-40B4-BE49-F238E27FC236}">
+                <a16:creationId xmlns:a16="http://schemas.microsoft.com/office/drawing/2014/main" id="{FE5AE08A-01D4-5FE3-CB15-2C26BB4F3C9B}"/>
+              </a:ext>
+            </a:extLst>
+          </p:cNvPr>
+          <p:cNvSpPr txBox="1"/>
+          <p:nvPr/>
+        </p:nvSpPr>
+        <p:spPr>
+          <a:xfrm>
+            <a:off x="7047594" y="2652580"/>
+            <a:ext cx="2830628" cy="1015663"/>
+          </a:xfrm>
+          <a:prstGeom prst="rect">
+            <a:avLst/>
+          </a:prstGeom>
+          <a:noFill/>
+        </p:spPr>
+        <p:txBody>
+          <a:bodyPr wrap="square" rtlCol="0">
+            <a:spAutoFit/>
+          </a:bodyPr>
+          <a:lstStyle/>
+          <a:p>
+            <a:r>
+              <a:rPr lang="en-US" sz="3000" dirty="0">
+                <a:solidFill>
+                  <a:srgbClr val="7030A0"/>
+                </a:solidFill>
+                <a:latin typeface="Times New Roman" panose="02020603050405020304" pitchFamily="18" charset="0"/>
+                <a:cs typeface="Times New Roman" panose="02020603050405020304" pitchFamily="18" charset="0"/>
+              </a:rPr>
+              <a:t>Inbound</a:t>
+            </a:r>
+            <a:br>
+              <a:rPr lang="en-US" sz="3000" dirty="0">
+                <a:solidFill>
+                  <a:srgbClr val="7030A0"/>
+                </a:solidFill>
+                <a:latin typeface="Times New Roman" panose="02020603050405020304" pitchFamily="18" charset="0"/>
+                <a:cs typeface="Times New Roman" panose="02020603050405020304" pitchFamily="18" charset="0"/>
+              </a:rPr>
+            </a:br>
+            <a:r>
+              <a:rPr lang="en-US" sz="3000" dirty="0">
+                <a:solidFill>
+                  <a:srgbClr val="7030A0"/>
+                </a:solidFill>
+                <a:latin typeface="Times New Roman" panose="02020603050405020304" pitchFamily="18" charset="0"/>
+                <a:cs typeface="Times New Roman" panose="02020603050405020304" pitchFamily="18" charset="0"/>
+              </a:rPr>
+              <a:t>Communication</a:t>
+            </a:r>
+          </a:p>
+        </p:txBody>
+      </p:sp>
+      <p:sp>
+        <p:nvSpPr>
+          <p:cNvPr id="5" name="TextBox 4">
+            <a:extLst>
+              <a:ext uri="{FF2B5EF4-FFF2-40B4-BE49-F238E27FC236}">
+                <a16:creationId xmlns:a16="http://schemas.microsoft.com/office/drawing/2014/main" id="{662C09C8-53FF-8854-3BBA-68BAA3557470}"/>
+              </a:ext>
+            </a:extLst>
+          </p:cNvPr>
+          <p:cNvSpPr txBox="1"/>
+          <p:nvPr/>
+        </p:nvSpPr>
+        <p:spPr>
+          <a:xfrm>
+            <a:off x="2556918" y="3651423"/>
+            <a:ext cx="2249561" cy="1477328"/>
+          </a:xfrm>
+          <a:prstGeom prst="rect">
+            <a:avLst/>
+          </a:prstGeom>
+          <a:noFill/>
+        </p:spPr>
+        <p:txBody>
+          <a:bodyPr wrap="square" rtlCol="0">
+            <a:spAutoFit/>
+          </a:bodyPr>
+          <a:lstStyle/>
+          <a:p>
+            <a:r>
+              <a:rPr lang="en-US" sz="3000" dirty="0">
+                <a:latin typeface="Times New Roman" panose="02020603050405020304" pitchFamily="18" charset="0"/>
+                <a:cs typeface="Times New Roman" panose="02020603050405020304" pitchFamily="18" charset="0"/>
+              </a:rPr>
+              <a:t>Multicast from server to machines</a:t>
+            </a:r>
+          </a:p>
+        </p:txBody>
+      </p:sp>
+      <p:sp>
+        <p:nvSpPr>
+          <p:cNvPr id="6" name="TextBox 5">
+            <a:extLst>
+              <a:ext uri="{FF2B5EF4-FFF2-40B4-BE49-F238E27FC236}">
+                <a16:creationId xmlns:a16="http://schemas.microsoft.com/office/drawing/2014/main" id="{6F3D0DA5-E2E5-E515-AA17-165F9624A7FA}"/>
+              </a:ext>
+            </a:extLst>
+          </p:cNvPr>
+          <p:cNvSpPr txBox="1"/>
+          <p:nvPr/>
+        </p:nvSpPr>
+        <p:spPr>
+          <a:xfrm>
+            <a:off x="7047593" y="3651422"/>
+            <a:ext cx="2587489" cy="1477328"/>
+          </a:xfrm>
+          <a:prstGeom prst="rect">
+            <a:avLst/>
+          </a:prstGeom>
+          <a:noFill/>
+        </p:spPr>
+        <p:txBody>
+          <a:bodyPr wrap="square" rtlCol="0">
+            <a:spAutoFit/>
+          </a:bodyPr>
+          <a:lstStyle/>
+          <a:p>
+            <a:r>
+              <a:rPr lang="en-US" sz="3000" dirty="0">
+                <a:latin typeface="Times New Roman" panose="02020603050405020304" pitchFamily="18" charset="0"/>
+                <a:cs typeface="Times New Roman" panose="02020603050405020304" pitchFamily="18" charset="0"/>
+              </a:rPr>
+              <a:t>Unicasts </a:t>
+            </a:r>
+            <a:br>
+              <a:rPr lang="en-US" sz="3000" dirty="0">
+                <a:latin typeface="Times New Roman" panose="02020603050405020304" pitchFamily="18" charset="0"/>
+                <a:cs typeface="Times New Roman" panose="02020603050405020304" pitchFamily="18" charset="0"/>
+              </a:rPr>
+            </a:br>
+            <a:r>
+              <a:rPr lang="en-US" sz="3000" dirty="0">
+                <a:latin typeface="Times New Roman" panose="02020603050405020304" pitchFamily="18" charset="0"/>
+                <a:cs typeface="Times New Roman" panose="02020603050405020304" pitchFamily="18" charset="0"/>
+              </a:rPr>
+              <a:t>from machines to server</a:t>
+            </a:r>
+          </a:p>
+        </p:txBody>
+      </p:sp>
+      <p:sp>
+        <p:nvSpPr>
+          <p:cNvPr id="8" name="TextBox 7">
+            <a:extLst>
+              <a:ext uri="{FF2B5EF4-FFF2-40B4-BE49-F238E27FC236}">
+                <a16:creationId xmlns:a16="http://schemas.microsoft.com/office/drawing/2014/main" id="{07F37804-12AF-C717-C3B7-E1C04B1DBC2B}"/>
+              </a:ext>
+            </a:extLst>
+          </p:cNvPr>
+          <p:cNvSpPr txBox="1"/>
+          <p:nvPr/>
+        </p:nvSpPr>
+        <p:spPr>
+          <a:xfrm>
+            <a:off x="1196999" y="5294770"/>
+            <a:ext cx="4247536" cy="1015663"/>
+          </a:xfrm>
+          <a:prstGeom prst="rect">
+            <a:avLst/>
+          </a:prstGeom>
+          <a:noFill/>
+        </p:spPr>
+        <p:txBody>
+          <a:bodyPr wrap="square" rtlCol="0">
+            <a:spAutoFit/>
+          </a:bodyPr>
+          <a:lstStyle/>
+          <a:p>
+            <a:r>
+              <a:rPr lang="en-US" sz="3000" dirty="0">
+                <a:latin typeface="Times New Roman" panose="02020603050405020304" pitchFamily="18" charset="0"/>
+                <a:cs typeface="Times New Roman" panose="02020603050405020304" pitchFamily="18" charset="0"/>
+              </a:rPr>
+              <a:t>e.g., market data multicast in financial exchanges</a:t>
+            </a:r>
+          </a:p>
+        </p:txBody>
+      </p:sp>
+      <p:sp>
+        <p:nvSpPr>
+          <p:cNvPr id="9" name="TextBox 8">
+            <a:extLst>
+              <a:ext uri="{FF2B5EF4-FFF2-40B4-BE49-F238E27FC236}">
+                <a16:creationId xmlns:a16="http://schemas.microsoft.com/office/drawing/2014/main" id="{33BF1DE6-DDD3-1E07-36B2-A6227D23FF9E}"/>
+              </a:ext>
+            </a:extLst>
+          </p:cNvPr>
+          <p:cNvSpPr txBox="1"/>
+          <p:nvPr/>
+        </p:nvSpPr>
+        <p:spPr>
+          <a:xfrm>
+            <a:off x="6969759" y="5294769"/>
+            <a:ext cx="5065721" cy="1015663"/>
+          </a:xfrm>
+          <a:prstGeom prst="rect">
+            <a:avLst/>
+          </a:prstGeom>
+          <a:noFill/>
+        </p:spPr>
+        <p:txBody>
+          <a:bodyPr wrap="square" rtlCol="0">
+            <a:spAutoFit/>
+          </a:bodyPr>
+          <a:lstStyle/>
+          <a:p>
+            <a:r>
+              <a:rPr lang="en-US" sz="3000" dirty="0">
+                <a:latin typeface="Times New Roman" panose="02020603050405020304" pitchFamily="18" charset="0"/>
+                <a:cs typeface="Times New Roman" panose="02020603050405020304" pitchFamily="18" charset="0"/>
+              </a:rPr>
+              <a:t>e.g., traders submitting orders to a financial exchange server</a:t>
+            </a:r>
+          </a:p>
+        </p:txBody>
+      </p:sp>
+    </p:spTree>
+    <p:extLst>
+      <p:ext uri="{BB962C8B-B14F-4D97-AF65-F5344CB8AC3E}">
+        <p14:creationId xmlns:p14="http://schemas.microsoft.com/office/powerpoint/2010/main" val="24909414"/>
       </p:ext>
     </p:extLst>
   </p:cSld>

--- a/thesis-latency-fairness.pptx
+++ b/thesis-latency-fairness.pptx
@@ -4931,10 +4931,10 @@
       </p:sp>
       <p:sp>
         <p:nvSpPr>
-          <p:cNvPr id="3" name="TextBox 2">
-            <a:extLst>
-              <a:ext uri="{FF2B5EF4-FFF2-40B4-BE49-F238E27FC236}">
-                <a16:creationId xmlns:a16="http://schemas.microsoft.com/office/drawing/2014/main" id="{D20ACC30-63CE-B58B-D9B8-9601893F260F}"/>
+          <p:cNvPr id="7" name="TextBox 6">
+            <a:extLst>
+              <a:ext uri="{FF2B5EF4-FFF2-40B4-BE49-F238E27FC236}">
+                <a16:creationId xmlns:a16="http://schemas.microsoft.com/office/drawing/2014/main" id="{687ADB50-CBB3-E406-3A47-7D0EA903ED37}"/>
               </a:ext>
             </a:extLst>
           </p:cNvPr>
@@ -4943,7 +4943,7 @@
         </p:nvSpPr>
         <p:spPr>
           <a:xfrm>
-            <a:off x="2556918" y="2652580"/>
+            <a:off x="6615108" y="2220094"/>
             <a:ext cx="2830628" cy="1015663"/>
           </a:xfrm>
           <a:prstGeom prst="rect">
@@ -4965,7 +4965,7 @@
                 <a:latin typeface="Times New Roman" panose="02020603050405020304" pitchFamily="18" charset="0"/>
                 <a:cs typeface="Times New Roman" panose="02020603050405020304" pitchFamily="18" charset="0"/>
               </a:rPr>
-              <a:t>Outbound</a:t>
+              <a:t>Inbound</a:t>
             </a:r>
             <a:br>
               <a:rPr lang="en-US" sz="3000" dirty="0">
@@ -4991,10 +4991,10 @@
       </p:sp>
       <p:sp>
         <p:nvSpPr>
-          <p:cNvPr id="4" name="TextBox 3">
-            <a:extLst>
-              <a:ext uri="{FF2B5EF4-FFF2-40B4-BE49-F238E27FC236}">
-                <a16:creationId xmlns:a16="http://schemas.microsoft.com/office/drawing/2014/main" id="{9BF7A295-DD49-24ED-83B7-F936F9CE71F8}"/>
+          <p:cNvPr id="8" name="TextBox 7">
+            <a:extLst>
+              <a:ext uri="{FF2B5EF4-FFF2-40B4-BE49-F238E27FC236}">
+                <a16:creationId xmlns:a16="http://schemas.microsoft.com/office/drawing/2014/main" id="{FC411999-1E8A-8CA9-6E02-283B092D3D33}"/>
               </a:ext>
             </a:extLst>
           </p:cNvPr>
@@ -5003,8 +5003,8 @@
         </p:nvSpPr>
         <p:spPr>
           <a:xfrm>
-            <a:off x="7047594" y="2652580"/>
-            <a:ext cx="2830628" cy="1015663"/>
+            <a:off x="6615107" y="3218936"/>
+            <a:ext cx="2587489" cy="1477328"/>
           </a:xfrm>
           <a:prstGeom prst="rect">
             <a:avLst/>
@@ -5017,6 +5017,58 @@
           </a:bodyPr>
           <a:lstStyle/>
           <a:p>
+            <a:r>
+              <a:rPr lang="en-US" sz="3000" dirty="0">
+                <a:latin typeface="Times New Roman" panose="02020603050405020304" pitchFamily="18" charset="0"/>
+                <a:cs typeface="Times New Roman" panose="02020603050405020304" pitchFamily="18" charset="0"/>
+              </a:rPr>
+              <a:t>Unicasts </a:t>
+            </a:r>
+            <a:br>
+              <a:rPr lang="en-US" sz="3000" dirty="0">
+                <a:latin typeface="Times New Roman" panose="02020603050405020304" pitchFamily="18" charset="0"/>
+                <a:cs typeface="Times New Roman" panose="02020603050405020304" pitchFamily="18" charset="0"/>
+              </a:rPr>
+            </a:br>
+            <a:r>
+              <a:rPr lang="en-US" sz="3000" dirty="0">
+                <a:latin typeface="Times New Roman" panose="02020603050405020304" pitchFamily="18" charset="0"/>
+                <a:cs typeface="Times New Roman" panose="02020603050405020304" pitchFamily="18" charset="0"/>
+              </a:rPr>
+              <a:t>from machines to server</a:t>
+            </a:r>
+          </a:p>
+        </p:txBody>
+      </p:sp>
+      <p:sp>
+        <p:nvSpPr>
+          <p:cNvPr id="9" name="TextBox 8">
+            <a:extLst>
+              <a:ext uri="{FF2B5EF4-FFF2-40B4-BE49-F238E27FC236}">
+                <a16:creationId xmlns:a16="http://schemas.microsoft.com/office/drawing/2014/main" id="{96465F3E-4C19-045E-905D-35D7D9029867}"/>
+              </a:ext>
+            </a:extLst>
+          </p:cNvPr>
+          <p:cNvSpPr txBox="1"/>
+          <p:nvPr/>
+        </p:nvSpPr>
+        <p:spPr>
+          <a:xfrm>
+            <a:off x="2124432" y="2220094"/>
+            <a:ext cx="2830628" cy="1015663"/>
+          </a:xfrm>
+          <a:prstGeom prst="rect">
+            <a:avLst/>
+          </a:prstGeom>
+          <a:noFill/>
+        </p:spPr>
+        <p:txBody>
+          <a:bodyPr wrap="square" rtlCol="0">
+            <a:spAutoFit/>
+          </a:bodyPr>
+          <a:lstStyle/>
+          <a:p>
+            <a:pPr algn="r"/>
             <a:r>
               <a:rPr lang="en-US" sz="3000" dirty="0">
                 <a:solidFill>
@@ -5025,7 +5077,7 @@
                 <a:latin typeface="Times New Roman" panose="02020603050405020304" pitchFamily="18" charset="0"/>
                 <a:cs typeface="Times New Roman" panose="02020603050405020304" pitchFamily="18" charset="0"/>
               </a:rPr>
-              <a:t>Inbound</a:t>
+              <a:t>Outbound</a:t>
             </a:r>
             <a:br>
               <a:rPr lang="en-US" sz="3000" dirty="0">
@@ -5051,10 +5103,10 @@
       </p:sp>
       <p:sp>
         <p:nvSpPr>
-          <p:cNvPr id="5" name="TextBox 4">
-            <a:extLst>
-              <a:ext uri="{FF2B5EF4-FFF2-40B4-BE49-F238E27FC236}">
-                <a16:creationId xmlns:a16="http://schemas.microsoft.com/office/drawing/2014/main" id="{A795B2A6-ABA9-9856-4FE9-117B42B4FFBE}"/>
+          <p:cNvPr id="10" name="TextBox 9">
+            <a:extLst>
+              <a:ext uri="{FF2B5EF4-FFF2-40B4-BE49-F238E27FC236}">
+                <a16:creationId xmlns:a16="http://schemas.microsoft.com/office/drawing/2014/main" id="{FB4BED7D-4B5E-952B-86A8-299F5F8EA4E3}"/>
               </a:ext>
             </a:extLst>
           </p:cNvPr>
@@ -5063,7 +5115,7 @@
         </p:nvSpPr>
         <p:spPr>
           <a:xfrm>
-            <a:off x="2556918" y="3651423"/>
+            <a:off x="2622846" y="3235757"/>
             <a:ext cx="2249561" cy="1477328"/>
           </a:xfrm>
           <a:prstGeom prst="rect">
@@ -5077,6 +5129,7 @@
           </a:bodyPr>
           <a:lstStyle/>
           <a:p>
+            <a:pPr algn="r"/>
             <a:r>
               <a:rPr lang="en-US" sz="3000" dirty="0">
                 <a:latin typeface="Times New Roman" panose="02020603050405020304" pitchFamily="18" charset="0"/>
@@ -5089,52 +5142,265 @@
       </p:sp>
       <p:sp>
         <p:nvSpPr>
-          <p:cNvPr id="6" name="TextBox 5">
-            <a:extLst>
-              <a:ext uri="{FF2B5EF4-FFF2-40B4-BE49-F238E27FC236}">
-                <a16:creationId xmlns:a16="http://schemas.microsoft.com/office/drawing/2014/main" id="{BD9D3A62-D515-5D87-98E6-3A77A263F7CF}"/>
-              </a:ext>
-            </a:extLst>
-          </p:cNvPr>
-          <p:cNvSpPr txBox="1"/>
-          <p:nvPr/>
-        </p:nvSpPr>
-        <p:spPr>
-          <a:xfrm>
-            <a:off x="7047593" y="3651422"/>
-            <a:ext cx="2587489" cy="1477328"/>
-          </a:xfrm>
-          <a:prstGeom prst="rect">
-            <a:avLst/>
-          </a:prstGeom>
-          <a:noFill/>
-        </p:spPr>
-        <p:txBody>
-          <a:bodyPr wrap="square" rtlCol="0">
-            <a:spAutoFit/>
-          </a:bodyPr>
-          <a:lstStyle/>
-          <a:p>
-            <a:r>
-              <a:rPr lang="en-US" sz="3000" dirty="0">
-                <a:latin typeface="Times New Roman" panose="02020603050405020304" pitchFamily="18" charset="0"/>
-                <a:cs typeface="Times New Roman" panose="02020603050405020304" pitchFamily="18" charset="0"/>
-              </a:rPr>
-              <a:t>Unicasts </a:t>
-            </a:r>
-            <a:br>
-              <a:rPr lang="en-US" sz="3000" dirty="0">
-                <a:latin typeface="Times New Roman" panose="02020603050405020304" pitchFamily="18" charset="0"/>
-                <a:cs typeface="Times New Roman" panose="02020603050405020304" pitchFamily="18" charset="0"/>
-              </a:rPr>
-            </a:br>
-            <a:r>
-              <a:rPr lang="en-US" sz="3000" dirty="0">
-                <a:latin typeface="Times New Roman" panose="02020603050405020304" pitchFamily="18" charset="0"/>
-                <a:cs typeface="Times New Roman" panose="02020603050405020304" pitchFamily="18" charset="0"/>
-              </a:rPr>
-              <a:t>from machines to server</a:t>
-            </a:r>
+          <p:cNvPr id="11" name="Rectangle 10">
+            <a:extLst>
+              <a:ext uri="{FF2B5EF4-FFF2-40B4-BE49-F238E27FC236}">
+                <a16:creationId xmlns:a16="http://schemas.microsoft.com/office/drawing/2014/main" id="{0B99D3DB-B510-22AB-1991-A1915A4878C7}"/>
+              </a:ext>
+            </a:extLst>
+          </p:cNvPr>
+          <p:cNvSpPr/>
+          <p:nvPr/>
+        </p:nvSpPr>
+        <p:spPr>
+          <a:xfrm>
+            <a:off x="5733022" y="2774092"/>
+            <a:ext cx="45719" cy="2492991"/>
+          </a:xfrm>
+          <a:custGeom>
+            <a:avLst/>
+            <a:gdLst>
+              <a:gd name="csX0" fmla="*/ 0 w 45719"/>
+              <a:gd name="csY0" fmla="*/ 0 h 2492991"/>
+              <a:gd name="csX1" fmla="*/ 45719 w 45719"/>
+              <a:gd name="csY1" fmla="*/ 0 h 2492991"/>
+              <a:gd name="csX2" fmla="*/ 45719 w 45719"/>
+              <a:gd name="csY2" fmla="*/ 498598 h 2492991"/>
+              <a:gd name="csX3" fmla="*/ 45719 w 45719"/>
+              <a:gd name="csY3" fmla="*/ 1047056 h 2492991"/>
+              <a:gd name="csX4" fmla="*/ 45719 w 45719"/>
+              <a:gd name="csY4" fmla="*/ 1545654 h 2492991"/>
+              <a:gd name="csX5" fmla="*/ 45719 w 45719"/>
+              <a:gd name="csY5" fmla="*/ 1969463 h 2492991"/>
+              <a:gd name="csX6" fmla="*/ 45719 w 45719"/>
+              <a:gd name="csY6" fmla="*/ 2492991 h 2492991"/>
+              <a:gd name="csX7" fmla="*/ 0 w 45719"/>
+              <a:gd name="csY7" fmla="*/ 2492991 h 2492991"/>
+              <a:gd name="csX8" fmla="*/ 0 w 45719"/>
+              <a:gd name="csY8" fmla="*/ 1944533 h 2492991"/>
+              <a:gd name="csX9" fmla="*/ 0 w 45719"/>
+              <a:gd name="csY9" fmla="*/ 1421005 h 2492991"/>
+              <a:gd name="csX10" fmla="*/ 0 w 45719"/>
+              <a:gd name="csY10" fmla="*/ 922407 h 2492991"/>
+              <a:gd name="csX11" fmla="*/ 0 w 45719"/>
+              <a:gd name="csY11" fmla="*/ 0 h 2492991"/>
+            </a:gdLst>
+            <a:ahLst/>
+            <a:cxnLst>
+              <a:cxn ang="0">
+                <a:pos x="csX0" y="csY0"/>
+              </a:cxn>
+              <a:cxn ang="0">
+                <a:pos x="csX1" y="csY1"/>
+              </a:cxn>
+              <a:cxn ang="0">
+                <a:pos x="csX2" y="csY2"/>
+              </a:cxn>
+              <a:cxn ang="0">
+                <a:pos x="csX3" y="csY3"/>
+              </a:cxn>
+              <a:cxn ang="0">
+                <a:pos x="csX4" y="csY4"/>
+              </a:cxn>
+              <a:cxn ang="0">
+                <a:pos x="csX5" y="csY5"/>
+              </a:cxn>
+              <a:cxn ang="0">
+                <a:pos x="csX6" y="csY6"/>
+              </a:cxn>
+              <a:cxn ang="0">
+                <a:pos x="csX7" y="csY7"/>
+              </a:cxn>
+              <a:cxn ang="0">
+                <a:pos x="csX8" y="csY8"/>
+              </a:cxn>
+              <a:cxn ang="0">
+                <a:pos x="csX9" y="csY9"/>
+              </a:cxn>
+              <a:cxn ang="0">
+                <a:pos x="csX10" y="csY10"/>
+              </a:cxn>
+              <a:cxn ang="0">
+                <a:pos x="csX11" y="csY11"/>
+              </a:cxn>
+            </a:cxnLst>
+            <a:rect l="l" t="t" r="r" b="b"/>
+            <a:pathLst>
+              <a:path w="45719" h="2492991" fill="none" extrusionOk="0">
+                <a:moveTo>
+                  <a:pt x="0" y="0"/>
+                </a:moveTo>
+                <a:cubicBezTo>
+                  <a:pt x="15466" y="-3108"/>
+                  <a:pt x="29505" y="2787"/>
+                  <a:pt x="45719" y="0"/>
+                </a:cubicBezTo>
+                <a:cubicBezTo>
+                  <a:pt x="96714" y="244462"/>
+                  <a:pt x="38492" y="292531"/>
+                  <a:pt x="45719" y="498598"/>
+                </a:cubicBezTo>
+                <a:cubicBezTo>
+                  <a:pt x="52946" y="704665"/>
+                  <a:pt x="41215" y="773940"/>
+                  <a:pt x="45719" y="1047056"/>
+                </a:cubicBezTo>
+                <a:cubicBezTo>
+                  <a:pt x="50223" y="1320172"/>
+                  <a:pt x="20442" y="1409127"/>
+                  <a:pt x="45719" y="1545654"/>
+                </a:cubicBezTo>
+                <a:cubicBezTo>
+                  <a:pt x="70996" y="1682181"/>
+                  <a:pt x="37286" y="1837495"/>
+                  <a:pt x="45719" y="1969463"/>
+                </a:cubicBezTo>
+                <a:cubicBezTo>
+                  <a:pt x="54152" y="2101431"/>
+                  <a:pt x="20701" y="2253374"/>
+                  <a:pt x="45719" y="2492991"/>
+                </a:cubicBezTo>
+                <a:cubicBezTo>
+                  <a:pt x="34208" y="2496004"/>
+                  <a:pt x="9588" y="2489496"/>
+                  <a:pt x="0" y="2492991"/>
+                </a:cubicBezTo>
+                <a:cubicBezTo>
+                  <a:pt x="-9781" y="2257546"/>
+                  <a:pt x="17963" y="2141047"/>
+                  <a:pt x="0" y="1944533"/>
+                </a:cubicBezTo>
+                <a:cubicBezTo>
+                  <a:pt x="-17963" y="1748019"/>
+                  <a:pt x="28336" y="1642462"/>
+                  <a:pt x="0" y="1421005"/>
+                </a:cubicBezTo>
+                <a:cubicBezTo>
+                  <a:pt x="-28336" y="1199548"/>
+                  <a:pt x="13584" y="1089980"/>
+                  <a:pt x="0" y="922407"/>
+                </a:cubicBezTo>
+                <a:cubicBezTo>
+                  <a:pt x="-13584" y="754834"/>
+                  <a:pt x="77438" y="239728"/>
+                  <a:pt x="0" y="0"/>
+                </a:cubicBezTo>
+                <a:close/>
+              </a:path>
+              <a:path w="45719" h="2492991" stroke="0" extrusionOk="0">
+                <a:moveTo>
+                  <a:pt x="0" y="0"/>
+                </a:moveTo>
+                <a:cubicBezTo>
+                  <a:pt x="18173" y="-1477"/>
+                  <a:pt x="31455" y="3772"/>
+                  <a:pt x="45719" y="0"/>
+                </a:cubicBezTo>
+                <a:cubicBezTo>
+                  <a:pt x="49078" y="113210"/>
+                  <a:pt x="23101" y="288473"/>
+                  <a:pt x="45719" y="423808"/>
+                </a:cubicBezTo>
+                <a:cubicBezTo>
+                  <a:pt x="68337" y="559143"/>
+                  <a:pt x="-15560" y="770450"/>
+                  <a:pt x="45719" y="972266"/>
+                </a:cubicBezTo>
+                <a:cubicBezTo>
+                  <a:pt x="106998" y="1174082"/>
+                  <a:pt x="-1609" y="1235521"/>
+                  <a:pt x="45719" y="1470865"/>
+                </a:cubicBezTo>
+                <a:cubicBezTo>
+                  <a:pt x="93047" y="1706209"/>
+                  <a:pt x="30494" y="1816253"/>
+                  <a:pt x="45719" y="1919603"/>
+                </a:cubicBezTo>
+                <a:cubicBezTo>
+                  <a:pt x="60944" y="2022953"/>
+                  <a:pt x="28474" y="2341608"/>
+                  <a:pt x="45719" y="2492991"/>
+                </a:cubicBezTo>
+                <a:cubicBezTo>
+                  <a:pt x="22941" y="2494258"/>
+                  <a:pt x="12902" y="2490132"/>
+                  <a:pt x="0" y="2492991"/>
+                </a:cubicBezTo>
+                <a:cubicBezTo>
+                  <a:pt x="-59460" y="2250702"/>
+                  <a:pt x="24665" y="2128448"/>
+                  <a:pt x="0" y="1944533"/>
+                </a:cubicBezTo>
+                <a:cubicBezTo>
+                  <a:pt x="-24665" y="1760618"/>
+                  <a:pt x="21622" y="1582387"/>
+                  <a:pt x="0" y="1396075"/>
+                </a:cubicBezTo>
+                <a:cubicBezTo>
+                  <a:pt x="-21622" y="1209763"/>
+                  <a:pt x="53927" y="1082433"/>
+                  <a:pt x="0" y="922407"/>
+                </a:cubicBezTo>
+                <a:cubicBezTo>
+                  <a:pt x="-53927" y="762381"/>
+                  <a:pt x="37230" y="594554"/>
+                  <a:pt x="0" y="448738"/>
+                </a:cubicBezTo>
+                <a:cubicBezTo>
+                  <a:pt x="-37230" y="302922"/>
+                  <a:pt x="25725" y="182915"/>
+                  <a:pt x="0" y="0"/>
+                </a:cubicBezTo>
+                <a:close/>
+              </a:path>
+            </a:pathLst>
+          </a:custGeom>
+          <a:solidFill>
+            <a:srgbClr val="7030A0"/>
+          </a:solidFill>
+          <a:ln>
+            <a:solidFill>
+              <a:srgbClr val="7030A0"/>
+            </a:solidFill>
+            <a:extLst>
+              <a:ext uri="{C807C97D-BFC1-408E-A445-0C87EB9F89A2}">
+                <ask:lineSketchStyleProps xmlns:ask="http://schemas.microsoft.com/office/drawing/2018/sketchyshapes" sd="1219033472">
+                  <a:prstGeom prst="rect">
+                    <a:avLst/>
+                  </a:prstGeom>
+                  <ask:type>
+                    <ask:lineSketchScribble/>
+                  </ask:type>
+                </ask:lineSketchStyleProps>
+              </a:ext>
+            </a:extLst>
+          </a:ln>
+        </p:spPr>
+        <p:style>
+          <a:lnRef idx="2">
+            <a:schemeClr val="accent1">
+              <a:shade val="15000"/>
+            </a:schemeClr>
+          </a:lnRef>
+          <a:fillRef idx="1">
+            <a:schemeClr val="accent1"/>
+          </a:fillRef>
+          <a:effectRef idx="0">
+            <a:schemeClr val="accent1"/>
+          </a:effectRef>
+          <a:fontRef idx="minor">
+            <a:schemeClr val="lt1"/>
+          </a:fontRef>
+        </p:style>
+        <p:txBody>
+          <a:bodyPr rtlCol="0" anchor="ctr"/>
+          <a:lstStyle/>
+          <a:p>
+            <a:pPr algn="ctr"/>
+            <a:endParaRPr lang="en-US">
+              <a:latin typeface="Times New Roman" panose="02020603050405020304" pitchFamily="18" charset="0"/>
+              <a:cs typeface="Times New Roman" panose="02020603050405020304" pitchFamily="18" charset="0"/>
+            </a:endParaRPr>
           </a:p>
         </p:txBody>
       </p:sp>
@@ -5402,10 +5668,10 @@
       </p:sp>
       <p:sp>
         <p:nvSpPr>
-          <p:cNvPr id="3" name="TextBox 2">
-            <a:extLst>
-              <a:ext uri="{FF2B5EF4-FFF2-40B4-BE49-F238E27FC236}">
-                <a16:creationId xmlns:a16="http://schemas.microsoft.com/office/drawing/2014/main" id="{6DBA5A63-7809-A400-5990-42AFFFC24736}"/>
+          <p:cNvPr id="4" name="TextBox 3">
+            <a:extLst>
+              <a:ext uri="{FF2B5EF4-FFF2-40B4-BE49-F238E27FC236}">
+                <a16:creationId xmlns:a16="http://schemas.microsoft.com/office/drawing/2014/main" id="{FE5AE08A-01D4-5FE3-CB15-2C26BB4F3C9B}"/>
               </a:ext>
             </a:extLst>
           </p:cNvPr>
@@ -5414,7 +5680,7 @@
         </p:nvSpPr>
         <p:spPr>
           <a:xfrm>
-            <a:off x="2556918" y="2652580"/>
+            <a:off x="6615108" y="2220094"/>
             <a:ext cx="2830628" cy="1015663"/>
           </a:xfrm>
           <a:prstGeom prst="rect">
@@ -5436,7 +5702,7 @@
                 <a:latin typeface="Times New Roman" panose="02020603050405020304" pitchFamily="18" charset="0"/>
                 <a:cs typeface="Times New Roman" panose="02020603050405020304" pitchFamily="18" charset="0"/>
               </a:rPr>
-              <a:t>Outbound</a:t>
+              <a:t>Inbound</a:t>
             </a:r>
             <a:br>
               <a:rPr lang="en-US" sz="3000" dirty="0">
@@ -5462,10 +5728,10 @@
       </p:sp>
       <p:sp>
         <p:nvSpPr>
-          <p:cNvPr id="4" name="TextBox 3">
-            <a:extLst>
-              <a:ext uri="{FF2B5EF4-FFF2-40B4-BE49-F238E27FC236}">
-                <a16:creationId xmlns:a16="http://schemas.microsoft.com/office/drawing/2014/main" id="{FE5AE08A-01D4-5FE3-CB15-2C26BB4F3C9B}"/>
+          <p:cNvPr id="6" name="TextBox 5">
+            <a:extLst>
+              <a:ext uri="{FF2B5EF4-FFF2-40B4-BE49-F238E27FC236}">
+                <a16:creationId xmlns:a16="http://schemas.microsoft.com/office/drawing/2014/main" id="{6F3D0DA5-E2E5-E515-AA17-165F9624A7FA}"/>
               </a:ext>
             </a:extLst>
           </p:cNvPr>
@@ -5474,8 +5740,8 @@
         </p:nvSpPr>
         <p:spPr>
           <a:xfrm>
-            <a:off x="7047594" y="2652580"/>
-            <a:ext cx="2830628" cy="1015663"/>
+            <a:off x="6615107" y="3218936"/>
+            <a:ext cx="2587489" cy="1477328"/>
           </a:xfrm>
           <a:prstGeom prst="rect">
             <a:avLst/>
@@ -5488,6 +5754,135 @@
           </a:bodyPr>
           <a:lstStyle/>
           <a:p>
+            <a:r>
+              <a:rPr lang="en-US" sz="3000" dirty="0">
+                <a:latin typeface="Times New Roman" panose="02020603050405020304" pitchFamily="18" charset="0"/>
+                <a:cs typeface="Times New Roman" panose="02020603050405020304" pitchFamily="18" charset="0"/>
+              </a:rPr>
+              <a:t>Unicasts </a:t>
+            </a:r>
+            <a:br>
+              <a:rPr lang="en-US" sz="3000" dirty="0">
+                <a:latin typeface="Times New Roman" panose="02020603050405020304" pitchFamily="18" charset="0"/>
+                <a:cs typeface="Times New Roman" panose="02020603050405020304" pitchFamily="18" charset="0"/>
+              </a:rPr>
+            </a:br>
+            <a:r>
+              <a:rPr lang="en-US" sz="3000" dirty="0">
+                <a:latin typeface="Times New Roman" panose="02020603050405020304" pitchFamily="18" charset="0"/>
+                <a:cs typeface="Times New Roman" panose="02020603050405020304" pitchFamily="18" charset="0"/>
+              </a:rPr>
+              <a:t>from machines to server</a:t>
+            </a:r>
+          </a:p>
+        </p:txBody>
+      </p:sp>
+      <p:sp>
+        <p:nvSpPr>
+          <p:cNvPr id="8" name="TextBox 7">
+            <a:extLst>
+              <a:ext uri="{FF2B5EF4-FFF2-40B4-BE49-F238E27FC236}">
+                <a16:creationId xmlns:a16="http://schemas.microsoft.com/office/drawing/2014/main" id="{07F37804-12AF-C717-C3B7-E1C04B1DBC2B}"/>
+              </a:ext>
+            </a:extLst>
+          </p:cNvPr>
+          <p:cNvSpPr txBox="1"/>
+          <p:nvPr/>
+        </p:nvSpPr>
+        <p:spPr>
+          <a:xfrm>
+            <a:off x="558943" y="4755944"/>
+            <a:ext cx="4247536" cy="1015663"/>
+          </a:xfrm>
+          <a:prstGeom prst="rect">
+            <a:avLst/>
+          </a:prstGeom>
+          <a:noFill/>
+        </p:spPr>
+        <p:txBody>
+          <a:bodyPr wrap="square" rtlCol="0">
+            <a:spAutoFit/>
+          </a:bodyPr>
+          <a:lstStyle/>
+          <a:p>
+            <a:pPr algn="r"/>
+            <a:r>
+              <a:rPr lang="en-US" sz="3000" dirty="0">
+                <a:latin typeface="Times New Roman" panose="02020603050405020304" pitchFamily="18" charset="0"/>
+                <a:cs typeface="Times New Roman" panose="02020603050405020304" pitchFamily="18" charset="0"/>
+              </a:rPr>
+              <a:t>e.g., market data multicast in financial exchanges</a:t>
+            </a:r>
+          </a:p>
+        </p:txBody>
+      </p:sp>
+      <p:sp>
+        <p:nvSpPr>
+          <p:cNvPr id="9" name="TextBox 8">
+            <a:extLst>
+              <a:ext uri="{FF2B5EF4-FFF2-40B4-BE49-F238E27FC236}">
+                <a16:creationId xmlns:a16="http://schemas.microsoft.com/office/drawing/2014/main" id="{33BF1DE6-DDD3-1E07-36B2-A6227D23FF9E}"/>
+              </a:ext>
+            </a:extLst>
+          </p:cNvPr>
+          <p:cNvSpPr txBox="1"/>
+          <p:nvPr/>
+        </p:nvSpPr>
+        <p:spPr>
+          <a:xfrm>
+            <a:off x="6567336" y="4755944"/>
+            <a:ext cx="5065721" cy="1015663"/>
+          </a:xfrm>
+          <a:prstGeom prst="rect">
+            <a:avLst/>
+          </a:prstGeom>
+          <a:noFill/>
+        </p:spPr>
+        <p:txBody>
+          <a:bodyPr wrap="square" rtlCol="0">
+            <a:spAutoFit/>
+          </a:bodyPr>
+          <a:lstStyle/>
+          <a:p>
+            <a:r>
+              <a:rPr lang="en-US" sz="3000" dirty="0">
+                <a:latin typeface="Times New Roman" panose="02020603050405020304" pitchFamily="18" charset="0"/>
+                <a:cs typeface="Times New Roman" panose="02020603050405020304" pitchFamily="18" charset="0"/>
+              </a:rPr>
+              <a:t>e.g., traders submitting orders to a financial exchange server</a:t>
+            </a:r>
+          </a:p>
+        </p:txBody>
+      </p:sp>
+      <p:sp>
+        <p:nvSpPr>
+          <p:cNvPr id="10" name="TextBox 9">
+            <a:extLst>
+              <a:ext uri="{FF2B5EF4-FFF2-40B4-BE49-F238E27FC236}">
+                <a16:creationId xmlns:a16="http://schemas.microsoft.com/office/drawing/2014/main" id="{CEF57110-9383-C7A7-E2DF-8D0B3E533F7F}"/>
+              </a:ext>
+            </a:extLst>
+          </p:cNvPr>
+          <p:cNvSpPr txBox="1"/>
+          <p:nvPr/>
+        </p:nvSpPr>
+        <p:spPr>
+          <a:xfrm>
+            <a:off x="2124432" y="2220094"/>
+            <a:ext cx="2830628" cy="1015663"/>
+          </a:xfrm>
+          <a:prstGeom prst="rect">
+            <a:avLst/>
+          </a:prstGeom>
+          <a:noFill/>
+        </p:spPr>
+        <p:txBody>
+          <a:bodyPr wrap="square" rtlCol="0">
+            <a:spAutoFit/>
+          </a:bodyPr>
+          <a:lstStyle/>
+          <a:p>
+            <a:pPr algn="r"/>
             <a:r>
               <a:rPr lang="en-US" sz="3000" dirty="0">
                 <a:solidFill>
@@ -5496,7 +5891,7 @@
                 <a:latin typeface="Times New Roman" panose="02020603050405020304" pitchFamily="18" charset="0"/>
                 <a:cs typeface="Times New Roman" panose="02020603050405020304" pitchFamily="18" charset="0"/>
               </a:rPr>
-              <a:t>Inbound</a:t>
+              <a:t>Outbound</a:t>
             </a:r>
             <a:br>
               <a:rPr lang="en-US" sz="3000" dirty="0">
@@ -5522,10 +5917,10 @@
       </p:sp>
       <p:sp>
         <p:nvSpPr>
-          <p:cNvPr id="5" name="TextBox 4">
-            <a:extLst>
-              <a:ext uri="{FF2B5EF4-FFF2-40B4-BE49-F238E27FC236}">
-                <a16:creationId xmlns:a16="http://schemas.microsoft.com/office/drawing/2014/main" id="{662C09C8-53FF-8854-3BBA-68BAA3557470}"/>
+          <p:cNvPr id="11" name="TextBox 10">
+            <a:extLst>
+              <a:ext uri="{FF2B5EF4-FFF2-40B4-BE49-F238E27FC236}">
+                <a16:creationId xmlns:a16="http://schemas.microsoft.com/office/drawing/2014/main" id="{02675D14-DB97-4FA8-755C-10F1F7DC3754}"/>
               </a:ext>
             </a:extLst>
           </p:cNvPr>
@@ -5534,7 +5929,7 @@
         </p:nvSpPr>
         <p:spPr>
           <a:xfrm>
-            <a:off x="2556918" y="3651423"/>
+            <a:off x="2622846" y="3235757"/>
             <a:ext cx="2249561" cy="1477328"/>
           </a:xfrm>
           <a:prstGeom prst="rect">
@@ -5548,6 +5943,7 @@
           </a:bodyPr>
           <a:lstStyle/>
           <a:p>
+            <a:pPr algn="r"/>
             <a:r>
               <a:rPr lang="en-US" sz="3000" dirty="0">
                 <a:latin typeface="Times New Roman" panose="02020603050405020304" pitchFamily="18" charset="0"/>
@@ -5560,128 +5956,265 @@
       </p:sp>
       <p:sp>
         <p:nvSpPr>
-          <p:cNvPr id="6" name="TextBox 5">
-            <a:extLst>
-              <a:ext uri="{FF2B5EF4-FFF2-40B4-BE49-F238E27FC236}">
-                <a16:creationId xmlns:a16="http://schemas.microsoft.com/office/drawing/2014/main" id="{6F3D0DA5-E2E5-E515-AA17-165F9624A7FA}"/>
-              </a:ext>
-            </a:extLst>
-          </p:cNvPr>
-          <p:cNvSpPr txBox="1"/>
-          <p:nvPr/>
-        </p:nvSpPr>
-        <p:spPr>
-          <a:xfrm>
-            <a:off x="7047593" y="3651422"/>
-            <a:ext cx="2587489" cy="1477328"/>
-          </a:xfrm>
-          <a:prstGeom prst="rect">
-            <a:avLst/>
-          </a:prstGeom>
-          <a:noFill/>
-        </p:spPr>
-        <p:txBody>
-          <a:bodyPr wrap="square" rtlCol="0">
-            <a:spAutoFit/>
-          </a:bodyPr>
-          <a:lstStyle/>
-          <a:p>
-            <a:r>
-              <a:rPr lang="en-US" sz="3000" dirty="0">
-                <a:latin typeface="Times New Roman" panose="02020603050405020304" pitchFamily="18" charset="0"/>
-                <a:cs typeface="Times New Roman" panose="02020603050405020304" pitchFamily="18" charset="0"/>
-              </a:rPr>
-              <a:t>Unicasts </a:t>
-            </a:r>
-            <a:br>
-              <a:rPr lang="en-US" sz="3000" dirty="0">
-                <a:latin typeface="Times New Roman" panose="02020603050405020304" pitchFamily="18" charset="0"/>
-                <a:cs typeface="Times New Roman" panose="02020603050405020304" pitchFamily="18" charset="0"/>
-              </a:rPr>
-            </a:br>
-            <a:r>
-              <a:rPr lang="en-US" sz="3000" dirty="0">
-                <a:latin typeface="Times New Roman" panose="02020603050405020304" pitchFamily="18" charset="0"/>
-                <a:cs typeface="Times New Roman" panose="02020603050405020304" pitchFamily="18" charset="0"/>
-              </a:rPr>
-              <a:t>from machines to server</a:t>
-            </a:r>
-          </a:p>
-        </p:txBody>
-      </p:sp>
-      <p:sp>
-        <p:nvSpPr>
-          <p:cNvPr id="8" name="TextBox 7">
-            <a:extLst>
-              <a:ext uri="{FF2B5EF4-FFF2-40B4-BE49-F238E27FC236}">
-                <a16:creationId xmlns:a16="http://schemas.microsoft.com/office/drawing/2014/main" id="{07F37804-12AF-C717-C3B7-E1C04B1DBC2B}"/>
-              </a:ext>
-            </a:extLst>
-          </p:cNvPr>
-          <p:cNvSpPr txBox="1"/>
-          <p:nvPr/>
-        </p:nvSpPr>
-        <p:spPr>
-          <a:xfrm>
-            <a:off x="1196999" y="5294770"/>
-            <a:ext cx="4247536" cy="1015663"/>
-          </a:xfrm>
-          <a:prstGeom prst="rect">
-            <a:avLst/>
-          </a:prstGeom>
-          <a:noFill/>
-        </p:spPr>
-        <p:txBody>
-          <a:bodyPr wrap="square" rtlCol="0">
-            <a:spAutoFit/>
-          </a:bodyPr>
-          <a:lstStyle/>
-          <a:p>
-            <a:r>
-              <a:rPr lang="en-US" sz="3000" dirty="0">
-                <a:latin typeface="Times New Roman" panose="02020603050405020304" pitchFamily="18" charset="0"/>
-                <a:cs typeface="Times New Roman" panose="02020603050405020304" pitchFamily="18" charset="0"/>
-              </a:rPr>
-              <a:t>e.g., market data multicast in financial exchanges</a:t>
-            </a:r>
-          </a:p>
-        </p:txBody>
-      </p:sp>
-      <p:sp>
-        <p:nvSpPr>
-          <p:cNvPr id="9" name="TextBox 8">
-            <a:extLst>
-              <a:ext uri="{FF2B5EF4-FFF2-40B4-BE49-F238E27FC236}">
-                <a16:creationId xmlns:a16="http://schemas.microsoft.com/office/drawing/2014/main" id="{33BF1DE6-DDD3-1E07-36B2-A6227D23FF9E}"/>
-              </a:ext>
-            </a:extLst>
-          </p:cNvPr>
-          <p:cNvSpPr txBox="1"/>
-          <p:nvPr/>
-        </p:nvSpPr>
-        <p:spPr>
-          <a:xfrm>
-            <a:off x="6969759" y="5294769"/>
-            <a:ext cx="5065721" cy="1015663"/>
-          </a:xfrm>
-          <a:prstGeom prst="rect">
-            <a:avLst/>
-          </a:prstGeom>
-          <a:noFill/>
-        </p:spPr>
-        <p:txBody>
-          <a:bodyPr wrap="square" rtlCol="0">
-            <a:spAutoFit/>
-          </a:bodyPr>
-          <a:lstStyle/>
-          <a:p>
-            <a:r>
-              <a:rPr lang="en-US" sz="3000" dirty="0">
-                <a:latin typeface="Times New Roman" panose="02020603050405020304" pitchFamily="18" charset="0"/>
-                <a:cs typeface="Times New Roman" panose="02020603050405020304" pitchFamily="18" charset="0"/>
-              </a:rPr>
-              <a:t>e.g., traders submitting orders to a financial exchange server</a:t>
-            </a:r>
+          <p:cNvPr id="13" name="Rectangle 12">
+            <a:extLst>
+              <a:ext uri="{FF2B5EF4-FFF2-40B4-BE49-F238E27FC236}">
+                <a16:creationId xmlns:a16="http://schemas.microsoft.com/office/drawing/2014/main" id="{9B93914B-4D43-3516-76BA-6B9D454F0297}"/>
+              </a:ext>
+            </a:extLst>
+          </p:cNvPr>
+          <p:cNvSpPr/>
+          <p:nvPr/>
+        </p:nvSpPr>
+        <p:spPr>
+          <a:xfrm>
+            <a:off x="5733022" y="2774092"/>
+            <a:ext cx="45719" cy="2492991"/>
+          </a:xfrm>
+          <a:custGeom>
+            <a:avLst/>
+            <a:gdLst>
+              <a:gd name="csX0" fmla="*/ 0 w 45719"/>
+              <a:gd name="csY0" fmla="*/ 0 h 2492991"/>
+              <a:gd name="csX1" fmla="*/ 45719 w 45719"/>
+              <a:gd name="csY1" fmla="*/ 0 h 2492991"/>
+              <a:gd name="csX2" fmla="*/ 45719 w 45719"/>
+              <a:gd name="csY2" fmla="*/ 498598 h 2492991"/>
+              <a:gd name="csX3" fmla="*/ 45719 w 45719"/>
+              <a:gd name="csY3" fmla="*/ 1047056 h 2492991"/>
+              <a:gd name="csX4" fmla="*/ 45719 w 45719"/>
+              <a:gd name="csY4" fmla="*/ 1545654 h 2492991"/>
+              <a:gd name="csX5" fmla="*/ 45719 w 45719"/>
+              <a:gd name="csY5" fmla="*/ 1969463 h 2492991"/>
+              <a:gd name="csX6" fmla="*/ 45719 w 45719"/>
+              <a:gd name="csY6" fmla="*/ 2492991 h 2492991"/>
+              <a:gd name="csX7" fmla="*/ 0 w 45719"/>
+              <a:gd name="csY7" fmla="*/ 2492991 h 2492991"/>
+              <a:gd name="csX8" fmla="*/ 0 w 45719"/>
+              <a:gd name="csY8" fmla="*/ 1944533 h 2492991"/>
+              <a:gd name="csX9" fmla="*/ 0 w 45719"/>
+              <a:gd name="csY9" fmla="*/ 1421005 h 2492991"/>
+              <a:gd name="csX10" fmla="*/ 0 w 45719"/>
+              <a:gd name="csY10" fmla="*/ 922407 h 2492991"/>
+              <a:gd name="csX11" fmla="*/ 0 w 45719"/>
+              <a:gd name="csY11" fmla="*/ 0 h 2492991"/>
+            </a:gdLst>
+            <a:ahLst/>
+            <a:cxnLst>
+              <a:cxn ang="0">
+                <a:pos x="csX0" y="csY0"/>
+              </a:cxn>
+              <a:cxn ang="0">
+                <a:pos x="csX1" y="csY1"/>
+              </a:cxn>
+              <a:cxn ang="0">
+                <a:pos x="csX2" y="csY2"/>
+              </a:cxn>
+              <a:cxn ang="0">
+                <a:pos x="csX3" y="csY3"/>
+              </a:cxn>
+              <a:cxn ang="0">
+                <a:pos x="csX4" y="csY4"/>
+              </a:cxn>
+              <a:cxn ang="0">
+                <a:pos x="csX5" y="csY5"/>
+              </a:cxn>
+              <a:cxn ang="0">
+                <a:pos x="csX6" y="csY6"/>
+              </a:cxn>
+              <a:cxn ang="0">
+                <a:pos x="csX7" y="csY7"/>
+              </a:cxn>
+              <a:cxn ang="0">
+                <a:pos x="csX8" y="csY8"/>
+              </a:cxn>
+              <a:cxn ang="0">
+                <a:pos x="csX9" y="csY9"/>
+              </a:cxn>
+              <a:cxn ang="0">
+                <a:pos x="csX10" y="csY10"/>
+              </a:cxn>
+              <a:cxn ang="0">
+                <a:pos x="csX11" y="csY11"/>
+              </a:cxn>
+            </a:cxnLst>
+            <a:rect l="l" t="t" r="r" b="b"/>
+            <a:pathLst>
+              <a:path w="45719" h="2492991" fill="none" extrusionOk="0">
+                <a:moveTo>
+                  <a:pt x="0" y="0"/>
+                </a:moveTo>
+                <a:cubicBezTo>
+                  <a:pt x="15466" y="-3108"/>
+                  <a:pt x="29505" y="2787"/>
+                  <a:pt x="45719" y="0"/>
+                </a:cubicBezTo>
+                <a:cubicBezTo>
+                  <a:pt x="96714" y="244462"/>
+                  <a:pt x="38492" y="292531"/>
+                  <a:pt x="45719" y="498598"/>
+                </a:cubicBezTo>
+                <a:cubicBezTo>
+                  <a:pt x="52946" y="704665"/>
+                  <a:pt x="41215" y="773940"/>
+                  <a:pt x="45719" y="1047056"/>
+                </a:cubicBezTo>
+                <a:cubicBezTo>
+                  <a:pt x="50223" y="1320172"/>
+                  <a:pt x="20442" y="1409127"/>
+                  <a:pt x="45719" y="1545654"/>
+                </a:cubicBezTo>
+                <a:cubicBezTo>
+                  <a:pt x="70996" y="1682181"/>
+                  <a:pt x="37286" y="1837495"/>
+                  <a:pt x="45719" y="1969463"/>
+                </a:cubicBezTo>
+                <a:cubicBezTo>
+                  <a:pt x="54152" y="2101431"/>
+                  <a:pt x="20701" y="2253374"/>
+                  <a:pt x="45719" y="2492991"/>
+                </a:cubicBezTo>
+                <a:cubicBezTo>
+                  <a:pt x="34208" y="2496004"/>
+                  <a:pt x="9588" y="2489496"/>
+                  <a:pt x="0" y="2492991"/>
+                </a:cubicBezTo>
+                <a:cubicBezTo>
+                  <a:pt x="-9781" y="2257546"/>
+                  <a:pt x="17963" y="2141047"/>
+                  <a:pt x="0" y="1944533"/>
+                </a:cubicBezTo>
+                <a:cubicBezTo>
+                  <a:pt x="-17963" y="1748019"/>
+                  <a:pt x="28336" y="1642462"/>
+                  <a:pt x="0" y="1421005"/>
+                </a:cubicBezTo>
+                <a:cubicBezTo>
+                  <a:pt x="-28336" y="1199548"/>
+                  <a:pt x="13584" y="1089980"/>
+                  <a:pt x="0" y="922407"/>
+                </a:cubicBezTo>
+                <a:cubicBezTo>
+                  <a:pt x="-13584" y="754834"/>
+                  <a:pt x="77438" y="239728"/>
+                  <a:pt x="0" y="0"/>
+                </a:cubicBezTo>
+                <a:close/>
+              </a:path>
+              <a:path w="45719" h="2492991" stroke="0" extrusionOk="0">
+                <a:moveTo>
+                  <a:pt x="0" y="0"/>
+                </a:moveTo>
+                <a:cubicBezTo>
+                  <a:pt x="18173" y="-1477"/>
+                  <a:pt x="31455" y="3772"/>
+                  <a:pt x="45719" y="0"/>
+                </a:cubicBezTo>
+                <a:cubicBezTo>
+                  <a:pt x="49078" y="113210"/>
+                  <a:pt x="23101" y="288473"/>
+                  <a:pt x="45719" y="423808"/>
+                </a:cubicBezTo>
+                <a:cubicBezTo>
+                  <a:pt x="68337" y="559143"/>
+                  <a:pt x="-15560" y="770450"/>
+                  <a:pt x="45719" y="972266"/>
+                </a:cubicBezTo>
+                <a:cubicBezTo>
+                  <a:pt x="106998" y="1174082"/>
+                  <a:pt x="-1609" y="1235521"/>
+                  <a:pt x="45719" y="1470865"/>
+                </a:cubicBezTo>
+                <a:cubicBezTo>
+                  <a:pt x="93047" y="1706209"/>
+                  <a:pt x="30494" y="1816253"/>
+                  <a:pt x="45719" y="1919603"/>
+                </a:cubicBezTo>
+                <a:cubicBezTo>
+                  <a:pt x="60944" y="2022953"/>
+                  <a:pt x="28474" y="2341608"/>
+                  <a:pt x="45719" y="2492991"/>
+                </a:cubicBezTo>
+                <a:cubicBezTo>
+                  <a:pt x="22941" y="2494258"/>
+                  <a:pt x="12902" y="2490132"/>
+                  <a:pt x="0" y="2492991"/>
+                </a:cubicBezTo>
+                <a:cubicBezTo>
+                  <a:pt x="-59460" y="2250702"/>
+                  <a:pt x="24665" y="2128448"/>
+                  <a:pt x="0" y="1944533"/>
+                </a:cubicBezTo>
+                <a:cubicBezTo>
+                  <a:pt x="-24665" y="1760618"/>
+                  <a:pt x="21622" y="1582387"/>
+                  <a:pt x="0" y="1396075"/>
+                </a:cubicBezTo>
+                <a:cubicBezTo>
+                  <a:pt x="-21622" y="1209763"/>
+                  <a:pt x="53927" y="1082433"/>
+                  <a:pt x="0" y="922407"/>
+                </a:cubicBezTo>
+                <a:cubicBezTo>
+                  <a:pt x="-53927" y="762381"/>
+                  <a:pt x="37230" y="594554"/>
+                  <a:pt x="0" y="448738"/>
+                </a:cubicBezTo>
+                <a:cubicBezTo>
+                  <a:pt x="-37230" y="302922"/>
+                  <a:pt x="25725" y="182915"/>
+                  <a:pt x="0" y="0"/>
+                </a:cubicBezTo>
+                <a:close/>
+              </a:path>
+            </a:pathLst>
+          </a:custGeom>
+          <a:solidFill>
+            <a:srgbClr val="7030A0"/>
+          </a:solidFill>
+          <a:ln>
+            <a:solidFill>
+              <a:srgbClr val="7030A0"/>
+            </a:solidFill>
+            <a:extLst>
+              <a:ext uri="{C807C97D-BFC1-408E-A445-0C87EB9F89A2}">
+                <ask:lineSketchStyleProps xmlns:ask="http://schemas.microsoft.com/office/drawing/2018/sketchyshapes" sd="1219033472">
+                  <a:prstGeom prst="rect">
+                    <a:avLst/>
+                  </a:prstGeom>
+                  <ask:type>
+                    <ask:lineSketchScribble/>
+                  </ask:type>
+                </ask:lineSketchStyleProps>
+              </a:ext>
+            </a:extLst>
+          </a:ln>
+        </p:spPr>
+        <p:style>
+          <a:lnRef idx="2">
+            <a:schemeClr val="accent1">
+              <a:shade val="15000"/>
+            </a:schemeClr>
+          </a:lnRef>
+          <a:fillRef idx="1">
+            <a:schemeClr val="accent1"/>
+          </a:fillRef>
+          <a:effectRef idx="0">
+            <a:schemeClr val="accent1"/>
+          </a:effectRef>
+          <a:fontRef idx="minor">
+            <a:schemeClr val="lt1"/>
+          </a:fontRef>
+        </p:style>
+        <p:txBody>
+          <a:bodyPr rtlCol="0" anchor="ctr"/>
+          <a:lstStyle/>
+          <a:p>
+            <a:pPr algn="ctr"/>
+            <a:endParaRPr lang="en-US">
+              <a:latin typeface="Times New Roman" panose="02020603050405020304" pitchFamily="18" charset="0"/>
+              <a:cs typeface="Times New Roman" panose="02020603050405020304" pitchFamily="18" charset="0"/>
+            </a:endParaRPr>
           </a:p>
         </p:txBody>
       </p:sp>

--- a/thesis-latency-fairness.pptx
+++ b/thesis-latency-fairness.pptx
@@ -729,10 +729,7 @@
           <a:bodyPr/>
           <a:lstStyle/>
           <a:p>
-            <a:r>
-              <a:rPr lang="en-US" dirty="0"/>
-              <a:t>Not having latency fairness can lead to unwanted unfair competition, users may not come</a:t>
-            </a:r>
+            <a:endParaRPr lang="en-US" dirty="0"/>
           </a:p>
         </p:txBody>
       </p:sp>
@@ -840,10 +837,7 @@
           <a:bodyPr/>
           <a:lstStyle/>
           <a:p>
-            <a:r>
-              <a:rPr lang="en-US" dirty="0"/>
-              <a:t>Not having latency fairness can lead to unwanted unfair competition, users may not come</a:t>
-            </a:r>
+            <a:endParaRPr lang="en-US" dirty="0"/>
           </a:p>
         </p:txBody>
       </p:sp>
@@ -951,10 +945,7 @@
           <a:bodyPr/>
           <a:lstStyle/>
           <a:p>
-            <a:r>
-              <a:rPr lang="en-US" dirty="0"/>
-              <a:t>Not having latency fairness can lead to unwanted unfair competition, users may not come</a:t>
-            </a:r>
+            <a:endParaRPr lang="en-US" dirty="0"/>
           </a:p>
         </p:txBody>
       </p:sp>

--- a/thesis-latency-fairness.pptx
+++ b/thesis-latency-fairness.pptx
@@ -5,7 +5,7 @@
     <p:sldMasterId id="2147483648" r:id="rId1"/>
   </p:sldMasterIdLst>
   <p:notesMasterIdLst>
-    <p:notesMasterId r:id="rId13"/>
+    <p:notesMasterId r:id="rId19"/>
   </p:notesMasterIdLst>
   <p:sldIdLst>
     <p:sldId id="256" r:id="rId2"/>
@@ -19,6 +19,12 @@
     <p:sldId id="266" r:id="rId10"/>
     <p:sldId id="267" r:id="rId11"/>
     <p:sldId id="268" r:id="rId12"/>
+    <p:sldId id="269" r:id="rId13"/>
+    <p:sldId id="270" r:id="rId14"/>
+    <p:sldId id="271" r:id="rId15"/>
+    <p:sldId id="272" r:id="rId16"/>
+    <p:sldId id="273" r:id="rId17"/>
+    <p:sldId id="274" r:id="rId18"/>
   </p:sldIdLst>
   <p:sldSz cx="12192000" cy="6858000"/>
   <p:notesSz cx="6858000" cy="9144000"/>
@@ -556,6 +562,222 @@
 </p:notes>
 </file>
 
+<file path=ppt/notesSlides/notesSlide10.xml><?xml version="1.0" encoding="utf-8"?>
+<p:notes xmlns:a="http://schemas.openxmlformats.org/drawingml/2006/main" xmlns:r="http://schemas.openxmlformats.org/officeDocument/2006/relationships" xmlns:p="http://schemas.openxmlformats.org/presentationml/2006/main">
+  <p:cSld>
+    <p:spTree>
+      <p:nvGrpSpPr>
+        <p:cNvPr id="1" name="">
+          <a:extLst>
+            <a:ext uri="{FF2B5EF4-FFF2-40B4-BE49-F238E27FC236}">
+              <a16:creationId xmlns:a16="http://schemas.microsoft.com/office/drawing/2014/main" id="{97D0D004-F083-99D8-B51B-26F7BB562959}"/>
+            </a:ext>
+          </a:extLst>
+        </p:cNvPr>
+        <p:cNvGrpSpPr/>
+        <p:nvPr/>
+      </p:nvGrpSpPr>
+      <p:grpSpPr>
+        <a:xfrm>
+          <a:off x="0" y="0"/>
+          <a:ext cx="0" cy="0"/>
+          <a:chOff x="0" y="0"/>
+          <a:chExt cx="0" cy="0"/>
+        </a:xfrm>
+      </p:grpSpPr>
+      <p:sp>
+        <p:nvSpPr>
+          <p:cNvPr id="2" name="Slide Image Placeholder 1">
+            <a:extLst>
+              <a:ext uri="{FF2B5EF4-FFF2-40B4-BE49-F238E27FC236}">
+                <a16:creationId xmlns:a16="http://schemas.microsoft.com/office/drawing/2014/main" id="{B2793473-C5E7-E48E-6384-B5787AE669A5}"/>
+              </a:ext>
+            </a:extLst>
+          </p:cNvPr>
+          <p:cNvSpPr>
+            <a:spLocks noGrp="1" noRot="1" noChangeAspect="1"/>
+          </p:cNvSpPr>
+          <p:nvPr>
+            <p:ph type="sldImg"/>
+          </p:nvPr>
+        </p:nvSpPr>
+        <p:spPr/>
+      </p:sp>
+      <p:sp>
+        <p:nvSpPr>
+          <p:cNvPr id="3" name="Notes Placeholder 2">
+            <a:extLst>
+              <a:ext uri="{FF2B5EF4-FFF2-40B4-BE49-F238E27FC236}">
+                <a16:creationId xmlns:a16="http://schemas.microsoft.com/office/drawing/2014/main" id="{CEC3F9A3-8AFA-6B23-FB16-C842D8772648}"/>
+              </a:ext>
+            </a:extLst>
+          </p:cNvPr>
+          <p:cNvSpPr>
+            <a:spLocks noGrp="1"/>
+          </p:cNvSpPr>
+          <p:nvPr>
+            <p:ph type="body" idx="1"/>
+          </p:nvPr>
+        </p:nvSpPr>
+        <p:spPr/>
+        <p:txBody>
+          <a:bodyPr/>
+          <a:lstStyle/>
+          <a:p>
+            <a:endParaRPr lang="en-US" dirty="0"/>
+          </a:p>
+        </p:txBody>
+      </p:sp>
+      <p:sp>
+        <p:nvSpPr>
+          <p:cNvPr id="4" name="Slide Number Placeholder 3">
+            <a:extLst>
+              <a:ext uri="{FF2B5EF4-FFF2-40B4-BE49-F238E27FC236}">
+                <a16:creationId xmlns:a16="http://schemas.microsoft.com/office/drawing/2014/main" id="{E4953653-B344-DA14-85BC-D91CE5F14669}"/>
+              </a:ext>
+            </a:extLst>
+          </p:cNvPr>
+          <p:cNvSpPr>
+            <a:spLocks noGrp="1"/>
+          </p:cNvSpPr>
+          <p:nvPr>
+            <p:ph type="sldNum" sz="quarter" idx="5"/>
+          </p:nvPr>
+        </p:nvSpPr>
+        <p:spPr/>
+        <p:txBody>
+          <a:bodyPr/>
+          <a:lstStyle/>
+          <a:p>
+            <a:fld id="{5AD2936D-68DF-C34D-84E6-1FDAB4C19BCF}" type="slidenum">
+              <a:rPr lang="en-US" smtClean="0"/>
+              <a:t>16</a:t>
+            </a:fld>
+            <a:endParaRPr lang="en-US"/>
+          </a:p>
+        </p:txBody>
+      </p:sp>
+    </p:spTree>
+    <p:extLst>
+      <p:ext uri="{BB962C8B-B14F-4D97-AF65-F5344CB8AC3E}">
+        <p14:creationId xmlns:p14="http://schemas.microsoft.com/office/powerpoint/2010/main" val="2607917773"/>
+      </p:ext>
+    </p:extLst>
+  </p:cSld>
+  <p:clrMapOvr>
+    <a:masterClrMapping/>
+  </p:clrMapOvr>
+</p:notes>
+</file>
+
+<file path=ppt/notesSlides/notesSlide11.xml><?xml version="1.0" encoding="utf-8"?>
+<p:notes xmlns:a="http://schemas.openxmlformats.org/drawingml/2006/main" xmlns:r="http://schemas.openxmlformats.org/officeDocument/2006/relationships" xmlns:p="http://schemas.openxmlformats.org/presentationml/2006/main">
+  <p:cSld>
+    <p:spTree>
+      <p:nvGrpSpPr>
+        <p:cNvPr id="1" name="">
+          <a:extLst>
+            <a:ext uri="{FF2B5EF4-FFF2-40B4-BE49-F238E27FC236}">
+              <a16:creationId xmlns:a16="http://schemas.microsoft.com/office/drawing/2014/main" id="{FBB7636F-99F3-0DC5-A507-7E83BFEDBBB0}"/>
+            </a:ext>
+          </a:extLst>
+        </p:cNvPr>
+        <p:cNvGrpSpPr/>
+        <p:nvPr/>
+      </p:nvGrpSpPr>
+      <p:grpSpPr>
+        <a:xfrm>
+          <a:off x="0" y="0"/>
+          <a:ext cx="0" cy="0"/>
+          <a:chOff x="0" y="0"/>
+          <a:chExt cx="0" cy="0"/>
+        </a:xfrm>
+      </p:grpSpPr>
+      <p:sp>
+        <p:nvSpPr>
+          <p:cNvPr id="2" name="Slide Image Placeholder 1">
+            <a:extLst>
+              <a:ext uri="{FF2B5EF4-FFF2-40B4-BE49-F238E27FC236}">
+                <a16:creationId xmlns:a16="http://schemas.microsoft.com/office/drawing/2014/main" id="{9E843FC3-1AEE-D5F6-EFC1-1FB63E1E75A8}"/>
+              </a:ext>
+            </a:extLst>
+          </p:cNvPr>
+          <p:cNvSpPr>
+            <a:spLocks noGrp="1" noRot="1" noChangeAspect="1"/>
+          </p:cNvSpPr>
+          <p:nvPr>
+            <p:ph type="sldImg"/>
+          </p:nvPr>
+        </p:nvSpPr>
+        <p:spPr/>
+      </p:sp>
+      <p:sp>
+        <p:nvSpPr>
+          <p:cNvPr id="3" name="Notes Placeholder 2">
+            <a:extLst>
+              <a:ext uri="{FF2B5EF4-FFF2-40B4-BE49-F238E27FC236}">
+                <a16:creationId xmlns:a16="http://schemas.microsoft.com/office/drawing/2014/main" id="{A5B85305-B62C-CFF8-0023-F74A0F6B59EA}"/>
+              </a:ext>
+            </a:extLst>
+          </p:cNvPr>
+          <p:cNvSpPr>
+            <a:spLocks noGrp="1"/>
+          </p:cNvSpPr>
+          <p:nvPr>
+            <p:ph type="body" idx="1"/>
+          </p:nvPr>
+        </p:nvSpPr>
+        <p:spPr/>
+        <p:txBody>
+          <a:bodyPr/>
+          <a:lstStyle/>
+          <a:p>
+            <a:endParaRPr lang="en-US" dirty="0"/>
+          </a:p>
+        </p:txBody>
+      </p:sp>
+      <p:sp>
+        <p:nvSpPr>
+          <p:cNvPr id="4" name="Slide Number Placeholder 3">
+            <a:extLst>
+              <a:ext uri="{FF2B5EF4-FFF2-40B4-BE49-F238E27FC236}">
+                <a16:creationId xmlns:a16="http://schemas.microsoft.com/office/drawing/2014/main" id="{A58DE75D-A6E9-4B4A-CDC0-25B19525E311}"/>
+              </a:ext>
+            </a:extLst>
+          </p:cNvPr>
+          <p:cNvSpPr>
+            <a:spLocks noGrp="1"/>
+          </p:cNvSpPr>
+          <p:nvPr>
+            <p:ph type="sldNum" sz="quarter" idx="5"/>
+          </p:nvPr>
+        </p:nvSpPr>
+        <p:spPr/>
+        <p:txBody>
+          <a:bodyPr/>
+          <a:lstStyle/>
+          <a:p>
+            <a:fld id="{5AD2936D-68DF-C34D-84E6-1FDAB4C19BCF}" type="slidenum">
+              <a:rPr lang="en-US" smtClean="0"/>
+              <a:t>17</a:t>
+            </a:fld>
+            <a:endParaRPr lang="en-US"/>
+          </a:p>
+        </p:txBody>
+      </p:sp>
+    </p:spTree>
+    <p:extLst>
+      <p:ext uri="{BB962C8B-B14F-4D97-AF65-F5344CB8AC3E}">
+        <p14:creationId xmlns:p14="http://schemas.microsoft.com/office/powerpoint/2010/main" val="1071674080"/>
+      </p:ext>
+    </p:extLst>
+  </p:cSld>
+  <p:clrMapOvr>
+    <a:masterClrMapping/>
+  </p:clrMapOvr>
+</p:notes>
+</file>
+
 <file path=ppt/notesSlides/notesSlide2.xml><?xml version="1.0" encoding="utf-8"?>
 <p:notes xmlns:a="http://schemas.openxmlformats.org/drawingml/2006/main" xmlns:r="http://schemas.openxmlformats.org/officeDocument/2006/relationships" xmlns:p="http://schemas.openxmlformats.org/presentationml/2006/main">
   <p:cSld>
@@ -982,6 +1204,438 @@
     <p:extLst>
       <p:ext uri="{BB962C8B-B14F-4D97-AF65-F5344CB8AC3E}">
         <p14:creationId xmlns:p14="http://schemas.microsoft.com/office/powerpoint/2010/main" val="153028718"/>
+      </p:ext>
+    </p:extLst>
+  </p:cSld>
+  <p:clrMapOvr>
+    <a:masterClrMapping/>
+  </p:clrMapOvr>
+</p:notes>
+</file>
+
+<file path=ppt/notesSlides/notesSlide6.xml><?xml version="1.0" encoding="utf-8"?>
+<p:notes xmlns:a="http://schemas.openxmlformats.org/drawingml/2006/main" xmlns:r="http://schemas.openxmlformats.org/officeDocument/2006/relationships" xmlns:p="http://schemas.openxmlformats.org/presentationml/2006/main">
+  <p:cSld>
+    <p:spTree>
+      <p:nvGrpSpPr>
+        <p:cNvPr id="1" name="">
+          <a:extLst>
+            <a:ext uri="{FF2B5EF4-FFF2-40B4-BE49-F238E27FC236}">
+              <a16:creationId xmlns:a16="http://schemas.microsoft.com/office/drawing/2014/main" id="{256DD48C-35CA-7315-A026-635A7512DDE8}"/>
+            </a:ext>
+          </a:extLst>
+        </p:cNvPr>
+        <p:cNvGrpSpPr/>
+        <p:nvPr/>
+      </p:nvGrpSpPr>
+      <p:grpSpPr>
+        <a:xfrm>
+          <a:off x="0" y="0"/>
+          <a:ext cx="0" cy="0"/>
+          <a:chOff x="0" y="0"/>
+          <a:chExt cx="0" cy="0"/>
+        </a:xfrm>
+      </p:grpSpPr>
+      <p:sp>
+        <p:nvSpPr>
+          <p:cNvPr id="2" name="Slide Image Placeholder 1">
+            <a:extLst>
+              <a:ext uri="{FF2B5EF4-FFF2-40B4-BE49-F238E27FC236}">
+                <a16:creationId xmlns:a16="http://schemas.microsoft.com/office/drawing/2014/main" id="{AFB97AD3-4CFE-1DF7-96D2-E8556A50B634}"/>
+              </a:ext>
+            </a:extLst>
+          </p:cNvPr>
+          <p:cNvSpPr>
+            <a:spLocks noGrp="1" noRot="1" noChangeAspect="1"/>
+          </p:cNvSpPr>
+          <p:nvPr>
+            <p:ph type="sldImg"/>
+          </p:nvPr>
+        </p:nvSpPr>
+        <p:spPr/>
+      </p:sp>
+      <p:sp>
+        <p:nvSpPr>
+          <p:cNvPr id="3" name="Notes Placeholder 2">
+            <a:extLst>
+              <a:ext uri="{FF2B5EF4-FFF2-40B4-BE49-F238E27FC236}">
+                <a16:creationId xmlns:a16="http://schemas.microsoft.com/office/drawing/2014/main" id="{AF037D92-5B95-DFA8-FD38-FE9B904A9256}"/>
+              </a:ext>
+            </a:extLst>
+          </p:cNvPr>
+          <p:cNvSpPr>
+            <a:spLocks noGrp="1"/>
+          </p:cNvSpPr>
+          <p:nvPr>
+            <p:ph type="body" idx="1"/>
+          </p:nvPr>
+        </p:nvSpPr>
+        <p:spPr/>
+        <p:txBody>
+          <a:bodyPr/>
+          <a:lstStyle/>
+          <a:p>
+            <a:endParaRPr lang="en-US" dirty="0"/>
+          </a:p>
+        </p:txBody>
+      </p:sp>
+      <p:sp>
+        <p:nvSpPr>
+          <p:cNvPr id="4" name="Slide Number Placeholder 3">
+            <a:extLst>
+              <a:ext uri="{FF2B5EF4-FFF2-40B4-BE49-F238E27FC236}">
+                <a16:creationId xmlns:a16="http://schemas.microsoft.com/office/drawing/2014/main" id="{42A06B6A-45E8-6852-5DE7-618D9747D8E7}"/>
+              </a:ext>
+            </a:extLst>
+          </p:cNvPr>
+          <p:cNvSpPr>
+            <a:spLocks noGrp="1"/>
+          </p:cNvSpPr>
+          <p:nvPr>
+            <p:ph type="sldNum" sz="quarter" idx="5"/>
+          </p:nvPr>
+        </p:nvSpPr>
+        <p:spPr/>
+        <p:txBody>
+          <a:bodyPr/>
+          <a:lstStyle/>
+          <a:p>
+            <a:fld id="{5AD2936D-68DF-C34D-84E6-1FDAB4C19BCF}" type="slidenum">
+              <a:rPr lang="en-US" smtClean="0"/>
+              <a:t>12</a:t>
+            </a:fld>
+            <a:endParaRPr lang="en-US"/>
+          </a:p>
+        </p:txBody>
+      </p:sp>
+    </p:spTree>
+    <p:extLst>
+      <p:ext uri="{BB962C8B-B14F-4D97-AF65-F5344CB8AC3E}">
+        <p14:creationId xmlns:p14="http://schemas.microsoft.com/office/powerpoint/2010/main" val="1013648668"/>
+      </p:ext>
+    </p:extLst>
+  </p:cSld>
+  <p:clrMapOvr>
+    <a:masterClrMapping/>
+  </p:clrMapOvr>
+</p:notes>
+</file>
+
+<file path=ppt/notesSlides/notesSlide7.xml><?xml version="1.0" encoding="utf-8"?>
+<p:notes xmlns:a="http://schemas.openxmlformats.org/drawingml/2006/main" xmlns:r="http://schemas.openxmlformats.org/officeDocument/2006/relationships" xmlns:p="http://schemas.openxmlformats.org/presentationml/2006/main">
+  <p:cSld>
+    <p:spTree>
+      <p:nvGrpSpPr>
+        <p:cNvPr id="1" name="">
+          <a:extLst>
+            <a:ext uri="{FF2B5EF4-FFF2-40B4-BE49-F238E27FC236}">
+              <a16:creationId xmlns:a16="http://schemas.microsoft.com/office/drawing/2014/main" id="{2C486912-8D16-E435-5C22-A90E748FF1BA}"/>
+            </a:ext>
+          </a:extLst>
+        </p:cNvPr>
+        <p:cNvGrpSpPr/>
+        <p:nvPr/>
+      </p:nvGrpSpPr>
+      <p:grpSpPr>
+        <a:xfrm>
+          <a:off x="0" y="0"/>
+          <a:ext cx="0" cy="0"/>
+          <a:chOff x="0" y="0"/>
+          <a:chExt cx="0" cy="0"/>
+        </a:xfrm>
+      </p:grpSpPr>
+      <p:sp>
+        <p:nvSpPr>
+          <p:cNvPr id="2" name="Slide Image Placeholder 1">
+            <a:extLst>
+              <a:ext uri="{FF2B5EF4-FFF2-40B4-BE49-F238E27FC236}">
+                <a16:creationId xmlns:a16="http://schemas.microsoft.com/office/drawing/2014/main" id="{68DD73EF-5AEE-8EC9-A6E8-0C4466DBFADB}"/>
+              </a:ext>
+            </a:extLst>
+          </p:cNvPr>
+          <p:cNvSpPr>
+            <a:spLocks noGrp="1" noRot="1" noChangeAspect="1"/>
+          </p:cNvSpPr>
+          <p:nvPr>
+            <p:ph type="sldImg"/>
+          </p:nvPr>
+        </p:nvSpPr>
+        <p:spPr/>
+      </p:sp>
+      <p:sp>
+        <p:nvSpPr>
+          <p:cNvPr id="3" name="Notes Placeholder 2">
+            <a:extLst>
+              <a:ext uri="{FF2B5EF4-FFF2-40B4-BE49-F238E27FC236}">
+                <a16:creationId xmlns:a16="http://schemas.microsoft.com/office/drawing/2014/main" id="{CE2519F4-B304-570C-296F-C835E1C2036E}"/>
+              </a:ext>
+            </a:extLst>
+          </p:cNvPr>
+          <p:cNvSpPr>
+            <a:spLocks noGrp="1"/>
+          </p:cNvSpPr>
+          <p:nvPr>
+            <p:ph type="body" idx="1"/>
+          </p:nvPr>
+        </p:nvSpPr>
+        <p:spPr/>
+        <p:txBody>
+          <a:bodyPr/>
+          <a:lstStyle/>
+          <a:p>
+            <a:endParaRPr lang="en-US" dirty="0"/>
+          </a:p>
+        </p:txBody>
+      </p:sp>
+      <p:sp>
+        <p:nvSpPr>
+          <p:cNvPr id="4" name="Slide Number Placeholder 3">
+            <a:extLst>
+              <a:ext uri="{FF2B5EF4-FFF2-40B4-BE49-F238E27FC236}">
+                <a16:creationId xmlns:a16="http://schemas.microsoft.com/office/drawing/2014/main" id="{457CC44C-E247-7DEB-CCC9-15D1BC0DBB41}"/>
+              </a:ext>
+            </a:extLst>
+          </p:cNvPr>
+          <p:cNvSpPr>
+            <a:spLocks noGrp="1"/>
+          </p:cNvSpPr>
+          <p:nvPr>
+            <p:ph type="sldNum" sz="quarter" idx="5"/>
+          </p:nvPr>
+        </p:nvSpPr>
+        <p:spPr/>
+        <p:txBody>
+          <a:bodyPr/>
+          <a:lstStyle/>
+          <a:p>
+            <a:fld id="{5AD2936D-68DF-C34D-84E6-1FDAB4C19BCF}" type="slidenum">
+              <a:rPr lang="en-US" smtClean="0"/>
+              <a:t>13</a:t>
+            </a:fld>
+            <a:endParaRPr lang="en-US"/>
+          </a:p>
+        </p:txBody>
+      </p:sp>
+    </p:spTree>
+    <p:extLst>
+      <p:ext uri="{BB962C8B-B14F-4D97-AF65-F5344CB8AC3E}">
+        <p14:creationId xmlns:p14="http://schemas.microsoft.com/office/powerpoint/2010/main" val="903150929"/>
+      </p:ext>
+    </p:extLst>
+  </p:cSld>
+  <p:clrMapOvr>
+    <a:masterClrMapping/>
+  </p:clrMapOvr>
+</p:notes>
+</file>
+
+<file path=ppt/notesSlides/notesSlide8.xml><?xml version="1.0" encoding="utf-8"?>
+<p:notes xmlns:a="http://schemas.openxmlformats.org/drawingml/2006/main" xmlns:r="http://schemas.openxmlformats.org/officeDocument/2006/relationships" xmlns:p="http://schemas.openxmlformats.org/presentationml/2006/main">
+  <p:cSld>
+    <p:spTree>
+      <p:nvGrpSpPr>
+        <p:cNvPr id="1" name="">
+          <a:extLst>
+            <a:ext uri="{FF2B5EF4-FFF2-40B4-BE49-F238E27FC236}">
+              <a16:creationId xmlns:a16="http://schemas.microsoft.com/office/drawing/2014/main" id="{A05EB3D0-1E06-2B88-0153-4E2E25297A78}"/>
+            </a:ext>
+          </a:extLst>
+        </p:cNvPr>
+        <p:cNvGrpSpPr/>
+        <p:nvPr/>
+      </p:nvGrpSpPr>
+      <p:grpSpPr>
+        <a:xfrm>
+          <a:off x="0" y="0"/>
+          <a:ext cx="0" cy="0"/>
+          <a:chOff x="0" y="0"/>
+          <a:chExt cx="0" cy="0"/>
+        </a:xfrm>
+      </p:grpSpPr>
+      <p:sp>
+        <p:nvSpPr>
+          <p:cNvPr id="2" name="Slide Image Placeholder 1">
+            <a:extLst>
+              <a:ext uri="{FF2B5EF4-FFF2-40B4-BE49-F238E27FC236}">
+                <a16:creationId xmlns:a16="http://schemas.microsoft.com/office/drawing/2014/main" id="{6CE9168E-EC7C-4EFA-A948-1BD168CCBB28}"/>
+              </a:ext>
+            </a:extLst>
+          </p:cNvPr>
+          <p:cNvSpPr>
+            <a:spLocks noGrp="1" noRot="1" noChangeAspect="1"/>
+          </p:cNvSpPr>
+          <p:nvPr>
+            <p:ph type="sldImg"/>
+          </p:nvPr>
+        </p:nvSpPr>
+        <p:spPr/>
+      </p:sp>
+      <p:sp>
+        <p:nvSpPr>
+          <p:cNvPr id="3" name="Notes Placeholder 2">
+            <a:extLst>
+              <a:ext uri="{FF2B5EF4-FFF2-40B4-BE49-F238E27FC236}">
+                <a16:creationId xmlns:a16="http://schemas.microsoft.com/office/drawing/2014/main" id="{05747B9B-C5F9-E2C8-787A-B00209079B8C}"/>
+              </a:ext>
+            </a:extLst>
+          </p:cNvPr>
+          <p:cNvSpPr>
+            <a:spLocks noGrp="1"/>
+          </p:cNvSpPr>
+          <p:nvPr>
+            <p:ph type="body" idx="1"/>
+          </p:nvPr>
+        </p:nvSpPr>
+        <p:spPr/>
+        <p:txBody>
+          <a:bodyPr/>
+          <a:lstStyle/>
+          <a:p>
+            <a:endParaRPr lang="en-US" dirty="0"/>
+          </a:p>
+        </p:txBody>
+      </p:sp>
+      <p:sp>
+        <p:nvSpPr>
+          <p:cNvPr id="4" name="Slide Number Placeholder 3">
+            <a:extLst>
+              <a:ext uri="{FF2B5EF4-FFF2-40B4-BE49-F238E27FC236}">
+                <a16:creationId xmlns:a16="http://schemas.microsoft.com/office/drawing/2014/main" id="{07068103-71FA-E1EA-1C35-91C986073B35}"/>
+              </a:ext>
+            </a:extLst>
+          </p:cNvPr>
+          <p:cNvSpPr>
+            <a:spLocks noGrp="1"/>
+          </p:cNvSpPr>
+          <p:nvPr>
+            <p:ph type="sldNum" sz="quarter" idx="5"/>
+          </p:nvPr>
+        </p:nvSpPr>
+        <p:spPr/>
+        <p:txBody>
+          <a:bodyPr/>
+          <a:lstStyle/>
+          <a:p>
+            <a:fld id="{5AD2936D-68DF-C34D-84E6-1FDAB4C19BCF}" type="slidenum">
+              <a:rPr lang="en-US" smtClean="0"/>
+              <a:t>14</a:t>
+            </a:fld>
+            <a:endParaRPr lang="en-US"/>
+          </a:p>
+        </p:txBody>
+      </p:sp>
+    </p:spTree>
+    <p:extLst>
+      <p:ext uri="{BB962C8B-B14F-4D97-AF65-F5344CB8AC3E}">
+        <p14:creationId xmlns:p14="http://schemas.microsoft.com/office/powerpoint/2010/main" val="2458115221"/>
+      </p:ext>
+    </p:extLst>
+  </p:cSld>
+  <p:clrMapOvr>
+    <a:masterClrMapping/>
+  </p:clrMapOvr>
+</p:notes>
+</file>
+
+<file path=ppt/notesSlides/notesSlide9.xml><?xml version="1.0" encoding="utf-8"?>
+<p:notes xmlns:a="http://schemas.openxmlformats.org/drawingml/2006/main" xmlns:r="http://schemas.openxmlformats.org/officeDocument/2006/relationships" xmlns:p="http://schemas.openxmlformats.org/presentationml/2006/main">
+  <p:cSld>
+    <p:spTree>
+      <p:nvGrpSpPr>
+        <p:cNvPr id="1" name="">
+          <a:extLst>
+            <a:ext uri="{FF2B5EF4-FFF2-40B4-BE49-F238E27FC236}">
+              <a16:creationId xmlns:a16="http://schemas.microsoft.com/office/drawing/2014/main" id="{FC005D0F-F53A-8FBF-64D9-A67F28361864}"/>
+            </a:ext>
+          </a:extLst>
+        </p:cNvPr>
+        <p:cNvGrpSpPr/>
+        <p:nvPr/>
+      </p:nvGrpSpPr>
+      <p:grpSpPr>
+        <a:xfrm>
+          <a:off x="0" y="0"/>
+          <a:ext cx="0" cy="0"/>
+          <a:chOff x="0" y="0"/>
+          <a:chExt cx="0" cy="0"/>
+        </a:xfrm>
+      </p:grpSpPr>
+      <p:sp>
+        <p:nvSpPr>
+          <p:cNvPr id="2" name="Slide Image Placeholder 1">
+            <a:extLst>
+              <a:ext uri="{FF2B5EF4-FFF2-40B4-BE49-F238E27FC236}">
+                <a16:creationId xmlns:a16="http://schemas.microsoft.com/office/drawing/2014/main" id="{4F839AA8-66B5-E374-EBF1-749B2DECA9FB}"/>
+              </a:ext>
+            </a:extLst>
+          </p:cNvPr>
+          <p:cNvSpPr>
+            <a:spLocks noGrp="1" noRot="1" noChangeAspect="1"/>
+          </p:cNvSpPr>
+          <p:nvPr>
+            <p:ph type="sldImg"/>
+          </p:nvPr>
+        </p:nvSpPr>
+        <p:spPr/>
+      </p:sp>
+      <p:sp>
+        <p:nvSpPr>
+          <p:cNvPr id="3" name="Notes Placeholder 2">
+            <a:extLst>
+              <a:ext uri="{FF2B5EF4-FFF2-40B4-BE49-F238E27FC236}">
+                <a16:creationId xmlns:a16="http://schemas.microsoft.com/office/drawing/2014/main" id="{0F470EBD-83E0-7813-FE78-35AED5F195D8}"/>
+              </a:ext>
+            </a:extLst>
+          </p:cNvPr>
+          <p:cNvSpPr>
+            <a:spLocks noGrp="1"/>
+          </p:cNvSpPr>
+          <p:nvPr>
+            <p:ph type="body" idx="1"/>
+          </p:nvPr>
+        </p:nvSpPr>
+        <p:spPr/>
+        <p:txBody>
+          <a:bodyPr/>
+          <a:lstStyle/>
+          <a:p>
+            <a:endParaRPr lang="en-US" dirty="0"/>
+          </a:p>
+        </p:txBody>
+      </p:sp>
+      <p:sp>
+        <p:nvSpPr>
+          <p:cNvPr id="4" name="Slide Number Placeholder 3">
+            <a:extLst>
+              <a:ext uri="{FF2B5EF4-FFF2-40B4-BE49-F238E27FC236}">
+                <a16:creationId xmlns:a16="http://schemas.microsoft.com/office/drawing/2014/main" id="{AB85C3C6-ACAD-032E-F56A-3AE71677C988}"/>
+              </a:ext>
+            </a:extLst>
+          </p:cNvPr>
+          <p:cNvSpPr>
+            <a:spLocks noGrp="1"/>
+          </p:cNvSpPr>
+          <p:nvPr>
+            <p:ph type="sldNum" sz="quarter" idx="5"/>
+          </p:nvPr>
+        </p:nvSpPr>
+        <p:spPr/>
+        <p:txBody>
+          <a:bodyPr/>
+          <a:lstStyle/>
+          <a:p>
+            <a:fld id="{5AD2936D-68DF-C34D-84E6-1FDAB4C19BCF}" type="slidenum">
+              <a:rPr lang="en-US" smtClean="0"/>
+              <a:t>15</a:t>
+            </a:fld>
+            <a:endParaRPr lang="en-US"/>
+          </a:p>
+        </p:txBody>
+      </p:sp>
+    </p:spTree>
+    <p:extLst>
+      <p:ext uri="{BB962C8B-B14F-4D97-AF65-F5344CB8AC3E}">
+        <p14:creationId xmlns:p14="http://schemas.microsoft.com/office/powerpoint/2010/main" val="171951772"/>
       </p:ext>
     </p:extLst>
   </p:cSld>
@@ -6213,6 +6867,3636 @@
     <p:extLst>
       <p:ext uri="{BB962C8B-B14F-4D97-AF65-F5344CB8AC3E}">
         <p14:creationId xmlns:p14="http://schemas.microsoft.com/office/powerpoint/2010/main" val="24909414"/>
+      </p:ext>
+    </p:extLst>
+  </p:cSld>
+  <p:clrMapOvr>
+    <a:masterClrMapping/>
+  </p:clrMapOvr>
+  <mc:AlternateContent xmlns:mc="http://schemas.openxmlformats.org/markup-compatibility/2006">
+    <mc:Choice xmlns:p159="http://schemas.microsoft.com/office/powerpoint/2015/09/main" Requires="p159">
+      <p:transition spd="med">
+        <p159:morph option="byWord"/>
+      </p:transition>
+    </mc:Choice>
+    <mc:Fallback>
+      <p:transition spd="med">
+        <p:fade/>
+      </p:transition>
+    </mc:Fallback>
+  </mc:AlternateContent>
+</p:sld>
+</file>
+
+<file path=ppt/slides/slide12.xml><?xml version="1.0" encoding="utf-8"?>
+<p:sld xmlns:a="http://schemas.openxmlformats.org/drawingml/2006/main" xmlns:r="http://schemas.openxmlformats.org/officeDocument/2006/relationships" xmlns:p="http://schemas.openxmlformats.org/presentationml/2006/main">
+  <p:cSld>
+    <p:spTree>
+      <p:nvGrpSpPr>
+        <p:cNvPr id="1" name="">
+          <a:extLst>
+            <a:ext uri="{FF2B5EF4-FFF2-40B4-BE49-F238E27FC236}">
+              <a16:creationId xmlns:a16="http://schemas.microsoft.com/office/drawing/2014/main" id="{9ABDAEBF-8BAF-F3E0-B3D6-E4931F66CAA3}"/>
+            </a:ext>
+          </a:extLst>
+        </p:cNvPr>
+        <p:cNvGrpSpPr/>
+        <p:nvPr/>
+      </p:nvGrpSpPr>
+      <p:grpSpPr>
+        <a:xfrm>
+          <a:off x="0" y="0"/>
+          <a:ext cx="0" cy="0"/>
+          <a:chOff x="0" y="0"/>
+          <a:chExt cx="0" cy="0"/>
+        </a:xfrm>
+      </p:grpSpPr>
+      <p:sp>
+        <p:nvSpPr>
+          <p:cNvPr id="17" name="Rectangle 16">
+            <a:extLst>
+              <a:ext uri="{FF2B5EF4-FFF2-40B4-BE49-F238E27FC236}">
+                <a16:creationId xmlns:a16="http://schemas.microsoft.com/office/drawing/2014/main" id="{8D871015-EDE6-E81D-7BC0-086BC48FAE5C}"/>
+              </a:ext>
+            </a:extLst>
+          </p:cNvPr>
+          <p:cNvSpPr/>
+          <p:nvPr/>
+        </p:nvSpPr>
+        <p:spPr>
+          <a:xfrm rot="16200000">
+            <a:off x="2522582" y="-387076"/>
+            <a:ext cx="68673" cy="3246390"/>
+          </a:xfrm>
+          <a:prstGeom prst="rect">
+            <a:avLst/>
+          </a:prstGeom>
+          <a:solidFill>
+            <a:srgbClr val="FF0000"/>
+          </a:solidFill>
+          <a:ln>
+            <a:solidFill>
+              <a:srgbClr val="FF0000"/>
+            </a:solidFill>
+          </a:ln>
+        </p:spPr>
+        <p:style>
+          <a:lnRef idx="2">
+            <a:schemeClr val="accent1">
+              <a:shade val="15000"/>
+            </a:schemeClr>
+          </a:lnRef>
+          <a:fillRef idx="1">
+            <a:schemeClr val="accent1"/>
+          </a:fillRef>
+          <a:effectRef idx="0">
+            <a:schemeClr val="accent1"/>
+          </a:effectRef>
+          <a:fontRef idx="minor">
+            <a:schemeClr val="lt1"/>
+          </a:fontRef>
+        </p:style>
+        <p:txBody>
+          <a:bodyPr rtlCol="0" anchor="ctr"/>
+          <a:lstStyle/>
+          <a:p>
+            <a:pPr algn="ctr"/>
+            <a:endParaRPr lang="en-US">
+              <a:latin typeface="Times New Roman" panose="02020603050405020304" pitchFamily="18" charset="0"/>
+              <a:cs typeface="Times New Roman" panose="02020603050405020304" pitchFamily="18" charset="0"/>
+            </a:endParaRPr>
+          </a:p>
+        </p:txBody>
+      </p:sp>
+      <p:sp>
+        <p:nvSpPr>
+          <p:cNvPr id="18" name="Rectangle 17">
+            <a:extLst>
+              <a:ext uri="{FF2B5EF4-FFF2-40B4-BE49-F238E27FC236}">
+                <a16:creationId xmlns:a16="http://schemas.microsoft.com/office/drawing/2014/main" id="{7CA8CF64-7878-8473-459D-E8C099F6658D}"/>
+              </a:ext>
+            </a:extLst>
+          </p:cNvPr>
+          <p:cNvSpPr/>
+          <p:nvPr/>
+        </p:nvSpPr>
+        <p:spPr>
+          <a:xfrm rot="16200000">
+            <a:off x="2522581" y="-318404"/>
+            <a:ext cx="68674" cy="3246390"/>
+          </a:xfrm>
+          <a:prstGeom prst="rect">
+            <a:avLst/>
+          </a:prstGeom>
+          <a:solidFill>
+            <a:srgbClr val="7030A0"/>
+          </a:solidFill>
+          <a:ln>
+            <a:solidFill>
+              <a:srgbClr val="7030A0"/>
+            </a:solidFill>
+          </a:ln>
+        </p:spPr>
+        <p:style>
+          <a:lnRef idx="2">
+            <a:schemeClr val="accent1">
+              <a:shade val="15000"/>
+            </a:schemeClr>
+          </a:lnRef>
+          <a:fillRef idx="1">
+            <a:schemeClr val="accent1"/>
+          </a:fillRef>
+          <a:effectRef idx="0">
+            <a:schemeClr val="accent1"/>
+          </a:effectRef>
+          <a:fontRef idx="minor">
+            <a:schemeClr val="lt1"/>
+          </a:fontRef>
+        </p:style>
+        <p:txBody>
+          <a:bodyPr rtlCol="0" anchor="ctr"/>
+          <a:lstStyle/>
+          <a:p>
+            <a:pPr algn="ctr"/>
+            <a:endParaRPr lang="en-US">
+              <a:latin typeface="Times New Roman" panose="02020603050405020304" pitchFamily="18" charset="0"/>
+              <a:cs typeface="Times New Roman" panose="02020603050405020304" pitchFamily="18" charset="0"/>
+            </a:endParaRPr>
+          </a:p>
+        </p:txBody>
+      </p:sp>
+      <p:sp>
+        <p:nvSpPr>
+          <p:cNvPr id="3" name="Rounded Rectangle 2">
+            <a:extLst>
+              <a:ext uri="{FF2B5EF4-FFF2-40B4-BE49-F238E27FC236}">
+                <a16:creationId xmlns:a16="http://schemas.microsoft.com/office/drawing/2014/main" id="{741FE454-70F9-322F-C660-D8A2A5E49172}"/>
+              </a:ext>
+            </a:extLst>
+          </p:cNvPr>
+          <p:cNvSpPr/>
+          <p:nvPr/>
+        </p:nvSpPr>
+        <p:spPr>
+          <a:xfrm>
+            <a:off x="702884" y="2761827"/>
+            <a:ext cx="6709719" cy="2279729"/>
+          </a:xfrm>
+          <a:prstGeom prst="roundRect">
+            <a:avLst/>
+          </a:prstGeom>
+          <a:solidFill>
+            <a:schemeClr val="accent4">
+              <a:lumMod val="40000"/>
+              <a:lumOff val="60000"/>
+            </a:schemeClr>
+          </a:solidFill>
+          <a:ln>
+            <a:noFill/>
+          </a:ln>
+        </p:spPr>
+        <p:style>
+          <a:lnRef idx="2">
+            <a:schemeClr val="accent1">
+              <a:shade val="15000"/>
+            </a:schemeClr>
+          </a:lnRef>
+          <a:fillRef idx="1">
+            <a:schemeClr val="accent1"/>
+          </a:fillRef>
+          <a:effectRef idx="0">
+            <a:schemeClr val="accent1"/>
+          </a:effectRef>
+          <a:fontRef idx="minor">
+            <a:schemeClr val="lt1"/>
+          </a:fontRef>
+        </p:style>
+        <p:txBody>
+          <a:bodyPr rtlCol="0" anchor="ctr"/>
+          <a:lstStyle/>
+          <a:p>
+            <a:pPr algn="ctr"/>
+            <a:endParaRPr lang="en-US"/>
+          </a:p>
+        </p:txBody>
+      </p:sp>
+      <p:sp>
+        <p:nvSpPr>
+          <p:cNvPr id="12" name="TextBox 11">
+            <a:extLst>
+              <a:ext uri="{FF2B5EF4-FFF2-40B4-BE49-F238E27FC236}">
+                <a16:creationId xmlns:a16="http://schemas.microsoft.com/office/drawing/2014/main" id="{6512C3D2-1CC7-A28A-2894-186A3513B4E0}"/>
+              </a:ext>
+            </a:extLst>
+          </p:cNvPr>
+          <p:cNvSpPr txBox="1"/>
+          <p:nvPr/>
+        </p:nvSpPr>
+        <p:spPr>
+          <a:xfrm>
+            <a:off x="772906" y="405121"/>
+            <a:ext cx="6591721" cy="830997"/>
+          </a:xfrm>
+          <a:prstGeom prst="rect">
+            <a:avLst/>
+          </a:prstGeom>
+          <a:noFill/>
+        </p:spPr>
+        <p:txBody>
+          <a:bodyPr wrap="square" rtlCol="0">
+            <a:spAutoFit/>
+          </a:bodyPr>
+          <a:lstStyle/>
+          <a:p>
+            <a:r>
+              <a:rPr lang="en-US" sz="4800" dirty="0">
+                <a:latin typeface="Times New Roman" panose="02020603050405020304" pitchFamily="18" charset="0"/>
+                <a:cs typeface="Times New Roman" panose="02020603050405020304" pitchFamily="18" charset="0"/>
+              </a:rPr>
+              <a:t>Thesis: Latency Fairness</a:t>
+            </a:r>
+            <a:endParaRPr lang="en-US" sz="3000" dirty="0">
+              <a:latin typeface="Times New Roman" panose="02020603050405020304" pitchFamily="18" charset="0"/>
+              <a:cs typeface="Times New Roman" panose="02020603050405020304" pitchFamily="18" charset="0"/>
+            </a:endParaRPr>
+          </a:p>
+        </p:txBody>
+      </p:sp>
+      <p:sp>
+        <p:nvSpPr>
+          <p:cNvPr id="4" name="TextBox 3">
+            <a:extLst>
+              <a:ext uri="{FF2B5EF4-FFF2-40B4-BE49-F238E27FC236}">
+                <a16:creationId xmlns:a16="http://schemas.microsoft.com/office/drawing/2014/main" id="{88769B4D-8DE9-1F9A-62CE-60D365BC0A13}"/>
+              </a:ext>
+            </a:extLst>
+          </p:cNvPr>
+          <p:cNvSpPr txBox="1"/>
+          <p:nvPr/>
+        </p:nvSpPr>
+        <p:spPr>
+          <a:xfrm>
+            <a:off x="4229584" y="3089189"/>
+            <a:ext cx="2830628" cy="1015663"/>
+          </a:xfrm>
+          <a:prstGeom prst="rect">
+            <a:avLst/>
+          </a:prstGeom>
+          <a:noFill/>
+        </p:spPr>
+        <p:txBody>
+          <a:bodyPr wrap="square" rtlCol="0">
+            <a:spAutoFit/>
+          </a:bodyPr>
+          <a:lstStyle/>
+          <a:p>
+            <a:pPr algn="ctr"/>
+            <a:r>
+              <a:rPr lang="en-US" sz="3000" dirty="0">
+                <a:solidFill>
+                  <a:srgbClr val="7030A0"/>
+                </a:solidFill>
+                <a:latin typeface="Times New Roman" panose="02020603050405020304" pitchFamily="18" charset="0"/>
+                <a:cs typeface="Times New Roman" panose="02020603050405020304" pitchFamily="18" charset="0"/>
+              </a:rPr>
+              <a:t>Inbound</a:t>
+            </a:r>
+            <a:br>
+              <a:rPr lang="en-US" sz="3000" dirty="0">
+                <a:solidFill>
+                  <a:srgbClr val="7030A0"/>
+                </a:solidFill>
+                <a:latin typeface="Times New Roman" panose="02020603050405020304" pitchFamily="18" charset="0"/>
+                <a:cs typeface="Times New Roman" panose="02020603050405020304" pitchFamily="18" charset="0"/>
+              </a:rPr>
+            </a:br>
+            <a:r>
+              <a:rPr lang="en-US" sz="3000" dirty="0">
+                <a:solidFill>
+                  <a:srgbClr val="7030A0"/>
+                </a:solidFill>
+                <a:latin typeface="Times New Roman" panose="02020603050405020304" pitchFamily="18" charset="0"/>
+                <a:cs typeface="Times New Roman" panose="02020603050405020304" pitchFamily="18" charset="0"/>
+              </a:rPr>
+              <a:t>Communication</a:t>
+            </a:r>
+          </a:p>
+        </p:txBody>
+      </p:sp>
+      <p:sp>
+        <p:nvSpPr>
+          <p:cNvPr id="10" name="TextBox 9">
+            <a:extLst>
+              <a:ext uri="{FF2B5EF4-FFF2-40B4-BE49-F238E27FC236}">
+                <a16:creationId xmlns:a16="http://schemas.microsoft.com/office/drawing/2014/main" id="{821B6EFD-0B57-09ED-798A-1B738DB4ADE8}"/>
+              </a:ext>
+            </a:extLst>
+          </p:cNvPr>
+          <p:cNvSpPr txBox="1"/>
+          <p:nvPr/>
+        </p:nvSpPr>
+        <p:spPr>
+          <a:xfrm>
+            <a:off x="933723" y="3095367"/>
+            <a:ext cx="2830628" cy="1015663"/>
+          </a:xfrm>
+          <a:prstGeom prst="rect">
+            <a:avLst/>
+          </a:prstGeom>
+          <a:noFill/>
+        </p:spPr>
+        <p:txBody>
+          <a:bodyPr wrap="square" rtlCol="0">
+            <a:spAutoFit/>
+          </a:bodyPr>
+          <a:lstStyle/>
+          <a:p>
+            <a:pPr algn="ctr"/>
+            <a:r>
+              <a:rPr lang="en-US" sz="3000" dirty="0">
+                <a:solidFill>
+                  <a:srgbClr val="7030A0"/>
+                </a:solidFill>
+                <a:latin typeface="Times New Roman" panose="02020603050405020304" pitchFamily="18" charset="0"/>
+                <a:cs typeface="Times New Roman" panose="02020603050405020304" pitchFamily="18" charset="0"/>
+              </a:rPr>
+              <a:t>Outbound</a:t>
+            </a:r>
+            <a:br>
+              <a:rPr lang="en-US" sz="3000" dirty="0">
+                <a:solidFill>
+                  <a:srgbClr val="7030A0"/>
+                </a:solidFill>
+                <a:latin typeface="Times New Roman" panose="02020603050405020304" pitchFamily="18" charset="0"/>
+                <a:cs typeface="Times New Roman" panose="02020603050405020304" pitchFamily="18" charset="0"/>
+              </a:rPr>
+            </a:br>
+            <a:r>
+              <a:rPr lang="en-US" sz="3000" dirty="0">
+                <a:solidFill>
+                  <a:srgbClr val="7030A0"/>
+                </a:solidFill>
+                <a:latin typeface="Times New Roman" panose="02020603050405020304" pitchFamily="18" charset="0"/>
+                <a:cs typeface="Times New Roman" panose="02020603050405020304" pitchFamily="18" charset="0"/>
+              </a:rPr>
+              <a:t>Communication</a:t>
+            </a:r>
+          </a:p>
+        </p:txBody>
+      </p:sp>
+    </p:spTree>
+    <p:extLst>
+      <p:ext uri="{BB962C8B-B14F-4D97-AF65-F5344CB8AC3E}">
+        <p14:creationId xmlns:p14="http://schemas.microsoft.com/office/powerpoint/2010/main" val="1322128794"/>
+      </p:ext>
+    </p:extLst>
+  </p:cSld>
+  <p:clrMapOvr>
+    <a:masterClrMapping/>
+  </p:clrMapOvr>
+  <mc:AlternateContent xmlns:mc="http://schemas.openxmlformats.org/markup-compatibility/2006">
+    <mc:Choice xmlns:p159="http://schemas.microsoft.com/office/powerpoint/2015/09/main" Requires="p159">
+      <p:transition spd="med">
+        <p159:morph option="byWord"/>
+      </p:transition>
+    </mc:Choice>
+    <mc:Fallback>
+      <p:transition spd="med">
+        <p:fade/>
+      </p:transition>
+    </mc:Fallback>
+  </mc:AlternateContent>
+</p:sld>
+</file>
+
+<file path=ppt/slides/slide13.xml><?xml version="1.0" encoding="utf-8"?>
+<p:sld xmlns:a="http://schemas.openxmlformats.org/drawingml/2006/main" xmlns:r="http://schemas.openxmlformats.org/officeDocument/2006/relationships" xmlns:p="http://schemas.openxmlformats.org/presentationml/2006/main">
+  <p:cSld>
+    <p:spTree>
+      <p:nvGrpSpPr>
+        <p:cNvPr id="1" name="">
+          <a:extLst>
+            <a:ext uri="{FF2B5EF4-FFF2-40B4-BE49-F238E27FC236}">
+              <a16:creationId xmlns:a16="http://schemas.microsoft.com/office/drawing/2014/main" id="{B9CB6789-B3A8-D2BE-1DFD-24C65814625C}"/>
+            </a:ext>
+          </a:extLst>
+        </p:cNvPr>
+        <p:cNvGrpSpPr/>
+        <p:nvPr/>
+      </p:nvGrpSpPr>
+      <p:grpSpPr>
+        <a:xfrm>
+          <a:off x="0" y="0"/>
+          <a:ext cx="0" cy="0"/>
+          <a:chOff x="0" y="0"/>
+          <a:chExt cx="0" cy="0"/>
+        </a:xfrm>
+      </p:grpSpPr>
+      <p:sp>
+        <p:nvSpPr>
+          <p:cNvPr id="6" name="Rounded Rectangle 5">
+            <a:extLst>
+              <a:ext uri="{FF2B5EF4-FFF2-40B4-BE49-F238E27FC236}">
+                <a16:creationId xmlns:a16="http://schemas.microsoft.com/office/drawing/2014/main" id="{DFC14CF6-D2DE-6E62-3827-CB5EFFA939A2}"/>
+              </a:ext>
+            </a:extLst>
+          </p:cNvPr>
+          <p:cNvSpPr/>
+          <p:nvPr/>
+        </p:nvSpPr>
+        <p:spPr>
+          <a:xfrm>
+            <a:off x="702884" y="2761827"/>
+            <a:ext cx="6709719" cy="2279729"/>
+          </a:xfrm>
+          <a:prstGeom prst="roundRect">
+            <a:avLst/>
+          </a:prstGeom>
+          <a:solidFill>
+            <a:schemeClr val="accent4">
+              <a:lumMod val="40000"/>
+              <a:lumOff val="60000"/>
+            </a:schemeClr>
+          </a:solidFill>
+          <a:ln>
+            <a:noFill/>
+          </a:ln>
+        </p:spPr>
+        <p:style>
+          <a:lnRef idx="2">
+            <a:schemeClr val="accent1">
+              <a:shade val="15000"/>
+            </a:schemeClr>
+          </a:lnRef>
+          <a:fillRef idx="1">
+            <a:schemeClr val="accent1"/>
+          </a:fillRef>
+          <a:effectRef idx="0">
+            <a:schemeClr val="accent1"/>
+          </a:effectRef>
+          <a:fontRef idx="minor">
+            <a:schemeClr val="lt1"/>
+          </a:fontRef>
+        </p:style>
+        <p:txBody>
+          <a:bodyPr rtlCol="0" anchor="ctr"/>
+          <a:lstStyle/>
+          <a:p>
+            <a:pPr algn="ctr"/>
+            <a:endParaRPr lang="en-US"/>
+          </a:p>
+        </p:txBody>
+      </p:sp>
+      <p:sp>
+        <p:nvSpPr>
+          <p:cNvPr id="17" name="Rectangle 16">
+            <a:extLst>
+              <a:ext uri="{FF2B5EF4-FFF2-40B4-BE49-F238E27FC236}">
+                <a16:creationId xmlns:a16="http://schemas.microsoft.com/office/drawing/2014/main" id="{FEA2A3EC-77DB-5725-483C-D2C1A58BC2A8}"/>
+              </a:ext>
+            </a:extLst>
+          </p:cNvPr>
+          <p:cNvSpPr/>
+          <p:nvPr/>
+        </p:nvSpPr>
+        <p:spPr>
+          <a:xfrm rot="16200000">
+            <a:off x="2522582" y="-387076"/>
+            <a:ext cx="68673" cy="3246390"/>
+          </a:xfrm>
+          <a:prstGeom prst="rect">
+            <a:avLst/>
+          </a:prstGeom>
+          <a:solidFill>
+            <a:srgbClr val="FF0000"/>
+          </a:solidFill>
+          <a:ln>
+            <a:solidFill>
+              <a:srgbClr val="FF0000"/>
+            </a:solidFill>
+          </a:ln>
+        </p:spPr>
+        <p:style>
+          <a:lnRef idx="2">
+            <a:schemeClr val="accent1">
+              <a:shade val="15000"/>
+            </a:schemeClr>
+          </a:lnRef>
+          <a:fillRef idx="1">
+            <a:schemeClr val="accent1"/>
+          </a:fillRef>
+          <a:effectRef idx="0">
+            <a:schemeClr val="accent1"/>
+          </a:effectRef>
+          <a:fontRef idx="minor">
+            <a:schemeClr val="lt1"/>
+          </a:fontRef>
+        </p:style>
+        <p:txBody>
+          <a:bodyPr rtlCol="0" anchor="ctr"/>
+          <a:lstStyle/>
+          <a:p>
+            <a:pPr algn="ctr"/>
+            <a:endParaRPr lang="en-US">
+              <a:latin typeface="Times New Roman" panose="02020603050405020304" pitchFamily="18" charset="0"/>
+              <a:cs typeface="Times New Roman" panose="02020603050405020304" pitchFamily="18" charset="0"/>
+            </a:endParaRPr>
+          </a:p>
+        </p:txBody>
+      </p:sp>
+      <p:sp>
+        <p:nvSpPr>
+          <p:cNvPr id="18" name="Rectangle 17">
+            <a:extLst>
+              <a:ext uri="{FF2B5EF4-FFF2-40B4-BE49-F238E27FC236}">
+                <a16:creationId xmlns:a16="http://schemas.microsoft.com/office/drawing/2014/main" id="{6AB2275E-ED05-B4EF-DA5A-1CF7BB2D0049}"/>
+              </a:ext>
+            </a:extLst>
+          </p:cNvPr>
+          <p:cNvSpPr/>
+          <p:nvPr/>
+        </p:nvSpPr>
+        <p:spPr>
+          <a:xfrm rot="16200000">
+            <a:off x="2522581" y="-318404"/>
+            <a:ext cx="68674" cy="3246390"/>
+          </a:xfrm>
+          <a:prstGeom prst="rect">
+            <a:avLst/>
+          </a:prstGeom>
+          <a:solidFill>
+            <a:srgbClr val="7030A0"/>
+          </a:solidFill>
+          <a:ln>
+            <a:solidFill>
+              <a:srgbClr val="7030A0"/>
+            </a:solidFill>
+          </a:ln>
+        </p:spPr>
+        <p:style>
+          <a:lnRef idx="2">
+            <a:schemeClr val="accent1">
+              <a:shade val="15000"/>
+            </a:schemeClr>
+          </a:lnRef>
+          <a:fillRef idx="1">
+            <a:schemeClr val="accent1"/>
+          </a:fillRef>
+          <a:effectRef idx="0">
+            <a:schemeClr val="accent1"/>
+          </a:effectRef>
+          <a:fontRef idx="minor">
+            <a:schemeClr val="lt1"/>
+          </a:fontRef>
+        </p:style>
+        <p:txBody>
+          <a:bodyPr rtlCol="0" anchor="ctr"/>
+          <a:lstStyle/>
+          <a:p>
+            <a:pPr algn="ctr"/>
+            <a:endParaRPr lang="en-US">
+              <a:latin typeface="Times New Roman" panose="02020603050405020304" pitchFamily="18" charset="0"/>
+              <a:cs typeface="Times New Roman" panose="02020603050405020304" pitchFamily="18" charset="0"/>
+            </a:endParaRPr>
+          </a:p>
+        </p:txBody>
+      </p:sp>
+      <p:sp>
+        <p:nvSpPr>
+          <p:cNvPr id="12" name="TextBox 11">
+            <a:extLst>
+              <a:ext uri="{FF2B5EF4-FFF2-40B4-BE49-F238E27FC236}">
+                <a16:creationId xmlns:a16="http://schemas.microsoft.com/office/drawing/2014/main" id="{F798050B-D649-4451-42D7-AC068326F9AA}"/>
+              </a:ext>
+            </a:extLst>
+          </p:cNvPr>
+          <p:cNvSpPr txBox="1"/>
+          <p:nvPr/>
+        </p:nvSpPr>
+        <p:spPr>
+          <a:xfrm>
+            <a:off x="772906" y="405121"/>
+            <a:ext cx="6591721" cy="830997"/>
+          </a:xfrm>
+          <a:prstGeom prst="rect">
+            <a:avLst/>
+          </a:prstGeom>
+          <a:noFill/>
+        </p:spPr>
+        <p:txBody>
+          <a:bodyPr wrap="square" rtlCol="0">
+            <a:spAutoFit/>
+          </a:bodyPr>
+          <a:lstStyle/>
+          <a:p>
+            <a:r>
+              <a:rPr lang="en-US" sz="4800" dirty="0">
+                <a:latin typeface="Times New Roman" panose="02020603050405020304" pitchFamily="18" charset="0"/>
+                <a:cs typeface="Times New Roman" panose="02020603050405020304" pitchFamily="18" charset="0"/>
+              </a:rPr>
+              <a:t>Thesis: Latency Fairness</a:t>
+            </a:r>
+            <a:endParaRPr lang="en-US" sz="3000" dirty="0">
+              <a:latin typeface="Times New Roman" panose="02020603050405020304" pitchFamily="18" charset="0"/>
+              <a:cs typeface="Times New Roman" panose="02020603050405020304" pitchFamily="18" charset="0"/>
+            </a:endParaRPr>
+          </a:p>
+        </p:txBody>
+      </p:sp>
+      <p:sp>
+        <p:nvSpPr>
+          <p:cNvPr id="4" name="TextBox 3">
+            <a:extLst>
+              <a:ext uri="{FF2B5EF4-FFF2-40B4-BE49-F238E27FC236}">
+                <a16:creationId xmlns:a16="http://schemas.microsoft.com/office/drawing/2014/main" id="{75DC5370-96DA-FC09-FD1C-A9952418DFDD}"/>
+              </a:ext>
+            </a:extLst>
+          </p:cNvPr>
+          <p:cNvSpPr txBox="1"/>
+          <p:nvPr/>
+        </p:nvSpPr>
+        <p:spPr>
+          <a:xfrm>
+            <a:off x="4229584" y="3089189"/>
+            <a:ext cx="2830628" cy="1015663"/>
+          </a:xfrm>
+          <a:prstGeom prst="rect">
+            <a:avLst/>
+          </a:prstGeom>
+          <a:noFill/>
+        </p:spPr>
+        <p:txBody>
+          <a:bodyPr wrap="square" rtlCol="0">
+            <a:spAutoFit/>
+          </a:bodyPr>
+          <a:lstStyle/>
+          <a:p>
+            <a:pPr algn="ctr"/>
+            <a:r>
+              <a:rPr lang="en-US" sz="3000" dirty="0">
+                <a:solidFill>
+                  <a:srgbClr val="7030A0"/>
+                </a:solidFill>
+                <a:latin typeface="Times New Roman" panose="02020603050405020304" pitchFamily="18" charset="0"/>
+                <a:cs typeface="Times New Roman" panose="02020603050405020304" pitchFamily="18" charset="0"/>
+              </a:rPr>
+              <a:t>Inbound</a:t>
+            </a:r>
+            <a:br>
+              <a:rPr lang="en-US" sz="3000" dirty="0">
+                <a:solidFill>
+                  <a:srgbClr val="7030A0"/>
+                </a:solidFill>
+                <a:latin typeface="Times New Roman" panose="02020603050405020304" pitchFamily="18" charset="0"/>
+                <a:cs typeface="Times New Roman" panose="02020603050405020304" pitchFamily="18" charset="0"/>
+              </a:rPr>
+            </a:br>
+            <a:r>
+              <a:rPr lang="en-US" sz="3000" dirty="0">
+                <a:solidFill>
+                  <a:srgbClr val="7030A0"/>
+                </a:solidFill>
+                <a:latin typeface="Times New Roman" panose="02020603050405020304" pitchFamily="18" charset="0"/>
+                <a:cs typeface="Times New Roman" panose="02020603050405020304" pitchFamily="18" charset="0"/>
+              </a:rPr>
+              <a:t>Communication</a:t>
+            </a:r>
+          </a:p>
+        </p:txBody>
+      </p:sp>
+      <p:sp>
+        <p:nvSpPr>
+          <p:cNvPr id="10" name="TextBox 9">
+            <a:extLst>
+              <a:ext uri="{FF2B5EF4-FFF2-40B4-BE49-F238E27FC236}">
+                <a16:creationId xmlns:a16="http://schemas.microsoft.com/office/drawing/2014/main" id="{2301127B-D00E-8895-F547-B125F7D1D8CD}"/>
+              </a:ext>
+            </a:extLst>
+          </p:cNvPr>
+          <p:cNvSpPr txBox="1"/>
+          <p:nvPr/>
+        </p:nvSpPr>
+        <p:spPr>
+          <a:xfrm>
+            <a:off x="933723" y="3095367"/>
+            <a:ext cx="2830628" cy="1015663"/>
+          </a:xfrm>
+          <a:prstGeom prst="rect">
+            <a:avLst/>
+          </a:prstGeom>
+          <a:noFill/>
+        </p:spPr>
+        <p:txBody>
+          <a:bodyPr wrap="square" rtlCol="0">
+            <a:spAutoFit/>
+          </a:bodyPr>
+          <a:lstStyle/>
+          <a:p>
+            <a:pPr algn="ctr"/>
+            <a:r>
+              <a:rPr lang="en-US" sz="3000" dirty="0">
+                <a:solidFill>
+                  <a:srgbClr val="7030A0"/>
+                </a:solidFill>
+                <a:latin typeface="Times New Roman" panose="02020603050405020304" pitchFamily="18" charset="0"/>
+                <a:cs typeface="Times New Roman" panose="02020603050405020304" pitchFamily="18" charset="0"/>
+              </a:rPr>
+              <a:t>Outbound</a:t>
+            </a:r>
+            <a:br>
+              <a:rPr lang="en-US" sz="3000" dirty="0">
+                <a:solidFill>
+                  <a:srgbClr val="7030A0"/>
+                </a:solidFill>
+                <a:latin typeface="Times New Roman" panose="02020603050405020304" pitchFamily="18" charset="0"/>
+                <a:cs typeface="Times New Roman" panose="02020603050405020304" pitchFamily="18" charset="0"/>
+              </a:rPr>
+            </a:br>
+            <a:r>
+              <a:rPr lang="en-US" sz="3000" dirty="0">
+                <a:solidFill>
+                  <a:srgbClr val="7030A0"/>
+                </a:solidFill>
+                <a:latin typeface="Times New Roman" panose="02020603050405020304" pitchFamily="18" charset="0"/>
+                <a:cs typeface="Times New Roman" panose="02020603050405020304" pitchFamily="18" charset="0"/>
+              </a:rPr>
+              <a:t>Communication</a:t>
+            </a:r>
+          </a:p>
+        </p:txBody>
+      </p:sp>
+      <p:pic>
+        <p:nvPicPr>
+          <p:cNvPr id="5" name="Graphic 4" descr="Clock with solid fill">
+            <a:extLst>
+              <a:ext uri="{FF2B5EF4-FFF2-40B4-BE49-F238E27FC236}">
+                <a16:creationId xmlns:a16="http://schemas.microsoft.com/office/drawing/2014/main" id="{050D947B-F757-3816-C5A0-DC60C90A1E1B}"/>
+              </a:ext>
+            </a:extLst>
+          </p:cNvPr>
+          <p:cNvPicPr>
+            <a:picLocks noChangeAspect="1"/>
+          </p:cNvPicPr>
+          <p:nvPr/>
+        </p:nvPicPr>
+        <p:blipFill>
+          <a:blip>
+            <a:extLst>
+              <a:ext uri="{96DAC541-7B7A-43D3-8B79-37D633B846F1}">
+                <asvg:svgBlip xmlns:asvg="http://schemas.microsoft.com/office/drawing/2016/SVG/main" r:embed="rId3"/>
+              </a:ext>
+            </a:extLst>
+          </a:blip>
+          <a:stretch>
+            <a:fillRect/>
+          </a:stretch>
+        </p:blipFill>
+        <p:spPr>
+          <a:xfrm>
+            <a:off x="2625368" y="2338965"/>
+            <a:ext cx="914400" cy="914400"/>
+          </a:xfrm>
+          <a:prstGeom prst="rect">
+            <a:avLst/>
+          </a:prstGeom>
+        </p:spPr>
+      </p:pic>
+      <p:sp>
+        <p:nvSpPr>
+          <p:cNvPr id="7" name="TextBox 6">
+            <a:extLst>
+              <a:ext uri="{FF2B5EF4-FFF2-40B4-BE49-F238E27FC236}">
+                <a16:creationId xmlns:a16="http://schemas.microsoft.com/office/drawing/2014/main" id="{94F594E8-BA68-BA69-578C-6F82EAFDF0C1}"/>
+              </a:ext>
+            </a:extLst>
+          </p:cNvPr>
+          <p:cNvSpPr txBox="1"/>
+          <p:nvPr/>
+        </p:nvSpPr>
+        <p:spPr>
+          <a:xfrm>
+            <a:off x="3445340" y="2288333"/>
+            <a:ext cx="3614872" cy="1015663"/>
+          </a:xfrm>
+          <a:prstGeom prst="rect">
+            <a:avLst/>
+          </a:prstGeom>
+          <a:noFill/>
+        </p:spPr>
+        <p:txBody>
+          <a:bodyPr wrap="square" rtlCol="0">
+            <a:spAutoFit/>
+          </a:bodyPr>
+          <a:lstStyle/>
+          <a:p>
+            <a:r>
+              <a:rPr lang="en-US" sz="3000" dirty="0"/>
+              <a:t>Tightly Synchronized Clocks</a:t>
+            </a:r>
+          </a:p>
+        </p:txBody>
+      </p:sp>
+    </p:spTree>
+    <p:extLst>
+      <p:ext uri="{BB962C8B-B14F-4D97-AF65-F5344CB8AC3E}">
+        <p14:creationId xmlns:p14="http://schemas.microsoft.com/office/powerpoint/2010/main" val="1834231864"/>
+      </p:ext>
+    </p:extLst>
+  </p:cSld>
+  <p:clrMapOvr>
+    <a:masterClrMapping/>
+  </p:clrMapOvr>
+  <mc:AlternateContent xmlns:mc="http://schemas.openxmlformats.org/markup-compatibility/2006">
+    <mc:Choice xmlns:p159="http://schemas.microsoft.com/office/powerpoint/2015/09/main" Requires="p159">
+      <p:transition spd="med">
+        <p159:morph option="byWord"/>
+      </p:transition>
+    </mc:Choice>
+    <mc:Fallback>
+      <p:transition spd="med">
+        <p:fade/>
+      </p:transition>
+    </mc:Fallback>
+  </mc:AlternateContent>
+</p:sld>
+</file>
+
+<file path=ppt/slides/slide14.xml><?xml version="1.0" encoding="utf-8"?>
+<p:sld xmlns:a="http://schemas.openxmlformats.org/drawingml/2006/main" xmlns:r="http://schemas.openxmlformats.org/officeDocument/2006/relationships" xmlns:p="http://schemas.openxmlformats.org/presentationml/2006/main">
+  <p:cSld>
+    <p:spTree>
+      <p:nvGrpSpPr>
+        <p:cNvPr id="1" name="">
+          <a:extLst>
+            <a:ext uri="{FF2B5EF4-FFF2-40B4-BE49-F238E27FC236}">
+              <a16:creationId xmlns:a16="http://schemas.microsoft.com/office/drawing/2014/main" id="{BFB75F0E-83D9-B2EF-DA0F-2432CE4054E4}"/>
+            </a:ext>
+          </a:extLst>
+        </p:cNvPr>
+        <p:cNvGrpSpPr/>
+        <p:nvPr/>
+      </p:nvGrpSpPr>
+      <p:grpSpPr>
+        <a:xfrm>
+          <a:off x="0" y="0"/>
+          <a:ext cx="0" cy="0"/>
+          <a:chOff x="0" y="0"/>
+          <a:chExt cx="0" cy="0"/>
+        </a:xfrm>
+      </p:grpSpPr>
+      <p:sp>
+        <p:nvSpPr>
+          <p:cNvPr id="6" name="Rounded Rectangle 5">
+            <a:extLst>
+              <a:ext uri="{FF2B5EF4-FFF2-40B4-BE49-F238E27FC236}">
+                <a16:creationId xmlns:a16="http://schemas.microsoft.com/office/drawing/2014/main" id="{B9B202EB-22D3-D5DC-1662-54FD99455845}"/>
+              </a:ext>
+            </a:extLst>
+          </p:cNvPr>
+          <p:cNvSpPr/>
+          <p:nvPr/>
+        </p:nvSpPr>
+        <p:spPr>
+          <a:xfrm>
+            <a:off x="702884" y="2761827"/>
+            <a:ext cx="6709719" cy="2279729"/>
+          </a:xfrm>
+          <a:prstGeom prst="roundRect">
+            <a:avLst/>
+          </a:prstGeom>
+          <a:solidFill>
+            <a:schemeClr val="accent4">
+              <a:lumMod val="40000"/>
+              <a:lumOff val="60000"/>
+            </a:schemeClr>
+          </a:solidFill>
+          <a:ln>
+            <a:noFill/>
+          </a:ln>
+        </p:spPr>
+        <p:style>
+          <a:lnRef idx="2">
+            <a:schemeClr val="accent1">
+              <a:shade val="15000"/>
+            </a:schemeClr>
+          </a:lnRef>
+          <a:fillRef idx="1">
+            <a:schemeClr val="accent1"/>
+          </a:fillRef>
+          <a:effectRef idx="0">
+            <a:schemeClr val="accent1"/>
+          </a:effectRef>
+          <a:fontRef idx="minor">
+            <a:schemeClr val="lt1"/>
+          </a:fontRef>
+        </p:style>
+        <p:txBody>
+          <a:bodyPr rtlCol="0" anchor="ctr"/>
+          <a:lstStyle/>
+          <a:p>
+            <a:pPr algn="ctr"/>
+            <a:endParaRPr lang="en-US"/>
+          </a:p>
+        </p:txBody>
+      </p:sp>
+      <p:sp>
+        <p:nvSpPr>
+          <p:cNvPr id="17" name="Rectangle 16">
+            <a:extLst>
+              <a:ext uri="{FF2B5EF4-FFF2-40B4-BE49-F238E27FC236}">
+                <a16:creationId xmlns:a16="http://schemas.microsoft.com/office/drawing/2014/main" id="{B2799CBC-BEE6-91F7-F338-E913CA3EE074}"/>
+              </a:ext>
+            </a:extLst>
+          </p:cNvPr>
+          <p:cNvSpPr/>
+          <p:nvPr/>
+        </p:nvSpPr>
+        <p:spPr>
+          <a:xfrm rot="16200000">
+            <a:off x="2522582" y="-387076"/>
+            <a:ext cx="68673" cy="3246390"/>
+          </a:xfrm>
+          <a:prstGeom prst="rect">
+            <a:avLst/>
+          </a:prstGeom>
+          <a:solidFill>
+            <a:srgbClr val="FF0000"/>
+          </a:solidFill>
+          <a:ln>
+            <a:solidFill>
+              <a:srgbClr val="FF0000"/>
+            </a:solidFill>
+          </a:ln>
+        </p:spPr>
+        <p:style>
+          <a:lnRef idx="2">
+            <a:schemeClr val="accent1">
+              <a:shade val="15000"/>
+            </a:schemeClr>
+          </a:lnRef>
+          <a:fillRef idx="1">
+            <a:schemeClr val="accent1"/>
+          </a:fillRef>
+          <a:effectRef idx="0">
+            <a:schemeClr val="accent1"/>
+          </a:effectRef>
+          <a:fontRef idx="minor">
+            <a:schemeClr val="lt1"/>
+          </a:fontRef>
+        </p:style>
+        <p:txBody>
+          <a:bodyPr rtlCol="0" anchor="ctr"/>
+          <a:lstStyle/>
+          <a:p>
+            <a:pPr algn="ctr"/>
+            <a:endParaRPr lang="en-US">
+              <a:latin typeface="Times New Roman" panose="02020603050405020304" pitchFamily="18" charset="0"/>
+              <a:cs typeface="Times New Roman" panose="02020603050405020304" pitchFamily="18" charset="0"/>
+            </a:endParaRPr>
+          </a:p>
+        </p:txBody>
+      </p:sp>
+      <p:sp>
+        <p:nvSpPr>
+          <p:cNvPr id="18" name="Rectangle 17">
+            <a:extLst>
+              <a:ext uri="{FF2B5EF4-FFF2-40B4-BE49-F238E27FC236}">
+                <a16:creationId xmlns:a16="http://schemas.microsoft.com/office/drawing/2014/main" id="{213FAB46-FF81-4306-B26A-5DD0346FE1C8}"/>
+              </a:ext>
+            </a:extLst>
+          </p:cNvPr>
+          <p:cNvSpPr/>
+          <p:nvPr/>
+        </p:nvSpPr>
+        <p:spPr>
+          <a:xfrm rot="16200000">
+            <a:off x="2522581" y="-318404"/>
+            <a:ext cx="68674" cy="3246390"/>
+          </a:xfrm>
+          <a:prstGeom prst="rect">
+            <a:avLst/>
+          </a:prstGeom>
+          <a:solidFill>
+            <a:srgbClr val="7030A0"/>
+          </a:solidFill>
+          <a:ln>
+            <a:solidFill>
+              <a:srgbClr val="7030A0"/>
+            </a:solidFill>
+          </a:ln>
+        </p:spPr>
+        <p:style>
+          <a:lnRef idx="2">
+            <a:schemeClr val="accent1">
+              <a:shade val="15000"/>
+            </a:schemeClr>
+          </a:lnRef>
+          <a:fillRef idx="1">
+            <a:schemeClr val="accent1"/>
+          </a:fillRef>
+          <a:effectRef idx="0">
+            <a:schemeClr val="accent1"/>
+          </a:effectRef>
+          <a:fontRef idx="minor">
+            <a:schemeClr val="lt1"/>
+          </a:fontRef>
+        </p:style>
+        <p:txBody>
+          <a:bodyPr rtlCol="0" anchor="ctr"/>
+          <a:lstStyle/>
+          <a:p>
+            <a:pPr algn="ctr"/>
+            <a:endParaRPr lang="en-US">
+              <a:latin typeface="Times New Roman" panose="02020603050405020304" pitchFamily="18" charset="0"/>
+              <a:cs typeface="Times New Roman" panose="02020603050405020304" pitchFamily="18" charset="0"/>
+            </a:endParaRPr>
+          </a:p>
+        </p:txBody>
+      </p:sp>
+      <p:sp>
+        <p:nvSpPr>
+          <p:cNvPr id="12" name="TextBox 11">
+            <a:extLst>
+              <a:ext uri="{FF2B5EF4-FFF2-40B4-BE49-F238E27FC236}">
+                <a16:creationId xmlns:a16="http://schemas.microsoft.com/office/drawing/2014/main" id="{05685F09-890E-EEB0-8E6E-58F658C38486}"/>
+              </a:ext>
+            </a:extLst>
+          </p:cNvPr>
+          <p:cNvSpPr txBox="1"/>
+          <p:nvPr/>
+        </p:nvSpPr>
+        <p:spPr>
+          <a:xfrm>
+            <a:off x="772906" y="405121"/>
+            <a:ext cx="6591721" cy="830997"/>
+          </a:xfrm>
+          <a:prstGeom prst="rect">
+            <a:avLst/>
+          </a:prstGeom>
+          <a:noFill/>
+        </p:spPr>
+        <p:txBody>
+          <a:bodyPr wrap="square" rtlCol="0">
+            <a:spAutoFit/>
+          </a:bodyPr>
+          <a:lstStyle/>
+          <a:p>
+            <a:r>
+              <a:rPr lang="en-US" sz="4800" dirty="0">
+                <a:latin typeface="Times New Roman" panose="02020603050405020304" pitchFamily="18" charset="0"/>
+                <a:cs typeface="Times New Roman" panose="02020603050405020304" pitchFamily="18" charset="0"/>
+              </a:rPr>
+              <a:t>Thesis: Latency Fairness</a:t>
+            </a:r>
+            <a:endParaRPr lang="en-US" sz="3000" dirty="0">
+              <a:latin typeface="Times New Roman" panose="02020603050405020304" pitchFamily="18" charset="0"/>
+              <a:cs typeface="Times New Roman" panose="02020603050405020304" pitchFamily="18" charset="0"/>
+            </a:endParaRPr>
+          </a:p>
+        </p:txBody>
+      </p:sp>
+      <p:sp>
+        <p:nvSpPr>
+          <p:cNvPr id="4" name="TextBox 3">
+            <a:extLst>
+              <a:ext uri="{FF2B5EF4-FFF2-40B4-BE49-F238E27FC236}">
+                <a16:creationId xmlns:a16="http://schemas.microsoft.com/office/drawing/2014/main" id="{2B7557A0-5EE6-3A7C-044E-CFE1CC73DAFC}"/>
+              </a:ext>
+            </a:extLst>
+          </p:cNvPr>
+          <p:cNvSpPr txBox="1"/>
+          <p:nvPr/>
+        </p:nvSpPr>
+        <p:spPr>
+          <a:xfrm>
+            <a:off x="4229584" y="3089189"/>
+            <a:ext cx="2830628" cy="1015663"/>
+          </a:xfrm>
+          <a:prstGeom prst="rect">
+            <a:avLst/>
+          </a:prstGeom>
+          <a:noFill/>
+        </p:spPr>
+        <p:txBody>
+          <a:bodyPr wrap="square" rtlCol="0">
+            <a:spAutoFit/>
+          </a:bodyPr>
+          <a:lstStyle/>
+          <a:p>
+            <a:pPr algn="ctr"/>
+            <a:r>
+              <a:rPr lang="en-US" sz="3000" dirty="0">
+                <a:solidFill>
+                  <a:srgbClr val="7030A0"/>
+                </a:solidFill>
+                <a:latin typeface="Times New Roman" panose="02020603050405020304" pitchFamily="18" charset="0"/>
+                <a:cs typeface="Times New Roman" panose="02020603050405020304" pitchFamily="18" charset="0"/>
+              </a:rPr>
+              <a:t>Inbound</a:t>
+            </a:r>
+            <a:br>
+              <a:rPr lang="en-US" sz="3000" dirty="0">
+                <a:solidFill>
+                  <a:srgbClr val="7030A0"/>
+                </a:solidFill>
+                <a:latin typeface="Times New Roman" panose="02020603050405020304" pitchFamily="18" charset="0"/>
+                <a:cs typeface="Times New Roman" panose="02020603050405020304" pitchFamily="18" charset="0"/>
+              </a:rPr>
+            </a:br>
+            <a:r>
+              <a:rPr lang="en-US" sz="3000" dirty="0">
+                <a:solidFill>
+                  <a:srgbClr val="7030A0"/>
+                </a:solidFill>
+                <a:latin typeface="Times New Roman" panose="02020603050405020304" pitchFamily="18" charset="0"/>
+                <a:cs typeface="Times New Roman" panose="02020603050405020304" pitchFamily="18" charset="0"/>
+              </a:rPr>
+              <a:t>Communication</a:t>
+            </a:r>
+          </a:p>
+        </p:txBody>
+      </p:sp>
+      <p:sp>
+        <p:nvSpPr>
+          <p:cNvPr id="10" name="TextBox 9">
+            <a:extLst>
+              <a:ext uri="{FF2B5EF4-FFF2-40B4-BE49-F238E27FC236}">
+                <a16:creationId xmlns:a16="http://schemas.microsoft.com/office/drawing/2014/main" id="{DB7AE55C-0AA9-6C81-156E-C79BAACE2B08}"/>
+              </a:ext>
+            </a:extLst>
+          </p:cNvPr>
+          <p:cNvSpPr txBox="1"/>
+          <p:nvPr/>
+        </p:nvSpPr>
+        <p:spPr>
+          <a:xfrm>
+            <a:off x="933723" y="3095367"/>
+            <a:ext cx="2830628" cy="1015663"/>
+          </a:xfrm>
+          <a:prstGeom prst="rect">
+            <a:avLst/>
+          </a:prstGeom>
+          <a:noFill/>
+        </p:spPr>
+        <p:txBody>
+          <a:bodyPr wrap="square" rtlCol="0">
+            <a:spAutoFit/>
+          </a:bodyPr>
+          <a:lstStyle/>
+          <a:p>
+            <a:pPr algn="ctr"/>
+            <a:r>
+              <a:rPr lang="en-US" sz="3000" dirty="0">
+                <a:solidFill>
+                  <a:srgbClr val="7030A0"/>
+                </a:solidFill>
+                <a:latin typeface="Times New Roman" panose="02020603050405020304" pitchFamily="18" charset="0"/>
+                <a:cs typeface="Times New Roman" panose="02020603050405020304" pitchFamily="18" charset="0"/>
+              </a:rPr>
+              <a:t>Outbound</a:t>
+            </a:r>
+            <a:br>
+              <a:rPr lang="en-US" sz="3000" dirty="0">
+                <a:solidFill>
+                  <a:srgbClr val="7030A0"/>
+                </a:solidFill>
+                <a:latin typeface="Times New Roman" panose="02020603050405020304" pitchFamily="18" charset="0"/>
+                <a:cs typeface="Times New Roman" panose="02020603050405020304" pitchFamily="18" charset="0"/>
+              </a:rPr>
+            </a:br>
+            <a:r>
+              <a:rPr lang="en-US" sz="3000" dirty="0">
+                <a:solidFill>
+                  <a:srgbClr val="7030A0"/>
+                </a:solidFill>
+                <a:latin typeface="Times New Roman" panose="02020603050405020304" pitchFamily="18" charset="0"/>
+                <a:cs typeface="Times New Roman" panose="02020603050405020304" pitchFamily="18" charset="0"/>
+              </a:rPr>
+              <a:t>Communication</a:t>
+            </a:r>
+          </a:p>
+        </p:txBody>
+      </p:sp>
+      <p:pic>
+        <p:nvPicPr>
+          <p:cNvPr id="5" name="Graphic 4" descr="Clock with solid fill">
+            <a:extLst>
+              <a:ext uri="{FF2B5EF4-FFF2-40B4-BE49-F238E27FC236}">
+                <a16:creationId xmlns:a16="http://schemas.microsoft.com/office/drawing/2014/main" id="{430540FE-3929-1ECF-94B3-369F58C21003}"/>
+              </a:ext>
+            </a:extLst>
+          </p:cNvPr>
+          <p:cNvPicPr>
+            <a:picLocks noChangeAspect="1"/>
+          </p:cNvPicPr>
+          <p:nvPr/>
+        </p:nvPicPr>
+        <p:blipFill>
+          <a:blip>
+            <a:extLst>
+              <a:ext uri="{96DAC541-7B7A-43D3-8B79-37D633B846F1}">
+                <asvg:svgBlip xmlns:asvg="http://schemas.microsoft.com/office/drawing/2016/SVG/main" r:embed="rId3"/>
+              </a:ext>
+            </a:extLst>
+          </a:blip>
+          <a:stretch>
+            <a:fillRect/>
+          </a:stretch>
+        </p:blipFill>
+        <p:spPr>
+          <a:xfrm>
+            <a:off x="2625368" y="2338965"/>
+            <a:ext cx="914400" cy="914400"/>
+          </a:xfrm>
+          <a:prstGeom prst="rect">
+            <a:avLst/>
+          </a:prstGeom>
+        </p:spPr>
+      </p:pic>
+      <p:sp>
+        <p:nvSpPr>
+          <p:cNvPr id="7" name="TextBox 6">
+            <a:extLst>
+              <a:ext uri="{FF2B5EF4-FFF2-40B4-BE49-F238E27FC236}">
+                <a16:creationId xmlns:a16="http://schemas.microsoft.com/office/drawing/2014/main" id="{7E101FEE-6EFF-7EE3-0AE7-66FE7CA17C4D}"/>
+              </a:ext>
+            </a:extLst>
+          </p:cNvPr>
+          <p:cNvSpPr txBox="1"/>
+          <p:nvPr/>
+        </p:nvSpPr>
+        <p:spPr>
+          <a:xfrm>
+            <a:off x="3445340" y="2288333"/>
+            <a:ext cx="3614872" cy="1015663"/>
+          </a:xfrm>
+          <a:prstGeom prst="rect">
+            <a:avLst/>
+          </a:prstGeom>
+          <a:noFill/>
+        </p:spPr>
+        <p:txBody>
+          <a:bodyPr wrap="square" rtlCol="0">
+            <a:spAutoFit/>
+          </a:bodyPr>
+          <a:lstStyle/>
+          <a:p>
+            <a:r>
+              <a:rPr lang="en-US" sz="3000" dirty="0"/>
+              <a:t>Tightly Synchronized Clocks</a:t>
+            </a:r>
+          </a:p>
+        </p:txBody>
+      </p:sp>
+      <p:sp>
+        <p:nvSpPr>
+          <p:cNvPr id="2" name="Rounded Rectangle 1">
+            <a:extLst>
+              <a:ext uri="{FF2B5EF4-FFF2-40B4-BE49-F238E27FC236}">
+                <a16:creationId xmlns:a16="http://schemas.microsoft.com/office/drawing/2014/main" id="{B45E7900-A42C-E8D5-A587-62015E92E7F1}"/>
+              </a:ext>
+            </a:extLst>
+          </p:cNvPr>
+          <p:cNvSpPr/>
+          <p:nvPr/>
+        </p:nvSpPr>
+        <p:spPr>
+          <a:xfrm>
+            <a:off x="7643442" y="2761827"/>
+            <a:ext cx="4032482" cy="2279729"/>
+          </a:xfrm>
+          <a:prstGeom prst="roundRect">
+            <a:avLst/>
+          </a:prstGeom>
+          <a:solidFill>
+            <a:schemeClr val="accent4">
+              <a:lumMod val="40000"/>
+              <a:lumOff val="60000"/>
+            </a:schemeClr>
+          </a:solidFill>
+          <a:ln>
+            <a:noFill/>
+          </a:ln>
+        </p:spPr>
+        <p:style>
+          <a:lnRef idx="2">
+            <a:schemeClr val="accent1">
+              <a:shade val="15000"/>
+            </a:schemeClr>
+          </a:lnRef>
+          <a:fillRef idx="1">
+            <a:schemeClr val="accent1"/>
+          </a:fillRef>
+          <a:effectRef idx="0">
+            <a:schemeClr val="accent1"/>
+          </a:effectRef>
+          <a:fontRef idx="minor">
+            <a:schemeClr val="lt1"/>
+          </a:fontRef>
+        </p:style>
+        <p:txBody>
+          <a:bodyPr rtlCol="0" anchor="ctr"/>
+          <a:lstStyle/>
+          <a:p>
+            <a:pPr algn="ctr"/>
+            <a:endParaRPr lang="en-US"/>
+          </a:p>
+        </p:txBody>
+      </p:sp>
+      <p:sp>
+        <p:nvSpPr>
+          <p:cNvPr id="8" name="TextBox 7">
+            <a:extLst>
+              <a:ext uri="{FF2B5EF4-FFF2-40B4-BE49-F238E27FC236}">
+                <a16:creationId xmlns:a16="http://schemas.microsoft.com/office/drawing/2014/main" id="{9A5E1B3E-60E2-AAB7-DED5-B166F29F5ADA}"/>
+              </a:ext>
+            </a:extLst>
+          </p:cNvPr>
+          <p:cNvSpPr txBox="1"/>
+          <p:nvPr/>
+        </p:nvSpPr>
+        <p:spPr>
+          <a:xfrm>
+            <a:off x="8232575" y="3089189"/>
+            <a:ext cx="2830628" cy="1015663"/>
+          </a:xfrm>
+          <a:prstGeom prst="rect">
+            <a:avLst/>
+          </a:prstGeom>
+          <a:noFill/>
+        </p:spPr>
+        <p:txBody>
+          <a:bodyPr wrap="square" rtlCol="0">
+            <a:spAutoFit/>
+          </a:bodyPr>
+          <a:lstStyle/>
+          <a:p>
+            <a:pPr algn="ctr"/>
+            <a:r>
+              <a:rPr lang="en-US" sz="3000" dirty="0">
+                <a:solidFill>
+                  <a:srgbClr val="7030A0"/>
+                </a:solidFill>
+                <a:latin typeface="Times New Roman" panose="02020603050405020304" pitchFamily="18" charset="0"/>
+                <a:cs typeface="Times New Roman" panose="02020603050405020304" pitchFamily="18" charset="0"/>
+              </a:rPr>
+              <a:t>Inbound</a:t>
+            </a:r>
+            <a:br>
+              <a:rPr lang="en-US" sz="3000" dirty="0">
+                <a:solidFill>
+                  <a:srgbClr val="7030A0"/>
+                </a:solidFill>
+                <a:latin typeface="Times New Roman" panose="02020603050405020304" pitchFamily="18" charset="0"/>
+                <a:cs typeface="Times New Roman" panose="02020603050405020304" pitchFamily="18" charset="0"/>
+              </a:rPr>
+            </a:br>
+            <a:r>
+              <a:rPr lang="en-US" sz="3000" dirty="0">
+                <a:solidFill>
+                  <a:srgbClr val="7030A0"/>
+                </a:solidFill>
+                <a:latin typeface="Times New Roman" panose="02020603050405020304" pitchFamily="18" charset="0"/>
+                <a:cs typeface="Times New Roman" panose="02020603050405020304" pitchFamily="18" charset="0"/>
+              </a:rPr>
+              <a:t>Communication</a:t>
+            </a:r>
+          </a:p>
+        </p:txBody>
+      </p:sp>
+    </p:spTree>
+    <p:extLst>
+      <p:ext uri="{BB962C8B-B14F-4D97-AF65-F5344CB8AC3E}">
+        <p14:creationId xmlns:p14="http://schemas.microsoft.com/office/powerpoint/2010/main" val="3660530749"/>
+      </p:ext>
+    </p:extLst>
+  </p:cSld>
+  <p:clrMapOvr>
+    <a:masterClrMapping/>
+  </p:clrMapOvr>
+  <mc:AlternateContent xmlns:mc="http://schemas.openxmlformats.org/markup-compatibility/2006">
+    <mc:Choice xmlns:p159="http://schemas.microsoft.com/office/powerpoint/2015/09/main" Requires="p159">
+      <p:transition spd="med">
+        <p159:morph option="byWord"/>
+      </p:transition>
+    </mc:Choice>
+    <mc:Fallback>
+      <p:transition spd="med">
+        <p:fade/>
+      </p:transition>
+    </mc:Fallback>
+  </mc:AlternateContent>
+</p:sld>
+</file>
+
+<file path=ppt/slides/slide15.xml><?xml version="1.0" encoding="utf-8"?>
+<p:sld xmlns:a="http://schemas.openxmlformats.org/drawingml/2006/main" xmlns:r="http://schemas.openxmlformats.org/officeDocument/2006/relationships" xmlns:p="http://schemas.openxmlformats.org/presentationml/2006/main">
+  <p:cSld>
+    <p:spTree>
+      <p:nvGrpSpPr>
+        <p:cNvPr id="1" name="">
+          <a:extLst>
+            <a:ext uri="{FF2B5EF4-FFF2-40B4-BE49-F238E27FC236}">
+              <a16:creationId xmlns:a16="http://schemas.microsoft.com/office/drawing/2014/main" id="{B75BEBD4-ED13-6CBD-00AF-7A62EC1F89F6}"/>
+            </a:ext>
+          </a:extLst>
+        </p:cNvPr>
+        <p:cNvGrpSpPr/>
+        <p:nvPr/>
+      </p:nvGrpSpPr>
+      <p:grpSpPr>
+        <a:xfrm>
+          <a:off x="0" y="0"/>
+          <a:ext cx="0" cy="0"/>
+          <a:chOff x="0" y="0"/>
+          <a:chExt cx="0" cy="0"/>
+        </a:xfrm>
+      </p:grpSpPr>
+      <p:sp>
+        <p:nvSpPr>
+          <p:cNvPr id="6" name="Rounded Rectangle 5">
+            <a:extLst>
+              <a:ext uri="{FF2B5EF4-FFF2-40B4-BE49-F238E27FC236}">
+                <a16:creationId xmlns:a16="http://schemas.microsoft.com/office/drawing/2014/main" id="{BB8E0F07-4FFE-BB58-6C05-8669AA98C5E7}"/>
+              </a:ext>
+            </a:extLst>
+          </p:cNvPr>
+          <p:cNvSpPr/>
+          <p:nvPr/>
+        </p:nvSpPr>
+        <p:spPr>
+          <a:xfrm>
+            <a:off x="702884" y="2761827"/>
+            <a:ext cx="6709719" cy="2279729"/>
+          </a:xfrm>
+          <a:prstGeom prst="roundRect">
+            <a:avLst/>
+          </a:prstGeom>
+          <a:solidFill>
+            <a:schemeClr val="accent4">
+              <a:lumMod val="40000"/>
+              <a:lumOff val="60000"/>
+            </a:schemeClr>
+          </a:solidFill>
+          <a:ln>
+            <a:noFill/>
+          </a:ln>
+        </p:spPr>
+        <p:style>
+          <a:lnRef idx="2">
+            <a:schemeClr val="accent1">
+              <a:shade val="15000"/>
+            </a:schemeClr>
+          </a:lnRef>
+          <a:fillRef idx="1">
+            <a:schemeClr val="accent1"/>
+          </a:fillRef>
+          <a:effectRef idx="0">
+            <a:schemeClr val="accent1"/>
+          </a:effectRef>
+          <a:fontRef idx="minor">
+            <a:schemeClr val="lt1"/>
+          </a:fontRef>
+        </p:style>
+        <p:txBody>
+          <a:bodyPr rtlCol="0" anchor="ctr"/>
+          <a:lstStyle/>
+          <a:p>
+            <a:pPr algn="ctr"/>
+            <a:endParaRPr lang="en-US"/>
+          </a:p>
+        </p:txBody>
+      </p:sp>
+      <p:sp>
+        <p:nvSpPr>
+          <p:cNvPr id="17" name="Rectangle 16">
+            <a:extLst>
+              <a:ext uri="{FF2B5EF4-FFF2-40B4-BE49-F238E27FC236}">
+                <a16:creationId xmlns:a16="http://schemas.microsoft.com/office/drawing/2014/main" id="{223A66F5-0D92-D77D-C653-D58EA35005B7}"/>
+              </a:ext>
+            </a:extLst>
+          </p:cNvPr>
+          <p:cNvSpPr/>
+          <p:nvPr/>
+        </p:nvSpPr>
+        <p:spPr>
+          <a:xfrm rot="16200000">
+            <a:off x="2522582" y="-387076"/>
+            <a:ext cx="68673" cy="3246390"/>
+          </a:xfrm>
+          <a:prstGeom prst="rect">
+            <a:avLst/>
+          </a:prstGeom>
+          <a:solidFill>
+            <a:srgbClr val="FF0000"/>
+          </a:solidFill>
+          <a:ln>
+            <a:solidFill>
+              <a:srgbClr val="FF0000"/>
+            </a:solidFill>
+          </a:ln>
+        </p:spPr>
+        <p:style>
+          <a:lnRef idx="2">
+            <a:schemeClr val="accent1">
+              <a:shade val="15000"/>
+            </a:schemeClr>
+          </a:lnRef>
+          <a:fillRef idx="1">
+            <a:schemeClr val="accent1"/>
+          </a:fillRef>
+          <a:effectRef idx="0">
+            <a:schemeClr val="accent1"/>
+          </a:effectRef>
+          <a:fontRef idx="minor">
+            <a:schemeClr val="lt1"/>
+          </a:fontRef>
+        </p:style>
+        <p:txBody>
+          <a:bodyPr rtlCol="0" anchor="ctr"/>
+          <a:lstStyle/>
+          <a:p>
+            <a:pPr algn="ctr"/>
+            <a:endParaRPr lang="en-US">
+              <a:latin typeface="Times New Roman" panose="02020603050405020304" pitchFamily="18" charset="0"/>
+              <a:cs typeface="Times New Roman" panose="02020603050405020304" pitchFamily="18" charset="0"/>
+            </a:endParaRPr>
+          </a:p>
+        </p:txBody>
+      </p:sp>
+      <p:sp>
+        <p:nvSpPr>
+          <p:cNvPr id="18" name="Rectangle 17">
+            <a:extLst>
+              <a:ext uri="{FF2B5EF4-FFF2-40B4-BE49-F238E27FC236}">
+                <a16:creationId xmlns:a16="http://schemas.microsoft.com/office/drawing/2014/main" id="{9CFE63B5-932E-3DFD-308B-FC0860DA087E}"/>
+              </a:ext>
+            </a:extLst>
+          </p:cNvPr>
+          <p:cNvSpPr/>
+          <p:nvPr/>
+        </p:nvSpPr>
+        <p:spPr>
+          <a:xfrm rot="16200000">
+            <a:off x="2522581" y="-318404"/>
+            <a:ext cx="68674" cy="3246390"/>
+          </a:xfrm>
+          <a:prstGeom prst="rect">
+            <a:avLst/>
+          </a:prstGeom>
+          <a:solidFill>
+            <a:srgbClr val="7030A0"/>
+          </a:solidFill>
+          <a:ln>
+            <a:solidFill>
+              <a:srgbClr val="7030A0"/>
+            </a:solidFill>
+          </a:ln>
+        </p:spPr>
+        <p:style>
+          <a:lnRef idx="2">
+            <a:schemeClr val="accent1">
+              <a:shade val="15000"/>
+            </a:schemeClr>
+          </a:lnRef>
+          <a:fillRef idx="1">
+            <a:schemeClr val="accent1"/>
+          </a:fillRef>
+          <a:effectRef idx="0">
+            <a:schemeClr val="accent1"/>
+          </a:effectRef>
+          <a:fontRef idx="minor">
+            <a:schemeClr val="lt1"/>
+          </a:fontRef>
+        </p:style>
+        <p:txBody>
+          <a:bodyPr rtlCol="0" anchor="ctr"/>
+          <a:lstStyle/>
+          <a:p>
+            <a:pPr algn="ctr"/>
+            <a:endParaRPr lang="en-US">
+              <a:latin typeface="Times New Roman" panose="02020603050405020304" pitchFamily="18" charset="0"/>
+              <a:cs typeface="Times New Roman" panose="02020603050405020304" pitchFamily="18" charset="0"/>
+            </a:endParaRPr>
+          </a:p>
+        </p:txBody>
+      </p:sp>
+      <p:sp>
+        <p:nvSpPr>
+          <p:cNvPr id="12" name="TextBox 11">
+            <a:extLst>
+              <a:ext uri="{FF2B5EF4-FFF2-40B4-BE49-F238E27FC236}">
+                <a16:creationId xmlns:a16="http://schemas.microsoft.com/office/drawing/2014/main" id="{9E44CFF1-F54A-2325-4B2F-2D5989C5A006}"/>
+              </a:ext>
+            </a:extLst>
+          </p:cNvPr>
+          <p:cNvSpPr txBox="1"/>
+          <p:nvPr/>
+        </p:nvSpPr>
+        <p:spPr>
+          <a:xfrm>
+            <a:off x="772906" y="405121"/>
+            <a:ext cx="6591721" cy="830997"/>
+          </a:xfrm>
+          <a:prstGeom prst="rect">
+            <a:avLst/>
+          </a:prstGeom>
+          <a:noFill/>
+        </p:spPr>
+        <p:txBody>
+          <a:bodyPr wrap="square" rtlCol="0">
+            <a:spAutoFit/>
+          </a:bodyPr>
+          <a:lstStyle/>
+          <a:p>
+            <a:r>
+              <a:rPr lang="en-US" sz="4800" dirty="0">
+                <a:latin typeface="Times New Roman" panose="02020603050405020304" pitchFamily="18" charset="0"/>
+                <a:cs typeface="Times New Roman" panose="02020603050405020304" pitchFamily="18" charset="0"/>
+              </a:rPr>
+              <a:t>Thesis: Latency Fairness</a:t>
+            </a:r>
+            <a:endParaRPr lang="en-US" sz="3000" dirty="0">
+              <a:latin typeface="Times New Roman" panose="02020603050405020304" pitchFamily="18" charset="0"/>
+              <a:cs typeface="Times New Roman" panose="02020603050405020304" pitchFamily="18" charset="0"/>
+            </a:endParaRPr>
+          </a:p>
+        </p:txBody>
+      </p:sp>
+      <p:sp>
+        <p:nvSpPr>
+          <p:cNvPr id="4" name="TextBox 3">
+            <a:extLst>
+              <a:ext uri="{FF2B5EF4-FFF2-40B4-BE49-F238E27FC236}">
+                <a16:creationId xmlns:a16="http://schemas.microsoft.com/office/drawing/2014/main" id="{6F367196-774A-F674-BF2F-2C92C1D81EA7}"/>
+              </a:ext>
+            </a:extLst>
+          </p:cNvPr>
+          <p:cNvSpPr txBox="1"/>
+          <p:nvPr/>
+        </p:nvSpPr>
+        <p:spPr>
+          <a:xfrm>
+            <a:off x="4229584" y="3089189"/>
+            <a:ext cx="2830628" cy="1015663"/>
+          </a:xfrm>
+          <a:prstGeom prst="rect">
+            <a:avLst/>
+          </a:prstGeom>
+          <a:noFill/>
+        </p:spPr>
+        <p:txBody>
+          <a:bodyPr wrap="square" rtlCol="0">
+            <a:spAutoFit/>
+          </a:bodyPr>
+          <a:lstStyle/>
+          <a:p>
+            <a:pPr algn="ctr"/>
+            <a:r>
+              <a:rPr lang="en-US" sz="3000" dirty="0">
+                <a:solidFill>
+                  <a:srgbClr val="7030A0"/>
+                </a:solidFill>
+                <a:latin typeface="Times New Roman" panose="02020603050405020304" pitchFamily="18" charset="0"/>
+                <a:cs typeface="Times New Roman" panose="02020603050405020304" pitchFamily="18" charset="0"/>
+              </a:rPr>
+              <a:t>Inbound</a:t>
+            </a:r>
+            <a:br>
+              <a:rPr lang="en-US" sz="3000" dirty="0">
+                <a:solidFill>
+                  <a:srgbClr val="7030A0"/>
+                </a:solidFill>
+                <a:latin typeface="Times New Roman" panose="02020603050405020304" pitchFamily="18" charset="0"/>
+                <a:cs typeface="Times New Roman" panose="02020603050405020304" pitchFamily="18" charset="0"/>
+              </a:rPr>
+            </a:br>
+            <a:r>
+              <a:rPr lang="en-US" sz="3000" dirty="0">
+                <a:solidFill>
+                  <a:srgbClr val="7030A0"/>
+                </a:solidFill>
+                <a:latin typeface="Times New Roman" panose="02020603050405020304" pitchFamily="18" charset="0"/>
+                <a:cs typeface="Times New Roman" panose="02020603050405020304" pitchFamily="18" charset="0"/>
+              </a:rPr>
+              <a:t>Communication</a:t>
+            </a:r>
+          </a:p>
+        </p:txBody>
+      </p:sp>
+      <p:sp>
+        <p:nvSpPr>
+          <p:cNvPr id="10" name="TextBox 9">
+            <a:extLst>
+              <a:ext uri="{FF2B5EF4-FFF2-40B4-BE49-F238E27FC236}">
+                <a16:creationId xmlns:a16="http://schemas.microsoft.com/office/drawing/2014/main" id="{A33975DC-1D8E-7593-0160-027F7BE9AB3E}"/>
+              </a:ext>
+            </a:extLst>
+          </p:cNvPr>
+          <p:cNvSpPr txBox="1"/>
+          <p:nvPr/>
+        </p:nvSpPr>
+        <p:spPr>
+          <a:xfrm>
+            <a:off x="933723" y="3095367"/>
+            <a:ext cx="2830628" cy="1015663"/>
+          </a:xfrm>
+          <a:prstGeom prst="rect">
+            <a:avLst/>
+          </a:prstGeom>
+          <a:noFill/>
+        </p:spPr>
+        <p:txBody>
+          <a:bodyPr wrap="square" rtlCol="0">
+            <a:spAutoFit/>
+          </a:bodyPr>
+          <a:lstStyle/>
+          <a:p>
+            <a:pPr algn="ctr"/>
+            <a:r>
+              <a:rPr lang="en-US" sz="3000" dirty="0">
+                <a:solidFill>
+                  <a:srgbClr val="7030A0"/>
+                </a:solidFill>
+                <a:latin typeface="Times New Roman" panose="02020603050405020304" pitchFamily="18" charset="0"/>
+                <a:cs typeface="Times New Roman" panose="02020603050405020304" pitchFamily="18" charset="0"/>
+              </a:rPr>
+              <a:t>Outbound</a:t>
+            </a:r>
+            <a:br>
+              <a:rPr lang="en-US" sz="3000" dirty="0">
+                <a:solidFill>
+                  <a:srgbClr val="7030A0"/>
+                </a:solidFill>
+                <a:latin typeface="Times New Roman" panose="02020603050405020304" pitchFamily="18" charset="0"/>
+                <a:cs typeface="Times New Roman" panose="02020603050405020304" pitchFamily="18" charset="0"/>
+              </a:rPr>
+            </a:br>
+            <a:r>
+              <a:rPr lang="en-US" sz="3000" dirty="0">
+                <a:solidFill>
+                  <a:srgbClr val="7030A0"/>
+                </a:solidFill>
+                <a:latin typeface="Times New Roman" panose="02020603050405020304" pitchFamily="18" charset="0"/>
+                <a:cs typeface="Times New Roman" panose="02020603050405020304" pitchFamily="18" charset="0"/>
+              </a:rPr>
+              <a:t>Communication</a:t>
+            </a:r>
+          </a:p>
+        </p:txBody>
+      </p:sp>
+      <p:pic>
+        <p:nvPicPr>
+          <p:cNvPr id="5" name="Graphic 4" descr="Clock with solid fill">
+            <a:extLst>
+              <a:ext uri="{FF2B5EF4-FFF2-40B4-BE49-F238E27FC236}">
+                <a16:creationId xmlns:a16="http://schemas.microsoft.com/office/drawing/2014/main" id="{7A5AA61F-047E-A4CE-40AE-5AA6CA0B6B33}"/>
+              </a:ext>
+            </a:extLst>
+          </p:cNvPr>
+          <p:cNvPicPr>
+            <a:picLocks noChangeAspect="1"/>
+          </p:cNvPicPr>
+          <p:nvPr/>
+        </p:nvPicPr>
+        <p:blipFill>
+          <a:blip>
+            <a:extLst>
+              <a:ext uri="{96DAC541-7B7A-43D3-8B79-37D633B846F1}">
+                <asvg:svgBlip xmlns:asvg="http://schemas.microsoft.com/office/drawing/2016/SVG/main" r:embed="rId3"/>
+              </a:ext>
+            </a:extLst>
+          </a:blip>
+          <a:stretch>
+            <a:fillRect/>
+          </a:stretch>
+        </p:blipFill>
+        <p:spPr>
+          <a:xfrm>
+            <a:off x="2625368" y="2338965"/>
+            <a:ext cx="914400" cy="914400"/>
+          </a:xfrm>
+          <a:prstGeom prst="rect">
+            <a:avLst/>
+          </a:prstGeom>
+        </p:spPr>
+      </p:pic>
+      <p:sp>
+        <p:nvSpPr>
+          <p:cNvPr id="7" name="TextBox 6">
+            <a:extLst>
+              <a:ext uri="{FF2B5EF4-FFF2-40B4-BE49-F238E27FC236}">
+                <a16:creationId xmlns:a16="http://schemas.microsoft.com/office/drawing/2014/main" id="{396476CC-78FD-B16D-9FC4-480773B78E51}"/>
+              </a:ext>
+            </a:extLst>
+          </p:cNvPr>
+          <p:cNvSpPr txBox="1"/>
+          <p:nvPr/>
+        </p:nvSpPr>
+        <p:spPr>
+          <a:xfrm>
+            <a:off x="3445340" y="2288333"/>
+            <a:ext cx="3614872" cy="1015663"/>
+          </a:xfrm>
+          <a:prstGeom prst="rect">
+            <a:avLst/>
+          </a:prstGeom>
+          <a:noFill/>
+        </p:spPr>
+        <p:txBody>
+          <a:bodyPr wrap="square" rtlCol="0">
+            <a:spAutoFit/>
+          </a:bodyPr>
+          <a:lstStyle/>
+          <a:p>
+            <a:r>
+              <a:rPr lang="en-US" sz="3000" dirty="0"/>
+              <a:t>Tightly Synchronized Clocks</a:t>
+            </a:r>
+          </a:p>
+        </p:txBody>
+      </p:sp>
+      <p:sp>
+        <p:nvSpPr>
+          <p:cNvPr id="2" name="Rounded Rectangle 1">
+            <a:extLst>
+              <a:ext uri="{FF2B5EF4-FFF2-40B4-BE49-F238E27FC236}">
+                <a16:creationId xmlns:a16="http://schemas.microsoft.com/office/drawing/2014/main" id="{2E2982C1-8924-EFFA-36D8-1B95244D228A}"/>
+              </a:ext>
+            </a:extLst>
+          </p:cNvPr>
+          <p:cNvSpPr/>
+          <p:nvPr/>
+        </p:nvSpPr>
+        <p:spPr>
+          <a:xfrm>
+            <a:off x="7643442" y="2761827"/>
+            <a:ext cx="4032482" cy="2279729"/>
+          </a:xfrm>
+          <a:prstGeom prst="roundRect">
+            <a:avLst/>
+          </a:prstGeom>
+          <a:solidFill>
+            <a:schemeClr val="accent4">
+              <a:lumMod val="40000"/>
+              <a:lumOff val="60000"/>
+            </a:schemeClr>
+          </a:solidFill>
+          <a:ln>
+            <a:noFill/>
+          </a:ln>
+        </p:spPr>
+        <p:style>
+          <a:lnRef idx="2">
+            <a:schemeClr val="accent1">
+              <a:shade val="15000"/>
+            </a:schemeClr>
+          </a:lnRef>
+          <a:fillRef idx="1">
+            <a:schemeClr val="accent1"/>
+          </a:fillRef>
+          <a:effectRef idx="0">
+            <a:schemeClr val="accent1"/>
+          </a:effectRef>
+          <a:fontRef idx="minor">
+            <a:schemeClr val="lt1"/>
+          </a:fontRef>
+        </p:style>
+        <p:txBody>
+          <a:bodyPr rtlCol="0" anchor="ctr"/>
+          <a:lstStyle/>
+          <a:p>
+            <a:pPr algn="ctr"/>
+            <a:endParaRPr lang="en-US"/>
+          </a:p>
+        </p:txBody>
+      </p:sp>
+      <p:sp>
+        <p:nvSpPr>
+          <p:cNvPr id="8" name="TextBox 7">
+            <a:extLst>
+              <a:ext uri="{FF2B5EF4-FFF2-40B4-BE49-F238E27FC236}">
+                <a16:creationId xmlns:a16="http://schemas.microsoft.com/office/drawing/2014/main" id="{F54DB84D-496B-A60D-454E-ECF5BA788CE3}"/>
+              </a:ext>
+            </a:extLst>
+          </p:cNvPr>
+          <p:cNvSpPr txBox="1"/>
+          <p:nvPr/>
+        </p:nvSpPr>
+        <p:spPr>
+          <a:xfrm>
+            <a:off x="8232575" y="3089189"/>
+            <a:ext cx="2830628" cy="1015663"/>
+          </a:xfrm>
+          <a:prstGeom prst="rect">
+            <a:avLst/>
+          </a:prstGeom>
+          <a:noFill/>
+        </p:spPr>
+        <p:txBody>
+          <a:bodyPr wrap="square" rtlCol="0">
+            <a:spAutoFit/>
+          </a:bodyPr>
+          <a:lstStyle/>
+          <a:p>
+            <a:pPr algn="ctr"/>
+            <a:r>
+              <a:rPr lang="en-US" sz="3000" dirty="0">
+                <a:solidFill>
+                  <a:srgbClr val="7030A0"/>
+                </a:solidFill>
+                <a:latin typeface="Times New Roman" panose="02020603050405020304" pitchFamily="18" charset="0"/>
+                <a:cs typeface="Times New Roman" panose="02020603050405020304" pitchFamily="18" charset="0"/>
+              </a:rPr>
+              <a:t>Inbound</a:t>
+            </a:r>
+            <a:br>
+              <a:rPr lang="en-US" sz="3000" dirty="0">
+                <a:solidFill>
+                  <a:srgbClr val="7030A0"/>
+                </a:solidFill>
+                <a:latin typeface="Times New Roman" panose="02020603050405020304" pitchFamily="18" charset="0"/>
+                <a:cs typeface="Times New Roman" panose="02020603050405020304" pitchFamily="18" charset="0"/>
+              </a:rPr>
+            </a:br>
+            <a:r>
+              <a:rPr lang="en-US" sz="3000" dirty="0">
+                <a:solidFill>
+                  <a:srgbClr val="7030A0"/>
+                </a:solidFill>
+                <a:latin typeface="Times New Roman" panose="02020603050405020304" pitchFamily="18" charset="0"/>
+                <a:cs typeface="Times New Roman" panose="02020603050405020304" pitchFamily="18" charset="0"/>
+              </a:rPr>
+              <a:t>Communication</a:t>
+            </a:r>
+          </a:p>
+        </p:txBody>
+      </p:sp>
+      <p:pic>
+        <p:nvPicPr>
+          <p:cNvPr id="11" name="Graphic 10" descr="Normal Distribution with solid fill">
+            <a:extLst>
+              <a:ext uri="{FF2B5EF4-FFF2-40B4-BE49-F238E27FC236}">
+                <a16:creationId xmlns:a16="http://schemas.microsoft.com/office/drawing/2014/main" id="{5B73A4EF-48C6-379E-A387-DA4E76F2D8D3}"/>
+              </a:ext>
+            </a:extLst>
+          </p:cNvPr>
+          <p:cNvPicPr>
+            <a:picLocks noChangeAspect="1"/>
+          </p:cNvPicPr>
+          <p:nvPr/>
+        </p:nvPicPr>
+        <p:blipFill>
+          <a:blip>
+            <a:extLst>
+              <a:ext uri="{96DAC541-7B7A-43D3-8B79-37D633B846F1}">
+                <asvg:svgBlip xmlns:asvg="http://schemas.microsoft.com/office/drawing/2016/SVG/main" r:embed="rId4"/>
+              </a:ext>
+            </a:extLst>
+          </a:blip>
+          <a:stretch>
+            <a:fillRect/>
+          </a:stretch>
+        </p:blipFill>
+        <p:spPr>
+          <a:xfrm>
+            <a:off x="8232575" y="2206810"/>
+            <a:ext cx="914400" cy="914400"/>
+          </a:xfrm>
+          <a:prstGeom prst="rect">
+            <a:avLst/>
+          </a:prstGeom>
+        </p:spPr>
+      </p:pic>
+      <p:sp>
+        <p:nvSpPr>
+          <p:cNvPr id="13" name="TextBox 12">
+            <a:extLst>
+              <a:ext uri="{FF2B5EF4-FFF2-40B4-BE49-F238E27FC236}">
+                <a16:creationId xmlns:a16="http://schemas.microsoft.com/office/drawing/2014/main" id="{9C608732-D4D6-BFFD-B6C7-55791B611A86}"/>
+              </a:ext>
+            </a:extLst>
+          </p:cNvPr>
+          <p:cNvSpPr txBox="1"/>
+          <p:nvPr/>
+        </p:nvSpPr>
+        <p:spPr>
+          <a:xfrm>
+            <a:off x="9059956" y="2152485"/>
+            <a:ext cx="2846807" cy="1015663"/>
+          </a:xfrm>
+          <a:prstGeom prst="rect">
+            <a:avLst/>
+          </a:prstGeom>
+          <a:noFill/>
+        </p:spPr>
+        <p:txBody>
+          <a:bodyPr wrap="square" rtlCol="0">
+            <a:spAutoFit/>
+          </a:bodyPr>
+          <a:lstStyle/>
+          <a:p>
+            <a:r>
+              <a:rPr lang="en-US" sz="3000" dirty="0"/>
+              <a:t>Time as a random variable</a:t>
+            </a:r>
+          </a:p>
+        </p:txBody>
+      </p:sp>
+    </p:spTree>
+    <p:extLst>
+      <p:ext uri="{BB962C8B-B14F-4D97-AF65-F5344CB8AC3E}">
+        <p14:creationId xmlns:p14="http://schemas.microsoft.com/office/powerpoint/2010/main" val="2465174136"/>
+      </p:ext>
+    </p:extLst>
+  </p:cSld>
+  <p:clrMapOvr>
+    <a:masterClrMapping/>
+  </p:clrMapOvr>
+  <mc:AlternateContent xmlns:mc="http://schemas.openxmlformats.org/markup-compatibility/2006">
+    <mc:Choice xmlns:p159="http://schemas.microsoft.com/office/powerpoint/2015/09/main" Requires="p159">
+      <p:transition spd="med">
+        <p159:morph option="byWord"/>
+      </p:transition>
+    </mc:Choice>
+    <mc:Fallback>
+      <p:transition spd="med">
+        <p:fade/>
+      </p:transition>
+    </mc:Fallback>
+  </mc:AlternateContent>
+</p:sld>
+</file>
+
+<file path=ppt/slides/slide16.xml><?xml version="1.0" encoding="utf-8"?>
+<p:sld xmlns:a="http://schemas.openxmlformats.org/drawingml/2006/main" xmlns:r="http://schemas.openxmlformats.org/officeDocument/2006/relationships" xmlns:p="http://schemas.openxmlformats.org/presentationml/2006/main">
+  <p:cSld>
+    <p:spTree>
+      <p:nvGrpSpPr>
+        <p:cNvPr id="1" name="">
+          <a:extLst>
+            <a:ext uri="{FF2B5EF4-FFF2-40B4-BE49-F238E27FC236}">
+              <a16:creationId xmlns:a16="http://schemas.microsoft.com/office/drawing/2014/main" id="{6CCA7BE4-2F6D-50E8-B5EA-E9BBB4763B05}"/>
+            </a:ext>
+          </a:extLst>
+        </p:cNvPr>
+        <p:cNvGrpSpPr/>
+        <p:nvPr/>
+      </p:nvGrpSpPr>
+      <p:grpSpPr>
+        <a:xfrm>
+          <a:off x="0" y="0"/>
+          <a:ext cx="0" cy="0"/>
+          <a:chOff x="0" y="0"/>
+          <a:chExt cx="0" cy="0"/>
+        </a:xfrm>
+      </p:grpSpPr>
+      <p:sp>
+        <p:nvSpPr>
+          <p:cNvPr id="6" name="Rounded Rectangle 5">
+            <a:extLst>
+              <a:ext uri="{FF2B5EF4-FFF2-40B4-BE49-F238E27FC236}">
+                <a16:creationId xmlns:a16="http://schemas.microsoft.com/office/drawing/2014/main" id="{805CE231-BAC5-9ED6-3C4F-062502954516}"/>
+              </a:ext>
+            </a:extLst>
+          </p:cNvPr>
+          <p:cNvSpPr/>
+          <p:nvPr/>
+        </p:nvSpPr>
+        <p:spPr>
+          <a:xfrm>
+            <a:off x="702884" y="2761827"/>
+            <a:ext cx="6709719" cy="2279729"/>
+          </a:xfrm>
+          <a:prstGeom prst="roundRect">
+            <a:avLst/>
+          </a:prstGeom>
+          <a:solidFill>
+            <a:schemeClr val="accent4">
+              <a:lumMod val="40000"/>
+              <a:lumOff val="60000"/>
+            </a:schemeClr>
+          </a:solidFill>
+          <a:ln>
+            <a:noFill/>
+          </a:ln>
+        </p:spPr>
+        <p:style>
+          <a:lnRef idx="2">
+            <a:schemeClr val="accent1">
+              <a:shade val="15000"/>
+            </a:schemeClr>
+          </a:lnRef>
+          <a:fillRef idx="1">
+            <a:schemeClr val="accent1"/>
+          </a:fillRef>
+          <a:effectRef idx="0">
+            <a:schemeClr val="accent1"/>
+          </a:effectRef>
+          <a:fontRef idx="minor">
+            <a:schemeClr val="lt1"/>
+          </a:fontRef>
+        </p:style>
+        <p:txBody>
+          <a:bodyPr rtlCol="0" anchor="ctr"/>
+          <a:lstStyle/>
+          <a:p>
+            <a:pPr algn="ctr"/>
+            <a:endParaRPr lang="en-US"/>
+          </a:p>
+        </p:txBody>
+      </p:sp>
+      <p:sp>
+        <p:nvSpPr>
+          <p:cNvPr id="17" name="Rectangle 16">
+            <a:extLst>
+              <a:ext uri="{FF2B5EF4-FFF2-40B4-BE49-F238E27FC236}">
+                <a16:creationId xmlns:a16="http://schemas.microsoft.com/office/drawing/2014/main" id="{F5FDFB00-D95F-435A-CB89-E87916646793}"/>
+              </a:ext>
+            </a:extLst>
+          </p:cNvPr>
+          <p:cNvSpPr/>
+          <p:nvPr/>
+        </p:nvSpPr>
+        <p:spPr>
+          <a:xfrm rot="16200000">
+            <a:off x="2522582" y="-387076"/>
+            <a:ext cx="68673" cy="3246390"/>
+          </a:xfrm>
+          <a:prstGeom prst="rect">
+            <a:avLst/>
+          </a:prstGeom>
+          <a:solidFill>
+            <a:srgbClr val="FF0000"/>
+          </a:solidFill>
+          <a:ln>
+            <a:solidFill>
+              <a:srgbClr val="FF0000"/>
+            </a:solidFill>
+          </a:ln>
+        </p:spPr>
+        <p:style>
+          <a:lnRef idx="2">
+            <a:schemeClr val="accent1">
+              <a:shade val="15000"/>
+            </a:schemeClr>
+          </a:lnRef>
+          <a:fillRef idx="1">
+            <a:schemeClr val="accent1"/>
+          </a:fillRef>
+          <a:effectRef idx="0">
+            <a:schemeClr val="accent1"/>
+          </a:effectRef>
+          <a:fontRef idx="minor">
+            <a:schemeClr val="lt1"/>
+          </a:fontRef>
+        </p:style>
+        <p:txBody>
+          <a:bodyPr rtlCol="0" anchor="ctr"/>
+          <a:lstStyle/>
+          <a:p>
+            <a:pPr algn="ctr"/>
+            <a:endParaRPr lang="en-US">
+              <a:latin typeface="Times New Roman" panose="02020603050405020304" pitchFamily="18" charset="0"/>
+              <a:cs typeface="Times New Roman" panose="02020603050405020304" pitchFamily="18" charset="0"/>
+            </a:endParaRPr>
+          </a:p>
+        </p:txBody>
+      </p:sp>
+      <p:sp>
+        <p:nvSpPr>
+          <p:cNvPr id="18" name="Rectangle 17">
+            <a:extLst>
+              <a:ext uri="{FF2B5EF4-FFF2-40B4-BE49-F238E27FC236}">
+                <a16:creationId xmlns:a16="http://schemas.microsoft.com/office/drawing/2014/main" id="{A4E7F626-103D-3BA1-42F9-211847917C12}"/>
+              </a:ext>
+            </a:extLst>
+          </p:cNvPr>
+          <p:cNvSpPr/>
+          <p:nvPr/>
+        </p:nvSpPr>
+        <p:spPr>
+          <a:xfrm rot="16200000">
+            <a:off x="2522581" y="-318404"/>
+            <a:ext cx="68674" cy="3246390"/>
+          </a:xfrm>
+          <a:prstGeom prst="rect">
+            <a:avLst/>
+          </a:prstGeom>
+          <a:solidFill>
+            <a:srgbClr val="7030A0"/>
+          </a:solidFill>
+          <a:ln>
+            <a:solidFill>
+              <a:srgbClr val="7030A0"/>
+            </a:solidFill>
+          </a:ln>
+        </p:spPr>
+        <p:style>
+          <a:lnRef idx="2">
+            <a:schemeClr val="accent1">
+              <a:shade val="15000"/>
+            </a:schemeClr>
+          </a:lnRef>
+          <a:fillRef idx="1">
+            <a:schemeClr val="accent1"/>
+          </a:fillRef>
+          <a:effectRef idx="0">
+            <a:schemeClr val="accent1"/>
+          </a:effectRef>
+          <a:fontRef idx="minor">
+            <a:schemeClr val="lt1"/>
+          </a:fontRef>
+        </p:style>
+        <p:txBody>
+          <a:bodyPr rtlCol="0" anchor="ctr"/>
+          <a:lstStyle/>
+          <a:p>
+            <a:pPr algn="ctr"/>
+            <a:endParaRPr lang="en-US">
+              <a:latin typeface="Times New Roman" panose="02020603050405020304" pitchFamily="18" charset="0"/>
+              <a:cs typeface="Times New Roman" panose="02020603050405020304" pitchFamily="18" charset="0"/>
+            </a:endParaRPr>
+          </a:p>
+        </p:txBody>
+      </p:sp>
+      <p:sp>
+        <p:nvSpPr>
+          <p:cNvPr id="12" name="TextBox 11">
+            <a:extLst>
+              <a:ext uri="{FF2B5EF4-FFF2-40B4-BE49-F238E27FC236}">
+                <a16:creationId xmlns:a16="http://schemas.microsoft.com/office/drawing/2014/main" id="{F350AFCA-CE89-1A02-B58E-1B2B22A28034}"/>
+              </a:ext>
+            </a:extLst>
+          </p:cNvPr>
+          <p:cNvSpPr txBox="1"/>
+          <p:nvPr/>
+        </p:nvSpPr>
+        <p:spPr>
+          <a:xfrm>
+            <a:off x="772906" y="405121"/>
+            <a:ext cx="6591721" cy="830997"/>
+          </a:xfrm>
+          <a:prstGeom prst="rect">
+            <a:avLst/>
+          </a:prstGeom>
+          <a:noFill/>
+        </p:spPr>
+        <p:txBody>
+          <a:bodyPr wrap="square" rtlCol="0">
+            <a:spAutoFit/>
+          </a:bodyPr>
+          <a:lstStyle/>
+          <a:p>
+            <a:r>
+              <a:rPr lang="en-US" sz="4800" dirty="0">
+                <a:latin typeface="Times New Roman" panose="02020603050405020304" pitchFamily="18" charset="0"/>
+                <a:cs typeface="Times New Roman" panose="02020603050405020304" pitchFamily="18" charset="0"/>
+              </a:rPr>
+              <a:t>Thesis: Latency Fairness</a:t>
+            </a:r>
+            <a:endParaRPr lang="en-US" sz="3000" dirty="0">
+              <a:latin typeface="Times New Roman" panose="02020603050405020304" pitchFamily="18" charset="0"/>
+              <a:cs typeface="Times New Roman" panose="02020603050405020304" pitchFamily="18" charset="0"/>
+            </a:endParaRPr>
+          </a:p>
+        </p:txBody>
+      </p:sp>
+      <p:sp>
+        <p:nvSpPr>
+          <p:cNvPr id="4" name="TextBox 3">
+            <a:extLst>
+              <a:ext uri="{FF2B5EF4-FFF2-40B4-BE49-F238E27FC236}">
+                <a16:creationId xmlns:a16="http://schemas.microsoft.com/office/drawing/2014/main" id="{A35CA6EB-E3C2-ED3F-1264-A7A554866077}"/>
+              </a:ext>
+            </a:extLst>
+          </p:cNvPr>
+          <p:cNvSpPr txBox="1"/>
+          <p:nvPr/>
+        </p:nvSpPr>
+        <p:spPr>
+          <a:xfrm>
+            <a:off x="4229584" y="3089189"/>
+            <a:ext cx="2830628" cy="1015663"/>
+          </a:xfrm>
+          <a:prstGeom prst="rect">
+            <a:avLst/>
+          </a:prstGeom>
+          <a:noFill/>
+        </p:spPr>
+        <p:txBody>
+          <a:bodyPr wrap="square" rtlCol="0">
+            <a:spAutoFit/>
+          </a:bodyPr>
+          <a:lstStyle/>
+          <a:p>
+            <a:pPr algn="ctr"/>
+            <a:r>
+              <a:rPr lang="en-US" sz="3000" dirty="0">
+                <a:solidFill>
+                  <a:srgbClr val="7030A0"/>
+                </a:solidFill>
+                <a:latin typeface="Times New Roman" panose="02020603050405020304" pitchFamily="18" charset="0"/>
+                <a:cs typeface="Times New Roman" panose="02020603050405020304" pitchFamily="18" charset="0"/>
+              </a:rPr>
+              <a:t>Inbound</a:t>
+            </a:r>
+            <a:br>
+              <a:rPr lang="en-US" sz="3000" dirty="0">
+                <a:solidFill>
+                  <a:srgbClr val="7030A0"/>
+                </a:solidFill>
+                <a:latin typeface="Times New Roman" panose="02020603050405020304" pitchFamily="18" charset="0"/>
+                <a:cs typeface="Times New Roman" panose="02020603050405020304" pitchFamily="18" charset="0"/>
+              </a:rPr>
+            </a:br>
+            <a:r>
+              <a:rPr lang="en-US" sz="3000" dirty="0">
+                <a:solidFill>
+                  <a:srgbClr val="7030A0"/>
+                </a:solidFill>
+                <a:latin typeface="Times New Roman" panose="02020603050405020304" pitchFamily="18" charset="0"/>
+                <a:cs typeface="Times New Roman" panose="02020603050405020304" pitchFamily="18" charset="0"/>
+              </a:rPr>
+              <a:t>Communication</a:t>
+            </a:r>
+          </a:p>
+        </p:txBody>
+      </p:sp>
+      <p:sp>
+        <p:nvSpPr>
+          <p:cNvPr id="10" name="TextBox 9">
+            <a:extLst>
+              <a:ext uri="{FF2B5EF4-FFF2-40B4-BE49-F238E27FC236}">
+                <a16:creationId xmlns:a16="http://schemas.microsoft.com/office/drawing/2014/main" id="{1A401610-C405-FE5D-753E-B5D7DFC24D10}"/>
+              </a:ext>
+            </a:extLst>
+          </p:cNvPr>
+          <p:cNvSpPr txBox="1"/>
+          <p:nvPr/>
+        </p:nvSpPr>
+        <p:spPr>
+          <a:xfrm>
+            <a:off x="933723" y="3095367"/>
+            <a:ext cx="2830628" cy="1015663"/>
+          </a:xfrm>
+          <a:prstGeom prst="rect">
+            <a:avLst/>
+          </a:prstGeom>
+          <a:noFill/>
+        </p:spPr>
+        <p:txBody>
+          <a:bodyPr wrap="square" rtlCol="0">
+            <a:spAutoFit/>
+          </a:bodyPr>
+          <a:lstStyle/>
+          <a:p>
+            <a:pPr algn="ctr"/>
+            <a:r>
+              <a:rPr lang="en-US" sz="3000" dirty="0">
+                <a:solidFill>
+                  <a:srgbClr val="7030A0"/>
+                </a:solidFill>
+                <a:latin typeface="Times New Roman" panose="02020603050405020304" pitchFamily="18" charset="0"/>
+                <a:cs typeface="Times New Roman" panose="02020603050405020304" pitchFamily="18" charset="0"/>
+              </a:rPr>
+              <a:t>Outbound</a:t>
+            </a:r>
+            <a:br>
+              <a:rPr lang="en-US" sz="3000" dirty="0">
+                <a:solidFill>
+                  <a:srgbClr val="7030A0"/>
+                </a:solidFill>
+                <a:latin typeface="Times New Roman" panose="02020603050405020304" pitchFamily="18" charset="0"/>
+                <a:cs typeface="Times New Roman" panose="02020603050405020304" pitchFamily="18" charset="0"/>
+              </a:rPr>
+            </a:br>
+            <a:r>
+              <a:rPr lang="en-US" sz="3000" dirty="0">
+                <a:solidFill>
+                  <a:srgbClr val="7030A0"/>
+                </a:solidFill>
+                <a:latin typeface="Times New Roman" panose="02020603050405020304" pitchFamily="18" charset="0"/>
+                <a:cs typeface="Times New Roman" panose="02020603050405020304" pitchFamily="18" charset="0"/>
+              </a:rPr>
+              <a:t>Communication</a:t>
+            </a:r>
+          </a:p>
+        </p:txBody>
+      </p:sp>
+      <p:pic>
+        <p:nvPicPr>
+          <p:cNvPr id="5" name="Graphic 4" descr="Clock with solid fill">
+            <a:extLst>
+              <a:ext uri="{FF2B5EF4-FFF2-40B4-BE49-F238E27FC236}">
+                <a16:creationId xmlns:a16="http://schemas.microsoft.com/office/drawing/2014/main" id="{C1E514BE-4A3E-6FCE-E902-24C3370D6763}"/>
+              </a:ext>
+            </a:extLst>
+          </p:cNvPr>
+          <p:cNvPicPr>
+            <a:picLocks noChangeAspect="1"/>
+          </p:cNvPicPr>
+          <p:nvPr/>
+        </p:nvPicPr>
+        <p:blipFill>
+          <a:blip>
+            <a:extLst>
+              <a:ext uri="{96DAC541-7B7A-43D3-8B79-37D633B846F1}">
+                <asvg:svgBlip xmlns:asvg="http://schemas.microsoft.com/office/drawing/2016/SVG/main" r:embed="rId3"/>
+              </a:ext>
+            </a:extLst>
+          </a:blip>
+          <a:stretch>
+            <a:fillRect/>
+          </a:stretch>
+        </p:blipFill>
+        <p:spPr>
+          <a:xfrm>
+            <a:off x="2625368" y="2338965"/>
+            <a:ext cx="914400" cy="914400"/>
+          </a:xfrm>
+          <a:prstGeom prst="rect">
+            <a:avLst/>
+          </a:prstGeom>
+        </p:spPr>
+      </p:pic>
+      <p:sp>
+        <p:nvSpPr>
+          <p:cNvPr id="7" name="TextBox 6">
+            <a:extLst>
+              <a:ext uri="{FF2B5EF4-FFF2-40B4-BE49-F238E27FC236}">
+                <a16:creationId xmlns:a16="http://schemas.microsoft.com/office/drawing/2014/main" id="{307F30E8-D4F8-B3FC-FDA8-BE0D7CB9AE5B}"/>
+              </a:ext>
+            </a:extLst>
+          </p:cNvPr>
+          <p:cNvSpPr txBox="1"/>
+          <p:nvPr/>
+        </p:nvSpPr>
+        <p:spPr>
+          <a:xfrm>
+            <a:off x="3445340" y="2288333"/>
+            <a:ext cx="3614872" cy="1015663"/>
+          </a:xfrm>
+          <a:prstGeom prst="rect">
+            <a:avLst/>
+          </a:prstGeom>
+          <a:noFill/>
+        </p:spPr>
+        <p:txBody>
+          <a:bodyPr wrap="square" rtlCol="0">
+            <a:spAutoFit/>
+          </a:bodyPr>
+          <a:lstStyle/>
+          <a:p>
+            <a:r>
+              <a:rPr lang="en-US" sz="3000" dirty="0"/>
+              <a:t>Tightly Synchronized Clocks</a:t>
+            </a:r>
+          </a:p>
+        </p:txBody>
+      </p:sp>
+      <p:sp>
+        <p:nvSpPr>
+          <p:cNvPr id="2" name="Rounded Rectangle 1">
+            <a:extLst>
+              <a:ext uri="{FF2B5EF4-FFF2-40B4-BE49-F238E27FC236}">
+                <a16:creationId xmlns:a16="http://schemas.microsoft.com/office/drawing/2014/main" id="{53274D20-301F-A4CB-EB38-3DD11CFC7147}"/>
+              </a:ext>
+            </a:extLst>
+          </p:cNvPr>
+          <p:cNvSpPr/>
+          <p:nvPr/>
+        </p:nvSpPr>
+        <p:spPr>
+          <a:xfrm>
+            <a:off x="7643442" y="2761827"/>
+            <a:ext cx="4032482" cy="2279729"/>
+          </a:xfrm>
+          <a:prstGeom prst="roundRect">
+            <a:avLst/>
+          </a:prstGeom>
+          <a:solidFill>
+            <a:schemeClr val="accent4">
+              <a:lumMod val="40000"/>
+              <a:lumOff val="60000"/>
+            </a:schemeClr>
+          </a:solidFill>
+          <a:ln>
+            <a:noFill/>
+          </a:ln>
+        </p:spPr>
+        <p:style>
+          <a:lnRef idx="2">
+            <a:schemeClr val="accent1">
+              <a:shade val="15000"/>
+            </a:schemeClr>
+          </a:lnRef>
+          <a:fillRef idx="1">
+            <a:schemeClr val="accent1"/>
+          </a:fillRef>
+          <a:effectRef idx="0">
+            <a:schemeClr val="accent1"/>
+          </a:effectRef>
+          <a:fontRef idx="minor">
+            <a:schemeClr val="lt1"/>
+          </a:fontRef>
+        </p:style>
+        <p:txBody>
+          <a:bodyPr rtlCol="0" anchor="ctr"/>
+          <a:lstStyle/>
+          <a:p>
+            <a:pPr algn="ctr"/>
+            <a:endParaRPr lang="en-US"/>
+          </a:p>
+        </p:txBody>
+      </p:sp>
+      <p:sp>
+        <p:nvSpPr>
+          <p:cNvPr id="8" name="TextBox 7">
+            <a:extLst>
+              <a:ext uri="{FF2B5EF4-FFF2-40B4-BE49-F238E27FC236}">
+                <a16:creationId xmlns:a16="http://schemas.microsoft.com/office/drawing/2014/main" id="{98D180D5-504B-B0A2-4348-AAE53CBD0D84}"/>
+              </a:ext>
+            </a:extLst>
+          </p:cNvPr>
+          <p:cNvSpPr txBox="1"/>
+          <p:nvPr/>
+        </p:nvSpPr>
+        <p:spPr>
+          <a:xfrm>
+            <a:off x="8232575" y="3089189"/>
+            <a:ext cx="2830628" cy="1015663"/>
+          </a:xfrm>
+          <a:prstGeom prst="rect">
+            <a:avLst/>
+          </a:prstGeom>
+          <a:noFill/>
+        </p:spPr>
+        <p:txBody>
+          <a:bodyPr wrap="square" rtlCol="0">
+            <a:spAutoFit/>
+          </a:bodyPr>
+          <a:lstStyle/>
+          <a:p>
+            <a:pPr algn="ctr"/>
+            <a:r>
+              <a:rPr lang="en-US" sz="3000" dirty="0">
+                <a:solidFill>
+                  <a:srgbClr val="7030A0"/>
+                </a:solidFill>
+                <a:latin typeface="Times New Roman" panose="02020603050405020304" pitchFamily="18" charset="0"/>
+                <a:cs typeface="Times New Roman" panose="02020603050405020304" pitchFamily="18" charset="0"/>
+              </a:rPr>
+              <a:t>Inbound</a:t>
+            </a:r>
+            <a:br>
+              <a:rPr lang="en-US" sz="3000" dirty="0">
+                <a:solidFill>
+                  <a:srgbClr val="7030A0"/>
+                </a:solidFill>
+                <a:latin typeface="Times New Roman" panose="02020603050405020304" pitchFamily="18" charset="0"/>
+                <a:cs typeface="Times New Roman" panose="02020603050405020304" pitchFamily="18" charset="0"/>
+              </a:rPr>
+            </a:br>
+            <a:r>
+              <a:rPr lang="en-US" sz="3000" dirty="0">
+                <a:solidFill>
+                  <a:srgbClr val="7030A0"/>
+                </a:solidFill>
+                <a:latin typeface="Times New Roman" panose="02020603050405020304" pitchFamily="18" charset="0"/>
+                <a:cs typeface="Times New Roman" panose="02020603050405020304" pitchFamily="18" charset="0"/>
+              </a:rPr>
+              <a:t>Communication</a:t>
+            </a:r>
+          </a:p>
+        </p:txBody>
+      </p:sp>
+      <p:pic>
+        <p:nvPicPr>
+          <p:cNvPr id="11" name="Graphic 10" descr="Normal Distribution with solid fill">
+            <a:extLst>
+              <a:ext uri="{FF2B5EF4-FFF2-40B4-BE49-F238E27FC236}">
+                <a16:creationId xmlns:a16="http://schemas.microsoft.com/office/drawing/2014/main" id="{B6B7790C-443C-3E07-213A-980A49AC4ED8}"/>
+              </a:ext>
+            </a:extLst>
+          </p:cNvPr>
+          <p:cNvPicPr>
+            <a:picLocks noChangeAspect="1"/>
+          </p:cNvPicPr>
+          <p:nvPr/>
+        </p:nvPicPr>
+        <p:blipFill>
+          <a:blip>
+            <a:extLst>
+              <a:ext uri="{96DAC541-7B7A-43D3-8B79-37D633B846F1}">
+                <asvg:svgBlip xmlns:asvg="http://schemas.microsoft.com/office/drawing/2016/SVG/main" r:embed="rId4"/>
+              </a:ext>
+            </a:extLst>
+          </a:blip>
+          <a:stretch>
+            <a:fillRect/>
+          </a:stretch>
+        </p:blipFill>
+        <p:spPr>
+          <a:xfrm>
+            <a:off x="8232575" y="2206810"/>
+            <a:ext cx="914400" cy="914400"/>
+          </a:xfrm>
+          <a:prstGeom prst="rect">
+            <a:avLst/>
+          </a:prstGeom>
+        </p:spPr>
+      </p:pic>
+      <p:sp>
+        <p:nvSpPr>
+          <p:cNvPr id="13" name="TextBox 12">
+            <a:extLst>
+              <a:ext uri="{FF2B5EF4-FFF2-40B4-BE49-F238E27FC236}">
+                <a16:creationId xmlns:a16="http://schemas.microsoft.com/office/drawing/2014/main" id="{06CAAFA5-F0F7-B64B-945B-F008BBFF8FEB}"/>
+              </a:ext>
+            </a:extLst>
+          </p:cNvPr>
+          <p:cNvSpPr txBox="1"/>
+          <p:nvPr/>
+        </p:nvSpPr>
+        <p:spPr>
+          <a:xfrm>
+            <a:off x="9059956" y="2152485"/>
+            <a:ext cx="2846807" cy="1015663"/>
+          </a:xfrm>
+          <a:prstGeom prst="rect">
+            <a:avLst/>
+          </a:prstGeom>
+          <a:noFill/>
+        </p:spPr>
+        <p:txBody>
+          <a:bodyPr wrap="square" rtlCol="0">
+            <a:spAutoFit/>
+          </a:bodyPr>
+          <a:lstStyle/>
+          <a:p>
+            <a:r>
+              <a:rPr lang="en-US" sz="3000" dirty="0"/>
+              <a:t>Time as a random variable</a:t>
+            </a:r>
+          </a:p>
+        </p:txBody>
+      </p:sp>
+      <p:sp>
+        <p:nvSpPr>
+          <p:cNvPr id="9" name="TextBox 8">
+            <a:extLst>
+              <a:ext uri="{FF2B5EF4-FFF2-40B4-BE49-F238E27FC236}">
+                <a16:creationId xmlns:a16="http://schemas.microsoft.com/office/drawing/2014/main" id="{E3F2E211-91A5-DD9B-70BF-573CB855077D}"/>
+              </a:ext>
+            </a:extLst>
+          </p:cNvPr>
+          <p:cNvSpPr txBox="1"/>
+          <p:nvPr/>
+        </p:nvSpPr>
+        <p:spPr>
+          <a:xfrm>
+            <a:off x="2121325" y="4564534"/>
+            <a:ext cx="3872835" cy="461665"/>
+          </a:xfrm>
+          <a:prstGeom prst="rect">
+            <a:avLst/>
+          </a:prstGeom>
+          <a:noFill/>
+        </p:spPr>
+        <p:txBody>
+          <a:bodyPr wrap="square" rtlCol="0">
+            <a:spAutoFit/>
+          </a:bodyPr>
+          <a:lstStyle/>
+          <a:p>
+            <a:pPr algn="ctr"/>
+            <a:r>
+              <a:rPr lang="en-US" sz="2400" dirty="0">
+                <a:latin typeface="Times New Roman" panose="02020603050405020304" pitchFamily="18" charset="0"/>
+                <a:cs typeface="Times New Roman" panose="02020603050405020304" pitchFamily="18" charset="0"/>
+              </a:rPr>
+              <a:t>ACM SIGCOMM’25</a:t>
+            </a:r>
+          </a:p>
+        </p:txBody>
+      </p:sp>
+      <p:sp>
+        <p:nvSpPr>
+          <p:cNvPr id="14" name="TextBox 13">
+            <a:extLst>
+              <a:ext uri="{FF2B5EF4-FFF2-40B4-BE49-F238E27FC236}">
+                <a16:creationId xmlns:a16="http://schemas.microsoft.com/office/drawing/2014/main" id="{AAC98C97-4F56-BA56-E984-2DBDF1E4D90E}"/>
+              </a:ext>
+            </a:extLst>
+          </p:cNvPr>
+          <p:cNvSpPr txBox="1"/>
+          <p:nvPr/>
+        </p:nvSpPr>
+        <p:spPr>
+          <a:xfrm>
+            <a:off x="7643442" y="4111538"/>
+            <a:ext cx="3872835" cy="461665"/>
+          </a:xfrm>
+          <a:prstGeom prst="rect">
+            <a:avLst/>
+          </a:prstGeom>
+          <a:noFill/>
+        </p:spPr>
+        <p:txBody>
+          <a:bodyPr wrap="square" rtlCol="0">
+            <a:spAutoFit/>
+          </a:bodyPr>
+          <a:lstStyle/>
+          <a:p>
+            <a:pPr algn="ctr"/>
+            <a:r>
+              <a:rPr lang="en-US" sz="2400" dirty="0">
+                <a:latin typeface="Times New Roman" panose="02020603050405020304" pitchFamily="18" charset="0"/>
+                <a:cs typeface="Times New Roman" panose="02020603050405020304" pitchFamily="18" charset="0"/>
+              </a:rPr>
+              <a:t>ACM HotNets’25</a:t>
+            </a:r>
+          </a:p>
+        </p:txBody>
+      </p:sp>
+      <p:sp>
+        <p:nvSpPr>
+          <p:cNvPr id="15" name="TextBox 14">
+            <a:extLst>
+              <a:ext uri="{FF2B5EF4-FFF2-40B4-BE49-F238E27FC236}">
+                <a16:creationId xmlns:a16="http://schemas.microsoft.com/office/drawing/2014/main" id="{887EE278-208A-4B93-637F-68B276C2F983}"/>
+              </a:ext>
+            </a:extLst>
+          </p:cNvPr>
+          <p:cNvSpPr txBox="1"/>
+          <p:nvPr/>
+        </p:nvSpPr>
+        <p:spPr>
+          <a:xfrm>
+            <a:off x="7643442" y="4507299"/>
+            <a:ext cx="3872835" cy="461665"/>
+          </a:xfrm>
+          <a:prstGeom prst="rect">
+            <a:avLst/>
+          </a:prstGeom>
+          <a:noFill/>
+        </p:spPr>
+        <p:txBody>
+          <a:bodyPr wrap="square" rtlCol="0">
+            <a:spAutoFit/>
+          </a:bodyPr>
+          <a:lstStyle/>
+          <a:p>
+            <a:pPr algn="ctr"/>
+            <a:r>
+              <a:rPr lang="en-US" sz="2400" dirty="0">
+                <a:latin typeface="Times New Roman" panose="02020603050405020304" pitchFamily="18" charset="0"/>
+                <a:cs typeface="Times New Roman" panose="02020603050405020304" pitchFamily="18" charset="0"/>
+              </a:rPr>
+              <a:t>Submitted to SIGCOMM’26</a:t>
+            </a:r>
+          </a:p>
+        </p:txBody>
+      </p:sp>
+    </p:spTree>
+    <p:extLst>
+      <p:ext uri="{BB962C8B-B14F-4D97-AF65-F5344CB8AC3E}">
+        <p14:creationId xmlns:p14="http://schemas.microsoft.com/office/powerpoint/2010/main" val="229929111"/>
+      </p:ext>
+    </p:extLst>
+  </p:cSld>
+  <p:clrMapOvr>
+    <a:masterClrMapping/>
+  </p:clrMapOvr>
+  <mc:AlternateContent xmlns:mc="http://schemas.openxmlformats.org/markup-compatibility/2006">
+    <mc:Choice xmlns:p159="http://schemas.microsoft.com/office/powerpoint/2015/09/main" Requires="p159">
+      <p:transition spd="med">
+        <p159:morph option="byWord"/>
+      </p:transition>
+    </mc:Choice>
+    <mc:Fallback>
+      <p:transition spd="med">
+        <p:fade/>
+      </p:transition>
+    </mc:Fallback>
+  </mc:AlternateContent>
+</p:sld>
+</file>
+
+<file path=ppt/slides/slide17.xml><?xml version="1.0" encoding="utf-8"?>
+<p:sld xmlns:a="http://schemas.openxmlformats.org/drawingml/2006/main" xmlns:r="http://schemas.openxmlformats.org/officeDocument/2006/relationships" xmlns:p="http://schemas.openxmlformats.org/presentationml/2006/main">
+  <p:cSld>
+    <p:spTree>
+      <p:nvGrpSpPr>
+        <p:cNvPr id="1" name="">
+          <a:extLst>
+            <a:ext uri="{FF2B5EF4-FFF2-40B4-BE49-F238E27FC236}">
+              <a16:creationId xmlns:a16="http://schemas.microsoft.com/office/drawing/2014/main" id="{70F06775-70DA-824D-D1F1-09F7A2F728C7}"/>
+            </a:ext>
+          </a:extLst>
+        </p:cNvPr>
+        <p:cNvGrpSpPr/>
+        <p:nvPr/>
+      </p:nvGrpSpPr>
+      <p:grpSpPr>
+        <a:xfrm>
+          <a:off x="0" y="0"/>
+          <a:ext cx="0" cy="0"/>
+          <a:chOff x="0" y="0"/>
+          <a:chExt cx="0" cy="0"/>
+        </a:xfrm>
+      </p:grpSpPr>
+      <p:sp>
+        <p:nvSpPr>
+          <p:cNvPr id="6" name="Rounded Rectangle 5">
+            <a:extLst>
+              <a:ext uri="{FF2B5EF4-FFF2-40B4-BE49-F238E27FC236}">
+                <a16:creationId xmlns:a16="http://schemas.microsoft.com/office/drawing/2014/main" id="{13BD36E6-2175-4E01-F989-AEA7048D6FAC}"/>
+              </a:ext>
+            </a:extLst>
+          </p:cNvPr>
+          <p:cNvSpPr/>
+          <p:nvPr/>
+        </p:nvSpPr>
+        <p:spPr>
+          <a:xfrm>
+            <a:off x="702884" y="2761827"/>
+            <a:ext cx="6709719" cy="2279729"/>
+          </a:xfrm>
+          <a:prstGeom prst="roundRect">
+            <a:avLst/>
+          </a:prstGeom>
+          <a:solidFill>
+            <a:schemeClr val="accent4">
+              <a:lumMod val="40000"/>
+              <a:lumOff val="60000"/>
+            </a:schemeClr>
+          </a:solidFill>
+          <a:ln>
+            <a:noFill/>
+          </a:ln>
+        </p:spPr>
+        <p:style>
+          <a:lnRef idx="2">
+            <a:schemeClr val="accent1">
+              <a:shade val="15000"/>
+            </a:schemeClr>
+          </a:lnRef>
+          <a:fillRef idx="1">
+            <a:schemeClr val="accent1"/>
+          </a:fillRef>
+          <a:effectRef idx="0">
+            <a:schemeClr val="accent1"/>
+          </a:effectRef>
+          <a:fontRef idx="minor">
+            <a:schemeClr val="lt1"/>
+          </a:fontRef>
+        </p:style>
+        <p:txBody>
+          <a:bodyPr rtlCol="0" anchor="ctr"/>
+          <a:lstStyle/>
+          <a:p>
+            <a:pPr algn="ctr"/>
+            <a:endParaRPr lang="en-US"/>
+          </a:p>
+        </p:txBody>
+      </p:sp>
+      <p:sp>
+        <p:nvSpPr>
+          <p:cNvPr id="17" name="Rectangle 16">
+            <a:extLst>
+              <a:ext uri="{FF2B5EF4-FFF2-40B4-BE49-F238E27FC236}">
+                <a16:creationId xmlns:a16="http://schemas.microsoft.com/office/drawing/2014/main" id="{F70DBAB9-255F-B6BA-09B3-0D37E539B14B}"/>
+              </a:ext>
+            </a:extLst>
+          </p:cNvPr>
+          <p:cNvSpPr/>
+          <p:nvPr/>
+        </p:nvSpPr>
+        <p:spPr>
+          <a:xfrm rot="16200000">
+            <a:off x="2522582" y="-387076"/>
+            <a:ext cx="68673" cy="3246390"/>
+          </a:xfrm>
+          <a:prstGeom prst="rect">
+            <a:avLst/>
+          </a:prstGeom>
+          <a:solidFill>
+            <a:srgbClr val="FF0000"/>
+          </a:solidFill>
+          <a:ln>
+            <a:solidFill>
+              <a:srgbClr val="FF0000"/>
+            </a:solidFill>
+          </a:ln>
+        </p:spPr>
+        <p:style>
+          <a:lnRef idx="2">
+            <a:schemeClr val="accent1">
+              <a:shade val="15000"/>
+            </a:schemeClr>
+          </a:lnRef>
+          <a:fillRef idx="1">
+            <a:schemeClr val="accent1"/>
+          </a:fillRef>
+          <a:effectRef idx="0">
+            <a:schemeClr val="accent1"/>
+          </a:effectRef>
+          <a:fontRef idx="minor">
+            <a:schemeClr val="lt1"/>
+          </a:fontRef>
+        </p:style>
+        <p:txBody>
+          <a:bodyPr rtlCol="0" anchor="ctr"/>
+          <a:lstStyle/>
+          <a:p>
+            <a:pPr algn="ctr"/>
+            <a:endParaRPr lang="en-US">
+              <a:latin typeface="Times New Roman" panose="02020603050405020304" pitchFamily="18" charset="0"/>
+              <a:cs typeface="Times New Roman" panose="02020603050405020304" pitchFamily="18" charset="0"/>
+            </a:endParaRPr>
+          </a:p>
+        </p:txBody>
+      </p:sp>
+      <p:sp>
+        <p:nvSpPr>
+          <p:cNvPr id="18" name="Rectangle 17">
+            <a:extLst>
+              <a:ext uri="{FF2B5EF4-FFF2-40B4-BE49-F238E27FC236}">
+                <a16:creationId xmlns:a16="http://schemas.microsoft.com/office/drawing/2014/main" id="{B45D36CC-7460-172A-78DB-598FD5E6BD8D}"/>
+              </a:ext>
+            </a:extLst>
+          </p:cNvPr>
+          <p:cNvSpPr/>
+          <p:nvPr/>
+        </p:nvSpPr>
+        <p:spPr>
+          <a:xfrm rot="16200000">
+            <a:off x="2522581" y="-318404"/>
+            <a:ext cx="68674" cy="3246390"/>
+          </a:xfrm>
+          <a:prstGeom prst="rect">
+            <a:avLst/>
+          </a:prstGeom>
+          <a:solidFill>
+            <a:srgbClr val="7030A0"/>
+          </a:solidFill>
+          <a:ln>
+            <a:solidFill>
+              <a:srgbClr val="7030A0"/>
+            </a:solidFill>
+          </a:ln>
+        </p:spPr>
+        <p:style>
+          <a:lnRef idx="2">
+            <a:schemeClr val="accent1">
+              <a:shade val="15000"/>
+            </a:schemeClr>
+          </a:lnRef>
+          <a:fillRef idx="1">
+            <a:schemeClr val="accent1"/>
+          </a:fillRef>
+          <a:effectRef idx="0">
+            <a:schemeClr val="accent1"/>
+          </a:effectRef>
+          <a:fontRef idx="minor">
+            <a:schemeClr val="lt1"/>
+          </a:fontRef>
+        </p:style>
+        <p:txBody>
+          <a:bodyPr rtlCol="0" anchor="ctr"/>
+          <a:lstStyle/>
+          <a:p>
+            <a:pPr algn="ctr"/>
+            <a:endParaRPr lang="en-US">
+              <a:latin typeface="Times New Roman" panose="02020603050405020304" pitchFamily="18" charset="0"/>
+              <a:cs typeface="Times New Roman" panose="02020603050405020304" pitchFamily="18" charset="0"/>
+            </a:endParaRPr>
+          </a:p>
+        </p:txBody>
+      </p:sp>
+      <p:sp>
+        <p:nvSpPr>
+          <p:cNvPr id="12" name="TextBox 11">
+            <a:extLst>
+              <a:ext uri="{FF2B5EF4-FFF2-40B4-BE49-F238E27FC236}">
+                <a16:creationId xmlns:a16="http://schemas.microsoft.com/office/drawing/2014/main" id="{471EB8E2-1A72-E97D-AC61-E621B8D6AF8A}"/>
+              </a:ext>
+            </a:extLst>
+          </p:cNvPr>
+          <p:cNvSpPr txBox="1"/>
+          <p:nvPr/>
+        </p:nvSpPr>
+        <p:spPr>
+          <a:xfrm>
+            <a:off x="772906" y="405121"/>
+            <a:ext cx="6591721" cy="830997"/>
+          </a:xfrm>
+          <a:prstGeom prst="rect">
+            <a:avLst/>
+          </a:prstGeom>
+          <a:noFill/>
+        </p:spPr>
+        <p:txBody>
+          <a:bodyPr wrap="square" rtlCol="0">
+            <a:spAutoFit/>
+          </a:bodyPr>
+          <a:lstStyle/>
+          <a:p>
+            <a:r>
+              <a:rPr lang="en-US" sz="4800" dirty="0">
+                <a:latin typeface="Times New Roman" panose="02020603050405020304" pitchFamily="18" charset="0"/>
+                <a:cs typeface="Times New Roman" panose="02020603050405020304" pitchFamily="18" charset="0"/>
+              </a:rPr>
+              <a:t>Thesis: Latency Fairness</a:t>
+            </a:r>
+            <a:endParaRPr lang="en-US" sz="3000" dirty="0">
+              <a:latin typeface="Times New Roman" panose="02020603050405020304" pitchFamily="18" charset="0"/>
+              <a:cs typeface="Times New Roman" panose="02020603050405020304" pitchFamily="18" charset="0"/>
+            </a:endParaRPr>
+          </a:p>
+        </p:txBody>
+      </p:sp>
+      <p:sp>
+        <p:nvSpPr>
+          <p:cNvPr id="4" name="TextBox 3">
+            <a:extLst>
+              <a:ext uri="{FF2B5EF4-FFF2-40B4-BE49-F238E27FC236}">
+                <a16:creationId xmlns:a16="http://schemas.microsoft.com/office/drawing/2014/main" id="{9C38A125-EA7E-6448-A161-8D099BD47A96}"/>
+              </a:ext>
+            </a:extLst>
+          </p:cNvPr>
+          <p:cNvSpPr txBox="1"/>
+          <p:nvPr/>
+        </p:nvSpPr>
+        <p:spPr>
+          <a:xfrm>
+            <a:off x="4229584" y="3089189"/>
+            <a:ext cx="2830628" cy="1015663"/>
+          </a:xfrm>
+          <a:prstGeom prst="rect">
+            <a:avLst/>
+          </a:prstGeom>
+          <a:noFill/>
+        </p:spPr>
+        <p:txBody>
+          <a:bodyPr wrap="square" rtlCol="0">
+            <a:spAutoFit/>
+          </a:bodyPr>
+          <a:lstStyle/>
+          <a:p>
+            <a:pPr algn="ctr"/>
+            <a:r>
+              <a:rPr lang="en-US" sz="3000" dirty="0">
+                <a:solidFill>
+                  <a:srgbClr val="7030A0"/>
+                </a:solidFill>
+                <a:latin typeface="Times New Roman" panose="02020603050405020304" pitchFamily="18" charset="0"/>
+                <a:cs typeface="Times New Roman" panose="02020603050405020304" pitchFamily="18" charset="0"/>
+              </a:rPr>
+              <a:t>Inbound</a:t>
+            </a:r>
+            <a:br>
+              <a:rPr lang="en-US" sz="3000" dirty="0">
+                <a:solidFill>
+                  <a:srgbClr val="7030A0"/>
+                </a:solidFill>
+                <a:latin typeface="Times New Roman" panose="02020603050405020304" pitchFamily="18" charset="0"/>
+                <a:cs typeface="Times New Roman" panose="02020603050405020304" pitchFamily="18" charset="0"/>
+              </a:rPr>
+            </a:br>
+            <a:r>
+              <a:rPr lang="en-US" sz="3000" dirty="0">
+                <a:solidFill>
+                  <a:srgbClr val="7030A0"/>
+                </a:solidFill>
+                <a:latin typeface="Times New Roman" panose="02020603050405020304" pitchFamily="18" charset="0"/>
+                <a:cs typeface="Times New Roman" panose="02020603050405020304" pitchFamily="18" charset="0"/>
+              </a:rPr>
+              <a:t>Communication</a:t>
+            </a:r>
+          </a:p>
+        </p:txBody>
+      </p:sp>
+      <p:sp>
+        <p:nvSpPr>
+          <p:cNvPr id="10" name="TextBox 9">
+            <a:extLst>
+              <a:ext uri="{FF2B5EF4-FFF2-40B4-BE49-F238E27FC236}">
+                <a16:creationId xmlns:a16="http://schemas.microsoft.com/office/drawing/2014/main" id="{7683AD16-892E-88AD-8ACB-FA66F2EE1492}"/>
+              </a:ext>
+            </a:extLst>
+          </p:cNvPr>
+          <p:cNvSpPr txBox="1"/>
+          <p:nvPr/>
+        </p:nvSpPr>
+        <p:spPr>
+          <a:xfrm>
+            <a:off x="933723" y="3095367"/>
+            <a:ext cx="2830628" cy="1015663"/>
+          </a:xfrm>
+          <a:prstGeom prst="rect">
+            <a:avLst/>
+          </a:prstGeom>
+          <a:noFill/>
+        </p:spPr>
+        <p:txBody>
+          <a:bodyPr wrap="square" rtlCol="0">
+            <a:spAutoFit/>
+          </a:bodyPr>
+          <a:lstStyle/>
+          <a:p>
+            <a:pPr algn="ctr"/>
+            <a:r>
+              <a:rPr lang="en-US" sz="3000" dirty="0">
+                <a:solidFill>
+                  <a:srgbClr val="7030A0"/>
+                </a:solidFill>
+                <a:latin typeface="Times New Roman" panose="02020603050405020304" pitchFamily="18" charset="0"/>
+                <a:cs typeface="Times New Roman" panose="02020603050405020304" pitchFamily="18" charset="0"/>
+              </a:rPr>
+              <a:t>Outbound</a:t>
+            </a:r>
+            <a:br>
+              <a:rPr lang="en-US" sz="3000" dirty="0">
+                <a:solidFill>
+                  <a:srgbClr val="7030A0"/>
+                </a:solidFill>
+                <a:latin typeface="Times New Roman" panose="02020603050405020304" pitchFamily="18" charset="0"/>
+                <a:cs typeface="Times New Roman" panose="02020603050405020304" pitchFamily="18" charset="0"/>
+              </a:rPr>
+            </a:br>
+            <a:r>
+              <a:rPr lang="en-US" sz="3000" dirty="0">
+                <a:solidFill>
+                  <a:srgbClr val="7030A0"/>
+                </a:solidFill>
+                <a:latin typeface="Times New Roman" panose="02020603050405020304" pitchFamily="18" charset="0"/>
+                <a:cs typeface="Times New Roman" panose="02020603050405020304" pitchFamily="18" charset="0"/>
+              </a:rPr>
+              <a:t>Communication</a:t>
+            </a:r>
+          </a:p>
+        </p:txBody>
+      </p:sp>
+      <p:pic>
+        <p:nvPicPr>
+          <p:cNvPr id="5" name="Graphic 4" descr="Clock with solid fill">
+            <a:extLst>
+              <a:ext uri="{FF2B5EF4-FFF2-40B4-BE49-F238E27FC236}">
+                <a16:creationId xmlns:a16="http://schemas.microsoft.com/office/drawing/2014/main" id="{DC3F74E6-B828-7447-2596-D3D9C5694E27}"/>
+              </a:ext>
+            </a:extLst>
+          </p:cNvPr>
+          <p:cNvPicPr>
+            <a:picLocks noChangeAspect="1"/>
+          </p:cNvPicPr>
+          <p:nvPr/>
+        </p:nvPicPr>
+        <p:blipFill>
+          <a:blip>
+            <a:extLst>
+              <a:ext uri="{96DAC541-7B7A-43D3-8B79-37D633B846F1}">
+                <asvg:svgBlip xmlns:asvg="http://schemas.microsoft.com/office/drawing/2016/SVG/main" r:embed="rId3"/>
+              </a:ext>
+            </a:extLst>
+          </a:blip>
+          <a:stretch>
+            <a:fillRect/>
+          </a:stretch>
+        </p:blipFill>
+        <p:spPr>
+          <a:xfrm>
+            <a:off x="2625368" y="2338965"/>
+            <a:ext cx="914400" cy="914400"/>
+          </a:xfrm>
+          <a:prstGeom prst="rect">
+            <a:avLst/>
+          </a:prstGeom>
+        </p:spPr>
+      </p:pic>
+      <p:sp>
+        <p:nvSpPr>
+          <p:cNvPr id="7" name="TextBox 6">
+            <a:extLst>
+              <a:ext uri="{FF2B5EF4-FFF2-40B4-BE49-F238E27FC236}">
+                <a16:creationId xmlns:a16="http://schemas.microsoft.com/office/drawing/2014/main" id="{0B99F71D-207C-3FD0-D2C0-67FC0B3B6B20}"/>
+              </a:ext>
+            </a:extLst>
+          </p:cNvPr>
+          <p:cNvSpPr txBox="1"/>
+          <p:nvPr/>
+        </p:nvSpPr>
+        <p:spPr>
+          <a:xfrm>
+            <a:off x="3445340" y="2288333"/>
+            <a:ext cx="3614872" cy="1015663"/>
+          </a:xfrm>
+          <a:prstGeom prst="rect">
+            <a:avLst/>
+          </a:prstGeom>
+          <a:noFill/>
+        </p:spPr>
+        <p:txBody>
+          <a:bodyPr wrap="square" rtlCol="0">
+            <a:spAutoFit/>
+          </a:bodyPr>
+          <a:lstStyle/>
+          <a:p>
+            <a:r>
+              <a:rPr lang="en-US" sz="3000" dirty="0"/>
+              <a:t>Tightly Synchronized Clocks</a:t>
+            </a:r>
+          </a:p>
+        </p:txBody>
+      </p:sp>
+      <p:sp>
+        <p:nvSpPr>
+          <p:cNvPr id="2" name="Rounded Rectangle 1">
+            <a:extLst>
+              <a:ext uri="{FF2B5EF4-FFF2-40B4-BE49-F238E27FC236}">
+                <a16:creationId xmlns:a16="http://schemas.microsoft.com/office/drawing/2014/main" id="{C4CE2F7F-1B4D-2F81-B0A2-47AB184F13C3}"/>
+              </a:ext>
+            </a:extLst>
+          </p:cNvPr>
+          <p:cNvSpPr/>
+          <p:nvPr/>
+        </p:nvSpPr>
+        <p:spPr>
+          <a:xfrm>
+            <a:off x="7643442" y="2761827"/>
+            <a:ext cx="4032482" cy="2279729"/>
+          </a:xfrm>
+          <a:prstGeom prst="roundRect">
+            <a:avLst/>
+          </a:prstGeom>
+          <a:solidFill>
+            <a:schemeClr val="accent4">
+              <a:lumMod val="40000"/>
+              <a:lumOff val="60000"/>
+            </a:schemeClr>
+          </a:solidFill>
+          <a:ln>
+            <a:noFill/>
+          </a:ln>
+        </p:spPr>
+        <p:style>
+          <a:lnRef idx="2">
+            <a:schemeClr val="accent1">
+              <a:shade val="15000"/>
+            </a:schemeClr>
+          </a:lnRef>
+          <a:fillRef idx="1">
+            <a:schemeClr val="accent1"/>
+          </a:fillRef>
+          <a:effectRef idx="0">
+            <a:schemeClr val="accent1"/>
+          </a:effectRef>
+          <a:fontRef idx="minor">
+            <a:schemeClr val="lt1"/>
+          </a:fontRef>
+        </p:style>
+        <p:txBody>
+          <a:bodyPr rtlCol="0" anchor="ctr"/>
+          <a:lstStyle/>
+          <a:p>
+            <a:pPr algn="ctr"/>
+            <a:endParaRPr lang="en-US"/>
+          </a:p>
+        </p:txBody>
+      </p:sp>
+      <p:sp>
+        <p:nvSpPr>
+          <p:cNvPr id="8" name="TextBox 7">
+            <a:extLst>
+              <a:ext uri="{FF2B5EF4-FFF2-40B4-BE49-F238E27FC236}">
+                <a16:creationId xmlns:a16="http://schemas.microsoft.com/office/drawing/2014/main" id="{180C9FA6-F036-9573-1309-3BD06FDC2D18}"/>
+              </a:ext>
+            </a:extLst>
+          </p:cNvPr>
+          <p:cNvSpPr txBox="1"/>
+          <p:nvPr/>
+        </p:nvSpPr>
+        <p:spPr>
+          <a:xfrm>
+            <a:off x="8232575" y="3089189"/>
+            <a:ext cx="2830628" cy="1015663"/>
+          </a:xfrm>
+          <a:prstGeom prst="rect">
+            <a:avLst/>
+          </a:prstGeom>
+          <a:noFill/>
+        </p:spPr>
+        <p:txBody>
+          <a:bodyPr wrap="square" rtlCol="0">
+            <a:spAutoFit/>
+          </a:bodyPr>
+          <a:lstStyle/>
+          <a:p>
+            <a:pPr algn="ctr"/>
+            <a:r>
+              <a:rPr lang="en-US" sz="3000" dirty="0">
+                <a:solidFill>
+                  <a:srgbClr val="7030A0"/>
+                </a:solidFill>
+                <a:latin typeface="Times New Roman" panose="02020603050405020304" pitchFamily="18" charset="0"/>
+                <a:cs typeface="Times New Roman" panose="02020603050405020304" pitchFamily="18" charset="0"/>
+              </a:rPr>
+              <a:t>Inbound</a:t>
+            </a:r>
+            <a:br>
+              <a:rPr lang="en-US" sz="3000" dirty="0">
+                <a:solidFill>
+                  <a:srgbClr val="7030A0"/>
+                </a:solidFill>
+                <a:latin typeface="Times New Roman" panose="02020603050405020304" pitchFamily="18" charset="0"/>
+                <a:cs typeface="Times New Roman" panose="02020603050405020304" pitchFamily="18" charset="0"/>
+              </a:rPr>
+            </a:br>
+            <a:r>
+              <a:rPr lang="en-US" sz="3000" dirty="0">
+                <a:solidFill>
+                  <a:srgbClr val="7030A0"/>
+                </a:solidFill>
+                <a:latin typeface="Times New Roman" panose="02020603050405020304" pitchFamily="18" charset="0"/>
+                <a:cs typeface="Times New Roman" panose="02020603050405020304" pitchFamily="18" charset="0"/>
+              </a:rPr>
+              <a:t>Communication</a:t>
+            </a:r>
+          </a:p>
+        </p:txBody>
+      </p:sp>
+      <p:pic>
+        <p:nvPicPr>
+          <p:cNvPr id="11" name="Graphic 10" descr="Normal Distribution with solid fill">
+            <a:extLst>
+              <a:ext uri="{FF2B5EF4-FFF2-40B4-BE49-F238E27FC236}">
+                <a16:creationId xmlns:a16="http://schemas.microsoft.com/office/drawing/2014/main" id="{5C94C79F-D31B-1110-C711-C59BC2DA234E}"/>
+              </a:ext>
+            </a:extLst>
+          </p:cNvPr>
+          <p:cNvPicPr>
+            <a:picLocks noChangeAspect="1"/>
+          </p:cNvPicPr>
+          <p:nvPr/>
+        </p:nvPicPr>
+        <p:blipFill>
+          <a:blip>
+            <a:extLst>
+              <a:ext uri="{96DAC541-7B7A-43D3-8B79-37D633B846F1}">
+                <asvg:svgBlip xmlns:asvg="http://schemas.microsoft.com/office/drawing/2016/SVG/main" r:embed="rId4"/>
+              </a:ext>
+            </a:extLst>
+          </a:blip>
+          <a:stretch>
+            <a:fillRect/>
+          </a:stretch>
+        </p:blipFill>
+        <p:spPr>
+          <a:xfrm>
+            <a:off x="8232575" y="2206810"/>
+            <a:ext cx="914400" cy="914400"/>
+          </a:xfrm>
+          <a:prstGeom prst="rect">
+            <a:avLst/>
+          </a:prstGeom>
+        </p:spPr>
+      </p:pic>
+      <p:sp>
+        <p:nvSpPr>
+          <p:cNvPr id="13" name="TextBox 12">
+            <a:extLst>
+              <a:ext uri="{FF2B5EF4-FFF2-40B4-BE49-F238E27FC236}">
+                <a16:creationId xmlns:a16="http://schemas.microsoft.com/office/drawing/2014/main" id="{DB85E896-B51E-B9AE-4126-D45A2DB10B7F}"/>
+              </a:ext>
+            </a:extLst>
+          </p:cNvPr>
+          <p:cNvSpPr txBox="1"/>
+          <p:nvPr/>
+        </p:nvSpPr>
+        <p:spPr>
+          <a:xfrm>
+            <a:off x="9059956" y="2152485"/>
+            <a:ext cx="2846807" cy="1015663"/>
+          </a:xfrm>
+          <a:prstGeom prst="rect">
+            <a:avLst/>
+          </a:prstGeom>
+          <a:noFill/>
+        </p:spPr>
+        <p:txBody>
+          <a:bodyPr wrap="square" rtlCol="0">
+            <a:spAutoFit/>
+          </a:bodyPr>
+          <a:lstStyle/>
+          <a:p>
+            <a:r>
+              <a:rPr lang="en-US" sz="3000" dirty="0"/>
+              <a:t>Time as a random variable</a:t>
+            </a:r>
+          </a:p>
+        </p:txBody>
+      </p:sp>
+      <p:sp>
+        <p:nvSpPr>
+          <p:cNvPr id="9" name="TextBox 8">
+            <a:extLst>
+              <a:ext uri="{FF2B5EF4-FFF2-40B4-BE49-F238E27FC236}">
+                <a16:creationId xmlns:a16="http://schemas.microsoft.com/office/drawing/2014/main" id="{FF79DCAB-6D3F-F0E5-03A5-FECA8F3C4FA2}"/>
+              </a:ext>
+            </a:extLst>
+          </p:cNvPr>
+          <p:cNvSpPr txBox="1"/>
+          <p:nvPr/>
+        </p:nvSpPr>
+        <p:spPr>
+          <a:xfrm>
+            <a:off x="2121325" y="4564534"/>
+            <a:ext cx="3872835" cy="461665"/>
+          </a:xfrm>
+          <a:prstGeom prst="rect">
+            <a:avLst/>
+          </a:prstGeom>
+          <a:noFill/>
+        </p:spPr>
+        <p:txBody>
+          <a:bodyPr wrap="square" rtlCol="0">
+            <a:spAutoFit/>
+          </a:bodyPr>
+          <a:lstStyle/>
+          <a:p>
+            <a:pPr algn="ctr"/>
+            <a:r>
+              <a:rPr lang="en-US" sz="2400" dirty="0">
+                <a:latin typeface="Times New Roman" panose="02020603050405020304" pitchFamily="18" charset="0"/>
+                <a:cs typeface="Times New Roman" panose="02020603050405020304" pitchFamily="18" charset="0"/>
+              </a:rPr>
+              <a:t>ACM SIGCOMM’25</a:t>
+            </a:r>
+          </a:p>
+        </p:txBody>
+      </p:sp>
+      <p:sp>
+        <p:nvSpPr>
+          <p:cNvPr id="14" name="TextBox 13">
+            <a:extLst>
+              <a:ext uri="{FF2B5EF4-FFF2-40B4-BE49-F238E27FC236}">
+                <a16:creationId xmlns:a16="http://schemas.microsoft.com/office/drawing/2014/main" id="{16758BBE-60CC-5A6D-75BA-B7DACEFFD024}"/>
+              </a:ext>
+            </a:extLst>
+          </p:cNvPr>
+          <p:cNvSpPr txBox="1"/>
+          <p:nvPr/>
+        </p:nvSpPr>
+        <p:spPr>
+          <a:xfrm>
+            <a:off x="7643442" y="4111538"/>
+            <a:ext cx="3872835" cy="461665"/>
+          </a:xfrm>
+          <a:prstGeom prst="rect">
+            <a:avLst/>
+          </a:prstGeom>
+          <a:noFill/>
+        </p:spPr>
+        <p:txBody>
+          <a:bodyPr wrap="square" rtlCol="0">
+            <a:spAutoFit/>
+          </a:bodyPr>
+          <a:lstStyle/>
+          <a:p>
+            <a:pPr algn="ctr"/>
+            <a:r>
+              <a:rPr lang="en-US" sz="2400" dirty="0">
+                <a:latin typeface="Times New Roman" panose="02020603050405020304" pitchFamily="18" charset="0"/>
+                <a:cs typeface="Times New Roman" panose="02020603050405020304" pitchFamily="18" charset="0"/>
+              </a:rPr>
+              <a:t>ACM HotNets’25</a:t>
+            </a:r>
+          </a:p>
+        </p:txBody>
+      </p:sp>
+      <p:sp>
+        <p:nvSpPr>
+          <p:cNvPr id="15" name="TextBox 14">
+            <a:extLst>
+              <a:ext uri="{FF2B5EF4-FFF2-40B4-BE49-F238E27FC236}">
+                <a16:creationId xmlns:a16="http://schemas.microsoft.com/office/drawing/2014/main" id="{AE0B7F2B-89A8-DA63-8B23-76673AB870C0}"/>
+              </a:ext>
+            </a:extLst>
+          </p:cNvPr>
+          <p:cNvSpPr txBox="1"/>
+          <p:nvPr/>
+        </p:nvSpPr>
+        <p:spPr>
+          <a:xfrm>
+            <a:off x="7643442" y="4507299"/>
+            <a:ext cx="3872835" cy="461665"/>
+          </a:xfrm>
+          <a:prstGeom prst="rect">
+            <a:avLst/>
+          </a:prstGeom>
+          <a:noFill/>
+        </p:spPr>
+        <p:txBody>
+          <a:bodyPr wrap="square" rtlCol="0">
+            <a:spAutoFit/>
+          </a:bodyPr>
+          <a:lstStyle/>
+          <a:p>
+            <a:pPr algn="ctr"/>
+            <a:r>
+              <a:rPr lang="en-US" sz="2400" dirty="0">
+                <a:latin typeface="Times New Roman" panose="02020603050405020304" pitchFamily="18" charset="0"/>
+                <a:cs typeface="Times New Roman" panose="02020603050405020304" pitchFamily="18" charset="0"/>
+              </a:rPr>
+              <a:t>Submitted to SIGCOMM’26</a:t>
+            </a:r>
+          </a:p>
+        </p:txBody>
+      </p:sp>
+      <p:sp>
+        <p:nvSpPr>
+          <p:cNvPr id="3" name="TextBox 2">
+            <a:extLst>
+              <a:ext uri="{FF2B5EF4-FFF2-40B4-BE49-F238E27FC236}">
+                <a16:creationId xmlns:a16="http://schemas.microsoft.com/office/drawing/2014/main" id="{3A453774-1F0A-4F75-7384-F591D706DB5E}"/>
+              </a:ext>
+            </a:extLst>
+          </p:cNvPr>
+          <p:cNvSpPr txBox="1"/>
+          <p:nvPr/>
+        </p:nvSpPr>
+        <p:spPr>
+          <a:xfrm>
+            <a:off x="2121324" y="5050912"/>
+            <a:ext cx="3872835" cy="1200329"/>
+          </a:xfrm>
+          <a:prstGeom prst="rect">
+            <a:avLst/>
+          </a:prstGeom>
+          <a:noFill/>
+        </p:spPr>
+        <p:txBody>
+          <a:bodyPr wrap="square" rtlCol="0">
+            <a:spAutoFit/>
+          </a:bodyPr>
+          <a:lstStyle/>
+          <a:p>
+            <a:pPr algn="ctr"/>
+            <a:r>
+              <a:rPr lang="en-US" sz="2400" dirty="0">
+                <a:latin typeface="Times New Roman" panose="02020603050405020304" pitchFamily="18" charset="0"/>
+                <a:cs typeface="Times New Roman" panose="02020603050405020304" pitchFamily="18" charset="0"/>
+              </a:rPr>
+              <a:t>Cited by researchers from Jane Street, Google, Microsoft Research</a:t>
+            </a:r>
+          </a:p>
+        </p:txBody>
+      </p:sp>
+      <p:sp>
+        <p:nvSpPr>
+          <p:cNvPr id="16" name="TextBox 15">
+            <a:extLst>
+              <a:ext uri="{FF2B5EF4-FFF2-40B4-BE49-F238E27FC236}">
+                <a16:creationId xmlns:a16="http://schemas.microsoft.com/office/drawing/2014/main" id="{7F7A22B8-3912-A39A-4AD8-9F6867449B9D}"/>
+              </a:ext>
+            </a:extLst>
+          </p:cNvPr>
+          <p:cNvSpPr txBox="1"/>
+          <p:nvPr/>
+        </p:nvSpPr>
+        <p:spPr>
+          <a:xfrm>
+            <a:off x="7803089" y="5050912"/>
+            <a:ext cx="3872835" cy="1200329"/>
+          </a:xfrm>
+          <a:prstGeom prst="rect">
+            <a:avLst/>
+          </a:prstGeom>
+          <a:noFill/>
+        </p:spPr>
+        <p:txBody>
+          <a:bodyPr wrap="square" rtlCol="0">
+            <a:spAutoFit/>
+          </a:bodyPr>
+          <a:lstStyle/>
+          <a:p>
+            <a:pPr algn="ctr"/>
+            <a:r>
+              <a:rPr lang="en-US" sz="2400" dirty="0">
+                <a:latin typeface="Times New Roman" panose="02020603050405020304" pitchFamily="18" charset="0"/>
+                <a:cs typeface="Times New Roman" panose="02020603050405020304" pitchFamily="18" charset="0"/>
+              </a:rPr>
+              <a:t>Considerable interest from Jane Street, working with them on extensions</a:t>
+            </a:r>
+          </a:p>
+        </p:txBody>
+      </p:sp>
+    </p:spTree>
+    <p:extLst>
+      <p:ext uri="{BB962C8B-B14F-4D97-AF65-F5344CB8AC3E}">
+        <p14:creationId xmlns:p14="http://schemas.microsoft.com/office/powerpoint/2010/main" val="3568427761"/>
       </p:ext>
     </p:extLst>
   </p:cSld>

--- a/thesis-latency-fairness.pptx
+++ b/thesis-latency-fairness.pptx
@@ -10468,8 +10468,8 @@
         </p:nvSpPr>
         <p:spPr>
           <a:xfrm>
-            <a:off x="7803089" y="5050912"/>
-            <a:ext cx="3872835" cy="1200329"/>
+            <a:off x="7643442" y="5095180"/>
+            <a:ext cx="4103674" cy="1200329"/>
           </a:xfrm>
           <a:prstGeom prst="rect">
             <a:avLst/>
@@ -10488,7 +10488,7 @@
                 <a:latin typeface="Times New Roman" panose="02020603050405020304" pitchFamily="18" charset="0"/>
                 <a:cs typeface="Times New Roman" panose="02020603050405020304" pitchFamily="18" charset="0"/>
               </a:rPr>
-              <a:t>Considerable interest from Jane Street, working with them on extensions</a:t>
+              <a:t>Considerable interest from Jane Street, working with them to build several systems atop</a:t>
             </a:r>
           </a:p>
         </p:txBody>

--- a/thesis-latency-fairness.pptx
+++ b/thesis-latency-fairness.pptx
@@ -5,7 +5,7 @@
     <p:sldMasterId id="2147483648" r:id="rId1"/>
   </p:sldMasterIdLst>
   <p:notesMasterIdLst>
-    <p:notesMasterId r:id="rId19"/>
+    <p:notesMasterId r:id="rId20"/>
   </p:notesMasterIdLst>
   <p:sldIdLst>
     <p:sldId id="256" r:id="rId2"/>
@@ -25,6 +25,7 @@
     <p:sldId id="272" r:id="rId16"/>
     <p:sldId id="273" r:id="rId17"/>
     <p:sldId id="274" r:id="rId18"/>
+    <p:sldId id="276" r:id="rId19"/>
   </p:sldIdLst>
   <p:sldSz cx="12192000" cy="6858000"/>
   <p:notesSz cx="6858000" cy="9144000"/>
@@ -769,6 +770,114 @@
     <p:extLst>
       <p:ext uri="{BB962C8B-B14F-4D97-AF65-F5344CB8AC3E}">
         <p14:creationId xmlns:p14="http://schemas.microsoft.com/office/powerpoint/2010/main" val="1071674080"/>
+      </p:ext>
+    </p:extLst>
+  </p:cSld>
+  <p:clrMapOvr>
+    <a:masterClrMapping/>
+  </p:clrMapOvr>
+</p:notes>
+</file>
+
+<file path=ppt/notesSlides/notesSlide12.xml><?xml version="1.0" encoding="utf-8"?>
+<p:notes xmlns:a="http://schemas.openxmlformats.org/drawingml/2006/main" xmlns:r="http://schemas.openxmlformats.org/officeDocument/2006/relationships" xmlns:p="http://schemas.openxmlformats.org/presentationml/2006/main">
+  <p:cSld>
+    <p:spTree>
+      <p:nvGrpSpPr>
+        <p:cNvPr id="1" name="">
+          <a:extLst>
+            <a:ext uri="{FF2B5EF4-FFF2-40B4-BE49-F238E27FC236}">
+              <a16:creationId xmlns:a16="http://schemas.microsoft.com/office/drawing/2014/main" id="{8D7FC0A0-A527-AB60-C375-2279D78A1F84}"/>
+            </a:ext>
+          </a:extLst>
+        </p:cNvPr>
+        <p:cNvGrpSpPr/>
+        <p:nvPr/>
+      </p:nvGrpSpPr>
+      <p:grpSpPr>
+        <a:xfrm>
+          <a:off x="0" y="0"/>
+          <a:ext cx="0" cy="0"/>
+          <a:chOff x="0" y="0"/>
+          <a:chExt cx="0" cy="0"/>
+        </a:xfrm>
+      </p:grpSpPr>
+      <p:sp>
+        <p:nvSpPr>
+          <p:cNvPr id="2" name="Slide Image Placeholder 1">
+            <a:extLst>
+              <a:ext uri="{FF2B5EF4-FFF2-40B4-BE49-F238E27FC236}">
+                <a16:creationId xmlns:a16="http://schemas.microsoft.com/office/drawing/2014/main" id="{50607C0F-F044-9CA5-A27E-65D99F2FB40D}"/>
+              </a:ext>
+            </a:extLst>
+          </p:cNvPr>
+          <p:cNvSpPr>
+            <a:spLocks noGrp="1" noRot="1" noChangeAspect="1"/>
+          </p:cNvSpPr>
+          <p:nvPr>
+            <p:ph type="sldImg"/>
+          </p:nvPr>
+        </p:nvSpPr>
+        <p:spPr/>
+      </p:sp>
+      <p:sp>
+        <p:nvSpPr>
+          <p:cNvPr id="3" name="Notes Placeholder 2">
+            <a:extLst>
+              <a:ext uri="{FF2B5EF4-FFF2-40B4-BE49-F238E27FC236}">
+                <a16:creationId xmlns:a16="http://schemas.microsoft.com/office/drawing/2014/main" id="{F4F7997C-22A7-1852-BBC8-13B00A02795C}"/>
+              </a:ext>
+            </a:extLst>
+          </p:cNvPr>
+          <p:cNvSpPr>
+            <a:spLocks noGrp="1"/>
+          </p:cNvSpPr>
+          <p:nvPr>
+            <p:ph type="body" idx="1"/>
+          </p:nvPr>
+        </p:nvSpPr>
+        <p:spPr/>
+        <p:txBody>
+          <a:bodyPr/>
+          <a:lstStyle/>
+          <a:p>
+            <a:endParaRPr lang="en-US" dirty="0"/>
+          </a:p>
+        </p:txBody>
+      </p:sp>
+      <p:sp>
+        <p:nvSpPr>
+          <p:cNvPr id="4" name="Slide Number Placeholder 3">
+            <a:extLst>
+              <a:ext uri="{FF2B5EF4-FFF2-40B4-BE49-F238E27FC236}">
+                <a16:creationId xmlns:a16="http://schemas.microsoft.com/office/drawing/2014/main" id="{EF374653-F9AE-2D0D-E56F-42C68A086C27}"/>
+              </a:ext>
+            </a:extLst>
+          </p:cNvPr>
+          <p:cNvSpPr>
+            <a:spLocks noGrp="1"/>
+          </p:cNvSpPr>
+          <p:nvPr>
+            <p:ph type="sldNum" sz="quarter" idx="5"/>
+          </p:nvPr>
+        </p:nvSpPr>
+        <p:spPr/>
+        <p:txBody>
+          <a:bodyPr/>
+          <a:lstStyle/>
+          <a:p>
+            <a:fld id="{5AD2936D-68DF-C34D-84E6-1FDAB4C19BCF}" type="slidenum">
+              <a:rPr lang="en-US" smtClean="0"/>
+              <a:t>18</a:t>
+            </a:fld>
+            <a:endParaRPr lang="en-US"/>
+          </a:p>
+        </p:txBody>
+      </p:sp>
+    </p:spTree>
+    <p:extLst>
+      <p:ext uri="{BB962C8B-B14F-4D97-AF65-F5344CB8AC3E}">
+        <p14:creationId xmlns:p14="http://schemas.microsoft.com/office/powerpoint/2010/main" val="3780556609"/>
       </p:ext>
     </p:extLst>
   </p:cSld>
@@ -10497,6 +10606,924 @@
     <p:extLst>
       <p:ext uri="{BB962C8B-B14F-4D97-AF65-F5344CB8AC3E}">
         <p14:creationId xmlns:p14="http://schemas.microsoft.com/office/powerpoint/2010/main" val="3568427761"/>
+      </p:ext>
+    </p:extLst>
+  </p:cSld>
+  <p:clrMapOvr>
+    <a:masterClrMapping/>
+  </p:clrMapOvr>
+  <mc:AlternateContent xmlns:mc="http://schemas.openxmlformats.org/markup-compatibility/2006">
+    <mc:Choice xmlns:p159="http://schemas.microsoft.com/office/powerpoint/2015/09/main" Requires="p159">
+      <p:transition spd="med">
+        <p159:morph option="byWord"/>
+      </p:transition>
+    </mc:Choice>
+    <mc:Fallback>
+      <p:transition spd="med">
+        <p:fade/>
+      </p:transition>
+    </mc:Fallback>
+  </mc:AlternateContent>
+</p:sld>
+</file>
+
+<file path=ppt/slides/slide18.xml><?xml version="1.0" encoding="utf-8"?>
+<p:sld xmlns:a="http://schemas.openxmlformats.org/drawingml/2006/main" xmlns:r="http://schemas.openxmlformats.org/officeDocument/2006/relationships" xmlns:p="http://schemas.openxmlformats.org/presentationml/2006/main">
+  <p:cSld>
+    <p:spTree>
+      <p:nvGrpSpPr>
+        <p:cNvPr id="1" name="">
+          <a:extLst>
+            <a:ext uri="{FF2B5EF4-FFF2-40B4-BE49-F238E27FC236}">
+              <a16:creationId xmlns:a16="http://schemas.microsoft.com/office/drawing/2014/main" id="{036B5CA3-9610-7961-1B95-96F35195D1C8}"/>
+            </a:ext>
+          </a:extLst>
+        </p:cNvPr>
+        <p:cNvGrpSpPr/>
+        <p:nvPr/>
+      </p:nvGrpSpPr>
+      <p:grpSpPr>
+        <a:xfrm>
+          <a:off x="0" y="0"/>
+          <a:ext cx="0" cy="0"/>
+          <a:chOff x="0" y="0"/>
+          <a:chExt cx="0" cy="0"/>
+        </a:xfrm>
+      </p:grpSpPr>
+      <p:sp>
+        <p:nvSpPr>
+          <p:cNvPr id="6" name="Rounded Rectangle 5">
+            <a:extLst>
+              <a:ext uri="{FF2B5EF4-FFF2-40B4-BE49-F238E27FC236}">
+                <a16:creationId xmlns:a16="http://schemas.microsoft.com/office/drawing/2014/main" id="{8CDB2F0E-92F1-2447-4AFB-9C2AE402C6BF}"/>
+              </a:ext>
+            </a:extLst>
+          </p:cNvPr>
+          <p:cNvSpPr/>
+          <p:nvPr/>
+        </p:nvSpPr>
+        <p:spPr>
+          <a:xfrm>
+            <a:off x="702884" y="2761827"/>
+            <a:ext cx="6709719" cy="2279729"/>
+          </a:xfrm>
+          <a:prstGeom prst="roundRect">
+            <a:avLst/>
+          </a:prstGeom>
+          <a:solidFill>
+            <a:schemeClr val="accent4">
+              <a:lumMod val="40000"/>
+              <a:lumOff val="60000"/>
+            </a:schemeClr>
+          </a:solidFill>
+          <a:ln>
+            <a:noFill/>
+          </a:ln>
+        </p:spPr>
+        <p:style>
+          <a:lnRef idx="2">
+            <a:schemeClr val="accent1">
+              <a:shade val="15000"/>
+            </a:schemeClr>
+          </a:lnRef>
+          <a:fillRef idx="1">
+            <a:schemeClr val="accent1"/>
+          </a:fillRef>
+          <a:effectRef idx="0">
+            <a:schemeClr val="accent1"/>
+          </a:effectRef>
+          <a:fontRef idx="minor">
+            <a:schemeClr val="lt1"/>
+          </a:fontRef>
+        </p:style>
+        <p:txBody>
+          <a:bodyPr rtlCol="0" anchor="ctr"/>
+          <a:lstStyle/>
+          <a:p>
+            <a:pPr algn="ctr"/>
+            <a:endParaRPr lang="en-US"/>
+          </a:p>
+        </p:txBody>
+      </p:sp>
+      <p:sp>
+        <p:nvSpPr>
+          <p:cNvPr id="17" name="Rectangle 16">
+            <a:extLst>
+              <a:ext uri="{FF2B5EF4-FFF2-40B4-BE49-F238E27FC236}">
+                <a16:creationId xmlns:a16="http://schemas.microsoft.com/office/drawing/2014/main" id="{80DFBDE7-5E2E-5800-F1C0-A20B261A1755}"/>
+              </a:ext>
+            </a:extLst>
+          </p:cNvPr>
+          <p:cNvSpPr/>
+          <p:nvPr/>
+        </p:nvSpPr>
+        <p:spPr>
+          <a:xfrm rot="16200000">
+            <a:off x="2522582" y="-387076"/>
+            <a:ext cx="68673" cy="3246390"/>
+          </a:xfrm>
+          <a:prstGeom prst="rect">
+            <a:avLst/>
+          </a:prstGeom>
+          <a:solidFill>
+            <a:srgbClr val="FF0000"/>
+          </a:solidFill>
+          <a:ln>
+            <a:solidFill>
+              <a:srgbClr val="FF0000"/>
+            </a:solidFill>
+          </a:ln>
+        </p:spPr>
+        <p:style>
+          <a:lnRef idx="2">
+            <a:schemeClr val="accent1">
+              <a:shade val="15000"/>
+            </a:schemeClr>
+          </a:lnRef>
+          <a:fillRef idx="1">
+            <a:schemeClr val="accent1"/>
+          </a:fillRef>
+          <a:effectRef idx="0">
+            <a:schemeClr val="accent1"/>
+          </a:effectRef>
+          <a:fontRef idx="minor">
+            <a:schemeClr val="lt1"/>
+          </a:fontRef>
+        </p:style>
+        <p:txBody>
+          <a:bodyPr rtlCol="0" anchor="ctr"/>
+          <a:lstStyle/>
+          <a:p>
+            <a:pPr algn="ctr"/>
+            <a:endParaRPr lang="en-US">
+              <a:latin typeface="Times New Roman" panose="02020603050405020304" pitchFamily="18" charset="0"/>
+              <a:cs typeface="Times New Roman" panose="02020603050405020304" pitchFamily="18" charset="0"/>
+            </a:endParaRPr>
+          </a:p>
+        </p:txBody>
+      </p:sp>
+      <p:sp>
+        <p:nvSpPr>
+          <p:cNvPr id="18" name="Rectangle 17">
+            <a:extLst>
+              <a:ext uri="{FF2B5EF4-FFF2-40B4-BE49-F238E27FC236}">
+                <a16:creationId xmlns:a16="http://schemas.microsoft.com/office/drawing/2014/main" id="{27B1ED2F-A8D1-2AF2-FE8B-3E6187AA2C8E}"/>
+              </a:ext>
+            </a:extLst>
+          </p:cNvPr>
+          <p:cNvSpPr/>
+          <p:nvPr/>
+        </p:nvSpPr>
+        <p:spPr>
+          <a:xfrm rot="16200000">
+            <a:off x="2522581" y="-318404"/>
+            <a:ext cx="68674" cy="3246390"/>
+          </a:xfrm>
+          <a:prstGeom prst="rect">
+            <a:avLst/>
+          </a:prstGeom>
+          <a:solidFill>
+            <a:srgbClr val="7030A0"/>
+          </a:solidFill>
+          <a:ln>
+            <a:solidFill>
+              <a:srgbClr val="7030A0"/>
+            </a:solidFill>
+          </a:ln>
+        </p:spPr>
+        <p:style>
+          <a:lnRef idx="2">
+            <a:schemeClr val="accent1">
+              <a:shade val="15000"/>
+            </a:schemeClr>
+          </a:lnRef>
+          <a:fillRef idx="1">
+            <a:schemeClr val="accent1"/>
+          </a:fillRef>
+          <a:effectRef idx="0">
+            <a:schemeClr val="accent1"/>
+          </a:effectRef>
+          <a:fontRef idx="minor">
+            <a:schemeClr val="lt1"/>
+          </a:fontRef>
+        </p:style>
+        <p:txBody>
+          <a:bodyPr rtlCol="0" anchor="ctr"/>
+          <a:lstStyle/>
+          <a:p>
+            <a:pPr algn="ctr"/>
+            <a:endParaRPr lang="en-US">
+              <a:latin typeface="Times New Roman" panose="02020603050405020304" pitchFamily="18" charset="0"/>
+              <a:cs typeface="Times New Roman" panose="02020603050405020304" pitchFamily="18" charset="0"/>
+            </a:endParaRPr>
+          </a:p>
+        </p:txBody>
+      </p:sp>
+      <p:sp>
+        <p:nvSpPr>
+          <p:cNvPr id="12" name="TextBox 11">
+            <a:extLst>
+              <a:ext uri="{FF2B5EF4-FFF2-40B4-BE49-F238E27FC236}">
+                <a16:creationId xmlns:a16="http://schemas.microsoft.com/office/drawing/2014/main" id="{A4C2A527-A0EA-8B4C-9EC6-6DDFB7C965FD}"/>
+              </a:ext>
+            </a:extLst>
+          </p:cNvPr>
+          <p:cNvSpPr txBox="1"/>
+          <p:nvPr/>
+        </p:nvSpPr>
+        <p:spPr>
+          <a:xfrm>
+            <a:off x="772906" y="405121"/>
+            <a:ext cx="6591721" cy="830997"/>
+          </a:xfrm>
+          <a:prstGeom prst="rect">
+            <a:avLst/>
+          </a:prstGeom>
+          <a:noFill/>
+        </p:spPr>
+        <p:txBody>
+          <a:bodyPr wrap="square" rtlCol="0">
+            <a:spAutoFit/>
+          </a:bodyPr>
+          <a:lstStyle/>
+          <a:p>
+            <a:r>
+              <a:rPr lang="en-US" sz="4800" dirty="0">
+                <a:latin typeface="Times New Roman" panose="02020603050405020304" pitchFamily="18" charset="0"/>
+                <a:cs typeface="Times New Roman" panose="02020603050405020304" pitchFamily="18" charset="0"/>
+              </a:rPr>
+              <a:t>Thesis: Latency Fairness</a:t>
+            </a:r>
+            <a:endParaRPr lang="en-US" sz="3000" dirty="0">
+              <a:latin typeface="Times New Roman" panose="02020603050405020304" pitchFamily="18" charset="0"/>
+              <a:cs typeface="Times New Roman" panose="02020603050405020304" pitchFamily="18" charset="0"/>
+            </a:endParaRPr>
+          </a:p>
+        </p:txBody>
+      </p:sp>
+      <p:sp>
+        <p:nvSpPr>
+          <p:cNvPr id="4" name="TextBox 3">
+            <a:extLst>
+              <a:ext uri="{FF2B5EF4-FFF2-40B4-BE49-F238E27FC236}">
+                <a16:creationId xmlns:a16="http://schemas.microsoft.com/office/drawing/2014/main" id="{7EA2168A-D26C-B5B6-2A8D-229247BE723E}"/>
+              </a:ext>
+            </a:extLst>
+          </p:cNvPr>
+          <p:cNvSpPr txBox="1"/>
+          <p:nvPr/>
+        </p:nvSpPr>
+        <p:spPr>
+          <a:xfrm>
+            <a:off x="4229584" y="3089189"/>
+            <a:ext cx="2830628" cy="1015663"/>
+          </a:xfrm>
+          <a:prstGeom prst="rect">
+            <a:avLst/>
+          </a:prstGeom>
+          <a:noFill/>
+        </p:spPr>
+        <p:txBody>
+          <a:bodyPr wrap="square" rtlCol="0">
+            <a:spAutoFit/>
+          </a:bodyPr>
+          <a:lstStyle/>
+          <a:p>
+            <a:pPr algn="ctr"/>
+            <a:r>
+              <a:rPr lang="en-US" sz="3000" dirty="0">
+                <a:solidFill>
+                  <a:srgbClr val="7030A0"/>
+                </a:solidFill>
+                <a:latin typeface="Times New Roman" panose="02020603050405020304" pitchFamily="18" charset="0"/>
+                <a:cs typeface="Times New Roman" panose="02020603050405020304" pitchFamily="18" charset="0"/>
+              </a:rPr>
+              <a:t>Inbound</a:t>
+            </a:r>
+            <a:br>
+              <a:rPr lang="en-US" sz="3000" dirty="0">
+                <a:solidFill>
+                  <a:srgbClr val="7030A0"/>
+                </a:solidFill>
+                <a:latin typeface="Times New Roman" panose="02020603050405020304" pitchFamily="18" charset="0"/>
+                <a:cs typeface="Times New Roman" panose="02020603050405020304" pitchFamily="18" charset="0"/>
+              </a:rPr>
+            </a:br>
+            <a:r>
+              <a:rPr lang="en-US" sz="3000" dirty="0">
+                <a:solidFill>
+                  <a:srgbClr val="7030A0"/>
+                </a:solidFill>
+                <a:latin typeface="Times New Roman" panose="02020603050405020304" pitchFamily="18" charset="0"/>
+                <a:cs typeface="Times New Roman" panose="02020603050405020304" pitchFamily="18" charset="0"/>
+              </a:rPr>
+              <a:t>Communication</a:t>
+            </a:r>
+          </a:p>
+        </p:txBody>
+      </p:sp>
+      <p:sp>
+        <p:nvSpPr>
+          <p:cNvPr id="10" name="TextBox 9">
+            <a:extLst>
+              <a:ext uri="{FF2B5EF4-FFF2-40B4-BE49-F238E27FC236}">
+                <a16:creationId xmlns:a16="http://schemas.microsoft.com/office/drawing/2014/main" id="{57EDC1AC-909B-4FDD-19F3-6083605CF67A}"/>
+              </a:ext>
+            </a:extLst>
+          </p:cNvPr>
+          <p:cNvSpPr txBox="1"/>
+          <p:nvPr/>
+        </p:nvSpPr>
+        <p:spPr>
+          <a:xfrm>
+            <a:off x="933723" y="3095367"/>
+            <a:ext cx="2830628" cy="1015663"/>
+          </a:xfrm>
+          <a:prstGeom prst="rect">
+            <a:avLst/>
+          </a:prstGeom>
+          <a:noFill/>
+        </p:spPr>
+        <p:txBody>
+          <a:bodyPr wrap="square" rtlCol="0">
+            <a:spAutoFit/>
+          </a:bodyPr>
+          <a:lstStyle/>
+          <a:p>
+            <a:pPr algn="ctr"/>
+            <a:r>
+              <a:rPr lang="en-US" sz="3000" dirty="0">
+                <a:solidFill>
+                  <a:srgbClr val="7030A0"/>
+                </a:solidFill>
+                <a:latin typeface="Times New Roman" panose="02020603050405020304" pitchFamily="18" charset="0"/>
+                <a:cs typeface="Times New Roman" panose="02020603050405020304" pitchFamily="18" charset="0"/>
+              </a:rPr>
+              <a:t>Outbound</a:t>
+            </a:r>
+            <a:br>
+              <a:rPr lang="en-US" sz="3000" dirty="0">
+                <a:solidFill>
+                  <a:srgbClr val="7030A0"/>
+                </a:solidFill>
+                <a:latin typeface="Times New Roman" panose="02020603050405020304" pitchFamily="18" charset="0"/>
+                <a:cs typeface="Times New Roman" panose="02020603050405020304" pitchFamily="18" charset="0"/>
+              </a:rPr>
+            </a:br>
+            <a:r>
+              <a:rPr lang="en-US" sz="3000" dirty="0">
+                <a:solidFill>
+                  <a:srgbClr val="7030A0"/>
+                </a:solidFill>
+                <a:latin typeface="Times New Roman" panose="02020603050405020304" pitchFamily="18" charset="0"/>
+                <a:cs typeface="Times New Roman" panose="02020603050405020304" pitchFamily="18" charset="0"/>
+              </a:rPr>
+              <a:t>Communication</a:t>
+            </a:r>
+          </a:p>
+        </p:txBody>
+      </p:sp>
+      <p:pic>
+        <p:nvPicPr>
+          <p:cNvPr id="5" name="Graphic 4" descr="Clock with solid fill">
+            <a:extLst>
+              <a:ext uri="{FF2B5EF4-FFF2-40B4-BE49-F238E27FC236}">
+                <a16:creationId xmlns:a16="http://schemas.microsoft.com/office/drawing/2014/main" id="{7CA41EBB-C6FA-DB22-3E79-DEA8E56EF4C3}"/>
+              </a:ext>
+            </a:extLst>
+          </p:cNvPr>
+          <p:cNvPicPr>
+            <a:picLocks noChangeAspect="1"/>
+          </p:cNvPicPr>
+          <p:nvPr/>
+        </p:nvPicPr>
+        <p:blipFill>
+          <a:blip>
+            <a:extLst>
+              <a:ext uri="{96DAC541-7B7A-43D3-8B79-37D633B846F1}">
+                <asvg:svgBlip xmlns:asvg="http://schemas.microsoft.com/office/drawing/2016/SVG/main" r:embed="rId3"/>
+              </a:ext>
+            </a:extLst>
+          </a:blip>
+          <a:stretch>
+            <a:fillRect/>
+          </a:stretch>
+        </p:blipFill>
+        <p:spPr>
+          <a:xfrm>
+            <a:off x="2625368" y="2338965"/>
+            <a:ext cx="914400" cy="914400"/>
+          </a:xfrm>
+          <a:prstGeom prst="rect">
+            <a:avLst/>
+          </a:prstGeom>
+        </p:spPr>
+      </p:pic>
+      <p:sp>
+        <p:nvSpPr>
+          <p:cNvPr id="7" name="TextBox 6">
+            <a:extLst>
+              <a:ext uri="{FF2B5EF4-FFF2-40B4-BE49-F238E27FC236}">
+                <a16:creationId xmlns:a16="http://schemas.microsoft.com/office/drawing/2014/main" id="{E1739C3C-A360-3329-AC33-3EC88A1DDBF6}"/>
+              </a:ext>
+            </a:extLst>
+          </p:cNvPr>
+          <p:cNvSpPr txBox="1"/>
+          <p:nvPr/>
+        </p:nvSpPr>
+        <p:spPr>
+          <a:xfrm>
+            <a:off x="3445340" y="2288333"/>
+            <a:ext cx="3614872" cy="1015663"/>
+          </a:xfrm>
+          <a:prstGeom prst="rect">
+            <a:avLst/>
+          </a:prstGeom>
+          <a:noFill/>
+        </p:spPr>
+        <p:txBody>
+          <a:bodyPr wrap="square" rtlCol="0">
+            <a:spAutoFit/>
+          </a:bodyPr>
+          <a:lstStyle/>
+          <a:p>
+            <a:r>
+              <a:rPr lang="en-US" sz="3000" dirty="0"/>
+              <a:t>Tightly Synchronized Clocks</a:t>
+            </a:r>
+          </a:p>
+        </p:txBody>
+      </p:sp>
+      <p:sp>
+        <p:nvSpPr>
+          <p:cNvPr id="2" name="Rounded Rectangle 1">
+            <a:extLst>
+              <a:ext uri="{FF2B5EF4-FFF2-40B4-BE49-F238E27FC236}">
+                <a16:creationId xmlns:a16="http://schemas.microsoft.com/office/drawing/2014/main" id="{9A0DB9F4-97FE-53E9-6644-C22A4EAA8EE4}"/>
+              </a:ext>
+            </a:extLst>
+          </p:cNvPr>
+          <p:cNvSpPr/>
+          <p:nvPr/>
+        </p:nvSpPr>
+        <p:spPr>
+          <a:xfrm>
+            <a:off x="7643442" y="2761827"/>
+            <a:ext cx="4032482" cy="2279729"/>
+          </a:xfrm>
+          <a:prstGeom prst="roundRect">
+            <a:avLst/>
+          </a:prstGeom>
+          <a:solidFill>
+            <a:schemeClr val="accent4">
+              <a:lumMod val="40000"/>
+              <a:lumOff val="60000"/>
+            </a:schemeClr>
+          </a:solidFill>
+          <a:ln>
+            <a:noFill/>
+          </a:ln>
+        </p:spPr>
+        <p:style>
+          <a:lnRef idx="2">
+            <a:schemeClr val="accent1">
+              <a:shade val="15000"/>
+            </a:schemeClr>
+          </a:lnRef>
+          <a:fillRef idx="1">
+            <a:schemeClr val="accent1"/>
+          </a:fillRef>
+          <a:effectRef idx="0">
+            <a:schemeClr val="accent1"/>
+          </a:effectRef>
+          <a:fontRef idx="minor">
+            <a:schemeClr val="lt1"/>
+          </a:fontRef>
+        </p:style>
+        <p:txBody>
+          <a:bodyPr rtlCol="0" anchor="ctr"/>
+          <a:lstStyle/>
+          <a:p>
+            <a:pPr algn="ctr"/>
+            <a:endParaRPr lang="en-US"/>
+          </a:p>
+        </p:txBody>
+      </p:sp>
+      <p:sp>
+        <p:nvSpPr>
+          <p:cNvPr id="8" name="TextBox 7">
+            <a:extLst>
+              <a:ext uri="{FF2B5EF4-FFF2-40B4-BE49-F238E27FC236}">
+                <a16:creationId xmlns:a16="http://schemas.microsoft.com/office/drawing/2014/main" id="{948BA897-9EEB-ECE3-39C3-1CD97B0783CC}"/>
+              </a:ext>
+            </a:extLst>
+          </p:cNvPr>
+          <p:cNvSpPr txBox="1"/>
+          <p:nvPr/>
+        </p:nvSpPr>
+        <p:spPr>
+          <a:xfrm>
+            <a:off x="8232575" y="3089189"/>
+            <a:ext cx="2830628" cy="1015663"/>
+          </a:xfrm>
+          <a:prstGeom prst="rect">
+            <a:avLst/>
+          </a:prstGeom>
+          <a:noFill/>
+        </p:spPr>
+        <p:txBody>
+          <a:bodyPr wrap="square" rtlCol="0">
+            <a:spAutoFit/>
+          </a:bodyPr>
+          <a:lstStyle/>
+          <a:p>
+            <a:pPr algn="ctr"/>
+            <a:r>
+              <a:rPr lang="en-US" sz="3000" dirty="0">
+                <a:solidFill>
+                  <a:srgbClr val="7030A0"/>
+                </a:solidFill>
+                <a:latin typeface="Times New Roman" panose="02020603050405020304" pitchFamily="18" charset="0"/>
+                <a:cs typeface="Times New Roman" panose="02020603050405020304" pitchFamily="18" charset="0"/>
+              </a:rPr>
+              <a:t>Inbound</a:t>
+            </a:r>
+            <a:br>
+              <a:rPr lang="en-US" sz="3000" dirty="0">
+                <a:solidFill>
+                  <a:srgbClr val="7030A0"/>
+                </a:solidFill>
+                <a:latin typeface="Times New Roman" panose="02020603050405020304" pitchFamily="18" charset="0"/>
+                <a:cs typeface="Times New Roman" panose="02020603050405020304" pitchFamily="18" charset="0"/>
+              </a:rPr>
+            </a:br>
+            <a:r>
+              <a:rPr lang="en-US" sz="3000" dirty="0">
+                <a:solidFill>
+                  <a:srgbClr val="7030A0"/>
+                </a:solidFill>
+                <a:latin typeface="Times New Roman" panose="02020603050405020304" pitchFamily="18" charset="0"/>
+                <a:cs typeface="Times New Roman" panose="02020603050405020304" pitchFamily="18" charset="0"/>
+              </a:rPr>
+              <a:t>Communication</a:t>
+            </a:r>
+          </a:p>
+        </p:txBody>
+      </p:sp>
+      <p:pic>
+        <p:nvPicPr>
+          <p:cNvPr id="11" name="Graphic 10" descr="Normal Distribution with solid fill">
+            <a:extLst>
+              <a:ext uri="{FF2B5EF4-FFF2-40B4-BE49-F238E27FC236}">
+                <a16:creationId xmlns:a16="http://schemas.microsoft.com/office/drawing/2014/main" id="{3011D6E4-E375-4389-751A-8CBB6AD1DFBE}"/>
+              </a:ext>
+            </a:extLst>
+          </p:cNvPr>
+          <p:cNvPicPr>
+            <a:picLocks noChangeAspect="1"/>
+          </p:cNvPicPr>
+          <p:nvPr/>
+        </p:nvPicPr>
+        <p:blipFill>
+          <a:blip>
+            <a:extLst>
+              <a:ext uri="{96DAC541-7B7A-43D3-8B79-37D633B846F1}">
+                <asvg:svgBlip xmlns:asvg="http://schemas.microsoft.com/office/drawing/2016/SVG/main" r:embed="rId4"/>
+              </a:ext>
+            </a:extLst>
+          </a:blip>
+          <a:stretch>
+            <a:fillRect/>
+          </a:stretch>
+        </p:blipFill>
+        <p:spPr>
+          <a:xfrm>
+            <a:off x="8232575" y="2206810"/>
+            <a:ext cx="914400" cy="914400"/>
+          </a:xfrm>
+          <a:prstGeom prst="rect">
+            <a:avLst/>
+          </a:prstGeom>
+        </p:spPr>
+      </p:pic>
+      <p:sp>
+        <p:nvSpPr>
+          <p:cNvPr id="13" name="TextBox 12">
+            <a:extLst>
+              <a:ext uri="{FF2B5EF4-FFF2-40B4-BE49-F238E27FC236}">
+                <a16:creationId xmlns:a16="http://schemas.microsoft.com/office/drawing/2014/main" id="{C1E3FA76-CA6A-C389-4AE7-2B33B1C3E432}"/>
+              </a:ext>
+            </a:extLst>
+          </p:cNvPr>
+          <p:cNvSpPr txBox="1"/>
+          <p:nvPr/>
+        </p:nvSpPr>
+        <p:spPr>
+          <a:xfrm>
+            <a:off x="9059956" y="2152485"/>
+            <a:ext cx="2846807" cy="1015663"/>
+          </a:xfrm>
+          <a:prstGeom prst="rect">
+            <a:avLst/>
+          </a:prstGeom>
+          <a:noFill/>
+        </p:spPr>
+        <p:txBody>
+          <a:bodyPr wrap="square" rtlCol="0">
+            <a:spAutoFit/>
+          </a:bodyPr>
+          <a:lstStyle/>
+          <a:p>
+            <a:r>
+              <a:rPr lang="en-US" sz="3000" dirty="0"/>
+              <a:t>Time as a random variable</a:t>
+            </a:r>
+          </a:p>
+        </p:txBody>
+      </p:sp>
+      <p:sp>
+        <p:nvSpPr>
+          <p:cNvPr id="9" name="TextBox 8">
+            <a:extLst>
+              <a:ext uri="{FF2B5EF4-FFF2-40B4-BE49-F238E27FC236}">
+                <a16:creationId xmlns:a16="http://schemas.microsoft.com/office/drawing/2014/main" id="{5D5568BD-6B32-8B0A-63B4-D590ED562165}"/>
+              </a:ext>
+            </a:extLst>
+          </p:cNvPr>
+          <p:cNvSpPr txBox="1"/>
+          <p:nvPr/>
+        </p:nvSpPr>
+        <p:spPr>
+          <a:xfrm>
+            <a:off x="2121325" y="4564534"/>
+            <a:ext cx="3872835" cy="461665"/>
+          </a:xfrm>
+          <a:prstGeom prst="rect">
+            <a:avLst/>
+          </a:prstGeom>
+          <a:noFill/>
+        </p:spPr>
+        <p:txBody>
+          <a:bodyPr wrap="square" rtlCol="0">
+            <a:spAutoFit/>
+          </a:bodyPr>
+          <a:lstStyle/>
+          <a:p>
+            <a:pPr algn="ctr"/>
+            <a:r>
+              <a:rPr lang="en-US" sz="2400" dirty="0">
+                <a:latin typeface="Times New Roman" panose="02020603050405020304" pitchFamily="18" charset="0"/>
+                <a:cs typeface="Times New Roman" panose="02020603050405020304" pitchFamily="18" charset="0"/>
+              </a:rPr>
+              <a:t>ACM SIGCOMM’25</a:t>
+            </a:r>
+          </a:p>
+        </p:txBody>
+      </p:sp>
+      <p:sp>
+        <p:nvSpPr>
+          <p:cNvPr id="14" name="TextBox 13">
+            <a:extLst>
+              <a:ext uri="{FF2B5EF4-FFF2-40B4-BE49-F238E27FC236}">
+                <a16:creationId xmlns:a16="http://schemas.microsoft.com/office/drawing/2014/main" id="{483786E7-FAD5-1A6D-984D-A0C6475A77C9}"/>
+              </a:ext>
+            </a:extLst>
+          </p:cNvPr>
+          <p:cNvSpPr txBox="1"/>
+          <p:nvPr/>
+        </p:nvSpPr>
+        <p:spPr>
+          <a:xfrm>
+            <a:off x="7643442" y="4111538"/>
+            <a:ext cx="3872835" cy="461665"/>
+          </a:xfrm>
+          <a:prstGeom prst="rect">
+            <a:avLst/>
+          </a:prstGeom>
+          <a:noFill/>
+        </p:spPr>
+        <p:txBody>
+          <a:bodyPr wrap="square" rtlCol="0">
+            <a:spAutoFit/>
+          </a:bodyPr>
+          <a:lstStyle/>
+          <a:p>
+            <a:pPr algn="ctr"/>
+            <a:r>
+              <a:rPr lang="en-US" sz="2400" dirty="0">
+                <a:latin typeface="Times New Roman" panose="02020603050405020304" pitchFamily="18" charset="0"/>
+                <a:cs typeface="Times New Roman" panose="02020603050405020304" pitchFamily="18" charset="0"/>
+              </a:rPr>
+              <a:t>ACM HotNets’25</a:t>
+            </a:r>
+          </a:p>
+        </p:txBody>
+      </p:sp>
+      <p:sp>
+        <p:nvSpPr>
+          <p:cNvPr id="15" name="TextBox 14">
+            <a:extLst>
+              <a:ext uri="{FF2B5EF4-FFF2-40B4-BE49-F238E27FC236}">
+                <a16:creationId xmlns:a16="http://schemas.microsoft.com/office/drawing/2014/main" id="{5ADA7C2F-E097-A499-6683-94AB6092CCE0}"/>
+              </a:ext>
+            </a:extLst>
+          </p:cNvPr>
+          <p:cNvSpPr txBox="1"/>
+          <p:nvPr/>
+        </p:nvSpPr>
+        <p:spPr>
+          <a:xfrm>
+            <a:off x="7643442" y="4507299"/>
+            <a:ext cx="3872835" cy="461665"/>
+          </a:xfrm>
+          <a:prstGeom prst="rect">
+            <a:avLst/>
+          </a:prstGeom>
+          <a:noFill/>
+        </p:spPr>
+        <p:txBody>
+          <a:bodyPr wrap="square" rtlCol="0">
+            <a:spAutoFit/>
+          </a:bodyPr>
+          <a:lstStyle/>
+          <a:p>
+            <a:pPr algn="ctr"/>
+            <a:r>
+              <a:rPr lang="en-US" sz="2400" dirty="0">
+                <a:latin typeface="Times New Roman" panose="02020603050405020304" pitchFamily="18" charset="0"/>
+                <a:cs typeface="Times New Roman" panose="02020603050405020304" pitchFamily="18" charset="0"/>
+              </a:rPr>
+              <a:t>Submitted to SIGCOMM’26</a:t>
+            </a:r>
+          </a:p>
+        </p:txBody>
+      </p:sp>
+      <p:sp>
+        <p:nvSpPr>
+          <p:cNvPr id="3" name="TextBox 2">
+            <a:extLst>
+              <a:ext uri="{FF2B5EF4-FFF2-40B4-BE49-F238E27FC236}">
+                <a16:creationId xmlns:a16="http://schemas.microsoft.com/office/drawing/2014/main" id="{F1DD9C98-50C6-813B-3239-9C993D428882}"/>
+              </a:ext>
+            </a:extLst>
+          </p:cNvPr>
+          <p:cNvSpPr txBox="1"/>
+          <p:nvPr/>
+        </p:nvSpPr>
+        <p:spPr>
+          <a:xfrm>
+            <a:off x="2121324" y="5050912"/>
+            <a:ext cx="3872835" cy="1200329"/>
+          </a:xfrm>
+          <a:prstGeom prst="rect">
+            <a:avLst/>
+          </a:prstGeom>
+          <a:noFill/>
+        </p:spPr>
+        <p:txBody>
+          <a:bodyPr wrap="square" rtlCol="0">
+            <a:spAutoFit/>
+          </a:bodyPr>
+          <a:lstStyle/>
+          <a:p>
+            <a:pPr algn="ctr"/>
+            <a:r>
+              <a:rPr lang="en-US" sz="2400" dirty="0">
+                <a:latin typeface="Times New Roman" panose="02020603050405020304" pitchFamily="18" charset="0"/>
+                <a:cs typeface="Times New Roman" panose="02020603050405020304" pitchFamily="18" charset="0"/>
+              </a:rPr>
+              <a:t>Cited by researchers from Jane Street, Google, Microsoft Research</a:t>
+            </a:r>
+          </a:p>
+        </p:txBody>
+      </p:sp>
+      <p:sp>
+        <p:nvSpPr>
+          <p:cNvPr id="16" name="TextBox 15">
+            <a:extLst>
+              <a:ext uri="{FF2B5EF4-FFF2-40B4-BE49-F238E27FC236}">
+                <a16:creationId xmlns:a16="http://schemas.microsoft.com/office/drawing/2014/main" id="{3C1004E0-49B5-5D32-B9D0-E6CE1AC7916D}"/>
+              </a:ext>
+            </a:extLst>
+          </p:cNvPr>
+          <p:cNvSpPr txBox="1"/>
+          <p:nvPr/>
+        </p:nvSpPr>
+        <p:spPr>
+          <a:xfrm>
+            <a:off x="7643442" y="5095180"/>
+            <a:ext cx="4103674" cy="1200329"/>
+          </a:xfrm>
+          <a:prstGeom prst="rect">
+            <a:avLst/>
+          </a:prstGeom>
+          <a:noFill/>
+        </p:spPr>
+        <p:txBody>
+          <a:bodyPr wrap="square" rtlCol="0">
+            <a:spAutoFit/>
+          </a:bodyPr>
+          <a:lstStyle/>
+          <a:p>
+            <a:pPr algn="ctr"/>
+            <a:r>
+              <a:rPr lang="en-US" sz="2400" dirty="0">
+                <a:latin typeface="Times New Roman" panose="02020603050405020304" pitchFamily="18" charset="0"/>
+                <a:cs typeface="Times New Roman" panose="02020603050405020304" pitchFamily="18" charset="0"/>
+              </a:rPr>
+              <a:t>Considerable interest from Jane Street, working with them to build several systems atop</a:t>
+            </a:r>
+          </a:p>
+        </p:txBody>
+      </p:sp>
+      <p:sp>
+        <p:nvSpPr>
+          <p:cNvPr id="19" name="TextBox 18">
+            <a:extLst>
+              <a:ext uri="{FF2B5EF4-FFF2-40B4-BE49-F238E27FC236}">
+                <a16:creationId xmlns:a16="http://schemas.microsoft.com/office/drawing/2014/main" id="{241566FE-8602-2728-E06A-15A91CC6D3C9}"/>
+              </a:ext>
+            </a:extLst>
+          </p:cNvPr>
+          <p:cNvSpPr txBox="1"/>
+          <p:nvPr/>
+        </p:nvSpPr>
+        <p:spPr>
+          <a:xfrm>
+            <a:off x="1907791" y="1318065"/>
+            <a:ext cx="3872835" cy="923330"/>
+          </a:xfrm>
+          <a:prstGeom prst="rect">
+            <a:avLst/>
+          </a:prstGeom>
+          <a:noFill/>
+        </p:spPr>
+        <p:txBody>
+          <a:bodyPr wrap="square" rtlCol="0">
+            <a:spAutoFit/>
+          </a:bodyPr>
+          <a:lstStyle/>
+          <a:p>
+            <a:pPr algn="ctr"/>
+            <a:r>
+              <a:rPr lang="en-US" sz="5400" dirty="0">
+                <a:solidFill>
+                  <a:srgbClr val="FF0000"/>
+                </a:solidFill>
+                <a:latin typeface="Times New Roman" panose="02020603050405020304" pitchFamily="18" charset="0"/>
+                <a:cs typeface="Times New Roman" panose="02020603050405020304" pitchFamily="18" charset="0"/>
+              </a:rPr>
+              <a:t>Onyx</a:t>
+            </a:r>
+          </a:p>
+        </p:txBody>
+      </p:sp>
+      <p:sp>
+        <p:nvSpPr>
+          <p:cNvPr id="20" name="TextBox 19">
+            <a:extLst>
+              <a:ext uri="{FF2B5EF4-FFF2-40B4-BE49-F238E27FC236}">
+                <a16:creationId xmlns:a16="http://schemas.microsoft.com/office/drawing/2014/main" id="{19CAE7B6-A427-7062-A40F-37C2326B4796}"/>
+              </a:ext>
+            </a:extLst>
+          </p:cNvPr>
+          <p:cNvSpPr txBox="1"/>
+          <p:nvPr/>
+        </p:nvSpPr>
+        <p:spPr>
+          <a:xfrm>
+            <a:off x="7643442" y="1318065"/>
+            <a:ext cx="3872835" cy="923330"/>
+          </a:xfrm>
+          <a:prstGeom prst="rect">
+            <a:avLst/>
+          </a:prstGeom>
+          <a:noFill/>
+        </p:spPr>
+        <p:txBody>
+          <a:bodyPr wrap="square" rtlCol="0">
+            <a:spAutoFit/>
+          </a:bodyPr>
+          <a:lstStyle/>
+          <a:p>
+            <a:pPr algn="ctr"/>
+            <a:r>
+              <a:rPr lang="en-US" sz="5400" dirty="0">
+                <a:solidFill>
+                  <a:srgbClr val="FF0000"/>
+                </a:solidFill>
+                <a:latin typeface="Times New Roman" panose="02020603050405020304" pitchFamily="18" charset="0"/>
+                <a:cs typeface="Times New Roman" panose="02020603050405020304" pitchFamily="18" charset="0"/>
+              </a:rPr>
+              <a:t>Tommy</a:t>
+            </a:r>
+          </a:p>
+        </p:txBody>
+      </p:sp>
+    </p:spTree>
+    <p:extLst>
+      <p:ext uri="{BB962C8B-B14F-4D97-AF65-F5344CB8AC3E}">
+        <p14:creationId xmlns:p14="http://schemas.microsoft.com/office/powerpoint/2010/main" val="3396139960"/>
       </p:ext>
     </p:extLst>
   </p:cSld>

--- a/thesis-latency-fairness.pptx
+++ b/thesis-latency-fairness.pptx
@@ -5,7 +5,7 @@
     <p:sldMasterId id="2147483648" r:id="rId1"/>
   </p:sldMasterIdLst>
   <p:notesMasterIdLst>
-    <p:notesMasterId r:id="rId20"/>
+    <p:notesMasterId r:id="rId23"/>
   </p:notesMasterIdLst>
   <p:sldIdLst>
     <p:sldId id="256" r:id="rId2"/>
@@ -17,15 +17,18 @@
     <p:sldId id="264" r:id="rId8"/>
     <p:sldId id="265" r:id="rId9"/>
     <p:sldId id="266" r:id="rId10"/>
-    <p:sldId id="267" r:id="rId11"/>
-    <p:sldId id="268" r:id="rId12"/>
-    <p:sldId id="269" r:id="rId13"/>
-    <p:sldId id="270" r:id="rId14"/>
-    <p:sldId id="271" r:id="rId15"/>
-    <p:sldId id="272" r:id="rId16"/>
-    <p:sldId id="273" r:id="rId17"/>
-    <p:sldId id="274" r:id="rId18"/>
-    <p:sldId id="276" r:id="rId19"/>
+    <p:sldId id="277" r:id="rId11"/>
+    <p:sldId id="267" r:id="rId12"/>
+    <p:sldId id="268" r:id="rId13"/>
+    <p:sldId id="278" r:id="rId14"/>
+    <p:sldId id="279" r:id="rId15"/>
+    <p:sldId id="269" r:id="rId16"/>
+    <p:sldId id="270" r:id="rId17"/>
+    <p:sldId id="271" r:id="rId18"/>
+    <p:sldId id="272" r:id="rId19"/>
+    <p:sldId id="273" r:id="rId20"/>
+    <p:sldId id="274" r:id="rId21"/>
+    <p:sldId id="276" r:id="rId22"/>
   </p:sldIdLst>
   <p:sldSz cx="12192000" cy="6858000"/>
   <p:notesSz cx="6858000" cy="9144000"/>
@@ -124,6 +127,11 @@
       </a:defRPr>
     </a:lvl9pPr>
   </p:defaultTextStyle>
+  <p:extLst>
+    <p:ext uri="{EFAFB233-063F-42B5-8137-9DF3F51BA10A}">
+      <p15:sldGuideLst xmlns:p15="http://schemas.microsoft.com/office/powerpoint/2012/main"/>
+    </p:ext>
+  </p:extLst>
 </p:presentation>
 </file>
 
@@ -571,6 +579,330 @@
         <p:cNvPr id="1" name="">
           <a:extLst>
             <a:ext uri="{FF2B5EF4-FFF2-40B4-BE49-F238E27FC236}">
+              <a16:creationId xmlns:a16="http://schemas.microsoft.com/office/drawing/2014/main" id="{2C486912-8D16-E435-5C22-A90E748FF1BA}"/>
+            </a:ext>
+          </a:extLst>
+        </p:cNvPr>
+        <p:cNvGrpSpPr/>
+        <p:nvPr/>
+      </p:nvGrpSpPr>
+      <p:grpSpPr>
+        <a:xfrm>
+          <a:off x="0" y="0"/>
+          <a:ext cx="0" cy="0"/>
+          <a:chOff x="0" y="0"/>
+          <a:chExt cx="0" cy="0"/>
+        </a:xfrm>
+      </p:grpSpPr>
+      <p:sp>
+        <p:nvSpPr>
+          <p:cNvPr id="2" name="Slide Image Placeholder 1">
+            <a:extLst>
+              <a:ext uri="{FF2B5EF4-FFF2-40B4-BE49-F238E27FC236}">
+                <a16:creationId xmlns:a16="http://schemas.microsoft.com/office/drawing/2014/main" id="{68DD73EF-5AEE-8EC9-A6E8-0C4466DBFADB}"/>
+              </a:ext>
+            </a:extLst>
+          </p:cNvPr>
+          <p:cNvSpPr>
+            <a:spLocks noGrp="1" noRot="1" noChangeAspect="1"/>
+          </p:cNvSpPr>
+          <p:nvPr>
+            <p:ph type="sldImg"/>
+          </p:nvPr>
+        </p:nvSpPr>
+        <p:spPr/>
+      </p:sp>
+      <p:sp>
+        <p:nvSpPr>
+          <p:cNvPr id="3" name="Notes Placeholder 2">
+            <a:extLst>
+              <a:ext uri="{FF2B5EF4-FFF2-40B4-BE49-F238E27FC236}">
+                <a16:creationId xmlns:a16="http://schemas.microsoft.com/office/drawing/2014/main" id="{CE2519F4-B304-570C-296F-C835E1C2036E}"/>
+              </a:ext>
+            </a:extLst>
+          </p:cNvPr>
+          <p:cNvSpPr>
+            <a:spLocks noGrp="1"/>
+          </p:cNvSpPr>
+          <p:nvPr>
+            <p:ph type="body" idx="1"/>
+          </p:nvPr>
+        </p:nvSpPr>
+        <p:spPr/>
+        <p:txBody>
+          <a:bodyPr/>
+          <a:lstStyle/>
+          <a:p>
+            <a:endParaRPr lang="en-US" dirty="0"/>
+          </a:p>
+        </p:txBody>
+      </p:sp>
+      <p:sp>
+        <p:nvSpPr>
+          <p:cNvPr id="4" name="Slide Number Placeholder 3">
+            <a:extLst>
+              <a:ext uri="{FF2B5EF4-FFF2-40B4-BE49-F238E27FC236}">
+                <a16:creationId xmlns:a16="http://schemas.microsoft.com/office/drawing/2014/main" id="{457CC44C-E247-7DEB-CCC9-15D1BC0DBB41}"/>
+              </a:ext>
+            </a:extLst>
+          </p:cNvPr>
+          <p:cNvSpPr>
+            <a:spLocks noGrp="1"/>
+          </p:cNvSpPr>
+          <p:nvPr>
+            <p:ph type="sldNum" sz="quarter" idx="5"/>
+          </p:nvPr>
+        </p:nvSpPr>
+        <p:spPr/>
+        <p:txBody>
+          <a:bodyPr/>
+          <a:lstStyle/>
+          <a:p>
+            <a:fld id="{5AD2936D-68DF-C34D-84E6-1FDAB4C19BCF}" type="slidenum">
+              <a:rPr lang="en-US" smtClean="0"/>
+              <a:t>16</a:t>
+            </a:fld>
+            <a:endParaRPr lang="en-US"/>
+          </a:p>
+        </p:txBody>
+      </p:sp>
+    </p:spTree>
+    <p:extLst>
+      <p:ext uri="{BB962C8B-B14F-4D97-AF65-F5344CB8AC3E}">
+        <p14:creationId xmlns:p14="http://schemas.microsoft.com/office/powerpoint/2010/main" val="903150929"/>
+      </p:ext>
+    </p:extLst>
+  </p:cSld>
+  <p:clrMapOvr>
+    <a:masterClrMapping/>
+  </p:clrMapOvr>
+</p:notes>
+</file>
+
+<file path=ppt/notesSlides/notesSlide11.xml><?xml version="1.0" encoding="utf-8"?>
+<p:notes xmlns:a="http://schemas.openxmlformats.org/drawingml/2006/main" xmlns:r="http://schemas.openxmlformats.org/officeDocument/2006/relationships" xmlns:p="http://schemas.openxmlformats.org/presentationml/2006/main">
+  <p:cSld>
+    <p:spTree>
+      <p:nvGrpSpPr>
+        <p:cNvPr id="1" name="">
+          <a:extLst>
+            <a:ext uri="{FF2B5EF4-FFF2-40B4-BE49-F238E27FC236}">
+              <a16:creationId xmlns:a16="http://schemas.microsoft.com/office/drawing/2014/main" id="{A05EB3D0-1E06-2B88-0153-4E2E25297A78}"/>
+            </a:ext>
+          </a:extLst>
+        </p:cNvPr>
+        <p:cNvGrpSpPr/>
+        <p:nvPr/>
+      </p:nvGrpSpPr>
+      <p:grpSpPr>
+        <a:xfrm>
+          <a:off x="0" y="0"/>
+          <a:ext cx="0" cy="0"/>
+          <a:chOff x="0" y="0"/>
+          <a:chExt cx="0" cy="0"/>
+        </a:xfrm>
+      </p:grpSpPr>
+      <p:sp>
+        <p:nvSpPr>
+          <p:cNvPr id="2" name="Slide Image Placeholder 1">
+            <a:extLst>
+              <a:ext uri="{FF2B5EF4-FFF2-40B4-BE49-F238E27FC236}">
+                <a16:creationId xmlns:a16="http://schemas.microsoft.com/office/drawing/2014/main" id="{6CE9168E-EC7C-4EFA-A948-1BD168CCBB28}"/>
+              </a:ext>
+            </a:extLst>
+          </p:cNvPr>
+          <p:cNvSpPr>
+            <a:spLocks noGrp="1" noRot="1" noChangeAspect="1"/>
+          </p:cNvSpPr>
+          <p:nvPr>
+            <p:ph type="sldImg"/>
+          </p:nvPr>
+        </p:nvSpPr>
+        <p:spPr/>
+      </p:sp>
+      <p:sp>
+        <p:nvSpPr>
+          <p:cNvPr id="3" name="Notes Placeholder 2">
+            <a:extLst>
+              <a:ext uri="{FF2B5EF4-FFF2-40B4-BE49-F238E27FC236}">
+                <a16:creationId xmlns:a16="http://schemas.microsoft.com/office/drawing/2014/main" id="{05747B9B-C5F9-E2C8-787A-B00209079B8C}"/>
+              </a:ext>
+            </a:extLst>
+          </p:cNvPr>
+          <p:cNvSpPr>
+            <a:spLocks noGrp="1"/>
+          </p:cNvSpPr>
+          <p:nvPr>
+            <p:ph type="body" idx="1"/>
+          </p:nvPr>
+        </p:nvSpPr>
+        <p:spPr/>
+        <p:txBody>
+          <a:bodyPr/>
+          <a:lstStyle/>
+          <a:p>
+            <a:endParaRPr lang="en-US" dirty="0"/>
+          </a:p>
+        </p:txBody>
+      </p:sp>
+      <p:sp>
+        <p:nvSpPr>
+          <p:cNvPr id="4" name="Slide Number Placeholder 3">
+            <a:extLst>
+              <a:ext uri="{FF2B5EF4-FFF2-40B4-BE49-F238E27FC236}">
+                <a16:creationId xmlns:a16="http://schemas.microsoft.com/office/drawing/2014/main" id="{07068103-71FA-E1EA-1C35-91C986073B35}"/>
+              </a:ext>
+            </a:extLst>
+          </p:cNvPr>
+          <p:cNvSpPr>
+            <a:spLocks noGrp="1"/>
+          </p:cNvSpPr>
+          <p:nvPr>
+            <p:ph type="sldNum" sz="quarter" idx="5"/>
+          </p:nvPr>
+        </p:nvSpPr>
+        <p:spPr/>
+        <p:txBody>
+          <a:bodyPr/>
+          <a:lstStyle/>
+          <a:p>
+            <a:fld id="{5AD2936D-68DF-C34D-84E6-1FDAB4C19BCF}" type="slidenum">
+              <a:rPr lang="en-US" smtClean="0"/>
+              <a:t>17</a:t>
+            </a:fld>
+            <a:endParaRPr lang="en-US"/>
+          </a:p>
+        </p:txBody>
+      </p:sp>
+    </p:spTree>
+    <p:extLst>
+      <p:ext uri="{BB962C8B-B14F-4D97-AF65-F5344CB8AC3E}">
+        <p14:creationId xmlns:p14="http://schemas.microsoft.com/office/powerpoint/2010/main" val="2458115221"/>
+      </p:ext>
+    </p:extLst>
+  </p:cSld>
+  <p:clrMapOvr>
+    <a:masterClrMapping/>
+  </p:clrMapOvr>
+</p:notes>
+</file>
+
+<file path=ppt/notesSlides/notesSlide12.xml><?xml version="1.0" encoding="utf-8"?>
+<p:notes xmlns:a="http://schemas.openxmlformats.org/drawingml/2006/main" xmlns:r="http://schemas.openxmlformats.org/officeDocument/2006/relationships" xmlns:p="http://schemas.openxmlformats.org/presentationml/2006/main">
+  <p:cSld>
+    <p:spTree>
+      <p:nvGrpSpPr>
+        <p:cNvPr id="1" name="">
+          <a:extLst>
+            <a:ext uri="{FF2B5EF4-FFF2-40B4-BE49-F238E27FC236}">
+              <a16:creationId xmlns:a16="http://schemas.microsoft.com/office/drawing/2014/main" id="{FC005D0F-F53A-8FBF-64D9-A67F28361864}"/>
+            </a:ext>
+          </a:extLst>
+        </p:cNvPr>
+        <p:cNvGrpSpPr/>
+        <p:nvPr/>
+      </p:nvGrpSpPr>
+      <p:grpSpPr>
+        <a:xfrm>
+          <a:off x="0" y="0"/>
+          <a:ext cx="0" cy="0"/>
+          <a:chOff x="0" y="0"/>
+          <a:chExt cx="0" cy="0"/>
+        </a:xfrm>
+      </p:grpSpPr>
+      <p:sp>
+        <p:nvSpPr>
+          <p:cNvPr id="2" name="Slide Image Placeholder 1">
+            <a:extLst>
+              <a:ext uri="{FF2B5EF4-FFF2-40B4-BE49-F238E27FC236}">
+                <a16:creationId xmlns:a16="http://schemas.microsoft.com/office/drawing/2014/main" id="{4F839AA8-66B5-E374-EBF1-749B2DECA9FB}"/>
+              </a:ext>
+            </a:extLst>
+          </p:cNvPr>
+          <p:cNvSpPr>
+            <a:spLocks noGrp="1" noRot="1" noChangeAspect="1"/>
+          </p:cNvSpPr>
+          <p:nvPr>
+            <p:ph type="sldImg"/>
+          </p:nvPr>
+        </p:nvSpPr>
+        <p:spPr/>
+      </p:sp>
+      <p:sp>
+        <p:nvSpPr>
+          <p:cNvPr id="3" name="Notes Placeholder 2">
+            <a:extLst>
+              <a:ext uri="{FF2B5EF4-FFF2-40B4-BE49-F238E27FC236}">
+                <a16:creationId xmlns:a16="http://schemas.microsoft.com/office/drawing/2014/main" id="{0F470EBD-83E0-7813-FE78-35AED5F195D8}"/>
+              </a:ext>
+            </a:extLst>
+          </p:cNvPr>
+          <p:cNvSpPr>
+            <a:spLocks noGrp="1"/>
+          </p:cNvSpPr>
+          <p:nvPr>
+            <p:ph type="body" idx="1"/>
+          </p:nvPr>
+        </p:nvSpPr>
+        <p:spPr/>
+        <p:txBody>
+          <a:bodyPr/>
+          <a:lstStyle/>
+          <a:p>
+            <a:endParaRPr lang="en-US" dirty="0"/>
+          </a:p>
+        </p:txBody>
+      </p:sp>
+      <p:sp>
+        <p:nvSpPr>
+          <p:cNvPr id="4" name="Slide Number Placeholder 3">
+            <a:extLst>
+              <a:ext uri="{FF2B5EF4-FFF2-40B4-BE49-F238E27FC236}">
+                <a16:creationId xmlns:a16="http://schemas.microsoft.com/office/drawing/2014/main" id="{AB85C3C6-ACAD-032E-F56A-3AE71677C988}"/>
+              </a:ext>
+            </a:extLst>
+          </p:cNvPr>
+          <p:cNvSpPr>
+            <a:spLocks noGrp="1"/>
+          </p:cNvSpPr>
+          <p:nvPr>
+            <p:ph type="sldNum" sz="quarter" idx="5"/>
+          </p:nvPr>
+        </p:nvSpPr>
+        <p:spPr/>
+        <p:txBody>
+          <a:bodyPr/>
+          <a:lstStyle/>
+          <a:p>
+            <a:fld id="{5AD2936D-68DF-C34D-84E6-1FDAB4C19BCF}" type="slidenum">
+              <a:rPr lang="en-US" smtClean="0"/>
+              <a:t>18</a:t>
+            </a:fld>
+            <a:endParaRPr lang="en-US"/>
+          </a:p>
+        </p:txBody>
+      </p:sp>
+    </p:spTree>
+    <p:extLst>
+      <p:ext uri="{BB962C8B-B14F-4D97-AF65-F5344CB8AC3E}">
+        <p14:creationId xmlns:p14="http://schemas.microsoft.com/office/powerpoint/2010/main" val="171951772"/>
+      </p:ext>
+    </p:extLst>
+  </p:cSld>
+  <p:clrMapOvr>
+    <a:masterClrMapping/>
+  </p:clrMapOvr>
+</p:notes>
+</file>
+
+<file path=ppt/notesSlides/notesSlide13.xml><?xml version="1.0" encoding="utf-8"?>
+<p:notes xmlns:a="http://schemas.openxmlformats.org/drawingml/2006/main" xmlns:r="http://schemas.openxmlformats.org/officeDocument/2006/relationships" xmlns:p="http://schemas.openxmlformats.org/presentationml/2006/main">
+  <p:cSld>
+    <p:spTree>
+      <p:nvGrpSpPr>
+        <p:cNvPr id="1" name="">
+          <a:extLst>
+            <a:ext uri="{FF2B5EF4-FFF2-40B4-BE49-F238E27FC236}">
               <a16:creationId xmlns:a16="http://schemas.microsoft.com/office/drawing/2014/main" id="{97D0D004-F083-99D8-B51B-26F7BB562959}"/>
             </a:ext>
           </a:extLst>
@@ -652,7 +984,7 @@
           <a:p>
             <a:fld id="{5AD2936D-68DF-C34D-84E6-1FDAB4C19BCF}" type="slidenum">
               <a:rPr lang="en-US" smtClean="0"/>
-              <a:t>16</a:t>
+              <a:t>19</a:t>
             </a:fld>
             <a:endParaRPr lang="en-US"/>
           </a:p>
@@ -671,7 +1003,7 @@
 </p:notes>
 </file>
 
-<file path=ppt/notesSlides/notesSlide11.xml><?xml version="1.0" encoding="utf-8"?>
+<file path=ppt/notesSlides/notesSlide14.xml><?xml version="1.0" encoding="utf-8"?>
 <p:notes xmlns:a="http://schemas.openxmlformats.org/drawingml/2006/main" xmlns:r="http://schemas.openxmlformats.org/officeDocument/2006/relationships" xmlns:p="http://schemas.openxmlformats.org/presentationml/2006/main">
   <p:cSld>
     <p:spTree>
@@ -760,7 +1092,7 @@
           <a:p>
             <a:fld id="{5AD2936D-68DF-C34D-84E6-1FDAB4C19BCF}" type="slidenum">
               <a:rPr lang="en-US" smtClean="0"/>
-              <a:t>17</a:t>
+              <a:t>20</a:t>
             </a:fld>
             <a:endParaRPr lang="en-US"/>
           </a:p>
@@ -779,7 +1111,7 @@
 </p:notes>
 </file>
 
-<file path=ppt/notesSlides/notesSlide12.xml><?xml version="1.0" encoding="utf-8"?>
+<file path=ppt/notesSlides/notesSlide15.xml><?xml version="1.0" encoding="utf-8"?>
 <p:notes xmlns:a="http://schemas.openxmlformats.org/drawingml/2006/main" xmlns:r="http://schemas.openxmlformats.org/officeDocument/2006/relationships" xmlns:p="http://schemas.openxmlformats.org/presentationml/2006/main">
   <p:cSld>
     <p:spTree>
@@ -868,7 +1200,7 @@
           <a:p>
             <a:fld id="{5AD2936D-68DF-C34D-84E6-1FDAB4C19BCF}" type="slidenum">
               <a:rPr lang="en-US" smtClean="0"/>
-              <a:t>18</a:t>
+              <a:t>21</a:t>
             </a:fld>
             <a:endParaRPr lang="en-US"/>
           </a:p>
@@ -1114,6 +1446,114 @@
         <p:cNvPr id="1" name="">
           <a:extLst>
             <a:ext uri="{FF2B5EF4-FFF2-40B4-BE49-F238E27FC236}">
+              <a16:creationId xmlns:a16="http://schemas.microsoft.com/office/drawing/2014/main" id="{BD2389F7-A5F1-AF50-0FA1-105CD333EB2A}"/>
+            </a:ext>
+          </a:extLst>
+        </p:cNvPr>
+        <p:cNvGrpSpPr/>
+        <p:nvPr/>
+      </p:nvGrpSpPr>
+      <p:grpSpPr>
+        <a:xfrm>
+          <a:off x="0" y="0"/>
+          <a:ext cx="0" cy="0"/>
+          <a:chOff x="0" y="0"/>
+          <a:chExt cx="0" cy="0"/>
+        </a:xfrm>
+      </p:grpSpPr>
+      <p:sp>
+        <p:nvSpPr>
+          <p:cNvPr id="2" name="Slide Image Placeholder 1">
+            <a:extLst>
+              <a:ext uri="{FF2B5EF4-FFF2-40B4-BE49-F238E27FC236}">
+                <a16:creationId xmlns:a16="http://schemas.microsoft.com/office/drawing/2014/main" id="{B6A1DA64-C8D1-D27D-D5AD-A3D98887D864}"/>
+              </a:ext>
+            </a:extLst>
+          </p:cNvPr>
+          <p:cNvSpPr>
+            <a:spLocks noGrp="1" noRot="1" noChangeAspect="1"/>
+          </p:cNvSpPr>
+          <p:nvPr>
+            <p:ph type="sldImg"/>
+          </p:nvPr>
+        </p:nvSpPr>
+        <p:spPr/>
+      </p:sp>
+      <p:sp>
+        <p:nvSpPr>
+          <p:cNvPr id="3" name="Notes Placeholder 2">
+            <a:extLst>
+              <a:ext uri="{FF2B5EF4-FFF2-40B4-BE49-F238E27FC236}">
+                <a16:creationId xmlns:a16="http://schemas.microsoft.com/office/drawing/2014/main" id="{D0948389-62D1-C105-6B56-F55383D3EE22}"/>
+              </a:ext>
+            </a:extLst>
+          </p:cNvPr>
+          <p:cNvSpPr>
+            <a:spLocks noGrp="1"/>
+          </p:cNvSpPr>
+          <p:nvPr>
+            <p:ph type="body" idx="1"/>
+          </p:nvPr>
+        </p:nvSpPr>
+        <p:spPr/>
+        <p:txBody>
+          <a:bodyPr/>
+          <a:lstStyle/>
+          <a:p>
+            <a:endParaRPr lang="en-US" dirty="0"/>
+          </a:p>
+        </p:txBody>
+      </p:sp>
+      <p:sp>
+        <p:nvSpPr>
+          <p:cNvPr id="4" name="Slide Number Placeholder 3">
+            <a:extLst>
+              <a:ext uri="{FF2B5EF4-FFF2-40B4-BE49-F238E27FC236}">
+                <a16:creationId xmlns:a16="http://schemas.microsoft.com/office/drawing/2014/main" id="{AC6BCC38-694B-6B20-BD21-9386BBD0D7E2}"/>
+              </a:ext>
+            </a:extLst>
+          </p:cNvPr>
+          <p:cNvSpPr>
+            <a:spLocks noGrp="1"/>
+          </p:cNvSpPr>
+          <p:nvPr>
+            <p:ph type="sldNum" sz="quarter" idx="5"/>
+          </p:nvPr>
+        </p:nvSpPr>
+        <p:spPr/>
+        <p:txBody>
+          <a:bodyPr/>
+          <a:lstStyle/>
+          <a:p>
+            <a:fld id="{5AD2936D-68DF-C34D-84E6-1FDAB4C19BCF}" type="slidenum">
+              <a:rPr lang="en-US" smtClean="0"/>
+              <a:t>10</a:t>
+            </a:fld>
+            <a:endParaRPr lang="en-US"/>
+          </a:p>
+        </p:txBody>
+      </p:sp>
+    </p:spTree>
+    <p:extLst>
+      <p:ext uri="{BB962C8B-B14F-4D97-AF65-F5344CB8AC3E}">
+        <p14:creationId xmlns:p14="http://schemas.microsoft.com/office/powerpoint/2010/main" val="908645322"/>
+      </p:ext>
+    </p:extLst>
+  </p:cSld>
+  <p:clrMapOvr>
+    <a:masterClrMapping/>
+  </p:clrMapOvr>
+</p:notes>
+</file>
+
+<file path=ppt/notesSlides/notesSlide5.xml><?xml version="1.0" encoding="utf-8"?>
+<p:notes xmlns:a="http://schemas.openxmlformats.org/drawingml/2006/main" xmlns:r="http://schemas.openxmlformats.org/officeDocument/2006/relationships" xmlns:p="http://schemas.openxmlformats.org/presentationml/2006/main">
+  <p:cSld>
+    <p:spTree>
+      <p:nvGrpSpPr>
+        <p:cNvPr id="1" name="">
+          <a:extLst>
+            <a:ext uri="{FF2B5EF4-FFF2-40B4-BE49-F238E27FC236}">
               <a16:creationId xmlns:a16="http://schemas.microsoft.com/office/drawing/2014/main" id="{76D600EC-9AA9-ED24-DA66-4B56DBFC5E69}"/>
             </a:ext>
           </a:extLst>
@@ -1195,7 +1635,7 @@
           <a:p>
             <a:fld id="{5AD2936D-68DF-C34D-84E6-1FDAB4C19BCF}" type="slidenum">
               <a:rPr lang="en-US" smtClean="0"/>
-              <a:t>10</a:t>
+              <a:t>11</a:t>
             </a:fld>
             <a:endParaRPr lang="en-US"/>
           </a:p>
@@ -1214,7 +1654,7 @@
 </p:notes>
 </file>
 
-<file path=ppt/notesSlides/notesSlide5.xml><?xml version="1.0" encoding="utf-8"?>
+<file path=ppt/notesSlides/notesSlide6.xml><?xml version="1.0" encoding="utf-8"?>
 <p:notes xmlns:a="http://schemas.openxmlformats.org/drawingml/2006/main" xmlns:r="http://schemas.openxmlformats.org/officeDocument/2006/relationships" xmlns:p="http://schemas.openxmlformats.org/presentationml/2006/main">
   <p:cSld>
     <p:spTree>
@@ -1303,7 +1743,7 @@
           <a:p>
             <a:fld id="{5AD2936D-68DF-C34D-84E6-1FDAB4C19BCF}" type="slidenum">
               <a:rPr lang="en-US" smtClean="0"/>
-              <a:t>11</a:t>
+              <a:t>12</a:t>
             </a:fld>
             <a:endParaRPr lang="en-US"/>
           </a:p>
@@ -1322,7 +1762,223 @@
 </p:notes>
 </file>
 
-<file path=ppt/notesSlides/notesSlide6.xml><?xml version="1.0" encoding="utf-8"?>
+<file path=ppt/notesSlides/notesSlide7.xml><?xml version="1.0" encoding="utf-8"?>
+<p:notes xmlns:a="http://schemas.openxmlformats.org/drawingml/2006/main" xmlns:r="http://schemas.openxmlformats.org/officeDocument/2006/relationships" xmlns:p="http://schemas.openxmlformats.org/presentationml/2006/main">
+  <p:cSld>
+    <p:spTree>
+      <p:nvGrpSpPr>
+        <p:cNvPr id="1" name="">
+          <a:extLst>
+            <a:ext uri="{FF2B5EF4-FFF2-40B4-BE49-F238E27FC236}">
+              <a16:creationId xmlns:a16="http://schemas.microsoft.com/office/drawing/2014/main" id="{FA2BC2CA-C3D1-4544-C530-3E0E4B167A6E}"/>
+            </a:ext>
+          </a:extLst>
+        </p:cNvPr>
+        <p:cNvGrpSpPr/>
+        <p:nvPr/>
+      </p:nvGrpSpPr>
+      <p:grpSpPr>
+        <a:xfrm>
+          <a:off x="0" y="0"/>
+          <a:ext cx="0" cy="0"/>
+          <a:chOff x="0" y="0"/>
+          <a:chExt cx="0" cy="0"/>
+        </a:xfrm>
+      </p:grpSpPr>
+      <p:sp>
+        <p:nvSpPr>
+          <p:cNvPr id="2" name="Slide Image Placeholder 1">
+            <a:extLst>
+              <a:ext uri="{FF2B5EF4-FFF2-40B4-BE49-F238E27FC236}">
+                <a16:creationId xmlns:a16="http://schemas.microsoft.com/office/drawing/2014/main" id="{EB5B5B33-CA3F-127D-6DFB-1EB8594F41A6}"/>
+              </a:ext>
+            </a:extLst>
+          </p:cNvPr>
+          <p:cNvSpPr>
+            <a:spLocks noGrp="1" noRot="1" noChangeAspect="1"/>
+          </p:cNvSpPr>
+          <p:nvPr>
+            <p:ph type="sldImg"/>
+          </p:nvPr>
+        </p:nvSpPr>
+        <p:spPr/>
+      </p:sp>
+      <p:sp>
+        <p:nvSpPr>
+          <p:cNvPr id="3" name="Notes Placeholder 2">
+            <a:extLst>
+              <a:ext uri="{FF2B5EF4-FFF2-40B4-BE49-F238E27FC236}">
+                <a16:creationId xmlns:a16="http://schemas.microsoft.com/office/drawing/2014/main" id="{6BE87660-E55D-2941-AC3A-CFFCC09F0A0C}"/>
+              </a:ext>
+            </a:extLst>
+          </p:cNvPr>
+          <p:cNvSpPr>
+            <a:spLocks noGrp="1"/>
+          </p:cNvSpPr>
+          <p:nvPr>
+            <p:ph type="body" idx="1"/>
+          </p:nvPr>
+        </p:nvSpPr>
+        <p:spPr/>
+        <p:txBody>
+          <a:bodyPr/>
+          <a:lstStyle/>
+          <a:p>
+            <a:endParaRPr lang="en-US" dirty="0"/>
+          </a:p>
+        </p:txBody>
+      </p:sp>
+      <p:sp>
+        <p:nvSpPr>
+          <p:cNvPr id="4" name="Slide Number Placeholder 3">
+            <a:extLst>
+              <a:ext uri="{FF2B5EF4-FFF2-40B4-BE49-F238E27FC236}">
+                <a16:creationId xmlns:a16="http://schemas.microsoft.com/office/drawing/2014/main" id="{7F941A67-3764-B3AC-C3B6-CF07C3AA1502}"/>
+              </a:ext>
+            </a:extLst>
+          </p:cNvPr>
+          <p:cNvSpPr>
+            <a:spLocks noGrp="1"/>
+          </p:cNvSpPr>
+          <p:nvPr>
+            <p:ph type="sldNum" sz="quarter" idx="5"/>
+          </p:nvPr>
+        </p:nvSpPr>
+        <p:spPr/>
+        <p:txBody>
+          <a:bodyPr/>
+          <a:lstStyle/>
+          <a:p>
+            <a:fld id="{5AD2936D-68DF-C34D-84E6-1FDAB4C19BCF}" type="slidenum">
+              <a:rPr lang="en-US" smtClean="0"/>
+              <a:t>13</a:t>
+            </a:fld>
+            <a:endParaRPr lang="en-US"/>
+          </a:p>
+        </p:txBody>
+      </p:sp>
+    </p:spTree>
+    <p:extLst>
+      <p:ext uri="{BB962C8B-B14F-4D97-AF65-F5344CB8AC3E}">
+        <p14:creationId xmlns:p14="http://schemas.microsoft.com/office/powerpoint/2010/main" val="3008036259"/>
+      </p:ext>
+    </p:extLst>
+  </p:cSld>
+  <p:clrMapOvr>
+    <a:masterClrMapping/>
+  </p:clrMapOvr>
+</p:notes>
+</file>
+
+<file path=ppt/notesSlides/notesSlide8.xml><?xml version="1.0" encoding="utf-8"?>
+<p:notes xmlns:a="http://schemas.openxmlformats.org/drawingml/2006/main" xmlns:r="http://schemas.openxmlformats.org/officeDocument/2006/relationships" xmlns:p="http://schemas.openxmlformats.org/presentationml/2006/main">
+  <p:cSld>
+    <p:spTree>
+      <p:nvGrpSpPr>
+        <p:cNvPr id="1" name="">
+          <a:extLst>
+            <a:ext uri="{FF2B5EF4-FFF2-40B4-BE49-F238E27FC236}">
+              <a16:creationId xmlns:a16="http://schemas.microsoft.com/office/drawing/2014/main" id="{5378736C-0546-B22A-0E51-1D915737BB33}"/>
+            </a:ext>
+          </a:extLst>
+        </p:cNvPr>
+        <p:cNvGrpSpPr/>
+        <p:nvPr/>
+      </p:nvGrpSpPr>
+      <p:grpSpPr>
+        <a:xfrm>
+          <a:off x="0" y="0"/>
+          <a:ext cx="0" cy="0"/>
+          <a:chOff x="0" y="0"/>
+          <a:chExt cx="0" cy="0"/>
+        </a:xfrm>
+      </p:grpSpPr>
+      <p:sp>
+        <p:nvSpPr>
+          <p:cNvPr id="2" name="Slide Image Placeholder 1">
+            <a:extLst>
+              <a:ext uri="{FF2B5EF4-FFF2-40B4-BE49-F238E27FC236}">
+                <a16:creationId xmlns:a16="http://schemas.microsoft.com/office/drawing/2014/main" id="{96A078BB-E7DD-46A3-D395-D7BDB922F5C4}"/>
+              </a:ext>
+            </a:extLst>
+          </p:cNvPr>
+          <p:cNvSpPr>
+            <a:spLocks noGrp="1" noRot="1" noChangeAspect="1"/>
+          </p:cNvSpPr>
+          <p:nvPr>
+            <p:ph type="sldImg"/>
+          </p:nvPr>
+        </p:nvSpPr>
+        <p:spPr/>
+      </p:sp>
+      <p:sp>
+        <p:nvSpPr>
+          <p:cNvPr id="3" name="Notes Placeholder 2">
+            <a:extLst>
+              <a:ext uri="{FF2B5EF4-FFF2-40B4-BE49-F238E27FC236}">
+                <a16:creationId xmlns:a16="http://schemas.microsoft.com/office/drawing/2014/main" id="{C5C43F81-E12F-2D3E-CEA3-AF077DE436A9}"/>
+              </a:ext>
+            </a:extLst>
+          </p:cNvPr>
+          <p:cNvSpPr>
+            <a:spLocks noGrp="1"/>
+          </p:cNvSpPr>
+          <p:nvPr>
+            <p:ph type="body" idx="1"/>
+          </p:nvPr>
+        </p:nvSpPr>
+        <p:spPr/>
+        <p:txBody>
+          <a:bodyPr/>
+          <a:lstStyle/>
+          <a:p>
+            <a:endParaRPr lang="en-US" dirty="0"/>
+          </a:p>
+        </p:txBody>
+      </p:sp>
+      <p:sp>
+        <p:nvSpPr>
+          <p:cNvPr id="4" name="Slide Number Placeholder 3">
+            <a:extLst>
+              <a:ext uri="{FF2B5EF4-FFF2-40B4-BE49-F238E27FC236}">
+                <a16:creationId xmlns:a16="http://schemas.microsoft.com/office/drawing/2014/main" id="{A14289EC-035D-A8E2-D0A8-2F238B5E404F}"/>
+              </a:ext>
+            </a:extLst>
+          </p:cNvPr>
+          <p:cNvSpPr>
+            <a:spLocks noGrp="1"/>
+          </p:cNvSpPr>
+          <p:nvPr>
+            <p:ph type="sldNum" sz="quarter" idx="5"/>
+          </p:nvPr>
+        </p:nvSpPr>
+        <p:spPr/>
+        <p:txBody>
+          <a:bodyPr/>
+          <a:lstStyle/>
+          <a:p>
+            <a:fld id="{5AD2936D-68DF-C34D-84E6-1FDAB4C19BCF}" type="slidenum">
+              <a:rPr lang="en-US" smtClean="0"/>
+              <a:t>14</a:t>
+            </a:fld>
+            <a:endParaRPr lang="en-US"/>
+          </a:p>
+        </p:txBody>
+      </p:sp>
+    </p:spTree>
+    <p:extLst>
+      <p:ext uri="{BB962C8B-B14F-4D97-AF65-F5344CB8AC3E}">
+        <p14:creationId xmlns:p14="http://schemas.microsoft.com/office/powerpoint/2010/main" val="2137941091"/>
+      </p:ext>
+    </p:extLst>
+  </p:cSld>
+  <p:clrMapOvr>
+    <a:masterClrMapping/>
+  </p:clrMapOvr>
+</p:notes>
+</file>
+
+<file path=ppt/notesSlides/notesSlide9.xml><?xml version="1.0" encoding="utf-8"?>
 <p:notes xmlns:a="http://schemas.openxmlformats.org/drawingml/2006/main" xmlns:r="http://schemas.openxmlformats.org/officeDocument/2006/relationships" xmlns:p="http://schemas.openxmlformats.org/presentationml/2006/main">
   <p:cSld>
     <p:spTree>
@@ -1411,7 +2067,7 @@
           <a:p>
             <a:fld id="{5AD2936D-68DF-C34D-84E6-1FDAB4C19BCF}" type="slidenum">
               <a:rPr lang="en-US" smtClean="0"/>
-              <a:t>12</a:t>
+              <a:t>15</a:t>
             </a:fld>
             <a:endParaRPr lang="en-US"/>
           </a:p>
@@ -1421,330 +2077,6 @@
     <p:extLst>
       <p:ext uri="{BB962C8B-B14F-4D97-AF65-F5344CB8AC3E}">
         <p14:creationId xmlns:p14="http://schemas.microsoft.com/office/powerpoint/2010/main" val="1013648668"/>
-      </p:ext>
-    </p:extLst>
-  </p:cSld>
-  <p:clrMapOvr>
-    <a:masterClrMapping/>
-  </p:clrMapOvr>
-</p:notes>
-</file>
-
-<file path=ppt/notesSlides/notesSlide7.xml><?xml version="1.0" encoding="utf-8"?>
-<p:notes xmlns:a="http://schemas.openxmlformats.org/drawingml/2006/main" xmlns:r="http://schemas.openxmlformats.org/officeDocument/2006/relationships" xmlns:p="http://schemas.openxmlformats.org/presentationml/2006/main">
-  <p:cSld>
-    <p:spTree>
-      <p:nvGrpSpPr>
-        <p:cNvPr id="1" name="">
-          <a:extLst>
-            <a:ext uri="{FF2B5EF4-FFF2-40B4-BE49-F238E27FC236}">
-              <a16:creationId xmlns:a16="http://schemas.microsoft.com/office/drawing/2014/main" id="{2C486912-8D16-E435-5C22-A90E748FF1BA}"/>
-            </a:ext>
-          </a:extLst>
-        </p:cNvPr>
-        <p:cNvGrpSpPr/>
-        <p:nvPr/>
-      </p:nvGrpSpPr>
-      <p:grpSpPr>
-        <a:xfrm>
-          <a:off x="0" y="0"/>
-          <a:ext cx="0" cy="0"/>
-          <a:chOff x="0" y="0"/>
-          <a:chExt cx="0" cy="0"/>
-        </a:xfrm>
-      </p:grpSpPr>
-      <p:sp>
-        <p:nvSpPr>
-          <p:cNvPr id="2" name="Slide Image Placeholder 1">
-            <a:extLst>
-              <a:ext uri="{FF2B5EF4-FFF2-40B4-BE49-F238E27FC236}">
-                <a16:creationId xmlns:a16="http://schemas.microsoft.com/office/drawing/2014/main" id="{68DD73EF-5AEE-8EC9-A6E8-0C4466DBFADB}"/>
-              </a:ext>
-            </a:extLst>
-          </p:cNvPr>
-          <p:cNvSpPr>
-            <a:spLocks noGrp="1" noRot="1" noChangeAspect="1"/>
-          </p:cNvSpPr>
-          <p:nvPr>
-            <p:ph type="sldImg"/>
-          </p:nvPr>
-        </p:nvSpPr>
-        <p:spPr/>
-      </p:sp>
-      <p:sp>
-        <p:nvSpPr>
-          <p:cNvPr id="3" name="Notes Placeholder 2">
-            <a:extLst>
-              <a:ext uri="{FF2B5EF4-FFF2-40B4-BE49-F238E27FC236}">
-                <a16:creationId xmlns:a16="http://schemas.microsoft.com/office/drawing/2014/main" id="{CE2519F4-B304-570C-296F-C835E1C2036E}"/>
-              </a:ext>
-            </a:extLst>
-          </p:cNvPr>
-          <p:cNvSpPr>
-            <a:spLocks noGrp="1"/>
-          </p:cNvSpPr>
-          <p:nvPr>
-            <p:ph type="body" idx="1"/>
-          </p:nvPr>
-        </p:nvSpPr>
-        <p:spPr/>
-        <p:txBody>
-          <a:bodyPr/>
-          <a:lstStyle/>
-          <a:p>
-            <a:endParaRPr lang="en-US" dirty="0"/>
-          </a:p>
-        </p:txBody>
-      </p:sp>
-      <p:sp>
-        <p:nvSpPr>
-          <p:cNvPr id="4" name="Slide Number Placeholder 3">
-            <a:extLst>
-              <a:ext uri="{FF2B5EF4-FFF2-40B4-BE49-F238E27FC236}">
-                <a16:creationId xmlns:a16="http://schemas.microsoft.com/office/drawing/2014/main" id="{457CC44C-E247-7DEB-CCC9-15D1BC0DBB41}"/>
-              </a:ext>
-            </a:extLst>
-          </p:cNvPr>
-          <p:cNvSpPr>
-            <a:spLocks noGrp="1"/>
-          </p:cNvSpPr>
-          <p:nvPr>
-            <p:ph type="sldNum" sz="quarter" idx="5"/>
-          </p:nvPr>
-        </p:nvSpPr>
-        <p:spPr/>
-        <p:txBody>
-          <a:bodyPr/>
-          <a:lstStyle/>
-          <a:p>
-            <a:fld id="{5AD2936D-68DF-C34D-84E6-1FDAB4C19BCF}" type="slidenum">
-              <a:rPr lang="en-US" smtClean="0"/>
-              <a:t>13</a:t>
-            </a:fld>
-            <a:endParaRPr lang="en-US"/>
-          </a:p>
-        </p:txBody>
-      </p:sp>
-    </p:spTree>
-    <p:extLst>
-      <p:ext uri="{BB962C8B-B14F-4D97-AF65-F5344CB8AC3E}">
-        <p14:creationId xmlns:p14="http://schemas.microsoft.com/office/powerpoint/2010/main" val="903150929"/>
-      </p:ext>
-    </p:extLst>
-  </p:cSld>
-  <p:clrMapOvr>
-    <a:masterClrMapping/>
-  </p:clrMapOvr>
-</p:notes>
-</file>
-
-<file path=ppt/notesSlides/notesSlide8.xml><?xml version="1.0" encoding="utf-8"?>
-<p:notes xmlns:a="http://schemas.openxmlformats.org/drawingml/2006/main" xmlns:r="http://schemas.openxmlformats.org/officeDocument/2006/relationships" xmlns:p="http://schemas.openxmlformats.org/presentationml/2006/main">
-  <p:cSld>
-    <p:spTree>
-      <p:nvGrpSpPr>
-        <p:cNvPr id="1" name="">
-          <a:extLst>
-            <a:ext uri="{FF2B5EF4-FFF2-40B4-BE49-F238E27FC236}">
-              <a16:creationId xmlns:a16="http://schemas.microsoft.com/office/drawing/2014/main" id="{A05EB3D0-1E06-2B88-0153-4E2E25297A78}"/>
-            </a:ext>
-          </a:extLst>
-        </p:cNvPr>
-        <p:cNvGrpSpPr/>
-        <p:nvPr/>
-      </p:nvGrpSpPr>
-      <p:grpSpPr>
-        <a:xfrm>
-          <a:off x="0" y="0"/>
-          <a:ext cx="0" cy="0"/>
-          <a:chOff x="0" y="0"/>
-          <a:chExt cx="0" cy="0"/>
-        </a:xfrm>
-      </p:grpSpPr>
-      <p:sp>
-        <p:nvSpPr>
-          <p:cNvPr id="2" name="Slide Image Placeholder 1">
-            <a:extLst>
-              <a:ext uri="{FF2B5EF4-FFF2-40B4-BE49-F238E27FC236}">
-                <a16:creationId xmlns:a16="http://schemas.microsoft.com/office/drawing/2014/main" id="{6CE9168E-EC7C-4EFA-A948-1BD168CCBB28}"/>
-              </a:ext>
-            </a:extLst>
-          </p:cNvPr>
-          <p:cNvSpPr>
-            <a:spLocks noGrp="1" noRot="1" noChangeAspect="1"/>
-          </p:cNvSpPr>
-          <p:nvPr>
-            <p:ph type="sldImg"/>
-          </p:nvPr>
-        </p:nvSpPr>
-        <p:spPr/>
-      </p:sp>
-      <p:sp>
-        <p:nvSpPr>
-          <p:cNvPr id="3" name="Notes Placeholder 2">
-            <a:extLst>
-              <a:ext uri="{FF2B5EF4-FFF2-40B4-BE49-F238E27FC236}">
-                <a16:creationId xmlns:a16="http://schemas.microsoft.com/office/drawing/2014/main" id="{05747B9B-C5F9-E2C8-787A-B00209079B8C}"/>
-              </a:ext>
-            </a:extLst>
-          </p:cNvPr>
-          <p:cNvSpPr>
-            <a:spLocks noGrp="1"/>
-          </p:cNvSpPr>
-          <p:nvPr>
-            <p:ph type="body" idx="1"/>
-          </p:nvPr>
-        </p:nvSpPr>
-        <p:spPr/>
-        <p:txBody>
-          <a:bodyPr/>
-          <a:lstStyle/>
-          <a:p>
-            <a:endParaRPr lang="en-US" dirty="0"/>
-          </a:p>
-        </p:txBody>
-      </p:sp>
-      <p:sp>
-        <p:nvSpPr>
-          <p:cNvPr id="4" name="Slide Number Placeholder 3">
-            <a:extLst>
-              <a:ext uri="{FF2B5EF4-FFF2-40B4-BE49-F238E27FC236}">
-                <a16:creationId xmlns:a16="http://schemas.microsoft.com/office/drawing/2014/main" id="{07068103-71FA-E1EA-1C35-91C986073B35}"/>
-              </a:ext>
-            </a:extLst>
-          </p:cNvPr>
-          <p:cNvSpPr>
-            <a:spLocks noGrp="1"/>
-          </p:cNvSpPr>
-          <p:nvPr>
-            <p:ph type="sldNum" sz="quarter" idx="5"/>
-          </p:nvPr>
-        </p:nvSpPr>
-        <p:spPr/>
-        <p:txBody>
-          <a:bodyPr/>
-          <a:lstStyle/>
-          <a:p>
-            <a:fld id="{5AD2936D-68DF-C34D-84E6-1FDAB4C19BCF}" type="slidenum">
-              <a:rPr lang="en-US" smtClean="0"/>
-              <a:t>14</a:t>
-            </a:fld>
-            <a:endParaRPr lang="en-US"/>
-          </a:p>
-        </p:txBody>
-      </p:sp>
-    </p:spTree>
-    <p:extLst>
-      <p:ext uri="{BB962C8B-B14F-4D97-AF65-F5344CB8AC3E}">
-        <p14:creationId xmlns:p14="http://schemas.microsoft.com/office/powerpoint/2010/main" val="2458115221"/>
-      </p:ext>
-    </p:extLst>
-  </p:cSld>
-  <p:clrMapOvr>
-    <a:masterClrMapping/>
-  </p:clrMapOvr>
-</p:notes>
-</file>
-
-<file path=ppt/notesSlides/notesSlide9.xml><?xml version="1.0" encoding="utf-8"?>
-<p:notes xmlns:a="http://schemas.openxmlformats.org/drawingml/2006/main" xmlns:r="http://schemas.openxmlformats.org/officeDocument/2006/relationships" xmlns:p="http://schemas.openxmlformats.org/presentationml/2006/main">
-  <p:cSld>
-    <p:spTree>
-      <p:nvGrpSpPr>
-        <p:cNvPr id="1" name="">
-          <a:extLst>
-            <a:ext uri="{FF2B5EF4-FFF2-40B4-BE49-F238E27FC236}">
-              <a16:creationId xmlns:a16="http://schemas.microsoft.com/office/drawing/2014/main" id="{FC005D0F-F53A-8FBF-64D9-A67F28361864}"/>
-            </a:ext>
-          </a:extLst>
-        </p:cNvPr>
-        <p:cNvGrpSpPr/>
-        <p:nvPr/>
-      </p:nvGrpSpPr>
-      <p:grpSpPr>
-        <a:xfrm>
-          <a:off x="0" y="0"/>
-          <a:ext cx="0" cy="0"/>
-          <a:chOff x="0" y="0"/>
-          <a:chExt cx="0" cy="0"/>
-        </a:xfrm>
-      </p:grpSpPr>
-      <p:sp>
-        <p:nvSpPr>
-          <p:cNvPr id="2" name="Slide Image Placeholder 1">
-            <a:extLst>
-              <a:ext uri="{FF2B5EF4-FFF2-40B4-BE49-F238E27FC236}">
-                <a16:creationId xmlns:a16="http://schemas.microsoft.com/office/drawing/2014/main" id="{4F839AA8-66B5-E374-EBF1-749B2DECA9FB}"/>
-              </a:ext>
-            </a:extLst>
-          </p:cNvPr>
-          <p:cNvSpPr>
-            <a:spLocks noGrp="1" noRot="1" noChangeAspect="1"/>
-          </p:cNvSpPr>
-          <p:nvPr>
-            <p:ph type="sldImg"/>
-          </p:nvPr>
-        </p:nvSpPr>
-        <p:spPr/>
-      </p:sp>
-      <p:sp>
-        <p:nvSpPr>
-          <p:cNvPr id="3" name="Notes Placeholder 2">
-            <a:extLst>
-              <a:ext uri="{FF2B5EF4-FFF2-40B4-BE49-F238E27FC236}">
-                <a16:creationId xmlns:a16="http://schemas.microsoft.com/office/drawing/2014/main" id="{0F470EBD-83E0-7813-FE78-35AED5F195D8}"/>
-              </a:ext>
-            </a:extLst>
-          </p:cNvPr>
-          <p:cNvSpPr>
-            <a:spLocks noGrp="1"/>
-          </p:cNvSpPr>
-          <p:nvPr>
-            <p:ph type="body" idx="1"/>
-          </p:nvPr>
-        </p:nvSpPr>
-        <p:spPr/>
-        <p:txBody>
-          <a:bodyPr/>
-          <a:lstStyle/>
-          <a:p>
-            <a:endParaRPr lang="en-US" dirty="0"/>
-          </a:p>
-        </p:txBody>
-      </p:sp>
-      <p:sp>
-        <p:nvSpPr>
-          <p:cNvPr id="4" name="Slide Number Placeholder 3">
-            <a:extLst>
-              <a:ext uri="{FF2B5EF4-FFF2-40B4-BE49-F238E27FC236}">
-                <a16:creationId xmlns:a16="http://schemas.microsoft.com/office/drawing/2014/main" id="{AB85C3C6-ACAD-032E-F56A-3AE71677C988}"/>
-              </a:ext>
-            </a:extLst>
-          </p:cNvPr>
-          <p:cNvSpPr>
-            <a:spLocks noGrp="1"/>
-          </p:cNvSpPr>
-          <p:nvPr>
-            <p:ph type="sldNum" sz="quarter" idx="5"/>
-          </p:nvPr>
-        </p:nvSpPr>
-        <p:spPr/>
-        <p:txBody>
-          <a:bodyPr/>
-          <a:lstStyle/>
-          <a:p>
-            <a:fld id="{5AD2936D-68DF-C34D-84E6-1FDAB4C19BCF}" type="slidenum">
-              <a:rPr lang="en-US" smtClean="0"/>
-              <a:t>15</a:t>
-            </a:fld>
-            <a:endParaRPr lang="en-US"/>
-          </a:p>
-        </p:txBody>
-      </p:sp>
-    </p:spTree>
-    <p:extLst>
-      <p:ext uri="{BB962C8B-B14F-4D97-AF65-F5344CB8AC3E}">
-        <p14:creationId xmlns:p14="http://schemas.microsoft.com/office/powerpoint/2010/main" val="171951772"/>
       </p:ext>
     </p:extLst>
   </p:cSld>
@@ -5454,7 +5786,7 @@
         <p:cNvPr id="1" name="">
           <a:extLst>
             <a:ext uri="{FF2B5EF4-FFF2-40B4-BE49-F238E27FC236}">
-              <a16:creationId xmlns:a16="http://schemas.microsoft.com/office/drawing/2014/main" id="{329BDB5B-2EB8-99F1-5D27-B7DE542E1325}"/>
+              <a16:creationId xmlns:a16="http://schemas.microsoft.com/office/drawing/2014/main" id="{A8924308-F2B6-2128-FB02-CA0D02F1EB3B}"/>
             </a:ext>
           </a:extLst>
         </p:cNvPr>
@@ -5474,7 +5806,7 @@
           <p:cNvPr id="17" name="Rectangle 16">
             <a:extLst>
               <a:ext uri="{FF2B5EF4-FFF2-40B4-BE49-F238E27FC236}">
-                <a16:creationId xmlns:a16="http://schemas.microsoft.com/office/drawing/2014/main" id="{9D1E2116-853C-CD5A-F31B-40C8B7C615D4}"/>
+                <a16:creationId xmlns:a16="http://schemas.microsoft.com/office/drawing/2014/main" id="{99D6ED4E-E8E5-E558-2F81-F2CA901C9F91}"/>
               </a:ext>
             </a:extLst>
           </p:cNvPr>
@@ -5531,7 +5863,7 @@
           <p:cNvPr id="18" name="Rectangle 17">
             <a:extLst>
               <a:ext uri="{FF2B5EF4-FFF2-40B4-BE49-F238E27FC236}">
-                <a16:creationId xmlns:a16="http://schemas.microsoft.com/office/drawing/2014/main" id="{894DFEED-391B-E6C5-4886-EBE11CA64C84}"/>
+                <a16:creationId xmlns:a16="http://schemas.microsoft.com/office/drawing/2014/main" id="{9C8AFE51-05C5-F984-E491-37B2F08E48D3}"/>
               </a:ext>
             </a:extLst>
           </p:cNvPr>
@@ -5588,7 +5920,7 @@
           <p:cNvPr id="12" name="TextBox 11">
             <a:extLst>
               <a:ext uri="{FF2B5EF4-FFF2-40B4-BE49-F238E27FC236}">
-                <a16:creationId xmlns:a16="http://schemas.microsoft.com/office/drawing/2014/main" id="{F37BB2A6-BF16-9B08-08BA-DC9ABBC9C8DB}"/>
+                <a16:creationId xmlns:a16="http://schemas.microsoft.com/office/drawing/2014/main" id="{D63FA6DE-963A-6EBB-8251-3FAA7F0FD9A0}"/>
               </a:ext>
             </a:extLst>
           </p:cNvPr>
@@ -5647,7 +5979,7 @@
           <p:cNvPr id="2" name="TextBox 1">
             <a:extLst>
               <a:ext uri="{FF2B5EF4-FFF2-40B4-BE49-F238E27FC236}">
-                <a16:creationId xmlns:a16="http://schemas.microsoft.com/office/drawing/2014/main" id="{04E8E50E-70CE-0C67-BEFD-5DB460BA6A62}"/>
+                <a16:creationId xmlns:a16="http://schemas.microsoft.com/office/drawing/2014/main" id="{E54E7E8C-43C3-43C9-4259-0DABD061500C}"/>
               </a:ext>
             </a:extLst>
           </p:cNvPr>
@@ -5688,7 +6020,7 @@
           <p:cNvPr id="7" name="TextBox 6">
             <a:extLst>
               <a:ext uri="{FF2B5EF4-FFF2-40B4-BE49-F238E27FC236}">
-                <a16:creationId xmlns:a16="http://schemas.microsoft.com/office/drawing/2014/main" id="{687ADB50-CBB3-E406-3A47-7D0EA903ED37}"/>
+                <a16:creationId xmlns:a16="http://schemas.microsoft.com/office/drawing/2014/main" id="{EEF28FB5-C657-4375-3CB5-BACCCAF99B38}"/>
               </a:ext>
             </a:extLst>
           </p:cNvPr>
@@ -5745,61 +6077,10 @@
       </p:sp>
       <p:sp>
         <p:nvSpPr>
-          <p:cNvPr id="8" name="TextBox 7">
-            <a:extLst>
-              <a:ext uri="{FF2B5EF4-FFF2-40B4-BE49-F238E27FC236}">
-                <a16:creationId xmlns:a16="http://schemas.microsoft.com/office/drawing/2014/main" id="{FC411999-1E8A-8CA9-6E02-283B092D3D33}"/>
-              </a:ext>
-            </a:extLst>
-          </p:cNvPr>
-          <p:cNvSpPr txBox="1"/>
-          <p:nvPr/>
-        </p:nvSpPr>
-        <p:spPr>
-          <a:xfrm>
-            <a:off x="6615107" y="3218936"/>
-            <a:ext cx="2587489" cy="1477328"/>
-          </a:xfrm>
-          <a:prstGeom prst="rect">
-            <a:avLst/>
-          </a:prstGeom>
-          <a:noFill/>
-        </p:spPr>
-        <p:txBody>
-          <a:bodyPr wrap="square" rtlCol="0">
-            <a:spAutoFit/>
-          </a:bodyPr>
-          <a:lstStyle/>
-          <a:p>
-            <a:r>
-              <a:rPr lang="en-US" sz="3000" dirty="0">
-                <a:latin typeface="Times New Roman" panose="02020603050405020304" pitchFamily="18" charset="0"/>
-                <a:cs typeface="Times New Roman" panose="02020603050405020304" pitchFamily="18" charset="0"/>
-              </a:rPr>
-              <a:t>Unicasts </a:t>
-            </a:r>
-            <a:br>
-              <a:rPr lang="en-US" sz="3000" dirty="0">
-                <a:latin typeface="Times New Roman" panose="02020603050405020304" pitchFamily="18" charset="0"/>
-                <a:cs typeface="Times New Roman" panose="02020603050405020304" pitchFamily="18" charset="0"/>
-              </a:rPr>
-            </a:br>
-            <a:r>
-              <a:rPr lang="en-US" sz="3000" dirty="0">
-                <a:latin typeface="Times New Roman" panose="02020603050405020304" pitchFamily="18" charset="0"/>
-                <a:cs typeface="Times New Roman" panose="02020603050405020304" pitchFamily="18" charset="0"/>
-              </a:rPr>
-              <a:t>from machines to server</a:t>
-            </a:r>
-          </a:p>
-        </p:txBody>
-      </p:sp>
-      <p:sp>
-        <p:nvSpPr>
           <p:cNvPr id="9" name="TextBox 8">
             <a:extLst>
               <a:ext uri="{FF2B5EF4-FFF2-40B4-BE49-F238E27FC236}">
-                <a16:creationId xmlns:a16="http://schemas.microsoft.com/office/drawing/2014/main" id="{96465F3E-4C19-045E-905D-35D7D9029867}"/>
+                <a16:creationId xmlns:a16="http://schemas.microsoft.com/office/drawing/2014/main" id="{E3F83F9C-D8FE-02EA-2E2A-DD0A1C4B6F11}"/>
               </a:ext>
             </a:extLst>
           </p:cNvPr>
@@ -5857,49 +6138,10 @@
       </p:sp>
       <p:sp>
         <p:nvSpPr>
-          <p:cNvPr id="10" name="TextBox 9">
-            <a:extLst>
-              <a:ext uri="{FF2B5EF4-FFF2-40B4-BE49-F238E27FC236}">
-                <a16:creationId xmlns:a16="http://schemas.microsoft.com/office/drawing/2014/main" id="{FB4BED7D-4B5E-952B-86A8-299F5F8EA4E3}"/>
-              </a:ext>
-            </a:extLst>
-          </p:cNvPr>
-          <p:cNvSpPr txBox="1"/>
-          <p:nvPr/>
-        </p:nvSpPr>
-        <p:spPr>
-          <a:xfrm>
-            <a:off x="2622846" y="3235757"/>
-            <a:ext cx="2249561" cy="1477328"/>
-          </a:xfrm>
-          <a:prstGeom prst="rect">
-            <a:avLst/>
-          </a:prstGeom>
-          <a:noFill/>
-        </p:spPr>
-        <p:txBody>
-          <a:bodyPr wrap="square" rtlCol="0">
-            <a:spAutoFit/>
-          </a:bodyPr>
-          <a:lstStyle/>
-          <a:p>
-            <a:pPr algn="r"/>
-            <a:r>
-              <a:rPr lang="en-US" sz="3000" dirty="0">
-                <a:latin typeface="Times New Roman" panose="02020603050405020304" pitchFamily="18" charset="0"/>
-                <a:cs typeface="Times New Roman" panose="02020603050405020304" pitchFamily="18" charset="0"/>
-              </a:rPr>
-              <a:t>Multicast from server to machines</a:t>
-            </a:r>
-          </a:p>
-        </p:txBody>
-      </p:sp>
-      <p:sp>
-        <p:nvSpPr>
           <p:cNvPr id="11" name="Rectangle 10">
             <a:extLst>
               <a:ext uri="{FF2B5EF4-FFF2-40B4-BE49-F238E27FC236}">
-                <a16:creationId xmlns:a16="http://schemas.microsoft.com/office/drawing/2014/main" id="{0B99D3DB-B510-22AB-1991-A1915A4878C7}"/>
+                <a16:creationId xmlns:a16="http://schemas.microsoft.com/office/drawing/2014/main" id="{D16890F8-C39D-9F52-4322-BF3055B01862}"/>
               </a:ext>
             </a:extLst>
           </p:cNvPr>
@@ -6161,20 +6403,20 @@
     </p:spTree>
     <p:extLst>
       <p:ext uri="{BB962C8B-B14F-4D97-AF65-F5344CB8AC3E}">
-        <p14:creationId xmlns:p14="http://schemas.microsoft.com/office/powerpoint/2010/main" val="956749138"/>
+        <p14:creationId xmlns:p14="http://schemas.microsoft.com/office/powerpoint/2010/main" val="3567270797"/>
       </p:ext>
     </p:extLst>
   </p:cSld>
   <p:clrMapOvr>
     <a:masterClrMapping/>
   </p:clrMapOvr>
-  <mc:AlternateContent xmlns:mc="http://schemas.openxmlformats.org/markup-compatibility/2006">
-    <mc:Choice xmlns:p159="http://schemas.microsoft.com/office/powerpoint/2015/09/main" Requires="p159">
+  <mc:AlternateContent xmlns:mc="http://schemas.openxmlformats.org/markup-compatibility/2006" xmlns:p159="http://schemas.microsoft.com/office/powerpoint/2015/09/main">
+    <mc:Choice Requires="p159">
       <p:transition spd="med">
         <p159:morph option="byWord"/>
       </p:transition>
     </mc:Choice>
-    <mc:Fallback>
+    <mc:Fallback xmlns="">
       <p:transition spd="med">
         <p:fade/>
       </p:transition>
@@ -6191,7 +6433,7 @@
         <p:cNvPr id="1" name="">
           <a:extLst>
             <a:ext uri="{FF2B5EF4-FFF2-40B4-BE49-F238E27FC236}">
-              <a16:creationId xmlns:a16="http://schemas.microsoft.com/office/drawing/2014/main" id="{903B1B1B-7C7F-0D23-FC0A-0191D992B124}"/>
+              <a16:creationId xmlns:a16="http://schemas.microsoft.com/office/drawing/2014/main" id="{329BDB5B-2EB8-99F1-5D27-B7DE542E1325}"/>
             </a:ext>
           </a:extLst>
         </p:cNvPr>
@@ -6211,7 +6453,7 @@
           <p:cNvPr id="17" name="Rectangle 16">
             <a:extLst>
               <a:ext uri="{FF2B5EF4-FFF2-40B4-BE49-F238E27FC236}">
-                <a16:creationId xmlns:a16="http://schemas.microsoft.com/office/drawing/2014/main" id="{B3D9B647-F77F-7408-1713-249CDF5F30EE}"/>
+                <a16:creationId xmlns:a16="http://schemas.microsoft.com/office/drawing/2014/main" id="{9D1E2116-853C-CD5A-F31B-40C8B7C615D4}"/>
               </a:ext>
             </a:extLst>
           </p:cNvPr>
@@ -6268,7 +6510,7 @@
           <p:cNvPr id="18" name="Rectangle 17">
             <a:extLst>
               <a:ext uri="{FF2B5EF4-FFF2-40B4-BE49-F238E27FC236}">
-                <a16:creationId xmlns:a16="http://schemas.microsoft.com/office/drawing/2014/main" id="{62A96CA1-550D-FF52-7A6C-87D4B134651B}"/>
+                <a16:creationId xmlns:a16="http://schemas.microsoft.com/office/drawing/2014/main" id="{894DFEED-391B-E6C5-4886-EBE11CA64C84}"/>
               </a:ext>
             </a:extLst>
           </p:cNvPr>
@@ -6325,7 +6567,7 @@
           <p:cNvPr id="12" name="TextBox 11">
             <a:extLst>
               <a:ext uri="{FF2B5EF4-FFF2-40B4-BE49-F238E27FC236}">
-                <a16:creationId xmlns:a16="http://schemas.microsoft.com/office/drawing/2014/main" id="{67A8BC6A-D1FB-5D5E-F335-368C9AC742C1}"/>
+                <a16:creationId xmlns:a16="http://schemas.microsoft.com/office/drawing/2014/main" id="{F37BB2A6-BF16-9B08-08BA-DC9ABBC9C8DB}"/>
               </a:ext>
             </a:extLst>
           </p:cNvPr>
@@ -6384,7 +6626,7 @@
           <p:cNvPr id="2" name="TextBox 1">
             <a:extLst>
               <a:ext uri="{FF2B5EF4-FFF2-40B4-BE49-F238E27FC236}">
-                <a16:creationId xmlns:a16="http://schemas.microsoft.com/office/drawing/2014/main" id="{6FEBDB26-6BE4-FDD1-0A01-880F943359F5}"/>
+                <a16:creationId xmlns:a16="http://schemas.microsoft.com/office/drawing/2014/main" id="{04E8E50E-70CE-0C67-BEFD-5DB460BA6A62}"/>
               </a:ext>
             </a:extLst>
           </p:cNvPr>
@@ -6422,10 +6664,10 @@
       </p:sp>
       <p:sp>
         <p:nvSpPr>
-          <p:cNvPr id="4" name="TextBox 3">
-            <a:extLst>
-              <a:ext uri="{FF2B5EF4-FFF2-40B4-BE49-F238E27FC236}">
-                <a16:creationId xmlns:a16="http://schemas.microsoft.com/office/drawing/2014/main" id="{FE5AE08A-01D4-5FE3-CB15-2C26BB4F3C9B}"/>
+          <p:cNvPr id="7" name="TextBox 6">
+            <a:extLst>
+              <a:ext uri="{FF2B5EF4-FFF2-40B4-BE49-F238E27FC236}">
+                <a16:creationId xmlns:a16="http://schemas.microsoft.com/office/drawing/2014/main" id="{687ADB50-CBB3-E406-3A47-7D0EA903ED37}"/>
               </a:ext>
             </a:extLst>
           </p:cNvPr>
@@ -6482,10 +6724,10 @@
       </p:sp>
       <p:sp>
         <p:nvSpPr>
-          <p:cNvPr id="6" name="TextBox 5">
-            <a:extLst>
-              <a:ext uri="{FF2B5EF4-FFF2-40B4-BE49-F238E27FC236}">
-                <a16:creationId xmlns:a16="http://schemas.microsoft.com/office/drawing/2014/main" id="{6F3D0DA5-E2E5-E515-AA17-165F9624A7FA}"/>
+          <p:cNvPr id="8" name="TextBox 7">
+            <a:extLst>
+              <a:ext uri="{FF2B5EF4-FFF2-40B4-BE49-F238E27FC236}">
+                <a16:creationId xmlns:a16="http://schemas.microsoft.com/office/drawing/2014/main" id="{FC411999-1E8A-8CA9-6E02-283B092D3D33}"/>
               </a:ext>
             </a:extLst>
           </p:cNvPr>
@@ -6533,87 +6775,10 @@
       </p:sp>
       <p:sp>
         <p:nvSpPr>
-          <p:cNvPr id="8" name="TextBox 7">
-            <a:extLst>
-              <a:ext uri="{FF2B5EF4-FFF2-40B4-BE49-F238E27FC236}">
-                <a16:creationId xmlns:a16="http://schemas.microsoft.com/office/drawing/2014/main" id="{07F37804-12AF-C717-C3B7-E1C04B1DBC2B}"/>
-              </a:ext>
-            </a:extLst>
-          </p:cNvPr>
-          <p:cNvSpPr txBox="1"/>
-          <p:nvPr/>
-        </p:nvSpPr>
-        <p:spPr>
-          <a:xfrm>
-            <a:off x="558943" y="4755944"/>
-            <a:ext cx="4247536" cy="1015663"/>
-          </a:xfrm>
-          <a:prstGeom prst="rect">
-            <a:avLst/>
-          </a:prstGeom>
-          <a:noFill/>
-        </p:spPr>
-        <p:txBody>
-          <a:bodyPr wrap="square" rtlCol="0">
-            <a:spAutoFit/>
-          </a:bodyPr>
-          <a:lstStyle/>
-          <a:p>
-            <a:pPr algn="r"/>
-            <a:r>
-              <a:rPr lang="en-US" sz="3000" dirty="0">
-                <a:latin typeface="Times New Roman" panose="02020603050405020304" pitchFamily="18" charset="0"/>
-                <a:cs typeface="Times New Roman" panose="02020603050405020304" pitchFamily="18" charset="0"/>
-              </a:rPr>
-              <a:t>e.g., market data multicast in financial exchanges</a:t>
-            </a:r>
-          </a:p>
-        </p:txBody>
-      </p:sp>
-      <p:sp>
-        <p:nvSpPr>
           <p:cNvPr id="9" name="TextBox 8">
             <a:extLst>
               <a:ext uri="{FF2B5EF4-FFF2-40B4-BE49-F238E27FC236}">
-                <a16:creationId xmlns:a16="http://schemas.microsoft.com/office/drawing/2014/main" id="{33BF1DE6-DDD3-1E07-36B2-A6227D23FF9E}"/>
-              </a:ext>
-            </a:extLst>
-          </p:cNvPr>
-          <p:cNvSpPr txBox="1"/>
-          <p:nvPr/>
-        </p:nvSpPr>
-        <p:spPr>
-          <a:xfrm>
-            <a:off x="6567336" y="4755944"/>
-            <a:ext cx="5065721" cy="1015663"/>
-          </a:xfrm>
-          <a:prstGeom prst="rect">
-            <a:avLst/>
-          </a:prstGeom>
-          <a:noFill/>
-        </p:spPr>
-        <p:txBody>
-          <a:bodyPr wrap="square" rtlCol="0">
-            <a:spAutoFit/>
-          </a:bodyPr>
-          <a:lstStyle/>
-          <a:p>
-            <a:r>
-              <a:rPr lang="en-US" sz="3000" dirty="0">
-                <a:latin typeface="Times New Roman" panose="02020603050405020304" pitchFamily="18" charset="0"/>
-                <a:cs typeface="Times New Roman" panose="02020603050405020304" pitchFamily="18" charset="0"/>
-              </a:rPr>
-              <a:t>e.g., traders submitting orders to a financial exchange server</a:t>
-            </a:r>
-          </a:p>
-        </p:txBody>
-      </p:sp>
-      <p:sp>
-        <p:nvSpPr>
-          <p:cNvPr id="10" name="TextBox 9">
-            <a:extLst>
-              <a:ext uri="{FF2B5EF4-FFF2-40B4-BE49-F238E27FC236}">
-                <a16:creationId xmlns:a16="http://schemas.microsoft.com/office/drawing/2014/main" id="{CEF57110-9383-C7A7-E2DF-8D0B3E533F7F}"/>
+                <a16:creationId xmlns:a16="http://schemas.microsoft.com/office/drawing/2014/main" id="{96465F3E-4C19-045E-905D-35D7D9029867}"/>
               </a:ext>
             </a:extLst>
           </p:cNvPr>
@@ -6671,10 +6836,10 @@
       </p:sp>
       <p:sp>
         <p:nvSpPr>
-          <p:cNvPr id="11" name="TextBox 10">
-            <a:extLst>
-              <a:ext uri="{FF2B5EF4-FFF2-40B4-BE49-F238E27FC236}">
-                <a16:creationId xmlns:a16="http://schemas.microsoft.com/office/drawing/2014/main" id="{02675D14-DB97-4FA8-755C-10F1F7DC3754}"/>
+          <p:cNvPr id="10" name="TextBox 9">
+            <a:extLst>
+              <a:ext uri="{FF2B5EF4-FFF2-40B4-BE49-F238E27FC236}">
+                <a16:creationId xmlns:a16="http://schemas.microsoft.com/office/drawing/2014/main" id="{FB4BED7D-4B5E-952B-86A8-299F5F8EA4E3}"/>
               </a:ext>
             </a:extLst>
           </p:cNvPr>
@@ -6710,10 +6875,10 @@
       </p:sp>
       <p:sp>
         <p:nvSpPr>
-          <p:cNvPr id="13" name="Rectangle 12">
-            <a:extLst>
-              <a:ext uri="{FF2B5EF4-FFF2-40B4-BE49-F238E27FC236}">
-                <a16:creationId xmlns:a16="http://schemas.microsoft.com/office/drawing/2014/main" id="{9B93914B-4D43-3516-76BA-6B9D454F0297}"/>
+          <p:cNvPr id="11" name="Rectangle 10">
+            <a:extLst>
+              <a:ext uri="{FF2B5EF4-FFF2-40B4-BE49-F238E27FC236}">
+                <a16:creationId xmlns:a16="http://schemas.microsoft.com/office/drawing/2014/main" id="{0B99D3DB-B510-22AB-1991-A1915A4878C7}"/>
               </a:ext>
             </a:extLst>
           </p:cNvPr>
@@ -6975,6 +7140,898 @@
     </p:spTree>
     <p:extLst>
       <p:ext uri="{BB962C8B-B14F-4D97-AF65-F5344CB8AC3E}">
+        <p14:creationId xmlns:p14="http://schemas.microsoft.com/office/powerpoint/2010/main" val="956749138"/>
+      </p:ext>
+    </p:extLst>
+  </p:cSld>
+  <p:clrMapOvr>
+    <a:masterClrMapping/>
+  </p:clrMapOvr>
+  <mc:AlternateContent xmlns:mc="http://schemas.openxmlformats.org/markup-compatibility/2006" xmlns:p159="http://schemas.microsoft.com/office/powerpoint/2015/09/main">
+    <mc:Choice Requires="p159">
+      <p:transition spd="med">
+        <p159:morph option="byWord"/>
+      </p:transition>
+    </mc:Choice>
+    <mc:Fallback xmlns="">
+      <p:transition spd="med">
+        <p:fade/>
+      </p:transition>
+    </mc:Fallback>
+  </mc:AlternateContent>
+  <p:timing>
+    <p:tnLst>
+      <p:par>
+        <p:cTn id="1" dur="indefinite" restart="never" nodeType="tmRoot">
+          <p:childTnLst>
+            <p:seq concurrent="1" nextAc="seek">
+              <p:cTn id="2" dur="indefinite" nodeType="mainSeq">
+                <p:childTnLst>
+                  <p:par>
+                    <p:cTn id="3" fill="hold">
+                      <p:stCondLst>
+                        <p:cond delay="indefinite"/>
+                      </p:stCondLst>
+                      <p:childTnLst>
+                        <p:par>
+                          <p:cTn id="4" fill="hold">
+                            <p:stCondLst>
+                              <p:cond delay="0"/>
+                            </p:stCondLst>
+                            <p:childTnLst>
+                              <p:par>
+                                <p:cTn id="5" presetID="1" presetClass="entr" presetSubtype="0" fill="hold" grpId="0" nodeType="clickEffect">
+                                  <p:stCondLst>
+                                    <p:cond delay="0"/>
+                                  </p:stCondLst>
+                                  <p:childTnLst>
+                                    <p:set>
+                                      <p:cBhvr>
+                                        <p:cTn id="6" dur="1" fill="hold">
+                                          <p:stCondLst>
+                                            <p:cond delay="0"/>
+                                          </p:stCondLst>
+                                        </p:cTn>
+                                        <p:tgtEl>
+                                          <p:spTgt spid="8"/>
+                                        </p:tgtEl>
+                                        <p:attrNameLst>
+                                          <p:attrName>style.visibility</p:attrName>
+                                        </p:attrNameLst>
+                                      </p:cBhvr>
+                                      <p:to>
+                                        <p:strVal val="visible"/>
+                                      </p:to>
+                                    </p:set>
+                                  </p:childTnLst>
+                                </p:cTn>
+                              </p:par>
+                            </p:childTnLst>
+                          </p:cTn>
+                        </p:par>
+                      </p:childTnLst>
+                    </p:cTn>
+                  </p:par>
+                </p:childTnLst>
+              </p:cTn>
+              <p:prevCondLst>
+                <p:cond evt="onPrev" delay="0">
+                  <p:tgtEl>
+                    <p:sldTgt/>
+                  </p:tgtEl>
+                </p:cond>
+              </p:prevCondLst>
+              <p:nextCondLst>
+                <p:cond evt="onNext" delay="0">
+                  <p:tgtEl>
+                    <p:sldTgt/>
+                  </p:tgtEl>
+                </p:cond>
+              </p:nextCondLst>
+            </p:seq>
+          </p:childTnLst>
+        </p:cTn>
+      </p:par>
+    </p:tnLst>
+    <p:bldLst>
+      <p:bldP spid="8" grpId="0"/>
+    </p:bldLst>
+  </p:timing>
+</p:sld>
+</file>
+
+<file path=ppt/slides/slide12.xml><?xml version="1.0" encoding="utf-8"?>
+<p:sld xmlns:a="http://schemas.openxmlformats.org/drawingml/2006/main" xmlns:r="http://schemas.openxmlformats.org/officeDocument/2006/relationships" xmlns:p="http://schemas.openxmlformats.org/presentationml/2006/main">
+  <p:cSld>
+    <p:spTree>
+      <p:nvGrpSpPr>
+        <p:cNvPr id="1" name="">
+          <a:extLst>
+            <a:ext uri="{FF2B5EF4-FFF2-40B4-BE49-F238E27FC236}">
+              <a16:creationId xmlns:a16="http://schemas.microsoft.com/office/drawing/2014/main" id="{903B1B1B-7C7F-0D23-FC0A-0191D992B124}"/>
+            </a:ext>
+          </a:extLst>
+        </p:cNvPr>
+        <p:cNvGrpSpPr/>
+        <p:nvPr/>
+      </p:nvGrpSpPr>
+      <p:grpSpPr>
+        <a:xfrm>
+          <a:off x="0" y="0"/>
+          <a:ext cx="0" cy="0"/>
+          <a:chOff x="0" y="0"/>
+          <a:chExt cx="0" cy="0"/>
+        </a:xfrm>
+      </p:grpSpPr>
+      <p:sp>
+        <p:nvSpPr>
+          <p:cNvPr id="17" name="Rectangle 16">
+            <a:extLst>
+              <a:ext uri="{FF2B5EF4-FFF2-40B4-BE49-F238E27FC236}">
+                <a16:creationId xmlns:a16="http://schemas.microsoft.com/office/drawing/2014/main" id="{B3D9B647-F77F-7408-1713-249CDF5F30EE}"/>
+              </a:ext>
+            </a:extLst>
+          </p:cNvPr>
+          <p:cNvSpPr/>
+          <p:nvPr/>
+        </p:nvSpPr>
+        <p:spPr>
+          <a:xfrm rot="16200000">
+            <a:off x="2522582" y="-387076"/>
+            <a:ext cx="68673" cy="3246390"/>
+          </a:xfrm>
+          <a:prstGeom prst="rect">
+            <a:avLst/>
+          </a:prstGeom>
+          <a:solidFill>
+            <a:srgbClr val="FF0000"/>
+          </a:solidFill>
+          <a:ln>
+            <a:solidFill>
+              <a:srgbClr val="FF0000"/>
+            </a:solidFill>
+          </a:ln>
+        </p:spPr>
+        <p:style>
+          <a:lnRef idx="2">
+            <a:schemeClr val="accent1">
+              <a:shade val="15000"/>
+            </a:schemeClr>
+          </a:lnRef>
+          <a:fillRef idx="1">
+            <a:schemeClr val="accent1"/>
+          </a:fillRef>
+          <a:effectRef idx="0">
+            <a:schemeClr val="accent1"/>
+          </a:effectRef>
+          <a:fontRef idx="minor">
+            <a:schemeClr val="lt1"/>
+          </a:fontRef>
+        </p:style>
+        <p:txBody>
+          <a:bodyPr rtlCol="0" anchor="ctr"/>
+          <a:lstStyle/>
+          <a:p>
+            <a:pPr algn="ctr"/>
+            <a:endParaRPr lang="en-US">
+              <a:latin typeface="Times New Roman" panose="02020603050405020304" pitchFamily="18" charset="0"/>
+              <a:cs typeface="Times New Roman" panose="02020603050405020304" pitchFamily="18" charset="0"/>
+            </a:endParaRPr>
+          </a:p>
+        </p:txBody>
+      </p:sp>
+      <p:sp>
+        <p:nvSpPr>
+          <p:cNvPr id="18" name="Rectangle 17">
+            <a:extLst>
+              <a:ext uri="{FF2B5EF4-FFF2-40B4-BE49-F238E27FC236}">
+                <a16:creationId xmlns:a16="http://schemas.microsoft.com/office/drawing/2014/main" id="{62A96CA1-550D-FF52-7A6C-87D4B134651B}"/>
+              </a:ext>
+            </a:extLst>
+          </p:cNvPr>
+          <p:cNvSpPr/>
+          <p:nvPr/>
+        </p:nvSpPr>
+        <p:spPr>
+          <a:xfrm rot="16200000">
+            <a:off x="2522581" y="-318404"/>
+            <a:ext cx="68674" cy="3246390"/>
+          </a:xfrm>
+          <a:prstGeom prst="rect">
+            <a:avLst/>
+          </a:prstGeom>
+          <a:solidFill>
+            <a:srgbClr val="7030A0"/>
+          </a:solidFill>
+          <a:ln>
+            <a:solidFill>
+              <a:srgbClr val="7030A0"/>
+            </a:solidFill>
+          </a:ln>
+        </p:spPr>
+        <p:style>
+          <a:lnRef idx="2">
+            <a:schemeClr val="accent1">
+              <a:shade val="15000"/>
+            </a:schemeClr>
+          </a:lnRef>
+          <a:fillRef idx="1">
+            <a:schemeClr val="accent1"/>
+          </a:fillRef>
+          <a:effectRef idx="0">
+            <a:schemeClr val="accent1"/>
+          </a:effectRef>
+          <a:fontRef idx="minor">
+            <a:schemeClr val="lt1"/>
+          </a:fontRef>
+        </p:style>
+        <p:txBody>
+          <a:bodyPr rtlCol="0" anchor="ctr"/>
+          <a:lstStyle/>
+          <a:p>
+            <a:pPr algn="ctr"/>
+            <a:endParaRPr lang="en-US">
+              <a:latin typeface="Times New Roman" panose="02020603050405020304" pitchFamily="18" charset="0"/>
+              <a:cs typeface="Times New Roman" panose="02020603050405020304" pitchFamily="18" charset="0"/>
+            </a:endParaRPr>
+          </a:p>
+        </p:txBody>
+      </p:sp>
+      <p:sp>
+        <p:nvSpPr>
+          <p:cNvPr id="12" name="TextBox 11">
+            <a:extLst>
+              <a:ext uri="{FF2B5EF4-FFF2-40B4-BE49-F238E27FC236}">
+                <a16:creationId xmlns:a16="http://schemas.microsoft.com/office/drawing/2014/main" id="{67A8BC6A-D1FB-5D5E-F335-368C9AC742C1}"/>
+              </a:ext>
+            </a:extLst>
+          </p:cNvPr>
+          <p:cNvSpPr txBox="1"/>
+          <p:nvPr/>
+        </p:nvSpPr>
+        <p:spPr>
+          <a:xfrm>
+            <a:off x="772906" y="405121"/>
+            <a:ext cx="5095723" cy="830997"/>
+          </a:xfrm>
+          <a:prstGeom prst="rect">
+            <a:avLst/>
+          </a:prstGeom>
+          <a:noFill/>
+        </p:spPr>
+        <p:txBody>
+          <a:bodyPr wrap="square" rtlCol="0">
+            <a:spAutoFit/>
+          </a:bodyPr>
+          <a:lstStyle/>
+          <a:p>
+            <a:r>
+              <a:rPr lang="en-US" sz="4800" dirty="0">
+                <a:latin typeface="Times New Roman" panose="02020603050405020304" pitchFamily="18" charset="0"/>
+                <a:cs typeface="Times New Roman" panose="02020603050405020304" pitchFamily="18" charset="0"/>
+              </a:rPr>
+              <a:t>c</a:t>
+            </a:r>
+            <a:r>
+              <a:rPr lang="en-US" sz="3000" dirty="0">
+                <a:latin typeface="Times New Roman" panose="02020603050405020304" pitchFamily="18" charset="0"/>
+                <a:cs typeface="Times New Roman" panose="02020603050405020304" pitchFamily="18" charset="0"/>
+              </a:rPr>
+              <a:t>ompetitive </a:t>
+            </a:r>
+            <a:r>
+              <a:rPr lang="en-US" sz="4800" dirty="0">
+                <a:latin typeface="Times New Roman" panose="02020603050405020304" pitchFamily="18" charset="0"/>
+                <a:cs typeface="Times New Roman" panose="02020603050405020304" pitchFamily="18" charset="0"/>
+              </a:rPr>
+              <a:t>s</a:t>
+            </a:r>
+            <a:r>
+              <a:rPr lang="en-US" sz="3000" dirty="0">
+                <a:latin typeface="Times New Roman" panose="02020603050405020304" pitchFamily="18" charset="0"/>
+                <a:cs typeface="Times New Roman" panose="02020603050405020304" pitchFamily="18" charset="0"/>
+              </a:rPr>
+              <a:t>ystems</a:t>
+            </a:r>
+          </a:p>
+        </p:txBody>
+      </p:sp>
+      <p:sp>
+        <p:nvSpPr>
+          <p:cNvPr id="2" name="TextBox 1">
+            <a:extLst>
+              <a:ext uri="{FF2B5EF4-FFF2-40B4-BE49-F238E27FC236}">
+                <a16:creationId xmlns:a16="http://schemas.microsoft.com/office/drawing/2014/main" id="{6FEBDB26-6BE4-FDD1-0A01-880F943359F5}"/>
+              </a:ext>
+            </a:extLst>
+          </p:cNvPr>
+          <p:cNvSpPr txBox="1"/>
+          <p:nvPr/>
+        </p:nvSpPr>
+        <p:spPr>
+          <a:xfrm>
+            <a:off x="4806479" y="716456"/>
+            <a:ext cx="6410817" cy="553998"/>
+          </a:xfrm>
+          <a:prstGeom prst="rect">
+            <a:avLst/>
+          </a:prstGeom>
+          <a:noFill/>
+        </p:spPr>
+        <p:txBody>
+          <a:bodyPr wrap="square" rtlCol="0">
+            <a:spAutoFit/>
+          </a:bodyPr>
+          <a:lstStyle/>
+          <a:p>
+            <a:r>
+              <a:rPr lang="en-US" sz="3000" dirty="0">
+                <a:solidFill>
+                  <a:srgbClr val="7030A0"/>
+                </a:solidFill>
+                <a:latin typeface="Times New Roman" panose="02020603050405020304" pitchFamily="18" charset="0"/>
+                <a:cs typeface="Times New Roman" panose="02020603050405020304" pitchFamily="18" charset="0"/>
+              </a:rPr>
+              <a:t>Two Common Communication Patterns</a:t>
+            </a:r>
+          </a:p>
+        </p:txBody>
+      </p:sp>
+      <p:sp>
+        <p:nvSpPr>
+          <p:cNvPr id="4" name="TextBox 3">
+            <a:extLst>
+              <a:ext uri="{FF2B5EF4-FFF2-40B4-BE49-F238E27FC236}">
+                <a16:creationId xmlns:a16="http://schemas.microsoft.com/office/drawing/2014/main" id="{FE5AE08A-01D4-5FE3-CB15-2C26BB4F3C9B}"/>
+              </a:ext>
+            </a:extLst>
+          </p:cNvPr>
+          <p:cNvSpPr txBox="1"/>
+          <p:nvPr/>
+        </p:nvSpPr>
+        <p:spPr>
+          <a:xfrm>
+            <a:off x="6615108" y="2220094"/>
+            <a:ext cx="2830628" cy="1015663"/>
+          </a:xfrm>
+          <a:prstGeom prst="rect">
+            <a:avLst/>
+          </a:prstGeom>
+          <a:noFill/>
+        </p:spPr>
+        <p:txBody>
+          <a:bodyPr wrap="square" rtlCol="0">
+            <a:spAutoFit/>
+          </a:bodyPr>
+          <a:lstStyle/>
+          <a:p>
+            <a:r>
+              <a:rPr lang="en-US" sz="3000" dirty="0">
+                <a:solidFill>
+                  <a:srgbClr val="7030A0"/>
+                </a:solidFill>
+                <a:latin typeface="Times New Roman" panose="02020603050405020304" pitchFamily="18" charset="0"/>
+                <a:cs typeface="Times New Roman" panose="02020603050405020304" pitchFamily="18" charset="0"/>
+              </a:rPr>
+              <a:t>Inbound</a:t>
+            </a:r>
+            <a:br>
+              <a:rPr lang="en-US" sz="3000" dirty="0">
+                <a:solidFill>
+                  <a:srgbClr val="7030A0"/>
+                </a:solidFill>
+                <a:latin typeface="Times New Roman" panose="02020603050405020304" pitchFamily="18" charset="0"/>
+                <a:cs typeface="Times New Roman" panose="02020603050405020304" pitchFamily="18" charset="0"/>
+              </a:rPr>
+            </a:br>
+            <a:r>
+              <a:rPr lang="en-US" sz="3000" dirty="0">
+                <a:solidFill>
+                  <a:srgbClr val="7030A0"/>
+                </a:solidFill>
+                <a:latin typeface="Times New Roman" panose="02020603050405020304" pitchFamily="18" charset="0"/>
+                <a:cs typeface="Times New Roman" panose="02020603050405020304" pitchFamily="18" charset="0"/>
+              </a:rPr>
+              <a:t>Communication</a:t>
+            </a:r>
+          </a:p>
+        </p:txBody>
+      </p:sp>
+      <p:sp>
+        <p:nvSpPr>
+          <p:cNvPr id="6" name="TextBox 5">
+            <a:extLst>
+              <a:ext uri="{FF2B5EF4-FFF2-40B4-BE49-F238E27FC236}">
+                <a16:creationId xmlns:a16="http://schemas.microsoft.com/office/drawing/2014/main" id="{6F3D0DA5-E2E5-E515-AA17-165F9624A7FA}"/>
+              </a:ext>
+            </a:extLst>
+          </p:cNvPr>
+          <p:cNvSpPr txBox="1"/>
+          <p:nvPr/>
+        </p:nvSpPr>
+        <p:spPr>
+          <a:xfrm>
+            <a:off x="6615107" y="3218936"/>
+            <a:ext cx="2587489" cy="1477328"/>
+          </a:xfrm>
+          <a:prstGeom prst="rect">
+            <a:avLst/>
+          </a:prstGeom>
+          <a:noFill/>
+        </p:spPr>
+        <p:txBody>
+          <a:bodyPr wrap="square" rtlCol="0">
+            <a:spAutoFit/>
+          </a:bodyPr>
+          <a:lstStyle/>
+          <a:p>
+            <a:r>
+              <a:rPr lang="en-US" sz="3000" dirty="0">
+                <a:latin typeface="Times New Roman" panose="02020603050405020304" pitchFamily="18" charset="0"/>
+                <a:cs typeface="Times New Roman" panose="02020603050405020304" pitchFamily="18" charset="0"/>
+              </a:rPr>
+              <a:t>Unicasts </a:t>
+            </a:r>
+            <a:br>
+              <a:rPr lang="en-US" sz="3000" dirty="0">
+                <a:latin typeface="Times New Roman" panose="02020603050405020304" pitchFamily="18" charset="0"/>
+                <a:cs typeface="Times New Roman" panose="02020603050405020304" pitchFamily="18" charset="0"/>
+              </a:rPr>
+            </a:br>
+            <a:r>
+              <a:rPr lang="en-US" sz="3000" dirty="0">
+                <a:latin typeface="Times New Roman" panose="02020603050405020304" pitchFamily="18" charset="0"/>
+                <a:cs typeface="Times New Roman" panose="02020603050405020304" pitchFamily="18" charset="0"/>
+              </a:rPr>
+              <a:t>from machines to server</a:t>
+            </a:r>
+          </a:p>
+        </p:txBody>
+      </p:sp>
+      <p:sp>
+        <p:nvSpPr>
+          <p:cNvPr id="8" name="TextBox 7">
+            <a:extLst>
+              <a:ext uri="{FF2B5EF4-FFF2-40B4-BE49-F238E27FC236}">
+                <a16:creationId xmlns:a16="http://schemas.microsoft.com/office/drawing/2014/main" id="{07F37804-12AF-C717-C3B7-E1C04B1DBC2B}"/>
+              </a:ext>
+            </a:extLst>
+          </p:cNvPr>
+          <p:cNvSpPr txBox="1"/>
+          <p:nvPr/>
+        </p:nvSpPr>
+        <p:spPr>
+          <a:xfrm>
+            <a:off x="558943" y="4755944"/>
+            <a:ext cx="4247536" cy="1015663"/>
+          </a:xfrm>
+          <a:prstGeom prst="rect">
+            <a:avLst/>
+          </a:prstGeom>
+          <a:noFill/>
+        </p:spPr>
+        <p:txBody>
+          <a:bodyPr wrap="square" rtlCol="0">
+            <a:spAutoFit/>
+          </a:bodyPr>
+          <a:lstStyle/>
+          <a:p>
+            <a:pPr algn="r"/>
+            <a:r>
+              <a:rPr lang="en-US" sz="3000" dirty="0">
+                <a:latin typeface="Times New Roman" panose="02020603050405020304" pitchFamily="18" charset="0"/>
+                <a:cs typeface="Times New Roman" panose="02020603050405020304" pitchFamily="18" charset="0"/>
+              </a:rPr>
+              <a:t>e.g., market data multicast in financial exchanges</a:t>
+            </a:r>
+          </a:p>
+        </p:txBody>
+      </p:sp>
+      <p:sp>
+        <p:nvSpPr>
+          <p:cNvPr id="9" name="TextBox 8">
+            <a:extLst>
+              <a:ext uri="{FF2B5EF4-FFF2-40B4-BE49-F238E27FC236}">
+                <a16:creationId xmlns:a16="http://schemas.microsoft.com/office/drawing/2014/main" id="{33BF1DE6-DDD3-1E07-36B2-A6227D23FF9E}"/>
+              </a:ext>
+            </a:extLst>
+          </p:cNvPr>
+          <p:cNvSpPr txBox="1"/>
+          <p:nvPr/>
+        </p:nvSpPr>
+        <p:spPr>
+          <a:xfrm>
+            <a:off x="6567336" y="4755944"/>
+            <a:ext cx="5065721" cy="1015663"/>
+          </a:xfrm>
+          <a:prstGeom prst="rect">
+            <a:avLst/>
+          </a:prstGeom>
+          <a:noFill/>
+        </p:spPr>
+        <p:txBody>
+          <a:bodyPr wrap="square" rtlCol="0">
+            <a:spAutoFit/>
+          </a:bodyPr>
+          <a:lstStyle/>
+          <a:p>
+            <a:r>
+              <a:rPr lang="en-US" sz="3000" dirty="0">
+                <a:latin typeface="Times New Roman" panose="02020603050405020304" pitchFamily="18" charset="0"/>
+                <a:cs typeface="Times New Roman" panose="02020603050405020304" pitchFamily="18" charset="0"/>
+              </a:rPr>
+              <a:t>e.g., traders submitting orders to a financial exchange server</a:t>
+            </a:r>
+          </a:p>
+        </p:txBody>
+      </p:sp>
+      <p:sp>
+        <p:nvSpPr>
+          <p:cNvPr id="10" name="TextBox 9">
+            <a:extLst>
+              <a:ext uri="{FF2B5EF4-FFF2-40B4-BE49-F238E27FC236}">
+                <a16:creationId xmlns:a16="http://schemas.microsoft.com/office/drawing/2014/main" id="{CEF57110-9383-C7A7-E2DF-8D0B3E533F7F}"/>
+              </a:ext>
+            </a:extLst>
+          </p:cNvPr>
+          <p:cNvSpPr txBox="1"/>
+          <p:nvPr/>
+        </p:nvSpPr>
+        <p:spPr>
+          <a:xfrm>
+            <a:off x="2124432" y="2220094"/>
+            <a:ext cx="2830628" cy="1015663"/>
+          </a:xfrm>
+          <a:prstGeom prst="rect">
+            <a:avLst/>
+          </a:prstGeom>
+          <a:noFill/>
+        </p:spPr>
+        <p:txBody>
+          <a:bodyPr wrap="square" rtlCol="0">
+            <a:spAutoFit/>
+          </a:bodyPr>
+          <a:lstStyle/>
+          <a:p>
+            <a:pPr algn="r"/>
+            <a:r>
+              <a:rPr lang="en-US" sz="3000" dirty="0">
+                <a:solidFill>
+                  <a:srgbClr val="7030A0"/>
+                </a:solidFill>
+                <a:latin typeface="Times New Roman" panose="02020603050405020304" pitchFamily="18" charset="0"/>
+                <a:cs typeface="Times New Roman" panose="02020603050405020304" pitchFamily="18" charset="0"/>
+              </a:rPr>
+              <a:t>Outbound</a:t>
+            </a:r>
+            <a:br>
+              <a:rPr lang="en-US" sz="3000" dirty="0">
+                <a:solidFill>
+                  <a:srgbClr val="7030A0"/>
+                </a:solidFill>
+                <a:latin typeface="Times New Roman" panose="02020603050405020304" pitchFamily="18" charset="0"/>
+                <a:cs typeface="Times New Roman" panose="02020603050405020304" pitchFamily="18" charset="0"/>
+              </a:rPr>
+            </a:br>
+            <a:r>
+              <a:rPr lang="en-US" sz="3000" dirty="0">
+                <a:solidFill>
+                  <a:srgbClr val="7030A0"/>
+                </a:solidFill>
+                <a:latin typeface="Times New Roman" panose="02020603050405020304" pitchFamily="18" charset="0"/>
+                <a:cs typeface="Times New Roman" panose="02020603050405020304" pitchFamily="18" charset="0"/>
+              </a:rPr>
+              <a:t>Communication</a:t>
+            </a:r>
+          </a:p>
+        </p:txBody>
+      </p:sp>
+      <p:sp>
+        <p:nvSpPr>
+          <p:cNvPr id="11" name="TextBox 10">
+            <a:extLst>
+              <a:ext uri="{FF2B5EF4-FFF2-40B4-BE49-F238E27FC236}">
+                <a16:creationId xmlns:a16="http://schemas.microsoft.com/office/drawing/2014/main" id="{02675D14-DB97-4FA8-755C-10F1F7DC3754}"/>
+              </a:ext>
+            </a:extLst>
+          </p:cNvPr>
+          <p:cNvSpPr txBox="1"/>
+          <p:nvPr/>
+        </p:nvSpPr>
+        <p:spPr>
+          <a:xfrm>
+            <a:off x="2622846" y="3235757"/>
+            <a:ext cx="2249561" cy="1477328"/>
+          </a:xfrm>
+          <a:prstGeom prst="rect">
+            <a:avLst/>
+          </a:prstGeom>
+          <a:noFill/>
+        </p:spPr>
+        <p:txBody>
+          <a:bodyPr wrap="square" rtlCol="0">
+            <a:spAutoFit/>
+          </a:bodyPr>
+          <a:lstStyle/>
+          <a:p>
+            <a:pPr algn="r"/>
+            <a:r>
+              <a:rPr lang="en-US" sz="3000" dirty="0">
+                <a:latin typeface="Times New Roman" panose="02020603050405020304" pitchFamily="18" charset="0"/>
+                <a:cs typeface="Times New Roman" panose="02020603050405020304" pitchFamily="18" charset="0"/>
+              </a:rPr>
+              <a:t>Multicast from server to machines</a:t>
+            </a:r>
+          </a:p>
+        </p:txBody>
+      </p:sp>
+      <p:sp>
+        <p:nvSpPr>
+          <p:cNvPr id="13" name="Rectangle 12">
+            <a:extLst>
+              <a:ext uri="{FF2B5EF4-FFF2-40B4-BE49-F238E27FC236}">
+                <a16:creationId xmlns:a16="http://schemas.microsoft.com/office/drawing/2014/main" id="{9B93914B-4D43-3516-76BA-6B9D454F0297}"/>
+              </a:ext>
+            </a:extLst>
+          </p:cNvPr>
+          <p:cNvSpPr/>
+          <p:nvPr/>
+        </p:nvSpPr>
+        <p:spPr>
+          <a:xfrm>
+            <a:off x="5733022" y="2774092"/>
+            <a:ext cx="45719" cy="2492991"/>
+          </a:xfrm>
+          <a:custGeom>
+            <a:avLst/>
+            <a:gdLst>
+              <a:gd name="csX0" fmla="*/ 0 w 45719"/>
+              <a:gd name="csY0" fmla="*/ 0 h 2492991"/>
+              <a:gd name="csX1" fmla="*/ 45719 w 45719"/>
+              <a:gd name="csY1" fmla="*/ 0 h 2492991"/>
+              <a:gd name="csX2" fmla="*/ 45719 w 45719"/>
+              <a:gd name="csY2" fmla="*/ 498598 h 2492991"/>
+              <a:gd name="csX3" fmla="*/ 45719 w 45719"/>
+              <a:gd name="csY3" fmla="*/ 1047056 h 2492991"/>
+              <a:gd name="csX4" fmla="*/ 45719 w 45719"/>
+              <a:gd name="csY4" fmla="*/ 1545654 h 2492991"/>
+              <a:gd name="csX5" fmla="*/ 45719 w 45719"/>
+              <a:gd name="csY5" fmla="*/ 1969463 h 2492991"/>
+              <a:gd name="csX6" fmla="*/ 45719 w 45719"/>
+              <a:gd name="csY6" fmla="*/ 2492991 h 2492991"/>
+              <a:gd name="csX7" fmla="*/ 0 w 45719"/>
+              <a:gd name="csY7" fmla="*/ 2492991 h 2492991"/>
+              <a:gd name="csX8" fmla="*/ 0 w 45719"/>
+              <a:gd name="csY8" fmla="*/ 1944533 h 2492991"/>
+              <a:gd name="csX9" fmla="*/ 0 w 45719"/>
+              <a:gd name="csY9" fmla="*/ 1421005 h 2492991"/>
+              <a:gd name="csX10" fmla="*/ 0 w 45719"/>
+              <a:gd name="csY10" fmla="*/ 922407 h 2492991"/>
+              <a:gd name="csX11" fmla="*/ 0 w 45719"/>
+              <a:gd name="csY11" fmla="*/ 0 h 2492991"/>
+            </a:gdLst>
+            <a:ahLst/>
+            <a:cxnLst>
+              <a:cxn ang="0">
+                <a:pos x="csX0" y="csY0"/>
+              </a:cxn>
+              <a:cxn ang="0">
+                <a:pos x="csX1" y="csY1"/>
+              </a:cxn>
+              <a:cxn ang="0">
+                <a:pos x="csX2" y="csY2"/>
+              </a:cxn>
+              <a:cxn ang="0">
+                <a:pos x="csX3" y="csY3"/>
+              </a:cxn>
+              <a:cxn ang="0">
+                <a:pos x="csX4" y="csY4"/>
+              </a:cxn>
+              <a:cxn ang="0">
+                <a:pos x="csX5" y="csY5"/>
+              </a:cxn>
+              <a:cxn ang="0">
+                <a:pos x="csX6" y="csY6"/>
+              </a:cxn>
+              <a:cxn ang="0">
+                <a:pos x="csX7" y="csY7"/>
+              </a:cxn>
+              <a:cxn ang="0">
+                <a:pos x="csX8" y="csY8"/>
+              </a:cxn>
+              <a:cxn ang="0">
+                <a:pos x="csX9" y="csY9"/>
+              </a:cxn>
+              <a:cxn ang="0">
+                <a:pos x="csX10" y="csY10"/>
+              </a:cxn>
+              <a:cxn ang="0">
+                <a:pos x="csX11" y="csY11"/>
+              </a:cxn>
+            </a:cxnLst>
+            <a:rect l="l" t="t" r="r" b="b"/>
+            <a:pathLst>
+              <a:path w="45719" h="2492991" fill="none" extrusionOk="0">
+                <a:moveTo>
+                  <a:pt x="0" y="0"/>
+                </a:moveTo>
+                <a:cubicBezTo>
+                  <a:pt x="15466" y="-3108"/>
+                  <a:pt x="29505" y="2787"/>
+                  <a:pt x="45719" y="0"/>
+                </a:cubicBezTo>
+                <a:cubicBezTo>
+                  <a:pt x="96714" y="244462"/>
+                  <a:pt x="38492" y="292531"/>
+                  <a:pt x="45719" y="498598"/>
+                </a:cubicBezTo>
+                <a:cubicBezTo>
+                  <a:pt x="52946" y="704665"/>
+                  <a:pt x="41215" y="773940"/>
+                  <a:pt x="45719" y="1047056"/>
+                </a:cubicBezTo>
+                <a:cubicBezTo>
+                  <a:pt x="50223" y="1320172"/>
+                  <a:pt x="20442" y="1409127"/>
+                  <a:pt x="45719" y="1545654"/>
+                </a:cubicBezTo>
+                <a:cubicBezTo>
+                  <a:pt x="70996" y="1682181"/>
+                  <a:pt x="37286" y="1837495"/>
+                  <a:pt x="45719" y="1969463"/>
+                </a:cubicBezTo>
+                <a:cubicBezTo>
+                  <a:pt x="54152" y="2101431"/>
+                  <a:pt x="20701" y="2253374"/>
+                  <a:pt x="45719" y="2492991"/>
+                </a:cubicBezTo>
+                <a:cubicBezTo>
+                  <a:pt x="34208" y="2496004"/>
+                  <a:pt x="9588" y="2489496"/>
+                  <a:pt x="0" y="2492991"/>
+                </a:cubicBezTo>
+                <a:cubicBezTo>
+                  <a:pt x="-9781" y="2257546"/>
+                  <a:pt x="17963" y="2141047"/>
+                  <a:pt x="0" y="1944533"/>
+                </a:cubicBezTo>
+                <a:cubicBezTo>
+                  <a:pt x="-17963" y="1748019"/>
+                  <a:pt x="28336" y="1642462"/>
+                  <a:pt x="0" y="1421005"/>
+                </a:cubicBezTo>
+                <a:cubicBezTo>
+                  <a:pt x="-28336" y="1199548"/>
+                  <a:pt x="13584" y="1089980"/>
+                  <a:pt x="0" y="922407"/>
+                </a:cubicBezTo>
+                <a:cubicBezTo>
+                  <a:pt x="-13584" y="754834"/>
+                  <a:pt x="77438" y="239728"/>
+                  <a:pt x="0" y="0"/>
+                </a:cubicBezTo>
+                <a:close/>
+              </a:path>
+              <a:path w="45719" h="2492991" stroke="0" extrusionOk="0">
+                <a:moveTo>
+                  <a:pt x="0" y="0"/>
+                </a:moveTo>
+                <a:cubicBezTo>
+                  <a:pt x="18173" y="-1477"/>
+                  <a:pt x="31455" y="3772"/>
+                  <a:pt x="45719" y="0"/>
+                </a:cubicBezTo>
+                <a:cubicBezTo>
+                  <a:pt x="49078" y="113210"/>
+                  <a:pt x="23101" y="288473"/>
+                  <a:pt x="45719" y="423808"/>
+                </a:cubicBezTo>
+                <a:cubicBezTo>
+                  <a:pt x="68337" y="559143"/>
+                  <a:pt x="-15560" y="770450"/>
+                  <a:pt x="45719" y="972266"/>
+                </a:cubicBezTo>
+                <a:cubicBezTo>
+                  <a:pt x="106998" y="1174082"/>
+                  <a:pt x="-1609" y="1235521"/>
+                  <a:pt x="45719" y="1470865"/>
+                </a:cubicBezTo>
+                <a:cubicBezTo>
+                  <a:pt x="93047" y="1706209"/>
+                  <a:pt x="30494" y="1816253"/>
+                  <a:pt x="45719" y="1919603"/>
+                </a:cubicBezTo>
+                <a:cubicBezTo>
+                  <a:pt x="60944" y="2022953"/>
+                  <a:pt x="28474" y="2341608"/>
+                  <a:pt x="45719" y="2492991"/>
+                </a:cubicBezTo>
+                <a:cubicBezTo>
+                  <a:pt x="22941" y="2494258"/>
+                  <a:pt x="12902" y="2490132"/>
+                  <a:pt x="0" y="2492991"/>
+                </a:cubicBezTo>
+                <a:cubicBezTo>
+                  <a:pt x="-59460" y="2250702"/>
+                  <a:pt x="24665" y="2128448"/>
+                  <a:pt x="0" y="1944533"/>
+                </a:cubicBezTo>
+                <a:cubicBezTo>
+                  <a:pt x="-24665" y="1760618"/>
+                  <a:pt x="21622" y="1582387"/>
+                  <a:pt x="0" y="1396075"/>
+                </a:cubicBezTo>
+                <a:cubicBezTo>
+                  <a:pt x="-21622" y="1209763"/>
+                  <a:pt x="53927" y="1082433"/>
+                  <a:pt x="0" y="922407"/>
+                </a:cubicBezTo>
+                <a:cubicBezTo>
+                  <a:pt x="-53927" y="762381"/>
+                  <a:pt x="37230" y="594554"/>
+                  <a:pt x="0" y="448738"/>
+                </a:cubicBezTo>
+                <a:cubicBezTo>
+                  <a:pt x="-37230" y="302922"/>
+                  <a:pt x="25725" y="182915"/>
+                  <a:pt x="0" y="0"/>
+                </a:cubicBezTo>
+                <a:close/>
+              </a:path>
+            </a:pathLst>
+          </a:custGeom>
+          <a:solidFill>
+            <a:srgbClr val="7030A0"/>
+          </a:solidFill>
+          <a:ln>
+            <a:solidFill>
+              <a:srgbClr val="7030A0"/>
+            </a:solidFill>
+            <a:extLst>
+              <a:ext uri="{C807C97D-BFC1-408E-A445-0C87EB9F89A2}">
+                <ask:lineSketchStyleProps xmlns:ask="http://schemas.microsoft.com/office/drawing/2018/sketchyshapes" sd="1219033472">
+                  <a:prstGeom prst="rect">
+                    <a:avLst/>
+                  </a:prstGeom>
+                  <ask:type>
+                    <ask:lineSketchScribble/>
+                  </ask:type>
+                </ask:lineSketchStyleProps>
+              </a:ext>
+            </a:extLst>
+          </a:ln>
+        </p:spPr>
+        <p:style>
+          <a:lnRef idx="2">
+            <a:schemeClr val="accent1">
+              <a:shade val="15000"/>
+            </a:schemeClr>
+          </a:lnRef>
+          <a:fillRef idx="1">
+            <a:schemeClr val="accent1"/>
+          </a:fillRef>
+          <a:effectRef idx="0">
+            <a:schemeClr val="accent1"/>
+          </a:effectRef>
+          <a:fontRef idx="minor">
+            <a:schemeClr val="lt1"/>
+          </a:fontRef>
+        </p:style>
+        <p:txBody>
+          <a:bodyPr rtlCol="0" anchor="ctr"/>
+          <a:lstStyle/>
+          <a:p>
+            <a:pPr algn="ctr"/>
+            <a:endParaRPr lang="en-US">
+              <a:latin typeface="Times New Roman" panose="02020603050405020304" pitchFamily="18" charset="0"/>
+              <a:cs typeface="Times New Roman" panose="02020603050405020304" pitchFamily="18" charset="0"/>
+            </a:endParaRPr>
+          </a:p>
+        </p:txBody>
+      </p:sp>
+    </p:spTree>
+    <p:extLst>
+      <p:ext uri="{BB962C8B-B14F-4D97-AF65-F5344CB8AC3E}">
         <p14:creationId xmlns:p14="http://schemas.microsoft.com/office/powerpoint/2010/main" val="24909414"/>
       </p:ext>
     </p:extLst>
@@ -6982,13 +8039,1774 @@
   <p:clrMapOvr>
     <a:masterClrMapping/>
   </p:clrMapOvr>
-  <mc:AlternateContent xmlns:mc="http://schemas.openxmlformats.org/markup-compatibility/2006">
-    <mc:Choice xmlns:p159="http://schemas.microsoft.com/office/powerpoint/2015/09/main" Requires="p159">
+  <mc:AlternateContent xmlns:mc="http://schemas.openxmlformats.org/markup-compatibility/2006" xmlns:p159="http://schemas.microsoft.com/office/powerpoint/2015/09/main">
+    <mc:Choice Requires="p159">
       <p:transition spd="med">
         <p159:morph option="byWord"/>
       </p:transition>
     </mc:Choice>
-    <mc:Fallback>
+    <mc:Fallback xmlns="">
+      <p:transition spd="med">
+        <p:fade/>
+      </p:transition>
+    </mc:Fallback>
+  </mc:AlternateContent>
+  <p:timing>
+    <p:tnLst>
+      <p:par>
+        <p:cTn id="1" dur="indefinite" restart="never" nodeType="tmRoot">
+          <p:childTnLst>
+            <p:seq concurrent="1" nextAc="seek">
+              <p:cTn id="2" dur="indefinite" nodeType="mainSeq">
+                <p:childTnLst>
+                  <p:par>
+                    <p:cTn id="3" fill="hold">
+                      <p:stCondLst>
+                        <p:cond delay="indefinite"/>
+                      </p:stCondLst>
+                      <p:childTnLst>
+                        <p:par>
+                          <p:cTn id="4" fill="hold">
+                            <p:stCondLst>
+                              <p:cond delay="0"/>
+                            </p:stCondLst>
+                            <p:childTnLst>
+                              <p:par>
+                                <p:cTn id="5" presetID="1" presetClass="entr" presetSubtype="0" fill="hold" grpId="0" nodeType="clickEffect">
+                                  <p:stCondLst>
+                                    <p:cond delay="0"/>
+                                  </p:stCondLst>
+                                  <p:childTnLst>
+                                    <p:set>
+                                      <p:cBhvr>
+                                        <p:cTn id="6" dur="1" fill="hold">
+                                          <p:stCondLst>
+                                            <p:cond delay="0"/>
+                                          </p:stCondLst>
+                                        </p:cTn>
+                                        <p:tgtEl>
+                                          <p:spTgt spid="9"/>
+                                        </p:tgtEl>
+                                        <p:attrNameLst>
+                                          <p:attrName>style.visibility</p:attrName>
+                                        </p:attrNameLst>
+                                      </p:cBhvr>
+                                      <p:to>
+                                        <p:strVal val="visible"/>
+                                      </p:to>
+                                    </p:set>
+                                  </p:childTnLst>
+                                </p:cTn>
+                              </p:par>
+                            </p:childTnLst>
+                          </p:cTn>
+                        </p:par>
+                      </p:childTnLst>
+                    </p:cTn>
+                  </p:par>
+                </p:childTnLst>
+              </p:cTn>
+              <p:prevCondLst>
+                <p:cond evt="onPrev" delay="0">
+                  <p:tgtEl>
+                    <p:sldTgt/>
+                  </p:tgtEl>
+                </p:cond>
+              </p:prevCondLst>
+              <p:nextCondLst>
+                <p:cond evt="onNext" delay="0">
+                  <p:tgtEl>
+                    <p:sldTgt/>
+                  </p:tgtEl>
+                </p:cond>
+              </p:nextCondLst>
+            </p:seq>
+          </p:childTnLst>
+        </p:cTn>
+      </p:par>
+    </p:tnLst>
+    <p:bldLst>
+      <p:bldP spid="9" grpId="0"/>
+    </p:bldLst>
+  </p:timing>
+</p:sld>
+</file>
+
+<file path=ppt/slides/slide13.xml><?xml version="1.0" encoding="utf-8"?>
+<p:sld xmlns:a="http://schemas.openxmlformats.org/drawingml/2006/main" xmlns:r="http://schemas.openxmlformats.org/officeDocument/2006/relationships" xmlns:p="http://schemas.openxmlformats.org/presentationml/2006/main">
+  <p:cSld>
+    <p:spTree>
+      <p:nvGrpSpPr>
+        <p:cNvPr id="1" name="">
+          <a:extLst>
+            <a:ext uri="{FF2B5EF4-FFF2-40B4-BE49-F238E27FC236}">
+              <a16:creationId xmlns:a16="http://schemas.microsoft.com/office/drawing/2014/main" id="{F63E7AE8-23B2-E205-FD0E-4E29AE466076}"/>
+            </a:ext>
+          </a:extLst>
+        </p:cNvPr>
+        <p:cNvGrpSpPr/>
+        <p:nvPr/>
+      </p:nvGrpSpPr>
+      <p:grpSpPr>
+        <a:xfrm>
+          <a:off x="0" y="0"/>
+          <a:ext cx="0" cy="0"/>
+          <a:chOff x="0" y="0"/>
+          <a:chExt cx="0" cy="0"/>
+        </a:xfrm>
+      </p:grpSpPr>
+      <p:sp>
+        <p:nvSpPr>
+          <p:cNvPr id="17" name="Rectangle 16">
+            <a:extLst>
+              <a:ext uri="{FF2B5EF4-FFF2-40B4-BE49-F238E27FC236}">
+                <a16:creationId xmlns:a16="http://schemas.microsoft.com/office/drawing/2014/main" id="{6026211A-E2D6-417B-F9B3-A095CBA8DC4E}"/>
+              </a:ext>
+            </a:extLst>
+          </p:cNvPr>
+          <p:cNvSpPr/>
+          <p:nvPr/>
+        </p:nvSpPr>
+        <p:spPr>
+          <a:xfrm rot="16200000">
+            <a:off x="2522582" y="-387076"/>
+            <a:ext cx="68673" cy="3246390"/>
+          </a:xfrm>
+          <a:prstGeom prst="rect">
+            <a:avLst/>
+          </a:prstGeom>
+          <a:solidFill>
+            <a:srgbClr val="FF0000"/>
+          </a:solidFill>
+          <a:ln>
+            <a:solidFill>
+              <a:srgbClr val="FF0000"/>
+            </a:solidFill>
+          </a:ln>
+        </p:spPr>
+        <p:style>
+          <a:lnRef idx="2">
+            <a:schemeClr val="accent1">
+              <a:shade val="15000"/>
+            </a:schemeClr>
+          </a:lnRef>
+          <a:fillRef idx="1">
+            <a:schemeClr val="accent1"/>
+          </a:fillRef>
+          <a:effectRef idx="0">
+            <a:schemeClr val="accent1"/>
+          </a:effectRef>
+          <a:fontRef idx="minor">
+            <a:schemeClr val="lt1"/>
+          </a:fontRef>
+        </p:style>
+        <p:txBody>
+          <a:bodyPr rtlCol="0" anchor="ctr"/>
+          <a:lstStyle/>
+          <a:p>
+            <a:pPr algn="ctr"/>
+            <a:endParaRPr lang="en-US">
+              <a:latin typeface="Times New Roman" panose="02020603050405020304" pitchFamily="18" charset="0"/>
+              <a:cs typeface="Times New Roman" panose="02020603050405020304" pitchFamily="18" charset="0"/>
+            </a:endParaRPr>
+          </a:p>
+        </p:txBody>
+      </p:sp>
+      <p:sp>
+        <p:nvSpPr>
+          <p:cNvPr id="18" name="Rectangle 17">
+            <a:extLst>
+              <a:ext uri="{FF2B5EF4-FFF2-40B4-BE49-F238E27FC236}">
+                <a16:creationId xmlns:a16="http://schemas.microsoft.com/office/drawing/2014/main" id="{1AB33D0A-C428-1366-C3AE-B208287F0BFC}"/>
+              </a:ext>
+            </a:extLst>
+          </p:cNvPr>
+          <p:cNvSpPr/>
+          <p:nvPr/>
+        </p:nvSpPr>
+        <p:spPr>
+          <a:xfrm rot="16200000">
+            <a:off x="2522581" y="-318404"/>
+            <a:ext cx="68674" cy="3246390"/>
+          </a:xfrm>
+          <a:prstGeom prst="rect">
+            <a:avLst/>
+          </a:prstGeom>
+          <a:solidFill>
+            <a:srgbClr val="7030A0"/>
+          </a:solidFill>
+          <a:ln>
+            <a:solidFill>
+              <a:srgbClr val="7030A0"/>
+            </a:solidFill>
+          </a:ln>
+        </p:spPr>
+        <p:style>
+          <a:lnRef idx="2">
+            <a:schemeClr val="accent1">
+              <a:shade val="15000"/>
+            </a:schemeClr>
+          </a:lnRef>
+          <a:fillRef idx="1">
+            <a:schemeClr val="accent1"/>
+          </a:fillRef>
+          <a:effectRef idx="0">
+            <a:schemeClr val="accent1"/>
+          </a:effectRef>
+          <a:fontRef idx="minor">
+            <a:schemeClr val="lt1"/>
+          </a:fontRef>
+        </p:style>
+        <p:txBody>
+          <a:bodyPr rtlCol="0" anchor="ctr"/>
+          <a:lstStyle/>
+          <a:p>
+            <a:pPr algn="ctr"/>
+            <a:endParaRPr lang="en-US">
+              <a:latin typeface="Times New Roman" panose="02020603050405020304" pitchFamily="18" charset="0"/>
+              <a:cs typeface="Times New Roman" panose="02020603050405020304" pitchFamily="18" charset="0"/>
+            </a:endParaRPr>
+          </a:p>
+        </p:txBody>
+      </p:sp>
+      <p:sp>
+        <p:nvSpPr>
+          <p:cNvPr id="12" name="TextBox 11">
+            <a:extLst>
+              <a:ext uri="{FF2B5EF4-FFF2-40B4-BE49-F238E27FC236}">
+                <a16:creationId xmlns:a16="http://schemas.microsoft.com/office/drawing/2014/main" id="{B44696ED-4E93-4B0B-AE4E-ED3E804815A4}"/>
+              </a:ext>
+            </a:extLst>
+          </p:cNvPr>
+          <p:cNvSpPr txBox="1"/>
+          <p:nvPr/>
+        </p:nvSpPr>
+        <p:spPr>
+          <a:xfrm>
+            <a:off x="772906" y="405121"/>
+            <a:ext cx="5095723" cy="830997"/>
+          </a:xfrm>
+          <a:prstGeom prst="rect">
+            <a:avLst/>
+          </a:prstGeom>
+          <a:noFill/>
+        </p:spPr>
+        <p:txBody>
+          <a:bodyPr wrap="square" rtlCol="0">
+            <a:spAutoFit/>
+          </a:bodyPr>
+          <a:lstStyle/>
+          <a:p>
+            <a:r>
+              <a:rPr lang="en-US" sz="4800" dirty="0">
+                <a:latin typeface="Times New Roman" panose="02020603050405020304" pitchFamily="18" charset="0"/>
+                <a:cs typeface="Times New Roman" panose="02020603050405020304" pitchFamily="18" charset="0"/>
+              </a:rPr>
+              <a:t>c</a:t>
+            </a:r>
+            <a:r>
+              <a:rPr lang="en-US" sz="3000" dirty="0">
+                <a:latin typeface="Times New Roman" panose="02020603050405020304" pitchFamily="18" charset="0"/>
+                <a:cs typeface="Times New Roman" panose="02020603050405020304" pitchFamily="18" charset="0"/>
+              </a:rPr>
+              <a:t>ompetitive </a:t>
+            </a:r>
+            <a:r>
+              <a:rPr lang="en-US" sz="4800" dirty="0">
+                <a:latin typeface="Times New Roman" panose="02020603050405020304" pitchFamily="18" charset="0"/>
+                <a:cs typeface="Times New Roman" panose="02020603050405020304" pitchFamily="18" charset="0"/>
+              </a:rPr>
+              <a:t>s</a:t>
+            </a:r>
+            <a:r>
+              <a:rPr lang="en-US" sz="3000" dirty="0">
+                <a:latin typeface="Times New Roman" panose="02020603050405020304" pitchFamily="18" charset="0"/>
+                <a:cs typeface="Times New Roman" panose="02020603050405020304" pitchFamily="18" charset="0"/>
+              </a:rPr>
+              <a:t>ystems</a:t>
+            </a:r>
+          </a:p>
+        </p:txBody>
+      </p:sp>
+      <p:sp>
+        <p:nvSpPr>
+          <p:cNvPr id="2" name="TextBox 1">
+            <a:extLst>
+              <a:ext uri="{FF2B5EF4-FFF2-40B4-BE49-F238E27FC236}">
+                <a16:creationId xmlns:a16="http://schemas.microsoft.com/office/drawing/2014/main" id="{973039A3-A80B-D2B1-8A5C-AF12899E6760}"/>
+              </a:ext>
+            </a:extLst>
+          </p:cNvPr>
+          <p:cNvSpPr txBox="1"/>
+          <p:nvPr/>
+        </p:nvSpPr>
+        <p:spPr>
+          <a:xfrm>
+            <a:off x="4806479" y="716456"/>
+            <a:ext cx="6410817" cy="553998"/>
+          </a:xfrm>
+          <a:prstGeom prst="rect">
+            <a:avLst/>
+          </a:prstGeom>
+          <a:noFill/>
+        </p:spPr>
+        <p:txBody>
+          <a:bodyPr wrap="square" rtlCol="0">
+            <a:spAutoFit/>
+          </a:bodyPr>
+          <a:lstStyle/>
+          <a:p>
+            <a:r>
+              <a:rPr lang="en-US" sz="3000" dirty="0">
+                <a:solidFill>
+                  <a:srgbClr val="7030A0"/>
+                </a:solidFill>
+                <a:latin typeface="Times New Roman" panose="02020603050405020304" pitchFamily="18" charset="0"/>
+                <a:cs typeface="Times New Roman" panose="02020603050405020304" pitchFamily="18" charset="0"/>
+              </a:rPr>
+              <a:t>Two Common Communication Patterns</a:t>
+            </a:r>
+          </a:p>
+        </p:txBody>
+      </p:sp>
+      <p:sp>
+        <p:nvSpPr>
+          <p:cNvPr id="3" name="Rounded Rectangle 2">
+            <a:extLst>
+              <a:ext uri="{FF2B5EF4-FFF2-40B4-BE49-F238E27FC236}">
+                <a16:creationId xmlns:a16="http://schemas.microsoft.com/office/drawing/2014/main" id="{7B05D2CD-4141-39F8-70E8-855B669DC9EF}"/>
+              </a:ext>
+            </a:extLst>
+          </p:cNvPr>
+          <p:cNvSpPr/>
+          <p:nvPr/>
+        </p:nvSpPr>
+        <p:spPr>
+          <a:xfrm>
+            <a:off x="472966" y="4755944"/>
+            <a:ext cx="4482094" cy="1213932"/>
+          </a:xfrm>
+          <a:custGeom>
+            <a:avLst/>
+            <a:gdLst>
+              <a:gd name="csX0" fmla="*/ 0 w 4482094"/>
+              <a:gd name="csY0" fmla="*/ 202326 h 1213932"/>
+              <a:gd name="csX1" fmla="*/ 202326 w 4482094"/>
+              <a:gd name="csY1" fmla="*/ 0 h 1213932"/>
+              <a:gd name="csX2" fmla="*/ 703269 w 4482094"/>
+              <a:gd name="csY2" fmla="*/ 0 h 1213932"/>
+              <a:gd name="csX3" fmla="*/ 1163437 w 4482094"/>
+              <a:gd name="csY3" fmla="*/ 0 h 1213932"/>
+              <a:gd name="csX4" fmla="*/ 1705155 w 4482094"/>
+              <a:gd name="csY4" fmla="*/ 0 h 1213932"/>
+              <a:gd name="csX5" fmla="*/ 2328421 w 4482094"/>
+              <a:gd name="csY5" fmla="*/ 0 h 1213932"/>
+              <a:gd name="csX6" fmla="*/ 2992461 w 4482094"/>
+              <a:gd name="csY6" fmla="*/ 0 h 1213932"/>
+              <a:gd name="csX7" fmla="*/ 3534179 w 4482094"/>
+              <a:gd name="csY7" fmla="*/ 0 h 1213932"/>
+              <a:gd name="csX8" fmla="*/ 4279768 w 4482094"/>
+              <a:gd name="csY8" fmla="*/ 0 h 1213932"/>
+              <a:gd name="csX9" fmla="*/ 4482094 w 4482094"/>
+              <a:gd name="csY9" fmla="*/ 202326 h 1213932"/>
+              <a:gd name="csX10" fmla="*/ 4482094 w 4482094"/>
+              <a:gd name="csY10" fmla="*/ 598873 h 1213932"/>
+              <a:gd name="csX11" fmla="*/ 4482094 w 4482094"/>
+              <a:gd name="csY11" fmla="*/ 1011606 h 1213932"/>
+              <a:gd name="csX12" fmla="*/ 4279768 w 4482094"/>
+              <a:gd name="csY12" fmla="*/ 1213932 h 1213932"/>
+              <a:gd name="csX13" fmla="*/ 3615727 w 4482094"/>
+              <a:gd name="csY13" fmla="*/ 1213932 h 1213932"/>
+              <a:gd name="csX14" fmla="*/ 2992461 w 4482094"/>
+              <a:gd name="csY14" fmla="*/ 1213932 h 1213932"/>
+              <a:gd name="csX15" fmla="*/ 2369195 w 4482094"/>
+              <a:gd name="csY15" fmla="*/ 1213932 h 1213932"/>
+              <a:gd name="csX16" fmla="*/ 1909027 w 4482094"/>
+              <a:gd name="csY16" fmla="*/ 1213932 h 1213932"/>
+              <a:gd name="csX17" fmla="*/ 1448858 w 4482094"/>
+              <a:gd name="csY17" fmla="*/ 1213932 h 1213932"/>
+              <a:gd name="csX18" fmla="*/ 988690 w 4482094"/>
+              <a:gd name="csY18" fmla="*/ 1213932 h 1213932"/>
+              <a:gd name="csX19" fmla="*/ 202326 w 4482094"/>
+              <a:gd name="csY19" fmla="*/ 1213932 h 1213932"/>
+              <a:gd name="csX20" fmla="*/ 0 w 4482094"/>
+              <a:gd name="csY20" fmla="*/ 1011606 h 1213932"/>
+              <a:gd name="csX21" fmla="*/ 0 w 4482094"/>
+              <a:gd name="csY21" fmla="*/ 623152 h 1213932"/>
+              <a:gd name="csX22" fmla="*/ 0 w 4482094"/>
+              <a:gd name="csY22" fmla="*/ 202326 h 1213932"/>
+            </a:gdLst>
+            <a:ahLst/>
+            <a:cxnLst>
+              <a:cxn ang="0">
+                <a:pos x="csX0" y="csY0"/>
+              </a:cxn>
+              <a:cxn ang="0">
+                <a:pos x="csX1" y="csY1"/>
+              </a:cxn>
+              <a:cxn ang="0">
+                <a:pos x="csX2" y="csY2"/>
+              </a:cxn>
+              <a:cxn ang="0">
+                <a:pos x="csX3" y="csY3"/>
+              </a:cxn>
+              <a:cxn ang="0">
+                <a:pos x="csX4" y="csY4"/>
+              </a:cxn>
+              <a:cxn ang="0">
+                <a:pos x="csX5" y="csY5"/>
+              </a:cxn>
+              <a:cxn ang="0">
+                <a:pos x="csX6" y="csY6"/>
+              </a:cxn>
+              <a:cxn ang="0">
+                <a:pos x="csX7" y="csY7"/>
+              </a:cxn>
+              <a:cxn ang="0">
+                <a:pos x="csX8" y="csY8"/>
+              </a:cxn>
+              <a:cxn ang="0">
+                <a:pos x="csX9" y="csY9"/>
+              </a:cxn>
+              <a:cxn ang="0">
+                <a:pos x="csX10" y="csY10"/>
+              </a:cxn>
+              <a:cxn ang="0">
+                <a:pos x="csX11" y="csY11"/>
+              </a:cxn>
+              <a:cxn ang="0">
+                <a:pos x="csX12" y="csY12"/>
+              </a:cxn>
+              <a:cxn ang="0">
+                <a:pos x="csX13" y="csY13"/>
+              </a:cxn>
+              <a:cxn ang="0">
+                <a:pos x="csX14" y="csY14"/>
+              </a:cxn>
+              <a:cxn ang="0">
+                <a:pos x="csX15" y="csY15"/>
+              </a:cxn>
+              <a:cxn ang="0">
+                <a:pos x="csX16" y="csY16"/>
+              </a:cxn>
+              <a:cxn ang="0">
+                <a:pos x="csX17" y="csY17"/>
+              </a:cxn>
+              <a:cxn ang="0">
+                <a:pos x="csX18" y="csY18"/>
+              </a:cxn>
+              <a:cxn ang="0">
+                <a:pos x="csX19" y="csY19"/>
+              </a:cxn>
+              <a:cxn ang="0">
+                <a:pos x="csX20" y="csY20"/>
+              </a:cxn>
+              <a:cxn ang="0">
+                <a:pos x="csX21" y="csY21"/>
+              </a:cxn>
+              <a:cxn ang="0">
+                <a:pos x="csX22" y="csY22"/>
+              </a:cxn>
+            </a:cxnLst>
+            <a:rect l="l" t="t" r="r" b="b"/>
+            <a:pathLst>
+              <a:path w="4482094" h="1213932" fill="none" extrusionOk="0">
+                <a:moveTo>
+                  <a:pt x="0" y="202326"/>
+                </a:moveTo>
+                <a:cubicBezTo>
+                  <a:pt x="26695" y="78017"/>
+                  <a:pt x="75354" y="6686"/>
+                  <a:pt x="202326" y="0"/>
+                </a:cubicBezTo>
+                <a:cubicBezTo>
+                  <a:pt x="310846" y="-50018"/>
+                  <a:pt x="593216" y="34946"/>
+                  <a:pt x="703269" y="0"/>
+                </a:cubicBezTo>
+                <a:cubicBezTo>
+                  <a:pt x="813322" y="-34946"/>
+                  <a:pt x="955403" y="25942"/>
+                  <a:pt x="1163437" y="0"/>
+                </a:cubicBezTo>
+                <a:cubicBezTo>
+                  <a:pt x="1371471" y="-25942"/>
+                  <a:pt x="1593315" y="40294"/>
+                  <a:pt x="1705155" y="0"/>
+                </a:cubicBezTo>
+                <a:cubicBezTo>
+                  <a:pt x="1816995" y="-40294"/>
+                  <a:pt x="2122609" y="42548"/>
+                  <a:pt x="2328421" y="0"/>
+                </a:cubicBezTo>
+                <a:cubicBezTo>
+                  <a:pt x="2534233" y="-42548"/>
+                  <a:pt x="2780578" y="59133"/>
+                  <a:pt x="2992461" y="0"/>
+                </a:cubicBezTo>
+                <a:cubicBezTo>
+                  <a:pt x="3204344" y="-59133"/>
+                  <a:pt x="3421836" y="36180"/>
+                  <a:pt x="3534179" y="0"/>
+                </a:cubicBezTo>
+                <a:cubicBezTo>
+                  <a:pt x="3646522" y="-36180"/>
+                  <a:pt x="4090705" y="35347"/>
+                  <a:pt x="4279768" y="0"/>
+                </a:cubicBezTo>
+                <a:cubicBezTo>
+                  <a:pt x="4374039" y="17153"/>
+                  <a:pt x="4478954" y="94594"/>
+                  <a:pt x="4482094" y="202326"/>
+                </a:cubicBezTo>
+                <a:cubicBezTo>
+                  <a:pt x="4499112" y="317165"/>
+                  <a:pt x="4466703" y="476425"/>
+                  <a:pt x="4482094" y="598873"/>
+                </a:cubicBezTo>
+                <a:cubicBezTo>
+                  <a:pt x="4497485" y="721321"/>
+                  <a:pt x="4433159" y="915363"/>
+                  <a:pt x="4482094" y="1011606"/>
+                </a:cubicBezTo>
+                <a:cubicBezTo>
+                  <a:pt x="4500655" y="1107200"/>
+                  <a:pt x="4371140" y="1231747"/>
+                  <a:pt x="4279768" y="1213932"/>
+                </a:cubicBezTo>
+                <a:cubicBezTo>
+                  <a:pt x="3949763" y="1262404"/>
+                  <a:pt x="3886087" y="1171221"/>
+                  <a:pt x="3615727" y="1213932"/>
+                </a:cubicBezTo>
+                <a:cubicBezTo>
+                  <a:pt x="3345367" y="1256643"/>
+                  <a:pt x="3188927" y="1158815"/>
+                  <a:pt x="2992461" y="1213932"/>
+                </a:cubicBezTo>
+                <a:cubicBezTo>
+                  <a:pt x="2795995" y="1269049"/>
+                  <a:pt x="2642429" y="1202278"/>
+                  <a:pt x="2369195" y="1213932"/>
+                </a:cubicBezTo>
+                <a:cubicBezTo>
+                  <a:pt x="2095961" y="1225586"/>
+                  <a:pt x="2124900" y="1207898"/>
+                  <a:pt x="1909027" y="1213932"/>
+                </a:cubicBezTo>
+                <a:cubicBezTo>
+                  <a:pt x="1693154" y="1219966"/>
+                  <a:pt x="1674914" y="1164025"/>
+                  <a:pt x="1448858" y="1213932"/>
+                </a:cubicBezTo>
+                <a:cubicBezTo>
+                  <a:pt x="1222802" y="1263839"/>
+                  <a:pt x="1114471" y="1165257"/>
+                  <a:pt x="988690" y="1213932"/>
+                </a:cubicBezTo>
+                <a:cubicBezTo>
+                  <a:pt x="862909" y="1262607"/>
+                  <a:pt x="434083" y="1185791"/>
+                  <a:pt x="202326" y="1213932"/>
+                </a:cubicBezTo>
+                <a:cubicBezTo>
+                  <a:pt x="103782" y="1218548"/>
+                  <a:pt x="15230" y="1124784"/>
+                  <a:pt x="0" y="1011606"/>
+                </a:cubicBezTo>
+                <a:cubicBezTo>
+                  <a:pt x="-5740" y="817584"/>
+                  <a:pt x="4281" y="721549"/>
+                  <a:pt x="0" y="623152"/>
+                </a:cubicBezTo>
+                <a:cubicBezTo>
+                  <a:pt x="-4281" y="524755"/>
+                  <a:pt x="41708" y="293725"/>
+                  <a:pt x="0" y="202326"/>
+                </a:cubicBezTo>
+                <a:close/>
+              </a:path>
+              <a:path w="4482094" h="1213932" stroke="0" extrusionOk="0">
+                <a:moveTo>
+                  <a:pt x="0" y="202326"/>
+                </a:moveTo>
+                <a:cubicBezTo>
+                  <a:pt x="-16723" y="104191"/>
+                  <a:pt x="101543" y="-28700"/>
+                  <a:pt x="202326" y="0"/>
+                </a:cubicBezTo>
+                <a:cubicBezTo>
+                  <a:pt x="436127" y="-38849"/>
+                  <a:pt x="523360" y="22818"/>
+                  <a:pt x="784818" y="0"/>
+                </a:cubicBezTo>
+                <a:cubicBezTo>
+                  <a:pt x="1046276" y="-22818"/>
+                  <a:pt x="1235129" y="60004"/>
+                  <a:pt x="1448858" y="0"/>
+                </a:cubicBezTo>
+                <a:cubicBezTo>
+                  <a:pt x="1662587" y="-60004"/>
+                  <a:pt x="1803950" y="17905"/>
+                  <a:pt x="1909027" y="0"/>
+                </a:cubicBezTo>
+                <a:cubicBezTo>
+                  <a:pt x="2014104" y="-17905"/>
+                  <a:pt x="2245709" y="15579"/>
+                  <a:pt x="2369195" y="0"/>
+                </a:cubicBezTo>
+                <a:cubicBezTo>
+                  <a:pt x="2492681" y="-15579"/>
+                  <a:pt x="2662699" y="41827"/>
+                  <a:pt x="2910912" y="0"/>
+                </a:cubicBezTo>
+                <a:cubicBezTo>
+                  <a:pt x="3159125" y="-41827"/>
+                  <a:pt x="3274654" y="25262"/>
+                  <a:pt x="3493404" y="0"/>
+                </a:cubicBezTo>
+                <a:cubicBezTo>
+                  <a:pt x="3712154" y="-25262"/>
+                  <a:pt x="4011493" y="69021"/>
+                  <a:pt x="4279768" y="0"/>
+                </a:cubicBezTo>
+                <a:cubicBezTo>
+                  <a:pt x="4400494" y="30317"/>
+                  <a:pt x="4459968" y="67561"/>
+                  <a:pt x="4482094" y="202326"/>
+                </a:cubicBezTo>
+                <a:cubicBezTo>
+                  <a:pt x="4512683" y="389701"/>
+                  <a:pt x="4438350" y="470058"/>
+                  <a:pt x="4482094" y="598873"/>
+                </a:cubicBezTo>
+                <a:cubicBezTo>
+                  <a:pt x="4525838" y="727688"/>
+                  <a:pt x="4439543" y="818110"/>
+                  <a:pt x="4482094" y="1011606"/>
+                </a:cubicBezTo>
+                <a:cubicBezTo>
+                  <a:pt x="4501699" y="1146361"/>
+                  <a:pt x="4403210" y="1213086"/>
+                  <a:pt x="4279768" y="1213932"/>
+                </a:cubicBezTo>
+                <a:cubicBezTo>
+                  <a:pt x="4053273" y="1262350"/>
+                  <a:pt x="3993693" y="1199585"/>
+                  <a:pt x="3819600" y="1213932"/>
+                </a:cubicBezTo>
+                <a:cubicBezTo>
+                  <a:pt x="3645507" y="1228279"/>
+                  <a:pt x="3564206" y="1206396"/>
+                  <a:pt x="3359431" y="1213932"/>
+                </a:cubicBezTo>
+                <a:cubicBezTo>
+                  <a:pt x="3154656" y="1221468"/>
+                  <a:pt x="3031699" y="1166407"/>
+                  <a:pt x="2899263" y="1213932"/>
+                </a:cubicBezTo>
+                <a:cubicBezTo>
+                  <a:pt x="2766827" y="1261457"/>
+                  <a:pt x="2645038" y="1211015"/>
+                  <a:pt x="2439094" y="1213932"/>
+                </a:cubicBezTo>
+                <a:cubicBezTo>
+                  <a:pt x="2233150" y="1216849"/>
+                  <a:pt x="2142178" y="1158375"/>
+                  <a:pt x="1856602" y="1213932"/>
+                </a:cubicBezTo>
+                <a:cubicBezTo>
+                  <a:pt x="1571026" y="1269489"/>
+                  <a:pt x="1587404" y="1184297"/>
+                  <a:pt x="1396434" y="1213932"/>
+                </a:cubicBezTo>
+                <a:cubicBezTo>
+                  <a:pt x="1205464" y="1243567"/>
+                  <a:pt x="999372" y="1142548"/>
+                  <a:pt x="732393" y="1213932"/>
+                </a:cubicBezTo>
+                <a:cubicBezTo>
+                  <a:pt x="465414" y="1285316"/>
+                  <a:pt x="429827" y="1204260"/>
+                  <a:pt x="202326" y="1213932"/>
+                </a:cubicBezTo>
+                <a:cubicBezTo>
+                  <a:pt x="98367" y="1220249"/>
+                  <a:pt x="15313" y="1128582"/>
+                  <a:pt x="0" y="1011606"/>
+                </a:cubicBezTo>
+                <a:cubicBezTo>
+                  <a:pt x="-22348" y="922605"/>
+                  <a:pt x="18797" y="799667"/>
+                  <a:pt x="0" y="615059"/>
+                </a:cubicBezTo>
+                <a:cubicBezTo>
+                  <a:pt x="-18797" y="430451"/>
+                  <a:pt x="27808" y="389567"/>
+                  <a:pt x="0" y="202326"/>
+                </a:cubicBezTo>
+                <a:close/>
+              </a:path>
+            </a:pathLst>
+          </a:custGeom>
+          <a:solidFill>
+            <a:schemeClr val="accent6">
+              <a:lumMod val="40000"/>
+              <a:lumOff val="60000"/>
+            </a:schemeClr>
+          </a:solidFill>
+          <a:ln w="25400">
+            <a:bevel/>
+            <a:extLst>
+              <a:ext uri="{C807C97D-BFC1-408E-A445-0C87EB9F89A2}">
+                <ask:lineSketchStyleProps xmlns:ask="http://schemas.microsoft.com/office/drawing/2018/sketchyshapes" sd="247587333">
+                  <a:prstGeom prst="roundRect">
+                    <a:avLst/>
+                  </a:prstGeom>
+                  <ask:type>
+                    <ask:lineSketchScribble/>
+                  </ask:type>
+                </ask:lineSketchStyleProps>
+              </a:ext>
+            </a:extLst>
+          </a:ln>
+        </p:spPr>
+        <p:style>
+          <a:lnRef idx="2">
+            <a:schemeClr val="accent1">
+              <a:shade val="15000"/>
+            </a:schemeClr>
+          </a:lnRef>
+          <a:fillRef idx="1">
+            <a:schemeClr val="accent1"/>
+          </a:fillRef>
+          <a:effectRef idx="0">
+            <a:schemeClr val="accent1"/>
+          </a:effectRef>
+          <a:fontRef idx="minor">
+            <a:schemeClr val="lt1"/>
+          </a:fontRef>
+        </p:style>
+        <p:txBody>
+          <a:bodyPr rtlCol="0" anchor="ctr"/>
+          <a:lstStyle/>
+          <a:p>
+            <a:pPr algn="ctr"/>
+            <a:endParaRPr lang="en-US"/>
+          </a:p>
+        </p:txBody>
+      </p:sp>
+      <p:sp>
+        <p:nvSpPr>
+          <p:cNvPr id="5" name="Rounded Rectangle 4">
+            <a:extLst>
+              <a:ext uri="{FF2B5EF4-FFF2-40B4-BE49-F238E27FC236}">
+                <a16:creationId xmlns:a16="http://schemas.microsoft.com/office/drawing/2014/main" id="{7DF3EBA0-ECEC-CFC3-CDB1-D6D0D4982F8F}"/>
+              </a:ext>
+            </a:extLst>
+          </p:cNvPr>
+          <p:cNvSpPr/>
+          <p:nvPr/>
+        </p:nvSpPr>
+        <p:spPr>
+          <a:xfrm>
+            <a:off x="6615105" y="4696264"/>
+            <a:ext cx="4658815" cy="1213932"/>
+          </a:xfrm>
+          <a:custGeom>
+            <a:avLst/>
+            <a:gdLst>
+              <a:gd name="csX0" fmla="*/ 0 w 4658815"/>
+              <a:gd name="csY0" fmla="*/ 202326 h 1213932"/>
+              <a:gd name="csX1" fmla="*/ 202326 w 4658815"/>
+              <a:gd name="csY1" fmla="*/ 0 h 1213932"/>
+              <a:gd name="csX2" fmla="*/ 776638 w 4658815"/>
+              <a:gd name="csY2" fmla="*/ 0 h 1213932"/>
+              <a:gd name="csX3" fmla="*/ 1223325 w 4658815"/>
+              <a:gd name="csY3" fmla="*/ 0 h 1213932"/>
+              <a:gd name="csX4" fmla="*/ 1797637 w 4658815"/>
+              <a:gd name="csY4" fmla="*/ 0 h 1213932"/>
+              <a:gd name="csX5" fmla="*/ 2201783 w 4658815"/>
+              <a:gd name="csY5" fmla="*/ 0 h 1213932"/>
+              <a:gd name="csX6" fmla="*/ 2776095 w 4658815"/>
+              <a:gd name="csY6" fmla="*/ 0 h 1213932"/>
+              <a:gd name="csX7" fmla="*/ 3222782 w 4658815"/>
+              <a:gd name="csY7" fmla="*/ 0 h 1213932"/>
+              <a:gd name="csX8" fmla="*/ 3626927 w 4658815"/>
+              <a:gd name="csY8" fmla="*/ 0 h 1213932"/>
+              <a:gd name="csX9" fmla="*/ 4456489 w 4658815"/>
+              <a:gd name="csY9" fmla="*/ 0 h 1213932"/>
+              <a:gd name="csX10" fmla="*/ 4658815 w 4658815"/>
+              <a:gd name="csY10" fmla="*/ 202326 h 1213932"/>
+              <a:gd name="csX11" fmla="*/ 4658815 w 4658815"/>
+              <a:gd name="csY11" fmla="*/ 615059 h 1213932"/>
+              <a:gd name="csX12" fmla="*/ 4658815 w 4658815"/>
+              <a:gd name="csY12" fmla="*/ 1011606 h 1213932"/>
+              <a:gd name="csX13" fmla="*/ 4456489 w 4658815"/>
+              <a:gd name="csY13" fmla="*/ 1213932 h 1213932"/>
+              <a:gd name="csX14" fmla="*/ 4052344 w 4658815"/>
+              <a:gd name="csY14" fmla="*/ 1213932 h 1213932"/>
+              <a:gd name="csX15" fmla="*/ 3435490 w 4658815"/>
+              <a:gd name="csY15" fmla="*/ 1213932 h 1213932"/>
+              <a:gd name="csX16" fmla="*/ 2903720 w 4658815"/>
+              <a:gd name="csY16" fmla="*/ 1213932 h 1213932"/>
+              <a:gd name="csX17" fmla="*/ 2286866 w 4658815"/>
+              <a:gd name="csY17" fmla="*/ 1213932 h 1213932"/>
+              <a:gd name="csX18" fmla="*/ 1712554 w 4658815"/>
+              <a:gd name="csY18" fmla="*/ 1213932 h 1213932"/>
+              <a:gd name="csX19" fmla="*/ 1223325 w 4658815"/>
+              <a:gd name="csY19" fmla="*/ 1213932 h 1213932"/>
+              <a:gd name="csX20" fmla="*/ 202326 w 4658815"/>
+              <a:gd name="csY20" fmla="*/ 1213932 h 1213932"/>
+              <a:gd name="csX21" fmla="*/ 0 w 4658815"/>
+              <a:gd name="csY21" fmla="*/ 1011606 h 1213932"/>
+              <a:gd name="csX22" fmla="*/ 0 w 4658815"/>
+              <a:gd name="csY22" fmla="*/ 606966 h 1213932"/>
+              <a:gd name="csX23" fmla="*/ 0 w 4658815"/>
+              <a:gd name="csY23" fmla="*/ 202326 h 1213932"/>
+            </a:gdLst>
+            <a:ahLst/>
+            <a:cxnLst>
+              <a:cxn ang="0">
+                <a:pos x="csX0" y="csY0"/>
+              </a:cxn>
+              <a:cxn ang="0">
+                <a:pos x="csX1" y="csY1"/>
+              </a:cxn>
+              <a:cxn ang="0">
+                <a:pos x="csX2" y="csY2"/>
+              </a:cxn>
+              <a:cxn ang="0">
+                <a:pos x="csX3" y="csY3"/>
+              </a:cxn>
+              <a:cxn ang="0">
+                <a:pos x="csX4" y="csY4"/>
+              </a:cxn>
+              <a:cxn ang="0">
+                <a:pos x="csX5" y="csY5"/>
+              </a:cxn>
+              <a:cxn ang="0">
+                <a:pos x="csX6" y="csY6"/>
+              </a:cxn>
+              <a:cxn ang="0">
+                <a:pos x="csX7" y="csY7"/>
+              </a:cxn>
+              <a:cxn ang="0">
+                <a:pos x="csX8" y="csY8"/>
+              </a:cxn>
+              <a:cxn ang="0">
+                <a:pos x="csX9" y="csY9"/>
+              </a:cxn>
+              <a:cxn ang="0">
+                <a:pos x="csX10" y="csY10"/>
+              </a:cxn>
+              <a:cxn ang="0">
+                <a:pos x="csX11" y="csY11"/>
+              </a:cxn>
+              <a:cxn ang="0">
+                <a:pos x="csX12" y="csY12"/>
+              </a:cxn>
+              <a:cxn ang="0">
+                <a:pos x="csX13" y="csY13"/>
+              </a:cxn>
+              <a:cxn ang="0">
+                <a:pos x="csX14" y="csY14"/>
+              </a:cxn>
+              <a:cxn ang="0">
+                <a:pos x="csX15" y="csY15"/>
+              </a:cxn>
+              <a:cxn ang="0">
+                <a:pos x="csX16" y="csY16"/>
+              </a:cxn>
+              <a:cxn ang="0">
+                <a:pos x="csX17" y="csY17"/>
+              </a:cxn>
+              <a:cxn ang="0">
+                <a:pos x="csX18" y="csY18"/>
+              </a:cxn>
+              <a:cxn ang="0">
+                <a:pos x="csX19" y="csY19"/>
+              </a:cxn>
+              <a:cxn ang="0">
+                <a:pos x="csX20" y="csY20"/>
+              </a:cxn>
+              <a:cxn ang="0">
+                <a:pos x="csX21" y="csY21"/>
+              </a:cxn>
+              <a:cxn ang="0">
+                <a:pos x="csX22" y="csY22"/>
+              </a:cxn>
+              <a:cxn ang="0">
+                <a:pos x="csX23" y="csY23"/>
+              </a:cxn>
+            </a:cxnLst>
+            <a:rect l="l" t="t" r="r" b="b"/>
+            <a:pathLst>
+              <a:path w="4658815" h="1213932" fill="none" extrusionOk="0">
+                <a:moveTo>
+                  <a:pt x="0" y="202326"/>
+                </a:moveTo>
+                <a:cubicBezTo>
+                  <a:pt x="-13865" y="118417"/>
+                  <a:pt x="86826" y="-4987"/>
+                  <a:pt x="202326" y="0"/>
+                </a:cubicBezTo>
+                <a:cubicBezTo>
+                  <a:pt x="461530" y="-6300"/>
+                  <a:pt x="508999" y="20240"/>
+                  <a:pt x="776638" y="0"/>
+                </a:cubicBezTo>
+                <a:cubicBezTo>
+                  <a:pt x="1044277" y="-20240"/>
+                  <a:pt x="1043875" y="3992"/>
+                  <a:pt x="1223325" y="0"/>
+                </a:cubicBezTo>
+                <a:cubicBezTo>
+                  <a:pt x="1402775" y="-3992"/>
+                  <a:pt x="1646824" y="1804"/>
+                  <a:pt x="1797637" y="0"/>
+                </a:cubicBezTo>
+                <a:cubicBezTo>
+                  <a:pt x="1948450" y="-1804"/>
+                  <a:pt x="2058582" y="8185"/>
+                  <a:pt x="2201783" y="0"/>
+                </a:cubicBezTo>
+                <a:cubicBezTo>
+                  <a:pt x="2344984" y="-8185"/>
+                  <a:pt x="2546989" y="67223"/>
+                  <a:pt x="2776095" y="0"/>
+                </a:cubicBezTo>
+                <a:cubicBezTo>
+                  <a:pt x="3005201" y="-67223"/>
+                  <a:pt x="3036691" y="4785"/>
+                  <a:pt x="3222782" y="0"/>
+                </a:cubicBezTo>
+                <a:cubicBezTo>
+                  <a:pt x="3408873" y="-4785"/>
+                  <a:pt x="3499934" y="35826"/>
+                  <a:pt x="3626927" y="0"/>
+                </a:cubicBezTo>
+                <a:cubicBezTo>
+                  <a:pt x="3753921" y="-35826"/>
+                  <a:pt x="4236949" y="27302"/>
+                  <a:pt x="4456489" y="0"/>
+                </a:cubicBezTo>
+                <a:cubicBezTo>
+                  <a:pt x="4562502" y="21437"/>
+                  <a:pt x="4685616" y="98271"/>
+                  <a:pt x="4658815" y="202326"/>
+                </a:cubicBezTo>
+                <a:cubicBezTo>
+                  <a:pt x="4699777" y="365515"/>
+                  <a:pt x="4655207" y="490933"/>
+                  <a:pt x="4658815" y="615059"/>
+                </a:cubicBezTo>
+                <a:cubicBezTo>
+                  <a:pt x="4662423" y="739185"/>
+                  <a:pt x="4635272" y="887276"/>
+                  <a:pt x="4658815" y="1011606"/>
+                </a:cubicBezTo>
+                <a:cubicBezTo>
+                  <a:pt x="4669788" y="1150168"/>
+                  <a:pt x="4587821" y="1233312"/>
+                  <a:pt x="4456489" y="1213932"/>
+                </a:cubicBezTo>
+                <a:cubicBezTo>
+                  <a:pt x="4299887" y="1239580"/>
+                  <a:pt x="4187456" y="1179398"/>
+                  <a:pt x="4052344" y="1213932"/>
+                </a:cubicBezTo>
+                <a:cubicBezTo>
+                  <a:pt x="3917233" y="1248466"/>
+                  <a:pt x="3661664" y="1199401"/>
+                  <a:pt x="3435490" y="1213932"/>
+                </a:cubicBezTo>
+                <a:cubicBezTo>
+                  <a:pt x="3209316" y="1228463"/>
+                  <a:pt x="3082040" y="1205725"/>
+                  <a:pt x="2903720" y="1213932"/>
+                </a:cubicBezTo>
+                <a:cubicBezTo>
+                  <a:pt x="2725400" y="1222139"/>
+                  <a:pt x="2587397" y="1145467"/>
+                  <a:pt x="2286866" y="1213932"/>
+                </a:cubicBezTo>
+                <a:cubicBezTo>
+                  <a:pt x="1986335" y="1282397"/>
+                  <a:pt x="1936315" y="1195658"/>
+                  <a:pt x="1712554" y="1213932"/>
+                </a:cubicBezTo>
+                <a:cubicBezTo>
+                  <a:pt x="1488793" y="1232206"/>
+                  <a:pt x="1435692" y="1196997"/>
+                  <a:pt x="1223325" y="1213932"/>
+                </a:cubicBezTo>
+                <a:cubicBezTo>
+                  <a:pt x="1010958" y="1230867"/>
+                  <a:pt x="612559" y="1189547"/>
+                  <a:pt x="202326" y="1213932"/>
+                </a:cubicBezTo>
+                <a:cubicBezTo>
+                  <a:pt x="90953" y="1230726"/>
+                  <a:pt x="13269" y="1111441"/>
+                  <a:pt x="0" y="1011606"/>
+                </a:cubicBezTo>
+                <a:cubicBezTo>
+                  <a:pt x="-45144" y="925982"/>
+                  <a:pt x="36711" y="708230"/>
+                  <a:pt x="0" y="606966"/>
+                </a:cubicBezTo>
+                <a:cubicBezTo>
+                  <a:pt x="-36711" y="505702"/>
+                  <a:pt x="11056" y="331283"/>
+                  <a:pt x="0" y="202326"/>
+                </a:cubicBezTo>
+                <a:close/>
+              </a:path>
+              <a:path w="4658815" h="1213932" stroke="0" extrusionOk="0">
+                <a:moveTo>
+                  <a:pt x="0" y="202326"/>
+                </a:moveTo>
+                <a:cubicBezTo>
+                  <a:pt x="-4482" y="87820"/>
+                  <a:pt x="67944" y="8497"/>
+                  <a:pt x="202326" y="0"/>
+                </a:cubicBezTo>
+                <a:cubicBezTo>
+                  <a:pt x="485467" y="-16537"/>
+                  <a:pt x="622590" y="33956"/>
+                  <a:pt x="819180" y="0"/>
+                </a:cubicBezTo>
+                <a:cubicBezTo>
+                  <a:pt x="1015770" y="-33956"/>
+                  <a:pt x="1101224" y="48252"/>
+                  <a:pt x="1308408" y="0"/>
+                </a:cubicBezTo>
+                <a:cubicBezTo>
+                  <a:pt x="1515592" y="-48252"/>
+                  <a:pt x="1635004" y="50099"/>
+                  <a:pt x="1755095" y="0"/>
+                </a:cubicBezTo>
+                <a:cubicBezTo>
+                  <a:pt x="1875186" y="-50099"/>
+                  <a:pt x="2191388" y="4252"/>
+                  <a:pt x="2329408" y="0"/>
+                </a:cubicBezTo>
+                <a:cubicBezTo>
+                  <a:pt x="2467428" y="-4252"/>
+                  <a:pt x="2666761" y="55587"/>
+                  <a:pt x="2818636" y="0"/>
+                </a:cubicBezTo>
+                <a:cubicBezTo>
+                  <a:pt x="2970511" y="-55587"/>
+                  <a:pt x="3287266" y="29637"/>
+                  <a:pt x="3435490" y="0"/>
+                </a:cubicBezTo>
+                <a:cubicBezTo>
+                  <a:pt x="3583714" y="-29637"/>
+                  <a:pt x="3683091" y="7055"/>
+                  <a:pt x="3882177" y="0"/>
+                </a:cubicBezTo>
+                <a:cubicBezTo>
+                  <a:pt x="4081263" y="-7055"/>
+                  <a:pt x="4263947" y="22576"/>
+                  <a:pt x="4456489" y="0"/>
+                </a:cubicBezTo>
+                <a:cubicBezTo>
+                  <a:pt x="4580725" y="3004"/>
+                  <a:pt x="4652930" y="89632"/>
+                  <a:pt x="4658815" y="202326"/>
+                </a:cubicBezTo>
+                <a:cubicBezTo>
+                  <a:pt x="4688865" y="325324"/>
+                  <a:pt x="4634746" y="457901"/>
+                  <a:pt x="4658815" y="606966"/>
+                </a:cubicBezTo>
+                <a:cubicBezTo>
+                  <a:pt x="4682884" y="756031"/>
+                  <a:pt x="4622469" y="844144"/>
+                  <a:pt x="4658815" y="1011606"/>
+                </a:cubicBezTo>
+                <a:cubicBezTo>
+                  <a:pt x="4670900" y="1138151"/>
+                  <a:pt x="4586142" y="1198250"/>
+                  <a:pt x="4456489" y="1213932"/>
+                </a:cubicBezTo>
+                <a:cubicBezTo>
+                  <a:pt x="4305302" y="1251813"/>
+                  <a:pt x="4166599" y="1175047"/>
+                  <a:pt x="3924719" y="1213932"/>
+                </a:cubicBezTo>
+                <a:cubicBezTo>
+                  <a:pt x="3682839" y="1252817"/>
+                  <a:pt x="3636809" y="1211537"/>
+                  <a:pt x="3392948" y="1213932"/>
+                </a:cubicBezTo>
+                <a:cubicBezTo>
+                  <a:pt x="3149087" y="1216327"/>
+                  <a:pt x="3019653" y="1187995"/>
+                  <a:pt x="2776095" y="1213932"/>
+                </a:cubicBezTo>
+                <a:cubicBezTo>
+                  <a:pt x="2532537" y="1239869"/>
+                  <a:pt x="2374460" y="1202954"/>
+                  <a:pt x="2244324" y="1213932"/>
+                </a:cubicBezTo>
+                <a:cubicBezTo>
+                  <a:pt x="2114188" y="1224910"/>
+                  <a:pt x="2039497" y="1172031"/>
+                  <a:pt x="1840179" y="1213932"/>
+                </a:cubicBezTo>
+                <a:cubicBezTo>
+                  <a:pt x="1640861" y="1255833"/>
+                  <a:pt x="1583331" y="1207787"/>
+                  <a:pt x="1393492" y="1213932"/>
+                </a:cubicBezTo>
+                <a:cubicBezTo>
+                  <a:pt x="1203653" y="1220077"/>
+                  <a:pt x="914863" y="1201446"/>
+                  <a:pt x="776638" y="1213932"/>
+                </a:cubicBezTo>
+                <a:cubicBezTo>
+                  <a:pt x="638413" y="1226418"/>
+                  <a:pt x="437328" y="1174067"/>
+                  <a:pt x="202326" y="1213932"/>
+                </a:cubicBezTo>
+                <a:cubicBezTo>
+                  <a:pt x="93009" y="1218734"/>
+                  <a:pt x="-19492" y="1133627"/>
+                  <a:pt x="0" y="1011606"/>
+                </a:cubicBezTo>
+                <a:cubicBezTo>
+                  <a:pt x="-34041" y="867494"/>
+                  <a:pt x="19408" y="757014"/>
+                  <a:pt x="0" y="598873"/>
+                </a:cubicBezTo>
+                <a:cubicBezTo>
+                  <a:pt x="-19408" y="440732"/>
+                  <a:pt x="27962" y="330545"/>
+                  <a:pt x="0" y="202326"/>
+                </a:cubicBezTo>
+                <a:close/>
+              </a:path>
+            </a:pathLst>
+          </a:custGeom>
+          <a:solidFill>
+            <a:schemeClr val="accent6">
+              <a:lumMod val="40000"/>
+              <a:lumOff val="60000"/>
+            </a:schemeClr>
+          </a:solidFill>
+          <a:ln w="25400">
+            <a:bevel/>
+            <a:extLst>
+              <a:ext uri="{C807C97D-BFC1-408E-A445-0C87EB9F89A2}">
+                <ask:lineSketchStyleProps xmlns:ask="http://schemas.microsoft.com/office/drawing/2018/sketchyshapes" sd="1219033472">
+                  <a:prstGeom prst="roundRect">
+                    <a:avLst/>
+                  </a:prstGeom>
+                  <ask:type>
+                    <ask:lineSketchScribble/>
+                  </ask:type>
+                </ask:lineSketchStyleProps>
+              </a:ext>
+            </a:extLst>
+          </a:ln>
+        </p:spPr>
+        <p:style>
+          <a:lnRef idx="2">
+            <a:schemeClr val="accent1">
+              <a:shade val="15000"/>
+            </a:schemeClr>
+          </a:lnRef>
+          <a:fillRef idx="1">
+            <a:schemeClr val="accent1"/>
+          </a:fillRef>
+          <a:effectRef idx="0">
+            <a:schemeClr val="accent1"/>
+          </a:effectRef>
+          <a:fontRef idx="minor">
+            <a:schemeClr val="lt1"/>
+          </a:fontRef>
+        </p:style>
+        <p:txBody>
+          <a:bodyPr rtlCol="0" anchor="ctr"/>
+          <a:lstStyle/>
+          <a:p>
+            <a:pPr algn="ctr"/>
+            <a:endParaRPr lang="en-US"/>
+          </a:p>
+        </p:txBody>
+      </p:sp>
+      <p:sp>
+        <p:nvSpPr>
+          <p:cNvPr id="4" name="TextBox 3">
+            <a:extLst>
+              <a:ext uri="{FF2B5EF4-FFF2-40B4-BE49-F238E27FC236}">
+                <a16:creationId xmlns:a16="http://schemas.microsoft.com/office/drawing/2014/main" id="{203D777F-D3E8-D744-4DEF-24AD7856E762}"/>
+              </a:ext>
+            </a:extLst>
+          </p:cNvPr>
+          <p:cNvSpPr txBox="1"/>
+          <p:nvPr/>
+        </p:nvSpPr>
+        <p:spPr>
+          <a:xfrm>
+            <a:off x="6615108" y="2220094"/>
+            <a:ext cx="2830628" cy="1015663"/>
+          </a:xfrm>
+          <a:prstGeom prst="rect">
+            <a:avLst/>
+          </a:prstGeom>
+          <a:noFill/>
+        </p:spPr>
+        <p:txBody>
+          <a:bodyPr wrap="square" rtlCol="0">
+            <a:spAutoFit/>
+          </a:bodyPr>
+          <a:lstStyle/>
+          <a:p>
+            <a:r>
+              <a:rPr lang="en-US" sz="3000" dirty="0">
+                <a:solidFill>
+                  <a:srgbClr val="7030A0"/>
+                </a:solidFill>
+                <a:latin typeface="Times New Roman" panose="02020603050405020304" pitchFamily="18" charset="0"/>
+                <a:cs typeface="Times New Roman" panose="02020603050405020304" pitchFamily="18" charset="0"/>
+              </a:rPr>
+              <a:t>Inbound</a:t>
+            </a:r>
+            <a:br>
+              <a:rPr lang="en-US" sz="3000" dirty="0">
+                <a:solidFill>
+                  <a:srgbClr val="7030A0"/>
+                </a:solidFill>
+                <a:latin typeface="Times New Roman" panose="02020603050405020304" pitchFamily="18" charset="0"/>
+                <a:cs typeface="Times New Roman" panose="02020603050405020304" pitchFamily="18" charset="0"/>
+              </a:rPr>
+            </a:br>
+            <a:r>
+              <a:rPr lang="en-US" sz="3000" dirty="0">
+                <a:solidFill>
+                  <a:srgbClr val="7030A0"/>
+                </a:solidFill>
+                <a:latin typeface="Times New Roman" panose="02020603050405020304" pitchFamily="18" charset="0"/>
+                <a:cs typeface="Times New Roman" panose="02020603050405020304" pitchFamily="18" charset="0"/>
+              </a:rPr>
+              <a:t>Communication</a:t>
+            </a:r>
+          </a:p>
+        </p:txBody>
+      </p:sp>
+      <p:sp>
+        <p:nvSpPr>
+          <p:cNvPr id="6" name="TextBox 5">
+            <a:extLst>
+              <a:ext uri="{FF2B5EF4-FFF2-40B4-BE49-F238E27FC236}">
+                <a16:creationId xmlns:a16="http://schemas.microsoft.com/office/drawing/2014/main" id="{DD58DDA8-6876-E0AE-8F89-381FAC6BAB65}"/>
+              </a:ext>
+            </a:extLst>
+          </p:cNvPr>
+          <p:cNvSpPr txBox="1"/>
+          <p:nvPr/>
+        </p:nvSpPr>
+        <p:spPr>
+          <a:xfrm>
+            <a:off x="6615107" y="3218936"/>
+            <a:ext cx="2587489" cy="1477328"/>
+          </a:xfrm>
+          <a:prstGeom prst="rect">
+            <a:avLst/>
+          </a:prstGeom>
+          <a:noFill/>
+        </p:spPr>
+        <p:txBody>
+          <a:bodyPr wrap="square" rtlCol="0">
+            <a:spAutoFit/>
+          </a:bodyPr>
+          <a:lstStyle/>
+          <a:p>
+            <a:r>
+              <a:rPr lang="en-US" sz="3000" dirty="0">
+                <a:latin typeface="Times New Roman" panose="02020603050405020304" pitchFamily="18" charset="0"/>
+                <a:cs typeface="Times New Roman" panose="02020603050405020304" pitchFamily="18" charset="0"/>
+              </a:rPr>
+              <a:t>Unicasts </a:t>
+            </a:r>
+            <a:br>
+              <a:rPr lang="en-US" sz="3000" dirty="0">
+                <a:latin typeface="Times New Roman" panose="02020603050405020304" pitchFamily="18" charset="0"/>
+                <a:cs typeface="Times New Roman" panose="02020603050405020304" pitchFamily="18" charset="0"/>
+              </a:rPr>
+            </a:br>
+            <a:r>
+              <a:rPr lang="en-US" sz="3000" dirty="0">
+                <a:latin typeface="Times New Roman" panose="02020603050405020304" pitchFamily="18" charset="0"/>
+                <a:cs typeface="Times New Roman" panose="02020603050405020304" pitchFamily="18" charset="0"/>
+              </a:rPr>
+              <a:t>from machines to server</a:t>
+            </a:r>
+          </a:p>
+        </p:txBody>
+      </p:sp>
+      <p:sp>
+        <p:nvSpPr>
+          <p:cNvPr id="8" name="TextBox 7">
+            <a:extLst>
+              <a:ext uri="{FF2B5EF4-FFF2-40B4-BE49-F238E27FC236}">
+                <a16:creationId xmlns:a16="http://schemas.microsoft.com/office/drawing/2014/main" id="{6D8D20BF-2A80-93AB-ED2E-578DDAE30605}"/>
+              </a:ext>
+            </a:extLst>
+          </p:cNvPr>
+          <p:cNvSpPr txBox="1"/>
+          <p:nvPr/>
+        </p:nvSpPr>
+        <p:spPr>
+          <a:xfrm>
+            <a:off x="558943" y="4755944"/>
+            <a:ext cx="4247536" cy="1015663"/>
+          </a:xfrm>
+          <a:prstGeom prst="rect">
+            <a:avLst/>
+          </a:prstGeom>
+          <a:noFill/>
+        </p:spPr>
+        <p:txBody>
+          <a:bodyPr wrap="square" rtlCol="0">
+            <a:spAutoFit/>
+          </a:bodyPr>
+          <a:lstStyle/>
+          <a:p>
+            <a:pPr algn="r"/>
+            <a:r>
+              <a:rPr lang="en-US" sz="3000" dirty="0">
+                <a:latin typeface="Times New Roman" panose="02020603050405020304" pitchFamily="18" charset="0"/>
+                <a:cs typeface="Times New Roman" panose="02020603050405020304" pitchFamily="18" charset="0"/>
+              </a:rPr>
+              <a:t>e.g., market data multicast in financial exchanges</a:t>
+            </a:r>
+          </a:p>
+        </p:txBody>
+      </p:sp>
+      <p:sp>
+        <p:nvSpPr>
+          <p:cNvPr id="9" name="TextBox 8">
+            <a:extLst>
+              <a:ext uri="{FF2B5EF4-FFF2-40B4-BE49-F238E27FC236}">
+                <a16:creationId xmlns:a16="http://schemas.microsoft.com/office/drawing/2014/main" id="{61BEF6D6-7F50-3474-3C68-6B377887AF8D}"/>
+              </a:ext>
+            </a:extLst>
+          </p:cNvPr>
+          <p:cNvSpPr txBox="1"/>
+          <p:nvPr/>
+        </p:nvSpPr>
+        <p:spPr>
+          <a:xfrm>
+            <a:off x="6567336" y="4755944"/>
+            <a:ext cx="5065721" cy="1015663"/>
+          </a:xfrm>
+          <a:prstGeom prst="rect">
+            <a:avLst/>
+          </a:prstGeom>
+          <a:noFill/>
+        </p:spPr>
+        <p:txBody>
+          <a:bodyPr wrap="square" rtlCol="0">
+            <a:spAutoFit/>
+          </a:bodyPr>
+          <a:lstStyle/>
+          <a:p>
+            <a:r>
+              <a:rPr lang="en-US" sz="3000" dirty="0">
+                <a:latin typeface="Times New Roman" panose="02020603050405020304" pitchFamily="18" charset="0"/>
+                <a:cs typeface="Times New Roman" panose="02020603050405020304" pitchFamily="18" charset="0"/>
+              </a:rPr>
+              <a:t>e.g., traders submitting orders to a financial exchange server</a:t>
+            </a:r>
+          </a:p>
+        </p:txBody>
+      </p:sp>
+      <p:sp>
+        <p:nvSpPr>
+          <p:cNvPr id="10" name="TextBox 9">
+            <a:extLst>
+              <a:ext uri="{FF2B5EF4-FFF2-40B4-BE49-F238E27FC236}">
+                <a16:creationId xmlns:a16="http://schemas.microsoft.com/office/drawing/2014/main" id="{3A5C3FE4-F006-BB31-9D4D-DC6DCC7D9793}"/>
+              </a:ext>
+            </a:extLst>
+          </p:cNvPr>
+          <p:cNvSpPr txBox="1"/>
+          <p:nvPr/>
+        </p:nvSpPr>
+        <p:spPr>
+          <a:xfrm>
+            <a:off x="2124432" y="2220094"/>
+            <a:ext cx="2830628" cy="1015663"/>
+          </a:xfrm>
+          <a:prstGeom prst="rect">
+            <a:avLst/>
+          </a:prstGeom>
+          <a:noFill/>
+        </p:spPr>
+        <p:txBody>
+          <a:bodyPr wrap="square" rtlCol="0">
+            <a:spAutoFit/>
+          </a:bodyPr>
+          <a:lstStyle/>
+          <a:p>
+            <a:pPr algn="r"/>
+            <a:r>
+              <a:rPr lang="en-US" sz="3000" dirty="0">
+                <a:solidFill>
+                  <a:srgbClr val="7030A0"/>
+                </a:solidFill>
+                <a:latin typeface="Times New Roman" panose="02020603050405020304" pitchFamily="18" charset="0"/>
+                <a:cs typeface="Times New Roman" panose="02020603050405020304" pitchFamily="18" charset="0"/>
+              </a:rPr>
+              <a:t>Outbound</a:t>
+            </a:r>
+            <a:br>
+              <a:rPr lang="en-US" sz="3000" dirty="0">
+                <a:solidFill>
+                  <a:srgbClr val="7030A0"/>
+                </a:solidFill>
+                <a:latin typeface="Times New Roman" panose="02020603050405020304" pitchFamily="18" charset="0"/>
+                <a:cs typeface="Times New Roman" panose="02020603050405020304" pitchFamily="18" charset="0"/>
+              </a:rPr>
+            </a:br>
+            <a:r>
+              <a:rPr lang="en-US" sz="3000" dirty="0">
+                <a:solidFill>
+                  <a:srgbClr val="7030A0"/>
+                </a:solidFill>
+                <a:latin typeface="Times New Roman" panose="02020603050405020304" pitchFamily="18" charset="0"/>
+                <a:cs typeface="Times New Roman" panose="02020603050405020304" pitchFamily="18" charset="0"/>
+              </a:rPr>
+              <a:t>Communication</a:t>
+            </a:r>
+          </a:p>
+        </p:txBody>
+      </p:sp>
+      <p:sp>
+        <p:nvSpPr>
+          <p:cNvPr id="11" name="TextBox 10">
+            <a:extLst>
+              <a:ext uri="{FF2B5EF4-FFF2-40B4-BE49-F238E27FC236}">
+                <a16:creationId xmlns:a16="http://schemas.microsoft.com/office/drawing/2014/main" id="{1C8BC007-EF9F-C19A-5B1A-73340A3AABD0}"/>
+              </a:ext>
+            </a:extLst>
+          </p:cNvPr>
+          <p:cNvSpPr txBox="1"/>
+          <p:nvPr/>
+        </p:nvSpPr>
+        <p:spPr>
+          <a:xfrm>
+            <a:off x="2622846" y="3235757"/>
+            <a:ext cx="2249561" cy="1477328"/>
+          </a:xfrm>
+          <a:prstGeom prst="rect">
+            <a:avLst/>
+          </a:prstGeom>
+          <a:noFill/>
+        </p:spPr>
+        <p:txBody>
+          <a:bodyPr wrap="square" rtlCol="0">
+            <a:spAutoFit/>
+          </a:bodyPr>
+          <a:lstStyle/>
+          <a:p>
+            <a:pPr algn="r"/>
+            <a:r>
+              <a:rPr lang="en-US" sz="3000" dirty="0">
+                <a:latin typeface="Times New Roman" panose="02020603050405020304" pitchFamily="18" charset="0"/>
+                <a:cs typeface="Times New Roman" panose="02020603050405020304" pitchFamily="18" charset="0"/>
+              </a:rPr>
+              <a:t>Multicast from server to machines</a:t>
+            </a:r>
+          </a:p>
+        </p:txBody>
+      </p:sp>
+      <p:sp>
+        <p:nvSpPr>
+          <p:cNvPr id="13" name="Rectangle 12">
+            <a:extLst>
+              <a:ext uri="{FF2B5EF4-FFF2-40B4-BE49-F238E27FC236}">
+                <a16:creationId xmlns:a16="http://schemas.microsoft.com/office/drawing/2014/main" id="{C25B29ED-040B-60F9-E404-67AA8B15DB43}"/>
+              </a:ext>
+            </a:extLst>
+          </p:cNvPr>
+          <p:cNvSpPr/>
+          <p:nvPr/>
+        </p:nvSpPr>
+        <p:spPr>
+          <a:xfrm>
+            <a:off x="5733022" y="2774092"/>
+            <a:ext cx="45719" cy="2492991"/>
+          </a:xfrm>
+          <a:custGeom>
+            <a:avLst/>
+            <a:gdLst>
+              <a:gd name="csX0" fmla="*/ 0 w 45719"/>
+              <a:gd name="csY0" fmla="*/ 0 h 2492991"/>
+              <a:gd name="csX1" fmla="*/ 45719 w 45719"/>
+              <a:gd name="csY1" fmla="*/ 0 h 2492991"/>
+              <a:gd name="csX2" fmla="*/ 45719 w 45719"/>
+              <a:gd name="csY2" fmla="*/ 498598 h 2492991"/>
+              <a:gd name="csX3" fmla="*/ 45719 w 45719"/>
+              <a:gd name="csY3" fmla="*/ 1047056 h 2492991"/>
+              <a:gd name="csX4" fmla="*/ 45719 w 45719"/>
+              <a:gd name="csY4" fmla="*/ 1545654 h 2492991"/>
+              <a:gd name="csX5" fmla="*/ 45719 w 45719"/>
+              <a:gd name="csY5" fmla="*/ 1969463 h 2492991"/>
+              <a:gd name="csX6" fmla="*/ 45719 w 45719"/>
+              <a:gd name="csY6" fmla="*/ 2492991 h 2492991"/>
+              <a:gd name="csX7" fmla="*/ 0 w 45719"/>
+              <a:gd name="csY7" fmla="*/ 2492991 h 2492991"/>
+              <a:gd name="csX8" fmla="*/ 0 w 45719"/>
+              <a:gd name="csY8" fmla="*/ 1944533 h 2492991"/>
+              <a:gd name="csX9" fmla="*/ 0 w 45719"/>
+              <a:gd name="csY9" fmla="*/ 1421005 h 2492991"/>
+              <a:gd name="csX10" fmla="*/ 0 w 45719"/>
+              <a:gd name="csY10" fmla="*/ 922407 h 2492991"/>
+              <a:gd name="csX11" fmla="*/ 0 w 45719"/>
+              <a:gd name="csY11" fmla="*/ 0 h 2492991"/>
+            </a:gdLst>
+            <a:ahLst/>
+            <a:cxnLst>
+              <a:cxn ang="0">
+                <a:pos x="csX0" y="csY0"/>
+              </a:cxn>
+              <a:cxn ang="0">
+                <a:pos x="csX1" y="csY1"/>
+              </a:cxn>
+              <a:cxn ang="0">
+                <a:pos x="csX2" y="csY2"/>
+              </a:cxn>
+              <a:cxn ang="0">
+                <a:pos x="csX3" y="csY3"/>
+              </a:cxn>
+              <a:cxn ang="0">
+                <a:pos x="csX4" y="csY4"/>
+              </a:cxn>
+              <a:cxn ang="0">
+                <a:pos x="csX5" y="csY5"/>
+              </a:cxn>
+              <a:cxn ang="0">
+                <a:pos x="csX6" y="csY6"/>
+              </a:cxn>
+              <a:cxn ang="0">
+                <a:pos x="csX7" y="csY7"/>
+              </a:cxn>
+              <a:cxn ang="0">
+                <a:pos x="csX8" y="csY8"/>
+              </a:cxn>
+              <a:cxn ang="0">
+                <a:pos x="csX9" y="csY9"/>
+              </a:cxn>
+              <a:cxn ang="0">
+                <a:pos x="csX10" y="csY10"/>
+              </a:cxn>
+              <a:cxn ang="0">
+                <a:pos x="csX11" y="csY11"/>
+              </a:cxn>
+            </a:cxnLst>
+            <a:rect l="l" t="t" r="r" b="b"/>
+            <a:pathLst>
+              <a:path w="45719" h="2492991" fill="none" extrusionOk="0">
+                <a:moveTo>
+                  <a:pt x="0" y="0"/>
+                </a:moveTo>
+                <a:cubicBezTo>
+                  <a:pt x="15466" y="-3108"/>
+                  <a:pt x="29505" y="2787"/>
+                  <a:pt x="45719" y="0"/>
+                </a:cubicBezTo>
+                <a:cubicBezTo>
+                  <a:pt x="96714" y="244462"/>
+                  <a:pt x="38492" y="292531"/>
+                  <a:pt x="45719" y="498598"/>
+                </a:cubicBezTo>
+                <a:cubicBezTo>
+                  <a:pt x="52946" y="704665"/>
+                  <a:pt x="41215" y="773940"/>
+                  <a:pt x="45719" y="1047056"/>
+                </a:cubicBezTo>
+                <a:cubicBezTo>
+                  <a:pt x="50223" y="1320172"/>
+                  <a:pt x="20442" y="1409127"/>
+                  <a:pt x="45719" y="1545654"/>
+                </a:cubicBezTo>
+                <a:cubicBezTo>
+                  <a:pt x="70996" y="1682181"/>
+                  <a:pt x="37286" y="1837495"/>
+                  <a:pt x="45719" y="1969463"/>
+                </a:cubicBezTo>
+                <a:cubicBezTo>
+                  <a:pt x="54152" y="2101431"/>
+                  <a:pt x="20701" y="2253374"/>
+                  <a:pt x="45719" y="2492991"/>
+                </a:cubicBezTo>
+                <a:cubicBezTo>
+                  <a:pt x="34208" y="2496004"/>
+                  <a:pt x="9588" y="2489496"/>
+                  <a:pt x="0" y="2492991"/>
+                </a:cubicBezTo>
+                <a:cubicBezTo>
+                  <a:pt x="-9781" y="2257546"/>
+                  <a:pt x="17963" y="2141047"/>
+                  <a:pt x="0" y="1944533"/>
+                </a:cubicBezTo>
+                <a:cubicBezTo>
+                  <a:pt x="-17963" y="1748019"/>
+                  <a:pt x="28336" y="1642462"/>
+                  <a:pt x="0" y="1421005"/>
+                </a:cubicBezTo>
+                <a:cubicBezTo>
+                  <a:pt x="-28336" y="1199548"/>
+                  <a:pt x="13584" y="1089980"/>
+                  <a:pt x="0" y="922407"/>
+                </a:cubicBezTo>
+                <a:cubicBezTo>
+                  <a:pt x="-13584" y="754834"/>
+                  <a:pt x="77438" y="239728"/>
+                  <a:pt x="0" y="0"/>
+                </a:cubicBezTo>
+                <a:close/>
+              </a:path>
+              <a:path w="45719" h="2492991" stroke="0" extrusionOk="0">
+                <a:moveTo>
+                  <a:pt x="0" y="0"/>
+                </a:moveTo>
+                <a:cubicBezTo>
+                  <a:pt x="18173" y="-1477"/>
+                  <a:pt x="31455" y="3772"/>
+                  <a:pt x="45719" y="0"/>
+                </a:cubicBezTo>
+                <a:cubicBezTo>
+                  <a:pt x="49078" y="113210"/>
+                  <a:pt x="23101" y="288473"/>
+                  <a:pt x="45719" y="423808"/>
+                </a:cubicBezTo>
+                <a:cubicBezTo>
+                  <a:pt x="68337" y="559143"/>
+                  <a:pt x="-15560" y="770450"/>
+                  <a:pt x="45719" y="972266"/>
+                </a:cubicBezTo>
+                <a:cubicBezTo>
+                  <a:pt x="106998" y="1174082"/>
+                  <a:pt x="-1609" y="1235521"/>
+                  <a:pt x="45719" y="1470865"/>
+                </a:cubicBezTo>
+                <a:cubicBezTo>
+                  <a:pt x="93047" y="1706209"/>
+                  <a:pt x="30494" y="1816253"/>
+                  <a:pt x="45719" y="1919603"/>
+                </a:cubicBezTo>
+                <a:cubicBezTo>
+                  <a:pt x="60944" y="2022953"/>
+                  <a:pt x="28474" y="2341608"/>
+                  <a:pt x="45719" y="2492991"/>
+                </a:cubicBezTo>
+                <a:cubicBezTo>
+                  <a:pt x="22941" y="2494258"/>
+                  <a:pt x="12902" y="2490132"/>
+                  <a:pt x="0" y="2492991"/>
+                </a:cubicBezTo>
+                <a:cubicBezTo>
+                  <a:pt x="-59460" y="2250702"/>
+                  <a:pt x="24665" y="2128448"/>
+                  <a:pt x="0" y="1944533"/>
+                </a:cubicBezTo>
+                <a:cubicBezTo>
+                  <a:pt x="-24665" y="1760618"/>
+                  <a:pt x="21622" y="1582387"/>
+                  <a:pt x="0" y="1396075"/>
+                </a:cubicBezTo>
+                <a:cubicBezTo>
+                  <a:pt x="-21622" y="1209763"/>
+                  <a:pt x="53927" y="1082433"/>
+                  <a:pt x="0" y="922407"/>
+                </a:cubicBezTo>
+                <a:cubicBezTo>
+                  <a:pt x="-53927" y="762381"/>
+                  <a:pt x="37230" y="594554"/>
+                  <a:pt x="0" y="448738"/>
+                </a:cubicBezTo>
+                <a:cubicBezTo>
+                  <a:pt x="-37230" y="302922"/>
+                  <a:pt x="25725" y="182915"/>
+                  <a:pt x="0" y="0"/>
+                </a:cubicBezTo>
+                <a:close/>
+              </a:path>
+            </a:pathLst>
+          </a:custGeom>
+          <a:solidFill>
+            <a:srgbClr val="7030A0"/>
+          </a:solidFill>
+          <a:ln>
+            <a:solidFill>
+              <a:srgbClr val="7030A0"/>
+            </a:solidFill>
+            <a:extLst>
+              <a:ext uri="{C807C97D-BFC1-408E-A445-0C87EB9F89A2}">
+                <ask:lineSketchStyleProps xmlns:ask="http://schemas.microsoft.com/office/drawing/2018/sketchyshapes" sd="1219033472">
+                  <a:prstGeom prst="rect">
+                    <a:avLst/>
+                  </a:prstGeom>
+                  <ask:type>
+                    <ask:lineSketchScribble/>
+                  </ask:type>
+                </ask:lineSketchStyleProps>
+              </a:ext>
+            </a:extLst>
+          </a:ln>
+        </p:spPr>
+        <p:style>
+          <a:lnRef idx="2">
+            <a:schemeClr val="accent1">
+              <a:shade val="15000"/>
+            </a:schemeClr>
+          </a:lnRef>
+          <a:fillRef idx="1">
+            <a:schemeClr val="accent1"/>
+          </a:fillRef>
+          <a:effectRef idx="0">
+            <a:schemeClr val="accent1"/>
+          </a:effectRef>
+          <a:fontRef idx="minor">
+            <a:schemeClr val="lt1"/>
+          </a:fontRef>
+        </p:style>
+        <p:txBody>
+          <a:bodyPr rtlCol="0" anchor="ctr"/>
+          <a:lstStyle/>
+          <a:p>
+            <a:pPr algn="ctr"/>
+            <a:endParaRPr lang="en-US">
+              <a:latin typeface="Times New Roman" panose="02020603050405020304" pitchFamily="18" charset="0"/>
+              <a:cs typeface="Times New Roman" panose="02020603050405020304" pitchFamily="18" charset="0"/>
+            </a:endParaRPr>
+          </a:p>
+        </p:txBody>
+      </p:sp>
+    </p:spTree>
+    <p:extLst>
+      <p:ext uri="{BB962C8B-B14F-4D97-AF65-F5344CB8AC3E}">
+        <p14:creationId xmlns:p14="http://schemas.microsoft.com/office/powerpoint/2010/main" val="4248009595"/>
+      </p:ext>
+    </p:extLst>
+  </p:cSld>
+  <p:clrMapOvr>
+    <a:masterClrMapping/>
+  </p:clrMapOvr>
+  <mc:AlternateContent xmlns:mc="http://schemas.openxmlformats.org/markup-compatibility/2006" xmlns:p159="http://schemas.microsoft.com/office/powerpoint/2015/09/main">
+    <mc:Choice Requires="p159">
+      <p:transition spd="med">
+        <p159:morph option="byWord"/>
+      </p:transition>
+    </mc:Choice>
+    <mc:Fallback xmlns="">
       <p:transition spd="med">
         <p:fade/>
       </p:transition>
@@ -6997,7 +9815,1745 @@
 </p:sld>
 </file>
 
-<file path=ppt/slides/slide12.xml><?xml version="1.0" encoding="utf-8"?>
+<file path=ppt/slides/slide14.xml><?xml version="1.0" encoding="utf-8"?>
+<p:sld xmlns:a="http://schemas.openxmlformats.org/drawingml/2006/main" xmlns:r="http://schemas.openxmlformats.org/officeDocument/2006/relationships" xmlns:p="http://schemas.openxmlformats.org/presentationml/2006/main">
+  <p:cSld>
+    <p:spTree>
+      <p:nvGrpSpPr>
+        <p:cNvPr id="1" name="">
+          <a:extLst>
+            <a:ext uri="{FF2B5EF4-FFF2-40B4-BE49-F238E27FC236}">
+              <a16:creationId xmlns:a16="http://schemas.microsoft.com/office/drawing/2014/main" id="{E9038491-5CC0-F458-8C52-AD9ED97CFC58}"/>
+            </a:ext>
+          </a:extLst>
+        </p:cNvPr>
+        <p:cNvGrpSpPr/>
+        <p:nvPr/>
+      </p:nvGrpSpPr>
+      <p:grpSpPr>
+        <a:xfrm>
+          <a:off x="0" y="0"/>
+          <a:ext cx="0" cy="0"/>
+          <a:chOff x="0" y="0"/>
+          <a:chExt cx="0" cy="0"/>
+        </a:xfrm>
+      </p:grpSpPr>
+      <p:sp>
+        <p:nvSpPr>
+          <p:cNvPr id="17" name="Rectangle 16">
+            <a:extLst>
+              <a:ext uri="{FF2B5EF4-FFF2-40B4-BE49-F238E27FC236}">
+                <a16:creationId xmlns:a16="http://schemas.microsoft.com/office/drawing/2014/main" id="{2BF42178-8D05-1E52-C3DF-AD000D2DB441}"/>
+              </a:ext>
+            </a:extLst>
+          </p:cNvPr>
+          <p:cNvSpPr/>
+          <p:nvPr/>
+        </p:nvSpPr>
+        <p:spPr>
+          <a:xfrm rot="16200000">
+            <a:off x="2522582" y="-387076"/>
+            <a:ext cx="68673" cy="3246390"/>
+          </a:xfrm>
+          <a:prstGeom prst="rect">
+            <a:avLst/>
+          </a:prstGeom>
+          <a:solidFill>
+            <a:srgbClr val="FF0000"/>
+          </a:solidFill>
+          <a:ln>
+            <a:solidFill>
+              <a:srgbClr val="FF0000"/>
+            </a:solidFill>
+          </a:ln>
+        </p:spPr>
+        <p:style>
+          <a:lnRef idx="2">
+            <a:schemeClr val="accent1">
+              <a:shade val="15000"/>
+            </a:schemeClr>
+          </a:lnRef>
+          <a:fillRef idx="1">
+            <a:schemeClr val="accent1"/>
+          </a:fillRef>
+          <a:effectRef idx="0">
+            <a:schemeClr val="accent1"/>
+          </a:effectRef>
+          <a:fontRef idx="minor">
+            <a:schemeClr val="lt1"/>
+          </a:fontRef>
+        </p:style>
+        <p:txBody>
+          <a:bodyPr rtlCol="0" anchor="ctr"/>
+          <a:lstStyle/>
+          <a:p>
+            <a:pPr algn="ctr"/>
+            <a:endParaRPr lang="en-US">
+              <a:latin typeface="Times New Roman" panose="02020603050405020304" pitchFamily="18" charset="0"/>
+              <a:cs typeface="Times New Roman" panose="02020603050405020304" pitchFamily="18" charset="0"/>
+            </a:endParaRPr>
+          </a:p>
+        </p:txBody>
+      </p:sp>
+      <p:sp>
+        <p:nvSpPr>
+          <p:cNvPr id="18" name="Rectangle 17">
+            <a:extLst>
+              <a:ext uri="{FF2B5EF4-FFF2-40B4-BE49-F238E27FC236}">
+                <a16:creationId xmlns:a16="http://schemas.microsoft.com/office/drawing/2014/main" id="{A13B306A-69EB-6385-B029-06F97A345912}"/>
+              </a:ext>
+            </a:extLst>
+          </p:cNvPr>
+          <p:cNvSpPr/>
+          <p:nvPr/>
+        </p:nvSpPr>
+        <p:spPr>
+          <a:xfrm rot="16200000">
+            <a:off x="2522581" y="-318404"/>
+            <a:ext cx="68674" cy="3246390"/>
+          </a:xfrm>
+          <a:prstGeom prst="rect">
+            <a:avLst/>
+          </a:prstGeom>
+          <a:solidFill>
+            <a:srgbClr val="7030A0"/>
+          </a:solidFill>
+          <a:ln>
+            <a:solidFill>
+              <a:srgbClr val="7030A0"/>
+            </a:solidFill>
+          </a:ln>
+        </p:spPr>
+        <p:style>
+          <a:lnRef idx="2">
+            <a:schemeClr val="accent1">
+              <a:shade val="15000"/>
+            </a:schemeClr>
+          </a:lnRef>
+          <a:fillRef idx="1">
+            <a:schemeClr val="accent1"/>
+          </a:fillRef>
+          <a:effectRef idx="0">
+            <a:schemeClr val="accent1"/>
+          </a:effectRef>
+          <a:fontRef idx="minor">
+            <a:schemeClr val="lt1"/>
+          </a:fontRef>
+        </p:style>
+        <p:txBody>
+          <a:bodyPr rtlCol="0" anchor="ctr"/>
+          <a:lstStyle/>
+          <a:p>
+            <a:pPr algn="ctr"/>
+            <a:endParaRPr lang="en-US">
+              <a:latin typeface="Times New Roman" panose="02020603050405020304" pitchFamily="18" charset="0"/>
+              <a:cs typeface="Times New Roman" panose="02020603050405020304" pitchFamily="18" charset="0"/>
+            </a:endParaRPr>
+          </a:p>
+        </p:txBody>
+      </p:sp>
+      <p:sp>
+        <p:nvSpPr>
+          <p:cNvPr id="12" name="TextBox 11">
+            <a:extLst>
+              <a:ext uri="{FF2B5EF4-FFF2-40B4-BE49-F238E27FC236}">
+                <a16:creationId xmlns:a16="http://schemas.microsoft.com/office/drawing/2014/main" id="{9171BF48-CB24-D447-3EC6-0EC13DF6ADAC}"/>
+              </a:ext>
+            </a:extLst>
+          </p:cNvPr>
+          <p:cNvSpPr txBox="1"/>
+          <p:nvPr/>
+        </p:nvSpPr>
+        <p:spPr>
+          <a:xfrm>
+            <a:off x="772906" y="405121"/>
+            <a:ext cx="5095723" cy="830997"/>
+          </a:xfrm>
+          <a:prstGeom prst="rect">
+            <a:avLst/>
+          </a:prstGeom>
+          <a:noFill/>
+        </p:spPr>
+        <p:txBody>
+          <a:bodyPr wrap="square" rtlCol="0">
+            <a:spAutoFit/>
+          </a:bodyPr>
+          <a:lstStyle/>
+          <a:p>
+            <a:r>
+              <a:rPr lang="en-US" sz="4800" dirty="0">
+                <a:latin typeface="Times New Roman" panose="02020603050405020304" pitchFamily="18" charset="0"/>
+                <a:cs typeface="Times New Roman" panose="02020603050405020304" pitchFamily="18" charset="0"/>
+              </a:rPr>
+              <a:t>c</a:t>
+            </a:r>
+            <a:r>
+              <a:rPr lang="en-US" sz="3000" dirty="0">
+                <a:latin typeface="Times New Roman" panose="02020603050405020304" pitchFamily="18" charset="0"/>
+                <a:cs typeface="Times New Roman" panose="02020603050405020304" pitchFamily="18" charset="0"/>
+              </a:rPr>
+              <a:t>ompetitive </a:t>
+            </a:r>
+            <a:r>
+              <a:rPr lang="en-US" sz="4800" dirty="0">
+                <a:latin typeface="Times New Roman" panose="02020603050405020304" pitchFamily="18" charset="0"/>
+                <a:cs typeface="Times New Roman" panose="02020603050405020304" pitchFamily="18" charset="0"/>
+              </a:rPr>
+              <a:t>s</a:t>
+            </a:r>
+            <a:r>
+              <a:rPr lang="en-US" sz="3000" dirty="0">
+                <a:latin typeface="Times New Roman" panose="02020603050405020304" pitchFamily="18" charset="0"/>
+                <a:cs typeface="Times New Roman" panose="02020603050405020304" pitchFamily="18" charset="0"/>
+              </a:rPr>
+              <a:t>ystems</a:t>
+            </a:r>
+          </a:p>
+        </p:txBody>
+      </p:sp>
+      <p:sp>
+        <p:nvSpPr>
+          <p:cNvPr id="2" name="TextBox 1">
+            <a:extLst>
+              <a:ext uri="{FF2B5EF4-FFF2-40B4-BE49-F238E27FC236}">
+                <a16:creationId xmlns:a16="http://schemas.microsoft.com/office/drawing/2014/main" id="{EE84CE14-AF67-E732-C1A2-0F030DD9D5AB}"/>
+              </a:ext>
+            </a:extLst>
+          </p:cNvPr>
+          <p:cNvSpPr txBox="1"/>
+          <p:nvPr/>
+        </p:nvSpPr>
+        <p:spPr>
+          <a:xfrm>
+            <a:off x="4806479" y="716456"/>
+            <a:ext cx="6410817" cy="553998"/>
+          </a:xfrm>
+          <a:prstGeom prst="rect">
+            <a:avLst/>
+          </a:prstGeom>
+          <a:noFill/>
+        </p:spPr>
+        <p:txBody>
+          <a:bodyPr wrap="square" rtlCol="0">
+            <a:spAutoFit/>
+          </a:bodyPr>
+          <a:lstStyle/>
+          <a:p>
+            <a:r>
+              <a:rPr lang="en-US" sz="3000" dirty="0">
+                <a:solidFill>
+                  <a:srgbClr val="7030A0"/>
+                </a:solidFill>
+                <a:latin typeface="Times New Roman" panose="02020603050405020304" pitchFamily="18" charset="0"/>
+                <a:cs typeface="Times New Roman" panose="02020603050405020304" pitchFamily="18" charset="0"/>
+              </a:rPr>
+              <a:t>Two Common Communication Patterns</a:t>
+            </a:r>
+          </a:p>
+        </p:txBody>
+      </p:sp>
+      <p:sp>
+        <p:nvSpPr>
+          <p:cNvPr id="3" name="Rounded Rectangle 2">
+            <a:extLst>
+              <a:ext uri="{FF2B5EF4-FFF2-40B4-BE49-F238E27FC236}">
+                <a16:creationId xmlns:a16="http://schemas.microsoft.com/office/drawing/2014/main" id="{DBF43B3E-FBFD-0D0E-E41F-CDCEAE3DE379}"/>
+              </a:ext>
+            </a:extLst>
+          </p:cNvPr>
+          <p:cNvSpPr/>
+          <p:nvPr/>
+        </p:nvSpPr>
+        <p:spPr>
+          <a:xfrm>
+            <a:off x="472966" y="4755944"/>
+            <a:ext cx="4482094" cy="1213932"/>
+          </a:xfrm>
+          <a:custGeom>
+            <a:avLst/>
+            <a:gdLst>
+              <a:gd name="csX0" fmla="*/ 0 w 4482094"/>
+              <a:gd name="csY0" fmla="*/ 202326 h 1213932"/>
+              <a:gd name="csX1" fmla="*/ 202326 w 4482094"/>
+              <a:gd name="csY1" fmla="*/ 0 h 1213932"/>
+              <a:gd name="csX2" fmla="*/ 703269 w 4482094"/>
+              <a:gd name="csY2" fmla="*/ 0 h 1213932"/>
+              <a:gd name="csX3" fmla="*/ 1163437 w 4482094"/>
+              <a:gd name="csY3" fmla="*/ 0 h 1213932"/>
+              <a:gd name="csX4" fmla="*/ 1705155 w 4482094"/>
+              <a:gd name="csY4" fmla="*/ 0 h 1213932"/>
+              <a:gd name="csX5" fmla="*/ 2328421 w 4482094"/>
+              <a:gd name="csY5" fmla="*/ 0 h 1213932"/>
+              <a:gd name="csX6" fmla="*/ 2992461 w 4482094"/>
+              <a:gd name="csY6" fmla="*/ 0 h 1213932"/>
+              <a:gd name="csX7" fmla="*/ 3534179 w 4482094"/>
+              <a:gd name="csY7" fmla="*/ 0 h 1213932"/>
+              <a:gd name="csX8" fmla="*/ 4279768 w 4482094"/>
+              <a:gd name="csY8" fmla="*/ 0 h 1213932"/>
+              <a:gd name="csX9" fmla="*/ 4482094 w 4482094"/>
+              <a:gd name="csY9" fmla="*/ 202326 h 1213932"/>
+              <a:gd name="csX10" fmla="*/ 4482094 w 4482094"/>
+              <a:gd name="csY10" fmla="*/ 598873 h 1213932"/>
+              <a:gd name="csX11" fmla="*/ 4482094 w 4482094"/>
+              <a:gd name="csY11" fmla="*/ 1011606 h 1213932"/>
+              <a:gd name="csX12" fmla="*/ 4279768 w 4482094"/>
+              <a:gd name="csY12" fmla="*/ 1213932 h 1213932"/>
+              <a:gd name="csX13" fmla="*/ 3615727 w 4482094"/>
+              <a:gd name="csY13" fmla="*/ 1213932 h 1213932"/>
+              <a:gd name="csX14" fmla="*/ 2992461 w 4482094"/>
+              <a:gd name="csY14" fmla="*/ 1213932 h 1213932"/>
+              <a:gd name="csX15" fmla="*/ 2369195 w 4482094"/>
+              <a:gd name="csY15" fmla="*/ 1213932 h 1213932"/>
+              <a:gd name="csX16" fmla="*/ 1909027 w 4482094"/>
+              <a:gd name="csY16" fmla="*/ 1213932 h 1213932"/>
+              <a:gd name="csX17" fmla="*/ 1448858 w 4482094"/>
+              <a:gd name="csY17" fmla="*/ 1213932 h 1213932"/>
+              <a:gd name="csX18" fmla="*/ 988690 w 4482094"/>
+              <a:gd name="csY18" fmla="*/ 1213932 h 1213932"/>
+              <a:gd name="csX19" fmla="*/ 202326 w 4482094"/>
+              <a:gd name="csY19" fmla="*/ 1213932 h 1213932"/>
+              <a:gd name="csX20" fmla="*/ 0 w 4482094"/>
+              <a:gd name="csY20" fmla="*/ 1011606 h 1213932"/>
+              <a:gd name="csX21" fmla="*/ 0 w 4482094"/>
+              <a:gd name="csY21" fmla="*/ 623152 h 1213932"/>
+              <a:gd name="csX22" fmla="*/ 0 w 4482094"/>
+              <a:gd name="csY22" fmla="*/ 202326 h 1213932"/>
+            </a:gdLst>
+            <a:ahLst/>
+            <a:cxnLst>
+              <a:cxn ang="0">
+                <a:pos x="csX0" y="csY0"/>
+              </a:cxn>
+              <a:cxn ang="0">
+                <a:pos x="csX1" y="csY1"/>
+              </a:cxn>
+              <a:cxn ang="0">
+                <a:pos x="csX2" y="csY2"/>
+              </a:cxn>
+              <a:cxn ang="0">
+                <a:pos x="csX3" y="csY3"/>
+              </a:cxn>
+              <a:cxn ang="0">
+                <a:pos x="csX4" y="csY4"/>
+              </a:cxn>
+              <a:cxn ang="0">
+                <a:pos x="csX5" y="csY5"/>
+              </a:cxn>
+              <a:cxn ang="0">
+                <a:pos x="csX6" y="csY6"/>
+              </a:cxn>
+              <a:cxn ang="0">
+                <a:pos x="csX7" y="csY7"/>
+              </a:cxn>
+              <a:cxn ang="0">
+                <a:pos x="csX8" y="csY8"/>
+              </a:cxn>
+              <a:cxn ang="0">
+                <a:pos x="csX9" y="csY9"/>
+              </a:cxn>
+              <a:cxn ang="0">
+                <a:pos x="csX10" y="csY10"/>
+              </a:cxn>
+              <a:cxn ang="0">
+                <a:pos x="csX11" y="csY11"/>
+              </a:cxn>
+              <a:cxn ang="0">
+                <a:pos x="csX12" y="csY12"/>
+              </a:cxn>
+              <a:cxn ang="0">
+                <a:pos x="csX13" y="csY13"/>
+              </a:cxn>
+              <a:cxn ang="0">
+                <a:pos x="csX14" y="csY14"/>
+              </a:cxn>
+              <a:cxn ang="0">
+                <a:pos x="csX15" y="csY15"/>
+              </a:cxn>
+              <a:cxn ang="0">
+                <a:pos x="csX16" y="csY16"/>
+              </a:cxn>
+              <a:cxn ang="0">
+                <a:pos x="csX17" y="csY17"/>
+              </a:cxn>
+              <a:cxn ang="0">
+                <a:pos x="csX18" y="csY18"/>
+              </a:cxn>
+              <a:cxn ang="0">
+                <a:pos x="csX19" y="csY19"/>
+              </a:cxn>
+              <a:cxn ang="0">
+                <a:pos x="csX20" y="csY20"/>
+              </a:cxn>
+              <a:cxn ang="0">
+                <a:pos x="csX21" y="csY21"/>
+              </a:cxn>
+              <a:cxn ang="0">
+                <a:pos x="csX22" y="csY22"/>
+              </a:cxn>
+            </a:cxnLst>
+            <a:rect l="l" t="t" r="r" b="b"/>
+            <a:pathLst>
+              <a:path w="4482094" h="1213932" fill="none" extrusionOk="0">
+                <a:moveTo>
+                  <a:pt x="0" y="202326"/>
+                </a:moveTo>
+                <a:cubicBezTo>
+                  <a:pt x="26695" y="78017"/>
+                  <a:pt x="75354" y="6686"/>
+                  <a:pt x="202326" y="0"/>
+                </a:cubicBezTo>
+                <a:cubicBezTo>
+                  <a:pt x="310846" y="-50018"/>
+                  <a:pt x="593216" y="34946"/>
+                  <a:pt x="703269" y="0"/>
+                </a:cubicBezTo>
+                <a:cubicBezTo>
+                  <a:pt x="813322" y="-34946"/>
+                  <a:pt x="955403" y="25942"/>
+                  <a:pt x="1163437" y="0"/>
+                </a:cubicBezTo>
+                <a:cubicBezTo>
+                  <a:pt x="1371471" y="-25942"/>
+                  <a:pt x="1593315" y="40294"/>
+                  <a:pt x="1705155" y="0"/>
+                </a:cubicBezTo>
+                <a:cubicBezTo>
+                  <a:pt x="1816995" y="-40294"/>
+                  <a:pt x="2122609" y="42548"/>
+                  <a:pt x="2328421" y="0"/>
+                </a:cubicBezTo>
+                <a:cubicBezTo>
+                  <a:pt x="2534233" y="-42548"/>
+                  <a:pt x="2780578" y="59133"/>
+                  <a:pt x="2992461" y="0"/>
+                </a:cubicBezTo>
+                <a:cubicBezTo>
+                  <a:pt x="3204344" y="-59133"/>
+                  <a:pt x="3421836" y="36180"/>
+                  <a:pt x="3534179" y="0"/>
+                </a:cubicBezTo>
+                <a:cubicBezTo>
+                  <a:pt x="3646522" y="-36180"/>
+                  <a:pt x="4090705" y="35347"/>
+                  <a:pt x="4279768" y="0"/>
+                </a:cubicBezTo>
+                <a:cubicBezTo>
+                  <a:pt x="4374039" y="17153"/>
+                  <a:pt x="4478954" y="94594"/>
+                  <a:pt x="4482094" y="202326"/>
+                </a:cubicBezTo>
+                <a:cubicBezTo>
+                  <a:pt x="4499112" y="317165"/>
+                  <a:pt x="4466703" y="476425"/>
+                  <a:pt x="4482094" y="598873"/>
+                </a:cubicBezTo>
+                <a:cubicBezTo>
+                  <a:pt x="4497485" y="721321"/>
+                  <a:pt x="4433159" y="915363"/>
+                  <a:pt x="4482094" y="1011606"/>
+                </a:cubicBezTo>
+                <a:cubicBezTo>
+                  <a:pt x="4500655" y="1107200"/>
+                  <a:pt x="4371140" y="1231747"/>
+                  <a:pt x="4279768" y="1213932"/>
+                </a:cubicBezTo>
+                <a:cubicBezTo>
+                  <a:pt x="3949763" y="1262404"/>
+                  <a:pt x="3886087" y="1171221"/>
+                  <a:pt x="3615727" y="1213932"/>
+                </a:cubicBezTo>
+                <a:cubicBezTo>
+                  <a:pt x="3345367" y="1256643"/>
+                  <a:pt x="3188927" y="1158815"/>
+                  <a:pt x="2992461" y="1213932"/>
+                </a:cubicBezTo>
+                <a:cubicBezTo>
+                  <a:pt x="2795995" y="1269049"/>
+                  <a:pt x="2642429" y="1202278"/>
+                  <a:pt x="2369195" y="1213932"/>
+                </a:cubicBezTo>
+                <a:cubicBezTo>
+                  <a:pt x="2095961" y="1225586"/>
+                  <a:pt x="2124900" y="1207898"/>
+                  <a:pt x="1909027" y="1213932"/>
+                </a:cubicBezTo>
+                <a:cubicBezTo>
+                  <a:pt x="1693154" y="1219966"/>
+                  <a:pt x="1674914" y="1164025"/>
+                  <a:pt x="1448858" y="1213932"/>
+                </a:cubicBezTo>
+                <a:cubicBezTo>
+                  <a:pt x="1222802" y="1263839"/>
+                  <a:pt x="1114471" y="1165257"/>
+                  <a:pt x="988690" y="1213932"/>
+                </a:cubicBezTo>
+                <a:cubicBezTo>
+                  <a:pt x="862909" y="1262607"/>
+                  <a:pt x="434083" y="1185791"/>
+                  <a:pt x="202326" y="1213932"/>
+                </a:cubicBezTo>
+                <a:cubicBezTo>
+                  <a:pt x="103782" y="1218548"/>
+                  <a:pt x="15230" y="1124784"/>
+                  <a:pt x="0" y="1011606"/>
+                </a:cubicBezTo>
+                <a:cubicBezTo>
+                  <a:pt x="-5740" y="817584"/>
+                  <a:pt x="4281" y="721549"/>
+                  <a:pt x="0" y="623152"/>
+                </a:cubicBezTo>
+                <a:cubicBezTo>
+                  <a:pt x="-4281" y="524755"/>
+                  <a:pt x="41708" y="293725"/>
+                  <a:pt x="0" y="202326"/>
+                </a:cubicBezTo>
+                <a:close/>
+              </a:path>
+              <a:path w="4482094" h="1213932" stroke="0" extrusionOk="0">
+                <a:moveTo>
+                  <a:pt x="0" y="202326"/>
+                </a:moveTo>
+                <a:cubicBezTo>
+                  <a:pt x="-16723" y="104191"/>
+                  <a:pt x="101543" y="-28700"/>
+                  <a:pt x="202326" y="0"/>
+                </a:cubicBezTo>
+                <a:cubicBezTo>
+                  <a:pt x="436127" y="-38849"/>
+                  <a:pt x="523360" y="22818"/>
+                  <a:pt x="784818" y="0"/>
+                </a:cubicBezTo>
+                <a:cubicBezTo>
+                  <a:pt x="1046276" y="-22818"/>
+                  <a:pt x="1235129" y="60004"/>
+                  <a:pt x="1448858" y="0"/>
+                </a:cubicBezTo>
+                <a:cubicBezTo>
+                  <a:pt x="1662587" y="-60004"/>
+                  <a:pt x="1803950" y="17905"/>
+                  <a:pt x="1909027" y="0"/>
+                </a:cubicBezTo>
+                <a:cubicBezTo>
+                  <a:pt x="2014104" y="-17905"/>
+                  <a:pt x="2245709" y="15579"/>
+                  <a:pt x="2369195" y="0"/>
+                </a:cubicBezTo>
+                <a:cubicBezTo>
+                  <a:pt x="2492681" y="-15579"/>
+                  <a:pt x="2662699" y="41827"/>
+                  <a:pt x="2910912" y="0"/>
+                </a:cubicBezTo>
+                <a:cubicBezTo>
+                  <a:pt x="3159125" y="-41827"/>
+                  <a:pt x="3274654" y="25262"/>
+                  <a:pt x="3493404" y="0"/>
+                </a:cubicBezTo>
+                <a:cubicBezTo>
+                  <a:pt x="3712154" y="-25262"/>
+                  <a:pt x="4011493" y="69021"/>
+                  <a:pt x="4279768" y="0"/>
+                </a:cubicBezTo>
+                <a:cubicBezTo>
+                  <a:pt x="4400494" y="30317"/>
+                  <a:pt x="4459968" y="67561"/>
+                  <a:pt x="4482094" y="202326"/>
+                </a:cubicBezTo>
+                <a:cubicBezTo>
+                  <a:pt x="4512683" y="389701"/>
+                  <a:pt x="4438350" y="470058"/>
+                  <a:pt x="4482094" y="598873"/>
+                </a:cubicBezTo>
+                <a:cubicBezTo>
+                  <a:pt x="4525838" y="727688"/>
+                  <a:pt x="4439543" y="818110"/>
+                  <a:pt x="4482094" y="1011606"/>
+                </a:cubicBezTo>
+                <a:cubicBezTo>
+                  <a:pt x="4501699" y="1146361"/>
+                  <a:pt x="4403210" y="1213086"/>
+                  <a:pt x="4279768" y="1213932"/>
+                </a:cubicBezTo>
+                <a:cubicBezTo>
+                  <a:pt x="4053273" y="1262350"/>
+                  <a:pt x="3993693" y="1199585"/>
+                  <a:pt x="3819600" y="1213932"/>
+                </a:cubicBezTo>
+                <a:cubicBezTo>
+                  <a:pt x="3645507" y="1228279"/>
+                  <a:pt x="3564206" y="1206396"/>
+                  <a:pt x="3359431" y="1213932"/>
+                </a:cubicBezTo>
+                <a:cubicBezTo>
+                  <a:pt x="3154656" y="1221468"/>
+                  <a:pt x="3031699" y="1166407"/>
+                  <a:pt x="2899263" y="1213932"/>
+                </a:cubicBezTo>
+                <a:cubicBezTo>
+                  <a:pt x="2766827" y="1261457"/>
+                  <a:pt x="2645038" y="1211015"/>
+                  <a:pt x="2439094" y="1213932"/>
+                </a:cubicBezTo>
+                <a:cubicBezTo>
+                  <a:pt x="2233150" y="1216849"/>
+                  <a:pt x="2142178" y="1158375"/>
+                  <a:pt x="1856602" y="1213932"/>
+                </a:cubicBezTo>
+                <a:cubicBezTo>
+                  <a:pt x="1571026" y="1269489"/>
+                  <a:pt x="1587404" y="1184297"/>
+                  <a:pt x="1396434" y="1213932"/>
+                </a:cubicBezTo>
+                <a:cubicBezTo>
+                  <a:pt x="1205464" y="1243567"/>
+                  <a:pt x="999372" y="1142548"/>
+                  <a:pt x="732393" y="1213932"/>
+                </a:cubicBezTo>
+                <a:cubicBezTo>
+                  <a:pt x="465414" y="1285316"/>
+                  <a:pt x="429827" y="1204260"/>
+                  <a:pt x="202326" y="1213932"/>
+                </a:cubicBezTo>
+                <a:cubicBezTo>
+                  <a:pt x="98367" y="1220249"/>
+                  <a:pt x="15313" y="1128582"/>
+                  <a:pt x="0" y="1011606"/>
+                </a:cubicBezTo>
+                <a:cubicBezTo>
+                  <a:pt x="-22348" y="922605"/>
+                  <a:pt x="18797" y="799667"/>
+                  <a:pt x="0" y="615059"/>
+                </a:cubicBezTo>
+                <a:cubicBezTo>
+                  <a:pt x="-18797" y="430451"/>
+                  <a:pt x="27808" y="389567"/>
+                  <a:pt x="0" y="202326"/>
+                </a:cubicBezTo>
+                <a:close/>
+              </a:path>
+            </a:pathLst>
+          </a:custGeom>
+          <a:solidFill>
+            <a:schemeClr val="accent6">
+              <a:lumMod val="40000"/>
+              <a:lumOff val="60000"/>
+            </a:schemeClr>
+          </a:solidFill>
+          <a:ln w="25400">
+            <a:bevel/>
+            <a:extLst>
+              <a:ext uri="{C807C97D-BFC1-408E-A445-0C87EB9F89A2}">
+                <ask:lineSketchStyleProps xmlns:ask="http://schemas.microsoft.com/office/drawing/2018/sketchyshapes" sd="247587333">
+                  <a:prstGeom prst="roundRect">
+                    <a:avLst/>
+                  </a:prstGeom>
+                  <ask:type>
+                    <ask:lineSketchScribble/>
+                  </ask:type>
+                </ask:lineSketchStyleProps>
+              </a:ext>
+            </a:extLst>
+          </a:ln>
+        </p:spPr>
+        <p:style>
+          <a:lnRef idx="2">
+            <a:schemeClr val="accent1">
+              <a:shade val="15000"/>
+            </a:schemeClr>
+          </a:lnRef>
+          <a:fillRef idx="1">
+            <a:schemeClr val="accent1"/>
+          </a:fillRef>
+          <a:effectRef idx="0">
+            <a:schemeClr val="accent1"/>
+          </a:effectRef>
+          <a:fontRef idx="minor">
+            <a:schemeClr val="lt1"/>
+          </a:fontRef>
+        </p:style>
+        <p:txBody>
+          <a:bodyPr rtlCol="0" anchor="ctr"/>
+          <a:lstStyle/>
+          <a:p>
+            <a:pPr algn="ctr"/>
+            <a:endParaRPr lang="en-US"/>
+          </a:p>
+        </p:txBody>
+      </p:sp>
+      <p:sp>
+        <p:nvSpPr>
+          <p:cNvPr id="5" name="Rounded Rectangle 4">
+            <a:extLst>
+              <a:ext uri="{FF2B5EF4-FFF2-40B4-BE49-F238E27FC236}">
+                <a16:creationId xmlns:a16="http://schemas.microsoft.com/office/drawing/2014/main" id="{9F8CA6B4-FA51-63DB-FAA8-25BD9B9E763E}"/>
+              </a:ext>
+            </a:extLst>
+          </p:cNvPr>
+          <p:cNvSpPr/>
+          <p:nvPr/>
+        </p:nvSpPr>
+        <p:spPr>
+          <a:xfrm>
+            <a:off x="6615105" y="4696264"/>
+            <a:ext cx="4658815" cy="1213932"/>
+          </a:xfrm>
+          <a:custGeom>
+            <a:avLst/>
+            <a:gdLst>
+              <a:gd name="csX0" fmla="*/ 0 w 4658815"/>
+              <a:gd name="csY0" fmla="*/ 202326 h 1213932"/>
+              <a:gd name="csX1" fmla="*/ 202326 w 4658815"/>
+              <a:gd name="csY1" fmla="*/ 0 h 1213932"/>
+              <a:gd name="csX2" fmla="*/ 776638 w 4658815"/>
+              <a:gd name="csY2" fmla="*/ 0 h 1213932"/>
+              <a:gd name="csX3" fmla="*/ 1223325 w 4658815"/>
+              <a:gd name="csY3" fmla="*/ 0 h 1213932"/>
+              <a:gd name="csX4" fmla="*/ 1797637 w 4658815"/>
+              <a:gd name="csY4" fmla="*/ 0 h 1213932"/>
+              <a:gd name="csX5" fmla="*/ 2201783 w 4658815"/>
+              <a:gd name="csY5" fmla="*/ 0 h 1213932"/>
+              <a:gd name="csX6" fmla="*/ 2776095 w 4658815"/>
+              <a:gd name="csY6" fmla="*/ 0 h 1213932"/>
+              <a:gd name="csX7" fmla="*/ 3222782 w 4658815"/>
+              <a:gd name="csY7" fmla="*/ 0 h 1213932"/>
+              <a:gd name="csX8" fmla="*/ 3626927 w 4658815"/>
+              <a:gd name="csY8" fmla="*/ 0 h 1213932"/>
+              <a:gd name="csX9" fmla="*/ 4456489 w 4658815"/>
+              <a:gd name="csY9" fmla="*/ 0 h 1213932"/>
+              <a:gd name="csX10" fmla="*/ 4658815 w 4658815"/>
+              <a:gd name="csY10" fmla="*/ 202326 h 1213932"/>
+              <a:gd name="csX11" fmla="*/ 4658815 w 4658815"/>
+              <a:gd name="csY11" fmla="*/ 615059 h 1213932"/>
+              <a:gd name="csX12" fmla="*/ 4658815 w 4658815"/>
+              <a:gd name="csY12" fmla="*/ 1011606 h 1213932"/>
+              <a:gd name="csX13" fmla="*/ 4456489 w 4658815"/>
+              <a:gd name="csY13" fmla="*/ 1213932 h 1213932"/>
+              <a:gd name="csX14" fmla="*/ 4052344 w 4658815"/>
+              <a:gd name="csY14" fmla="*/ 1213932 h 1213932"/>
+              <a:gd name="csX15" fmla="*/ 3435490 w 4658815"/>
+              <a:gd name="csY15" fmla="*/ 1213932 h 1213932"/>
+              <a:gd name="csX16" fmla="*/ 2903720 w 4658815"/>
+              <a:gd name="csY16" fmla="*/ 1213932 h 1213932"/>
+              <a:gd name="csX17" fmla="*/ 2286866 w 4658815"/>
+              <a:gd name="csY17" fmla="*/ 1213932 h 1213932"/>
+              <a:gd name="csX18" fmla="*/ 1712554 w 4658815"/>
+              <a:gd name="csY18" fmla="*/ 1213932 h 1213932"/>
+              <a:gd name="csX19" fmla="*/ 1223325 w 4658815"/>
+              <a:gd name="csY19" fmla="*/ 1213932 h 1213932"/>
+              <a:gd name="csX20" fmla="*/ 202326 w 4658815"/>
+              <a:gd name="csY20" fmla="*/ 1213932 h 1213932"/>
+              <a:gd name="csX21" fmla="*/ 0 w 4658815"/>
+              <a:gd name="csY21" fmla="*/ 1011606 h 1213932"/>
+              <a:gd name="csX22" fmla="*/ 0 w 4658815"/>
+              <a:gd name="csY22" fmla="*/ 606966 h 1213932"/>
+              <a:gd name="csX23" fmla="*/ 0 w 4658815"/>
+              <a:gd name="csY23" fmla="*/ 202326 h 1213932"/>
+            </a:gdLst>
+            <a:ahLst/>
+            <a:cxnLst>
+              <a:cxn ang="0">
+                <a:pos x="csX0" y="csY0"/>
+              </a:cxn>
+              <a:cxn ang="0">
+                <a:pos x="csX1" y="csY1"/>
+              </a:cxn>
+              <a:cxn ang="0">
+                <a:pos x="csX2" y="csY2"/>
+              </a:cxn>
+              <a:cxn ang="0">
+                <a:pos x="csX3" y="csY3"/>
+              </a:cxn>
+              <a:cxn ang="0">
+                <a:pos x="csX4" y="csY4"/>
+              </a:cxn>
+              <a:cxn ang="0">
+                <a:pos x="csX5" y="csY5"/>
+              </a:cxn>
+              <a:cxn ang="0">
+                <a:pos x="csX6" y="csY6"/>
+              </a:cxn>
+              <a:cxn ang="0">
+                <a:pos x="csX7" y="csY7"/>
+              </a:cxn>
+              <a:cxn ang="0">
+                <a:pos x="csX8" y="csY8"/>
+              </a:cxn>
+              <a:cxn ang="0">
+                <a:pos x="csX9" y="csY9"/>
+              </a:cxn>
+              <a:cxn ang="0">
+                <a:pos x="csX10" y="csY10"/>
+              </a:cxn>
+              <a:cxn ang="0">
+                <a:pos x="csX11" y="csY11"/>
+              </a:cxn>
+              <a:cxn ang="0">
+                <a:pos x="csX12" y="csY12"/>
+              </a:cxn>
+              <a:cxn ang="0">
+                <a:pos x="csX13" y="csY13"/>
+              </a:cxn>
+              <a:cxn ang="0">
+                <a:pos x="csX14" y="csY14"/>
+              </a:cxn>
+              <a:cxn ang="0">
+                <a:pos x="csX15" y="csY15"/>
+              </a:cxn>
+              <a:cxn ang="0">
+                <a:pos x="csX16" y="csY16"/>
+              </a:cxn>
+              <a:cxn ang="0">
+                <a:pos x="csX17" y="csY17"/>
+              </a:cxn>
+              <a:cxn ang="0">
+                <a:pos x="csX18" y="csY18"/>
+              </a:cxn>
+              <a:cxn ang="0">
+                <a:pos x="csX19" y="csY19"/>
+              </a:cxn>
+              <a:cxn ang="0">
+                <a:pos x="csX20" y="csY20"/>
+              </a:cxn>
+              <a:cxn ang="0">
+                <a:pos x="csX21" y="csY21"/>
+              </a:cxn>
+              <a:cxn ang="0">
+                <a:pos x="csX22" y="csY22"/>
+              </a:cxn>
+              <a:cxn ang="0">
+                <a:pos x="csX23" y="csY23"/>
+              </a:cxn>
+            </a:cxnLst>
+            <a:rect l="l" t="t" r="r" b="b"/>
+            <a:pathLst>
+              <a:path w="4658815" h="1213932" fill="none" extrusionOk="0">
+                <a:moveTo>
+                  <a:pt x="0" y="202326"/>
+                </a:moveTo>
+                <a:cubicBezTo>
+                  <a:pt x="-13865" y="118417"/>
+                  <a:pt x="86826" y="-4987"/>
+                  <a:pt x="202326" y="0"/>
+                </a:cubicBezTo>
+                <a:cubicBezTo>
+                  <a:pt x="461530" y="-6300"/>
+                  <a:pt x="508999" y="20240"/>
+                  <a:pt x="776638" y="0"/>
+                </a:cubicBezTo>
+                <a:cubicBezTo>
+                  <a:pt x="1044277" y="-20240"/>
+                  <a:pt x="1043875" y="3992"/>
+                  <a:pt x="1223325" y="0"/>
+                </a:cubicBezTo>
+                <a:cubicBezTo>
+                  <a:pt x="1402775" y="-3992"/>
+                  <a:pt x="1646824" y="1804"/>
+                  <a:pt x="1797637" y="0"/>
+                </a:cubicBezTo>
+                <a:cubicBezTo>
+                  <a:pt x="1948450" y="-1804"/>
+                  <a:pt x="2058582" y="8185"/>
+                  <a:pt x="2201783" y="0"/>
+                </a:cubicBezTo>
+                <a:cubicBezTo>
+                  <a:pt x="2344984" y="-8185"/>
+                  <a:pt x="2546989" y="67223"/>
+                  <a:pt x="2776095" y="0"/>
+                </a:cubicBezTo>
+                <a:cubicBezTo>
+                  <a:pt x="3005201" y="-67223"/>
+                  <a:pt x="3036691" y="4785"/>
+                  <a:pt x="3222782" y="0"/>
+                </a:cubicBezTo>
+                <a:cubicBezTo>
+                  <a:pt x="3408873" y="-4785"/>
+                  <a:pt x="3499934" y="35826"/>
+                  <a:pt x="3626927" y="0"/>
+                </a:cubicBezTo>
+                <a:cubicBezTo>
+                  <a:pt x="3753921" y="-35826"/>
+                  <a:pt x="4236949" y="27302"/>
+                  <a:pt x="4456489" y="0"/>
+                </a:cubicBezTo>
+                <a:cubicBezTo>
+                  <a:pt x="4562502" y="21437"/>
+                  <a:pt x="4685616" y="98271"/>
+                  <a:pt x="4658815" y="202326"/>
+                </a:cubicBezTo>
+                <a:cubicBezTo>
+                  <a:pt x="4699777" y="365515"/>
+                  <a:pt x="4655207" y="490933"/>
+                  <a:pt x="4658815" y="615059"/>
+                </a:cubicBezTo>
+                <a:cubicBezTo>
+                  <a:pt x="4662423" y="739185"/>
+                  <a:pt x="4635272" y="887276"/>
+                  <a:pt x="4658815" y="1011606"/>
+                </a:cubicBezTo>
+                <a:cubicBezTo>
+                  <a:pt x="4669788" y="1150168"/>
+                  <a:pt x="4587821" y="1233312"/>
+                  <a:pt x="4456489" y="1213932"/>
+                </a:cubicBezTo>
+                <a:cubicBezTo>
+                  <a:pt x="4299887" y="1239580"/>
+                  <a:pt x="4187456" y="1179398"/>
+                  <a:pt x="4052344" y="1213932"/>
+                </a:cubicBezTo>
+                <a:cubicBezTo>
+                  <a:pt x="3917233" y="1248466"/>
+                  <a:pt x="3661664" y="1199401"/>
+                  <a:pt x="3435490" y="1213932"/>
+                </a:cubicBezTo>
+                <a:cubicBezTo>
+                  <a:pt x="3209316" y="1228463"/>
+                  <a:pt x="3082040" y="1205725"/>
+                  <a:pt x="2903720" y="1213932"/>
+                </a:cubicBezTo>
+                <a:cubicBezTo>
+                  <a:pt x="2725400" y="1222139"/>
+                  <a:pt x="2587397" y="1145467"/>
+                  <a:pt x="2286866" y="1213932"/>
+                </a:cubicBezTo>
+                <a:cubicBezTo>
+                  <a:pt x="1986335" y="1282397"/>
+                  <a:pt x="1936315" y="1195658"/>
+                  <a:pt x="1712554" y="1213932"/>
+                </a:cubicBezTo>
+                <a:cubicBezTo>
+                  <a:pt x="1488793" y="1232206"/>
+                  <a:pt x="1435692" y="1196997"/>
+                  <a:pt x="1223325" y="1213932"/>
+                </a:cubicBezTo>
+                <a:cubicBezTo>
+                  <a:pt x="1010958" y="1230867"/>
+                  <a:pt x="612559" y="1189547"/>
+                  <a:pt x="202326" y="1213932"/>
+                </a:cubicBezTo>
+                <a:cubicBezTo>
+                  <a:pt x="90953" y="1230726"/>
+                  <a:pt x="13269" y="1111441"/>
+                  <a:pt x="0" y="1011606"/>
+                </a:cubicBezTo>
+                <a:cubicBezTo>
+                  <a:pt x="-45144" y="925982"/>
+                  <a:pt x="36711" y="708230"/>
+                  <a:pt x="0" y="606966"/>
+                </a:cubicBezTo>
+                <a:cubicBezTo>
+                  <a:pt x="-36711" y="505702"/>
+                  <a:pt x="11056" y="331283"/>
+                  <a:pt x="0" y="202326"/>
+                </a:cubicBezTo>
+                <a:close/>
+              </a:path>
+              <a:path w="4658815" h="1213932" stroke="0" extrusionOk="0">
+                <a:moveTo>
+                  <a:pt x="0" y="202326"/>
+                </a:moveTo>
+                <a:cubicBezTo>
+                  <a:pt x="-4482" y="87820"/>
+                  <a:pt x="67944" y="8497"/>
+                  <a:pt x="202326" y="0"/>
+                </a:cubicBezTo>
+                <a:cubicBezTo>
+                  <a:pt x="485467" y="-16537"/>
+                  <a:pt x="622590" y="33956"/>
+                  <a:pt x="819180" y="0"/>
+                </a:cubicBezTo>
+                <a:cubicBezTo>
+                  <a:pt x="1015770" y="-33956"/>
+                  <a:pt x="1101224" y="48252"/>
+                  <a:pt x="1308408" y="0"/>
+                </a:cubicBezTo>
+                <a:cubicBezTo>
+                  <a:pt x="1515592" y="-48252"/>
+                  <a:pt x="1635004" y="50099"/>
+                  <a:pt x="1755095" y="0"/>
+                </a:cubicBezTo>
+                <a:cubicBezTo>
+                  <a:pt x="1875186" y="-50099"/>
+                  <a:pt x="2191388" y="4252"/>
+                  <a:pt x="2329408" y="0"/>
+                </a:cubicBezTo>
+                <a:cubicBezTo>
+                  <a:pt x="2467428" y="-4252"/>
+                  <a:pt x="2666761" y="55587"/>
+                  <a:pt x="2818636" y="0"/>
+                </a:cubicBezTo>
+                <a:cubicBezTo>
+                  <a:pt x="2970511" y="-55587"/>
+                  <a:pt x="3287266" y="29637"/>
+                  <a:pt x="3435490" y="0"/>
+                </a:cubicBezTo>
+                <a:cubicBezTo>
+                  <a:pt x="3583714" y="-29637"/>
+                  <a:pt x="3683091" y="7055"/>
+                  <a:pt x="3882177" y="0"/>
+                </a:cubicBezTo>
+                <a:cubicBezTo>
+                  <a:pt x="4081263" y="-7055"/>
+                  <a:pt x="4263947" y="22576"/>
+                  <a:pt x="4456489" y="0"/>
+                </a:cubicBezTo>
+                <a:cubicBezTo>
+                  <a:pt x="4580725" y="3004"/>
+                  <a:pt x="4652930" y="89632"/>
+                  <a:pt x="4658815" y="202326"/>
+                </a:cubicBezTo>
+                <a:cubicBezTo>
+                  <a:pt x="4688865" y="325324"/>
+                  <a:pt x="4634746" y="457901"/>
+                  <a:pt x="4658815" y="606966"/>
+                </a:cubicBezTo>
+                <a:cubicBezTo>
+                  <a:pt x="4682884" y="756031"/>
+                  <a:pt x="4622469" y="844144"/>
+                  <a:pt x="4658815" y="1011606"/>
+                </a:cubicBezTo>
+                <a:cubicBezTo>
+                  <a:pt x="4670900" y="1138151"/>
+                  <a:pt x="4586142" y="1198250"/>
+                  <a:pt x="4456489" y="1213932"/>
+                </a:cubicBezTo>
+                <a:cubicBezTo>
+                  <a:pt x="4305302" y="1251813"/>
+                  <a:pt x="4166599" y="1175047"/>
+                  <a:pt x="3924719" y="1213932"/>
+                </a:cubicBezTo>
+                <a:cubicBezTo>
+                  <a:pt x="3682839" y="1252817"/>
+                  <a:pt x="3636809" y="1211537"/>
+                  <a:pt x="3392948" y="1213932"/>
+                </a:cubicBezTo>
+                <a:cubicBezTo>
+                  <a:pt x="3149087" y="1216327"/>
+                  <a:pt x="3019653" y="1187995"/>
+                  <a:pt x="2776095" y="1213932"/>
+                </a:cubicBezTo>
+                <a:cubicBezTo>
+                  <a:pt x="2532537" y="1239869"/>
+                  <a:pt x="2374460" y="1202954"/>
+                  <a:pt x="2244324" y="1213932"/>
+                </a:cubicBezTo>
+                <a:cubicBezTo>
+                  <a:pt x="2114188" y="1224910"/>
+                  <a:pt x="2039497" y="1172031"/>
+                  <a:pt x="1840179" y="1213932"/>
+                </a:cubicBezTo>
+                <a:cubicBezTo>
+                  <a:pt x="1640861" y="1255833"/>
+                  <a:pt x="1583331" y="1207787"/>
+                  <a:pt x="1393492" y="1213932"/>
+                </a:cubicBezTo>
+                <a:cubicBezTo>
+                  <a:pt x="1203653" y="1220077"/>
+                  <a:pt x="914863" y="1201446"/>
+                  <a:pt x="776638" y="1213932"/>
+                </a:cubicBezTo>
+                <a:cubicBezTo>
+                  <a:pt x="638413" y="1226418"/>
+                  <a:pt x="437328" y="1174067"/>
+                  <a:pt x="202326" y="1213932"/>
+                </a:cubicBezTo>
+                <a:cubicBezTo>
+                  <a:pt x="93009" y="1218734"/>
+                  <a:pt x="-19492" y="1133627"/>
+                  <a:pt x="0" y="1011606"/>
+                </a:cubicBezTo>
+                <a:cubicBezTo>
+                  <a:pt x="-34041" y="867494"/>
+                  <a:pt x="19408" y="757014"/>
+                  <a:pt x="0" y="598873"/>
+                </a:cubicBezTo>
+                <a:cubicBezTo>
+                  <a:pt x="-19408" y="440732"/>
+                  <a:pt x="27962" y="330545"/>
+                  <a:pt x="0" y="202326"/>
+                </a:cubicBezTo>
+                <a:close/>
+              </a:path>
+            </a:pathLst>
+          </a:custGeom>
+          <a:solidFill>
+            <a:schemeClr val="accent6">
+              <a:lumMod val="40000"/>
+              <a:lumOff val="60000"/>
+            </a:schemeClr>
+          </a:solidFill>
+          <a:ln w="25400">
+            <a:bevel/>
+            <a:extLst>
+              <a:ext uri="{C807C97D-BFC1-408E-A445-0C87EB9F89A2}">
+                <ask:lineSketchStyleProps xmlns:ask="http://schemas.microsoft.com/office/drawing/2018/sketchyshapes" sd="1219033472">
+                  <a:prstGeom prst="roundRect">
+                    <a:avLst/>
+                  </a:prstGeom>
+                  <ask:type>
+                    <ask:lineSketchScribble/>
+                  </ask:type>
+                </ask:lineSketchStyleProps>
+              </a:ext>
+            </a:extLst>
+          </a:ln>
+        </p:spPr>
+        <p:style>
+          <a:lnRef idx="2">
+            <a:schemeClr val="accent1">
+              <a:shade val="15000"/>
+            </a:schemeClr>
+          </a:lnRef>
+          <a:fillRef idx="1">
+            <a:schemeClr val="accent1"/>
+          </a:fillRef>
+          <a:effectRef idx="0">
+            <a:schemeClr val="accent1"/>
+          </a:effectRef>
+          <a:fontRef idx="minor">
+            <a:schemeClr val="lt1"/>
+          </a:fontRef>
+        </p:style>
+        <p:txBody>
+          <a:bodyPr rtlCol="0" anchor="ctr"/>
+          <a:lstStyle/>
+          <a:p>
+            <a:pPr algn="ctr"/>
+            <a:endParaRPr lang="en-US"/>
+          </a:p>
+        </p:txBody>
+      </p:sp>
+      <p:sp>
+        <p:nvSpPr>
+          <p:cNvPr id="4" name="TextBox 3">
+            <a:extLst>
+              <a:ext uri="{FF2B5EF4-FFF2-40B4-BE49-F238E27FC236}">
+                <a16:creationId xmlns:a16="http://schemas.microsoft.com/office/drawing/2014/main" id="{8DF6AFA8-94E7-8FA3-5C74-5E447284DF69}"/>
+              </a:ext>
+            </a:extLst>
+          </p:cNvPr>
+          <p:cNvSpPr txBox="1"/>
+          <p:nvPr/>
+        </p:nvSpPr>
+        <p:spPr>
+          <a:xfrm>
+            <a:off x="6615108" y="2220094"/>
+            <a:ext cx="2830628" cy="1015663"/>
+          </a:xfrm>
+          <a:prstGeom prst="rect">
+            <a:avLst/>
+          </a:prstGeom>
+          <a:noFill/>
+        </p:spPr>
+        <p:txBody>
+          <a:bodyPr wrap="square" rtlCol="0">
+            <a:spAutoFit/>
+          </a:bodyPr>
+          <a:lstStyle/>
+          <a:p>
+            <a:r>
+              <a:rPr lang="en-US" sz="3000" dirty="0">
+                <a:solidFill>
+                  <a:srgbClr val="7030A0"/>
+                </a:solidFill>
+                <a:latin typeface="Times New Roman" panose="02020603050405020304" pitchFamily="18" charset="0"/>
+                <a:cs typeface="Times New Roman" panose="02020603050405020304" pitchFamily="18" charset="0"/>
+              </a:rPr>
+              <a:t>Inbound</a:t>
+            </a:r>
+            <a:br>
+              <a:rPr lang="en-US" sz="3000" dirty="0">
+                <a:solidFill>
+                  <a:srgbClr val="7030A0"/>
+                </a:solidFill>
+                <a:latin typeface="Times New Roman" panose="02020603050405020304" pitchFamily="18" charset="0"/>
+                <a:cs typeface="Times New Roman" panose="02020603050405020304" pitchFamily="18" charset="0"/>
+              </a:rPr>
+            </a:br>
+            <a:r>
+              <a:rPr lang="en-US" sz="3000" dirty="0">
+                <a:solidFill>
+                  <a:srgbClr val="7030A0"/>
+                </a:solidFill>
+                <a:latin typeface="Times New Roman" panose="02020603050405020304" pitchFamily="18" charset="0"/>
+                <a:cs typeface="Times New Roman" panose="02020603050405020304" pitchFamily="18" charset="0"/>
+              </a:rPr>
+              <a:t>Communication</a:t>
+            </a:r>
+          </a:p>
+        </p:txBody>
+      </p:sp>
+      <p:sp>
+        <p:nvSpPr>
+          <p:cNvPr id="6" name="TextBox 5">
+            <a:extLst>
+              <a:ext uri="{FF2B5EF4-FFF2-40B4-BE49-F238E27FC236}">
+                <a16:creationId xmlns:a16="http://schemas.microsoft.com/office/drawing/2014/main" id="{F5BD2CE3-70F8-11B9-7D58-29E170870203}"/>
+              </a:ext>
+            </a:extLst>
+          </p:cNvPr>
+          <p:cNvSpPr txBox="1"/>
+          <p:nvPr/>
+        </p:nvSpPr>
+        <p:spPr>
+          <a:xfrm>
+            <a:off x="6615107" y="3218936"/>
+            <a:ext cx="2587489" cy="1477328"/>
+          </a:xfrm>
+          <a:prstGeom prst="rect">
+            <a:avLst/>
+          </a:prstGeom>
+          <a:noFill/>
+        </p:spPr>
+        <p:txBody>
+          <a:bodyPr wrap="square" rtlCol="0">
+            <a:spAutoFit/>
+          </a:bodyPr>
+          <a:lstStyle/>
+          <a:p>
+            <a:r>
+              <a:rPr lang="en-US" sz="3000" dirty="0">
+                <a:latin typeface="Times New Roman" panose="02020603050405020304" pitchFamily="18" charset="0"/>
+                <a:cs typeface="Times New Roman" panose="02020603050405020304" pitchFamily="18" charset="0"/>
+              </a:rPr>
+              <a:t>Unicasts </a:t>
+            </a:r>
+            <a:br>
+              <a:rPr lang="en-US" sz="3000" dirty="0">
+                <a:latin typeface="Times New Roman" panose="02020603050405020304" pitchFamily="18" charset="0"/>
+                <a:cs typeface="Times New Roman" panose="02020603050405020304" pitchFamily="18" charset="0"/>
+              </a:rPr>
+            </a:br>
+            <a:r>
+              <a:rPr lang="en-US" sz="3000" dirty="0">
+                <a:latin typeface="Times New Roman" panose="02020603050405020304" pitchFamily="18" charset="0"/>
+                <a:cs typeface="Times New Roman" panose="02020603050405020304" pitchFamily="18" charset="0"/>
+              </a:rPr>
+              <a:t>from machines to server</a:t>
+            </a:r>
+          </a:p>
+        </p:txBody>
+      </p:sp>
+      <p:sp>
+        <p:nvSpPr>
+          <p:cNvPr id="8" name="TextBox 7">
+            <a:extLst>
+              <a:ext uri="{FF2B5EF4-FFF2-40B4-BE49-F238E27FC236}">
+                <a16:creationId xmlns:a16="http://schemas.microsoft.com/office/drawing/2014/main" id="{4780C420-0517-09E3-3306-16FEF5D3971E}"/>
+              </a:ext>
+            </a:extLst>
+          </p:cNvPr>
+          <p:cNvSpPr txBox="1"/>
+          <p:nvPr/>
+        </p:nvSpPr>
+        <p:spPr>
+          <a:xfrm>
+            <a:off x="558943" y="4755944"/>
+            <a:ext cx="4247536" cy="1015663"/>
+          </a:xfrm>
+          <a:prstGeom prst="rect">
+            <a:avLst/>
+          </a:prstGeom>
+          <a:noFill/>
+        </p:spPr>
+        <p:txBody>
+          <a:bodyPr wrap="square" rtlCol="0">
+            <a:spAutoFit/>
+          </a:bodyPr>
+          <a:lstStyle/>
+          <a:p>
+            <a:pPr algn="r"/>
+            <a:r>
+              <a:rPr lang="en-US" sz="3000" dirty="0">
+                <a:latin typeface="Times New Roman" panose="02020603050405020304" pitchFamily="18" charset="0"/>
+                <a:cs typeface="Times New Roman" panose="02020603050405020304" pitchFamily="18" charset="0"/>
+              </a:rPr>
+              <a:t>e.g., market data multicast in financial exchanges</a:t>
+            </a:r>
+          </a:p>
+        </p:txBody>
+      </p:sp>
+      <p:sp>
+        <p:nvSpPr>
+          <p:cNvPr id="9" name="TextBox 8">
+            <a:extLst>
+              <a:ext uri="{FF2B5EF4-FFF2-40B4-BE49-F238E27FC236}">
+                <a16:creationId xmlns:a16="http://schemas.microsoft.com/office/drawing/2014/main" id="{A17BFBDF-5704-7FE3-B059-1EFA7AEB28BE}"/>
+              </a:ext>
+            </a:extLst>
+          </p:cNvPr>
+          <p:cNvSpPr txBox="1"/>
+          <p:nvPr/>
+        </p:nvSpPr>
+        <p:spPr>
+          <a:xfrm>
+            <a:off x="6567336" y="4755944"/>
+            <a:ext cx="5065721" cy="1015663"/>
+          </a:xfrm>
+          <a:prstGeom prst="rect">
+            <a:avLst/>
+          </a:prstGeom>
+          <a:noFill/>
+        </p:spPr>
+        <p:txBody>
+          <a:bodyPr wrap="square" rtlCol="0">
+            <a:spAutoFit/>
+          </a:bodyPr>
+          <a:lstStyle/>
+          <a:p>
+            <a:r>
+              <a:rPr lang="en-US" sz="3000" dirty="0">
+                <a:latin typeface="Times New Roman" panose="02020603050405020304" pitchFamily="18" charset="0"/>
+                <a:cs typeface="Times New Roman" panose="02020603050405020304" pitchFamily="18" charset="0"/>
+              </a:rPr>
+              <a:t>e.g., traders submitting orders to a financial exchange server</a:t>
+            </a:r>
+          </a:p>
+        </p:txBody>
+      </p:sp>
+      <p:sp>
+        <p:nvSpPr>
+          <p:cNvPr id="10" name="TextBox 9">
+            <a:extLst>
+              <a:ext uri="{FF2B5EF4-FFF2-40B4-BE49-F238E27FC236}">
+                <a16:creationId xmlns:a16="http://schemas.microsoft.com/office/drawing/2014/main" id="{BB3688C0-2564-B347-6E66-6E8EFA2EEB20}"/>
+              </a:ext>
+            </a:extLst>
+          </p:cNvPr>
+          <p:cNvSpPr txBox="1"/>
+          <p:nvPr/>
+        </p:nvSpPr>
+        <p:spPr>
+          <a:xfrm>
+            <a:off x="2124432" y="2220094"/>
+            <a:ext cx="2830628" cy="1015663"/>
+          </a:xfrm>
+          <a:prstGeom prst="rect">
+            <a:avLst/>
+          </a:prstGeom>
+          <a:noFill/>
+        </p:spPr>
+        <p:txBody>
+          <a:bodyPr wrap="square" rtlCol="0">
+            <a:spAutoFit/>
+          </a:bodyPr>
+          <a:lstStyle/>
+          <a:p>
+            <a:pPr algn="r"/>
+            <a:r>
+              <a:rPr lang="en-US" sz="3000" dirty="0">
+                <a:solidFill>
+                  <a:srgbClr val="7030A0"/>
+                </a:solidFill>
+                <a:latin typeface="Times New Roman" panose="02020603050405020304" pitchFamily="18" charset="0"/>
+                <a:cs typeface="Times New Roman" panose="02020603050405020304" pitchFamily="18" charset="0"/>
+              </a:rPr>
+              <a:t>Outbound</a:t>
+            </a:r>
+            <a:br>
+              <a:rPr lang="en-US" sz="3000" dirty="0">
+                <a:solidFill>
+                  <a:srgbClr val="7030A0"/>
+                </a:solidFill>
+                <a:latin typeface="Times New Roman" panose="02020603050405020304" pitchFamily="18" charset="0"/>
+                <a:cs typeface="Times New Roman" panose="02020603050405020304" pitchFamily="18" charset="0"/>
+              </a:rPr>
+            </a:br>
+            <a:r>
+              <a:rPr lang="en-US" sz="3000" dirty="0">
+                <a:solidFill>
+                  <a:srgbClr val="7030A0"/>
+                </a:solidFill>
+                <a:latin typeface="Times New Roman" panose="02020603050405020304" pitchFamily="18" charset="0"/>
+                <a:cs typeface="Times New Roman" panose="02020603050405020304" pitchFamily="18" charset="0"/>
+              </a:rPr>
+              <a:t>Communication</a:t>
+            </a:r>
+          </a:p>
+        </p:txBody>
+      </p:sp>
+      <p:sp>
+        <p:nvSpPr>
+          <p:cNvPr id="11" name="TextBox 10">
+            <a:extLst>
+              <a:ext uri="{FF2B5EF4-FFF2-40B4-BE49-F238E27FC236}">
+                <a16:creationId xmlns:a16="http://schemas.microsoft.com/office/drawing/2014/main" id="{27FDCFBB-6F77-3E38-840A-25FE417742F7}"/>
+              </a:ext>
+            </a:extLst>
+          </p:cNvPr>
+          <p:cNvSpPr txBox="1"/>
+          <p:nvPr/>
+        </p:nvSpPr>
+        <p:spPr>
+          <a:xfrm>
+            <a:off x="2622846" y="3235757"/>
+            <a:ext cx="2249561" cy="1477328"/>
+          </a:xfrm>
+          <a:prstGeom prst="rect">
+            <a:avLst/>
+          </a:prstGeom>
+          <a:noFill/>
+        </p:spPr>
+        <p:txBody>
+          <a:bodyPr wrap="square" rtlCol="0">
+            <a:spAutoFit/>
+          </a:bodyPr>
+          <a:lstStyle/>
+          <a:p>
+            <a:pPr algn="r"/>
+            <a:r>
+              <a:rPr lang="en-US" sz="3000" dirty="0">
+                <a:latin typeface="Times New Roman" panose="02020603050405020304" pitchFamily="18" charset="0"/>
+                <a:cs typeface="Times New Roman" panose="02020603050405020304" pitchFamily="18" charset="0"/>
+              </a:rPr>
+              <a:t>Multicast from server to machines</a:t>
+            </a:r>
+          </a:p>
+        </p:txBody>
+      </p:sp>
+      <p:sp>
+        <p:nvSpPr>
+          <p:cNvPr id="13" name="Rectangle 12">
+            <a:extLst>
+              <a:ext uri="{FF2B5EF4-FFF2-40B4-BE49-F238E27FC236}">
+                <a16:creationId xmlns:a16="http://schemas.microsoft.com/office/drawing/2014/main" id="{B6929B5A-ACCF-B441-ACD5-3B26045D5CDE}"/>
+              </a:ext>
+            </a:extLst>
+          </p:cNvPr>
+          <p:cNvSpPr/>
+          <p:nvPr/>
+        </p:nvSpPr>
+        <p:spPr>
+          <a:xfrm>
+            <a:off x="5733022" y="2774092"/>
+            <a:ext cx="45719" cy="2492991"/>
+          </a:xfrm>
+          <a:custGeom>
+            <a:avLst/>
+            <a:gdLst>
+              <a:gd name="csX0" fmla="*/ 0 w 45719"/>
+              <a:gd name="csY0" fmla="*/ 0 h 2492991"/>
+              <a:gd name="csX1" fmla="*/ 45719 w 45719"/>
+              <a:gd name="csY1" fmla="*/ 0 h 2492991"/>
+              <a:gd name="csX2" fmla="*/ 45719 w 45719"/>
+              <a:gd name="csY2" fmla="*/ 498598 h 2492991"/>
+              <a:gd name="csX3" fmla="*/ 45719 w 45719"/>
+              <a:gd name="csY3" fmla="*/ 1047056 h 2492991"/>
+              <a:gd name="csX4" fmla="*/ 45719 w 45719"/>
+              <a:gd name="csY4" fmla="*/ 1545654 h 2492991"/>
+              <a:gd name="csX5" fmla="*/ 45719 w 45719"/>
+              <a:gd name="csY5" fmla="*/ 1969463 h 2492991"/>
+              <a:gd name="csX6" fmla="*/ 45719 w 45719"/>
+              <a:gd name="csY6" fmla="*/ 2492991 h 2492991"/>
+              <a:gd name="csX7" fmla="*/ 0 w 45719"/>
+              <a:gd name="csY7" fmla="*/ 2492991 h 2492991"/>
+              <a:gd name="csX8" fmla="*/ 0 w 45719"/>
+              <a:gd name="csY8" fmla="*/ 1944533 h 2492991"/>
+              <a:gd name="csX9" fmla="*/ 0 w 45719"/>
+              <a:gd name="csY9" fmla="*/ 1421005 h 2492991"/>
+              <a:gd name="csX10" fmla="*/ 0 w 45719"/>
+              <a:gd name="csY10" fmla="*/ 922407 h 2492991"/>
+              <a:gd name="csX11" fmla="*/ 0 w 45719"/>
+              <a:gd name="csY11" fmla="*/ 0 h 2492991"/>
+            </a:gdLst>
+            <a:ahLst/>
+            <a:cxnLst>
+              <a:cxn ang="0">
+                <a:pos x="csX0" y="csY0"/>
+              </a:cxn>
+              <a:cxn ang="0">
+                <a:pos x="csX1" y="csY1"/>
+              </a:cxn>
+              <a:cxn ang="0">
+                <a:pos x="csX2" y="csY2"/>
+              </a:cxn>
+              <a:cxn ang="0">
+                <a:pos x="csX3" y="csY3"/>
+              </a:cxn>
+              <a:cxn ang="0">
+                <a:pos x="csX4" y="csY4"/>
+              </a:cxn>
+              <a:cxn ang="0">
+                <a:pos x="csX5" y="csY5"/>
+              </a:cxn>
+              <a:cxn ang="0">
+                <a:pos x="csX6" y="csY6"/>
+              </a:cxn>
+              <a:cxn ang="0">
+                <a:pos x="csX7" y="csY7"/>
+              </a:cxn>
+              <a:cxn ang="0">
+                <a:pos x="csX8" y="csY8"/>
+              </a:cxn>
+              <a:cxn ang="0">
+                <a:pos x="csX9" y="csY9"/>
+              </a:cxn>
+              <a:cxn ang="0">
+                <a:pos x="csX10" y="csY10"/>
+              </a:cxn>
+              <a:cxn ang="0">
+                <a:pos x="csX11" y="csY11"/>
+              </a:cxn>
+            </a:cxnLst>
+            <a:rect l="l" t="t" r="r" b="b"/>
+            <a:pathLst>
+              <a:path w="45719" h="2492991" fill="none" extrusionOk="0">
+                <a:moveTo>
+                  <a:pt x="0" y="0"/>
+                </a:moveTo>
+                <a:cubicBezTo>
+                  <a:pt x="15466" y="-3108"/>
+                  <a:pt x="29505" y="2787"/>
+                  <a:pt x="45719" y="0"/>
+                </a:cubicBezTo>
+                <a:cubicBezTo>
+                  <a:pt x="96714" y="244462"/>
+                  <a:pt x="38492" y="292531"/>
+                  <a:pt x="45719" y="498598"/>
+                </a:cubicBezTo>
+                <a:cubicBezTo>
+                  <a:pt x="52946" y="704665"/>
+                  <a:pt x="41215" y="773940"/>
+                  <a:pt x="45719" y="1047056"/>
+                </a:cubicBezTo>
+                <a:cubicBezTo>
+                  <a:pt x="50223" y="1320172"/>
+                  <a:pt x="20442" y="1409127"/>
+                  <a:pt x="45719" y="1545654"/>
+                </a:cubicBezTo>
+                <a:cubicBezTo>
+                  <a:pt x="70996" y="1682181"/>
+                  <a:pt x="37286" y="1837495"/>
+                  <a:pt x="45719" y="1969463"/>
+                </a:cubicBezTo>
+                <a:cubicBezTo>
+                  <a:pt x="54152" y="2101431"/>
+                  <a:pt x="20701" y="2253374"/>
+                  <a:pt x="45719" y="2492991"/>
+                </a:cubicBezTo>
+                <a:cubicBezTo>
+                  <a:pt x="34208" y="2496004"/>
+                  <a:pt x="9588" y="2489496"/>
+                  <a:pt x="0" y="2492991"/>
+                </a:cubicBezTo>
+                <a:cubicBezTo>
+                  <a:pt x="-9781" y="2257546"/>
+                  <a:pt x="17963" y="2141047"/>
+                  <a:pt x="0" y="1944533"/>
+                </a:cubicBezTo>
+                <a:cubicBezTo>
+                  <a:pt x="-17963" y="1748019"/>
+                  <a:pt x="28336" y="1642462"/>
+                  <a:pt x="0" y="1421005"/>
+                </a:cubicBezTo>
+                <a:cubicBezTo>
+                  <a:pt x="-28336" y="1199548"/>
+                  <a:pt x="13584" y="1089980"/>
+                  <a:pt x="0" y="922407"/>
+                </a:cubicBezTo>
+                <a:cubicBezTo>
+                  <a:pt x="-13584" y="754834"/>
+                  <a:pt x="77438" y="239728"/>
+                  <a:pt x="0" y="0"/>
+                </a:cubicBezTo>
+                <a:close/>
+              </a:path>
+              <a:path w="45719" h="2492991" stroke="0" extrusionOk="0">
+                <a:moveTo>
+                  <a:pt x="0" y="0"/>
+                </a:moveTo>
+                <a:cubicBezTo>
+                  <a:pt x="18173" y="-1477"/>
+                  <a:pt x="31455" y="3772"/>
+                  <a:pt x="45719" y="0"/>
+                </a:cubicBezTo>
+                <a:cubicBezTo>
+                  <a:pt x="49078" y="113210"/>
+                  <a:pt x="23101" y="288473"/>
+                  <a:pt x="45719" y="423808"/>
+                </a:cubicBezTo>
+                <a:cubicBezTo>
+                  <a:pt x="68337" y="559143"/>
+                  <a:pt x="-15560" y="770450"/>
+                  <a:pt x="45719" y="972266"/>
+                </a:cubicBezTo>
+                <a:cubicBezTo>
+                  <a:pt x="106998" y="1174082"/>
+                  <a:pt x="-1609" y="1235521"/>
+                  <a:pt x="45719" y="1470865"/>
+                </a:cubicBezTo>
+                <a:cubicBezTo>
+                  <a:pt x="93047" y="1706209"/>
+                  <a:pt x="30494" y="1816253"/>
+                  <a:pt x="45719" y="1919603"/>
+                </a:cubicBezTo>
+                <a:cubicBezTo>
+                  <a:pt x="60944" y="2022953"/>
+                  <a:pt x="28474" y="2341608"/>
+                  <a:pt x="45719" y="2492991"/>
+                </a:cubicBezTo>
+                <a:cubicBezTo>
+                  <a:pt x="22941" y="2494258"/>
+                  <a:pt x="12902" y="2490132"/>
+                  <a:pt x="0" y="2492991"/>
+                </a:cubicBezTo>
+                <a:cubicBezTo>
+                  <a:pt x="-59460" y="2250702"/>
+                  <a:pt x="24665" y="2128448"/>
+                  <a:pt x="0" y="1944533"/>
+                </a:cubicBezTo>
+                <a:cubicBezTo>
+                  <a:pt x="-24665" y="1760618"/>
+                  <a:pt x="21622" y="1582387"/>
+                  <a:pt x="0" y="1396075"/>
+                </a:cubicBezTo>
+                <a:cubicBezTo>
+                  <a:pt x="-21622" y="1209763"/>
+                  <a:pt x="53927" y="1082433"/>
+                  <a:pt x="0" y="922407"/>
+                </a:cubicBezTo>
+                <a:cubicBezTo>
+                  <a:pt x="-53927" y="762381"/>
+                  <a:pt x="37230" y="594554"/>
+                  <a:pt x="0" y="448738"/>
+                </a:cubicBezTo>
+                <a:cubicBezTo>
+                  <a:pt x="-37230" y="302922"/>
+                  <a:pt x="25725" y="182915"/>
+                  <a:pt x="0" y="0"/>
+                </a:cubicBezTo>
+                <a:close/>
+              </a:path>
+            </a:pathLst>
+          </a:custGeom>
+          <a:solidFill>
+            <a:srgbClr val="7030A0"/>
+          </a:solidFill>
+          <a:ln>
+            <a:solidFill>
+              <a:srgbClr val="7030A0"/>
+            </a:solidFill>
+            <a:extLst>
+              <a:ext uri="{C807C97D-BFC1-408E-A445-0C87EB9F89A2}">
+                <ask:lineSketchStyleProps xmlns:ask="http://schemas.microsoft.com/office/drawing/2018/sketchyshapes" sd="1219033472">
+                  <a:prstGeom prst="rect">
+                    <a:avLst/>
+                  </a:prstGeom>
+                  <ask:type>
+                    <ask:lineSketchScribble/>
+                  </ask:type>
+                </ask:lineSketchStyleProps>
+              </a:ext>
+            </a:extLst>
+          </a:ln>
+        </p:spPr>
+        <p:style>
+          <a:lnRef idx="2">
+            <a:schemeClr val="accent1">
+              <a:shade val="15000"/>
+            </a:schemeClr>
+          </a:lnRef>
+          <a:fillRef idx="1">
+            <a:schemeClr val="accent1"/>
+          </a:fillRef>
+          <a:effectRef idx="0">
+            <a:schemeClr val="accent1"/>
+          </a:effectRef>
+          <a:fontRef idx="minor">
+            <a:schemeClr val="lt1"/>
+          </a:fontRef>
+        </p:style>
+        <p:txBody>
+          <a:bodyPr rtlCol="0" anchor="ctr"/>
+          <a:lstStyle/>
+          <a:p>
+            <a:pPr algn="ctr"/>
+            <a:endParaRPr lang="en-US">
+              <a:latin typeface="Times New Roman" panose="02020603050405020304" pitchFamily="18" charset="0"/>
+              <a:cs typeface="Times New Roman" panose="02020603050405020304" pitchFamily="18" charset="0"/>
+            </a:endParaRPr>
+          </a:p>
+        </p:txBody>
+      </p:sp>
+      <p:sp>
+        <p:nvSpPr>
+          <p:cNvPr id="7" name="Rounded Rectangle 6">
+            <a:extLst>
+              <a:ext uri="{FF2B5EF4-FFF2-40B4-BE49-F238E27FC236}">
+                <a16:creationId xmlns:a16="http://schemas.microsoft.com/office/drawing/2014/main" id="{C171F2CF-42BA-AEE3-8EB7-076D1BD7BE7D}"/>
+              </a:ext>
+            </a:extLst>
+          </p:cNvPr>
+          <p:cNvSpPr/>
+          <p:nvPr/>
+        </p:nvSpPr>
+        <p:spPr>
+          <a:xfrm>
+            <a:off x="3155766" y="5757425"/>
+            <a:ext cx="5425726" cy="695454"/>
+          </a:xfrm>
+          <a:prstGeom prst="roundRect">
+            <a:avLst/>
+          </a:prstGeom>
+          <a:solidFill>
+            <a:srgbClr val="FF0000"/>
+          </a:solidFill>
+          <a:ln>
+            <a:noFill/>
+          </a:ln>
+        </p:spPr>
+        <p:style>
+          <a:lnRef idx="2">
+            <a:schemeClr val="accent1">
+              <a:shade val="15000"/>
+            </a:schemeClr>
+          </a:lnRef>
+          <a:fillRef idx="1">
+            <a:schemeClr val="accent1"/>
+          </a:fillRef>
+          <a:effectRef idx="0">
+            <a:schemeClr val="accent1"/>
+          </a:effectRef>
+          <a:fontRef idx="minor">
+            <a:schemeClr val="lt1"/>
+          </a:fontRef>
+        </p:style>
+        <p:txBody>
+          <a:bodyPr rtlCol="0" anchor="ctr"/>
+          <a:lstStyle/>
+          <a:p>
+            <a:pPr algn="ctr"/>
+            <a:r>
+              <a:rPr lang="en-US" sz="2400" dirty="0"/>
+              <a:t>Specialized Infrastructure used by on-premises financial exchanges</a:t>
+            </a:r>
+          </a:p>
+        </p:txBody>
+      </p:sp>
+    </p:spTree>
+    <p:extLst>
+      <p:ext uri="{BB962C8B-B14F-4D97-AF65-F5344CB8AC3E}">
+        <p14:creationId xmlns:p14="http://schemas.microsoft.com/office/powerpoint/2010/main" val="3266459799"/>
+      </p:ext>
+    </p:extLst>
+  </p:cSld>
+  <p:clrMapOvr>
+    <a:masterClrMapping/>
+  </p:clrMapOvr>
+  <mc:AlternateContent xmlns:mc="http://schemas.openxmlformats.org/markup-compatibility/2006" xmlns:p159="http://schemas.microsoft.com/office/powerpoint/2015/09/main">
+    <mc:Choice Requires="p159">
+      <p:transition spd="med">
+        <p159:morph option="byWord"/>
+      </p:transition>
+    </mc:Choice>
+    <mc:Fallback xmlns="">
+      <p:transition spd="med">
+        <p:fade/>
+      </p:transition>
+    </mc:Fallback>
+  </mc:AlternateContent>
+</p:sld>
+</file>
+
+<file path=ppt/slides/slide15.xml><?xml version="1.0" encoding="utf-8"?>
 <p:sld xmlns:a="http://schemas.openxmlformats.org/drawingml/2006/main" xmlns:r="http://schemas.openxmlformats.org/officeDocument/2006/relationships" xmlns:p="http://schemas.openxmlformats.org/presentationml/2006/main">
   <p:cSld>
     <p:spTree>
@@ -7363,13 +11919,13 @@
   <p:clrMapOvr>
     <a:masterClrMapping/>
   </p:clrMapOvr>
-  <mc:AlternateContent xmlns:mc="http://schemas.openxmlformats.org/markup-compatibility/2006">
-    <mc:Choice xmlns:p159="http://schemas.microsoft.com/office/powerpoint/2015/09/main" Requires="p159">
+  <mc:AlternateContent xmlns:mc="http://schemas.openxmlformats.org/markup-compatibility/2006" xmlns:p159="http://schemas.microsoft.com/office/powerpoint/2015/09/main">
+    <mc:Choice Requires="p159">
       <p:transition spd="med">
         <p159:morph option="byWord"/>
       </p:transition>
     </mc:Choice>
-    <mc:Fallback>
+    <mc:Fallback xmlns="">
       <p:transition spd="med">
         <p:fade/>
       </p:transition>
@@ -7378,7 +11934,7 @@
 </p:sld>
 </file>
 
-<file path=ppt/slides/slide13.xml><?xml version="1.0" encoding="utf-8"?>
+<file path=ppt/slides/slide16.xml><?xml version="1.0" encoding="utf-8"?>
 <p:sld xmlns:a="http://schemas.openxmlformats.org/drawingml/2006/main" xmlns:r="http://schemas.openxmlformats.org/officeDocument/2006/relationships" xmlns:p="http://schemas.openxmlformats.org/presentationml/2006/main">
   <p:cSld>
     <p:spTree>
@@ -7815,13 +12371,13 @@
   <p:clrMapOvr>
     <a:masterClrMapping/>
   </p:clrMapOvr>
-  <mc:AlternateContent xmlns:mc="http://schemas.openxmlformats.org/markup-compatibility/2006">
-    <mc:Choice xmlns:p159="http://schemas.microsoft.com/office/powerpoint/2015/09/main" Requires="p159">
+  <mc:AlternateContent xmlns:mc="http://schemas.openxmlformats.org/markup-compatibility/2006" xmlns:p159="http://schemas.microsoft.com/office/powerpoint/2015/09/main">
+    <mc:Choice Requires="p159">
       <p:transition spd="med">
         <p159:morph option="byWord"/>
       </p:transition>
     </mc:Choice>
-    <mc:Fallback>
+    <mc:Fallback xmlns="">
       <p:transition spd="med">
         <p:fade/>
       </p:transition>
@@ -7830,7 +12386,7 @@
 </p:sld>
 </file>
 
-<file path=ppt/slides/slide14.xml><?xml version="1.0" encoding="utf-8"?>
+<file path=ppt/slides/slide17.xml><?xml version="1.0" encoding="utf-8"?>
 <p:sld xmlns:a="http://schemas.openxmlformats.org/drawingml/2006/main" xmlns:r="http://schemas.openxmlformats.org/officeDocument/2006/relationships" xmlns:p="http://schemas.openxmlformats.org/presentationml/2006/main">
   <p:cSld>
     <p:spTree>
@@ -8383,13 +12939,13 @@
   <p:clrMapOvr>
     <a:masterClrMapping/>
   </p:clrMapOvr>
-  <mc:AlternateContent xmlns:mc="http://schemas.openxmlformats.org/markup-compatibility/2006">
-    <mc:Choice xmlns:p159="http://schemas.microsoft.com/office/powerpoint/2015/09/main" Requires="p159">
+  <mc:AlternateContent xmlns:mc="http://schemas.openxmlformats.org/markup-compatibility/2006" xmlns:p159="http://schemas.microsoft.com/office/powerpoint/2015/09/main">
+    <mc:Choice Requires="p159">
       <p:transition spd="med">
         <p159:morph option="byWord"/>
       </p:transition>
     </mc:Choice>
-    <mc:Fallback>
+    <mc:Fallback xmlns="">
       <p:transition spd="med">
         <p:fade/>
       </p:transition>
@@ -8398,7 +12954,7 @@
 </p:sld>
 </file>
 
-<file path=ppt/slides/slide15.xml><?xml version="1.0" encoding="utf-8"?>
+<file path=ppt/slides/slide18.xml><?xml version="1.0" encoding="utf-8"?>
 <p:sld xmlns:a="http://schemas.openxmlformats.org/drawingml/2006/main" xmlns:r="http://schemas.openxmlformats.org/officeDocument/2006/relationships" xmlns:p="http://schemas.openxmlformats.org/presentationml/2006/main">
   <p:cSld>
     <p:spTree>
@@ -9022,13 +13578,13 @@
   <p:clrMapOvr>
     <a:masterClrMapping/>
   </p:clrMapOvr>
-  <mc:AlternateContent xmlns:mc="http://schemas.openxmlformats.org/markup-compatibility/2006">
-    <mc:Choice xmlns:p159="http://schemas.microsoft.com/office/powerpoint/2015/09/main" Requires="p159">
+  <mc:AlternateContent xmlns:mc="http://schemas.openxmlformats.org/markup-compatibility/2006" xmlns:p159="http://schemas.microsoft.com/office/powerpoint/2015/09/main">
+    <mc:Choice Requires="p159">
       <p:transition spd="med">
         <p159:morph option="byWord"/>
       </p:transition>
     </mc:Choice>
-    <mc:Fallback>
+    <mc:Fallback xmlns="">
       <p:transition spd="med">
         <p:fade/>
       </p:transition>
@@ -9037,7 +13593,7 @@
 </p:sld>
 </file>
 
-<file path=ppt/slides/slide16.xml><?xml version="1.0" encoding="utf-8"?>
+<file path=ppt/slides/slide19.xml><?xml version="1.0" encoding="utf-8"?>
 <p:sld xmlns:a="http://schemas.openxmlformats.org/drawingml/2006/main" xmlns:r="http://schemas.openxmlformats.org/officeDocument/2006/relationships" xmlns:p="http://schemas.openxmlformats.org/presentationml/2006/main">
   <p:cSld>
     <p:spTree>
@@ -9778,1770 +14334,124 @@
   <p:clrMapOvr>
     <a:masterClrMapping/>
   </p:clrMapOvr>
-  <mc:AlternateContent xmlns:mc="http://schemas.openxmlformats.org/markup-compatibility/2006">
-    <mc:Choice xmlns:p159="http://schemas.microsoft.com/office/powerpoint/2015/09/main" Requires="p159">
+  <mc:AlternateContent xmlns:mc="http://schemas.openxmlformats.org/markup-compatibility/2006" xmlns:p159="http://schemas.microsoft.com/office/powerpoint/2015/09/main">
+    <mc:Choice Requires="p159">
       <p:transition spd="med">
         <p159:morph option="byWord"/>
       </p:transition>
     </mc:Choice>
-    <mc:Fallback>
+    <mc:Fallback xmlns="">
       <p:transition spd="med">
         <p:fade/>
       </p:transition>
     </mc:Fallback>
   </mc:AlternateContent>
-</p:sld>
-</file>
-
-<file path=ppt/slides/slide17.xml><?xml version="1.0" encoding="utf-8"?>
-<p:sld xmlns:a="http://schemas.openxmlformats.org/drawingml/2006/main" xmlns:r="http://schemas.openxmlformats.org/officeDocument/2006/relationships" xmlns:p="http://schemas.openxmlformats.org/presentationml/2006/main">
-  <p:cSld>
-    <p:spTree>
-      <p:nvGrpSpPr>
-        <p:cNvPr id="1" name="">
-          <a:extLst>
-            <a:ext uri="{FF2B5EF4-FFF2-40B4-BE49-F238E27FC236}">
-              <a16:creationId xmlns:a16="http://schemas.microsoft.com/office/drawing/2014/main" id="{70F06775-70DA-824D-D1F1-09F7A2F728C7}"/>
-            </a:ext>
-          </a:extLst>
-        </p:cNvPr>
-        <p:cNvGrpSpPr/>
-        <p:nvPr/>
-      </p:nvGrpSpPr>
-      <p:grpSpPr>
-        <a:xfrm>
-          <a:off x="0" y="0"/>
-          <a:ext cx="0" cy="0"/>
-          <a:chOff x="0" y="0"/>
-          <a:chExt cx="0" cy="0"/>
-        </a:xfrm>
-      </p:grpSpPr>
-      <p:sp>
-        <p:nvSpPr>
-          <p:cNvPr id="6" name="Rounded Rectangle 5">
-            <a:extLst>
-              <a:ext uri="{FF2B5EF4-FFF2-40B4-BE49-F238E27FC236}">
-                <a16:creationId xmlns:a16="http://schemas.microsoft.com/office/drawing/2014/main" id="{13BD36E6-2175-4E01-F989-AEA7048D6FAC}"/>
-              </a:ext>
-            </a:extLst>
-          </p:cNvPr>
-          <p:cNvSpPr/>
-          <p:nvPr/>
-        </p:nvSpPr>
-        <p:spPr>
-          <a:xfrm>
-            <a:off x="702884" y="2761827"/>
-            <a:ext cx="6709719" cy="2279729"/>
-          </a:xfrm>
-          <a:prstGeom prst="roundRect">
-            <a:avLst/>
-          </a:prstGeom>
-          <a:solidFill>
-            <a:schemeClr val="accent4">
-              <a:lumMod val="40000"/>
-              <a:lumOff val="60000"/>
-            </a:schemeClr>
-          </a:solidFill>
-          <a:ln>
-            <a:noFill/>
-          </a:ln>
-        </p:spPr>
-        <p:style>
-          <a:lnRef idx="2">
-            <a:schemeClr val="accent1">
-              <a:shade val="15000"/>
-            </a:schemeClr>
-          </a:lnRef>
-          <a:fillRef idx="1">
-            <a:schemeClr val="accent1"/>
-          </a:fillRef>
-          <a:effectRef idx="0">
-            <a:schemeClr val="accent1"/>
-          </a:effectRef>
-          <a:fontRef idx="minor">
-            <a:schemeClr val="lt1"/>
-          </a:fontRef>
-        </p:style>
-        <p:txBody>
-          <a:bodyPr rtlCol="0" anchor="ctr"/>
-          <a:lstStyle/>
-          <a:p>
-            <a:pPr algn="ctr"/>
-            <a:endParaRPr lang="en-US"/>
-          </a:p>
-        </p:txBody>
-      </p:sp>
-      <p:sp>
-        <p:nvSpPr>
-          <p:cNvPr id="17" name="Rectangle 16">
-            <a:extLst>
-              <a:ext uri="{FF2B5EF4-FFF2-40B4-BE49-F238E27FC236}">
-                <a16:creationId xmlns:a16="http://schemas.microsoft.com/office/drawing/2014/main" id="{F70DBAB9-255F-B6BA-09B3-0D37E539B14B}"/>
-              </a:ext>
-            </a:extLst>
-          </p:cNvPr>
-          <p:cNvSpPr/>
-          <p:nvPr/>
-        </p:nvSpPr>
-        <p:spPr>
-          <a:xfrm rot="16200000">
-            <a:off x="2522582" y="-387076"/>
-            <a:ext cx="68673" cy="3246390"/>
-          </a:xfrm>
-          <a:prstGeom prst="rect">
-            <a:avLst/>
-          </a:prstGeom>
-          <a:solidFill>
-            <a:srgbClr val="FF0000"/>
-          </a:solidFill>
-          <a:ln>
-            <a:solidFill>
-              <a:srgbClr val="FF0000"/>
-            </a:solidFill>
-          </a:ln>
-        </p:spPr>
-        <p:style>
-          <a:lnRef idx="2">
-            <a:schemeClr val="accent1">
-              <a:shade val="15000"/>
-            </a:schemeClr>
-          </a:lnRef>
-          <a:fillRef idx="1">
-            <a:schemeClr val="accent1"/>
-          </a:fillRef>
-          <a:effectRef idx="0">
-            <a:schemeClr val="accent1"/>
-          </a:effectRef>
-          <a:fontRef idx="minor">
-            <a:schemeClr val="lt1"/>
-          </a:fontRef>
-        </p:style>
-        <p:txBody>
-          <a:bodyPr rtlCol="0" anchor="ctr"/>
-          <a:lstStyle/>
-          <a:p>
-            <a:pPr algn="ctr"/>
-            <a:endParaRPr lang="en-US">
-              <a:latin typeface="Times New Roman" panose="02020603050405020304" pitchFamily="18" charset="0"/>
-              <a:cs typeface="Times New Roman" panose="02020603050405020304" pitchFamily="18" charset="0"/>
-            </a:endParaRPr>
-          </a:p>
-        </p:txBody>
-      </p:sp>
-      <p:sp>
-        <p:nvSpPr>
-          <p:cNvPr id="18" name="Rectangle 17">
-            <a:extLst>
-              <a:ext uri="{FF2B5EF4-FFF2-40B4-BE49-F238E27FC236}">
-                <a16:creationId xmlns:a16="http://schemas.microsoft.com/office/drawing/2014/main" id="{B45D36CC-7460-172A-78DB-598FD5E6BD8D}"/>
-              </a:ext>
-            </a:extLst>
-          </p:cNvPr>
-          <p:cNvSpPr/>
-          <p:nvPr/>
-        </p:nvSpPr>
-        <p:spPr>
-          <a:xfrm rot="16200000">
-            <a:off x="2522581" y="-318404"/>
-            <a:ext cx="68674" cy="3246390"/>
-          </a:xfrm>
-          <a:prstGeom prst="rect">
-            <a:avLst/>
-          </a:prstGeom>
-          <a:solidFill>
-            <a:srgbClr val="7030A0"/>
-          </a:solidFill>
-          <a:ln>
-            <a:solidFill>
-              <a:srgbClr val="7030A0"/>
-            </a:solidFill>
-          </a:ln>
-        </p:spPr>
-        <p:style>
-          <a:lnRef idx="2">
-            <a:schemeClr val="accent1">
-              <a:shade val="15000"/>
-            </a:schemeClr>
-          </a:lnRef>
-          <a:fillRef idx="1">
-            <a:schemeClr val="accent1"/>
-          </a:fillRef>
-          <a:effectRef idx="0">
-            <a:schemeClr val="accent1"/>
-          </a:effectRef>
-          <a:fontRef idx="minor">
-            <a:schemeClr val="lt1"/>
-          </a:fontRef>
-        </p:style>
-        <p:txBody>
-          <a:bodyPr rtlCol="0" anchor="ctr"/>
-          <a:lstStyle/>
-          <a:p>
-            <a:pPr algn="ctr"/>
-            <a:endParaRPr lang="en-US">
-              <a:latin typeface="Times New Roman" panose="02020603050405020304" pitchFamily="18" charset="0"/>
-              <a:cs typeface="Times New Roman" panose="02020603050405020304" pitchFamily="18" charset="0"/>
-            </a:endParaRPr>
-          </a:p>
-        </p:txBody>
-      </p:sp>
-      <p:sp>
-        <p:nvSpPr>
-          <p:cNvPr id="12" name="TextBox 11">
-            <a:extLst>
-              <a:ext uri="{FF2B5EF4-FFF2-40B4-BE49-F238E27FC236}">
-                <a16:creationId xmlns:a16="http://schemas.microsoft.com/office/drawing/2014/main" id="{471EB8E2-1A72-E97D-AC61-E621B8D6AF8A}"/>
-              </a:ext>
-            </a:extLst>
-          </p:cNvPr>
-          <p:cNvSpPr txBox="1"/>
-          <p:nvPr/>
-        </p:nvSpPr>
-        <p:spPr>
-          <a:xfrm>
-            <a:off x="772906" y="405121"/>
-            <a:ext cx="6591721" cy="830997"/>
-          </a:xfrm>
-          <a:prstGeom prst="rect">
-            <a:avLst/>
-          </a:prstGeom>
-          <a:noFill/>
-        </p:spPr>
-        <p:txBody>
-          <a:bodyPr wrap="square" rtlCol="0">
-            <a:spAutoFit/>
-          </a:bodyPr>
-          <a:lstStyle/>
-          <a:p>
-            <a:r>
-              <a:rPr lang="en-US" sz="4800" dirty="0">
-                <a:latin typeface="Times New Roman" panose="02020603050405020304" pitchFamily="18" charset="0"/>
-                <a:cs typeface="Times New Roman" panose="02020603050405020304" pitchFamily="18" charset="0"/>
-              </a:rPr>
-              <a:t>Thesis: Latency Fairness</a:t>
-            </a:r>
-            <a:endParaRPr lang="en-US" sz="3000" dirty="0">
-              <a:latin typeface="Times New Roman" panose="02020603050405020304" pitchFamily="18" charset="0"/>
-              <a:cs typeface="Times New Roman" panose="02020603050405020304" pitchFamily="18" charset="0"/>
-            </a:endParaRPr>
-          </a:p>
-        </p:txBody>
-      </p:sp>
-      <p:sp>
-        <p:nvSpPr>
-          <p:cNvPr id="4" name="TextBox 3">
-            <a:extLst>
-              <a:ext uri="{FF2B5EF4-FFF2-40B4-BE49-F238E27FC236}">
-                <a16:creationId xmlns:a16="http://schemas.microsoft.com/office/drawing/2014/main" id="{9C38A125-EA7E-6448-A161-8D099BD47A96}"/>
-              </a:ext>
-            </a:extLst>
-          </p:cNvPr>
-          <p:cNvSpPr txBox="1"/>
-          <p:nvPr/>
-        </p:nvSpPr>
-        <p:spPr>
-          <a:xfrm>
-            <a:off x="4229584" y="3089189"/>
-            <a:ext cx="2830628" cy="1015663"/>
-          </a:xfrm>
-          <a:prstGeom prst="rect">
-            <a:avLst/>
-          </a:prstGeom>
-          <a:noFill/>
-        </p:spPr>
-        <p:txBody>
-          <a:bodyPr wrap="square" rtlCol="0">
-            <a:spAutoFit/>
-          </a:bodyPr>
-          <a:lstStyle/>
-          <a:p>
-            <a:pPr algn="ctr"/>
-            <a:r>
-              <a:rPr lang="en-US" sz="3000" dirty="0">
-                <a:solidFill>
-                  <a:srgbClr val="7030A0"/>
-                </a:solidFill>
-                <a:latin typeface="Times New Roman" panose="02020603050405020304" pitchFamily="18" charset="0"/>
-                <a:cs typeface="Times New Roman" panose="02020603050405020304" pitchFamily="18" charset="0"/>
-              </a:rPr>
-              <a:t>Inbound</a:t>
-            </a:r>
-            <a:br>
-              <a:rPr lang="en-US" sz="3000" dirty="0">
-                <a:solidFill>
-                  <a:srgbClr val="7030A0"/>
-                </a:solidFill>
-                <a:latin typeface="Times New Roman" panose="02020603050405020304" pitchFamily="18" charset="0"/>
-                <a:cs typeface="Times New Roman" panose="02020603050405020304" pitchFamily="18" charset="0"/>
-              </a:rPr>
-            </a:br>
-            <a:r>
-              <a:rPr lang="en-US" sz="3000" dirty="0">
-                <a:solidFill>
-                  <a:srgbClr val="7030A0"/>
-                </a:solidFill>
-                <a:latin typeface="Times New Roman" panose="02020603050405020304" pitchFamily="18" charset="0"/>
-                <a:cs typeface="Times New Roman" panose="02020603050405020304" pitchFamily="18" charset="0"/>
-              </a:rPr>
-              <a:t>Communication</a:t>
-            </a:r>
-          </a:p>
-        </p:txBody>
-      </p:sp>
-      <p:sp>
-        <p:nvSpPr>
-          <p:cNvPr id="10" name="TextBox 9">
-            <a:extLst>
-              <a:ext uri="{FF2B5EF4-FFF2-40B4-BE49-F238E27FC236}">
-                <a16:creationId xmlns:a16="http://schemas.microsoft.com/office/drawing/2014/main" id="{7683AD16-892E-88AD-8ACB-FA66F2EE1492}"/>
-              </a:ext>
-            </a:extLst>
-          </p:cNvPr>
-          <p:cNvSpPr txBox="1"/>
-          <p:nvPr/>
-        </p:nvSpPr>
-        <p:spPr>
-          <a:xfrm>
-            <a:off x="933723" y="3095367"/>
-            <a:ext cx="2830628" cy="1015663"/>
-          </a:xfrm>
-          <a:prstGeom prst="rect">
-            <a:avLst/>
-          </a:prstGeom>
-          <a:noFill/>
-        </p:spPr>
-        <p:txBody>
-          <a:bodyPr wrap="square" rtlCol="0">
-            <a:spAutoFit/>
-          </a:bodyPr>
-          <a:lstStyle/>
-          <a:p>
-            <a:pPr algn="ctr"/>
-            <a:r>
-              <a:rPr lang="en-US" sz="3000" dirty="0">
-                <a:solidFill>
-                  <a:srgbClr val="7030A0"/>
-                </a:solidFill>
-                <a:latin typeface="Times New Roman" panose="02020603050405020304" pitchFamily="18" charset="0"/>
-                <a:cs typeface="Times New Roman" panose="02020603050405020304" pitchFamily="18" charset="0"/>
-              </a:rPr>
-              <a:t>Outbound</a:t>
-            </a:r>
-            <a:br>
-              <a:rPr lang="en-US" sz="3000" dirty="0">
-                <a:solidFill>
-                  <a:srgbClr val="7030A0"/>
-                </a:solidFill>
-                <a:latin typeface="Times New Roman" panose="02020603050405020304" pitchFamily="18" charset="0"/>
-                <a:cs typeface="Times New Roman" panose="02020603050405020304" pitchFamily="18" charset="0"/>
-              </a:rPr>
-            </a:br>
-            <a:r>
-              <a:rPr lang="en-US" sz="3000" dirty="0">
-                <a:solidFill>
-                  <a:srgbClr val="7030A0"/>
-                </a:solidFill>
-                <a:latin typeface="Times New Roman" panose="02020603050405020304" pitchFamily="18" charset="0"/>
-                <a:cs typeface="Times New Roman" panose="02020603050405020304" pitchFamily="18" charset="0"/>
-              </a:rPr>
-              <a:t>Communication</a:t>
-            </a:r>
-          </a:p>
-        </p:txBody>
-      </p:sp>
-      <p:pic>
-        <p:nvPicPr>
-          <p:cNvPr id="5" name="Graphic 4" descr="Clock with solid fill">
-            <a:extLst>
-              <a:ext uri="{FF2B5EF4-FFF2-40B4-BE49-F238E27FC236}">
-                <a16:creationId xmlns:a16="http://schemas.microsoft.com/office/drawing/2014/main" id="{DC3F74E6-B828-7447-2596-D3D9C5694E27}"/>
-              </a:ext>
-            </a:extLst>
-          </p:cNvPr>
-          <p:cNvPicPr>
-            <a:picLocks noChangeAspect="1"/>
-          </p:cNvPicPr>
-          <p:nvPr/>
-        </p:nvPicPr>
-        <p:blipFill>
-          <a:blip>
-            <a:extLst>
-              <a:ext uri="{96DAC541-7B7A-43D3-8B79-37D633B846F1}">
-                <asvg:svgBlip xmlns:asvg="http://schemas.microsoft.com/office/drawing/2016/SVG/main" r:embed="rId3"/>
-              </a:ext>
-            </a:extLst>
-          </a:blip>
-          <a:stretch>
-            <a:fillRect/>
-          </a:stretch>
-        </p:blipFill>
-        <p:spPr>
-          <a:xfrm>
-            <a:off x="2625368" y="2338965"/>
-            <a:ext cx="914400" cy="914400"/>
-          </a:xfrm>
-          <a:prstGeom prst="rect">
-            <a:avLst/>
-          </a:prstGeom>
-        </p:spPr>
-      </p:pic>
-      <p:sp>
-        <p:nvSpPr>
-          <p:cNvPr id="7" name="TextBox 6">
-            <a:extLst>
-              <a:ext uri="{FF2B5EF4-FFF2-40B4-BE49-F238E27FC236}">
-                <a16:creationId xmlns:a16="http://schemas.microsoft.com/office/drawing/2014/main" id="{0B99F71D-207C-3FD0-D2C0-67FC0B3B6B20}"/>
-              </a:ext>
-            </a:extLst>
-          </p:cNvPr>
-          <p:cNvSpPr txBox="1"/>
-          <p:nvPr/>
-        </p:nvSpPr>
-        <p:spPr>
-          <a:xfrm>
-            <a:off x="3445340" y="2288333"/>
-            <a:ext cx="3614872" cy="1015663"/>
-          </a:xfrm>
-          <a:prstGeom prst="rect">
-            <a:avLst/>
-          </a:prstGeom>
-          <a:noFill/>
-        </p:spPr>
-        <p:txBody>
-          <a:bodyPr wrap="square" rtlCol="0">
-            <a:spAutoFit/>
-          </a:bodyPr>
-          <a:lstStyle/>
-          <a:p>
-            <a:r>
-              <a:rPr lang="en-US" sz="3000" dirty="0"/>
-              <a:t>Tightly Synchronized Clocks</a:t>
-            </a:r>
-          </a:p>
-        </p:txBody>
-      </p:sp>
-      <p:sp>
-        <p:nvSpPr>
-          <p:cNvPr id="2" name="Rounded Rectangle 1">
-            <a:extLst>
-              <a:ext uri="{FF2B5EF4-FFF2-40B4-BE49-F238E27FC236}">
-                <a16:creationId xmlns:a16="http://schemas.microsoft.com/office/drawing/2014/main" id="{C4CE2F7F-1B4D-2F81-B0A2-47AB184F13C3}"/>
-              </a:ext>
-            </a:extLst>
-          </p:cNvPr>
-          <p:cNvSpPr/>
-          <p:nvPr/>
-        </p:nvSpPr>
-        <p:spPr>
-          <a:xfrm>
-            <a:off x="7643442" y="2761827"/>
-            <a:ext cx="4032482" cy="2279729"/>
-          </a:xfrm>
-          <a:prstGeom prst="roundRect">
-            <a:avLst/>
-          </a:prstGeom>
-          <a:solidFill>
-            <a:schemeClr val="accent4">
-              <a:lumMod val="40000"/>
-              <a:lumOff val="60000"/>
-            </a:schemeClr>
-          </a:solidFill>
-          <a:ln>
-            <a:noFill/>
-          </a:ln>
-        </p:spPr>
-        <p:style>
-          <a:lnRef idx="2">
-            <a:schemeClr val="accent1">
-              <a:shade val="15000"/>
-            </a:schemeClr>
-          </a:lnRef>
-          <a:fillRef idx="1">
-            <a:schemeClr val="accent1"/>
-          </a:fillRef>
-          <a:effectRef idx="0">
-            <a:schemeClr val="accent1"/>
-          </a:effectRef>
-          <a:fontRef idx="minor">
-            <a:schemeClr val="lt1"/>
-          </a:fontRef>
-        </p:style>
-        <p:txBody>
-          <a:bodyPr rtlCol="0" anchor="ctr"/>
-          <a:lstStyle/>
-          <a:p>
-            <a:pPr algn="ctr"/>
-            <a:endParaRPr lang="en-US"/>
-          </a:p>
-        </p:txBody>
-      </p:sp>
-      <p:sp>
-        <p:nvSpPr>
-          <p:cNvPr id="8" name="TextBox 7">
-            <a:extLst>
-              <a:ext uri="{FF2B5EF4-FFF2-40B4-BE49-F238E27FC236}">
-                <a16:creationId xmlns:a16="http://schemas.microsoft.com/office/drawing/2014/main" id="{180C9FA6-F036-9573-1309-3BD06FDC2D18}"/>
-              </a:ext>
-            </a:extLst>
-          </p:cNvPr>
-          <p:cNvSpPr txBox="1"/>
-          <p:nvPr/>
-        </p:nvSpPr>
-        <p:spPr>
-          <a:xfrm>
-            <a:off x="8232575" y="3089189"/>
-            <a:ext cx="2830628" cy="1015663"/>
-          </a:xfrm>
-          <a:prstGeom prst="rect">
-            <a:avLst/>
-          </a:prstGeom>
-          <a:noFill/>
-        </p:spPr>
-        <p:txBody>
-          <a:bodyPr wrap="square" rtlCol="0">
-            <a:spAutoFit/>
-          </a:bodyPr>
-          <a:lstStyle/>
-          <a:p>
-            <a:pPr algn="ctr"/>
-            <a:r>
-              <a:rPr lang="en-US" sz="3000" dirty="0">
-                <a:solidFill>
-                  <a:srgbClr val="7030A0"/>
-                </a:solidFill>
-                <a:latin typeface="Times New Roman" panose="02020603050405020304" pitchFamily="18" charset="0"/>
-                <a:cs typeface="Times New Roman" panose="02020603050405020304" pitchFamily="18" charset="0"/>
-              </a:rPr>
-              <a:t>Inbound</a:t>
-            </a:r>
-            <a:br>
-              <a:rPr lang="en-US" sz="3000" dirty="0">
-                <a:solidFill>
-                  <a:srgbClr val="7030A0"/>
-                </a:solidFill>
-                <a:latin typeface="Times New Roman" panose="02020603050405020304" pitchFamily="18" charset="0"/>
-                <a:cs typeface="Times New Roman" panose="02020603050405020304" pitchFamily="18" charset="0"/>
-              </a:rPr>
-            </a:br>
-            <a:r>
-              <a:rPr lang="en-US" sz="3000" dirty="0">
-                <a:solidFill>
-                  <a:srgbClr val="7030A0"/>
-                </a:solidFill>
-                <a:latin typeface="Times New Roman" panose="02020603050405020304" pitchFamily="18" charset="0"/>
-                <a:cs typeface="Times New Roman" panose="02020603050405020304" pitchFamily="18" charset="0"/>
-              </a:rPr>
-              <a:t>Communication</a:t>
-            </a:r>
-          </a:p>
-        </p:txBody>
-      </p:sp>
-      <p:pic>
-        <p:nvPicPr>
-          <p:cNvPr id="11" name="Graphic 10" descr="Normal Distribution with solid fill">
-            <a:extLst>
-              <a:ext uri="{FF2B5EF4-FFF2-40B4-BE49-F238E27FC236}">
-                <a16:creationId xmlns:a16="http://schemas.microsoft.com/office/drawing/2014/main" id="{5C94C79F-D31B-1110-C711-C59BC2DA234E}"/>
-              </a:ext>
-            </a:extLst>
-          </p:cNvPr>
-          <p:cNvPicPr>
-            <a:picLocks noChangeAspect="1"/>
-          </p:cNvPicPr>
-          <p:nvPr/>
-        </p:nvPicPr>
-        <p:blipFill>
-          <a:blip>
-            <a:extLst>
-              <a:ext uri="{96DAC541-7B7A-43D3-8B79-37D633B846F1}">
-                <asvg:svgBlip xmlns:asvg="http://schemas.microsoft.com/office/drawing/2016/SVG/main" r:embed="rId4"/>
-              </a:ext>
-            </a:extLst>
-          </a:blip>
-          <a:stretch>
-            <a:fillRect/>
-          </a:stretch>
-        </p:blipFill>
-        <p:spPr>
-          <a:xfrm>
-            <a:off x="8232575" y="2206810"/>
-            <a:ext cx="914400" cy="914400"/>
-          </a:xfrm>
-          <a:prstGeom prst="rect">
-            <a:avLst/>
-          </a:prstGeom>
-        </p:spPr>
-      </p:pic>
-      <p:sp>
-        <p:nvSpPr>
-          <p:cNvPr id="13" name="TextBox 12">
-            <a:extLst>
-              <a:ext uri="{FF2B5EF4-FFF2-40B4-BE49-F238E27FC236}">
-                <a16:creationId xmlns:a16="http://schemas.microsoft.com/office/drawing/2014/main" id="{DB85E896-B51E-B9AE-4126-D45A2DB10B7F}"/>
-              </a:ext>
-            </a:extLst>
-          </p:cNvPr>
-          <p:cNvSpPr txBox="1"/>
-          <p:nvPr/>
-        </p:nvSpPr>
-        <p:spPr>
-          <a:xfrm>
-            <a:off x="9059956" y="2152485"/>
-            <a:ext cx="2846807" cy="1015663"/>
-          </a:xfrm>
-          <a:prstGeom prst="rect">
-            <a:avLst/>
-          </a:prstGeom>
-          <a:noFill/>
-        </p:spPr>
-        <p:txBody>
-          <a:bodyPr wrap="square" rtlCol="0">
-            <a:spAutoFit/>
-          </a:bodyPr>
-          <a:lstStyle/>
-          <a:p>
-            <a:r>
-              <a:rPr lang="en-US" sz="3000" dirty="0"/>
-              <a:t>Time as a random variable</a:t>
-            </a:r>
-          </a:p>
-        </p:txBody>
-      </p:sp>
-      <p:sp>
-        <p:nvSpPr>
-          <p:cNvPr id="9" name="TextBox 8">
-            <a:extLst>
-              <a:ext uri="{FF2B5EF4-FFF2-40B4-BE49-F238E27FC236}">
-                <a16:creationId xmlns:a16="http://schemas.microsoft.com/office/drawing/2014/main" id="{FF79DCAB-6D3F-F0E5-03A5-FECA8F3C4FA2}"/>
-              </a:ext>
-            </a:extLst>
-          </p:cNvPr>
-          <p:cNvSpPr txBox="1"/>
-          <p:nvPr/>
-        </p:nvSpPr>
-        <p:spPr>
-          <a:xfrm>
-            <a:off x="2121325" y="4564534"/>
-            <a:ext cx="3872835" cy="461665"/>
-          </a:xfrm>
-          <a:prstGeom prst="rect">
-            <a:avLst/>
-          </a:prstGeom>
-          <a:noFill/>
-        </p:spPr>
-        <p:txBody>
-          <a:bodyPr wrap="square" rtlCol="0">
-            <a:spAutoFit/>
-          </a:bodyPr>
-          <a:lstStyle/>
-          <a:p>
-            <a:pPr algn="ctr"/>
-            <a:r>
-              <a:rPr lang="en-US" sz="2400" dirty="0">
-                <a:latin typeface="Times New Roman" panose="02020603050405020304" pitchFamily="18" charset="0"/>
-                <a:cs typeface="Times New Roman" panose="02020603050405020304" pitchFamily="18" charset="0"/>
-              </a:rPr>
-              <a:t>ACM SIGCOMM’25</a:t>
-            </a:r>
-          </a:p>
-        </p:txBody>
-      </p:sp>
-      <p:sp>
-        <p:nvSpPr>
-          <p:cNvPr id="14" name="TextBox 13">
-            <a:extLst>
-              <a:ext uri="{FF2B5EF4-FFF2-40B4-BE49-F238E27FC236}">
-                <a16:creationId xmlns:a16="http://schemas.microsoft.com/office/drawing/2014/main" id="{16758BBE-60CC-5A6D-75BA-B7DACEFFD024}"/>
-              </a:ext>
-            </a:extLst>
-          </p:cNvPr>
-          <p:cNvSpPr txBox="1"/>
-          <p:nvPr/>
-        </p:nvSpPr>
-        <p:spPr>
-          <a:xfrm>
-            <a:off x="7643442" y="4111538"/>
-            <a:ext cx="3872835" cy="461665"/>
-          </a:xfrm>
-          <a:prstGeom prst="rect">
-            <a:avLst/>
-          </a:prstGeom>
-          <a:noFill/>
-        </p:spPr>
-        <p:txBody>
-          <a:bodyPr wrap="square" rtlCol="0">
-            <a:spAutoFit/>
-          </a:bodyPr>
-          <a:lstStyle/>
-          <a:p>
-            <a:pPr algn="ctr"/>
-            <a:r>
-              <a:rPr lang="en-US" sz="2400" dirty="0">
-                <a:latin typeface="Times New Roman" panose="02020603050405020304" pitchFamily="18" charset="0"/>
-                <a:cs typeface="Times New Roman" panose="02020603050405020304" pitchFamily="18" charset="0"/>
-              </a:rPr>
-              <a:t>ACM HotNets’25</a:t>
-            </a:r>
-          </a:p>
-        </p:txBody>
-      </p:sp>
-      <p:sp>
-        <p:nvSpPr>
-          <p:cNvPr id="15" name="TextBox 14">
-            <a:extLst>
-              <a:ext uri="{FF2B5EF4-FFF2-40B4-BE49-F238E27FC236}">
-                <a16:creationId xmlns:a16="http://schemas.microsoft.com/office/drawing/2014/main" id="{AE0B7F2B-89A8-DA63-8B23-76673AB870C0}"/>
-              </a:ext>
-            </a:extLst>
-          </p:cNvPr>
-          <p:cNvSpPr txBox="1"/>
-          <p:nvPr/>
-        </p:nvSpPr>
-        <p:spPr>
-          <a:xfrm>
-            <a:off x="7643442" y="4507299"/>
-            <a:ext cx="3872835" cy="461665"/>
-          </a:xfrm>
-          <a:prstGeom prst="rect">
-            <a:avLst/>
-          </a:prstGeom>
-          <a:noFill/>
-        </p:spPr>
-        <p:txBody>
-          <a:bodyPr wrap="square" rtlCol="0">
-            <a:spAutoFit/>
-          </a:bodyPr>
-          <a:lstStyle/>
-          <a:p>
-            <a:pPr algn="ctr"/>
-            <a:r>
-              <a:rPr lang="en-US" sz="2400" dirty="0">
-                <a:latin typeface="Times New Roman" panose="02020603050405020304" pitchFamily="18" charset="0"/>
-                <a:cs typeface="Times New Roman" panose="02020603050405020304" pitchFamily="18" charset="0"/>
-              </a:rPr>
-              <a:t>Submitted to SIGCOMM’26</a:t>
-            </a:r>
-          </a:p>
-        </p:txBody>
-      </p:sp>
-      <p:sp>
-        <p:nvSpPr>
-          <p:cNvPr id="3" name="TextBox 2">
-            <a:extLst>
-              <a:ext uri="{FF2B5EF4-FFF2-40B4-BE49-F238E27FC236}">
-                <a16:creationId xmlns:a16="http://schemas.microsoft.com/office/drawing/2014/main" id="{3A453774-1F0A-4F75-7384-F591D706DB5E}"/>
-              </a:ext>
-            </a:extLst>
-          </p:cNvPr>
-          <p:cNvSpPr txBox="1"/>
-          <p:nvPr/>
-        </p:nvSpPr>
-        <p:spPr>
-          <a:xfrm>
-            <a:off x="2121324" y="5050912"/>
-            <a:ext cx="3872835" cy="1200329"/>
-          </a:xfrm>
-          <a:prstGeom prst="rect">
-            <a:avLst/>
-          </a:prstGeom>
-          <a:noFill/>
-        </p:spPr>
-        <p:txBody>
-          <a:bodyPr wrap="square" rtlCol="0">
-            <a:spAutoFit/>
-          </a:bodyPr>
-          <a:lstStyle/>
-          <a:p>
-            <a:pPr algn="ctr"/>
-            <a:r>
-              <a:rPr lang="en-US" sz="2400" dirty="0">
-                <a:latin typeface="Times New Roman" panose="02020603050405020304" pitchFamily="18" charset="0"/>
-                <a:cs typeface="Times New Roman" panose="02020603050405020304" pitchFamily="18" charset="0"/>
-              </a:rPr>
-              <a:t>Cited by researchers from Jane Street, Google, Microsoft Research</a:t>
-            </a:r>
-          </a:p>
-        </p:txBody>
-      </p:sp>
-      <p:sp>
-        <p:nvSpPr>
-          <p:cNvPr id="16" name="TextBox 15">
-            <a:extLst>
-              <a:ext uri="{FF2B5EF4-FFF2-40B4-BE49-F238E27FC236}">
-                <a16:creationId xmlns:a16="http://schemas.microsoft.com/office/drawing/2014/main" id="{7F7A22B8-3912-A39A-4AD8-9F6867449B9D}"/>
-              </a:ext>
-            </a:extLst>
-          </p:cNvPr>
-          <p:cNvSpPr txBox="1"/>
-          <p:nvPr/>
-        </p:nvSpPr>
-        <p:spPr>
-          <a:xfrm>
-            <a:off x="7643442" y="5095180"/>
-            <a:ext cx="4103674" cy="1200329"/>
-          </a:xfrm>
-          <a:prstGeom prst="rect">
-            <a:avLst/>
-          </a:prstGeom>
-          <a:noFill/>
-        </p:spPr>
-        <p:txBody>
-          <a:bodyPr wrap="square" rtlCol="0">
-            <a:spAutoFit/>
-          </a:bodyPr>
-          <a:lstStyle/>
-          <a:p>
-            <a:pPr algn="ctr"/>
-            <a:r>
-              <a:rPr lang="en-US" sz="2400" dirty="0">
-                <a:latin typeface="Times New Roman" panose="02020603050405020304" pitchFamily="18" charset="0"/>
-                <a:cs typeface="Times New Roman" panose="02020603050405020304" pitchFamily="18" charset="0"/>
-              </a:rPr>
-              <a:t>Considerable interest from Jane Street, working with them to build several systems atop</a:t>
-            </a:r>
-          </a:p>
-        </p:txBody>
-      </p:sp>
-    </p:spTree>
-    <p:extLst>
-      <p:ext uri="{BB962C8B-B14F-4D97-AF65-F5344CB8AC3E}">
-        <p14:creationId xmlns:p14="http://schemas.microsoft.com/office/powerpoint/2010/main" val="3568427761"/>
-      </p:ext>
-    </p:extLst>
-  </p:cSld>
-  <p:clrMapOvr>
-    <a:masterClrMapping/>
-  </p:clrMapOvr>
-  <mc:AlternateContent xmlns:mc="http://schemas.openxmlformats.org/markup-compatibility/2006">
-    <mc:Choice xmlns:p159="http://schemas.microsoft.com/office/powerpoint/2015/09/main" Requires="p159">
-      <p:transition spd="med">
-        <p159:morph option="byWord"/>
-      </p:transition>
-    </mc:Choice>
-    <mc:Fallback>
-      <p:transition spd="med">
-        <p:fade/>
-      </p:transition>
-    </mc:Fallback>
-  </mc:AlternateContent>
-</p:sld>
-</file>
-
-<file path=ppt/slides/slide18.xml><?xml version="1.0" encoding="utf-8"?>
-<p:sld xmlns:a="http://schemas.openxmlformats.org/drawingml/2006/main" xmlns:r="http://schemas.openxmlformats.org/officeDocument/2006/relationships" xmlns:p="http://schemas.openxmlformats.org/presentationml/2006/main">
-  <p:cSld>
-    <p:spTree>
-      <p:nvGrpSpPr>
-        <p:cNvPr id="1" name="">
-          <a:extLst>
-            <a:ext uri="{FF2B5EF4-FFF2-40B4-BE49-F238E27FC236}">
-              <a16:creationId xmlns:a16="http://schemas.microsoft.com/office/drawing/2014/main" id="{036B5CA3-9610-7961-1B95-96F35195D1C8}"/>
-            </a:ext>
-          </a:extLst>
-        </p:cNvPr>
-        <p:cNvGrpSpPr/>
-        <p:nvPr/>
-      </p:nvGrpSpPr>
-      <p:grpSpPr>
-        <a:xfrm>
-          <a:off x="0" y="0"/>
-          <a:ext cx="0" cy="0"/>
-          <a:chOff x="0" y="0"/>
-          <a:chExt cx="0" cy="0"/>
-        </a:xfrm>
-      </p:grpSpPr>
-      <p:sp>
-        <p:nvSpPr>
-          <p:cNvPr id="6" name="Rounded Rectangle 5">
-            <a:extLst>
-              <a:ext uri="{FF2B5EF4-FFF2-40B4-BE49-F238E27FC236}">
-                <a16:creationId xmlns:a16="http://schemas.microsoft.com/office/drawing/2014/main" id="{8CDB2F0E-92F1-2447-4AFB-9C2AE402C6BF}"/>
-              </a:ext>
-            </a:extLst>
-          </p:cNvPr>
-          <p:cNvSpPr/>
-          <p:nvPr/>
-        </p:nvSpPr>
-        <p:spPr>
-          <a:xfrm>
-            <a:off x="702884" y="2761827"/>
-            <a:ext cx="6709719" cy="2279729"/>
-          </a:xfrm>
-          <a:prstGeom prst="roundRect">
-            <a:avLst/>
-          </a:prstGeom>
-          <a:solidFill>
-            <a:schemeClr val="accent4">
-              <a:lumMod val="40000"/>
-              <a:lumOff val="60000"/>
-            </a:schemeClr>
-          </a:solidFill>
-          <a:ln>
-            <a:noFill/>
-          </a:ln>
-        </p:spPr>
-        <p:style>
-          <a:lnRef idx="2">
-            <a:schemeClr val="accent1">
-              <a:shade val="15000"/>
-            </a:schemeClr>
-          </a:lnRef>
-          <a:fillRef idx="1">
-            <a:schemeClr val="accent1"/>
-          </a:fillRef>
-          <a:effectRef idx="0">
-            <a:schemeClr val="accent1"/>
-          </a:effectRef>
-          <a:fontRef idx="minor">
-            <a:schemeClr val="lt1"/>
-          </a:fontRef>
-        </p:style>
-        <p:txBody>
-          <a:bodyPr rtlCol="0" anchor="ctr"/>
-          <a:lstStyle/>
-          <a:p>
-            <a:pPr algn="ctr"/>
-            <a:endParaRPr lang="en-US"/>
-          </a:p>
-        </p:txBody>
-      </p:sp>
-      <p:sp>
-        <p:nvSpPr>
-          <p:cNvPr id="17" name="Rectangle 16">
-            <a:extLst>
-              <a:ext uri="{FF2B5EF4-FFF2-40B4-BE49-F238E27FC236}">
-                <a16:creationId xmlns:a16="http://schemas.microsoft.com/office/drawing/2014/main" id="{80DFBDE7-5E2E-5800-F1C0-A20B261A1755}"/>
-              </a:ext>
-            </a:extLst>
-          </p:cNvPr>
-          <p:cNvSpPr/>
-          <p:nvPr/>
-        </p:nvSpPr>
-        <p:spPr>
-          <a:xfrm rot="16200000">
-            <a:off x="2522582" y="-387076"/>
-            <a:ext cx="68673" cy="3246390"/>
-          </a:xfrm>
-          <a:prstGeom prst="rect">
-            <a:avLst/>
-          </a:prstGeom>
-          <a:solidFill>
-            <a:srgbClr val="FF0000"/>
-          </a:solidFill>
-          <a:ln>
-            <a:solidFill>
-              <a:srgbClr val="FF0000"/>
-            </a:solidFill>
-          </a:ln>
-        </p:spPr>
-        <p:style>
-          <a:lnRef idx="2">
-            <a:schemeClr val="accent1">
-              <a:shade val="15000"/>
-            </a:schemeClr>
-          </a:lnRef>
-          <a:fillRef idx="1">
-            <a:schemeClr val="accent1"/>
-          </a:fillRef>
-          <a:effectRef idx="0">
-            <a:schemeClr val="accent1"/>
-          </a:effectRef>
-          <a:fontRef idx="minor">
-            <a:schemeClr val="lt1"/>
-          </a:fontRef>
-        </p:style>
-        <p:txBody>
-          <a:bodyPr rtlCol="0" anchor="ctr"/>
-          <a:lstStyle/>
-          <a:p>
-            <a:pPr algn="ctr"/>
-            <a:endParaRPr lang="en-US">
-              <a:latin typeface="Times New Roman" panose="02020603050405020304" pitchFamily="18" charset="0"/>
-              <a:cs typeface="Times New Roman" panose="02020603050405020304" pitchFamily="18" charset="0"/>
-            </a:endParaRPr>
-          </a:p>
-        </p:txBody>
-      </p:sp>
-      <p:sp>
-        <p:nvSpPr>
-          <p:cNvPr id="18" name="Rectangle 17">
-            <a:extLst>
-              <a:ext uri="{FF2B5EF4-FFF2-40B4-BE49-F238E27FC236}">
-                <a16:creationId xmlns:a16="http://schemas.microsoft.com/office/drawing/2014/main" id="{27B1ED2F-A8D1-2AF2-FE8B-3E6187AA2C8E}"/>
-              </a:ext>
-            </a:extLst>
-          </p:cNvPr>
-          <p:cNvSpPr/>
-          <p:nvPr/>
-        </p:nvSpPr>
-        <p:spPr>
-          <a:xfrm rot="16200000">
-            <a:off x="2522581" y="-318404"/>
-            <a:ext cx="68674" cy="3246390"/>
-          </a:xfrm>
-          <a:prstGeom prst="rect">
-            <a:avLst/>
-          </a:prstGeom>
-          <a:solidFill>
-            <a:srgbClr val="7030A0"/>
-          </a:solidFill>
-          <a:ln>
-            <a:solidFill>
-              <a:srgbClr val="7030A0"/>
-            </a:solidFill>
-          </a:ln>
-        </p:spPr>
-        <p:style>
-          <a:lnRef idx="2">
-            <a:schemeClr val="accent1">
-              <a:shade val="15000"/>
-            </a:schemeClr>
-          </a:lnRef>
-          <a:fillRef idx="1">
-            <a:schemeClr val="accent1"/>
-          </a:fillRef>
-          <a:effectRef idx="0">
-            <a:schemeClr val="accent1"/>
-          </a:effectRef>
-          <a:fontRef idx="minor">
-            <a:schemeClr val="lt1"/>
-          </a:fontRef>
-        </p:style>
-        <p:txBody>
-          <a:bodyPr rtlCol="0" anchor="ctr"/>
-          <a:lstStyle/>
-          <a:p>
-            <a:pPr algn="ctr"/>
-            <a:endParaRPr lang="en-US">
-              <a:latin typeface="Times New Roman" panose="02020603050405020304" pitchFamily="18" charset="0"/>
-              <a:cs typeface="Times New Roman" panose="02020603050405020304" pitchFamily="18" charset="0"/>
-            </a:endParaRPr>
-          </a:p>
-        </p:txBody>
-      </p:sp>
-      <p:sp>
-        <p:nvSpPr>
-          <p:cNvPr id="12" name="TextBox 11">
-            <a:extLst>
-              <a:ext uri="{FF2B5EF4-FFF2-40B4-BE49-F238E27FC236}">
-                <a16:creationId xmlns:a16="http://schemas.microsoft.com/office/drawing/2014/main" id="{A4C2A527-A0EA-8B4C-9EC6-6DDFB7C965FD}"/>
-              </a:ext>
-            </a:extLst>
-          </p:cNvPr>
-          <p:cNvSpPr txBox="1"/>
-          <p:nvPr/>
-        </p:nvSpPr>
-        <p:spPr>
-          <a:xfrm>
-            <a:off x="772906" y="405121"/>
-            <a:ext cx="6591721" cy="830997"/>
-          </a:xfrm>
-          <a:prstGeom prst="rect">
-            <a:avLst/>
-          </a:prstGeom>
-          <a:noFill/>
-        </p:spPr>
-        <p:txBody>
-          <a:bodyPr wrap="square" rtlCol="0">
-            <a:spAutoFit/>
-          </a:bodyPr>
-          <a:lstStyle/>
-          <a:p>
-            <a:r>
-              <a:rPr lang="en-US" sz="4800" dirty="0">
-                <a:latin typeface="Times New Roman" panose="02020603050405020304" pitchFamily="18" charset="0"/>
-                <a:cs typeface="Times New Roman" panose="02020603050405020304" pitchFamily="18" charset="0"/>
-              </a:rPr>
-              <a:t>Thesis: Latency Fairness</a:t>
-            </a:r>
-            <a:endParaRPr lang="en-US" sz="3000" dirty="0">
-              <a:latin typeface="Times New Roman" panose="02020603050405020304" pitchFamily="18" charset="0"/>
-              <a:cs typeface="Times New Roman" panose="02020603050405020304" pitchFamily="18" charset="0"/>
-            </a:endParaRPr>
-          </a:p>
-        </p:txBody>
-      </p:sp>
-      <p:sp>
-        <p:nvSpPr>
-          <p:cNvPr id="4" name="TextBox 3">
-            <a:extLst>
-              <a:ext uri="{FF2B5EF4-FFF2-40B4-BE49-F238E27FC236}">
-                <a16:creationId xmlns:a16="http://schemas.microsoft.com/office/drawing/2014/main" id="{7EA2168A-D26C-B5B6-2A8D-229247BE723E}"/>
-              </a:ext>
-            </a:extLst>
-          </p:cNvPr>
-          <p:cNvSpPr txBox="1"/>
-          <p:nvPr/>
-        </p:nvSpPr>
-        <p:spPr>
-          <a:xfrm>
-            <a:off x="4229584" y="3089189"/>
-            <a:ext cx="2830628" cy="1015663"/>
-          </a:xfrm>
-          <a:prstGeom prst="rect">
-            <a:avLst/>
-          </a:prstGeom>
-          <a:noFill/>
-        </p:spPr>
-        <p:txBody>
-          <a:bodyPr wrap="square" rtlCol="0">
-            <a:spAutoFit/>
-          </a:bodyPr>
-          <a:lstStyle/>
-          <a:p>
-            <a:pPr algn="ctr"/>
-            <a:r>
-              <a:rPr lang="en-US" sz="3000" dirty="0">
-                <a:solidFill>
-                  <a:srgbClr val="7030A0"/>
-                </a:solidFill>
-                <a:latin typeface="Times New Roman" panose="02020603050405020304" pitchFamily="18" charset="0"/>
-                <a:cs typeface="Times New Roman" panose="02020603050405020304" pitchFamily="18" charset="0"/>
-              </a:rPr>
-              <a:t>Inbound</a:t>
-            </a:r>
-            <a:br>
-              <a:rPr lang="en-US" sz="3000" dirty="0">
-                <a:solidFill>
-                  <a:srgbClr val="7030A0"/>
-                </a:solidFill>
-                <a:latin typeface="Times New Roman" panose="02020603050405020304" pitchFamily="18" charset="0"/>
-                <a:cs typeface="Times New Roman" panose="02020603050405020304" pitchFamily="18" charset="0"/>
-              </a:rPr>
-            </a:br>
-            <a:r>
-              <a:rPr lang="en-US" sz="3000" dirty="0">
-                <a:solidFill>
-                  <a:srgbClr val="7030A0"/>
-                </a:solidFill>
-                <a:latin typeface="Times New Roman" panose="02020603050405020304" pitchFamily="18" charset="0"/>
-                <a:cs typeface="Times New Roman" panose="02020603050405020304" pitchFamily="18" charset="0"/>
-              </a:rPr>
-              <a:t>Communication</a:t>
-            </a:r>
-          </a:p>
-        </p:txBody>
-      </p:sp>
-      <p:sp>
-        <p:nvSpPr>
-          <p:cNvPr id="10" name="TextBox 9">
-            <a:extLst>
-              <a:ext uri="{FF2B5EF4-FFF2-40B4-BE49-F238E27FC236}">
-                <a16:creationId xmlns:a16="http://schemas.microsoft.com/office/drawing/2014/main" id="{57EDC1AC-909B-4FDD-19F3-6083605CF67A}"/>
-              </a:ext>
-            </a:extLst>
-          </p:cNvPr>
-          <p:cNvSpPr txBox="1"/>
-          <p:nvPr/>
-        </p:nvSpPr>
-        <p:spPr>
-          <a:xfrm>
-            <a:off x="933723" y="3095367"/>
-            <a:ext cx="2830628" cy="1015663"/>
-          </a:xfrm>
-          <a:prstGeom prst="rect">
-            <a:avLst/>
-          </a:prstGeom>
-          <a:noFill/>
-        </p:spPr>
-        <p:txBody>
-          <a:bodyPr wrap="square" rtlCol="0">
-            <a:spAutoFit/>
-          </a:bodyPr>
-          <a:lstStyle/>
-          <a:p>
-            <a:pPr algn="ctr"/>
-            <a:r>
-              <a:rPr lang="en-US" sz="3000" dirty="0">
-                <a:solidFill>
-                  <a:srgbClr val="7030A0"/>
-                </a:solidFill>
-                <a:latin typeface="Times New Roman" panose="02020603050405020304" pitchFamily="18" charset="0"/>
-                <a:cs typeface="Times New Roman" panose="02020603050405020304" pitchFamily="18" charset="0"/>
-              </a:rPr>
-              <a:t>Outbound</a:t>
-            </a:r>
-            <a:br>
-              <a:rPr lang="en-US" sz="3000" dirty="0">
-                <a:solidFill>
-                  <a:srgbClr val="7030A0"/>
-                </a:solidFill>
-                <a:latin typeface="Times New Roman" panose="02020603050405020304" pitchFamily="18" charset="0"/>
-                <a:cs typeface="Times New Roman" panose="02020603050405020304" pitchFamily="18" charset="0"/>
-              </a:rPr>
-            </a:br>
-            <a:r>
-              <a:rPr lang="en-US" sz="3000" dirty="0">
-                <a:solidFill>
-                  <a:srgbClr val="7030A0"/>
-                </a:solidFill>
-                <a:latin typeface="Times New Roman" panose="02020603050405020304" pitchFamily="18" charset="0"/>
-                <a:cs typeface="Times New Roman" panose="02020603050405020304" pitchFamily="18" charset="0"/>
-              </a:rPr>
-              <a:t>Communication</a:t>
-            </a:r>
-          </a:p>
-        </p:txBody>
-      </p:sp>
-      <p:pic>
-        <p:nvPicPr>
-          <p:cNvPr id="5" name="Graphic 4" descr="Clock with solid fill">
-            <a:extLst>
-              <a:ext uri="{FF2B5EF4-FFF2-40B4-BE49-F238E27FC236}">
-                <a16:creationId xmlns:a16="http://schemas.microsoft.com/office/drawing/2014/main" id="{7CA41EBB-C6FA-DB22-3E79-DEA8E56EF4C3}"/>
-              </a:ext>
-            </a:extLst>
-          </p:cNvPr>
-          <p:cNvPicPr>
-            <a:picLocks noChangeAspect="1"/>
-          </p:cNvPicPr>
-          <p:nvPr/>
-        </p:nvPicPr>
-        <p:blipFill>
-          <a:blip>
-            <a:extLst>
-              <a:ext uri="{96DAC541-7B7A-43D3-8B79-37D633B846F1}">
-                <asvg:svgBlip xmlns:asvg="http://schemas.microsoft.com/office/drawing/2016/SVG/main" r:embed="rId3"/>
-              </a:ext>
-            </a:extLst>
-          </a:blip>
-          <a:stretch>
-            <a:fillRect/>
-          </a:stretch>
-        </p:blipFill>
-        <p:spPr>
-          <a:xfrm>
-            <a:off x="2625368" y="2338965"/>
-            <a:ext cx="914400" cy="914400"/>
-          </a:xfrm>
-          <a:prstGeom prst="rect">
-            <a:avLst/>
-          </a:prstGeom>
-        </p:spPr>
-      </p:pic>
-      <p:sp>
-        <p:nvSpPr>
-          <p:cNvPr id="7" name="TextBox 6">
-            <a:extLst>
-              <a:ext uri="{FF2B5EF4-FFF2-40B4-BE49-F238E27FC236}">
-                <a16:creationId xmlns:a16="http://schemas.microsoft.com/office/drawing/2014/main" id="{E1739C3C-A360-3329-AC33-3EC88A1DDBF6}"/>
-              </a:ext>
-            </a:extLst>
-          </p:cNvPr>
-          <p:cNvSpPr txBox="1"/>
-          <p:nvPr/>
-        </p:nvSpPr>
-        <p:spPr>
-          <a:xfrm>
-            <a:off x="3445340" y="2288333"/>
-            <a:ext cx="3614872" cy="1015663"/>
-          </a:xfrm>
-          <a:prstGeom prst="rect">
-            <a:avLst/>
-          </a:prstGeom>
-          <a:noFill/>
-        </p:spPr>
-        <p:txBody>
-          <a:bodyPr wrap="square" rtlCol="0">
-            <a:spAutoFit/>
-          </a:bodyPr>
-          <a:lstStyle/>
-          <a:p>
-            <a:r>
-              <a:rPr lang="en-US" sz="3000" dirty="0"/>
-              <a:t>Tightly Synchronized Clocks</a:t>
-            </a:r>
-          </a:p>
-        </p:txBody>
-      </p:sp>
-      <p:sp>
-        <p:nvSpPr>
-          <p:cNvPr id="2" name="Rounded Rectangle 1">
-            <a:extLst>
-              <a:ext uri="{FF2B5EF4-FFF2-40B4-BE49-F238E27FC236}">
-                <a16:creationId xmlns:a16="http://schemas.microsoft.com/office/drawing/2014/main" id="{9A0DB9F4-97FE-53E9-6644-C22A4EAA8EE4}"/>
-              </a:ext>
-            </a:extLst>
-          </p:cNvPr>
-          <p:cNvSpPr/>
-          <p:nvPr/>
-        </p:nvSpPr>
-        <p:spPr>
-          <a:xfrm>
-            <a:off x="7643442" y="2761827"/>
-            <a:ext cx="4032482" cy="2279729"/>
-          </a:xfrm>
-          <a:prstGeom prst="roundRect">
-            <a:avLst/>
-          </a:prstGeom>
-          <a:solidFill>
-            <a:schemeClr val="accent4">
-              <a:lumMod val="40000"/>
-              <a:lumOff val="60000"/>
-            </a:schemeClr>
-          </a:solidFill>
-          <a:ln>
-            <a:noFill/>
-          </a:ln>
-        </p:spPr>
-        <p:style>
-          <a:lnRef idx="2">
-            <a:schemeClr val="accent1">
-              <a:shade val="15000"/>
-            </a:schemeClr>
-          </a:lnRef>
-          <a:fillRef idx="1">
-            <a:schemeClr val="accent1"/>
-          </a:fillRef>
-          <a:effectRef idx="0">
-            <a:schemeClr val="accent1"/>
-          </a:effectRef>
-          <a:fontRef idx="minor">
-            <a:schemeClr val="lt1"/>
-          </a:fontRef>
-        </p:style>
-        <p:txBody>
-          <a:bodyPr rtlCol="0" anchor="ctr"/>
-          <a:lstStyle/>
-          <a:p>
-            <a:pPr algn="ctr"/>
-            <a:endParaRPr lang="en-US"/>
-          </a:p>
-        </p:txBody>
-      </p:sp>
-      <p:sp>
-        <p:nvSpPr>
-          <p:cNvPr id="8" name="TextBox 7">
-            <a:extLst>
-              <a:ext uri="{FF2B5EF4-FFF2-40B4-BE49-F238E27FC236}">
-                <a16:creationId xmlns:a16="http://schemas.microsoft.com/office/drawing/2014/main" id="{948BA897-9EEB-ECE3-39C3-1CD97B0783CC}"/>
-              </a:ext>
-            </a:extLst>
-          </p:cNvPr>
-          <p:cNvSpPr txBox="1"/>
-          <p:nvPr/>
-        </p:nvSpPr>
-        <p:spPr>
-          <a:xfrm>
-            <a:off x="8232575" y="3089189"/>
-            <a:ext cx="2830628" cy="1015663"/>
-          </a:xfrm>
-          <a:prstGeom prst="rect">
-            <a:avLst/>
-          </a:prstGeom>
-          <a:noFill/>
-        </p:spPr>
-        <p:txBody>
-          <a:bodyPr wrap="square" rtlCol="0">
-            <a:spAutoFit/>
-          </a:bodyPr>
-          <a:lstStyle/>
-          <a:p>
-            <a:pPr algn="ctr"/>
-            <a:r>
-              <a:rPr lang="en-US" sz="3000" dirty="0">
-                <a:solidFill>
-                  <a:srgbClr val="7030A0"/>
-                </a:solidFill>
-                <a:latin typeface="Times New Roman" panose="02020603050405020304" pitchFamily="18" charset="0"/>
-                <a:cs typeface="Times New Roman" panose="02020603050405020304" pitchFamily="18" charset="0"/>
-              </a:rPr>
-              <a:t>Inbound</a:t>
-            </a:r>
-            <a:br>
-              <a:rPr lang="en-US" sz="3000" dirty="0">
-                <a:solidFill>
-                  <a:srgbClr val="7030A0"/>
-                </a:solidFill>
-                <a:latin typeface="Times New Roman" panose="02020603050405020304" pitchFamily="18" charset="0"/>
-                <a:cs typeface="Times New Roman" panose="02020603050405020304" pitchFamily="18" charset="0"/>
-              </a:rPr>
-            </a:br>
-            <a:r>
-              <a:rPr lang="en-US" sz="3000" dirty="0">
-                <a:solidFill>
-                  <a:srgbClr val="7030A0"/>
-                </a:solidFill>
-                <a:latin typeface="Times New Roman" panose="02020603050405020304" pitchFamily="18" charset="0"/>
-                <a:cs typeface="Times New Roman" panose="02020603050405020304" pitchFamily="18" charset="0"/>
-              </a:rPr>
-              <a:t>Communication</a:t>
-            </a:r>
-          </a:p>
-        </p:txBody>
-      </p:sp>
-      <p:pic>
-        <p:nvPicPr>
-          <p:cNvPr id="11" name="Graphic 10" descr="Normal Distribution with solid fill">
-            <a:extLst>
-              <a:ext uri="{FF2B5EF4-FFF2-40B4-BE49-F238E27FC236}">
-                <a16:creationId xmlns:a16="http://schemas.microsoft.com/office/drawing/2014/main" id="{3011D6E4-E375-4389-751A-8CBB6AD1DFBE}"/>
-              </a:ext>
-            </a:extLst>
-          </p:cNvPr>
-          <p:cNvPicPr>
-            <a:picLocks noChangeAspect="1"/>
-          </p:cNvPicPr>
-          <p:nvPr/>
-        </p:nvPicPr>
-        <p:blipFill>
-          <a:blip>
-            <a:extLst>
-              <a:ext uri="{96DAC541-7B7A-43D3-8B79-37D633B846F1}">
-                <asvg:svgBlip xmlns:asvg="http://schemas.microsoft.com/office/drawing/2016/SVG/main" r:embed="rId4"/>
-              </a:ext>
-            </a:extLst>
-          </a:blip>
-          <a:stretch>
-            <a:fillRect/>
-          </a:stretch>
-        </p:blipFill>
-        <p:spPr>
-          <a:xfrm>
-            <a:off x="8232575" y="2206810"/>
-            <a:ext cx="914400" cy="914400"/>
-          </a:xfrm>
-          <a:prstGeom prst="rect">
-            <a:avLst/>
-          </a:prstGeom>
-        </p:spPr>
-      </p:pic>
-      <p:sp>
-        <p:nvSpPr>
-          <p:cNvPr id="13" name="TextBox 12">
-            <a:extLst>
-              <a:ext uri="{FF2B5EF4-FFF2-40B4-BE49-F238E27FC236}">
-                <a16:creationId xmlns:a16="http://schemas.microsoft.com/office/drawing/2014/main" id="{C1E3FA76-CA6A-C389-4AE7-2B33B1C3E432}"/>
-              </a:ext>
-            </a:extLst>
-          </p:cNvPr>
-          <p:cNvSpPr txBox="1"/>
-          <p:nvPr/>
-        </p:nvSpPr>
-        <p:spPr>
-          <a:xfrm>
-            <a:off x="9059956" y="2152485"/>
-            <a:ext cx="2846807" cy="1015663"/>
-          </a:xfrm>
-          <a:prstGeom prst="rect">
-            <a:avLst/>
-          </a:prstGeom>
-          <a:noFill/>
-        </p:spPr>
-        <p:txBody>
-          <a:bodyPr wrap="square" rtlCol="0">
-            <a:spAutoFit/>
-          </a:bodyPr>
-          <a:lstStyle/>
-          <a:p>
-            <a:r>
-              <a:rPr lang="en-US" sz="3000" dirty="0"/>
-              <a:t>Time as a random variable</a:t>
-            </a:r>
-          </a:p>
-        </p:txBody>
-      </p:sp>
-      <p:sp>
-        <p:nvSpPr>
-          <p:cNvPr id="9" name="TextBox 8">
-            <a:extLst>
-              <a:ext uri="{FF2B5EF4-FFF2-40B4-BE49-F238E27FC236}">
-                <a16:creationId xmlns:a16="http://schemas.microsoft.com/office/drawing/2014/main" id="{5D5568BD-6B32-8B0A-63B4-D590ED562165}"/>
-              </a:ext>
-            </a:extLst>
-          </p:cNvPr>
-          <p:cNvSpPr txBox="1"/>
-          <p:nvPr/>
-        </p:nvSpPr>
-        <p:spPr>
-          <a:xfrm>
-            <a:off x="2121325" y="4564534"/>
-            <a:ext cx="3872835" cy="461665"/>
-          </a:xfrm>
-          <a:prstGeom prst="rect">
-            <a:avLst/>
-          </a:prstGeom>
-          <a:noFill/>
-        </p:spPr>
-        <p:txBody>
-          <a:bodyPr wrap="square" rtlCol="0">
-            <a:spAutoFit/>
-          </a:bodyPr>
-          <a:lstStyle/>
-          <a:p>
-            <a:pPr algn="ctr"/>
-            <a:r>
-              <a:rPr lang="en-US" sz="2400" dirty="0">
-                <a:latin typeface="Times New Roman" panose="02020603050405020304" pitchFamily="18" charset="0"/>
-                <a:cs typeface="Times New Roman" panose="02020603050405020304" pitchFamily="18" charset="0"/>
-              </a:rPr>
-              <a:t>ACM SIGCOMM’25</a:t>
-            </a:r>
-          </a:p>
-        </p:txBody>
-      </p:sp>
-      <p:sp>
-        <p:nvSpPr>
-          <p:cNvPr id="14" name="TextBox 13">
-            <a:extLst>
-              <a:ext uri="{FF2B5EF4-FFF2-40B4-BE49-F238E27FC236}">
-                <a16:creationId xmlns:a16="http://schemas.microsoft.com/office/drawing/2014/main" id="{483786E7-FAD5-1A6D-984D-A0C6475A77C9}"/>
-              </a:ext>
-            </a:extLst>
-          </p:cNvPr>
-          <p:cNvSpPr txBox="1"/>
-          <p:nvPr/>
-        </p:nvSpPr>
-        <p:spPr>
-          <a:xfrm>
-            <a:off x="7643442" y="4111538"/>
-            <a:ext cx="3872835" cy="461665"/>
-          </a:xfrm>
-          <a:prstGeom prst="rect">
-            <a:avLst/>
-          </a:prstGeom>
-          <a:noFill/>
-        </p:spPr>
-        <p:txBody>
-          <a:bodyPr wrap="square" rtlCol="0">
-            <a:spAutoFit/>
-          </a:bodyPr>
-          <a:lstStyle/>
-          <a:p>
-            <a:pPr algn="ctr"/>
-            <a:r>
-              <a:rPr lang="en-US" sz="2400" dirty="0">
-                <a:latin typeface="Times New Roman" panose="02020603050405020304" pitchFamily="18" charset="0"/>
-                <a:cs typeface="Times New Roman" panose="02020603050405020304" pitchFamily="18" charset="0"/>
-              </a:rPr>
-              <a:t>ACM HotNets’25</a:t>
-            </a:r>
-          </a:p>
-        </p:txBody>
-      </p:sp>
-      <p:sp>
-        <p:nvSpPr>
-          <p:cNvPr id="15" name="TextBox 14">
-            <a:extLst>
-              <a:ext uri="{FF2B5EF4-FFF2-40B4-BE49-F238E27FC236}">
-                <a16:creationId xmlns:a16="http://schemas.microsoft.com/office/drawing/2014/main" id="{5ADA7C2F-E097-A499-6683-94AB6092CCE0}"/>
-              </a:ext>
-            </a:extLst>
-          </p:cNvPr>
-          <p:cNvSpPr txBox="1"/>
-          <p:nvPr/>
-        </p:nvSpPr>
-        <p:spPr>
-          <a:xfrm>
-            <a:off x="7643442" y="4507299"/>
-            <a:ext cx="3872835" cy="461665"/>
-          </a:xfrm>
-          <a:prstGeom prst="rect">
-            <a:avLst/>
-          </a:prstGeom>
-          <a:noFill/>
-        </p:spPr>
-        <p:txBody>
-          <a:bodyPr wrap="square" rtlCol="0">
-            <a:spAutoFit/>
-          </a:bodyPr>
-          <a:lstStyle/>
-          <a:p>
-            <a:pPr algn="ctr"/>
-            <a:r>
-              <a:rPr lang="en-US" sz="2400" dirty="0">
-                <a:latin typeface="Times New Roman" panose="02020603050405020304" pitchFamily="18" charset="0"/>
-                <a:cs typeface="Times New Roman" panose="02020603050405020304" pitchFamily="18" charset="0"/>
-              </a:rPr>
-              <a:t>Submitted to SIGCOMM’26</a:t>
-            </a:r>
-          </a:p>
-        </p:txBody>
-      </p:sp>
-      <p:sp>
-        <p:nvSpPr>
-          <p:cNvPr id="3" name="TextBox 2">
-            <a:extLst>
-              <a:ext uri="{FF2B5EF4-FFF2-40B4-BE49-F238E27FC236}">
-                <a16:creationId xmlns:a16="http://schemas.microsoft.com/office/drawing/2014/main" id="{F1DD9C98-50C6-813B-3239-9C993D428882}"/>
-              </a:ext>
-            </a:extLst>
-          </p:cNvPr>
-          <p:cNvSpPr txBox="1"/>
-          <p:nvPr/>
-        </p:nvSpPr>
-        <p:spPr>
-          <a:xfrm>
-            <a:off x="2121324" y="5050912"/>
-            <a:ext cx="3872835" cy="1200329"/>
-          </a:xfrm>
-          <a:prstGeom prst="rect">
-            <a:avLst/>
-          </a:prstGeom>
-          <a:noFill/>
-        </p:spPr>
-        <p:txBody>
-          <a:bodyPr wrap="square" rtlCol="0">
-            <a:spAutoFit/>
-          </a:bodyPr>
-          <a:lstStyle/>
-          <a:p>
-            <a:pPr algn="ctr"/>
-            <a:r>
-              <a:rPr lang="en-US" sz="2400" dirty="0">
-                <a:latin typeface="Times New Roman" panose="02020603050405020304" pitchFamily="18" charset="0"/>
-                <a:cs typeface="Times New Roman" panose="02020603050405020304" pitchFamily="18" charset="0"/>
-              </a:rPr>
-              <a:t>Cited by researchers from Jane Street, Google, Microsoft Research</a:t>
-            </a:r>
-          </a:p>
-        </p:txBody>
-      </p:sp>
-      <p:sp>
-        <p:nvSpPr>
-          <p:cNvPr id="16" name="TextBox 15">
-            <a:extLst>
-              <a:ext uri="{FF2B5EF4-FFF2-40B4-BE49-F238E27FC236}">
-                <a16:creationId xmlns:a16="http://schemas.microsoft.com/office/drawing/2014/main" id="{3C1004E0-49B5-5D32-B9D0-E6CE1AC7916D}"/>
-              </a:ext>
-            </a:extLst>
-          </p:cNvPr>
-          <p:cNvSpPr txBox="1"/>
-          <p:nvPr/>
-        </p:nvSpPr>
-        <p:spPr>
-          <a:xfrm>
-            <a:off x="7643442" y="5095180"/>
-            <a:ext cx="4103674" cy="1200329"/>
-          </a:xfrm>
-          <a:prstGeom prst="rect">
-            <a:avLst/>
-          </a:prstGeom>
-          <a:noFill/>
-        </p:spPr>
-        <p:txBody>
-          <a:bodyPr wrap="square" rtlCol="0">
-            <a:spAutoFit/>
-          </a:bodyPr>
-          <a:lstStyle/>
-          <a:p>
-            <a:pPr algn="ctr"/>
-            <a:r>
-              <a:rPr lang="en-US" sz="2400" dirty="0">
-                <a:latin typeface="Times New Roman" panose="02020603050405020304" pitchFamily="18" charset="0"/>
-                <a:cs typeface="Times New Roman" panose="02020603050405020304" pitchFamily="18" charset="0"/>
-              </a:rPr>
-              <a:t>Considerable interest from Jane Street, working with them to build several systems atop</a:t>
-            </a:r>
-          </a:p>
-        </p:txBody>
-      </p:sp>
-      <p:sp>
-        <p:nvSpPr>
-          <p:cNvPr id="19" name="TextBox 18">
-            <a:extLst>
-              <a:ext uri="{FF2B5EF4-FFF2-40B4-BE49-F238E27FC236}">
-                <a16:creationId xmlns:a16="http://schemas.microsoft.com/office/drawing/2014/main" id="{241566FE-8602-2728-E06A-15A91CC6D3C9}"/>
-              </a:ext>
-            </a:extLst>
-          </p:cNvPr>
-          <p:cNvSpPr txBox="1"/>
-          <p:nvPr/>
-        </p:nvSpPr>
-        <p:spPr>
-          <a:xfrm>
-            <a:off x="1907791" y="1318065"/>
-            <a:ext cx="3872835" cy="923330"/>
-          </a:xfrm>
-          <a:prstGeom prst="rect">
-            <a:avLst/>
-          </a:prstGeom>
-          <a:noFill/>
-        </p:spPr>
-        <p:txBody>
-          <a:bodyPr wrap="square" rtlCol="0">
-            <a:spAutoFit/>
-          </a:bodyPr>
-          <a:lstStyle/>
-          <a:p>
-            <a:pPr algn="ctr"/>
-            <a:r>
-              <a:rPr lang="en-US" sz="5400" dirty="0">
-                <a:solidFill>
-                  <a:srgbClr val="FF0000"/>
-                </a:solidFill>
-                <a:latin typeface="Times New Roman" panose="02020603050405020304" pitchFamily="18" charset="0"/>
-                <a:cs typeface="Times New Roman" panose="02020603050405020304" pitchFamily="18" charset="0"/>
-              </a:rPr>
-              <a:t>Onyx</a:t>
-            </a:r>
-          </a:p>
-        </p:txBody>
-      </p:sp>
-      <p:sp>
-        <p:nvSpPr>
-          <p:cNvPr id="20" name="TextBox 19">
-            <a:extLst>
-              <a:ext uri="{FF2B5EF4-FFF2-40B4-BE49-F238E27FC236}">
-                <a16:creationId xmlns:a16="http://schemas.microsoft.com/office/drawing/2014/main" id="{19CAE7B6-A427-7062-A40F-37C2326B4796}"/>
-              </a:ext>
-            </a:extLst>
-          </p:cNvPr>
-          <p:cNvSpPr txBox="1"/>
-          <p:nvPr/>
-        </p:nvSpPr>
-        <p:spPr>
-          <a:xfrm>
-            <a:off x="7643442" y="1318065"/>
-            <a:ext cx="3872835" cy="923330"/>
-          </a:xfrm>
-          <a:prstGeom prst="rect">
-            <a:avLst/>
-          </a:prstGeom>
-          <a:noFill/>
-        </p:spPr>
-        <p:txBody>
-          <a:bodyPr wrap="square" rtlCol="0">
-            <a:spAutoFit/>
-          </a:bodyPr>
-          <a:lstStyle/>
-          <a:p>
-            <a:pPr algn="ctr"/>
-            <a:r>
-              <a:rPr lang="en-US" sz="5400" dirty="0">
-                <a:solidFill>
-                  <a:srgbClr val="FF0000"/>
-                </a:solidFill>
-                <a:latin typeface="Times New Roman" panose="02020603050405020304" pitchFamily="18" charset="0"/>
-                <a:cs typeface="Times New Roman" panose="02020603050405020304" pitchFamily="18" charset="0"/>
-              </a:rPr>
-              <a:t>Tommy</a:t>
-            </a:r>
-          </a:p>
-        </p:txBody>
-      </p:sp>
-    </p:spTree>
-    <p:extLst>
-      <p:ext uri="{BB962C8B-B14F-4D97-AF65-F5344CB8AC3E}">
-        <p14:creationId xmlns:p14="http://schemas.microsoft.com/office/powerpoint/2010/main" val="3396139960"/>
-      </p:ext>
-    </p:extLst>
-  </p:cSld>
-  <p:clrMapOvr>
-    <a:masterClrMapping/>
-  </p:clrMapOvr>
-  <mc:AlternateContent xmlns:mc="http://schemas.openxmlformats.org/markup-compatibility/2006">
-    <mc:Choice xmlns:p159="http://schemas.microsoft.com/office/powerpoint/2015/09/main" Requires="p159">
-      <p:transition spd="med">
-        <p159:morph option="byWord"/>
-      </p:transition>
-    </mc:Choice>
-    <mc:Fallback>
-      <p:transition spd="med">
-        <p:fade/>
-      </p:transition>
-    </mc:Fallback>
-  </mc:AlternateContent>
+  <p:timing>
+    <p:tnLst>
+      <p:par>
+        <p:cTn id="1" dur="indefinite" restart="never" nodeType="tmRoot">
+          <p:childTnLst>
+            <p:seq concurrent="1" nextAc="seek">
+              <p:cTn id="2" dur="indefinite" nodeType="mainSeq">
+                <p:childTnLst>
+                  <p:par>
+                    <p:cTn id="3" fill="hold">
+                      <p:stCondLst>
+                        <p:cond delay="indefinite"/>
+                      </p:stCondLst>
+                      <p:childTnLst>
+                        <p:par>
+                          <p:cTn id="4" fill="hold">
+                            <p:stCondLst>
+                              <p:cond delay="0"/>
+                            </p:stCondLst>
+                            <p:childTnLst>
+                              <p:par>
+                                <p:cTn id="5" presetID="1" presetClass="entr" presetSubtype="0" fill="hold" grpId="0" nodeType="clickEffect">
+                                  <p:stCondLst>
+                                    <p:cond delay="0"/>
+                                  </p:stCondLst>
+                                  <p:childTnLst>
+                                    <p:set>
+                                      <p:cBhvr>
+                                        <p:cTn id="6" dur="1" fill="hold">
+                                          <p:stCondLst>
+                                            <p:cond delay="0"/>
+                                          </p:stCondLst>
+                                        </p:cTn>
+                                        <p:tgtEl>
+                                          <p:spTgt spid="14"/>
+                                        </p:tgtEl>
+                                        <p:attrNameLst>
+                                          <p:attrName>style.visibility</p:attrName>
+                                        </p:attrNameLst>
+                                      </p:cBhvr>
+                                      <p:to>
+                                        <p:strVal val="visible"/>
+                                      </p:to>
+                                    </p:set>
+                                  </p:childTnLst>
+                                </p:cTn>
+                              </p:par>
+                              <p:par>
+                                <p:cTn id="7" presetID="1" presetClass="entr" presetSubtype="0" fill="hold" grpId="0" nodeType="withEffect">
+                                  <p:stCondLst>
+                                    <p:cond delay="0"/>
+                                  </p:stCondLst>
+                                  <p:childTnLst>
+                                    <p:set>
+                                      <p:cBhvr>
+                                        <p:cTn id="8" dur="1" fill="hold">
+                                          <p:stCondLst>
+                                            <p:cond delay="0"/>
+                                          </p:stCondLst>
+                                        </p:cTn>
+                                        <p:tgtEl>
+                                          <p:spTgt spid="15"/>
+                                        </p:tgtEl>
+                                        <p:attrNameLst>
+                                          <p:attrName>style.visibility</p:attrName>
+                                        </p:attrNameLst>
+                                      </p:cBhvr>
+                                      <p:to>
+                                        <p:strVal val="visible"/>
+                                      </p:to>
+                                    </p:set>
+                                  </p:childTnLst>
+                                </p:cTn>
+                              </p:par>
+                            </p:childTnLst>
+                          </p:cTn>
+                        </p:par>
+                      </p:childTnLst>
+                    </p:cTn>
+                  </p:par>
+                </p:childTnLst>
+              </p:cTn>
+              <p:prevCondLst>
+                <p:cond evt="onPrev" delay="0">
+                  <p:tgtEl>
+                    <p:sldTgt/>
+                  </p:tgtEl>
+                </p:cond>
+              </p:prevCondLst>
+              <p:nextCondLst>
+                <p:cond evt="onNext" delay="0">
+                  <p:tgtEl>
+                    <p:sldTgt/>
+                  </p:tgtEl>
+                </p:cond>
+              </p:nextCondLst>
+            </p:seq>
+          </p:childTnLst>
+        </p:cTn>
+      </p:par>
+    </p:tnLst>
+    <p:bldLst>
+      <p:bldP spid="14" grpId="0"/>
+      <p:bldP spid="15" grpId="0"/>
+    </p:bldLst>
+  </p:timing>
 </p:sld>
 </file>
 
@@ -11860,13 +14770,13 @@
   <p:clrMapOvr>
     <a:masterClrMapping/>
   </p:clrMapOvr>
-  <mc:AlternateContent xmlns:mc="http://schemas.openxmlformats.org/markup-compatibility/2006">
-    <mc:Choice xmlns:p159="http://schemas.microsoft.com/office/powerpoint/2015/09/main" Requires="p159">
+  <mc:AlternateContent xmlns:mc="http://schemas.openxmlformats.org/markup-compatibility/2006" xmlns:p159="http://schemas.microsoft.com/office/powerpoint/2015/09/main">
+    <mc:Choice Requires="p159">
       <p:transition spd="med">
         <p159:morph option="byWord"/>
       </p:transition>
     </mc:Choice>
-    <mc:Fallback>
+    <mc:Fallback xmlns="">
       <p:transition spd="med">
         <p:fade/>
       </p:transition>
@@ -11981,6 +14891,1836 @@
 </p:sld>
 </file>
 
+<file path=ppt/slides/slide20.xml><?xml version="1.0" encoding="utf-8"?>
+<p:sld xmlns:a="http://schemas.openxmlformats.org/drawingml/2006/main" xmlns:r="http://schemas.openxmlformats.org/officeDocument/2006/relationships" xmlns:p="http://schemas.openxmlformats.org/presentationml/2006/main">
+  <p:cSld>
+    <p:spTree>
+      <p:nvGrpSpPr>
+        <p:cNvPr id="1" name="">
+          <a:extLst>
+            <a:ext uri="{FF2B5EF4-FFF2-40B4-BE49-F238E27FC236}">
+              <a16:creationId xmlns:a16="http://schemas.microsoft.com/office/drawing/2014/main" id="{70F06775-70DA-824D-D1F1-09F7A2F728C7}"/>
+            </a:ext>
+          </a:extLst>
+        </p:cNvPr>
+        <p:cNvGrpSpPr/>
+        <p:nvPr/>
+      </p:nvGrpSpPr>
+      <p:grpSpPr>
+        <a:xfrm>
+          <a:off x="0" y="0"/>
+          <a:ext cx="0" cy="0"/>
+          <a:chOff x="0" y="0"/>
+          <a:chExt cx="0" cy="0"/>
+        </a:xfrm>
+      </p:grpSpPr>
+      <p:sp>
+        <p:nvSpPr>
+          <p:cNvPr id="6" name="Rounded Rectangle 5">
+            <a:extLst>
+              <a:ext uri="{FF2B5EF4-FFF2-40B4-BE49-F238E27FC236}">
+                <a16:creationId xmlns:a16="http://schemas.microsoft.com/office/drawing/2014/main" id="{13BD36E6-2175-4E01-F989-AEA7048D6FAC}"/>
+              </a:ext>
+            </a:extLst>
+          </p:cNvPr>
+          <p:cNvSpPr/>
+          <p:nvPr/>
+        </p:nvSpPr>
+        <p:spPr>
+          <a:xfrm>
+            <a:off x="702884" y="2761827"/>
+            <a:ext cx="6709719" cy="2279729"/>
+          </a:xfrm>
+          <a:prstGeom prst="roundRect">
+            <a:avLst/>
+          </a:prstGeom>
+          <a:solidFill>
+            <a:schemeClr val="accent4">
+              <a:lumMod val="40000"/>
+              <a:lumOff val="60000"/>
+            </a:schemeClr>
+          </a:solidFill>
+          <a:ln>
+            <a:noFill/>
+          </a:ln>
+        </p:spPr>
+        <p:style>
+          <a:lnRef idx="2">
+            <a:schemeClr val="accent1">
+              <a:shade val="15000"/>
+            </a:schemeClr>
+          </a:lnRef>
+          <a:fillRef idx="1">
+            <a:schemeClr val="accent1"/>
+          </a:fillRef>
+          <a:effectRef idx="0">
+            <a:schemeClr val="accent1"/>
+          </a:effectRef>
+          <a:fontRef idx="minor">
+            <a:schemeClr val="lt1"/>
+          </a:fontRef>
+        </p:style>
+        <p:txBody>
+          <a:bodyPr rtlCol="0" anchor="ctr"/>
+          <a:lstStyle/>
+          <a:p>
+            <a:pPr algn="ctr"/>
+            <a:endParaRPr lang="en-US"/>
+          </a:p>
+        </p:txBody>
+      </p:sp>
+      <p:sp>
+        <p:nvSpPr>
+          <p:cNvPr id="17" name="Rectangle 16">
+            <a:extLst>
+              <a:ext uri="{FF2B5EF4-FFF2-40B4-BE49-F238E27FC236}">
+                <a16:creationId xmlns:a16="http://schemas.microsoft.com/office/drawing/2014/main" id="{F70DBAB9-255F-B6BA-09B3-0D37E539B14B}"/>
+              </a:ext>
+            </a:extLst>
+          </p:cNvPr>
+          <p:cNvSpPr/>
+          <p:nvPr/>
+        </p:nvSpPr>
+        <p:spPr>
+          <a:xfrm rot="16200000">
+            <a:off x="2522582" y="-387076"/>
+            <a:ext cx="68673" cy="3246390"/>
+          </a:xfrm>
+          <a:prstGeom prst="rect">
+            <a:avLst/>
+          </a:prstGeom>
+          <a:solidFill>
+            <a:srgbClr val="FF0000"/>
+          </a:solidFill>
+          <a:ln>
+            <a:solidFill>
+              <a:srgbClr val="FF0000"/>
+            </a:solidFill>
+          </a:ln>
+        </p:spPr>
+        <p:style>
+          <a:lnRef idx="2">
+            <a:schemeClr val="accent1">
+              <a:shade val="15000"/>
+            </a:schemeClr>
+          </a:lnRef>
+          <a:fillRef idx="1">
+            <a:schemeClr val="accent1"/>
+          </a:fillRef>
+          <a:effectRef idx="0">
+            <a:schemeClr val="accent1"/>
+          </a:effectRef>
+          <a:fontRef idx="minor">
+            <a:schemeClr val="lt1"/>
+          </a:fontRef>
+        </p:style>
+        <p:txBody>
+          <a:bodyPr rtlCol="0" anchor="ctr"/>
+          <a:lstStyle/>
+          <a:p>
+            <a:pPr algn="ctr"/>
+            <a:endParaRPr lang="en-US">
+              <a:latin typeface="Times New Roman" panose="02020603050405020304" pitchFamily="18" charset="0"/>
+              <a:cs typeface="Times New Roman" panose="02020603050405020304" pitchFamily="18" charset="0"/>
+            </a:endParaRPr>
+          </a:p>
+        </p:txBody>
+      </p:sp>
+      <p:sp>
+        <p:nvSpPr>
+          <p:cNvPr id="18" name="Rectangle 17">
+            <a:extLst>
+              <a:ext uri="{FF2B5EF4-FFF2-40B4-BE49-F238E27FC236}">
+                <a16:creationId xmlns:a16="http://schemas.microsoft.com/office/drawing/2014/main" id="{B45D36CC-7460-172A-78DB-598FD5E6BD8D}"/>
+              </a:ext>
+            </a:extLst>
+          </p:cNvPr>
+          <p:cNvSpPr/>
+          <p:nvPr/>
+        </p:nvSpPr>
+        <p:spPr>
+          <a:xfrm rot="16200000">
+            <a:off x="2522581" y="-318404"/>
+            <a:ext cx="68674" cy="3246390"/>
+          </a:xfrm>
+          <a:prstGeom prst="rect">
+            <a:avLst/>
+          </a:prstGeom>
+          <a:solidFill>
+            <a:srgbClr val="7030A0"/>
+          </a:solidFill>
+          <a:ln>
+            <a:solidFill>
+              <a:srgbClr val="7030A0"/>
+            </a:solidFill>
+          </a:ln>
+        </p:spPr>
+        <p:style>
+          <a:lnRef idx="2">
+            <a:schemeClr val="accent1">
+              <a:shade val="15000"/>
+            </a:schemeClr>
+          </a:lnRef>
+          <a:fillRef idx="1">
+            <a:schemeClr val="accent1"/>
+          </a:fillRef>
+          <a:effectRef idx="0">
+            <a:schemeClr val="accent1"/>
+          </a:effectRef>
+          <a:fontRef idx="minor">
+            <a:schemeClr val="lt1"/>
+          </a:fontRef>
+        </p:style>
+        <p:txBody>
+          <a:bodyPr rtlCol="0" anchor="ctr"/>
+          <a:lstStyle/>
+          <a:p>
+            <a:pPr algn="ctr"/>
+            <a:endParaRPr lang="en-US">
+              <a:latin typeface="Times New Roman" panose="02020603050405020304" pitchFamily="18" charset="0"/>
+              <a:cs typeface="Times New Roman" panose="02020603050405020304" pitchFamily="18" charset="0"/>
+            </a:endParaRPr>
+          </a:p>
+        </p:txBody>
+      </p:sp>
+      <p:sp>
+        <p:nvSpPr>
+          <p:cNvPr id="12" name="TextBox 11">
+            <a:extLst>
+              <a:ext uri="{FF2B5EF4-FFF2-40B4-BE49-F238E27FC236}">
+                <a16:creationId xmlns:a16="http://schemas.microsoft.com/office/drawing/2014/main" id="{471EB8E2-1A72-E97D-AC61-E621B8D6AF8A}"/>
+              </a:ext>
+            </a:extLst>
+          </p:cNvPr>
+          <p:cNvSpPr txBox="1"/>
+          <p:nvPr/>
+        </p:nvSpPr>
+        <p:spPr>
+          <a:xfrm>
+            <a:off x="772906" y="405121"/>
+            <a:ext cx="6591721" cy="830997"/>
+          </a:xfrm>
+          <a:prstGeom prst="rect">
+            <a:avLst/>
+          </a:prstGeom>
+          <a:noFill/>
+        </p:spPr>
+        <p:txBody>
+          <a:bodyPr wrap="square" rtlCol="0">
+            <a:spAutoFit/>
+          </a:bodyPr>
+          <a:lstStyle/>
+          <a:p>
+            <a:r>
+              <a:rPr lang="en-US" sz="4800" dirty="0">
+                <a:latin typeface="Times New Roman" panose="02020603050405020304" pitchFamily="18" charset="0"/>
+                <a:cs typeface="Times New Roman" panose="02020603050405020304" pitchFamily="18" charset="0"/>
+              </a:rPr>
+              <a:t>Thesis: Latency Fairness</a:t>
+            </a:r>
+            <a:endParaRPr lang="en-US" sz="3000" dirty="0">
+              <a:latin typeface="Times New Roman" panose="02020603050405020304" pitchFamily="18" charset="0"/>
+              <a:cs typeface="Times New Roman" panose="02020603050405020304" pitchFamily="18" charset="0"/>
+            </a:endParaRPr>
+          </a:p>
+        </p:txBody>
+      </p:sp>
+      <p:sp>
+        <p:nvSpPr>
+          <p:cNvPr id="4" name="TextBox 3">
+            <a:extLst>
+              <a:ext uri="{FF2B5EF4-FFF2-40B4-BE49-F238E27FC236}">
+                <a16:creationId xmlns:a16="http://schemas.microsoft.com/office/drawing/2014/main" id="{9C38A125-EA7E-6448-A161-8D099BD47A96}"/>
+              </a:ext>
+            </a:extLst>
+          </p:cNvPr>
+          <p:cNvSpPr txBox="1"/>
+          <p:nvPr/>
+        </p:nvSpPr>
+        <p:spPr>
+          <a:xfrm>
+            <a:off x="4229584" y="3089189"/>
+            <a:ext cx="2830628" cy="1015663"/>
+          </a:xfrm>
+          <a:prstGeom prst="rect">
+            <a:avLst/>
+          </a:prstGeom>
+          <a:noFill/>
+        </p:spPr>
+        <p:txBody>
+          <a:bodyPr wrap="square" rtlCol="0">
+            <a:spAutoFit/>
+          </a:bodyPr>
+          <a:lstStyle/>
+          <a:p>
+            <a:pPr algn="ctr"/>
+            <a:r>
+              <a:rPr lang="en-US" sz="3000" dirty="0">
+                <a:solidFill>
+                  <a:srgbClr val="7030A0"/>
+                </a:solidFill>
+                <a:latin typeface="Times New Roman" panose="02020603050405020304" pitchFamily="18" charset="0"/>
+                <a:cs typeface="Times New Roman" panose="02020603050405020304" pitchFamily="18" charset="0"/>
+              </a:rPr>
+              <a:t>Inbound</a:t>
+            </a:r>
+            <a:br>
+              <a:rPr lang="en-US" sz="3000" dirty="0">
+                <a:solidFill>
+                  <a:srgbClr val="7030A0"/>
+                </a:solidFill>
+                <a:latin typeface="Times New Roman" panose="02020603050405020304" pitchFamily="18" charset="0"/>
+                <a:cs typeface="Times New Roman" panose="02020603050405020304" pitchFamily="18" charset="0"/>
+              </a:rPr>
+            </a:br>
+            <a:r>
+              <a:rPr lang="en-US" sz="3000" dirty="0">
+                <a:solidFill>
+                  <a:srgbClr val="7030A0"/>
+                </a:solidFill>
+                <a:latin typeface="Times New Roman" panose="02020603050405020304" pitchFamily="18" charset="0"/>
+                <a:cs typeface="Times New Roman" panose="02020603050405020304" pitchFamily="18" charset="0"/>
+              </a:rPr>
+              <a:t>Communication</a:t>
+            </a:r>
+          </a:p>
+        </p:txBody>
+      </p:sp>
+      <p:sp>
+        <p:nvSpPr>
+          <p:cNvPr id="10" name="TextBox 9">
+            <a:extLst>
+              <a:ext uri="{FF2B5EF4-FFF2-40B4-BE49-F238E27FC236}">
+                <a16:creationId xmlns:a16="http://schemas.microsoft.com/office/drawing/2014/main" id="{7683AD16-892E-88AD-8ACB-FA66F2EE1492}"/>
+              </a:ext>
+            </a:extLst>
+          </p:cNvPr>
+          <p:cNvSpPr txBox="1"/>
+          <p:nvPr/>
+        </p:nvSpPr>
+        <p:spPr>
+          <a:xfrm>
+            <a:off x="933723" y="3095367"/>
+            <a:ext cx="2830628" cy="1015663"/>
+          </a:xfrm>
+          <a:prstGeom prst="rect">
+            <a:avLst/>
+          </a:prstGeom>
+          <a:noFill/>
+        </p:spPr>
+        <p:txBody>
+          <a:bodyPr wrap="square" rtlCol="0">
+            <a:spAutoFit/>
+          </a:bodyPr>
+          <a:lstStyle/>
+          <a:p>
+            <a:pPr algn="ctr"/>
+            <a:r>
+              <a:rPr lang="en-US" sz="3000" dirty="0">
+                <a:solidFill>
+                  <a:srgbClr val="7030A0"/>
+                </a:solidFill>
+                <a:latin typeface="Times New Roman" panose="02020603050405020304" pitchFamily="18" charset="0"/>
+                <a:cs typeface="Times New Roman" panose="02020603050405020304" pitchFamily="18" charset="0"/>
+              </a:rPr>
+              <a:t>Outbound</a:t>
+            </a:r>
+            <a:br>
+              <a:rPr lang="en-US" sz="3000" dirty="0">
+                <a:solidFill>
+                  <a:srgbClr val="7030A0"/>
+                </a:solidFill>
+                <a:latin typeface="Times New Roman" panose="02020603050405020304" pitchFamily="18" charset="0"/>
+                <a:cs typeface="Times New Roman" panose="02020603050405020304" pitchFamily="18" charset="0"/>
+              </a:rPr>
+            </a:br>
+            <a:r>
+              <a:rPr lang="en-US" sz="3000" dirty="0">
+                <a:solidFill>
+                  <a:srgbClr val="7030A0"/>
+                </a:solidFill>
+                <a:latin typeface="Times New Roman" panose="02020603050405020304" pitchFamily="18" charset="0"/>
+                <a:cs typeface="Times New Roman" panose="02020603050405020304" pitchFamily="18" charset="0"/>
+              </a:rPr>
+              <a:t>Communication</a:t>
+            </a:r>
+          </a:p>
+        </p:txBody>
+      </p:sp>
+      <p:pic>
+        <p:nvPicPr>
+          <p:cNvPr id="5" name="Graphic 4" descr="Clock with solid fill">
+            <a:extLst>
+              <a:ext uri="{FF2B5EF4-FFF2-40B4-BE49-F238E27FC236}">
+                <a16:creationId xmlns:a16="http://schemas.microsoft.com/office/drawing/2014/main" id="{DC3F74E6-B828-7447-2596-D3D9C5694E27}"/>
+              </a:ext>
+            </a:extLst>
+          </p:cNvPr>
+          <p:cNvPicPr>
+            <a:picLocks noChangeAspect="1"/>
+          </p:cNvPicPr>
+          <p:nvPr/>
+        </p:nvPicPr>
+        <p:blipFill>
+          <a:blip>
+            <a:extLst>
+              <a:ext uri="{96DAC541-7B7A-43D3-8B79-37D633B846F1}">
+                <asvg:svgBlip xmlns:asvg="http://schemas.microsoft.com/office/drawing/2016/SVG/main" r:embed="rId3"/>
+              </a:ext>
+            </a:extLst>
+          </a:blip>
+          <a:stretch>
+            <a:fillRect/>
+          </a:stretch>
+        </p:blipFill>
+        <p:spPr>
+          <a:xfrm>
+            <a:off x="2625368" y="2338965"/>
+            <a:ext cx="914400" cy="914400"/>
+          </a:xfrm>
+          <a:prstGeom prst="rect">
+            <a:avLst/>
+          </a:prstGeom>
+        </p:spPr>
+      </p:pic>
+      <p:sp>
+        <p:nvSpPr>
+          <p:cNvPr id="7" name="TextBox 6">
+            <a:extLst>
+              <a:ext uri="{FF2B5EF4-FFF2-40B4-BE49-F238E27FC236}">
+                <a16:creationId xmlns:a16="http://schemas.microsoft.com/office/drawing/2014/main" id="{0B99F71D-207C-3FD0-D2C0-67FC0B3B6B20}"/>
+              </a:ext>
+            </a:extLst>
+          </p:cNvPr>
+          <p:cNvSpPr txBox="1"/>
+          <p:nvPr/>
+        </p:nvSpPr>
+        <p:spPr>
+          <a:xfrm>
+            <a:off x="3445340" y="2288333"/>
+            <a:ext cx="3614872" cy="1015663"/>
+          </a:xfrm>
+          <a:prstGeom prst="rect">
+            <a:avLst/>
+          </a:prstGeom>
+          <a:noFill/>
+        </p:spPr>
+        <p:txBody>
+          <a:bodyPr wrap="square" rtlCol="0">
+            <a:spAutoFit/>
+          </a:bodyPr>
+          <a:lstStyle/>
+          <a:p>
+            <a:r>
+              <a:rPr lang="en-US" sz="3000" dirty="0"/>
+              <a:t>Tightly Synchronized Clocks</a:t>
+            </a:r>
+          </a:p>
+        </p:txBody>
+      </p:sp>
+      <p:sp>
+        <p:nvSpPr>
+          <p:cNvPr id="2" name="Rounded Rectangle 1">
+            <a:extLst>
+              <a:ext uri="{FF2B5EF4-FFF2-40B4-BE49-F238E27FC236}">
+                <a16:creationId xmlns:a16="http://schemas.microsoft.com/office/drawing/2014/main" id="{C4CE2F7F-1B4D-2F81-B0A2-47AB184F13C3}"/>
+              </a:ext>
+            </a:extLst>
+          </p:cNvPr>
+          <p:cNvSpPr/>
+          <p:nvPr/>
+        </p:nvSpPr>
+        <p:spPr>
+          <a:xfrm>
+            <a:off x="7643442" y="2761827"/>
+            <a:ext cx="4032482" cy="2279729"/>
+          </a:xfrm>
+          <a:prstGeom prst="roundRect">
+            <a:avLst/>
+          </a:prstGeom>
+          <a:solidFill>
+            <a:schemeClr val="accent4">
+              <a:lumMod val="40000"/>
+              <a:lumOff val="60000"/>
+            </a:schemeClr>
+          </a:solidFill>
+          <a:ln>
+            <a:noFill/>
+          </a:ln>
+        </p:spPr>
+        <p:style>
+          <a:lnRef idx="2">
+            <a:schemeClr val="accent1">
+              <a:shade val="15000"/>
+            </a:schemeClr>
+          </a:lnRef>
+          <a:fillRef idx="1">
+            <a:schemeClr val="accent1"/>
+          </a:fillRef>
+          <a:effectRef idx="0">
+            <a:schemeClr val="accent1"/>
+          </a:effectRef>
+          <a:fontRef idx="minor">
+            <a:schemeClr val="lt1"/>
+          </a:fontRef>
+        </p:style>
+        <p:txBody>
+          <a:bodyPr rtlCol="0" anchor="ctr"/>
+          <a:lstStyle/>
+          <a:p>
+            <a:pPr algn="ctr"/>
+            <a:endParaRPr lang="en-US"/>
+          </a:p>
+        </p:txBody>
+      </p:sp>
+      <p:sp>
+        <p:nvSpPr>
+          <p:cNvPr id="8" name="TextBox 7">
+            <a:extLst>
+              <a:ext uri="{FF2B5EF4-FFF2-40B4-BE49-F238E27FC236}">
+                <a16:creationId xmlns:a16="http://schemas.microsoft.com/office/drawing/2014/main" id="{180C9FA6-F036-9573-1309-3BD06FDC2D18}"/>
+              </a:ext>
+            </a:extLst>
+          </p:cNvPr>
+          <p:cNvSpPr txBox="1"/>
+          <p:nvPr/>
+        </p:nvSpPr>
+        <p:spPr>
+          <a:xfrm>
+            <a:off x="8232575" y="3089189"/>
+            <a:ext cx="2830628" cy="1015663"/>
+          </a:xfrm>
+          <a:prstGeom prst="rect">
+            <a:avLst/>
+          </a:prstGeom>
+          <a:noFill/>
+        </p:spPr>
+        <p:txBody>
+          <a:bodyPr wrap="square" rtlCol="0">
+            <a:spAutoFit/>
+          </a:bodyPr>
+          <a:lstStyle/>
+          <a:p>
+            <a:pPr algn="ctr"/>
+            <a:r>
+              <a:rPr lang="en-US" sz="3000" dirty="0">
+                <a:solidFill>
+                  <a:srgbClr val="7030A0"/>
+                </a:solidFill>
+                <a:latin typeface="Times New Roman" panose="02020603050405020304" pitchFamily="18" charset="0"/>
+                <a:cs typeface="Times New Roman" panose="02020603050405020304" pitchFamily="18" charset="0"/>
+              </a:rPr>
+              <a:t>Inbound</a:t>
+            </a:r>
+            <a:br>
+              <a:rPr lang="en-US" sz="3000" dirty="0">
+                <a:solidFill>
+                  <a:srgbClr val="7030A0"/>
+                </a:solidFill>
+                <a:latin typeface="Times New Roman" panose="02020603050405020304" pitchFamily="18" charset="0"/>
+                <a:cs typeface="Times New Roman" panose="02020603050405020304" pitchFamily="18" charset="0"/>
+              </a:rPr>
+            </a:br>
+            <a:r>
+              <a:rPr lang="en-US" sz="3000" dirty="0">
+                <a:solidFill>
+                  <a:srgbClr val="7030A0"/>
+                </a:solidFill>
+                <a:latin typeface="Times New Roman" panose="02020603050405020304" pitchFamily="18" charset="0"/>
+                <a:cs typeface="Times New Roman" panose="02020603050405020304" pitchFamily="18" charset="0"/>
+              </a:rPr>
+              <a:t>Communication</a:t>
+            </a:r>
+          </a:p>
+        </p:txBody>
+      </p:sp>
+      <p:pic>
+        <p:nvPicPr>
+          <p:cNvPr id="11" name="Graphic 10" descr="Normal Distribution with solid fill">
+            <a:extLst>
+              <a:ext uri="{FF2B5EF4-FFF2-40B4-BE49-F238E27FC236}">
+                <a16:creationId xmlns:a16="http://schemas.microsoft.com/office/drawing/2014/main" id="{5C94C79F-D31B-1110-C711-C59BC2DA234E}"/>
+              </a:ext>
+            </a:extLst>
+          </p:cNvPr>
+          <p:cNvPicPr>
+            <a:picLocks noChangeAspect="1"/>
+          </p:cNvPicPr>
+          <p:nvPr/>
+        </p:nvPicPr>
+        <p:blipFill>
+          <a:blip>
+            <a:extLst>
+              <a:ext uri="{96DAC541-7B7A-43D3-8B79-37D633B846F1}">
+                <asvg:svgBlip xmlns:asvg="http://schemas.microsoft.com/office/drawing/2016/SVG/main" r:embed="rId4"/>
+              </a:ext>
+            </a:extLst>
+          </a:blip>
+          <a:stretch>
+            <a:fillRect/>
+          </a:stretch>
+        </p:blipFill>
+        <p:spPr>
+          <a:xfrm>
+            <a:off x="8232575" y="2206810"/>
+            <a:ext cx="914400" cy="914400"/>
+          </a:xfrm>
+          <a:prstGeom prst="rect">
+            <a:avLst/>
+          </a:prstGeom>
+        </p:spPr>
+      </p:pic>
+      <p:sp>
+        <p:nvSpPr>
+          <p:cNvPr id="13" name="TextBox 12">
+            <a:extLst>
+              <a:ext uri="{FF2B5EF4-FFF2-40B4-BE49-F238E27FC236}">
+                <a16:creationId xmlns:a16="http://schemas.microsoft.com/office/drawing/2014/main" id="{DB85E896-B51E-B9AE-4126-D45A2DB10B7F}"/>
+              </a:ext>
+            </a:extLst>
+          </p:cNvPr>
+          <p:cNvSpPr txBox="1"/>
+          <p:nvPr/>
+        </p:nvSpPr>
+        <p:spPr>
+          <a:xfrm>
+            <a:off x="9059956" y="2152485"/>
+            <a:ext cx="2846807" cy="1015663"/>
+          </a:xfrm>
+          <a:prstGeom prst="rect">
+            <a:avLst/>
+          </a:prstGeom>
+          <a:noFill/>
+        </p:spPr>
+        <p:txBody>
+          <a:bodyPr wrap="square" rtlCol="0">
+            <a:spAutoFit/>
+          </a:bodyPr>
+          <a:lstStyle/>
+          <a:p>
+            <a:r>
+              <a:rPr lang="en-US" sz="3000" dirty="0"/>
+              <a:t>Time as a random variable</a:t>
+            </a:r>
+          </a:p>
+        </p:txBody>
+      </p:sp>
+      <p:sp>
+        <p:nvSpPr>
+          <p:cNvPr id="9" name="TextBox 8">
+            <a:extLst>
+              <a:ext uri="{FF2B5EF4-FFF2-40B4-BE49-F238E27FC236}">
+                <a16:creationId xmlns:a16="http://schemas.microsoft.com/office/drawing/2014/main" id="{FF79DCAB-6D3F-F0E5-03A5-FECA8F3C4FA2}"/>
+              </a:ext>
+            </a:extLst>
+          </p:cNvPr>
+          <p:cNvSpPr txBox="1"/>
+          <p:nvPr/>
+        </p:nvSpPr>
+        <p:spPr>
+          <a:xfrm>
+            <a:off x="2121325" y="4564534"/>
+            <a:ext cx="3872835" cy="461665"/>
+          </a:xfrm>
+          <a:prstGeom prst="rect">
+            <a:avLst/>
+          </a:prstGeom>
+          <a:noFill/>
+        </p:spPr>
+        <p:txBody>
+          <a:bodyPr wrap="square" rtlCol="0">
+            <a:spAutoFit/>
+          </a:bodyPr>
+          <a:lstStyle/>
+          <a:p>
+            <a:pPr algn="ctr"/>
+            <a:r>
+              <a:rPr lang="en-US" sz="2400" dirty="0">
+                <a:latin typeface="Times New Roman" panose="02020603050405020304" pitchFamily="18" charset="0"/>
+                <a:cs typeface="Times New Roman" panose="02020603050405020304" pitchFamily="18" charset="0"/>
+              </a:rPr>
+              <a:t>ACM SIGCOMM’25</a:t>
+            </a:r>
+          </a:p>
+        </p:txBody>
+      </p:sp>
+      <p:sp>
+        <p:nvSpPr>
+          <p:cNvPr id="14" name="TextBox 13">
+            <a:extLst>
+              <a:ext uri="{FF2B5EF4-FFF2-40B4-BE49-F238E27FC236}">
+                <a16:creationId xmlns:a16="http://schemas.microsoft.com/office/drawing/2014/main" id="{16758BBE-60CC-5A6D-75BA-B7DACEFFD024}"/>
+              </a:ext>
+            </a:extLst>
+          </p:cNvPr>
+          <p:cNvSpPr txBox="1"/>
+          <p:nvPr/>
+        </p:nvSpPr>
+        <p:spPr>
+          <a:xfrm>
+            <a:off x="7643442" y="4111538"/>
+            <a:ext cx="3872835" cy="461665"/>
+          </a:xfrm>
+          <a:prstGeom prst="rect">
+            <a:avLst/>
+          </a:prstGeom>
+          <a:noFill/>
+        </p:spPr>
+        <p:txBody>
+          <a:bodyPr wrap="square" rtlCol="0">
+            <a:spAutoFit/>
+          </a:bodyPr>
+          <a:lstStyle/>
+          <a:p>
+            <a:pPr algn="ctr"/>
+            <a:r>
+              <a:rPr lang="en-US" sz="2400" dirty="0">
+                <a:latin typeface="Times New Roman" panose="02020603050405020304" pitchFamily="18" charset="0"/>
+                <a:cs typeface="Times New Roman" panose="02020603050405020304" pitchFamily="18" charset="0"/>
+              </a:rPr>
+              <a:t>ACM HotNets’25</a:t>
+            </a:r>
+          </a:p>
+        </p:txBody>
+      </p:sp>
+      <p:sp>
+        <p:nvSpPr>
+          <p:cNvPr id="15" name="TextBox 14">
+            <a:extLst>
+              <a:ext uri="{FF2B5EF4-FFF2-40B4-BE49-F238E27FC236}">
+                <a16:creationId xmlns:a16="http://schemas.microsoft.com/office/drawing/2014/main" id="{AE0B7F2B-89A8-DA63-8B23-76673AB870C0}"/>
+              </a:ext>
+            </a:extLst>
+          </p:cNvPr>
+          <p:cNvSpPr txBox="1"/>
+          <p:nvPr/>
+        </p:nvSpPr>
+        <p:spPr>
+          <a:xfrm>
+            <a:off x="7643442" y="4507299"/>
+            <a:ext cx="3872835" cy="461665"/>
+          </a:xfrm>
+          <a:prstGeom prst="rect">
+            <a:avLst/>
+          </a:prstGeom>
+          <a:noFill/>
+        </p:spPr>
+        <p:txBody>
+          <a:bodyPr wrap="square" rtlCol="0">
+            <a:spAutoFit/>
+          </a:bodyPr>
+          <a:lstStyle/>
+          <a:p>
+            <a:pPr algn="ctr"/>
+            <a:r>
+              <a:rPr lang="en-US" sz="2400" dirty="0">
+                <a:latin typeface="Times New Roman" panose="02020603050405020304" pitchFamily="18" charset="0"/>
+                <a:cs typeface="Times New Roman" panose="02020603050405020304" pitchFamily="18" charset="0"/>
+              </a:rPr>
+              <a:t>Submitted to SIGCOMM’26</a:t>
+            </a:r>
+          </a:p>
+        </p:txBody>
+      </p:sp>
+      <p:sp>
+        <p:nvSpPr>
+          <p:cNvPr id="3" name="TextBox 2">
+            <a:extLst>
+              <a:ext uri="{FF2B5EF4-FFF2-40B4-BE49-F238E27FC236}">
+                <a16:creationId xmlns:a16="http://schemas.microsoft.com/office/drawing/2014/main" id="{3A453774-1F0A-4F75-7384-F591D706DB5E}"/>
+              </a:ext>
+            </a:extLst>
+          </p:cNvPr>
+          <p:cNvSpPr txBox="1"/>
+          <p:nvPr/>
+        </p:nvSpPr>
+        <p:spPr>
+          <a:xfrm>
+            <a:off x="2121324" y="5050912"/>
+            <a:ext cx="3872835" cy="1200329"/>
+          </a:xfrm>
+          <a:prstGeom prst="rect">
+            <a:avLst/>
+          </a:prstGeom>
+          <a:noFill/>
+        </p:spPr>
+        <p:txBody>
+          <a:bodyPr wrap="square" rtlCol="0">
+            <a:spAutoFit/>
+          </a:bodyPr>
+          <a:lstStyle/>
+          <a:p>
+            <a:pPr algn="ctr"/>
+            <a:r>
+              <a:rPr lang="en-US" sz="2400" dirty="0">
+                <a:latin typeface="Times New Roman" panose="02020603050405020304" pitchFamily="18" charset="0"/>
+                <a:cs typeface="Times New Roman" panose="02020603050405020304" pitchFamily="18" charset="0"/>
+              </a:rPr>
+              <a:t>Cited by researchers from Jane Street, Google, Microsoft Research</a:t>
+            </a:r>
+          </a:p>
+        </p:txBody>
+      </p:sp>
+      <p:sp>
+        <p:nvSpPr>
+          <p:cNvPr id="16" name="TextBox 15">
+            <a:extLst>
+              <a:ext uri="{FF2B5EF4-FFF2-40B4-BE49-F238E27FC236}">
+                <a16:creationId xmlns:a16="http://schemas.microsoft.com/office/drawing/2014/main" id="{7F7A22B8-3912-A39A-4AD8-9F6867449B9D}"/>
+              </a:ext>
+            </a:extLst>
+          </p:cNvPr>
+          <p:cNvSpPr txBox="1"/>
+          <p:nvPr/>
+        </p:nvSpPr>
+        <p:spPr>
+          <a:xfrm>
+            <a:off x="7643442" y="5095180"/>
+            <a:ext cx="4103674" cy="1200329"/>
+          </a:xfrm>
+          <a:prstGeom prst="rect">
+            <a:avLst/>
+          </a:prstGeom>
+          <a:noFill/>
+        </p:spPr>
+        <p:txBody>
+          <a:bodyPr wrap="square" rtlCol="0">
+            <a:spAutoFit/>
+          </a:bodyPr>
+          <a:lstStyle/>
+          <a:p>
+            <a:pPr algn="ctr"/>
+            <a:r>
+              <a:rPr lang="en-US" sz="2400" dirty="0">
+                <a:latin typeface="Times New Roman" panose="02020603050405020304" pitchFamily="18" charset="0"/>
+                <a:cs typeface="Times New Roman" panose="02020603050405020304" pitchFamily="18" charset="0"/>
+              </a:rPr>
+              <a:t>Considerable interest from Jane Street, working with them to build several systems atop</a:t>
+            </a:r>
+          </a:p>
+        </p:txBody>
+      </p:sp>
+    </p:spTree>
+    <p:extLst>
+      <p:ext uri="{BB962C8B-B14F-4D97-AF65-F5344CB8AC3E}">
+        <p14:creationId xmlns:p14="http://schemas.microsoft.com/office/powerpoint/2010/main" val="3568427761"/>
+      </p:ext>
+    </p:extLst>
+  </p:cSld>
+  <p:clrMapOvr>
+    <a:masterClrMapping/>
+  </p:clrMapOvr>
+  <mc:AlternateContent xmlns:mc="http://schemas.openxmlformats.org/markup-compatibility/2006" xmlns:p159="http://schemas.microsoft.com/office/powerpoint/2015/09/main">
+    <mc:Choice Requires="p159">
+      <p:transition spd="med">
+        <p159:morph option="byWord"/>
+      </p:transition>
+    </mc:Choice>
+    <mc:Fallback xmlns="">
+      <p:transition spd="med">
+        <p:fade/>
+      </p:transition>
+    </mc:Fallback>
+  </mc:AlternateContent>
+  <p:timing>
+    <p:tnLst>
+      <p:par>
+        <p:cTn id="1" dur="indefinite" restart="never" nodeType="tmRoot">
+          <p:childTnLst>
+            <p:seq concurrent="1" nextAc="seek">
+              <p:cTn id="2" dur="indefinite" nodeType="mainSeq">
+                <p:childTnLst>
+                  <p:par>
+                    <p:cTn id="3" fill="hold">
+                      <p:stCondLst>
+                        <p:cond delay="indefinite"/>
+                      </p:stCondLst>
+                      <p:childTnLst>
+                        <p:par>
+                          <p:cTn id="4" fill="hold">
+                            <p:stCondLst>
+                              <p:cond delay="0"/>
+                            </p:stCondLst>
+                            <p:childTnLst>
+                              <p:par>
+                                <p:cTn id="5" presetID="1" presetClass="entr" presetSubtype="0" fill="hold" grpId="0" nodeType="clickEffect">
+                                  <p:stCondLst>
+                                    <p:cond delay="0"/>
+                                  </p:stCondLst>
+                                  <p:childTnLst>
+                                    <p:set>
+                                      <p:cBhvr>
+                                        <p:cTn id="6" dur="1" fill="hold">
+                                          <p:stCondLst>
+                                            <p:cond delay="0"/>
+                                          </p:stCondLst>
+                                        </p:cTn>
+                                        <p:tgtEl>
+                                          <p:spTgt spid="16"/>
+                                        </p:tgtEl>
+                                        <p:attrNameLst>
+                                          <p:attrName>style.visibility</p:attrName>
+                                        </p:attrNameLst>
+                                      </p:cBhvr>
+                                      <p:to>
+                                        <p:strVal val="visible"/>
+                                      </p:to>
+                                    </p:set>
+                                  </p:childTnLst>
+                                </p:cTn>
+                              </p:par>
+                            </p:childTnLst>
+                          </p:cTn>
+                        </p:par>
+                      </p:childTnLst>
+                    </p:cTn>
+                  </p:par>
+                </p:childTnLst>
+              </p:cTn>
+              <p:prevCondLst>
+                <p:cond evt="onPrev" delay="0">
+                  <p:tgtEl>
+                    <p:sldTgt/>
+                  </p:tgtEl>
+                </p:cond>
+              </p:prevCondLst>
+              <p:nextCondLst>
+                <p:cond evt="onNext" delay="0">
+                  <p:tgtEl>
+                    <p:sldTgt/>
+                  </p:tgtEl>
+                </p:cond>
+              </p:nextCondLst>
+            </p:seq>
+          </p:childTnLst>
+        </p:cTn>
+      </p:par>
+    </p:tnLst>
+    <p:bldLst>
+      <p:bldP spid="16" grpId="0"/>
+    </p:bldLst>
+  </p:timing>
+</p:sld>
+</file>
+
+<file path=ppt/slides/slide21.xml><?xml version="1.0" encoding="utf-8"?>
+<p:sld xmlns:a="http://schemas.openxmlformats.org/drawingml/2006/main" xmlns:r="http://schemas.openxmlformats.org/officeDocument/2006/relationships" xmlns:p="http://schemas.openxmlformats.org/presentationml/2006/main">
+  <p:cSld>
+    <p:spTree>
+      <p:nvGrpSpPr>
+        <p:cNvPr id="1" name="">
+          <a:extLst>
+            <a:ext uri="{FF2B5EF4-FFF2-40B4-BE49-F238E27FC236}">
+              <a16:creationId xmlns:a16="http://schemas.microsoft.com/office/drawing/2014/main" id="{036B5CA3-9610-7961-1B95-96F35195D1C8}"/>
+            </a:ext>
+          </a:extLst>
+        </p:cNvPr>
+        <p:cNvGrpSpPr/>
+        <p:nvPr/>
+      </p:nvGrpSpPr>
+      <p:grpSpPr>
+        <a:xfrm>
+          <a:off x="0" y="0"/>
+          <a:ext cx="0" cy="0"/>
+          <a:chOff x="0" y="0"/>
+          <a:chExt cx="0" cy="0"/>
+        </a:xfrm>
+      </p:grpSpPr>
+      <p:sp>
+        <p:nvSpPr>
+          <p:cNvPr id="6" name="Rounded Rectangle 5">
+            <a:extLst>
+              <a:ext uri="{FF2B5EF4-FFF2-40B4-BE49-F238E27FC236}">
+                <a16:creationId xmlns:a16="http://schemas.microsoft.com/office/drawing/2014/main" id="{8CDB2F0E-92F1-2447-4AFB-9C2AE402C6BF}"/>
+              </a:ext>
+            </a:extLst>
+          </p:cNvPr>
+          <p:cNvSpPr/>
+          <p:nvPr/>
+        </p:nvSpPr>
+        <p:spPr>
+          <a:xfrm>
+            <a:off x="702884" y="2761827"/>
+            <a:ext cx="6709719" cy="2279729"/>
+          </a:xfrm>
+          <a:prstGeom prst="roundRect">
+            <a:avLst/>
+          </a:prstGeom>
+          <a:solidFill>
+            <a:schemeClr val="accent4">
+              <a:lumMod val="40000"/>
+              <a:lumOff val="60000"/>
+            </a:schemeClr>
+          </a:solidFill>
+          <a:ln>
+            <a:noFill/>
+          </a:ln>
+        </p:spPr>
+        <p:style>
+          <a:lnRef idx="2">
+            <a:schemeClr val="accent1">
+              <a:shade val="15000"/>
+            </a:schemeClr>
+          </a:lnRef>
+          <a:fillRef idx="1">
+            <a:schemeClr val="accent1"/>
+          </a:fillRef>
+          <a:effectRef idx="0">
+            <a:schemeClr val="accent1"/>
+          </a:effectRef>
+          <a:fontRef idx="minor">
+            <a:schemeClr val="lt1"/>
+          </a:fontRef>
+        </p:style>
+        <p:txBody>
+          <a:bodyPr rtlCol="0" anchor="ctr"/>
+          <a:lstStyle/>
+          <a:p>
+            <a:pPr algn="ctr"/>
+            <a:endParaRPr lang="en-US"/>
+          </a:p>
+        </p:txBody>
+      </p:sp>
+      <p:sp>
+        <p:nvSpPr>
+          <p:cNvPr id="17" name="Rectangle 16">
+            <a:extLst>
+              <a:ext uri="{FF2B5EF4-FFF2-40B4-BE49-F238E27FC236}">
+                <a16:creationId xmlns:a16="http://schemas.microsoft.com/office/drawing/2014/main" id="{80DFBDE7-5E2E-5800-F1C0-A20B261A1755}"/>
+              </a:ext>
+            </a:extLst>
+          </p:cNvPr>
+          <p:cNvSpPr/>
+          <p:nvPr/>
+        </p:nvSpPr>
+        <p:spPr>
+          <a:xfrm rot="16200000">
+            <a:off x="2522582" y="-387076"/>
+            <a:ext cx="68673" cy="3246390"/>
+          </a:xfrm>
+          <a:prstGeom prst="rect">
+            <a:avLst/>
+          </a:prstGeom>
+          <a:solidFill>
+            <a:srgbClr val="FF0000"/>
+          </a:solidFill>
+          <a:ln>
+            <a:solidFill>
+              <a:srgbClr val="FF0000"/>
+            </a:solidFill>
+          </a:ln>
+        </p:spPr>
+        <p:style>
+          <a:lnRef idx="2">
+            <a:schemeClr val="accent1">
+              <a:shade val="15000"/>
+            </a:schemeClr>
+          </a:lnRef>
+          <a:fillRef idx="1">
+            <a:schemeClr val="accent1"/>
+          </a:fillRef>
+          <a:effectRef idx="0">
+            <a:schemeClr val="accent1"/>
+          </a:effectRef>
+          <a:fontRef idx="minor">
+            <a:schemeClr val="lt1"/>
+          </a:fontRef>
+        </p:style>
+        <p:txBody>
+          <a:bodyPr rtlCol="0" anchor="ctr"/>
+          <a:lstStyle/>
+          <a:p>
+            <a:pPr algn="ctr"/>
+            <a:endParaRPr lang="en-US">
+              <a:latin typeface="Times New Roman" panose="02020603050405020304" pitchFamily="18" charset="0"/>
+              <a:cs typeface="Times New Roman" panose="02020603050405020304" pitchFamily="18" charset="0"/>
+            </a:endParaRPr>
+          </a:p>
+        </p:txBody>
+      </p:sp>
+      <p:sp>
+        <p:nvSpPr>
+          <p:cNvPr id="18" name="Rectangle 17">
+            <a:extLst>
+              <a:ext uri="{FF2B5EF4-FFF2-40B4-BE49-F238E27FC236}">
+                <a16:creationId xmlns:a16="http://schemas.microsoft.com/office/drawing/2014/main" id="{27B1ED2F-A8D1-2AF2-FE8B-3E6187AA2C8E}"/>
+              </a:ext>
+            </a:extLst>
+          </p:cNvPr>
+          <p:cNvSpPr/>
+          <p:nvPr/>
+        </p:nvSpPr>
+        <p:spPr>
+          <a:xfrm rot="16200000">
+            <a:off x="2522581" y="-318404"/>
+            <a:ext cx="68674" cy="3246390"/>
+          </a:xfrm>
+          <a:prstGeom prst="rect">
+            <a:avLst/>
+          </a:prstGeom>
+          <a:solidFill>
+            <a:srgbClr val="7030A0"/>
+          </a:solidFill>
+          <a:ln>
+            <a:solidFill>
+              <a:srgbClr val="7030A0"/>
+            </a:solidFill>
+          </a:ln>
+        </p:spPr>
+        <p:style>
+          <a:lnRef idx="2">
+            <a:schemeClr val="accent1">
+              <a:shade val="15000"/>
+            </a:schemeClr>
+          </a:lnRef>
+          <a:fillRef idx="1">
+            <a:schemeClr val="accent1"/>
+          </a:fillRef>
+          <a:effectRef idx="0">
+            <a:schemeClr val="accent1"/>
+          </a:effectRef>
+          <a:fontRef idx="minor">
+            <a:schemeClr val="lt1"/>
+          </a:fontRef>
+        </p:style>
+        <p:txBody>
+          <a:bodyPr rtlCol="0" anchor="ctr"/>
+          <a:lstStyle/>
+          <a:p>
+            <a:pPr algn="ctr"/>
+            <a:endParaRPr lang="en-US">
+              <a:latin typeface="Times New Roman" panose="02020603050405020304" pitchFamily="18" charset="0"/>
+              <a:cs typeface="Times New Roman" panose="02020603050405020304" pitchFamily="18" charset="0"/>
+            </a:endParaRPr>
+          </a:p>
+        </p:txBody>
+      </p:sp>
+      <p:sp>
+        <p:nvSpPr>
+          <p:cNvPr id="12" name="TextBox 11">
+            <a:extLst>
+              <a:ext uri="{FF2B5EF4-FFF2-40B4-BE49-F238E27FC236}">
+                <a16:creationId xmlns:a16="http://schemas.microsoft.com/office/drawing/2014/main" id="{A4C2A527-A0EA-8B4C-9EC6-6DDFB7C965FD}"/>
+              </a:ext>
+            </a:extLst>
+          </p:cNvPr>
+          <p:cNvSpPr txBox="1"/>
+          <p:nvPr/>
+        </p:nvSpPr>
+        <p:spPr>
+          <a:xfrm>
+            <a:off x="772906" y="405121"/>
+            <a:ext cx="6591721" cy="830997"/>
+          </a:xfrm>
+          <a:prstGeom prst="rect">
+            <a:avLst/>
+          </a:prstGeom>
+          <a:noFill/>
+        </p:spPr>
+        <p:txBody>
+          <a:bodyPr wrap="square" rtlCol="0">
+            <a:spAutoFit/>
+          </a:bodyPr>
+          <a:lstStyle/>
+          <a:p>
+            <a:r>
+              <a:rPr lang="en-US" sz="4800" dirty="0">
+                <a:latin typeface="Times New Roman" panose="02020603050405020304" pitchFamily="18" charset="0"/>
+                <a:cs typeface="Times New Roman" panose="02020603050405020304" pitchFamily="18" charset="0"/>
+              </a:rPr>
+              <a:t>Thesis: Latency Fairness</a:t>
+            </a:r>
+            <a:endParaRPr lang="en-US" sz="3000" dirty="0">
+              <a:latin typeface="Times New Roman" panose="02020603050405020304" pitchFamily="18" charset="0"/>
+              <a:cs typeface="Times New Roman" panose="02020603050405020304" pitchFamily="18" charset="0"/>
+            </a:endParaRPr>
+          </a:p>
+        </p:txBody>
+      </p:sp>
+      <p:sp>
+        <p:nvSpPr>
+          <p:cNvPr id="4" name="TextBox 3">
+            <a:extLst>
+              <a:ext uri="{FF2B5EF4-FFF2-40B4-BE49-F238E27FC236}">
+                <a16:creationId xmlns:a16="http://schemas.microsoft.com/office/drawing/2014/main" id="{7EA2168A-D26C-B5B6-2A8D-229247BE723E}"/>
+              </a:ext>
+            </a:extLst>
+          </p:cNvPr>
+          <p:cNvSpPr txBox="1"/>
+          <p:nvPr/>
+        </p:nvSpPr>
+        <p:spPr>
+          <a:xfrm>
+            <a:off x="4229584" y="3089189"/>
+            <a:ext cx="2830628" cy="1015663"/>
+          </a:xfrm>
+          <a:prstGeom prst="rect">
+            <a:avLst/>
+          </a:prstGeom>
+          <a:noFill/>
+        </p:spPr>
+        <p:txBody>
+          <a:bodyPr wrap="square" rtlCol="0">
+            <a:spAutoFit/>
+          </a:bodyPr>
+          <a:lstStyle/>
+          <a:p>
+            <a:pPr algn="ctr"/>
+            <a:r>
+              <a:rPr lang="en-US" sz="3000" dirty="0">
+                <a:solidFill>
+                  <a:srgbClr val="7030A0"/>
+                </a:solidFill>
+                <a:latin typeface="Times New Roman" panose="02020603050405020304" pitchFamily="18" charset="0"/>
+                <a:cs typeface="Times New Roman" panose="02020603050405020304" pitchFamily="18" charset="0"/>
+              </a:rPr>
+              <a:t>Inbound</a:t>
+            </a:r>
+            <a:br>
+              <a:rPr lang="en-US" sz="3000" dirty="0">
+                <a:solidFill>
+                  <a:srgbClr val="7030A0"/>
+                </a:solidFill>
+                <a:latin typeface="Times New Roman" panose="02020603050405020304" pitchFamily="18" charset="0"/>
+                <a:cs typeface="Times New Roman" panose="02020603050405020304" pitchFamily="18" charset="0"/>
+              </a:rPr>
+            </a:br>
+            <a:r>
+              <a:rPr lang="en-US" sz="3000" dirty="0">
+                <a:solidFill>
+                  <a:srgbClr val="7030A0"/>
+                </a:solidFill>
+                <a:latin typeface="Times New Roman" panose="02020603050405020304" pitchFamily="18" charset="0"/>
+                <a:cs typeface="Times New Roman" panose="02020603050405020304" pitchFamily="18" charset="0"/>
+              </a:rPr>
+              <a:t>Communication</a:t>
+            </a:r>
+          </a:p>
+        </p:txBody>
+      </p:sp>
+      <p:sp>
+        <p:nvSpPr>
+          <p:cNvPr id="10" name="TextBox 9">
+            <a:extLst>
+              <a:ext uri="{FF2B5EF4-FFF2-40B4-BE49-F238E27FC236}">
+                <a16:creationId xmlns:a16="http://schemas.microsoft.com/office/drawing/2014/main" id="{57EDC1AC-909B-4FDD-19F3-6083605CF67A}"/>
+              </a:ext>
+            </a:extLst>
+          </p:cNvPr>
+          <p:cNvSpPr txBox="1"/>
+          <p:nvPr/>
+        </p:nvSpPr>
+        <p:spPr>
+          <a:xfrm>
+            <a:off x="933723" y="3095367"/>
+            <a:ext cx="2830628" cy="1015663"/>
+          </a:xfrm>
+          <a:prstGeom prst="rect">
+            <a:avLst/>
+          </a:prstGeom>
+          <a:noFill/>
+        </p:spPr>
+        <p:txBody>
+          <a:bodyPr wrap="square" rtlCol="0">
+            <a:spAutoFit/>
+          </a:bodyPr>
+          <a:lstStyle/>
+          <a:p>
+            <a:pPr algn="ctr"/>
+            <a:r>
+              <a:rPr lang="en-US" sz="3000" dirty="0">
+                <a:solidFill>
+                  <a:srgbClr val="7030A0"/>
+                </a:solidFill>
+                <a:latin typeface="Times New Roman" panose="02020603050405020304" pitchFamily="18" charset="0"/>
+                <a:cs typeface="Times New Roman" panose="02020603050405020304" pitchFamily="18" charset="0"/>
+              </a:rPr>
+              <a:t>Outbound</a:t>
+            </a:r>
+            <a:br>
+              <a:rPr lang="en-US" sz="3000" dirty="0">
+                <a:solidFill>
+                  <a:srgbClr val="7030A0"/>
+                </a:solidFill>
+                <a:latin typeface="Times New Roman" panose="02020603050405020304" pitchFamily="18" charset="0"/>
+                <a:cs typeface="Times New Roman" panose="02020603050405020304" pitchFamily="18" charset="0"/>
+              </a:rPr>
+            </a:br>
+            <a:r>
+              <a:rPr lang="en-US" sz="3000" dirty="0">
+                <a:solidFill>
+                  <a:srgbClr val="7030A0"/>
+                </a:solidFill>
+                <a:latin typeface="Times New Roman" panose="02020603050405020304" pitchFamily="18" charset="0"/>
+                <a:cs typeface="Times New Roman" panose="02020603050405020304" pitchFamily="18" charset="0"/>
+              </a:rPr>
+              <a:t>Communication</a:t>
+            </a:r>
+          </a:p>
+        </p:txBody>
+      </p:sp>
+      <p:pic>
+        <p:nvPicPr>
+          <p:cNvPr id="5" name="Graphic 4" descr="Clock with solid fill">
+            <a:extLst>
+              <a:ext uri="{FF2B5EF4-FFF2-40B4-BE49-F238E27FC236}">
+                <a16:creationId xmlns:a16="http://schemas.microsoft.com/office/drawing/2014/main" id="{7CA41EBB-C6FA-DB22-3E79-DEA8E56EF4C3}"/>
+              </a:ext>
+            </a:extLst>
+          </p:cNvPr>
+          <p:cNvPicPr>
+            <a:picLocks noChangeAspect="1"/>
+          </p:cNvPicPr>
+          <p:nvPr/>
+        </p:nvPicPr>
+        <p:blipFill>
+          <a:blip>
+            <a:extLst>
+              <a:ext uri="{96DAC541-7B7A-43D3-8B79-37D633B846F1}">
+                <asvg:svgBlip xmlns:asvg="http://schemas.microsoft.com/office/drawing/2016/SVG/main" r:embed="rId3"/>
+              </a:ext>
+            </a:extLst>
+          </a:blip>
+          <a:stretch>
+            <a:fillRect/>
+          </a:stretch>
+        </p:blipFill>
+        <p:spPr>
+          <a:xfrm>
+            <a:off x="2625368" y="2338965"/>
+            <a:ext cx="914400" cy="914400"/>
+          </a:xfrm>
+          <a:prstGeom prst="rect">
+            <a:avLst/>
+          </a:prstGeom>
+        </p:spPr>
+      </p:pic>
+      <p:sp>
+        <p:nvSpPr>
+          <p:cNvPr id="7" name="TextBox 6">
+            <a:extLst>
+              <a:ext uri="{FF2B5EF4-FFF2-40B4-BE49-F238E27FC236}">
+                <a16:creationId xmlns:a16="http://schemas.microsoft.com/office/drawing/2014/main" id="{E1739C3C-A360-3329-AC33-3EC88A1DDBF6}"/>
+              </a:ext>
+            </a:extLst>
+          </p:cNvPr>
+          <p:cNvSpPr txBox="1"/>
+          <p:nvPr/>
+        </p:nvSpPr>
+        <p:spPr>
+          <a:xfrm>
+            <a:off x="3445340" y="2288333"/>
+            <a:ext cx="3614872" cy="1015663"/>
+          </a:xfrm>
+          <a:prstGeom prst="rect">
+            <a:avLst/>
+          </a:prstGeom>
+          <a:noFill/>
+        </p:spPr>
+        <p:txBody>
+          <a:bodyPr wrap="square" rtlCol="0">
+            <a:spAutoFit/>
+          </a:bodyPr>
+          <a:lstStyle/>
+          <a:p>
+            <a:r>
+              <a:rPr lang="en-US" sz="3000" dirty="0"/>
+              <a:t>Tightly Synchronized Clocks</a:t>
+            </a:r>
+          </a:p>
+        </p:txBody>
+      </p:sp>
+      <p:sp>
+        <p:nvSpPr>
+          <p:cNvPr id="2" name="Rounded Rectangle 1">
+            <a:extLst>
+              <a:ext uri="{FF2B5EF4-FFF2-40B4-BE49-F238E27FC236}">
+                <a16:creationId xmlns:a16="http://schemas.microsoft.com/office/drawing/2014/main" id="{9A0DB9F4-97FE-53E9-6644-C22A4EAA8EE4}"/>
+              </a:ext>
+            </a:extLst>
+          </p:cNvPr>
+          <p:cNvSpPr/>
+          <p:nvPr/>
+        </p:nvSpPr>
+        <p:spPr>
+          <a:xfrm>
+            <a:off x="7643442" y="2761827"/>
+            <a:ext cx="4032482" cy="2279729"/>
+          </a:xfrm>
+          <a:prstGeom prst="roundRect">
+            <a:avLst/>
+          </a:prstGeom>
+          <a:solidFill>
+            <a:schemeClr val="accent4">
+              <a:lumMod val="40000"/>
+              <a:lumOff val="60000"/>
+            </a:schemeClr>
+          </a:solidFill>
+          <a:ln>
+            <a:noFill/>
+          </a:ln>
+        </p:spPr>
+        <p:style>
+          <a:lnRef idx="2">
+            <a:schemeClr val="accent1">
+              <a:shade val="15000"/>
+            </a:schemeClr>
+          </a:lnRef>
+          <a:fillRef idx="1">
+            <a:schemeClr val="accent1"/>
+          </a:fillRef>
+          <a:effectRef idx="0">
+            <a:schemeClr val="accent1"/>
+          </a:effectRef>
+          <a:fontRef idx="minor">
+            <a:schemeClr val="lt1"/>
+          </a:fontRef>
+        </p:style>
+        <p:txBody>
+          <a:bodyPr rtlCol="0" anchor="ctr"/>
+          <a:lstStyle/>
+          <a:p>
+            <a:pPr algn="ctr"/>
+            <a:endParaRPr lang="en-US"/>
+          </a:p>
+        </p:txBody>
+      </p:sp>
+      <p:sp>
+        <p:nvSpPr>
+          <p:cNvPr id="8" name="TextBox 7">
+            <a:extLst>
+              <a:ext uri="{FF2B5EF4-FFF2-40B4-BE49-F238E27FC236}">
+                <a16:creationId xmlns:a16="http://schemas.microsoft.com/office/drawing/2014/main" id="{948BA897-9EEB-ECE3-39C3-1CD97B0783CC}"/>
+              </a:ext>
+            </a:extLst>
+          </p:cNvPr>
+          <p:cNvSpPr txBox="1"/>
+          <p:nvPr/>
+        </p:nvSpPr>
+        <p:spPr>
+          <a:xfrm>
+            <a:off x="8232575" y="3089189"/>
+            <a:ext cx="2830628" cy="1015663"/>
+          </a:xfrm>
+          <a:prstGeom prst="rect">
+            <a:avLst/>
+          </a:prstGeom>
+          <a:noFill/>
+        </p:spPr>
+        <p:txBody>
+          <a:bodyPr wrap="square" rtlCol="0">
+            <a:spAutoFit/>
+          </a:bodyPr>
+          <a:lstStyle/>
+          <a:p>
+            <a:pPr algn="ctr"/>
+            <a:r>
+              <a:rPr lang="en-US" sz="3000" dirty="0">
+                <a:solidFill>
+                  <a:srgbClr val="7030A0"/>
+                </a:solidFill>
+                <a:latin typeface="Times New Roman" panose="02020603050405020304" pitchFamily="18" charset="0"/>
+                <a:cs typeface="Times New Roman" panose="02020603050405020304" pitchFamily="18" charset="0"/>
+              </a:rPr>
+              <a:t>Inbound</a:t>
+            </a:r>
+            <a:br>
+              <a:rPr lang="en-US" sz="3000" dirty="0">
+                <a:solidFill>
+                  <a:srgbClr val="7030A0"/>
+                </a:solidFill>
+                <a:latin typeface="Times New Roman" panose="02020603050405020304" pitchFamily="18" charset="0"/>
+                <a:cs typeface="Times New Roman" panose="02020603050405020304" pitchFamily="18" charset="0"/>
+              </a:rPr>
+            </a:br>
+            <a:r>
+              <a:rPr lang="en-US" sz="3000" dirty="0">
+                <a:solidFill>
+                  <a:srgbClr val="7030A0"/>
+                </a:solidFill>
+                <a:latin typeface="Times New Roman" panose="02020603050405020304" pitchFamily="18" charset="0"/>
+                <a:cs typeface="Times New Roman" panose="02020603050405020304" pitchFamily="18" charset="0"/>
+              </a:rPr>
+              <a:t>Communication</a:t>
+            </a:r>
+          </a:p>
+        </p:txBody>
+      </p:sp>
+      <p:pic>
+        <p:nvPicPr>
+          <p:cNvPr id="11" name="Graphic 10" descr="Normal Distribution with solid fill">
+            <a:extLst>
+              <a:ext uri="{FF2B5EF4-FFF2-40B4-BE49-F238E27FC236}">
+                <a16:creationId xmlns:a16="http://schemas.microsoft.com/office/drawing/2014/main" id="{3011D6E4-E375-4389-751A-8CBB6AD1DFBE}"/>
+              </a:ext>
+            </a:extLst>
+          </p:cNvPr>
+          <p:cNvPicPr>
+            <a:picLocks noChangeAspect="1"/>
+          </p:cNvPicPr>
+          <p:nvPr/>
+        </p:nvPicPr>
+        <p:blipFill>
+          <a:blip>
+            <a:extLst>
+              <a:ext uri="{96DAC541-7B7A-43D3-8B79-37D633B846F1}">
+                <asvg:svgBlip xmlns:asvg="http://schemas.microsoft.com/office/drawing/2016/SVG/main" r:embed="rId4"/>
+              </a:ext>
+            </a:extLst>
+          </a:blip>
+          <a:stretch>
+            <a:fillRect/>
+          </a:stretch>
+        </p:blipFill>
+        <p:spPr>
+          <a:xfrm>
+            <a:off x="8232575" y="2206810"/>
+            <a:ext cx="914400" cy="914400"/>
+          </a:xfrm>
+          <a:prstGeom prst="rect">
+            <a:avLst/>
+          </a:prstGeom>
+        </p:spPr>
+      </p:pic>
+      <p:sp>
+        <p:nvSpPr>
+          <p:cNvPr id="13" name="TextBox 12">
+            <a:extLst>
+              <a:ext uri="{FF2B5EF4-FFF2-40B4-BE49-F238E27FC236}">
+                <a16:creationId xmlns:a16="http://schemas.microsoft.com/office/drawing/2014/main" id="{C1E3FA76-CA6A-C389-4AE7-2B33B1C3E432}"/>
+              </a:ext>
+            </a:extLst>
+          </p:cNvPr>
+          <p:cNvSpPr txBox="1"/>
+          <p:nvPr/>
+        </p:nvSpPr>
+        <p:spPr>
+          <a:xfrm>
+            <a:off x="9059956" y="2152485"/>
+            <a:ext cx="2846807" cy="1015663"/>
+          </a:xfrm>
+          <a:prstGeom prst="rect">
+            <a:avLst/>
+          </a:prstGeom>
+          <a:noFill/>
+        </p:spPr>
+        <p:txBody>
+          <a:bodyPr wrap="square" rtlCol="0">
+            <a:spAutoFit/>
+          </a:bodyPr>
+          <a:lstStyle/>
+          <a:p>
+            <a:r>
+              <a:rPr lang="en-US" sz="3000" dirty="0"/>
+              <a:t>Time as a random variable</a:t>
+            </a:r>
+          </a:p>
+        </p:txBody>
+      </p:sp>
+      <p:sp>
+        <p:nvSpPr>
+          <p:cNvPr id="9" name="TextBox 8">
+            <a:extLst>
+              <a:ext uri="{FF2B5EF4-FFF2-40B4-BE49-F238E27FC236}">
+                <a16:creationId xmlns:a16="http://schemas.microsoft.com/office/drawing/2014/main" id="{5D5568BD-6B32-8B0A-63B4-D590ED562165}"/>
+              </a:ext>
+            </a:extLst>
+          </p:cNvPr>
+          <p:cNvSpPr txBox="1"/>
+          <p:nvPr/>
+        </p:nvSpPr>
+        <p:spPr>
+          <a:xfrm>
+            <a:off x="2121325" y="4564534"/>
+            <a:ext cx="3872835" cy="461665"/>
+          </a:xfrm>
+          <a:prstGeom prst="rect">
+            <a:avLst/>
+          </a:prstGeom>
+          <a:noFill/>
+        </p:spPr>
+        <p:txBody>
+          <a:bodyPr wrap="square" rtlCol="0">
+            <a:spAutoFit/>
+          </a:bodyPr>
+          <a:lstStyle/>
+          <a:p>
+            <a:pPr algn="ctr"/>
+            <a:r>
+              <a:rPr lang="en-US" sz="2400" dirty="0">
+                <a:latin typeface="Times New Roman" panose="02020603050405020304" pitchFamily="18" charset="0"/>
+                <a:cs typeface="Times New Roman" panose="02020603050405020304" pitchFamily="18" charset="0"/>
+              </a:rPr>
+              <a:t>ACM SIGCOMM’25</a:t>
+            </a:r>
+          </a:p>
+        </p:txBody>
+      </p:sp>
+      <p:sp>
+        <p:nvSpPr>
+          <p:cNvPr id="14" name="TextBox 13">
+            <a:extLst>
+              <a:ext uri="{FF2B5EF4-FFF2-40B4-BE49-F238E27FC236}">
+                <a16:creationId xmlns:a16="http://schemas.microsoft.com/office/drawing/2014/main" id="{483786E7-FAD5-1A6D-984D-A0C6475A77C9}"/>
+              </a:ext>
+            </a:extLst>
+          </p:cNvPr>
+          <p:cNvSpPr txBox="1"/>
+          <p:nvPr/>
+        </p:nvSpPr>
+        <p:spPr>
+          <a:xfrm>
+            <a:off x="7643442" y="4111538"/>
+            <a:ext cx="3872835" cy="461665"/>
+          </a:xfrm>
+          <a:prstGeom prst="rect">
+            <a:avLst/>
+          </a:prstGeom>
+          <a:noFill/>
+        </p:spPr>
+        <p:txBody>
+          <a:bodyPr wrap="square" rtlCol="0">
+            <a:spAutoFit/>
+          </a:bodyPr>
+          <a:lstStyle/>
+          <a:p>
+            <a:pPr algn="ctr"/>
+            <a:r>
+              <a:rPr lang="en-US" sz="2400" dirty="0">
+                <a:latin typeface="Times New Roman" panose="02020603050405020304" pitchFamily="18" charset="0"/>
+                <a:cs typeface="Times New Roman" panose="02020603050405020304" pitchFamily="18" charset="0"/>
+              </a:rPr>
+              <a:t>ACM HotNets’25</a:t>
+            </a:r>
+          </a:p>
+        </p:txBody>
+      </p:sp>
+      <p:sp>
+        <p:nvSpPr>
+          <p:cNvPr id="15" name="TextBox 14">
+            <a:extLst>
+              <a:ext uri="{FF2B5EF4-FFF2-40B4-BE49-F238E27FC236}">
+                <a16:creationId xmlns:a16="http://schemas.microsoft.com/office/drawing/2014/main" id="{5ADA7C2F-E097-A499-6683-94AB6092CCE0}"/>
+              </a:ext>
+            </a:extLst>
+          </p:cNvPr>
+          <p:cNvSpPr txBox="1"/>
+          <p:nvPr/>
+        </p:nvSpPr>
+        <p:spPr>
+          <a:xfrm>
+            <a:off x="7643442" y="4507299"/>
+            <a:ext cx="3872835" cy="461665"/>
+          </a:xfrm>
+          <a:prstGeom prst="rect">
+            <a:avLst/>
+          </a:prstGeom>
+          <a:noFill/>
+        </p:spPr>
+        <p:txBody>
+          <a:bodyPr wrap="square" rtlCol="0">
+            <a:spAutoFit/>
+          </a:bodyPr>
+          <a:lstStyle/>
+          <a:p>
+            <a:pPr algn="ctr"/>
+            <a:r>
+              <a:rPr lang="en-US" sz="2400" dirty="0">
+                <a:latin typeface="Times New Roman" panose="02020603050405020304" pitchFamily="18" charset="0"/>
+                <a:cs typeface="Times New Roman" panose="02020603050405020304" pitchFamily="18" charset="0"/>
+              </a:rPr>
+              <a:t>Submitted to SIGCOMM’26</a:t>
+            </a:r>
+          </a:p>
+        </p:txBody>
+      </p:sp>
+      <p:sp>
+        <p:nvSpPr>
+          <p:cNvPr id="3" name="TextBox 2">
+            <a:extLst>
+              <a:ext uri="{FF2B5EF4-FFF2-40B4-BE49-F238E27FC236}">
+                <a16:creationId xmlns:a16="http://schemas.microsoft.com/office/drawing/2014/main" id="{F1DD9C98-50C6-813B-3239-9C993D428882}"/>
+              </a:ext>
+            </a:extLst>
+          </p:cNvPr>
+          <p:cNvSpPr txBox="1"/>
+          <p:nvPr/>
+        </p:nvSpPr>
+        <p:spPr>
+          <a:xfrm>
+            <a:off x="2121324" y="5050912"/>
+            <a:ext cx="3872835" cy="1200329"/>
+          </a:xfrm>
+          <a:prstGeom prst="rect">
+            <a:avLst/>
+          </a:prstGeom>
+          <a:noFill/>
+        </p:spPr>
+        <p:txBody>
+          <a:bodyPr wrap="square" rtlCol="0">
+            <a:spAutoFit/>
+          </a:bodyPr>
+          <a:lstStyle/>
+          <a:p>
+            <a:pPr algn="ctr"/>
+            <a:r>
+              <a:rPr lang="en-US" sz="2400" dirty="0">
+                <a:latin typeface="Times New Roman" panose="02020603050405020304" pitchFamily="18" charset="0"/>
+                <a:cs typeface="Times New Roman" panose="02020603050405020304" pitchFamily="18" charset="0"/>
+              </a:rPr>
+              <a:t>Cited by researchers from Jane Street, Google, Microsoft Research</a:t>
+            </a:r>
+          </a:p>
+        </p:txBody>
+      </p:sp>
+      <p:sp>
+        <p:nvSpPr>
+          <p:cNvPr id="16" name="TextBox 15">
+            <a:extLst>
+              <a:ext uri="{FF2B5EF4-FFF2-40B4-BE49-F238E27FC236}">
+                <a16:creationId xmlns:a16="http://schemas.microsoft.com/office/drawing/2014/main" id="{3C1004E0-49B5-5D32-B9D0-E6CE1AC7916D}"/>
+              </a:ext>
+            </a:extLst>
+          </p:cNvPr>
+          <p:cNvSpPr txBox="1"/>
+          <p:nvPr/>
+        </p:nvSpPr>
+        <p:spPr>
+          <a:xfrm>
+            <a:off x="7643442" y="5095180"/>
+            <a:ext cx="4103674" cy="1200329"/>
+          </a:xfrm>
+          <a:prstGeom prst="rect">
+            <a:avLst/>
+          </a:prstGeom>
+          <a:noFill/>
+        </p:spPr>
+        <p:txBody>
+          <a:bodyPr wrap="square" rtlCol="0">
+            <a:spAutoFit/>
+          </a:bodyPr>
+          <a:lstStyle/>
+          <a:p>
+            <a:pPr algn="ctr"/>
+            <a:r>
+              <a:rPr lang="en-US" sz="2400" dirty="0">
+                <a:latin typeface="Times New Roman" panose="02020603050405020304" pitchFamily="18" charset="0"/>
+                <a:cs typeface="Times New Roman" panose="02020603050405020304" pitchFamily="18" charset="0"/>
+              </a:rPr>
+              <a:t>Considerable interest from Jane Street, working with them to build several systems atop</a:t>
+            </a:r>
+          </a:p>
+        </p:txBody>
+      </p:sp>
+      <p:sp>
+        <p:nvSpPr>
+          <p:cNvPr id="19" name="TextBox 18">
+            <a:extLst>
+              <a:ext uri="{FF2B5EF4-FFF2-40B4-BE49-F238E27FC236}">
+                <a16:creationId xmlns:a16="http://schemas.microsoft.com/office/drawing/2014/main" id="{241566FE-8602-2728-E06A-15A91CC6D3C9}"/>
+              </a:ext>
+            </a:extLst>
+          </p:cNvPr>
+          <p:cNvSpPr txBox="1"/>
+          <p:nvPr/>
+        </p:nvSpPr>
+        <p:spPr>
+          <a:xfrm>
+            <a:off x="1907791" y="1318065"/>
+            <a:ext cx="3872835" cy="923330"/>
+          </a:xfrm>
+          <a:prstGeom prst="rect">
+            <a:avLst/>
+          </a:prstGeom>
+          <a:noFill/>
+        </p:spPr>
+        <p:txBody>
+          <a:bodyPr wrap="square" rtlCol="0">
+            <a:spAutoFit/>
+          </a:bodyPr>
+          <a:lstStyle/>
+          <a:p>
+            <a:pPr algn="ctr"/>
+            <a:r>
+              <a:rPr lang="en-US" sz="5400" dirty="0">
+                <a:solidFill>
+                  <a:srgbClr val="FF0000"/>
+                </a:solidFill>
+                <a:latin typeface="Times New Roman" panose="02020603050405020304" pitchFamily="18" charset="0"/>
+                <a:cs typeface="Times New Roman" panose="02020603050405020304" pitchFamily="18" charset="0"/>
+              </a:rPr>
+              <a:t>Onyx</a:t>
+            </a:r>
+          </a:p>
+        </p:txBody>
+      </p:sp>
+      <p:sp>
+        <p:nvSpPr>
+          <p:cNvPr id="20" name="TextBox 19">
+            <a:extLst>
+              <a:ext uri="{FF2B5EF4-FFF2-40B4-BE49-F238E27FC236}">
+                <a16:creationId xmlns:a16="http://schemas.microsoft.com/office/drawing/2014/main" id="{19CAE7B6-A427-7062-A40F-37C2326B4796}"/>
+              </a:ext>
+            </a:extLst>
+          </p:cNvPr>
+          <p:cNvSpPr txBox="1"/>
+          <p:nvPr/>
+        </p:nvSpPr>
+        <p:spPr>
+          <a:xfrm>
+            <a:off x="7643442" y="1318065"/>
+            <a:ext cx="3872835" cy="923330"/>
+          </a:xfrm>
+          <a:prstGeom prst="rect">
+            <a:avLst/>
+          </a:prstGeom>
+          <a:noFill/>
+        </p:spPr>
+        <p:txBody>
+          <a:bodyPr wrap="square" rtlCol="0">
+            <a:spAutoFit/>
+          </a:bodyPr>
+          <a:lstStyle/>
+          <a:p>
+            <a:pPr algn="ctr"/>
+            <a:r>
+              <a:rPr lang="en-US" sz="5400" dirty="0">
+                <a:solidFill>
+                  <a:srgbClr val="FF0000"/>
+                </a:solidFill>
+                <a:latin typeface="Times New Roman" panose="02020603050405020304" pitchFamily="18" charset="0"/>
+                <a:cs typeface="Times New Roman" panose="02020603050405020304" pitchFamily="18" charset="0"/>
+              </a:rPr>
+              <a:t>Tommy</a:t>
+            </a:r>
+          </a:p>
+        </p:txBody>
+      </p:sp>
+    </p:spTree>
+    <p:extLst>
+      <p:ext uri="{BB962C8B-B14F-4D97-AF65-F5344CB8AC3E}">
+        <p14:creationId xmlns:p14="http://schemas.microsoft.com/office/powerpoint/2010/main" val="3396139960"/>
+      </p:ext>
+    </p:extLst>
+  </p:cSld>
+  <p:clrMapOvr>
+    <a:masterClrMapping/>
+  </p:clrMapOvr>
+  <mc:AlternateContent xmlns:mc="http://schemas.openxmlformats.org/markup-compatibility/2006" xmlns:p159="http://schemas.microsoft.com/office/powerpoint/2015/09/main">
+    <mc:Choice Requires="p159">
+      <p:transition spd="med">
+        <p159:morph option="byWord"/>
+      </p:transition>
+    </mc:Choice>
+    <mc:Fallback xmlns="">
+      <p:transition spd="med">
+        <p:fade/>
+      </p:transition>
+    </mc:Fallback>
+  </mc:AlternateContent>
+</p:sld>
+</file>
+
 <file path=ppt/slides/slide3.xml><?xml version="1.0" encoding="utf-8"?>
 <p:sld xmlns:a="http://schemas.openxmlformats.org/drawingml/2006/main" xmlns:r="http://schemas.openxmlformats.org/officeDocument/2006/relationships" xmlns:p="http://schemas.openxmlformats.org/presentationml/2006/main">
   <p:cSld>
@@ -12188,13 +16928,13 @@
   <p:clrMapOvr>
     <a:masterClrMapping/>
   </p:clrMapOvr>
-  <mc:AlternateContent xmlns:mc="http://schemas.openxmlformats.org/markup-compatibility/2006">
-    <mc:Choice xmlns:p159="http://schemas.microsoft.com/office/powerpoint/2015/09/main" Requires="p159">
+  <mc:AlternateContent xmlns:mc="http://schemas.openxmlformats.org/markup-compatibility/2006" xmlns:p159="http://schemas.microsoft.com/office/powerpoint/2015/09/main">
+    <mc:Choice Requires="p159">
       <p:transition spd="med">
         <p159:morph option="byWord"/>
       </p:transition>
     </mc:Choice>
-    <mc:Fallback>
+    <mc:Fallback xmlns="">
       <p:transition spd="med">
         <p:fade/>
       </p:transition>
@@ -12947,13 +17687,13 @@
   <p:clrMapOvr>
     <a:masterClrMapping/>
   </p:clrMapOvr>
-  <mc:AlternateContent xmlns:mc="http://schemas.openxmlformats.org/markup-compatibility/2006">
-    <mc:Choice xmlns:p159="http://schemas.microsoft.com/office/powerpoint/2015/09/main" Requires="p159">
+  <mc:AlternateContent xmlns:mc="http://schemas.openxmlformats.org/markup-compatibility/2006" xmlns:p159="http://schemas.microsoft.com/office/powerpoint/2015/09/main">
+    <mc:Choice Requires="p159">
       <p:transition spd="med">
         <p159:morph option="byWord"/>
       </p:transition>
     </mc:Choice>
-    <mc:Fallback>
+    <mc:Fallback xmlns="">
       <p:transition spd="med">
         <p:fade/>
       </p:transition>
@@ -13977,13 +18717,13 @@
   <p:clrMapOvr>
     <a:masterClrMapping/>
   </p:clrMapOvr>
-  <mc:AlternateContent xmlns:mc="http://schemas.openxmlformats.org/markup-compatibility/2006">
-    <mc:Choice xmlns:p159="http://schemas.microsoft.com/office/powerpoint/2015/09/main" Requires="p159">
+  <mc:AlternateContent xmlns:mc="http://schemas.openxmlformats.org/markup-compatibility/2006" xmlns:p159="http://schemas.microsoft.com/office/powerpoint/2015/09/main">
+    <mc:Choice Requires="p159">
       <p:transition spd="med">
         <p159:morph option="byWord"/>
       </p:transition>
     </mc:Choice>
-    <mc:Fallback>
+    <mc:Fallback xmlns="">
       <p:transition spd="med">
         <p:fade/>
       </p:transition>
@@ -14902,13 +19642,13 @@
   <p:clrMapOvr>
     <a:masterClrMapping/>
   </p:clrMapOvr>
-  <mc:AlternateContent xmlns:mc="http://schemas.openxmlformats.org/markup-compatibility/2006">
-    <mc:Choice xmlns:p159="http://schemas.microsoft.com/office/powerpoint/2015/09/main" Requires="p159">
+  <mc:AlternateContent xmlns:mc="http://schemas.openxmlformats.org/markup-compatibility/2006" xmlns:p159="http://schemas.microsoft.com/office/powerpoint/2015/09/main">
+    <mc:Choice Requires="p159">
       <p:transition spd="med">
         <p159:morph option="byWord"/>
       </p:transition>
     </mc:Choice>
-    <mc:Fallback>
+    <mc:Fallback xmlns="">
       <p:transition spd="med">
         <p:fade/>
       </p:transition>
@@ -15874,13 +20614,13 @@
   <p:clrMapOvr>
     <a:masterClrMapping/>
   </p:clrMapOvr>
-  <mc:AlternateContent xmlns:mc="http://schemas.openxmlformats.org/markup-compatibility/2006">
-    <mc:Choice xmlns:p159="http://schemas.microsoft.com/office/powerpoint/2015/09/main" Requires="p159">
+  <mc:AlternateContent xmlns:mc="http://schemas.openxmlformats.org/markup-compatibility/2006" xmlns:p159="http://schemas.microsoft.com/office/powerpoint/2015/09/main">
+    <mc:Choice Requires="p159">
       <p:transition spd="med">
         <p159:morph option="byWord"/>
       </p:transition>
     </mc:Choice>
-    <mc:Fallback>
+    <mc:Fallback xmlns="">
       <p:transition spd="med">
         <p:fade/>
       </p:transition>
@@ -17010,13 +21750,13 @@
   <p:clrMapOvr>
     <a:masterClrMapping/>
   </p:clrMapOvr>
-  <mc:AlternateContent xmlns:mc="http://schemas.openxmlformats.org/markup-compatibility/2006">
-    <mc:Choice xmlns:p159="http://schemas.microsoft.com/office/powerpoint/2015/09/main" Requires="p159">
+  <mc:AlternateContent xmlns:mc="http://schemas.openxmlformats.org/markup-compatibility/2006" xmlns:p159="http://schemas.microsoft.com/office/powerpoint/2015/09/main">
+    <mc:Choice Requires="p159">
       <p:transition spd="med">
         <p159:morph option="byWord"/>
       </p:transition>
     </mc:Choice>
-    <mc:Fallback>
+    <mc:Fallback xmlns="">
       <p:transition spd="med">
         <p:fade/>
       </p:transition>
@@ -17231,13 +21971,13 @@
   <p:clrMapOvr>
     <a:masterClrMapping/>
   </p:clrMapOvr>
-  <mc:AlternateContent xmlns:mc="http://schemas.openxmlformats.org/markup-compatibility/2006">
-    <mc:Choice xmlns:p159="http://schemas.microsoft.com/office/powerpoint/2015/09/main" Requires="p159">
+  <mc:AlternateContent xmlns:mc="http://schemas.openxmlformats.org/markup-compatibility/2006" xmlns:p159="http://schemas.microsoft.com/office/powerpoint/2015/09/main">
+    <mc:Choice Requires="p159">
       <p:transition spd="med">
         <p159:morph option="byWord"/>
       </p:transition>
     </mc:Choice>
-    <mc:Fallback>
+    <mc:Fallback xmlns="">
       <p:transition spd="med">
         <p:fade/>
       </p:transition>

--- a/thesis-latency-fairness.pptx
+++ b/thesis-latency-fairness.pptx
@@ -5,7 +5,7 @@
     <p:sldMasterId id="2147483648" r:id="rId1"/>
   </p:sldMasterIdLst>
   <p:notesMasterIdLst>
-    <p:notesMasterId r:id="rId23"/>
+    <p:notesMasterId r:id="rId24"/>
   </p:notesMasterIdLst>
   <p:sldIdLst>
     <p:sldId id="256" r:id="rId2"/>
@@ -22,13 +22,14 @@
     <p:sldId id="268" r:id="rId13"/>
     <p:sldId id="278" r:id="rId14"/>
     <p:sldId id="279" r:id="rId15"/>
-    <p:sldId id="269" r:id="rId16"/>
-    <p:sldId id="270" r:id="rId17"/>
-    <p:sldId id="271" r:id="rId18"/>
-    <p:sldId id="272" r:id="rId19"/>
-    <p:sldId id="273" r:id="rId20"/>
-    <p:sldId id="274" r:id="rId21"/>
-    <p:sldId id="276" r:id="rId22"/>
+    <p:sldId id="280" r:id="rId16"/>
+    <p:sldId id="269" r:id="rId17"/>
+    <p:sldId id="270" r:id="rId18"/>
+    <p:sldId id="271" r:id="rId19"/>
+    <p:sldId id="272" r:id="rId20"/>
+    <p:sldId id="273" r:id="rId21"/>
+    <p:sldId id="274" r:id="rId22"/>
+    <p:sldId id="276" r:id="rId23"/>
   </p:sldIdLst>
   <p:sldSz cx="12192000" cy="6858000"/>
   <p:notesSz cx="6858000" cy="9144000"/>
@@ -217,7 +218,7 @@
           <a:p>
             <a:fld id="{2A89E14C-4B77-9345-AC7C-9D930EA32606}" type="datetimeFigureOut">
               <a:rPr lang="en-US" smtClean="0"/>
-              <a:t>4/4/26</a:t>
+              <a:t>4/5/26</a:t>
             </a:fld>
             <a:endParaRPr lang="en-US"/>
           </a:p>
@@ -579,6 +580,114 @@
         <p:cNvPr id="1" name="">
           <a:extLst>
             <a:ext uri="{FF2B5EF4-FFF2-40B4-BE49-F238E27FC236}">
+              <a16:creationId xmlns:a16="http://schemas.microsoft.com/office/drawing/2014/main" id="{256DD48C-35CA-7315-A026-635A7512DDE8}"/>
+            </a:ext>
+          </a:extLst>
+        </p:cNvPr>
+        <p:cNvGrpSpPr/>
+        <p:nvPr/>
+      </p:nvGrpSpPr>
+      <p:grpSpPr>
+        <a:xfrm>
+          <a:off x="0" y="0"/>
+          <a:ext cx="0" cy="0"/>
+          <a:chOff x="0" y="0"/>
+          <a:chExt cx="0" cy="0"/>
+        </a:xfrm>
+      </p:grpSpPr>
+      <p:sp>
+        <p:nvSpPr>
+          <p:cNvPr id="2" name="Slide Image Placeholder 1">
+            <a:extLst>
+              <a:ext uri="{FF2B5EF4-FFF2-40B4-BE49-F238E27FC236}">
+                <a16:creationId xmlns:a16="http://schemas.microsoft.com/office/drawing/2014/main" id="{AFB97AD3-4CFE-1DF7-96D2-E8556A50B634}"/>
+              </a:ext>
+            </a:extLst>
+          </p:cNvPr>
+          <p:cNvSpPr>
+            <a:spLocks noGrp="1" noRot="1" noChangeAspect="1"/>
+          </p:cNvSpPr>
+          <p:nvPr>
+            <p:ph type="sldImg"/>
+          </p:nvPr>
+        </p:nvSpPr>
+        <p:spPr/>
+      </p:sp>
+      <p:sp>
+        <p:nvSpPr>
+          <p:cNvPr id="3" name="Notes Placeholder 2">
+            <a:extLst>
+              <a:ext uri="{FF2B5EF4-FFF2-40B4-BE49-F238E27FC236}">
+                <a16:creationId xmlns:a16="http://schemas.microsoft.com/office/drawing/2014/main" id="{AF037D92-5B95-DFA8-FD38-FE9B904A9256}"/>
+              </a:ext>
+            </a:extLst>
+          </p:cNvPr>
+          <p:cNvSpPr>
+            <a:spLocks noGrp="1"/>
+          </p:cNvSpPr>
+          <p:nvPr>
+            <p:ph type="body" idx="1"/>
+          </p:nvPr>
+        </p:nvSpPr>
+        <p:spPr/>
+        <p:txBody>
+          <a:bodyPr/>
+          <a:lstStyle/>
+          <a:p>
+            <a:endParaRPr lang="en-US" dirty="0"/>
+          </a:p>
+        </p:txBody>
+      </p:sp>
+      <p:sp>
+        <p:nvSpPr>
+          <p:cNvPr id="4" name="Slide Number Placeholder 3">
+            <a:extLst>
+              <a:ext uri="{FF2B5EF4-FFF2-40B4-BE49-F238E27FC236}">
+                <a16:creationId xmlns:a16="http://schemas.microsoft.com/office/drawing/2014/main" id="{42A06B6A-45E8-6852-5DE7-618D9747D8E7}"/>
+              </a:ext>
+            </a:extLst>
+          </p:cNvPr>
+          <p:cNvSpPr>
+            <a:spLocks noGrp="1"/>
+          </p:cNvSpPr>
+          <p:nvPr>
+            <p:ph type="sldNum" sz="quarter" idx="5"/>
+          </p:nvPr>
+        </p:nvSpPr>
+        <p:spPr/>
+        <p:txBody>
+          <a:bodyPr/>
+          <a:lstStyle/>
+          <a:p>
+            <a:fld id="{5AD2936D-68DF-C34D-84E6-1FDAB4C19BCF}" type="slidenum">
+              <a:rPr lang="en-US" smtClean="0"/>
+              <a:t>16</a:t>
+            </a:fld>
+            <a:endParaRPr lang="en-US"/>
+          </a:p>
+        </p:txBody>
+      </p:sp>
+    </p:spTree>
+    <p:extLst>
+      <p:ext uri="{BB962C8B-B14F-4D97-AF65-F5344CB8AC3E}">
+        <p14:creationId xmlns:p14="http://schemas.microsoft.com/office/powerpoint/2010/main" val="1013648668"/>
+      </p:ext>
+    </p:extLst>
+  </p:cSld>
+  <p:clrMapOvr>
+    <a:masterClrMapping/>
+  </p:clrMapOvr>
+</p:notes>
+</file>
+
+<file path=ppt/notesSlides/notesSlide11.xml><?xml version="1.0" encoding="utf-8"?>
+<p:notes xmlns:a="http://schemas.openxmlformats.org/drawingml/2006/main" xmlns:r="http://schemas.openxmlformats.org/officeDocument/2006/relationships" xmlns:p="http://schemas.openxmlformats.org/presentationml/2006/main">
+  <p:cSld>
+    <p:spTree>
+      <p:nvGrpSpPr>
+        <p:cNvPr id="1" name="">
+          <a:extLst>
+            <a:ext uri="{FF2B5EF4-FFF2-40B4-BE49-F238E27FC236}">
               <a16:creationId xmlns:a16="http://schemas.microsoft.com/office/drawing/2014/main" id="{2C486912-8D16-E435-5C22-A90E748FF1BA}"/>
             </a:ext>
           </a:extLst>
@@ -660,7 +769,7 @@
           <a:p>
             <a:fld id="{5AD2936D-68DF-C34D-84E6-1FDAB4C19BCF}" type="slidenum">
               <a:rPr lang="en-US" smtClean="0"/>
-              <a:t>16</a:t>
+              <a:t>17</a:t>
             </a:fld>
             <a:endParaRPr lang="en-US"/>
           </a:p>
@@ -679,7 +788,7 @@
 </p:notes>
 </file>
 
-<file path=ppt/notesSlides/notesSlide11.xml><?xml version="1.0" encoding="utf-8"?>
+<file path=ppt/notesSlides/notesSlide12.xml><?xml version="1.0" encoding="utf-8"?>
 <p:notes xmlns:a="http://schemas.openxmlformats.org/drawingml/2006/main" xmlns:r="http://schemas.openxmlformats.org/officeDocument/2006/relationships" xmlns:p="http://schemas.openxmlformats.org/presentationml/2006/main">
   <p:cSld>
     <p:spTree>
@@ -768,7 +877,7 @@
           <a:p>
             <a:fld id="{5AD2936D-68DF-C34D-84E6-1FDAB4C19BCF}" type="slidenum">
               <a:rPr lang="en-US" smtClean="0"/>
-              <a:t>17</a:t>
+              <a:t>18</a:t>
             </a:fld>
             <a:endParaRPr lang="en-US"/>
           </a:p>
@@ -787,7 +896,7 @@
 </p:notes>
 </file>
 
-<file path=ppt/notesSlides/notesSlide12.xml><?xml version="1.0" encoding="utf-8"?>
+<file path=ppt/notesSlides/notesSlide13.xml><?xml version="1.0" encoding="utf-8"?>
 <p:notes xmlns:a="http://schemas.openxmlformats.org/drawingml/2006/main" xmlns:r="http://schemas.openxmlformats.org/officeDocument/2006/relationships" xmlns:p="http://schemas.openxmlformats.org/presentationml/2006/main">
   <p:cSld>
     <p:spTree>
@@ -876,7 +985,7 @@
           <a:p>
             <a:fld id="{5AD2936D-68DF-C34D-84E6-1FDAB4C19BCF}" type="slidenum">
               <a:rPr lang="en-US" smtClean="0"/>
-              <a:t>18</a:t>
+              <a:t>19</a:t>
             </a:fld>
             <a:endParaRPr lang="en-US"/>
           </a:p>
@@ -895,7 +1004,7 @@
 </p:notes>
 </file>
 
-<file path=ppt/notesSlides/notesSlide13.xml><?xml version="1.0" encoding="utf-8"?>
+<file path=ppt/notesSlides/notesSlide14.xml><?xml version="1.0" encoding="utf-8"?>
 <p:notes xmlns:a="http://schemas.openxmlformats.org/drawingml/2006/main" xmlns:r="http://schemas.openxmlformats.org/officeDocument/2006/relationships" xmlns:p="http://schemas.openxmlformats.org/presentationml/2006/main">
   <p:cSld>
     <p:spTree>
@@ -984,7 +1093,7 @@
           <a:p>
             <a:fld id="{5AD2936D-68DF-C34D-84E6-1FDAB4C19BCF}" type="slidenum">
               <a:rPr lang="en-US" smtClean="0"/>
-              <a:t>19</a:t>
+              <a:t>20</a:t>
             </a:fld>
             <a:endParaRPr lang="en-US"/>
           </a:p>
@@ -1003,7 +1112,7 @@
 </p:notes>
 </file>
 
-<file path=ppt/notesSlides/notesSlide14.xml><?xml version="1.0" encoding="utf-8"?>
+<file path=ppt/notesSlides/notesSlide15.xml><?xml version="1.0" encoding="utf-8"?>
 <p:notes xmlns:a="http://schemas.openxmlformats.org/drawingml/2006/main" xmlns:r="http://schemas.openxmlformats.org/officeDocument/2006/relationships" xmlns:p="http://schemas.openxmlformats.org/presentationml/2006/main">
   <p:cSld>
     <p:spTree>
@@ -1092,7 +1201,7 @@
           <a:p>
             <a:fld id="{5AD2936D-68DF-C34D-84E6-1FDAB4C19BCF}" type="slidenum">
               <a:rPr lang="en-US" smtClean="0"/>
-              <a:t>20</a:t>
+              <a:t>21</a:t>
             </a:fld>
             <a:endParaRPr lang="en-US"/>
           </a:p>
@@ -1111,7 +1220,7 @@
 </p:notes>
 </file>
 
-<file path=ppt/notesSlides/notesSlide15.xml><?xml version="1.0" encoding="utf-8"?>
+<file path=ppt/notesSlides/notesSlide16.xml><?xml version="1.0" encoding="utf-8"?>
 <p:notes xmlns:a="http://schemas.openxmlformats.org/drawingml/2006/main" xmlns:r="http://schemas.openxmlformats.org/officeDocument/2006/relationships" xmlns:p="http://schemas.openxmlformats.org/presentationml/2006/main">
   <p:cSld>
     <p:spTree>
@@ -1200,7 +1309,7 @@
           <a:p>
             <a:fld id="{5AD2936D-68DF-C34D-84E6-1FDAB4C19BCF}" type="slidenum">
               <a:rPr lang="en-US" smtClean="0"/>
-              <a:t>21</a:t>
+              <a:t>22</a:t>
             </a:fld>
             <a:endParaRPr lang="en-US"/>
           </a:p>
@@ -1986,7 +2095,7 @@
         <p:cNvPr id="1" name="">
           <a:extLst>
             <a:ext uri="{FF2B5EF4-FFF2-40B4-BE49-F238E27FC236}">
-              <a16:creationId xmlns:a16="http://schemas.microsoft.com/office/drawing/2014/main" id="{256DD48C-35CA-7315-A026-635A7512DDE8}"/>
+              <a16:creationId xmlns:a16="http://schemas.microsoft.com/office/drawing/2014/main" id="{36E3C320-3B7C-09A2-200E-DDE80E604EFB}"/>
             </a:ext>
           </a:extLst>
         </p:cNvPr>
@@ -2006,7 +2115,7 @@
           <p:cNvPr id="2" name="Slide Image Placeholder 1">
             <a:extLst>
               <a:ext uri="{FF2B5EF4-FFF2-40B4-BE49-F238E27FC236}">
-                <a16:creationId xmlns:a16="http://schemas.microsoft.com/office/drawing/2014/main" id="{AFB97AD3-4CFE-1DF7-96D2-E8556A50B634}"/>
+                <a16:creationId xmlns:a16="http://schemas.microsoft.com/office/drawing/2014/main" id="{E1C1510F-3905-EBE7-9101-24FE30B00DEB}"/>
               </a:ext>
             </a:extLst>
           </p:cNvPr>
@@ -2024,7 +2133,7 @@
           <p:cNvPr id="3" name="Notes Placeholder 2">
             <a:extLst>
               <a:ext uri="{FF2B5EF4-FFF2-40B4-BE49-F238E27FC236}">
-                <a16:creationId xmlns:a16="http://schemas.microsoft.com/office/drawing/2014/main" id="{AF037D92-5B95-DFA8-FD38-FE9B904A9256}"/>
+                <a16:creationId xmlns:a16="http://schemas.microsoft.com/office/drawing/2014/main" id="{7AD4B288-7A7F-1742-9508-E1818D7C2399}"/>
               </a:ext>
             </a:extLst>
           </p:cNvPr>
@@ -2049,7 +2158,7 @@
           <p:cNvPr id="4" name="Slide Number Placeholder 3">
             <a:extLst>
               <a:ext uri="{FF2B5EF4-FFF2-40B4-BE49-F238E27FC236}">
-                <a16:creationId xmlns:a16="http://schemas.microsoft.com/office/drawing/2014/main" id="{42A06B6A-45E8-6852-5DE7-618D9747D8E7}"/>
+                <a16:creationId xmlns:a16="http://schemas.microsoft.com/office/drawing/2014/main" id="{A57A9963-7D3E-BFD2-CBBF-4C55CB1C021C}"/>
               </a:ext>
             </a:extLst>
           </p:cNvPr>
@@ -2076,7 +2185,7 @@
     </p:spTree>
     <p:extLst>
       <p:ext uri="{BB962C8B-B14F-4D97-AF65-F5344CB8AC3E}">
-        <p14:creationId xmlns:p14="http://schemas.microsoft.com/office/powerpoint/2010/main" val="1013648668"/>
+        <p14:creationId xmlns:p14="http://schemas.microsoft.com/office/powerpoint/2010/main" val="1342639176"/>
       </p:ext>
     </p:extLst>
   </p:cSld>
@@ -2233,7 +2342,7 @@
           <a:p>
             <a:fld id="{D76E4002-9283-1F4C-A40A-752C4DF2EDD0}" type="datetimeFigureOut">
               <a:rPr lang="en-US" smtClean="0"/>
-              <a:t>4/4/26</a:t>
+              <a:t>4/5/26</a:t>
             </a:fld>
             <a:endParaRPr lang="en-US"/>
           </a:p>
@@ -2431,7 +2540,7 @@
           <a:p>
             <a:fld id="{D76E4002-9283-1F4C-A40A-752C4DF2EDD0}" type="datetimeFigureOut">
               <a:rPr lang="en-US" smtClean="0"/>
-              <a:t>4/4/26</a:t>
+              <a:t>4/5/26</a:t>
             </a:fld>
             <a:endParaRPr lang="en-US"/>
           </a:p>
@@ -2639,7 +2748,7 @@
           <a:p>
             <a:fld id="{D76E4002-9283-1F4C-A40A-752C4DF2EDD0}" type="datetimeFigureOut">
               <a:rPr lang="en-US" smtClean="0"/>
-              <a:t>4/4/26</a:t>
+              <a:t>4/5/26</a:t>
             </a:fld>
             <a:endParaRPr lang="en-US"/>
           </a:p>
@@ -2837,7 +2946,7 @@
           <a:p>
             <a:fld id="{D76E4002-9283-1F4C-A40A-752C4DF2EDD0}" type="datetimeFigureOut">
               <a:rPr lang="en-US" smtClean="0"/>
-              <a:t>4/4/26</a:t>
+              <a:t>4/5/26</a:t>
             </a:fld>
             <a:endParaRPr lang="en-US"/>
           </a:p>
@@ -3112,7 +3221,7 @@
           <a:p>
             <a:fld id="{D76E4002-9283-1F4C-A40A-752C4DF2EDD0}" type="datetimeFigureOut">
               <a:rPr lang="en-US" smtClean="0"/>
-              <a:t>4/4/26</a:t>
+              <a:t>4/5/26</a:t>
             </a:fld>
             <a:endParaRPr lang="en-US"/>
           </a:p>
@@ -3377,7 +3486,7 @@
           <a:p>
             <a:fld id="{D76E4002-9283-1F4C-A40A-752C4DF2EDD0}" type="datetimeFigureOut">
               <a:rPr lang="en-US" smtClean="0"/>
-              <a:t>4/4/26</a:t>
+              <a:t>4/5/26</a:t>
             </a:fld>
             <a:endParaRPr lang="en-US"/>
           </a:p>
@@ -3789,7 +3898,7 @@
           <a:p>
             <a:fld id="{D76E4002-9283-1F4C-A40A-752C4DF2EDD0}" type="datetimeFigureOut">
               <a:rPr lang="en-US" smtClean="0"/>
-              <a:t>4/4/26</a:t>
+              <a:t>4/5/26</a:t>
             </a:fld>
             <a:endParaRPr lang="en-US"/>
           </a:p>
@@ -3930,7 +4039,7 @@
           <a:p>
             <a:fld id="{D76E4002-9283-1F4C-A40A-752C4DF2EDD0}" type="datetimeFigureOut">
               <a:rPr lang="en-US" smtClean="0"/>
-              <a:t>4/4/26</a:t>
+              <a:t>4/5/26</a:t>
             </a:fld>
             <a:endParaRPr lang="en-US"/>
           </a:p>
@@ -4043,7 +4152,7 @@
           <a:p>
             <a:fld id="{D76E4002-9283-1F4C-A40A-752C4DF2EDD0}" type="datetimeFigureOut">
               <a:rPr lang="en-US" smtClean="0"/>
-              <a:t>4/4/26</a:t>
+              <a:t>4/5/26</a:t>
             </a:fld>
             <a:endParaRPr lang="en-US"/>
           </a:p>
@@ -4354,7 +4463,7 @@
           <a:p>
             <a:fld id="{D76E4002-9283-1F4C-A40A-752C4DF2EDD0}" type="datetimeFigureOut">
               <a:rPr lang="en-US" smtClean="0"/>
-              <a:t>4/4/26</a:t>
+              <a:t>4/5/26</a:t>
             </a:fld>
             <a:endParaRPr lang="en-US"/>
           </a:p>
@@ -4642,7 +4751,7 @@
           <a:p>
             <a:fld id="{D76E4002-9283-1F4C-A40A-752C4DF2EDD0}" type="datetimeFigureOut">
               <a:rPr lang="en-US" smtClean="0"/>
-              <a:t>4/4/26</a:t>
+              <a:t>4/5/26</a:t>
             </a:fld>
             <a:endParaRPr lang="en-US"/>
           </a:p>
@@ -4886,7 +4995,7 @@
             <a:fld id="{D76E4002-9283-1F4C-A40A-752C4DF2EDD0}" type="datetimeFigureOut">
               <a:rPr lang="en-US" smtClean="0"/>
               <a:pPr/>
-              <a:t>4/4/26</a:t>
+              <a:t>4/5/26</a:t>
             </a:fld>
             <a:endParaRPr lang="en-US"/>
           </a:p>
@@ -10475,7 +10584,10 @@
           <a:lstStyle/>
           <a:p>
             <a:pPr algn="ctr"/>
-            <a:endParaRPr lang="en-US"/>
+            <a:endParaRPr lang="en-US">
+              <a:latin typeface="Times New Roman" panose="02020603050405020304" pitchFamily="18" charset="0"/>
+              <a:cs typeface="Times New Roman" panose="02020603050405020304" pitchFamily="18" charset="0"/>
+            </a:endParaRPr>
           </a:p>
         </p:txBody>
       </p:sp>
@@ -10917,7 +11029,10 @@
           <a:lstStyle/>
           <a:p>
             <a:pPr algn="ctr"/>
-            <a:endParaRPr lang="en-US"/>
+            <a:endParaRPr lang="en-US">
+              <a:latin typeface="Times New Roman" panose="02020603050405020304" pitchFamily="18" charset="0"/>
+              <a:cs typeface="Times New Roman" panose="02020603050405020304" pitchFamily="18" charset="0"/>
+            </a:endParaRPr>
           </a:p>
         </p:txBody>
       </p:sp>
@@ -11522,7 +11637,10 @@
           <a:p>
             <a:pPr algn="ctr"/>
             <a:r>
-              <a:rPr lang="en-US" sz="2400" dirty="0"/>
+              <a:rPr lang="en-US" sz="2400" dirty="0">
+                <a:latin typeface="Times New Roman" panose="02020603050405020304" pitchFamily="18" charset="0"/>
+                <a:cs typeface="Times New Roman" panose="02020603050405020304" pitchFamily="18" charset="0"/>
+              </a:rPr>
               <a:t>Specialized Infrastructure used by on-premises financial exchanges</a:t>
             </a:r>
           </a:p>
@@ -11561,7 +11679,7 @@
         <p:cNvPr id="1" name="">
           <a:extLst>
             <a:ext uri="{FF2B5EF4-FFF2-40B4-BE49-F238E27FC236}">
-              <a16:creationId xmlns:a16="http://schemas.microsoft.com/office/drawing/2014/main" id="{9ABDAEBF-8BAF-F3E0-B3D6-E4931F66CAA3}"/>
+              <a16:creationId xmlns:a16="http://schemas.microsoft.com/office/drawing/2014/main" id="{76883306-CD41-340E-E289-BE2BD6A0F6FB}"/>
             </a:ext>
           </a:extLst>
         </p:cNvPr>
@@ -11581,7 +11699,7 @@
           <p:cNvPr id="17" name="Rectangle 16">
             <a:extLst>
               <a:ext uri="{FF2B5EF4-FFF2-40B4-BE49-F238E27FC236}">
-                <a16:creationId xmlns:a16="http://schemas.microsoft.com/office/drawing/2014/main" id="{8D871015-EDE6-E81D-7BC0-086BC48FAE5C}"/>
+                <a16:creationId xmlns:a16="http://schemas.microsoft.com/office/drawing/2014/main" id="{FBEDC353-4BC1-F2DD-5794-8436701EE72B}"/>
               </a:ext>
             </a:extLst>
           </p:cNvPr>
@@ -11638,7 +11756,7 @@
           <p:cNvPr id="18" name="Rectangle 17">
             <a:extLst>
               <a:ext uri="{FF2B5EF4-FFF2-40B4-BE49-F238E27FC236}">
-                <a16:creationId xmlns:a16="http://schemas.microsoft.com/office/drawing/2014/main" id="{7CA8CF64-7878-8473-459D-E8C099F6658D}"/>
+                <a16:creationId xmlns:a16="http://schemas.microsoft.com/office/drawing/2014/main" id="{42037120-FE8A-DBCE-FD1B-3D1532654AF7}"/>
               </a:ext>
             </a:extLst>
           </p:cNvPr>
@@ -11692,10 +11810,110 @@
       </p:sp>
       <p:sp>
         <p:nvSpPr>
+          <p:cNvPr id="12" name="TextBox 11">
+            <a:extLst>
+              <a:ext uri="{FF2B5EF4-FFF2-40B4-BE49-F238E27FC236}">
+                <a16:creationId xmlns:a16="http://schemas.microsoft.com/office/drawing/2014/main" id="{10B0479C-494E-1D72-B4B2-C7C78BF777AD}"/>
+              </a:ext>
+            </a:extLst>
+          </p:cNvPr>
+          <p:cNvSpPr txBox="1"/>
+          <p:nvPr/>
+        </p:nvSpPr>
+        <p:spPr>
+          <a:xfrm>
+            <a:off x="772906" y="405121"/>
+            <a:ext cx="5095723" cy="830997"/>
+          </a:xfrm>
+          <a:prstGeom prst="rect">
+            <a:avLst/>
+          </a:prstGeom>
+          <a:noFill/>
+        </p:spPr>
+        <p:txBody>
+          <a:bodyPr wrap="square" rtlCol="0">
+            <a:spAutoFit/>
+          </a:bodyPr>
+          <a:lstStyle/>
+          <a:p>
+            <a:r>
+              <a:rPr lang="en-US" sz="4800" dirty="0">
+                <a:latin typeface="Times New Roman" panose="02020603050405020304" pitchFamily="18" charset="0"/>
+                <a:cs typeface="Times New Roman" panose="02020603050405020304" pitchFamily="18" charset="0"/>
+              </a:rPr>
+              <a:t>c</a:t>
+            </a:r>
+            <a:r>
+              <a:rPr lang="en-US" sz="3000" dirty="0">
+                <a:latin typeface="Times New Roman" panose="02020603050405020304" pitchFamily="18" charset="0"/>
+                <a:cs typeface="Times New Roman" panose="02020603050405020304" pitchFamily="18" charset="0"/>
+              </a:rPr>
+              <a:t>ompetitive </a:t>
+            </a:r>
+            <a:r>
+              <a:rPr lang="en-US" sz="4800" dirty="0">
+                <a:latin typeface="Times New Roman" panose="02020603050405020304" pitchFamily="18" charset="0"/>
+                <a:cs typeface="Times New Roman" panose="02020603050405020304" pitchFamily="18" charset="0"/>
+              </a:rPr>
+              <a:t>s</a:t>
+            </a:r>
+            <a:r>
+              <a:rPr lang="en-US" sz="3000" dirty="0">
+                <a:latin typeface="Times New Roman" panose="02020603050405020304" pitchFamily="18" charset="0"/>
+                <a:cs typeface="Times New Roman" panose="02020603050405020304" pitchFamily="18" charset="0"/>
+              </a:rPr>
+              <a:t>ystems</a:t>
+            </a:r>
+          </a:p>
+        </p:txBody>
+      </p:sp>
+      <p:sp>
+        <p:nvSpPr>
+          <p:cNvPr id="2" name="TextBox 1">
+            <a:extLst>
+              <a:ext uri="{FF2B5EF4-FFF2-40B4-BE49-F238E27FC236}">
+                <a16:creationId xmlns:a16="http://schemas.microsoft.com/office/drawing/2014/main" id="{D197B7C2-A3A4-7CC4-20A8-DD6E28D2F59D}"/>
+              </a:ext>
+            </a:extLst>
+          </p:cNvPr>
+          <p:cNvSpPr txBox="1"/>
+          <p:nvPr/>
+        </p:nvSpPr>
+        <p:spPr>
+          <a:xfrm>
+            <a:off x="4806479" y="716456"/>
+            <a:ext cx="6410817" cy="553998"/>
+          </a:xfrm>
+          <a:prstGeom prst="rect">
+            <a:avLst/>
+          </a:prstGeom>
+          <a:noFill/>
+        </p:spPr>
+        <p:txBody>
+          <a:bodyPr wrap="square" rtlCol="0">
+            <a:spAutoFit/>
+          </a:bodyPr>
+          <a:lstStyle/>
+          <a:p>
+            <a:r>
+              <a:rPr lang="en-US" sz="3000" dirty="0">
+                <a:solidFill>
+                  <a:srgbClr val="7030A0"/>
+                </a:solidFill>
+                <a:latin typeface="Times New Roman" panose="02020603050405020304" pitchFamily="18" charset="0"/>
+                <a:cs typeface="Times New Roman" panose="02020603050405020304" pitchFamily="18" charset="0"/>
+              </a:rPr>
+              <a:t>Two Common Communication Patterns</a:t>
+            </a:r>
+          </a:p>
+        </p:txBody>
+      </p:sp>
+      <p:sp>
+        <p:nvSpPr>
           <p:cNvPr id="3" name="Rounded Rectangle 2">
             <a:extLst>
               <a:ext uri="{FF2B5EF4-FFF2-40B4-BE49-F238E27FC236}">
-                <a16:creationId xmlns:a16="http://schemas.microsoft.com/office/drawing/2014/main" id="{741FE454-70F9-322F-C660-D8A2A5E49172}"/>
+                <a16:creationId xmlns:a16="http://schemas.microsoft.com/office/drawing/2014/main" id="{7088CEF2-0FFF-83BF-E570-0728B6DD3A80}"/>
               </a:ext>
             </a:extLst>
           </p:cNvPr>
@@ -11704,20 +11922,392 @@
         </p:nvSpPr>
         <p:spPr>
           <a:xfrm>
-            <a:off x="702884" y="2761827"/>
-            <a:ext cx="6709719" cy="2279729"/>
-          </a:xfrm>
-          <a:prstGeom prst="roundRect">
-            <a:avLst/>
-          </a:prstGeom>
+            <a:off x="472966" y="4755944"/>
+            <a:ext cx="4482094" cy="1213932"/>
+          </a:xfrm>
+          <a:custGeom>
+            <a:avLst/>
+            <a:gdLst>
+              <a:gd name="csX0" fmla="*/ 0 w 4482094"/>
+              <a:gd name="csY0" fmla="*/ 202326 h 1213932"/>
+              <a:gd name="csX1" fmla="*/ 202326 w 4482094"/>
+              <a:gd name="csY1" fmla="*/ 0 h 1213932"/>
+              <a:gd name="csX2" fmla="*/ 703269 w 4482094"/>
+              <a:gd name="csY2" fmla="*/ 0 h 1213932"/>
+              <a:gd name="csX3" fmla="*/ 1163437 w 4482094"/>
+              <a:gd name="csY3" fmla="*/ 0 h 1213932"/>
+              <a:gd name="csX4" fmla="*/ 1705155 w 4482094"/>
+              <a:gd name="csY4" fmla="*/ 0 h 1213932"/>
+              <a:gd name="csX5" fmla="*/ 2328421 w 4482094"/>
+              <a:gd name="csY5" fmla="*/ 0 h 1213932"/>
+              <a:gd name="csX6" fmla="*/ 2992461 w 4482094"/>
+              <a:gd name="csY6" fmla="*/ 0 h 1213932"/>
+              <a:gd name="csX7" fmla="*/ 3534179 w 4482094"/>
+              <a:gd name="csY7" fmla="*/ 0 h 1213932"/>
+              <a:gd name="csX8" fmla="*/ 4279768 w 4482094"/>
+              <a:gd name="csY8" fmla="*/ 0 h 1213932"/>
+              <a:gd name="csX9" fmla="*/ 4482094 w 4482094"/>
+              <a:gd name="csY9" fmla="*/ 202326 h 1213932"/>
+              <a:gd name="csX10" fmla="*/ 4482094 w 4482094"/>
+              <a:gd name="csY10" fmla="*/ 598873 h 1213932"/>
+              <a:gd name="csX11" fmla="*/ 4482094 w 4482094"/>
+              <a:gd name="csY11" fmla="*/ 1011606 h 1213932"/>
+              <a:gd name="csX12" fmla="*/ 4279768 w 4482094"/>
+              <a:gd name="csY12" fmla="*/ 1213932 h 1213932"/>
+              <a:gd name="csX13" fmla="*/ 3615727 w 4482094"/>
+              <a:gd name="csY13" fmla="*/ 1213932 h 1213932"/>
+              <a:gd name="csX14" fmla="*/ 2992461 w 4482094"/>
+              <a:gd name="csY14" fmla="*/ 1213932 h 1213932"/>
+              <a:gd name="csX15" fmla="*/ 2369195 w 4482094"/>
+              <a:gd name="csY15" fmla="*/ 1213932 h 1213932"/>
+              <a:gd name="csX16" fmla="*/ 1909027 w 4482094"/>
+              <a:gd name="csY16" fmla="*/ 1213932 h 1213932"/>
+              <a:gd name="csX17" fmla="*/ 1448858 w 4482094"/>
+              <a:gd name="csY17" fmla="*/ 1213932 h 1213932"/>
+              <a:gd name="csX18" fmla="*/ 988690 w 4482094"/>
+              <a:gd name="csY18" fmla="*/ 1213932 h 1213932"/>
+              <a:gd name="csX19" fmla="*/ 202326 w 4482094"/>
+              <a:gd name="csY19" fmla="*/ 1213932 h 1213932"/>
+              <a:gd name="csX20" fmla="*/ 0 w 4482094"/>
+              <a:gd name="csY20" fmla="*/ 1011606 h 1213932"/>
+              <a:gd name="csX21" fmla="*/ 0 w 4482094"/>
+              <a:gd name="csY21" fmla="*/ 623152 h 1213932"/>
+              <a:gd name="csX22" fmla="*/ 0 w 4482094"/>
+              <a:gd name="csY22" fmla="*/ 202326 h 1213932"/>
+            </a:gdLst>
+            <a:ahLst/>
+            <a:cxnLst>
+              <a:cxn ang="0">
+                <a:pos x="csX0" y="csY0"/>
+              </a:cxn>
+              <a:cxn ang="0">
+                <a:pos x="csX1" y="csY1"/>
+              </a:cxn>
+              <a:cxn ang="0">
+                <a:pos x="csX2" y="csY2"/>
+              </a:cxn>
+              <a:cxn ang="0">
+                <a:pos x="csX3" y="csY3"/>
+              </a:cxn>
+              <a:cxn ang="0">
+                <a:pos x="csX4" y="csY4"/>
+              </a:cxn>
+              <a:cxn ang="0">
+                <a:pos x="csX5" y="csY5"/>
+              </a:cxn>
+              <a:cxn ang="0">
+                <a:pos x="csX6" y="csY6"/>
+              </a:cxn>
+              <a:cxn ang="0">
+                <a:pos x="csX7" y="csY7"/>
+              </a:cxn>
+              <a:cxn ang="0">
+                <a:pos x="csX8" y="csY8"/>
+              </a:cxn>
+              <a:cxn ang="0">
+                <a:pos x="csX9" y="csY9"/>
+              </a:cxn>
+              <a:cxn ang="0">
+                <a:pos x="csX10" y="csY10"/>
+              </a:cxn>
+              <a:cxn ang="0">
+                <a:pos x="csX11" y="csY11"/>
+              </a:cxn>
+              <a:cxn ang="0">
+                <a:pos x="csX12" y="csY12"/>
+              </a:cxn>
+              <a:cxn ang="0">
+                <a:pos x="csX13" y="csY13"/>
+              </a:cxn>
+              <a:cxn ang="0">
+                <a:pos x="csX14" y="csY14"/>
+              </a:cxn>
+              <a:cxn ang="0">
+                <a:pos x="csX15" y="csY15"/>
+              </a:cxn>
+              <a:cxn ang="0">
+                <a:pos x="csX16" y="csY16"/>
+              </a:cxn>
+              <a:cxn ang="0">
+                <a:pos x="csX17" y="csY17"/>
+              </a:cxn>
+              <a:cxn ang="0">
+                <a:pos x="csX18" y="csY18"/>
+              </a:cxn>
+              <a:cxn ang="0">
+                <a:pos x="csX19" y="csY19"/>
+              </a:cxn>
+              <a:cxn ang="0">
+                <a:pos x="csX20" y="csY20"/>
+              </a:cxn>
+              <a:cxn ang="0">
+                <a:pos x="csX21" y="csY21"/>
+              </a:cxn>
+              <a:cxn ang="0">
+                <a:pos x="csX22" y="csY22"/>
+              </a:cxn>
+            </a:cxnLst>
+            <a:rect l="l" t="t" r="r" b="b"/>
+            <a:pathLst>
+              <a:path w="4482094" h="1213932" fill="none" extrusionOk="0">
+                <a:moveTo>
+                  <a:pt x="0" y="202326"/>
+                </a:moveTo>
+                <a:cubicBezTo>
+                  <a:pt x="26695" y="78017"/>
+                  <a:pt x="75354" y="6686"/>
+                  <a:pt x="202326" y="0"/>
+                </a:cubicBezTo>
+                <a:cubicBezTo>
+                  <a:pt x="310846" y="-50018"/>
+                  <a:pt x="593216" y="34946"/>
+                  <a:pt x="703269" y="0"/>
+                </a:cubicBezTo>
+                <a:cubicBezTo>
+                  <a:pt x="813322" y="-34946"/>
+                  <a:pt x="955403" y="25942"/>
+                  <a:pt x="1163437" y="0"/>
+                </a:cubicBezTo>
+                <a:cubicBezTo>
+                  <a:pt x="1371471" y="-25942"/>
+                  <a:pt x="1593315" y="40294"/>
+                  <a:pt x="1705155" y="0"/>
+                </a:cubicBezTo>
+                <a:cubicBezTo>
+                  <a:pt x="1816995" y="-40294"/>
+                  <a:pt x="2122609" y="42548"/>
+                  <a:pt x="2328421" y="0"/>
+                </a:cubicBezTo>
+                <a:cubicBezTo>
+                  <a:pt x="2534233" y="-42548"/>
+                  <a:pt x="2780578" y="59133"/>
+                  <a:pt x="2992461" y="0"/>
+                </a:cubicBezTo>
+                <a:cubicBezTo>
+                  <a:pt x="3204344" y="-59133"/>
+                  <a:pt x="3421836" y="36180"/>
+                  <a:pt x="3534179" y="0"/>
+                </a:cubicBezTo>
+                <a:cubicBezTo>
+                  <a:pt x="3646522" y="-36180"/>
+                  <a:pt x="4090705" y="35347"/>
+                  <a:pt x="4279768" y="0"/>
+                </a:cubicBezTo>
+                <a:cubicBezTo>
+                  <a:pt x="4374039" y="17153"/>
+                  <a:pt x="4478954" y="94594"/>
+                  <a:pt x="4482094" y="202326"/>
+                </a:cubicBezTo>
+                <a:cubicBezTo>
+                  <a:pt x="4499112" y="317165"/>
+                  <a:pt x="4466703" y="476425"/>
+                  <a:pt x="4482094" y="598873"/>
+                </a:cubicBezTo>
+                <a:cubicBezTo>
+                  <a:pt x="4497485" y="721321"/>
+                  <a:pt x="4433159" y="915363"/>
+                  <a:pt x="4482094" y="1011606"/>
+                </a:cubicBezTo>
+                <a:cubicBezTo>
+                  <a:pt x="4500655" y="1107200"/>
+                  <a:pt x="4371140" y="1231747"/>
+                  <a:pt x="4279768" y="1213932"/>
+                </a:cubicBezTo>
+                <a:cubicBezTo>
+                  <a:pt x="3949763" y="1262404"/>
+                  <a:pt x="3886087" y="1171221"/>
+                  <a:pt x="3615727" y="1213932"/>
+                </a:cubicBezTo>
+                <a:cubicBezTo>
+                  <a:pt x="3345367" y="1256643"/>
+                  <a:pt x="3188927" y="1158815"/>
+                  <a:pt x="2992461" y="1213932"/>
+                </a:cubicBezTo>
+                <a:cubicBezTo>
+                  <a:pt x="2795995" y="1269049"/>
+                  <a:pt x="2642429" y="1202278"/>
+                  <a:pt x="2369195" y="1213932"/>
+                </a:cubicBezTo>
+                <a:cubicBezTo>
+                  <a:pt x="2095961" y="1225586"/>
+                  <a:pt x="2124900" y="1207898"/>
+                  <a:pt x="1909027" y="1213932"/>
+                </a:cubicBezTo>
+                <a:cubicBezTo>
+                  <a:pt x="1693154" y="1219966"/>
+                  <a:pt x="1674914" y="1164025"/>
+                  <a:pt x="1448858" y="1213932"/>
+                </a:cubicBezTo>
+                <a:cubicBezTo>
+                  <a:pt x="1222802" y="1263839"/>
+                  <a:pt x="1114471" y="1165257"/>
+                  <a:pt x="988690" y="1213932"/>
+                </a:cubicBezTo>
+                <a:cubicBezTo>
+                  <a:pt x="862909" y="1262607"/>
+                  <a:pt x="434083" y="1185791"/>
+                  <a:pt x="202326" y="1213932"/>
+                </a:cubicBezTo>
+                <a:cubicBezTo>
+                  <a:pt x="103782" y="1218548"/>
+                  <a:pt x="15230" y="1124784"/>
+                  <a:pt x="0" y="1011606"/>
+                </a:cubicBezTo>
+                <a:cubicBezTo>
+                  <a:pt x="-5740" y="817584"/>
+                  <a:pt x="4281" y="721549"/>
+                  <a:pt x="0" y="623152"/>
+                </a:cubicBezTo>
+                <a:cubicBezTo>
+                  <a:pt x="-4281" y="524755"/>
+                  <a:pt x="41708" y="293725"/>
+                  <a:pt x="0" y="202326"/>
+                </a:cubicBezTo>
+                <a:close/>
+              </a:path>
+              <a:path w="4482094" h="1213932" stroke="0" extrusionOk="0">
+                <a:moveTo>
+                  <a:pt x="0" y="202326"/>
+                </a:moveTo>
+                <a:cubicBezTo>
+                  <a:pt x="-16723" y="104191"/>
+                  <a:pt x="101543" y="-28700"/>
+                  <a:pt x="202326" y="0"/>
+                </a:cubicBezTo>
+                <a:cubicBezTo>
+                  <a:pt x="436127" y="-38849"/>
+                  <a:pt x="523360" y="22818"/>
+                  <a:pt x="784818" y="0"/>
+                </a:cubicBezTo>
+                <a:cubicBezTo>
+                  <a:pt x="1046276" y="-22818"/>
+                  <a:pt x="1235129" y="60004"/>
+                  <a:pt x="1448858" y="0"/>
+                </a:cubicBezTo>
+                <a:cubicBezTo>
+                  <a:pt x="1662587" y="-60004"/>
+                  <a:pt x="1803950" y="17905"/>
+                  <a:pt x="1909027" y="0"/>
+                </a:cubicBezTo>
+                <a:cubicBezTo>
+                  <a:pt x="2014104" y="-17905"/>
+                  <a:pt x="2245709" y="15579"/>
+                  <a:pt x="2369195" y="0"/>
+                </a:cubicBezTo>
+                <a:cubicBezTo>
+                  <a:pt x="2492681" y="-15579"/>
+                  <a:pt x="2662699" y="41827"/>
+                  <a:pt x="2910912" y="0"/>
+                </a:cubicBezTo>
+                <a:cubicBezTo>
+                  <a:pt x="3159125" y="-41827"/>
+                  <a:pt x="3274654" y="25262"/>
+                  <a:pt x="3493404" y="0"/>
+                </a:cubicBezTo>
+                <a:cubicBezTo>
+                  <a:pt x="3712154" y="-25262"/>
+                  <a:pt x="4011493" y="69021"/>
+                  <a:pt x="4279768" y="0"/>
+                </a:cubicBezTo>
+                <a:cubicBezTo>
+                  <a:pt x="4400494" y="30317"/>
+                  <a:pt x="4459968" y="67561"/>
+                  <a:pt x="4482094" y="202326"/>
+                </a:cubicBezTo>
+                <a:cubicBezTo>
+                  <a:pt x="4512683" y="389701"/>
+                  <a:pt x="4438350" y="470058"/>
+                  <a:pt x="4482094" y="598873"/>
+                </a:cubicBezTo>
+                <a:cubicBezTo>
+                  <a:pt x="4525838" y="727688"/>
+                  <a:pt x="4439543" y="818110"/>
+                  <a:pt x="4482094" y="1011606"/>
+                </a:cubicBezTo>
+                <a:cubicBezTo>
+                  <a:pt x="4501699" y="1146361"/>
+                  <a:pt x="4403210" y="1213086"/>
+                  <a:pt x="4279768" y="1213932"/>
+                </a:cubicBezTo>
+                <a:cubicBezTo>
+                  <a:pt x="4053273" y="1262350"/>
+                  <a:pt x="3993693" y="1199585"/>
+                  <a:pt x="3819600" y="1213932"/>
+                </a:cubicBezTo>
+                <a:cubicBezTo>
+                  <a:pt x="3645507" y="1228279"/>
+                  <a:pt x="3564206" y="1206396"/>
+                  <a:pt x="3359431" y="1213932"/>
+                </a:cubicBezTo>
+                <a:cubicBezTo>
+                  <a:pt x="3154656" y="1221468"/>
+                  <a:pt x="3031699" y="1166407"/>
+                  <a:pt x="2899263" y="1213932"/>
+                </a:cubicBezTo>
+                <a:cubicBezTo>
+                  <a:pt x="2766827" y="1261457"/>
+                  <a:pt x="2645038" y="1211015"/>
+                  <a:pt x="2439094" y="1213932"/>
+                </a:cubicBezTo>
+                <a:cubicBezTo>
+                  <a:pt x="2233150" y="1216849"/>
+                  <a:pt x="2142178" y="1158375"/>
+                  <a:pt x="1856602" y="1213932"/>
+                </a:cubicBezTo>
+                <a:cubicBezTo>
+                  <a:pt x="1571026" y="1269489"/>
+                  <a:pt x="1587404" y="1184297"/>
+                  <a:pt x="1396434" y="1213932"/>
+                </a:cubicBezTo>
+                <a:cubicBezTo>
+                  <a:pt x="1205464" y="1243567"/>
+                  <a:pt x="999372" y="1142548"/>
+                  <a:pt x="732393" y="1213932"/>
+                </a:cubicBezTo>
+                <a:cubicBezTo>
+                  <a:pt x="465414" y="1285316"/>
+                  <a:pt x="429827" y="1204260"/>
+                  <a:pt x="202326" y="1213932"/>
+                </a:cubicBezTo>
+                <a:cubicBezTo>
+                  <a:pt x="98367" y="1220249"/>
+                  <a:pt x="15313" y="1128582"/>
+                  <a:pt x="0" y="1011606"/>
+                </a:cubicBezTo>
+                <a:cubicBezTo>
+                  <a:pt x="-22348" y="922605"/>
+                  <a:pt x="18797" y="799667"/>
+                  <a:pt x="0" y="615059"/>
+                </a:cubicBezTo>
+                <a:cubicBezTo>
+                  <a:pt x="-18797" y="430451"/>
+                  <a:pt x="27808" y="389567"/>
+                  <a:pt x="0" y="202326"/>
+                </a:cubicBezTo>
+                <a:close/>
+              </a:path>
+            </a:pathLst>
+          </a:custGeom>
           <a:solidFill>
-            <a:schemeClr val="accent4">
+            <a:schemeClr val="accent6">
               <a:lumMod val="40000"/>
               <a:lumOff val="60000"/>
             </a:schemeClr>
           </a:solidFill>
-          <a:ln>
-            <a:noFill/>
+          <a:ln w="25400">
+            <a:bevel/>
+            <a:extLst>
+              <a:ext uri="{C807C97D-BFC1-408E-A445-0C87EB9F89A2}">
+                <ask:lineSketchStyleProps xmlns:ask="http://schemas.microsoft.com/office/drawing/2018/sketchyshapes" sd="247587333">
+                  <a:prstGeom prst="roundRect">
+                    <a:avLst/>
+                  </a:prstGeom>
+                  <ask:type>
+                    <ask:lineSketchScribble/>
+                  </ask:type>
+                </ask:lineSketchStyleProps>
+              </a:ext>
+            </a:extLst>
           </a:ln>
         </p:spPr>
         <p:style>
@@ -11741,16 +12331,464 @@
           <a:lstStyle/>
           <a:p>
             <a:pPr algn="ctr"/>
-            <a:endParaRPr lang="en-US"/>
-          </a:p>
-        </p:txBody>
-      </p:sp>
-      <p:sp>
-        <p:nvSpPr>
-          <p:cNvPr id="12" name="TextBox 11">
-            <a:extLst>
-              <a:ext uri="{FF2B5EF4-FFF2-40B4-BE49-F238E27FC236}">
-                <a16:creationId xmlns:a16="http://schemas.microsoft.com/office/drawing/2014/main" id="{6512C3D2-1CC7-A28A-2894-186A3513B4E0}"/>
+            <a:endParaRPr lang="en-US">
+              <a:latin typeface="Times New Roman" panose="02020603050405020304" pitchFamily="18" charset="0"/>
+              <a:cs typeface="Times New Roman" panose="02020603050405020304" pitchFamily="18" charset="0"/>
+            </a:endParaRPr>
+          </a:p>
+        </p:txBody>
+      </p:sp>
+      <p:sp>
+        <p:nvSpPr>
+          <p:cNvPr id="5" name="Rounded Rectangle 4">
+            <a:extLst>
+              <a:ext uri="{FF2B5EF4-FFF2-40B4-BE49-F238E27FC236}">
+                <a16:creationId xmlns:a16="http://schemas.microsoft.com/office/drawing/2014/main" id="{A0B9AEF3-49AA-2E61-60B5-E8B25CF0FB6D}"/>
+              </a:ext>
+            </a:extLst>
+          </p:cNvPr>
+          <p:cNvSpPr/>
+          <p:nvPr/>
+        </p:nvSpPr>
+        <p:spPr>
+          <a:xfrm>
+            <a:off x="6615105" y="4696264"/>
+            <a:ext cx="4658815" cy="1213932"/>
+          </a:xfrm>
+          <a:custGeom>
+            <a:avLst/>
+            <a:gdLst>
+              <a:gd name="csX0" fmla="*/ 0 w 4658815"/>
+              <a:gd name="csY0" fmla="*/ 202326 h 1213932"/>
+              <a:gd name="csX1" fmla="*/ 202326 w 4658815"/>
+              <a:gd name="csY1" fmla="*/ 0 h 1213932"/>
+              <a:gd name="csX2" fmla="*/ 776638 w 4658815"/>
+              <a:gd name="csY2" fmla="*/ 0 h 1213932"/>
+              <a:gd name="csX3" fmla="*/ 1223325 w 4658815"/>
+              <a:gd name="csY3" fmla="*/ 0 h 1213932"/>
+              <a:gd name="csX4" fmla="*/ 1797637 w 4658815"/>
+              <a:gd name="csY4" fmla="*/ 0 h 1213932"/>
+              <a:gd name="csX5" fmla="*/ 2201783 w 4658815"/>
+              <a:gd name="csY5" fmla="*/ 0 h 1213932"/>
+              <a:gd name="csX6" fmla="*/ 2776095 w 4658815"/>
+              <a:gd name="csY6" fmla="*/ 0 h 1213932"/>
+              <a:gd name="csX7" fmla="*/ 3222782 w 4658815"/>
+              <a:gd name="csY7" fmla="*/ 0 h 1213932"/>
+              <a:gd name="csX8" fmla="*/ 3626927 w 4658815"/>
+              <a:gd name="csY8" fmla="*/ 0 h 1213932"/>
+              <a:gd name="csX9" fmla="*/ 4456489 w 4658815"/>
+              <a:gd name="csY9" fmla="*/ 0 h 1213932"/>
+              <a:gd name="csX10" fmla="*/ 4658815 w 4658815"/>
+              <a:gd name="csY10" fmla="*/ 202326 h 1213932"/>
+              <a:gd name="csX11" fmla="*/ 4658815 w 4658815"/>
+              <a:gd name="csY11" fmla="*/ 615059 h 1213932"/>
+              <a:gd name="csX12" fmla="*/ 4658815 w 4658815"/>
+              <a:gd name="csY12" fmla="*/ 1011606 h 1213932"/>
+              <a:gd name="csX13" fmla="*/ 4456489 w 4658815"/>
+              <a:gd name="csY13" fmla="*/ 1213932 h 1213932"/>
+              <a:gd name="csX14" fmla="*/ 4052344 w 4658815"/>
+              <a:gd name="csY14" fmla="*/ 1213932 h 1213932"/>
+              <a:gd name="csX15" fmla="*/ 3435490 w 4658815"/>
+              <a:gd name="csY15" fmla="*/ 1213932 h 1213932"/>
+              <a:gd name="csX16" fmla="*/ 2903720 w 4658815"/>
+              <a:gd name="csY16" fmla="*/ 1213932 h 1213932"/>
+              <a:gd name="csX17" fmla="*/ 2286866 w 4658815"/>
+              <a:gd name="csY17" fmla="*/ 1213932 h 1213932"/>
+              <a:gd name="csX18" fmla="*/ 1712554 w 4658815"/>
+              <a:gd name="csY18" fmla="*/ 1213932 h 1213932"/>
+              <a:gd name="csX19" fmla="*/ 1223325 w 4658815"/>
+              <a:gd name="csY19" fmla="*/ 1213932 h 1213932"/>
+              <a:gd name="csX20" fmla="*/ 202326 w 4658815"/>
+              <a:gd name="csY20" fmla="*/ 1213932 h 1213932"/>
+              <a:gd name="csX21" fmla="*/ 0 w 4658815"/>
+              <a:gd name="csY21" fmla="*/ 1011606 h 1213932"/>
+              <a:gd name="csX22" fmla="*/ 0 w 4658815"/>
+              <a:gd name="csY22" fmla="*/ 606966 h 1213932"/>
+              <a:gd name="csX23" fmla="*/ 0 w 4658815"/>
+              <a:gd name="csY23" fmla="*/ 202326 h 1213932"/>
+            </a:gdLst>
+            <a:ahLst/>
+            <a:cxnLst>
+              <a:cxn ang="0">
+                <a:pos x="csX0" y="csY0"/>
+              </a:cxn>
+              <a:cxn ang="0">
+                <a:pos x="csX1" y="csY1"/>
+              </a:cxn>
+              <a:cxn ang="0">
+                <a:pos x="csX2" y="csY2"/>
+              </a:cxn>
+              <a:cxn ang="0">
+                <a:pos x="csX3" y="csY3"/>
+              </a:cxn>
+              <a:cxn ang="0">
+                <a:pos x="csX4" y="csY4"/>
+              </a:cxn>
+              <a:cxn ang="0">
+                <a:pos x="csX5" y="csY5"/>
+              </a:cxn>
+              <a:cxn ang="0">
+                <a:pos x="csX6" y="csY6"/>
+              </a:cxn>
+              <a:cxn ang="0">
+                <a:pos x="csX7" y="csY7"/>
+              </a:cxn>
+              <a:cxn ang="0">
+                <a:pos x="csX8" y="csY8"/>
+              </a:cxn>
+              <a:cxn ang="0">
+                <a:pos x="csX9" y="csY9"/>
+              </a:cxn>
+              <a:cxn ang="0">
+                <a:pos x="csX10" y="csY10"/>
+              </a:cxn>
+              <a:cxn ang="0">
+                <a:pos x="csX11" y="csY11"/>
+              </a:cxn>
+              <a:cxn ang="0">
+                <a:pos x="csX12" y="csY12"/>
+              </a:cxn>
+              <a:cxn ang="0">
+                <a:pos x="csX13" y="csY13"/>
+              </a:cxn>
+              <a:cxn ang="0">
+                <a:pos x="csX14" y="csY14"/>
+              </a:cxn>
+              <a:cxn ang="0">
+                <a:pos x="csX15" y="csY15"/>
+              </a:cxn>
+              <a:cxn ang="0">
+                <a:pos x="csX16" y="csY16"/>
+              </a:cxn>
+              <a:cxn ang="0">
+                <a:pos x="csX17" y="csY17"/>
+              </a:cxn>
+              <a:cxn ang="0">
+                <a:pos x="csX18" y="csY18"/>
+              </a:cxn>
+              <a:cxn ang="0">
+                <a:pos x="csX19" y="csY19"/>
+              </a:cxn>
+              <a:cxn ang="0">
+                <a:pos x="csX20" y="csY20"/>
+              </a:cxn>
+              <a:cxn ang="0">
+                <a:pos x="csX21" y="csY21"/>
+              </a:cxn>
+              <a:cxn ang="0">
+                <a:pos x="csX22" y="csY22"/>
+              </a:cxn>
+              <a:cxn ang="0">
+                <a:pos x="csX23" y="csY23"/>
+              </a:cxn>
+            </a:cxnLst>
+            <a:rect l="l" t="t" r="r" b="b"/>
+            <a:pathLst>
+              <a:path w="4658815" h="1213932" fill="none" extrusionOk="0">
+                <a:moveTo>
+                  <a:pt x="0" y="202326"/>
+                </a:moveTo>
+                <a:cubicBezTo>
+                  <a:pt x="-13865" y="118417"/>
+                  <a:pt x="86826" y="-4987"/>
+                  <a:pt x="202326" y="0"/>
+                </a:cubicBezTo>
+                <a:cubicBezTo>
+                  <a:pt x="461530" y="-6300"/>
+                  <a:pt x="508999" y="20240"/>
+                  <a:pt x="776638" y="0"/>
+                </a:cubicBezTo>
+                <a:cubicBezTo>
+                  <a:pt x="1044277" y="-20240"/>
+                  <a:pt x="1043875" y="3992"/>
+                  <a:pt x="1223325" y="0"/>
+                </a:cubicBezTo>
+                <a:cubicBezTo>
+                  <a:pt x="1402775" y="-3992"/>
+                  <a:pt x="1646824" y="1804"/>
+                  <a:pt x="1797637" y="0"/>
+                </a:cubicBezTo>
+                <a:cubicBezTo>
+                  <a:pt x="1948450" y="-1804"/>
+                  <a:pt x="2058582" y="8185"/>
+                  <a:pt x="2201783" y="0"/>
+                </a:cubicBezTo>
+                <a:cubicBezTo>
+                  <a:pt x="2344984" y="-8185"/>
+                  <a:pt x="2546989" y="67223"/>
+                  <a:pt x="2776095" y="0"/>
+                </a:cubicBezTo>
+                <a:cubicBezTo>
+                  <a:pt x="3005201" y="-67223"/>
+                  <a:pt x="3036691" y="4785"/>
+                  <a:pt x="3222782" y="0"/>
+                </a:cubicBezTo>
+                <a:cubicBezTo>
+                  <a:pt x="3408873" y="-4785"/>
+                  <a:pt x="3499934" y="35826"/>
+                  <a:pt x="3626927" y="0"/>
+                </a:cubicBezTo>
+                <a:cubicBezTo>
+                  <a:pt x="3753921" y="-35826"/>
+                  <a:pt x="4236949" y="27302"/>
+                  <a:pt x="4456489" y="0"/>
+                </a:cubicBezTo>
+                <a:cubicBezTo>
+                  <a:pt x="4562502" y="21437"/>
+                  <a:pt x="4685616" y="98271"/>
+                  <a:pt x="4658815" y="202326"/>
+                </a:cubicBezTo>
+                <a:cubicBezTo>
+                  <a:pt x="4699777" y="365515"/>
+                  <a:pt x="4655207" y="490933"/>
+                  <a:pt x="4658815" y="615059"/>
+                </a:cubicBezTo>
+                <a:cubicBezTo>
+                  <a:pt x="4662423" y="739185"/>
+                  <a:pt x="4635272" y="887276"/>
+                  <a:pt x="4658815" y="1011606"/>
+                </a:cubicBezTo>
+                <a:cubicBezTo>
+                  <a:pt x="4669788" y="1150168"/>
+                  <a:pt x="4587821" y="1233312"/>
+                  <a:pt x="4456489" y="1213932"/>
+                </a:cubicBezTo>
+                <a:cubicBezTo>
+                  <a:pt x="4299887" y="1239580"/>
+                  <a:pt x="4187456" y="1179398"/>
+                  <a:pt x="4052344" y="1213932"/>
+                </a:cubicBezTo>
+                <a:cubicBezTo>
+                  <a:pt x="3917233" y="1248466"/>
+                  <a:pt x="3661664" y="1199401"/>
+                  <a:pt x="3435490" y="1213932"/>
+                </a:cubicBezTo>
+                <a:cubicBezTo>
+                  <a:pt x="3209316" y="1228463"/>
+                  <a:pt x="3082040" y="1205725"/>
+                  <a:pt x="2903720" y="1213932"/>
+                </a:cubicBezTo>
+                <a:cubicBezTo>
+                  <a:pt x="2725400" y="1222139"/>
+                  <a:pt x="2587397" y="1145467"/>
+                  <a:pt x="2286866" y="1213932"/>
+                </a:cubicBezTo>
+                <a:cubicBezTo>
+                  <a:pt x="1986335" y="1282397"/>
+                  <a:pt x="1936315" y="1195658"/>
+                  <a:pt x="1712554" y="1213932"/>
+                </a:cubicBezTo>
+                <a:cubicBezTo>
+                  <a:pt x="1488793" y="1232206"/>
+                  <a:pt x="1435692" y="1196997"/>
+                  <a:pt x="1223325" y="1213932"/>
+                </a:cubicBezTo>
+                <a:cubicBezTo>
+                  <a:pt x="1010958" y="1230867"/>
+                  <a:pt x="612559" y="1189547"/>
+                  <a:pt x="202326" y="1213932"/>
+                </a:cubicBezTo>
+                <a:cubicBezTo>
+                  <a:pt x="90953" y="1230726"/>
+                  <a:pt x="13269" y="1111441"/>
+                  <a:pt x="0" y="1011606"/>
+                </a:cubicBezTo>
+                <a:cubicBezTo>
+                  <a:pt x="-45144" y="925982"/>
+                  <a:pt x="36711" y="708230"/>
+                  <a:pt x="0" y="606966"/>
+                </a:cubicBezTo>
+                <a:cubicBezTo>
+                  <a:pt x="-36711" y="505702"/>
+                  <a:pt x="11056" y="331283"/>
+                  <a:pt x="0" y="202326"/>
+                </a:cubicBezTo>
+                <a:close/>
+              </a:path>
+              <a:path w="4658815" h="1213932" stroke="0" extrusionOk="0">
+                <a:moveTo>
+                  <a:pt x="0" y="202326"/>
+                </a:moveTo>
+                <a:cubicBezTo>
+                  <a:pt x="-4482" y="87820"/>
+                  <a:pt x="67944" y="8497"/>
+                  <a:pt x="202326" y="0"/>
+                </a:cubicBezTo>
+                <a:cubicBezTo>
+                  <a:pt x="485467" y="-16537"/>
+                  <a:pt x="622590" y="33956"/>
+                  <a:pt x="819180" y="0"/>
+                </a:cubicBezTo>
+                <a:cubicBezTo>
+                  <a:pt x="1015770" y="-33956"/>
+                  <a:pt x="1101224" y="48252"/>
+                  <a:pt x="1308408" y="0"/>
+                </a:cubicBezTo>
+                <a:cubicBezTo>
+                  <a:pt x="1515592" y="-48252"/>
+                  <a:pt x="1635004" y="50099"/>
+                  <a:pt x="1755095" y="0"/>
+                </a:cubicBezTo>
+                <a:cubicBezTo>
+                  <a:pt x="1875186" y="-50099"/>
+                  <a:pt x="2191388" y="4252"/>
+                  <a:pt x="2329408" y="0"/>
+                </a:cubicBezTo>
+                <a:cubicBezTo>
+                  <a:pt x="2467428" y="-4252"/>
+                  <a:pt x="2666761" y="55587"/>
+                  <a:pt x="2818636" y="0"/>
+                </a:cubicBezTo>
+                <a:cubicBezTo>
+                  <a:pt x="2970511" y="-55587"/>
+                  <a:pt x="3287266" y="29637"/>
+                  <a:pt x="3435490" y="0"/>
+                </a:cubicBezTo>
+                <a:cubicBezTo>
+                  <a:pt x="3583714" y="-29637"/>
+                  <a:pt x="3683091" y="7055"/>
+                  <a:pt x="3882177" y="0"/>
+                </a:cubicBezTo>
+                <a:cubicBezTo>
+                  <a:pt x="4081263" y="-7055"/>
+                  <a:pt x="4263947" y="22576"/>
+                  <a:pt x="4456489" y="0"/>
+                </a:cubicBezTo>
+                <a:cubicBezTo>
+                  <a:pt x="4580725" y="3004"/>
+                  <a:pt x="4652930" y="89632"/>
+                  <a:pt x="4658815" y="202326"/>
+                </a:cubicBezTo>
+                <a:cubicBezTo>
+                  <a:pt x="4688865" y="325324"/>
+                  <a:pt x="4634746" y="457901"/>
+                  <a:pt x="4658815" y="606966"/>
+                </a:cubicBezTo>
+                <a:cubicBezTo>
+                  <a:pt x="4682884" y="756031"/>
+                  <a:pt x="4622469" y="844144"/>
+                  <a:pt x="4658815" y="1011606"/>
+                </a:cubicBezTo>
+                <a:cubicBezTo>
+                  <a:pt x="4670900" y="1138151"/>
+                  <a:pt x="4586142" y="1198250"/>
+                  <a:pt x="4456489" y="1213932"/>
+                </a:cubicBezTo>
+                <a:cubicBezTo>
+                  <a:pt x="4305302" y="1251813"/>
+                  <a:pt x="4166599" y="1175047"/>
+                  <a:pt x="3924719" y="1213932"/>
+                </a:cubicBezTo>
+                <a:cubicBezTo>
+                  <a:pt x="3682839" y="1252817"/>
+                  <a:pt x="3636809" y="1211537"/>
+                  <a:pt x="3392948" y="1213932"/>
+                </a:cubicBezTo>
+                <a:cubicBezTo>
+                  <a:pt x="3149087" y="1216327"/>
+                  <a:pt x="3019653" y="1187995"/>
+                  <a:pt x="2776095" y="1213932"/>
+                </a:cubicBezTo>
+                <a:cubicBezTo>
+                  <a:pt x="2532537" y="1239869"/>
+                  <a:pt x="2374460" y="1202954"/>
+                  <a:pt x="2244324" y="1213932"/>
+                </a:cubicBezTo>
+                <a:cubicBezTo>
+                  <a:pt x="2114188" y="1224910"/>
+                  <a:pt x="2039497" y="1172031"/>
+                  <a:pt x="1840179" y="1213932"/>
+                </a:cubicBezTo>
+                <a:cubicBezTo>
+                  <a:pt x="1640861" y="1255833"/>
+                  <a:pt x="1583331" y="1207787"/>
+                  <a:pt x="1393492" y="1213932"/>
+                </a:cubicBezTo>
+                <a:cubicBezTo>
+                  <a:pt x="1203653" y="1220077"/>
+                  <a:pt x="914863" y="1201446"/>
+                  <a:pt x="776638" y="1213932"/>
+                </a:cubicBezTo>
+                <a:cubicBezTo>
+                  <a:pt x="638413" y="1226418"/>
+                  <a:pt x="437328" y="1174067"/>
+                  <a:pt x="202326" y="1213932"/>
+                </a:cubicBezTo>
+                <a:cubicBezTo>
+                  <a:pt x="93009" y="1218734"/>
+                  <a:pt x="-19492" y="1133627"/>
+                  <a:pt x="0" y="1011606"/>
+                </a:cubicBezTo>
+                <a:cubicBezTo>
+                  <a:pt x="-34041" y="867494"/>
+                  <a:pt x="19408" y="757014"/>
+                  <a:pt x="0" y="598873"/>
+                </a:cubicBezTo>
+                <a:cubicBezTo>
+                  <a:pt x="-19408" y="440732"/>
+                  <a:pt x="27962" y="330545"/>
+                  <a:pt x="0" y="202326"/>
+                </a:cubicBezTo>
+                <a:close/>
+              </a:path>
+            </a:pathLst>
+          </a:custGeom>
+          <a:solidFill>
+            <a:schemeClr val="accent6">
+              <a:lumMod val="40000"/>
+              <a:lumOff val="60000"/>
+            </a:schemeClr>
+          </a:solidFill>
+          <a:ln w="25400">
+            <a:bevel/>
+            <a:extLst>
+              <a:ext uri="{C807C97D-BFC1-408E-A445-0C87EB9F89A2}">
+                <ask:lineSketchStyleProps xmlns:ask="http://schemas.microsoft.com/office/drawing/2018/sketchyshapes" sd="1219033472">
+                  <a:prstGeom prst="roundRect">
+                    <a:avLst/>
+                  </a:prstGeom>
+                  <ask:type>
+                    <ask:lineSketchScribble/>
+                  </ask:type>
+                </ask:lineSketchStyleProps>
+              </a:ext>
+            </a:extLst>
+          </a:ln>
+        </p:spPr>
+        <p:style>
+          <a:lnRef idx="2">
+            <a:schemeClr val="accent1">
+              <a:shade val="15000"/>
+            </a:schemeClr>
+          </a:lnRef>
+          <a:fillRef idx="1">
+            <a:schemeClr val="accent1"/>
+          </a:fillRef>
+          <a:effectRef idx="0">
+            <a:schemeClr val="accent1"/>
+          </a:effectRef>
+          <a:fontRef idx="minor">
+            <a:schemeClr val="lt1"/>
+          </a:fontRef>
+        </p:style>
+        <p:txBody>
+          <a:bodyPr rtlCol="0" anchor="ctr"/>
+          <a:lstStyle/>
+          <a:p>
+            <a:pPr algn="ctr"/>
+            <a:endParaRPr lang="en-US">
+              <a:latin typeface="Times New Roman" panose="02020603050405020304" pitchFamily="18" charset="0"/>
+              <a:cs typeface="Times New Roman" panose="02020603050405020304" pitchFamily="18" charset="0"/>
+            </a:endParaRPr>
+          </a:p>
+        </p:txBody>
+      </p:sp>
+      <p:sp>
+        <p:nvSpPr>
+          <p:cNvPr id="4" name="TextBox 3">
+            <a:extLst>
+              <a:ext uri="{FF2B5EF4-FFF2-40B4-BE49-F238E27FC236}">
+                <a16:creationId xmlns:a16="http://schemas.microsoft.com/office/drawing/2014/main" id="{055868C3-9E4D-4E95-B31C-7C057D383E7E}"/>
               </a:ext>
             </a:extLst>
           </p:cNvPr>
@@ -11759,8 +12797,8 @@
         </p:nvSpPr>
         <p:spPr>
           <a:xfrm>
-            <a:off x="772906" y="405121"/>
-            <a:ext cx="6591721" cy="830997"/>
+            <a:off x="6615108" y="2220094"/>
+            <a:ext cx="2830628" cy="1015663"/>
           </a:xfrm>
           <a:prstGeom prst="rect">
             <a:avLst/>
@@ -11773,49 +12811,6 @@
           </a:bodyPr>
           <a:lstStyle/>
           <a:p>
-            <a:r>
-              <a:rPr lang="en-US" sz="4800" dirty="0">
-                <a:latin typeface="Times New Roman" panose="02020603050405020304" pitchFamily="18" charset="0"/>
-                <a:cs typeface="Times New Roman" panose="02020603050405020304" pitchFamily="18" charset="0"/>
-              </a:rPr>
-              <a:t>Thesis: Latency Fairness</a:t>
-            </a:r>
-            <a:endParaRPr lang="en-US" sz="3000" dirty="0">
-              <a:latin typeface="Times New Roman" panose="02020603050405020304" pitchFamily="18" charset="0"/>
-              <a:cs typeface="Times New Roman" panose="02020603050405020304" pitchFamily="18" charset="0"/>
-            </a:endParaRPr>
-          </a:p>
-        </p:txBody>
-      </p:sp>
-      <p:sp>
-        <p:nvSpPr>
-          <p:cNvPr id="4" name="TextBox 3">
-            <a:extLst>
-              <a:ext uri="{FF2B5EF4-FFF2-40B4-BE49-F238E27FC236}">
-                <a16:creationId xmlns:a16="http://schemas.microsoft.com/office/drawing/2014/main" id="{88769B4D-8DE9-1F9A-62CE-60D365BC0A13}"/>
-              </a:ext>
-            </a:extLst>
-          </p:cNvPr>
-          <p:cNvSpPr txBox="1"/>
-          <p:nvPr/>
-        </p:nvSpPr>
-        <p:spPr>
-          <a:xfrm>
-            <a:off x="4229584" y="3089189"/>
-            <a:ext cx="2830628" cy="1015663"/>
-          </a:xfrm>
-          <a:prstGeom prst="rect">
-            <a:avLst/>
-          </a:prstGeom>
-          <a:noFill/>
-        </p:spPr>
-        <p:txBody>
-          <a:bodyPr wrap="square" rtlCol="0">
-            <a:spAutoFit/>
-          </a:bodyPr>
-          <a:lstStyle/>
-          <a:p>
-            <a:pPr algn="ctr"/>
             <a:r>
               <a:rPr lang="en-US" sz="3000" dirty="0">
                 <a:solidFill>
@@ -11850,10 +12845,10 @@
       </p:sp>
       <p:sp>
         <p:nvSpPr>
-          <p:cNvPr id="10" name="TextBox 9">
-            <a:extLst>
-              <a:ext uri="{FF2B5EF4-FFF2-40B4-BE49-F238E27FC236}">
-                <a16:creationId xmlns:a16="http://schemas.microsoft.com/office/drawing/2014/main" id="{821B6EFD-0B57-09ED-798A-1B738DB4ADE8}"/>
+          <p:cNvPr id="6" name="TextBox 5">
+            <a:extLst>
+              <a:ext uri="{FF2B5EF4-FFF2-40B4-BE49-F238E27FC236}">
+                <a16:creationId xmlns:a16="http://schemas.microsoft.com/office/drawing/2014/main" id="{9DC10634-893E-0AE8-543B-239A3FDD3AC4}"/>
               </a:ext>
             </a:extLst>
           </p:cNvPr>
@@ -11862,8 +12857,8 @@
         </p:nvSpPr>
         <p:spPr>
           <a:xfrm>
-            <a:off x="933723" y="3095367"/>
-            <a:ext cx="2830628" cy="1015663"/>
+            <a:off x="6615107" y="3218936"/>
+            <a:ext cx="2587489" cy="1477328"/>
           </a:xfrm>
           <a:prstGeom prst="rect">
             <a:avLst/>
@@ -11876,7 +12871,135 @@
           </a:bodyPr>
           <a:lstStyle/>
           <a:p>
-            <a:pPr algn="ctr"/>
+            <a:r>
+              <a:rPr lang="en-US" sz="3000" dirty="0">
+                <a:latin typeface="Times New Roman" panose="02020603050405020304" pitchFamily="18" charset="0"/>
+                <a:cs typeface="Times New Roman" panose="02020603050405020304" pitchFamily="18" charset="0"/>
+              </a:rPr>
+              <a:t>Unicasts </a:t>
+            </a:r>
+            <a:br>
+              <a:rPr lang="en-US" sz="3000" dirty="0">
+                <a:latin typeface="Times New Roman" panose="02020603050405020304" pitchFamily="18" charset="0"/>
+                <a:cs typeface="Times New Roman" panose="02020603050405020304" pitchFamily="18" charset="0"/>
+              </a:rPr>
+            </a:br>
+            <a:r>
+              <a:rPr lang="en-US" sz="3000" dirty="0">
+                <a:latin typeface="Times New Roman" panose="02020603050405020304" pitchFamily="18" charset="0"/>
+                <a:cs typeface="Times New Roman" panose="02020603050405020304" pitchFamily="18" charset="0"/>
+              </a:rPr>
+              <a:t>from machines to server</a:t>
+            </a:r>
+          </a:p>
+        </p:txBody>
+      </p:sp>
+      <p:sp>
+        <p:nvSpPr>
+          <p:cNvPr id="8" name="TextBox 7">
+            <a:extLst>
+              <a:ext uri="{FF2B5EF4-FFF2-40B4-BE49-F238E27FC236}">
+                <a16:creationId xmlns:a16="http://schemas.microsoft.com/office/drawing/2014/main" id="{F2D0FD17-F6A8-BAD0-05C6-9D749A7C6CF3}"/>
+              </a:ext>
+            </a:extLst>
+          </p:cNvPr>
+          <p:cNvSpPr txBox="1"/>
+          <p:nvPr/>
+        </p:nvSpPr>
+        <p:spPr>
+          <a:xfrm>
+            <a:off x="558943" y="4755944"/>
+            <a:ext cx="4247536" cy="1015663"/>
+          </a:xfrm>
+          <a:prstGeom prst="rect">
+            <a:avLst/>
+          </a:prstGeom>
+          <a:noFill/>
+        </p:spPr>
+        <p:txBody>
+          <a:bodyPr wrap="square" rtlCol="0">
+            <a:spAutoFit/>
+          </a:bodyPr>
+          <a:lstStyle/>
+          <a:p>
+            <a:pPr algn="r"/>
+            <a:r>
+              <a:rPr lang="en-US" sz="3000" dirty="0">
+                <a:latin typeface="Times New Roman" panose="02020603050405020304" pitchFamily="18" charset="0"/>
+                <a:cs typeface="Times New Roman" panose="02020603050405020304" pitchFamily="18" charset="0"/>
+              </a:rPr>
+              <a:t>e.g., market data multicast in financial exchanges</a:t>
+            </a:r>
+          </a:p>
+        </p:txBody>
+      </p:sp>
+      <p:sp>
+        <p:nvSpPr>
+          <p:cNvPr id="9" name="TextBox 8">
+            <a:extLst>
+              <a:ext uri="{FF2B5EF4-FFF2-40B4-BE49-F238E27FC236}">
+                <a16:creationId xmlns:a16="http://schemas.microsoft.com/office/drawing/2014/main" id="{08132746-6200-E816-8E25-DA0B9F3DE748}"/>
+              </a:ext>
+            </a:extLst>
+          </p:cNvPr>
+          <p:cNvSpPr txBox="1"/>
+          <p:nvPr/>
+        </p:nvSpPr>
+        <p:spPr>
+          <a:xfrm>
+            <a:off x="6567336" y="4755944"/>
+            <a:ext cx="5065721" cy="1015663"/>
+          </a:xfrm>
+          <a:prstGeom prst="rect">
+            <a:avLst/>
+          </a:prstGeom>
+          <a:noFill/>
+        </p:spPr>
+        <p:txBody>
+          <a:bodyPr wrap="square" rtlCol="0">
+            <a:spAutoFit/>
+          </a:bodyPr>
+          <a:lstStyle/>
+          <a:p>
+            <a:r>
+              <a:rPr lang="en-US" sz="3000" dirty="0">
+                <a:latin typeface="Times New Roman" panose="02020603050405020304" pitchFamily="18" charset="0"/>
+                <a:cs typeface="Times New Roman" panose="02020603050405020304" pitchFamily="18" charset="0"/>
+              </a:rPr>
+              <a:t>e.g., traders submitting orders to a financial exchange server</a:t>
+            </a:r>
+          </a:p>
+        </p:txBody>
+      </p:sp>
+      <p:sp>
+        <p:nvSpPr>
+          <p:cNvPr id="10" name="TextBox 9">
+            <a:extLst>
+              <a:ext uri="{FF2B5EF4-FFF2-40B4-BE49-F238E27FC236}">
+                <a16:creationId xmlns:a16="http://schemas.microsoft.com/office/drawing/2014/main" id="{99E1D45C-C17F-4356-52E4-D7CF03618260}"/>
+              </a:ext>
+            </a:extLst>
+          </p:cNvPr>
+          <p:cNvSpPr txBox="1"/>
+          <p:nvPr/>
+        </p:nvSpPr>
+        <p:spPr>
+          <a:xfrm>
+            <a:off x="2124432" y="2220094"/>
+            <a:ext cx="2830628" cy="1015663"/>
+          </a:xfrm>
+          <a:prstGeom prst="rect">
+            <a:avLst/>
+          </a:prstGeom>
+          <a:noFill/>
+        </p:spPr>
+        <p:txBody>
+          <a:bodyPr wrap="square" rtlCol="0">
+            <a:spAutoFit/>
+          </a:bodyPr>
+          <a:lstStyle/>
+          <a:p>
+            <a:pPr algn="r"/>
             <a:r>
               <a:rPr lang="en-US" sz="3000" dirty="0">
                 <a:solidFill>
@@ -11909,10 +13032,806 @@
           </a:p>
         </p:txBody>
       </p:sp>
+      <p:sp>
+        <p:nvSpPr>
+          <p:cNvPr id="11" name="TextBox 10">
+            <a:extLst>
+              <a:ext uri="{FF2B5EF4-FFF2-40B4-BE49-F238E27FC236}">
+                <a16:creationId xmlns:a16="http://schemas.microsoft.com/office/drawing/2014/main" id="{23F4BA12-DC7D-61A3-6A34-9391D46B4402}"/>
+              </a:ext>
+            </a:extLst>
+          </p:cNvPr>
+          <p:cNvSpPr txBox="1"/>
+          <p:nvPr/>
+        </p:nvSpPr>
+        <p:spPr>
+          <a:xfrm>
+            <a:off x="2622846" y="3235757"/>
+            <a:ext cx="2249561" cy="1477328"/>
+          </a:xfrm>
+          <a:prstGeom prst="rect">
+            <a:avLst/>
+          </a:prstGeom>
+          <a:noFill/>
+        </p:spPr>
+        <p:txBody>
+          <a:bodyPr wrap="square" rtlCol="0">
+            <a:spAutoFit/>
+          </a:bodyPr>
+          <a:lstStyle/>
+          <a:p>
+            <a:pPr algn="r"/>
+            <a:r>
+              <a:rPr lang="en-US" sz="3000" dirty="0">
+                <a:latin typeface="Times New Roman" panose="02020603050405020304" pitchFamily="18" charset="0"/>
+                <a:cs typeface="Times New Roman" panose="02020603050405020304" pitchFamily="18" charset="0"/>
+              </a:rPr>
+              <a:t>Multicast from server to machines</a:t>
+            </a:r>
+          </a:p>
+        </p:txBody>
+      </p:sp>
+      <p:sp>
+        <p:nvSpPr>
+          <p:cNvPr id="13" name="Rectangle 12">
+            <a:extLst>
+              <a:ext uri="{FF2B5EF4-FFF2-40B4-BE49-F238E27FC236}">
+                <a16:creationId xmlns:a16="http://schemas.microsoft.com/office/drawing/2014/main" id="{B92399B0-7DAC-F651-F7E0-C2093D94BF3A}"/>
+              </a:ext>
+            </a:extLst>
+          </p:cNvPr>
+          <p:cNvSpPr/>
+          <p:nvPr/>
+        </p:nvSpPr>
+        <p:spPr>
+          <a:xfrm>
+            <a:off x="5733022" y="2774092"/>
+            <a:ext cx="45719" cy="2492991"/>
+          </a:xfrm>
+          <a:custGeom>
+            <a:avLst/>
+            <a:gdLst>
+              <a:gd name="csX0" fmla="*/ 0 w 45719"/>
+              <a:gd name="csY0" fmla="*/ 0 h 2492991"/>
+              <a:gd name="csX1" fmla="*/ 45719 w 45719"/>
+              <a:gd name="csY1" fmla="*/ 0 h 2492991"/>
+              <a:gd name="csX2" fmla="*/ 45719 w 45719"/>
+              <a:gd name="csY2" fmla="*/ 498598 h 2492991"/>
+              <a:gd name="csX3" fmla="*/ 45719 w 45719"/>
+              <a:gd name="csY3" fmla="*/ 1047056 h 2492991"/>
+              <a:gd name="csX4" fmla="*/ 45719 w 45719"/>
+              <a:gd name="csY4" fmla="*/ 1545654 h 2492991"/>
+              <a:gd name="csX5" fmla="*/ 45719 w 45719"/>
+              <a:gd name="csY5" fmla="*/ 1969463 h 2492991"/>
+              <a:gd name="csX6" fmla="*/ 45719 w 45719"/>
+              <a:gd name="csY6" fmla="*/ 2492991 h 2492991"/>
+              <a:gd name="csX7" fmla="*/ 0 w 45719"/>
+              <a:gd name="csY7" fmla="*/ 2492991 h 2492991"/>
+              <a:gd name="csX8" fmla="*/ 0 w 45719"/>
+              <a:gd name="csY8" fmla="*/ 1944533 h 2492991"/>
+              <a:gd name="csX9" fmla="*/ 0 w 45719"/>
+              <a:gd name="csY9" fmla="*/ 1421005 h 2492991"/>
+              <a:gd name="csX10" fmla="*/ 0 w 45719"/>
+              <a:gd name="csY10" fmla="*/ 922407 h 2492991"/>
+              <a:gd name="csX11" fmla="*/ 0 w 45719"/>
+              <a:gd name="csY11" fmla="*/ 0 h 2492991"/>
+            </a:gdLst>
+            <a:ahLst/>
+            <a:cxnLst>
+              <a:cxn ang="0">
+                <a:pos x="csX0" y="csY0"/>
+              </a:cxn>
+              <a:cxn ang="0">
+                <a:pos x="csX1" y="csY1"/>
+              </a:cxn>
+              <a:cxn ang="0">
+                <a:pos x="csX2" y="csY2"/>
+              </a:cxn>
+              <a:cxn ang="0">
+                <a:pos x="csX3" y="csY3"/>
+              </a:cxn>
+              <a:cxn ang="0">
+                <a:pos x="csX4" y="csY4"/>
+              </a:cxn>
+              <a:cxn ang="0">
+                <a:pos x="csX5" y="csY5"/>
+              </a:cxn>
+              <a:cxn ang="0">
+                <a:pos x="csX6" y="csY6"/>
+              </a:cxn>
+              <a:cxn ang="0">
+                <a:pos x="csX7" y="csY7"/>
+              </a:cxn>
+              <a:cxn ang="0">
+                <a:pos x="csX8" y="csY8"/>
+              </a:cxn>
+              <a:cxn ang="0">
+                <a:pos x="csX9" y="csY9"/>
+              </a:cxn>
+              <a:cxn ang="0">
+                <a:pos x="csX10" y="csY10"/>
+              </a:cxn>
+              <a:cxn ang="0">
+                <a:pos x="csX11" y="csY11"/>
+              </a:cxn>
+            </a:cxnLst>
+            <a:rect l="l" t="t" r="r" b="b"/>
+            <a:pathLst>
+              <a:path w="45719" h="2492991" fill="none" extrusionOk="0">
+                <a:moveTo>
+                  <a:pt x="0" y="0"/>
+                </a:moveTo>
+                <a:cubicBezTo>
+                  <a:pt x="15466" y="-3108"/>
+                  <a:pt x="29505" y="2787"/>
+                  <a:pt x="45719" y="0"/>
+                </a:cubicBezTo>
+                <a:cubicBezTo>
+                  <a:pt x="96714" y="244462"/>
+                  <a:pt x="38492" y="292531"/>
+                  <a:pt x="45719" y="498598"/>
+                </a:cubicBezTo>
+                <a:cubicBezTo>
+                  <a:pt x="52946" y="704665"/>
+                  <a:pt x="41215" y="773940"/>
+                  <a:pt x="45719" y="1047056"/>
+                </a:cubicBezTo>
+                <a:cubicBezTo>
+                  <a:pt x="50223" y="1320172"/>
+                  <a:pt x="20442" y="1409127"/>
+                  <a:pt x="45719" y="1545654"/>
+                </a:cubicBezTo>
+                <a:cubicBezTo>
+                  <a:pt x="70996" y="1682181"/>
+                  <a:pt x="37286" y="1837495"/>
+                  <a:pt x="45719" y="1969463"/>
+                </a:cubicBezTo>
+                <a:cubicBezTo>
+                  <a:pt x="54152" y="2101431"/>
+                  <a:pt x="20701" y="2253374"/>
+                  <a:pt x="45719" y="2492991"/>
+                </a:cubicBezTo>
+                <a:cubicBezTo>
+                  <a:pt x="34208" y="2496004"/>
+                  <a:pt x="9588" y="2489496"/>
+                  <a:pt x="0" y="2492991"/>
+                </a:cubicBezTo>
+                <a:cubicBezTo>
+                  <a:pt x="-9781" y="2257546"/>
+                  <a:pt x="17963" y="2141047"/>
+                  <a:pt x="0" y="1944533"/>
+                </a:cubicBezTo>
+                <a:cubicBezTo>
+                  <a:pt x="-17963" y="1748019"/>
+                  <a:pt x="28336" y="1642462"/>
+                  <a:pt x="0" y="1421005"/>
+                </a:cubicBezTo>
+                <a:cubicBezTo>
+                  <a:pt x="-28336" y="1199548"/>
+                  <a:pt x="13584" y="1089980"/>
+                  <a:pt x="0" y="922407"/>
+                </a:cubicBezTo>
+                <a:cubicBezTo>
+                  <a:pt x="-13584" y="754834"/>
+                  <a:pt x="77438" y="239728"/>
+                  <a:pt x="0" y="0"/>
+                </a:cubicBezTo>
+                <a:close/>
+              </a:path>
+              <a:path w="45719" h="2492991" stroke="0" extrusionOk="0">
+                <a:moveTo>
+                  <a:pt x="0" y="0"/>
+                </a:moveTo>
+                <a:cubicBezTo>
+                  <a:pt x="18173" y="-1477"/>
+                  <a:pt x="31455" y="3772"/>
+                  <a:pt x="45719" y="0"/>
+                </a:cubicBezTo>
+                <a:cubicBezTo>
+                  <a:pt x="49078" y="113210"/>
+                  <a:pt x="23101" y="288473"/>
+                  <a:pt x="45719" y="423808"/>
+                </a:cubicBezTo>
+                <a:cubicBezTo>
+                  <a:pt x="68337" y="559143"/>
+                  <a:pt x="-15560" y="770450"/>
+                  <a:pt x="45719" y="972266"/>
+                </a:cubicBezTo>
+                <a:cubicBezTo>
+                  <a:pt x="106998" y="1174082"/>
+                  <a:pt x="-1609" y="1235521"/>
+                  <a:pt x="45719" y="1470865"/>
+                </a:cubicBezTo>
+                <a:cubicBezTo>
+                  <a:pt x="93047" y="1706209"/>
+                  <a:pt x="30494" y="1816253"/>
+                  <a:pt x="45719" y="1919603"/>
+                </a:cubicBezTo>
+                <a:cubicBezTo>
+                  <a:pt x="60944" y="2022953"/>
+                  <a:pt x="28474" y="2341608"/>
+                  <a:pt x="45719" y="2492991"/>
+                </a:cubicBezTo>
+                <a:cubicBezTo>
+                  <a:pt x="22941" y="2494258"/>
+                  <a:pt x="12902" y="2490132"/>
+                  <a:pt x="0" y="2492991"/>
+                </a:cubicBezTo>
+                <a:cubicBezTo>
+                  <a:pt x="-59460" y="2250702"/>
+                  <a:pt x="24665" y="2128448"/>
+                  <a:pt x="0" y="1944533"/>
+                </a:cubicBezTo>
+                <a:cubicBezTo>
+                  <a:pt x="-24665" y="1760618"/>
+                  <a:pt x="21622" y="1582387"/>
+                  <a:pt x="0" y="1396075"/>
+                </a:cubicBezTo>
+                <a:cubicBezTo>
+                  <a:pt x="-21622" y="1209763"/>
+                  <a:pt x="53927" y="1082433"/>
+                  <a:pt x="0" y="922407"/>
+                </a:cubicBezTo>
+                <a:cubicBezTo>
+                  <a:pt x="-53927" y="762381"/>
+                  <a:pt x="37230" y="594554"/>
+                  <a:pt x="0" y="448738"/>
+                </a:cubicBezTo>
+                <a:cubicBezTo>
+                  <a:pt x="-37230" y="302922"/>
+                  <a:pt x="25725" y="182915"/>
+                  <a:pt x="0" y="0"/>
+                </a:cubicBezTo>
+                <a:close/>
+              </a:path>
+            </a:pathLst>
+          </a:custGeom>
+          <a:solidFill>
+            <a:srgbClr val="7030A0"/>
+          </a:solidFill>
+          <a:ln>
+            <a:solidFill>
+              <a:srgbClr val="7030A0"/>
+            </a:solidFill>
+            <a:extLst>
+              <a:ext uri="{C807C97D-BFC1-408E-A445-0C87EB9F89A2}">
+                <ask:lineSketchStyleProps xmlns:ask="http://schemas.microsoft.com/office/drawing/2018/sketchyshapes" sd="1219033472">
+                  <a:prstGeom prst="rect">
+                    <a:avLst/>
+                  </a:prstGeom>
+                  <ask:type>
+                    <ask:lineSketchScribble/>
+                  </ask:type>
+                </ask:lineSketchStyleProps>
+              </a:ext>
+            </a:extLst>
+          </a:ln>
+        </p:spPr>
+        <p:style>
+          <a:lnRef idx="2">
+            <a:schemeClr val="accent1">
+              <a:shade val="15000"/>
+            </a:schemeClr>
+          </a:lnRef>
+          <a:fillRef idx="1">
+            <a:schemeClr val="accent1"/>
+          </a:fillRef>
+          <a:effectRef idx="0">
+            <a:schemeClr val="accent1"/>
+          </a:effectRef>
+          <a:fontRef idx="minor">
+            <a:schemeClr val="lt1"/>
+          </a:fontRef>
+        </p:style>
+        <p:txBody>
+          <a:bodyPr rtlCol="0" anchor="ctr"/>
+          <a:lstStyle/>
+          <a:p>
+            <a:pPr algn="ctr"/>
+            <a:endParaRPr lang="en-US">
+              <a:latin typeface="Times New Roman" panose="02020603050405020304" pitchFamily="18" charset="0"/>
+              <a:cs typeface="Times New Roman" panose="02020603050405020304" pitchFamily="18" charset="0"/>
+            </a:endParaRPr>
+          </a:p>
+        </p:txBody>
+      </p:sp>
+      <p:sp>
+        <p:nvSpPr>
+          <p:cNvPr id="7" name="Rounded Rectangle 6">
+            <a:extLst>
+              <a:ext uri="{FF2B5EF4-FFF2-40B4-BE49-F238E27FC236}">
+                <a16:creationId xmlns:a16="http://schemas.microsoft.com/office/drawing/2014/main" id="{124AF337-F26F-C290-A807-EF1EC23C569F}"/>
+              </a:ext>
+            </a:extLst>
+          </p:cNvPr>
+          <p:cNvSpPr/>
+          <p:nvPr/>
+        </p:nvSpPr>
+        <p:spPr>
+          <a:xfrm>
+            <a:off x="3155766" y="5757425"/>
+            <a:ext cx="5425726" cy="695454"/>
+          </a:xfrm>
+          <a:prstGeom prst="roundRect">
+            <a:avLst/>
+          </a:prstGeom>
+          <a:solidFill>
+            <a:srgbClr val="FF0000"/>
+          </a:solidFill>
+          <a:ln>
+            <a:noFill/>
+          </a:ln>
+        </p:spPr>
+        <p:style>
+          <a:lnRef idx="2">
+            <a:schemeClr val="accent1">
+              <a:shade val="15000"/>
+            </a:schemeClr>
+          </a:lnRef>
+          <a:fillRef idx="1">
+            <a:schemeClr val="accent1"/>
+          </a:fillRef>
+          <a:effectRef idx="0">
+            <a:schemeClr val="accent1"/>
+          </a:effectRef>
+          <a:fontRef idx="minor">
+            <a:schemeClr val="lt1"/>
+          </a:fontRef>
+        </p:style>
+        <p:txBody>
+          <a:bodyPr rtlCol="0" anchor="ctr"/>
+          <a:lstStyle/>
+          <a:p>
+            <a:pPr algn="ctr"/>
+            <a:r>
+              <a:rPr lang="en-US" sz="2400" dirty="0">
+                <a:latin typeface="Times New Roman" panose="02020603050405020304" pitchFamily="18" charset="0"/>
+                <a:cs typeface="Times New Roman" panose="02020603050405020304" pitchFamily="18" charset="0"/>
+              </a:rPr>
+              <a:t>Specialized Infrastructure used by on-premises financial exchanges</a:t>
+            </a:r>
+          </a:p>
+        </p:txBody>
+      </p:sp>
+      <p:sp>
+        <p:nvSpPr>
+          <p:cNvPr id="14" name="Rounded Rectangle 13">
+            <a:extLst>
+              <a:ext uri="{FF2B5EF4-FFF2-40B4-BE49-F238E27FC236}">
+                <a16:creationId xmlns:a16="http://schemas.microsoft.com/office/drawing/2014/main" id="{C3AC7196-B58F-8FE9-5358-E4FCB44ECA06}"/>
+              </a:ext>
+            </a:extLst>
+          </p:cNvPr>
+          <p:cNvSpPr/>
+          <p:nvPr/>
+        </p:nvSpPr>
+        <p:spPr>
+          <a:xfrm>
+            <a:off x="4741097" y="405121"/>
+            <a:ext cx="6677997" cy="1477327"/>
+          </a:xfrm>
+          <a:prstGeom prst="roundRect">
+            <a:avLst/>
+          </a:prstGeom>
+          <a:solidFill>
+            <a:schemeClr val="accent6">
+              <a:lumMod val="60000"/>
+              <a:lumOff val="40000"/>
+            </a:schemeClr>
+          </a:solidFill>
+          <a:ln>
+            <a:noFill/>
+          </a:ln>
+        </p:spPr>
+        <p:style>
+          <a:lnRef idx="2">
+            <a:schemeClr val="accent1">
+              <a:shade val="15000"/>
+            </a:schemeClr>
+          </a:lnRef>
+          <a:fillRef idx="1">
+            <a:schemeClr val="accent1"/>
+          </a:fillRef>
+          <a:effectRef idx="0">
+            <a:schemeClr val="accent1"/>
+          </a:effectRef>
+          <a:fontRef idx="minor">
+            <a:schemeClr val="lt1"/>
+          </a:fontRef>
+        </p:style>
+        <p:txBody>
+          <a:bodyPr rtlCol="0" anchor="ctr"/>
+          <a:lstStyle/>
+          <a:p>
+            <a:pPr algn="ctr"/>
+            <a:r>
+              <a:rPr lang="en-US" sz="4000" dirty="0">
+                <a:solidFill>
+                  <a:schemeClr val="tx1"/>
+                </a:solidFill>
+                <a:latin typeface="Times New Roman" panose="02020603050405020304" pitchFamily="18" charset="0"/>
+                <a:cs typeface="Times New Roman" panose="02020603050405020304" pitchFamily="18" charset="0"/>
+              </a:rPr>
+              <a:t>Commodity Networking Infrastructure</a:t>
+            </a:r>
+          </a:p>
+        </p:txBody>
+      </p:sp>
+      <p:sp>
+        <p:nvSpPr>
+          <p:cNvPr id="19" name="Up Arrow 18">
+            <a:extLst>
+              <a:ext uri="{FF2B5EF4-FFF2-40B4-BE49-F238E27FC236}">
+                <a16:creationId xmlns:a16="http://schemas.microsoft.com/office/drawing/2014/main" id="{376DD3FE-B035-98E4-7546-7AF67D36A2FA}"/>
+              </a:ext>
+            </a:extLst>
+          </p:cNvPr>
+          <p:cNvSpPr/>
+          <p:nvPr/>
+        </p:nvSpPr>
+        <p:spPr>
+          <a:xfrm rot="1624721">
+            <a:off x="5546592" y="1978943"/>
+            <a:ext cx="644072" cy="3681988"/>
+          </a:xfrm>
+          <a:custGeom>
+            <a:avLst/>
+            <a:gdLst>
+              <a:gd name="csX0" fmla="*/ 0 w 644072"/>
+              <a:gd name="csY0" fmla="*/ 608700 h 3681988"/>
+              <a:gd name="csX1" fmla="*/ 157798 w 644072"/>
+              <a:gd name="csY1" fmla="*/ 310437 h 3681988"/>
+              <a:gd name="csX2" fmla="*/ 322036 w 644072"/>
+              <a:gd name="csY2" fmla="*/ 0 h 3681988"/>
+              <a:gd name="csX3" fmla="*/ 486274 w 644072"/>
+              <a:gd name="csY3" fmla="*/ 310437 h 3681988"/>
+              <a:gd name="csX4" fmla="*/ 644072 w 644072"/>
+              <a:gd name="csY4" fmla="*/ 608700 h 3681988"/>
+              <a:gd name="csX5" fmla="*/ 483054 w 644072"/>
+              <a:gd name="csY5" fmla="*/ 608700 h 3681988"/>
+              <a:gd name="csX6" fmla="*/ 483054 w 644072"/>
+              <a:gd name="csY6" fmla="*/ 1059449 h 3681988"/>
+              <a:gd name="csX7" fmla="*/ 483054 w 644072"/>
+              <a:gd name="csY7" fmla="*/ 1540931 h 3681988"/>
+              <a:gd name="csX8" fmla="*/ 483054 w 644072"/>
+              <a:gd name="csY8" fmla="*/ 2114611 h 3681988"/>
+              <a:gd name="csX9" fmla="*/ 483054 w 644072"/>
+              <a:gd name="csY9" fmla="*/ 2626826 h 3681988"/>
+              <a:gd name="csX10" fmla="*/ 483054 w 644072"/>
+              <a:gd name="csY10" fmla="*/ 3169773 h 3681988"/>
+              <a:gd name="csX11" fmla="*/ 483054 w 644072"/>
+              <a:gd name="csY11" fmla="*/ 3681988 h 3681988"/>
+              <a:gd name="csX12" fmla="*/ 161018 w 644072"/>
+              <a:gd name="csY12" fmla="*/ 3681988 h 3681988"/>
+              <a:gd name="csX13" fmla="*/ 161018 w 644072"/>
+              <a:gd name="csY13" fmla="*/ 3139040 h 3681988"/>
+              <a:gd name="csX14" fmla="*/ 161018 w 644072"/>
+              <a:gd name="csY14" fmla="*/ 2688292 h 3681988"/>
+              <a:gd name="csX15" fmla="*/ 161018 w 644072"/>
+              <a:gd name="csY15" fmla="*/ 2268276 h 3681988"/>
+              <a:gd name="csX16" fmla="*/ 161018 w 644072"/>
+              <a:gd name="csY16" fmla="*/ 1848259 h 3681988"/>
+              <a:gd name="csX17" fmla="*/ 161018 w 644072"/>
+              <a:gd name="csY17" fmla="*/ 1305312 h 3681988"/>
+              <a:gd name="csX18" fmla="*/ 161018 w 644072"/>
+              <a:gd name="csY18" fmla="*/ 608700 h 3681988"/>
+              <a:gd name="csX19" fmla="*/ 0 w 644072"/>
+              <a:gd name="csY19" fmla="*/ 608700 h 3681988"/>
+            </a:gdLst>
+            <a:ahLst/>
+            <a:cxnLst>
+              <a:cxn ang="0">
+                <a:pos x="csX0" y="csY0"/>
+              </a:cxn>
+              <a:cxn ang="0">
+                <a:pos x="csX1" y="csY1"/>
+              </a:cxn>
+              <a:cxn ang="0">
+                <a:pos x="csX2" y="csY2"/>
+              </a:cxn>
+              <a:cxn ang="0">
+                <a:pos x="csX3" y="csY3"/>
+              </a:cxn>
+              <a:cxn ang="0">
+                <a:pos x="csX4" y="csY4"/>
+              </a:cxn>
+              <a:cxn ang="0">
+                <a:pos x="csX5" y="csY5"/>
+              </a:cxn>
+              <a:cxn ang="0">
+                <a:pos x="csX6" y="csY6"/>
+              </a:cxn>
+              <a:cxn ang="0">
+                <a:pos x="csX7" y="csY7"/>
+              </a:cxn>
+              <a:cxn ang="0">
+                <a:pos x="csX8" y="csY8"/>
+              </a:cxn>
+              <a:cxn ang="0">
+                <a:pos x="csX9" y="csY9"/>
+              </a:cxn>
+              <a:cxn ang="0">
+                <a:pos x="csX10" y="csY10"/>
+              </a:cxn>
+              <a:cxn ang="0">
+                <a:pos x="csX11" y="csY11"/>
+              </a:cxn>
+              <a:cxn ang="0">
+                <a:pos x="csX12" y="csY12"/>
+              </a:cxn>
+              <a:cxn ang="0">
+                <a:pos x="csX13" y="csY13"/>
+              </a:cxn>
+              <a:cxn ang="0">
+                <a:pos x="csX14" y="csY14"/>
+              </a:cxn>
+              <a:cxn ang="0">
+                <a:pos x="csX15" y="csY15"/>
+              </a:cxn>
+              <a:cxn ang="0">
+                <a:pos x="csX16" y="csY16"/>
+              </a:cxn>
+              <a:cxn ang="0">
+                <a:pos x="csX17" y="csY17"/>
+              </a:cxn>
+              <a:cxn ang="0">
+                <a:pos x="csX18" y="csY18"/>
+              </a:cxn>
+              <a:cxn ang="0">
+                <a:pos x="csX19" y="csY19"/>
+              </a:cxn>
+            </a:cxnLst>
+            <a:rect l="l" t="t" r="r" b="b"/>
+            <a:pathLst>
+              <a:path w="644072" h="3681988" fill="none" extrusionOk="0">
+                <a:moveTo>
+                  <a:pt x="0" y="608700"/>
+                </a:moveTo>
+                <a:cubicBezTo>
+                  <a:pt x="39281" y="527294"/>
+                  <a:pt x="116321" y="436673"/>
+                  <a:pt x="157798" y="310437"/>
+                </a:cubicBezTo>
+                <a:cubicBezTo>
+                  <a:pt x="199275" y="184201"/>
+                  <a:pt x="288738" y="88404"/>
+                  <a:pt x="322036" y="0"/>
+                </a:cubicBezTo>
+                <a:cubicBezTo>
+                  <a:pt x="413927" y="144486"/>
+                  <a:pt x="412813" y="245340"/>
+                  <a:pt x="486274" y="310437"/>
+                </a:cubicBezTo>
+                <a:cubicBezTo>
+                  <a:pt x="559735" y="375534"/>
+                  <a:pt x="590978" y="529753"/>
+                  <a:pt x="644072" y="608700"/>
+                </a:cubicBezTo>
+                <a:cubicBezTo>
+                  <a:pt x="606168" y="627873"/>
+                  <a:pt x="541071" y="606610"/>
+                  <a:pt x="483054" y="608700"/>
+                </a:cubicBezTo>
+                <a:cubicBezTo>
+                  <a:pt x="533927" y="747854"/>
+                  <a:pt x="436638" y="950735"/>
+                  <a:pt x="483054" y="1059449"/>
+                </a:cubicBezTo>
+                <a:cubicBezTo>
+                  <a:pt x="529470" y="1168163"/>
+                  <a:pt x="454704" y="1350265"/>
+                  <a:pt x="483054" y="1540931"/>
+                </a:cubicBezTo>
+                <a:cubicBezTo>
+                  <a:pt x="511404" y="1731597"/>
+                  <a:pt x="456230" y="1958127"/>
+                  <a:pt x="483054" y="2114611"/>
+                </a:cubicBezTo>
+                <a:cubicBezTo>
+                  <a:pt x="509878" y="2271095"/>
+                  <a:pt x="433209" y="2447887"/>
+                  <a:pt x="483054" y="2626826"/>
+                </a:cubicBezTo>
+                <a:cubicBezTo>
+                  <a:pt x="532899" y="2805766"/>
+                  <a:pt x="470900" y="2988063"/>
+                  <a:pt x="483054" y="3169773"/>
+                </a:cubicBezTo>
+                <a:cubicBezTo>
+                  <a:pt x="495208" y="3351483"/>
+                  <a:pt x="469942" y="3556428"/>
+                  <a:pt x="483054" y="3681988"/>
+                </a:cubicBezTo>
+                <a:cubicBezTo>
+                  <a:pt x="375647" y="3684812"/>
+                  <a:pt x="234776" y="3663767"/>
+                  <a:pt x="161018" y="3681988"/>
+                </a:cubicBezTo>
+                <a:cubicBezTo>
+                  <a:pt x="145560" y="3549593"/>
+                  <a:pt x="210738" y="3393822"/>
+                  <a:pt x="161018" y="3139040"/>
+                </a:cubicBezTo>
+                <a:cubicBezTo>
+                  <a:pt x="111298" y="2884258"/>
+                  <a:pt x="182870" y="2798159"/>
+                  <a:pt x="161018" y="2688292"/>
+                </a:cubicBezTo>
+                <a:cubicBezTo>
+                  <a:pt x="139166" y="2578425"/>
+                  <a:pt x="167559" y="2470814"/>
+                  <a:pt x="161018" y="2268276"/>
+                </a:cubicBezTo>
+                <a:cubicBezTo>
+                  <a:pt x="154477" y="2065738"/>
+                  <a:pt x="208539" y="1974379"/>
+                  <a:pt x="161018" y="1848259"/>
+                </a:cubicBezTo>
+                <a:cubicBezTo>
+                  <a:pt x="113497" y="1722139"/>
+                  <a:pt x="212588" y="1442667"/>
+                  <a:pt x="161018" y="1305312"/>
+                </a:cubicBezTo>
+                <a:cubicBezTo>
+                  <a:pt x="109448" y="1167957"/>
+                  <a:pt x="239086" y="820263"/>
+                  <a:pt x="161018" y="608700"/>
+                </a:cubicBezTo>
+                <a:cubicBezTo>
+                  <a:pt x="90389" y="620596"/>
+                  <a:pt x="80176" y="599850"/>
+                  <a:pt x="0" y="608700"/>
+                </a:cubicBezTo>
+                <a:close/>
+              </a:path>
+              <a:path w="644072" h="3681988" stroke="0" extrusionOk="0">
+                <a:moveTo>
+                  <a:pt x="0" y="608700"/>
+                </a:moveTo>
+                <a:cubicBezTo>
+                  <a:pt x="51471" y="471540"/>
+                  <a:pt x="139895" y="413925"/>
+                  <a:pt x="157798" y="310437"/>
+                </a:cubicBezTo>
+                <a:cubicBezTo>
+                  <a:pt x="175701" y="206949"/>
+                  <a:pt x="284488" y="119666"/>
+                  <a:pt x="322036" y="0"/>
+                </a:cubicBezTo>
+                <a:cubicBezTo>
+                  <a:pt x="398686" y="122195"/>
+                  <a:pt x="415136" y="218985"/>
+                  <a:pt x="489495" y="316524"/>
+                </a:cubicBezTo>
+                <a:cubicBezTo>
+                  <a:pt x="563853" y="414063"/>
+                  <a:pt x="578272" y="546520"/>
+                  <a:pt x="644072" y="608700"/>
+                </a:cubicBezTo>
+                <a:cubicBezTo>
+                  <a:pt x="594988" y="620728"/>
+                  <a:pt x="521131" y="605554"/>
+                  <a:pt x="483054" y="608700"/>
+                </a:cubicBezTo>
+                <a:cubicBezTo>
+                  <a:pt x="515748" y="828608"/>
+                  <a:pt x="448129" y="1045969"/>
+                  <a:pt x="483054" y="1182380"/>
+                </a:cubicBezTo>
+                <a:cubicBezTo>
+                  <a:pt x="517979" y="1318791"/>
+                  <a:pt x="442970" y="1613958"/>
+                  <a:pt x="483054" y="1756061"/>
+                </a:cubicBezTo>
+                <a:cubicBezTo>
+                  <a:pt x="523138" y="1898164"/>
+                  <a:pt x="470766" y="2088833"/>
+                  <a:pt x="483054" y="2268276"/>
+                </a:cubicBezTo>
+                <a:cubicBezTo>
+                  <a:pt x="495342" y="2447720"/>
+                  <a:pt x="447206" y="2600004"/>
+                  <a:pt x="483054" y="2841956"/>
+                </a:cubicBezTo>
+                <a:cubicBezTo>
+                  <a:pt x="518902" y="3083908"/>
+                  <a:pt x="396369" y="3462765"/>
+                  <a:pt x="483054" y="3681988"/>
+                </a:cubicBezTo>
+                <a:cubicBezTo>
+                  <a:pt x="409494" y="3718826"/>
+                  <a:pt x="250908" y="3663367"/>
+                  <a:pt x="161018" y="3681988"/>
+                </a:cubicBezTo>
+                <a:cubicBezTo>
+                  <a:pt x="156329" y="3545531"/>
+                  <a:pt x="199713" y="3324976"/>
+                  <a:pt x="161018" y="3169773"/>
+                </a:cubicBezTo>
+                <a:cubicBezTo>
+                  <a:pt x="122323" y="3014570"/>
+                  <a:pt x="206286" y="2885510"/>
+                  <a:pt x="161018" y="2719024"/>
+                </a:cubicBezTo>
+                <a:cubicBezTo>
+                  <a:pt x="115750" y="2552538"/>
+                  <a:pt x="197145" y="2330729"/>
+                  <a:pt x="161018" y="2206810"/>
+                </a:cubicBezTo>
+                <a:cubicBezTo>
+                  <a:pt x="124891" y="2082891"/>
+                  <a:pt x="225623" y="1869557"/>
+                  <a:pt x="161018" y="1633129"/>
+                </a:cubicBezTo>
+                <a:cubicBezTo>
+                  <a:pt x="96413" y="1396701"/>
+                  <a:pt x="184646" y="1237331"/>
+                  <a:pt x="161018" y="1120915"/>
+                </a:cubicBezTo>
+                <a:cubicBezTo>
+                  <a:pt x="137390" y="1004499"/>
+                  <a:pt x="161914" y="854141"/>
+                  <a:pt x="161018" y="608700"/>
+                </a:cubicBezTo>
+                <a:cubicBezTo>
+                  <a:pt x="123617" y="627052"/>
+                  <a:pt x="66666" y="591792"/>
+                  <a:pt x="0" y="608700"/>
+                </a:cubicBezTo>
+                <a:close/>
+              </a:path>
+            </a:pathLst>
+          </a:custGeom>
+          <a:solidFill>
+            <a:srgbClr val="FF0000"/>
+          </a:solidFill>
+          <a:ln>
+            <a:extLst>
+              <a:ext uri="{C807C97D-BFC1-408E-A445-0C87EB9F89A2}">
+                <ask:lineSketchStyleProps xmlns:ask="http://schemas.microsoft.com/office/drawing/2018/sketchyshapes" sd="1219033472">
+                  <a:prstGeom prst="upArrow">
+                    <a:avLst>
+                      <a:gd name="adj1" fmla="val 50000"/>
+                      <a:gd name="adj2" fmla="val 94508"/>
+                    </a:avLst>
+                  </a:prstGeom>
+                  <ask:type>
+                    <ask:lineSketchScribble/>
+                  </ask:type>
+                </ask:lineSketchStyleProps>
+              </a:ext>
+            </a:extLst>
+          </a:ln>
+        </p:spPr>
+        <p:style>
+          <a:lnRef idx="2">
+            <a:schemeClr val="accent1">
+              <a:shade val="15000"/>
+            </a:schemeClr>
+          </a:lnRef>
+          <a:fillRef idx="1">
+            <a:schemeClr val="accent1"/>
+          </a:fillRef>
+          <a:effectRef idx="0">
+            <a:schemeClr val="accent1"/>
+          </a:effectRef>
+          <a:fontRef idx="minor">
+            <a:schemeClr val="lt1"/>
+          </a:fontRef>
+        </p:style>
+        <p:txBody>
+          <a:bodyPr rtlCol="0" anchor="ctr"/>
+          <a:lstStyle/>
+          <a:p>
+            <a:pPr algn="ctr"/>
+            <a:endParaRPr lang="en-US"/>
+          </a:p>
+        </p:txBody>
+      </p:sp>
     </p:spTree>
     <p:extLst>
       <p:ext uri="{BB962C8B-B14F-4D97-AF65-F5344CB8AC3E}">
-        <p14:creationId xmlns:p14="http://schemas.microsoft.com/office/powerpoint/2010/main" val="1322128794"/>
+        <p14:creationId xmlns:p14="http://schemas.microsoft.com/office/powerpoint/2010/main" val="669018216"/>
       </p:ext>
     </p:extLst>
   </p:cSld>
@@ -11942,7 +13861,7 @@
         <p:cNvPr id="1" name="">
           <a:extLst>
             <a:ext uri="{FF2B5EF4-FFF2-40B4-BE49-F238E27FC236}">
-              <a16:creationId xmlns:a16="http://schemas.microsoft.com/office/drawing/2014/main" id="{B9CB6789-B3A8-D2BE-1DFD-24C65814625C}"/>
+              <a16:creationId xmlns:a16="http://schemas.microsoft.com/office/drawing/2014/main" id="{9ABDAEBF-8BAF-F3E0-B3D6-E4931F66CAA3}"/>
             </a:ext>
           </a:extLst>
         </p:cNvPr>
@@ -11959,10 +13878,10 @@
       </p:grpSpPr>
       <p:sp>
         <p:nvSpPr>
-          <p:cNvPr id="6" name="Rounded Rectangle 5">
-            <a:extLst>
-              <a:ext uri="{FF2B5EF4-FFF2-40B4-BE49-F238E27FC236}">
-                <a16:creationId xmlns:a16="http://schemas.microsoft.com/office/drawing/2014/main" id="{DFC14CF6-D2DE-6E62-3827-CB5EFFA939A2}"/>
+          <p:cNvPr id="17" name="Rectangle 16">
+            <a:extLst>
+              <a:ext uri="{FF2B5EF4-FFF2-40B4-BE49-F238E27FC236}">
+                <a16:creationId xmlns:a16="http://schemas.microsoft.com/office/drawing/2014/main" id="{8D871015-EDE6-E81D-7BC0-086BC48FAE5C}"/>
               </a:ext>
             </a:extLst>
           </p:cNvPr>
@@ -11970,21 +13889,20 @@
           <p:nvPr/>
         </p:nvSpPr>
         <p:spPr>
-          <a:xfrm>
-            <a:off x="702884" y="2761827"/>
-            <a:ext cx="6709719" cy="2279729"/>
-          </a:xfrm>
-          <a:prstGeom prst="roundRect">
+          <a:xfrm rot="16200000">
+            <a:off x="2522582" y="-387076"/>
+            <a:ext cx="68673" cy="3246390"/>
+          </a:xfrm>
+          <a:prstGeom prst="rect">
             <a:avLst/>
           </a:prstGeom>
           <a:solidFill>
-            <a:schemeClr val="accent4">
-              <a:lumMod val="40000"/>
-              <a:lumOff val="60000"/>
-            </a:schemeClr>
+            <a:srgbClr val="FF0000"/>
           </a:solidFill>
           <a:ln>
-            <a:noFill/>
+            <a:solidFill>
+              <a:srgbClr val="FF0000"/>
+            </a:solidFill>
           </a:ln>
         </p:spPr>
         <p:style>
@@ -12008,16 +13926,19 @@
           <a:lstStyle/>
           <a:p>
             <a:pPr algn="ctr"/>
-            <a:endParaRPr lang="en-US"/>
-          </a:p>
-        </p:txBody>
-      </p:sp>
-      <p:sp>
-        <p:nvSpPr>
-          <p:cNvPr id="17" name="Rectangle 16">
-            <a:extLst>
-              <a:ext uri="{FF2B5EF4-FFF2-40B4-BE49-F238E27FC236}">
-                <a16:creationId xmlns:a16="http://schemas.microsoft.com/office/drawing/2014/main" id="{FEA2A3EC-77DB-5725-483C-D2C1A58BC2A8}"/>
+            <a:endParaRPr lang="en-US">
+              <a:latin typeface="Times New Roman" panose="02020603050405020304" pitchFamily="18" charset="0"/>
+              <a:cs typeface="Times New Roman" panose="02020603050405020304" pitchFamily="18" charset="0"/>
+            </a:endParaRPr>
+          </a:p>
+        </p:txBody>
+      </p:sp>
+      <p:sp>
+        <p:nvSpPr>
+          <p:cNvPr id="18" name="Rectangle 17">
+            <a:extLst>
+              <a:ext uri="{FF2B5EF4-FFF2-40B4-BE49-F238E27FC236}">
+                <a16:creationId xmlns:a16="http://schemas.microsoft.com/office/drawing/2014/main" id="{7CA8CF64-7878-8473-459D-E8C099F6658D}"/>
               </a:ext>
             </a:extLst>
           </p:cNvPr>
@@ -12026,18 +13947,18 @@
         </p:nvSpPr>
         <p:spPr>
           <a:xfrm rot="16200000">
-            <a:off x="2522582" y="-387076"/>
-            <a:ext cx="68673" cy="3246390"/>
+            <a:off x="2522581" y="-318404"/>
+            <a:ext cx="68674" cy="3246390"/>
           </a:xfrm>
           <a:prstGeom prst="rect">
             <a:avLst/>
           </a:prstGeom>
           <a:solidFill>
-            <a:srgbClr val="FF0000"/>
+            <a:srgbClr val="7030A0"/>
           </a:solidFill>
           <a:ln>
             <a:solidFill>
-              <a:srgbClr val="FF0000"/>
+              <a:srgbClr val="7030A0"/>
             </a:solidFill>
           </a:ln>
         </p:spPr>
@@ -12071,10 +13992,10 @@
       </p:sp>
       <p:sp>
         <p:nvSpPr>
-          <p:cNvPr id="18" name="Rectangle 17">
-            <a:extLst>
-              <a:ext uri="{FF2B5EF4-FFF2-40B4-BE49-F238E27FC236}">
-                <a16:creationId xmlns:a16="http://schemas.microsoft.com/office/drawing/2014/main" id="{6AB2275E-ED05-B4EF-DA5A-1CF7BB2D0049}"/>
+          <p:cNvPr id="3" name="Rounded Rectangle 2">
+            <a:extLst>
+              <a:ext uri="{FF2B5EF4-FFF2-40B4-BE49-F238E27FC236}">
+                <a16:creationId xmlns:a16="http://schemas.microsoft.com/office/drawing/2014/main" id="{741FE454-70F9-322F-C660-D8A2A5E49172}"/>
               </a:ext>
             </a:extLst>
           </p:cNvPr>
@@ -12082,20 +14003,21 @@
           <p:nvPr/>
         </p:nvSpPr>
         <p:spPr>
-          <a:xfrm rot="16200000">
-            <a:off x="2522581" y="-318404"/>
-            <a:ext cx="68674" cy="3246390"/>
-          </a:xfrm>
-          <a:prstGeom prst="rect">
+          <a:xfrm>
+            <a:off x="702884" y="2761827"/>
+            <a:ext cx="6709719" cy="2279729"/>
+          </a:xfrm>
+          <a:prstGeom prst="roundRect">
             <a:avLst/>
           </a:prstGeom>
           <a:solidFill>
-            <a:srgbClr val="7030A0"/>
+            <a:schemeClr val="accent4">
+              <a:lumMod val="40000"/>
+              <a:lumOff val="60000"/>
+            </a:schemeClr>
           </a:solidFill>
           <a:ln>
-            <a:solidFill>
-              <a:srgbClr val="7030A0"/>
-            </a:solidFill>
+            <a:noFill/>
           </a:ln>
         </p:spPr>
         <p:style>
@@ -12119,10 +14041,7 @@
           <a:lstStyle/>
           <a:p>
             <a:pPr algn="ctr"/>
-            <a:endParaRPr lang="en-US">
-              <a:latin typeface="Times New Roman" panose="02020603050405020304" pitchFamily="18" charset="0"/>
-              <a:cs typeface="Times New Roman" panose="02020603050405020304" pitchFamily="18" charset="0"/>
-            </a:endParaRPr>
+            <a:endParaRPr lang="en-US"/>
           </a:p>
         </p:txBody>
       </p:sp>
@@ -12131,7 +14050,7 @@
           <p:cNvPr id="12" name="TextBox 11">
             <a:extLst>
               <a:ext uri="{FF2B5EF4-FFF2-40B4-BE49-F238E27FC236}">
-                <a16:creationId xmlns:a16="http://schemas.microsoft.com/office/drawing/2014/main" id="{F798050B-D649-4451-42D7-AC068326F9AA}"/>
+                <a16:creationId xmlns:a16="http://schemas.microsoft.com/office/drawing/2014/main" id="{6512C3D2-1CC7-A28A-2894-186A3513B4E0}"/>
               </a:ext>
             </a:extLst>
           </p:cNvPr>
@@ -12173,7 +14092,7 @@
           <p:cNvPr id="4" name="TextBox 3">
             <a:extLst>
               <a:ext uri="{FF2B5EF4-FFF2-40B4-BE49-F238E27FC236}">
-                <a16:creationId xmlns:a16="http://schemas.microsoft.com/office/drawing/2014/main" id="{75DC5370-96DA-FC09-FD1C-A9952418DFDD}"/>
+                <a16:creationId xmlns:a16="http://schemas.microsoft.com/office/drawing/2014/main" id="{88769B4D-8DE9-1F9A-62CE-60D365BC0A13}"/>
               </a:ext>
             </a:extLst>
           </p:cNvPr>
@@ -12234,7 +14153,7 @@
           <p:cNvPr id="10" name="TextBox 9">
             <a:extLst>
               <a:ext uri="{FF2B5EF4-FFF2-40B4-BE49-F238E27FC236}">
-                <a16:creationId xmlns:a16="http://schemas.microsoft.com/office/drawing/2014/main" id="{2301127B-D00E-8895-F547-B125F7D1D8CD}"/>
+                <a16:creationId xmlns:a16="http://schemas.microsoft.com/office/drawing/2014/main" id="{821B6EFD-0B57-09ED-798A-1B738DB4ADE8}"/>
               </a:ext>
             </a:extLst>
           </p:cNvPr>
@@ -12290,81 +14209,10 @@
           </a:p>
         </p:txBody>
       </p:sp>
-      <p:pic>
-        <p:nvPicPr>
-          <p:cNvPr id="5" name="Graphic 4" descr="Clock with solid fill">
-            <a:extLst>
-              <a:ext uri="{FF2B5EF4-FFF2-40B4-BE49-F238E27FC236}">
-                <a16:creationId xmlns:a16="http://schemas.microsoft.com/office/drawing/2014/main" id="{050D947B-F757-3816-C5A0-DC60C90A1E1B}"/>
-              </a:ext>
-            </a:extLst>
-          </p:cNvPr>
-          <p:cNvPicPr>
-            <a:picLocks noChangeAspect="1"/>
-          </p:cNvPicPr>
-          <p:nvPr/>
-        </p:nvPicPr>
-        <p:blipFill>
-          <a:blip>
-            <a:extLst>
-              <a:ext uri="{96DAC541-7B7A-43D3-8B79-37D633B846F1}">
-                <asvg:svgBlip xmlns:asvg="http://schemas.microsoft.com/office/drawing/2016/SVG/main" r:embed="rId3"/>
-              </a:ext>
-            </a:extLst>
-          </a:blip>
-          <a:stretch>
-            <a:fillRect/>
-          </a:stretch>
-        </p:blipFill>
-        <p:spPr>
-          <a:xfrm>
-            <a:off x="2625368" y="2338965"/>
-            <a:ext cx="914400" cy="914400"/>
-          </a:xfrm>
-          <a:prstGeom prst="rect">
-            <a:avLst/>
-          </a:prstGeom>
-        </p:spPr>
-      </p:pic>
-      <p:sp>
-        <p:nvSpPr>
-          <p:cNvPr id="7" name="TextBox 6">
-            <a:extLst>
-              <a:ext uri="{FF2B5EF4-FFF2-40B4-BE49-F238E27FC236}">
-                <a16:creationId xmlns:a16="http://schemas.microsoft.com/office/drawing/2014/main" id="{94F594E8-BA68-BA69-578C-6F82EAFDF0C1}"/>
-              </a:ext>
-            </a:extLst>
-          </p:cNvPr>
-          <p:cNvSpPr txBox="1"/>
-          <p:nvPr/>
-        </p:nvSpPr>
-        <p:spPr>
-          <a:xfrm>
-            <a:off x="3445340" y="2288333"/>
-            <a:ext cx="3614872" cy="1015663"/>
-          </a:xfrm>
-          <a:prstGeom prst="rect">
-            <a:avLst/>
-          </a:prstGeom>
-          <a:noFill/>
-        </p:spPr>
-        <p:txBody>
-          <a:bodyPr wrap="square" rtlCol="0">
-            <a:spAutoFit/>
-          </a:bodyPr>
-          <a:lstStyle/>
-          <a:p>
-            <a:r>
-              <a:rPr lang="en-US" sz="3000" dirty="0"/>
-              <a:t>Tightly Synchronized Clocks</a:t>
-            </a:r>
-          </a:p>
-        </p:txBody>
-      </p:sp>
     </p:spTree>
     <p:extLst>
       <p:ext uri="{BB962C8B-B14F-4D97-AF65-F5344CB8AC3E}">
-        <p14:creationId xmlns:p14="http://schemas.microsoft.com/office/powerpoint/2010/main" val="1834231864"/>
+        <p14:creationId xmlns:p14="http://schemas.microsoft.com/office/powerpoint/2010/main" val="1322128794"/>
       </p:ext>
     </p:extLst>
   </p:cSld>
@@ -12394,7 +14242,7 @@
         <p:cNvPr id="1" name="">
           <a:extLst>
             <a:ext uri="{FF2B5EF4-FFF2-40B4-BE49-F238E27FC236}">
-              <a16:creationId xmlns:a16="http://schemas.microsoft.com/office/drawing/2014/main" id="{BFB75F0E-83D9-B2EF-DA0F-2432CE4054E4}"/>
+              <a16:creationId xmlns:a16="http://schemas.microsoft.com/office/drawing/2014/main" id="{B9CB6789-B3A8-D2BE-1DFD-24C65814625C}"/>
             </a:ext>
           </a:extLst>
         </p:cNvPr>
@@ -12414,7 +14262,7 @@
           <p:cNvPr id="6" name="Rounded Rectangle 5">
             <a:extLst>
               <a:ext uri="{FF2B5EF4-FFF2-40B4-BE49-F238E27FC236}">
-                <a16:creationId xmlns:a16="http://schemas.microsoft.com/office/drawing/2014/main" id="{B9B202EB-22D3-D5DC-1662-54FD99455845}"/>
+                <a16:creationId xmlns:a16="http://schemas.microsoft.com/office/drawing/2014/main" id="{DFC14CF6-D2DE-6E62-3827-CB5EFFA939A2}"/>
               </a:ext>
             </a:extLst>
           </p:cNvPr>
@@ -12469,7 +14317,7 @@
           <p:cNvPr id="17" name="Rectangle 16">
             <a:extLst>
               <a:ext uri="{FF2B5EF4-FFF2-40B4-BE49-F238E27FC236}">
-                <a16:creationId xmlns:a16="http://schemas.microsoft.com/office/drawing/2014/main" id="{B2799CBC-BEE6-91F7-F338-E913CA3EE074}"/>
+                <a16:creationId xmlns:a16="http://schemas.microsoft.com/office/drawing/2014/main" id="{FEA2A3EC-77DB-5725-483C-D2C1A58BC2A8}"/>
               </a:ext>
             </a:extLst>
           </p:cNvPr>
@@ -12526,7 +14374,7 @@
           <p:cNvPr id="18" name="Rectangle 17">
             <a:extLst>
               <a:ext uri="{FF2B5EF4-FFF2-40B4-BE49-F238E27FC236}">
-                <a16:creationId xmlns:a16="http://schemas.microsoft.com/office/drawing/2014/main" id="{213FAB46-FF81-4306-B26A-5DD0346FE1C8}"/>
+                <a16:creationId xmlns:a16="http://schemas.microsoft.com/office/drawing/2014/main" id="{6AB2275E-ED05-B4EF-DA5A-1CF7BB2D0049}"/>
               </a:ext>
             </a:extLst>
           </p:cNvPr>
@@ -12583,7 +14431,7 @@
           <p:cNvPr id="12" name="TextBox 11">
             <a:extLst>
               <a:ext uri="{FF2B5EF4-FFF2-40B4-BE49-F238E27FC236}">
-                <a16:creationId xmlns:a16="http://schemas.microsoft.com/office/drawing/2014/main" id="{05685F09-890E-EEB0-8E6E-58F658C38486}"/>
+                <a16:creationId xmlns:a16="http://schemas.microsoft.com/office/drawing/2014/main" id="{F798050B-D649-4451-42D7-AC068326F9AA}"/>
               </a:ext>
             </a:extLst>
           </p:cNvPr>
@@ -12625,7 +14473,7 @@
           <p:cNvPr id="4" name="TextBox 3">
             <a:extLst>
               <a:ext uri="{FF2B5EF4-FFF2-40B4-BE49-F238E27FC236}">
-                <a16:creationId xmlns:a16="http://schemas.microsoft.com/office/drawing/2014/main" id="{2B7557A0-5EE6-3A7C-044E-CFE1CC73DAFC}"/>
+                <a16:creationId xmlns:a16="http://schemas.microsoft.com/office/drawing/2014/main" id="{75DC5370-96DA-FC09-FD1C-A9952418DFDD}"/>
               </a:ext>
             </a:extLst>
           </p:cNvPr>
@@ -12686,7 +14534,7 @@
           <p:cNvPr id="10" name="TextBox 9">
             <a:extLst>
               <a:ext uri="{FF2B5EF4-FFF2-40B4-BE49-F238E27FC236}">
-                <a16:creationId xmlns:a16="http://schemas.microsoft.com/office/drawing/2014/main" id="{DB7AE55C-0AA9-6C81-156E-C79BAACE2B08}"/>
+                <a16:creationId xmlns:a16="http://schemas.microsoft.com/office/drawing/2014/main" id="{2301127B-D00E-8895-F547-B125F7D1D8CD}"/>
               </a:ext>
             </a:extLst>
           </p:cNvPr>
@@ -12747,7 +14595,7 @@
           <p:cNvPr id="5" name="Graphic 4" descr="Clock with solid fill">
             <a:extLst>
               <a:ext uri="{FF2B5EF4-FFF2-40B4-BE49-F238E27FC236}">
-                <a16:creationId xmlns:a16="http://schemas.microsoft.com/office/drawing/2014/main" id="{430540FE-3929-1ECF-94B3-369F58C21003}"/>
+                <a16:creationId xmlns:a16="http://schemas.microsoft.com/office/drawing/2014/main" id="{050D947B-F757-3816-C5A0-DC60C90A1E1B}"/>
               </a:ext>
             </a:extLst>
           </p:cNvPr>
@@ -12783,7 +14631,7 @@
           <p:cNvPr id="7" name="TextBox 6">
             <a:extLst>
               <a:ext uri="{FF2B5EF4-FFF2-40B4-BE49-F238E27FC236}">
-                <a16:creationId xmlns:a16="http://schemas.microsoft.com/office/drawing/2014/main" id="{7E101FEE-6EFF-7EE3-0AE7-66FE7CA17C4D}"/>
+                <a16:creationId xmlns:a16="http://schemas.microsoft.com/office/drawing/2014/main" id="{94F594E8-BA68-BA69-578C-6F82EAFDF0C1}"/>
               </a:ext>
             </a:extLst>
           </p:cNvPr>
@@ -12813,126 +14661,10 @@
           </a:p>
         </p:txBody>
       </p:sp>
-      <p:sp>
-        <p:nvSpPr>
-          <p:cNvPr id="2" name="Rounded Rectangle 1">
-            <a:extLst>
-              <a:ext uri="{FF2B5EF4-FFF2-40B4-BE49-F238E27FC236}">
-                <a16:creationId xmlns:a16="http://schemas.microsoft.com/office/drawing/2014/main" id="{B45E7900-A42C-E8D5-A587-62015E92E7F1}"/>
-              </a:ext>
-            </a:extLst>
-          </p:cNvPr>
-          <p:cNvSpPr/>
-          <p:nvPr/>
-        </p:nvSpPr>
-        <p:spPr>
-          <a:xfrm>
-            <a:off x="7643442" y="2761827"/>
-            <a:ext cx="4032482" cy="2279729"/>
-          </a:xfrm>
-          <a:prstGeom prst="roundRect">
-            <a:avLst/>
-          </a:prstGeom>
-          <a:solidFill>
-            <a:schemeClr val="accent4">
-              <a:lumMod val="40000"/>
-              <a:lumOff val="60000"/>
-            </a:schemeClr>
-          </a:solidFill>
-          <a:ln>
-            <a:noFill/>
-          </a:ln>
-        </p:spPr>
-        <p:style>
-          <a:lnRef idx="2">
-            <a:schemeClr val="accent1">
-              <a:shade val="15000"/>
-            </a:schemeClr>
-          </a:lnRef>
-          <a:fillRef idx="1">
-            <a:schemeClr val="accent1"/>
-          </a:fillRef>
-          <a:effectRef idx="0">
-            <a:schemeClr val="accent1"/>
-          </a:effectRef>
-          <a:fontRef idx="minor">
-            <a:schemeClr val="lt1"/>
-          </a:fontRef>
-        </p:style>
-        <p:txBody>
-          <a:bodyPr rtlCol="0" anchor="ctr"/>
-          <a:lstStyle/>
-          <a:p>
-            <a:pPr algn="ctr"/>
-            <a:endParaRPr lang="en-US"/>
-          </a:p>
-        </p:txBody>
-      </p:sp>
-      <p:sp>
-        <p:nvSpPr>
-          <p:cNvPr id="8" name="TextBox 7">
-            <a:extLst>
-              <a:ext uri="{FF2B5EF4-FFF2-40B4-BE49-F238E27FC236}">
-                <a16:creationId xmlns:a16="http://schemas.microsoft.com/office/drawing/2014/main" id="{9A5E1B3E-60E2-AAB7-DED5-B166F29F5ADA}"/>
-              </a:ext>
-            </a:extLst>
-          </p:cNvPr>
-          <p:cNvSpPr txBox="1"/>
-          <p:nvPr/>
-        </p:nvSpPr>
-        <p:spPr>
-          <a:xfrm>
-            <a:off x="8232575" y="3089189"/>
-            <a:ext cx="2830628" cy="1015663"/>
-          </a:xfrm>
-          <a:prstGeom prst="rect">
-            <a:avLst/>
-          </a:prstGeom>
-          <a:noFill/>
-        </p:spPr>
-        <p:txBody>
-          <a:bodyPr wrap="square" rtlCol="0">
-            <a:spAutoFit/>
-          </a:bodyPr>
-          <a:lstStyle/>
-          <a:p>
-            <a:pPr algn="ctr"/>
-            <a:r>
-              <a:rPr lang="en-US" sz="3000" dirty="0">
-                <a:solidFill>
-                  <a:srgbClr val="7030A0"/>
-                </a:solidFill>
-                <a:latin typeface="Times New Roman" panose="02020603050405020304" pitchFamily="18" charset="0"/>
-                <a:cs typeface="Times New Roman" panose="02020603050405020304" pitchFamily="18" charset="0"/>
-              </a:rPr>
-              <a:t>Inbound</a:t>
-            </a:r>
-            <a:br>
-              <a:rPr lang="en-US" sz="3000" dirty="0">
-                <a:solidFill>
-                  <a:srgbClr val="7030A0"/>
-                </a:solidFill>
-                <a:latin typeface="Times New Roman" panose="02020603050405020304" pitchFamily="18" charset="0"/>
-                <a:cs typeface="Times New Roman" panose="02020603050405020304" pitchFamily="18" charset="0"/>
-              </a:rPr>
-            </a:br>
-            <a:r>
-              <a:rPr lang="en-US" sz="3000" dirty="0">
-                <a:solidFill>
-                  <a:srgbClr val="7030A0"/>
-                </a:solidFill>
-                <a:latin typeface="Times New Roman" panose="02020603050405020304" pitchFamily="18" charset="0"/>
-                <a:cs typeface="Times New Roman" panose="02020603050405020304" pitchFamily="18" charset="0"/>
-              </a:rPr>
-              <a:t>Communication</a:t>
-            </a:r>
-          </a:p>
-        </p:txBody>
-      </p:sp>
     </p:spTree>
     <p:extLst>
       <p:ext uri="{BB962C8B-B14F-4D97-AF65-F5344CB8AC3E}">
-        <p14:creationId xmlns:p14="http://schemas.microsoft.com/office/powerpoint/2010/main" val="3660530749"/>
+        <p14:creationId xmlns:p14="http://schemas.microsoft.com/office/powerpoint/2010/main" val="1834231864"/>
       </p:ext>
     </p:extLst>
   </p:cSld>
@@ -12962,7 +14694,7 @@
         <p:cNvPr id="1" name="">
           <a:extLst>
             <a:ext uri="{FF2B5EF4-FFF2-40B4-BE49-F238E27FC236}">
-              <a16:creationId xmlns:a16="http://schemas.microsoft.com/office/drawing/2014/main" id="{B75BEBD4-ED13-6CBD-00AF-7A62EC1F89F6}"/>
+              <a16:creationId xmlns:a16="http://schemas.microsoft.com/office/drawing/2014/main" id="{BFB75F0E-83D9-B2EF-DA0F-2432CE4054E4}"/>
             </a:ext>
           </a:extLst>
         </p:cNvPr>
@@ -12982,7 +14714,7 @@
           <p:cNvPr id="6" name="Rounded Rectangle 5">
             <a:extLst>
               <a:ext uri="{FF2B5EF4-FFF2-40B4-BE49-F238E27FC236}">
-                <a16:creationId xmlns:a16="http://schemas.microsoft.com/office/drawing/2014/main" id="{BB8E0F07-4FFE-BB58-6C05-8669AA98C5E7}"/>
+                <a16:creationId xmlns:a16="http://schemas.microsoft.com/office/drawing/2014/main" id="{B9B202EB-22D3-D5DC-1662-54FD99455845}"/>
               </a:ext>
             </a:extLst>
           </p:cNvPr>
@@ -13037,7 +14769,7 @@
           <p:cNvPr id="17" name="Rectangle 16">
             <a:extLst>
               <a:ext uri="{FF2B5EF4-FFF2-40B4-BE49-F238E27FC236}">
-                <a16:creationId xmlns:a16="http://schemas.microsoft.com/office/drawing/2014/main" id="{223A66F5-0D92-D77D-C653-D58EA35005B7}"/>
+                <a16:creationId xmlns:a16="http://schemas.microsoft.com/office/drawing/2014/main" id="{B2799CBC-BEE6-91F7-F338-E913CA3EE074}"/>
               </a:ext>
             </a:extLst>
           </p:cNvPr>
@@ -13094,7 +14826,7 @@
           <p:cNvPr id="18" name="Rectangle 17">
             <a:extLst>
               <a:ext uri="{FF2B5EF4-FFF2-40B4-BE49-F238E27FC236}">
-                <a16:creationId xmlns:a16="http://schemas.microsoft.com/office/drawing/2014/main" id="{9CFE63B5-932E-3DFD-308B-FC0860DA087E}"/>
+                <a16:creationId xmlns:a16="http://schemas.microsoft.com/office/drawing/2014/main" id="{213FAB46-FF81-4306-B26A-5DD0346FE1C8}"/>
               </a:ext>
             </a:extLst>
           </p:cNvPr>
@@ -13151,7 +14883,7 @@
           <p:cNvPr id="12" name="TextBox 11">
             <a:extLst>
               <a:ext uri="{FF2B5EF4-FFF2-40B4-BE49-F238E27FC236}">
-                <a16:creationId xmlns:a16="http://schemas.microsoft.com/office/drawing/2014/main" id="{9E44CFF1-F54A-2325-4B2F-2D5989C5A006}"/>
+                <a16:creationId xmlns:a16="http://schemas.microsoft.com/office/drawing/2014/main" id="{05685F09-890E-EEB0-8E6E-58F658C38486}"/>
               </a:ext>
             </a:extLst>
           </p:cNvPr>
@@ -13193,7 +14925,7 @@
           <p:cNvPr id="4" name="TextBox 3">
             <a:extLst>
               <a:ext uri="{FF2B5EF4-FFF2-40B4-BE49-F238E27FC236}">
-                <a16:creationId xmlns:a16="http://schemas.microsoft.com/office/drawing/2014/main" id="{6F367196-774A-F674-BF2F-2C92C1D81EA7}"/>
+                <a16:creationId xmlns:a16="http://schemas.microsoft.com/office/drawing/2014/main" id="{2B7557A0-5EE6-3A7C-044E-CFE1CC73DAFC}"/>
               </a:ext>
             </a:extLst>
           </p:cNvPr>
@@ -13254,7 +14986,7 @@
           <p:cNvPr id="10" name="TextBox 9">
             <a:extLst>
               <a:ext uri="{FF2B5EF4-FFF2-40B4-BE49-F238E27FC236}">
-                <a16:creationId xmlns:a16="http://schemas.microsoft.com/office/drawing/2014/main" id="{A33975DC-1D8E-7593-0160-027F7BE9AB3E}"/>
+                <a16:creationId xmlns:a16="http://schemas.microsoft.com/office/drawing/2014/main" id="{DB7AE55C-0AA9-6C81-156E-C79BAACE2B08}"/>
               </a:ext>
             </a:extLst>
           </p:cNvPr>
@@ -13315,7 +15047,7 @@
           <p:cNvPr id="5" name="Graphic 4" descr="Clock with solid fill">
             <a:extLst>
               <a:ext uri="{FF2B5EF4-FFF2-40B4-BE49-F238E27FC236}">
-                <a16:creationId xmlns:a16="http://schemas.microsoft.com/office/drawing/2014/main" id="{7A5AA61F-047E-A4CE-40AE-5AA6CA0B6B33}"/>
+                <a16:creationId xmlns:a16="http://schemas.microsoft.com/office/drawing/2014/main" id="{430540FE-3929-1ECF-94B3-369F58C21003}"/>
               </a:ext>
             </a:extLst>
           </p:cNvPr>
@@ -13351,7 +15083,7 @@
           <p:cNvPr id="7" name="TextBox 6">
             <a:extLst>
               <a:ext uri="{FF2B5EF4-FFF2-40B4-BE49-F238E27FC236}">
-                <a16:creationId xmlns:a16="http://schemas.microsoft.com/office/drawing/2014/main" id="{396476CC-78FD-B16D-9FC4-480773B78E51}"/>
+                <a16:creationId xmlns:a16="http://schemas.microsoft.com/office/drawing/2014/main" id="{7E101FEE-6EFF-7EE3-0AE7-66FE7CA17C4D}"/>
               </a:ext>
             </a:extLst>
           </p:cNvPr>
@@ -13386,7 +15118,7 @@
           <p:cNvPr id="2" name="Rounded Rectangle 1">
             <a:extLst>
               <a:ext uri="{FF2B5EF4-FFF2-40B4-BE49-F238E27FC236}">
-                <a16:creationId xmlns:a16="http://schemas.microsoft.com/office/drawing/2014/main" id="{2E2982C1-8924-EFFA-36D8-1B95244D228A}"/>
+                <a16:creationId xmlns:a16="http://schemas.microsoft.com/office/drawing/2014/main" id="{B45E7900-A42C-E8D5-A587-62015E92E7F1}"/>
               </a:ext>
             </a:extLst>
           </p:cNvPr>
@@ -13441,7 +15173,7 @@
           <p:cNvPr id="8" name="TextBox 7">
             <a:extLst>
               <a:ext uri="{FF2B5EF4-FFF2-40B4-BE49-F238E27FC236}">
-                <a16:creationId xmlns:a16="http://schemas.microsoft.com/office/drawing/2014/main" id="{F54DB84D-496B-A60D-454E-ECF5BA788CE3}"/>
+                <a16:creationId xmlns:a16="http://schemas.microsoft.com/office/drawing/2014/main" id="{9A5E1B3E-60E2-AAB7-DED5-B166F29F5ADA}"/>
               </a:ext>
             </a:extLst>
           </p:cNvPr>
@@ -13497,81 +15229,10 @@
           </a:p>
         </p:txBody>
       </p:sp>
-      <p:pic>
-        <p:nvPicPr>
-          <p:cNvPr id="11" name="Graphic 10" descr="Normal Distribution with solid fill">
-            <a:extLst>
-              <a:ext uri="{FF2B5EF4-FFF2-40B4-BE49-F238E27FC236}">
-                <a16:creationId xmlns:a16="http://schemas.microsoft.com/office/drawing/2014/main" id="{5B73A4EF-48C6-379E-A387-DA4E76F2D8D3}"/>
-              </a:ext>
-            </a:extLst>
-          </p:cNvPr>
-          <p:cNvPicPr>
-            <a:picLocks noChangeAspect="1"/>
-          </p:cNvPicPr>
-          <p:nvPr/>
-        </p:nvPicPr>
-        <p:blipFill>
-          <a:blip>
-            <a:extLst>
-              <a:ext uri="{96DAC541-7B7A-43D3-8B79-37D633B846F1}">
-                <asvg:svgBlip xmlns:asvg="http://schemas.microsoft.com/office/drawing/2016/SVG/main" r:embed="rId4"/>
-              </a:ext>
-            </a:extLst>
-          </a:blip>
-          <a:stretch>
-            <a:fillRect/>
-          </a:stretch>
-        </p:blipFill>
-        <p:spPr>
-          <a:xfrm>
-            <a:off x="8232575" y="2206810"/>
-            <a:ext cx="914400" cy="914400"/>
-          </a:xfrm>
-          <a:prstGeom prst="rect">
-            <a:avLst/>
-          </a:prstGeom>
-        </p:spPr>
-      </p:pic>
-      <p:sp>
-        <p:nvSpPr>
-          <p:cNvPr id="13" name="TextBox 12">
-            <a:extLst>
-              <a:ext uri="{FF2B5EF4-FFF2-40B4-BE49-F238E27FC236}">
-                <a16:creationId xmlns:a16="http://schemas.microsoft.com/office/drawing/2014/main" id="{9C608732-D4D6-BFFD-B6C7-55791B611A86}"/>
-              </a:ext>
-            </a:extLst>
-          </p:cNvPr>
-          <p:cNvSpPr txBox="1"/>
-          <p:nvPr/>
-        </p:nvSpPr>
-        <p:spPr>
-          <a:xfrm>
-            <a:off x="9059956" y="2152485"/>
-            <a:ext cx="2846807" cy="1015663"/>
-          </a:xfrm>
-          <a:prstGeom prst="rect">
-            <a:avLst/>
-          </a:prstGeom>
-          <a:noFill/>
-        </p:spPr>
-        <p:txBody>
-          <a:bodyPr wrap="square" rtlCol="0">
-            <a:spAutoFit/>
-          </a:bodyPr>
-          <a:lstStyle/>
-          <a:p>
-            <a:r>
-              <a:rPr lang="en-US" sz="3000" dirty="0"/>
-              <a:t>Time as a random variable</a:t>
-            </a:r>
-          </a:p>
-        </p:txBody>
-      </p:sp>
     </p:spTree>
     <p:extLst>
       <p:ext uri="{BB962C8B-B14F-4D97-AF65-F5344CB8AC3E}">
-        <p14:creationId xmlns:p14="http://schemas.microsoft.com/office/powerpoint/2010/main" val="2465174136"/>
+        <p14:creationId xmlns:p14="http://schemas.microsoft.com/office/powerpoint/2010/main" val="3660530749"/>
       </p:ext>
     </p:extLst>
   </p:cSld>
@@ -13601,7 +15262,7 @@
         <p:cNvPr id="1" name="">
           <a:extLst>
             <a:ext uri="{FF2B5EF4-FFF2-40B4-BE49-F238E27FC236}">
-              <a16:creationId xmlns:a16="http://schemas.microsoft.com/office/drawing/2014/main" id="{6CCA7BE4-2F6D-50E8-B5EA-E9BBB4763B05}"/>
+              <a16:creationId xmlns:a16="http://schemas.microsoft.com/office/drawing/2014/main" id="{B75BEBD4-ED13-6CBD-00AF-7A62EC1F89F6}"/>
             </a:ext>
           </a:extLst>
         </p:cNvPr>
@@ -13621,7 +15282,7 @@
           <p:cNvPr id="6" name="Rounded Rectangle 5">
             <a:extLst>
               <a:ext uri="{FF2B5EF4-FFF2-40B4-BE49-F238E27FC236}">
-                <a16:creationId xmlns:a16="http://schemas.microsoft.com/office/drawing/2014/main" id="{805CE231-BAC5-9ED6-3C4F-062502954516}"/>
+                <a16:creationId xmlns:a16="http://schemas.microsoft.com/office/drawing/2014/main" id="{BB8E0F07-4FFE-BB58-6C05-8669AA98C5E7}"/>
               </a:ext>
             </a:extLst>
           </p:cNvPr>
@@ -13676,7 +15337,7 @@
           <p:cNvPr id="17" name="Rectangle 16">
             <a:extLst>
               <a:ext uri="{FF2B5EF4-FFF2-40B4-BE49-F238E27FC236}">
-                <a16:creationId xmlns:a16="http://schemas.microsoft.com/office/drawing/2014/main" id="{F5FDFB00-D95F-435A-CB89-E87916646793}"/>
+                <a16:creationId xmlns:a16="http://schemas.microsoft.com/office/drawing/2014/main" id="{223A66F5-0D92-D77D-C653-D58EA35005B7}"/>
               </a:ext>
             </a:extLst>
           </p:cNvPr>
@@ -13733,7 +15394,7 @@
           <p:cNvPr id="18" name="Rectangle 17">
             <a:extLst>
               <a:ext uri="{FF2B5EF4-FFF2-40B4-BE49-F238E27FC236}">
-                <a16:creationId xmlns:a16="http://schemas.microsoft.com/office/drawing/2014/main" id="{A4E7F626-103D-3BA1-42F9-211847917C12}"/>
+                <a16:creationId xmlns:a16="http://schemas.microsoft.com/office/drawing/2014/main" id="{9CFE63B5-932E-3DFD-308B-FC0860DA087E}"/>
               </a:ext>
             </a:extLst>
           </p:cNvPr>
@@ -13790,7 +15451,7 @@
           <p:cNvPr id="12" name="TextBox 11">
             <a:extLst>
               <a:ext uri="{FF2B5EF4-FFF2-40B4-BE49-F238E27FC236}">
-                <a16:creationId xmlns:a16="http://schemas.microsoft.com/office/drawing/2014/main" id="{F350AFCA-CE89-1A02-B58E-1B2B22A28034}"/>
+                <a16:creationId xmlns:a16="http://schemas.microsoft.com/office/drawing/2014/main" id="{9E44CFF1-F54A-2325-4B2F-2D5989C5A006}"/>
               </a:ext>
             </a:extLst>
           </p:cNvPr>
@@ -13832,7 +15493,7 @@
           <p:cNvPr id="4" name="TextBox 3">
             <a:extLst>
               <a:ext uri="{FF2B5EF4-FFF2-40B4-BE49-F238E27FC236}">
-                <a16:creationId xmlns:a16="http://schemas.microsoft.com/office/drawing/2014/main" id="{A35CA6EB-E3C2-ED3F-1264-A7A554866077}"/>
+                <a16:creationId xmlns:a16="http://schemas.microsoft.com/office/drawing/2014/main" id="{6F367196-774A-F674-BF2F-2C92C1D81EA7}"/>
               </a:ext>
             </a:extLst>
           </p:cNvPr>
@@ -13893,7 +15554,7 @@
           <p:cNvPr id="10" name="TextBox 9">
             <a:extLst>
               <a:ext uri="{FF2B5EF4-FFF2-40B4-BE49-F238E27FC236}">
-                <a16:creationId xmlns:a16="http://schemas.microsoft.com/office/drawing/2014/main" id="{1A401610-C405-FE5D-753E-B5D7DFC24D10}"/>
+                <a16:creationId xmlns:a16="http://schemas.microsoft.com/office/drawing/2014/main" id="{A33975DC-1D8E-7593-0160-027F7BE9AB3E}"/>
               </a:ext>
             </a:extLst>
           </p:cNvPr>
@@ -13954,7 +15615,7 @@
           <p:cNvPr id="5" name="Graphic 4" descr="Clock with solid fill">
             <a:extLst>
               <a:ext uri="{FF2B5EF4-FFF2-40B4-BE49-F238E27FC236}">
-                <a16:creationId xmlns:a16="http://schemas.microsoft.com/office/drawing/2014/main" id="{C1E514BE-4A3E-6FCE-E902-24C3370D6763}"/>
+                <a16:creationId xmlns:a16="http://schemas.microsoft.com/office/drawing/2014/main" id="{7A5AA61F-047E-A4CE-40AE-5AA6CA0B6B33}"/>
               </a:ext>
             </a:extLst>
           </p:cNvPr>
@@ -13990,7 +15651,7 @@
           <p:cNvPr id="7" name="TextBox 6">
             <a:extLst>
               <a:ext uri="{FF2B5EF4-FFF2-40B4-BE49-F238E27FC236}">
-                <a16:creationId xmlns:a16="http://schemas.microsoft.com/office/drawing/2014/main" id="{307F30E8-D4F8-B3FC-FDA8-BE0D7CB9AE5B}"/>
+                <a16:creationId xmlns:a16="http://schemas.microsoft.com/office/drawing/2014/main" id="{396476CC-78FD-B16D-9FC4-480773B78E51}"/>
               </a:ext>
             </a:extLst>
           </p:cNvPr>
@@ -14025,7 +15686,7 @@
           <p:cNvPr id="2" name="Rounded Rectangle 1">
             <a:extLst>
               <a:ext uri="{FF2B5EF4-FFF2-40B4-BE49-F238E27FC236}">
-                <a16:creationId xmlns:a16="http://schemas.microsoft.com/office/drawing/2014/main" id="{53274D20-301F-A4CB-EB38-3DD11CFC7147}"/>
+                <a16:creationId xmlns:a16="http://schemas.microsoft.com/office/drawing/2014/main" id="{2E2982C1-8924-EFFA-36D8-1B95244D228A}"/>
               </a:ext>
             </a:extLst>
           </p:cNvPr>
@@ -14080,7 +15741,7 @@
           <p:cNvPr id="8" name="TextBox 7">
             <a:extLst>
               <a:ext uri="{FF2B5EF4-FFF2-40B4-BE49-F238E27FC236}">
-                <a16:creationId xmlns:a16="http://schemas.microsoft.com/office/drawing/2014/main" id="{98D180D5-504B-B0A2-4348-AAE53CBD0D84}"/>
+                <a16:creationId xmlns:a16="http://schemas.microsoft.com/office/drawing/2014/main" id="{F54DB84D-496B-A60D-454E-ECF5BA788CE3}"/>
               </a:ext>
             </a:extLst>
           </p:cNvPr>
@@ -14141,7 +15802,7 @@
           <p:cNvPr id="11" name="Graphic 10" descr="Normal Distribution with solid fill">
             <a:extLst>
               <a:ext uri="{FF2B5EF4-FFF2-40B4-BE49-F238E27FC236}">
-                <a16:creationId xmlns:a16="http://schemas.microsoft.com/office/drawing/2014/main" id="{B6B7790C-443C-3E07-213A-980A49AC4ED8}"/>
+                <a16:creationId xmlns:a16="http://schemas.microsoft.com/office/drawing/2014/main" id="{5B73A4EF-48C6-379E-A387-DA4E76F2D8D3}"/>
               </a:ext>
             </a:extLst>
           </p:cNvPr>
@@ -14177,7 +15838,7 @@
           <p:cNvPr id="13" name="TextBox 12">
             <a:extLst>
               <a:ext uri="{FF2B5EF4-FFF2-40B4-BE49-F238E27FC236}">
-                <a16:creationId xmlns:a16="http://schemas.microsoft.com/office/drawing/2014/main" id="{06CAAFA5-F0F7-B64B-945B-F008BBFF8FEB}"/>
+                <a16:creationId xmlns:a16="http://schemas.microsoft.com/office/drawing/2014/main" id="{9C608732-D4D6-BFFD-B6C7-55791B611A86}"/>
               </a:ext>
             </a:extLst>
           </p:cNvPr>
@@ -14207,127 +15868,10 @@
           </a:p>
         </p:txBody>
       </p:sp>
-      <p:sp>
-        <p:nvSpPr>
-          <p:cNvPr id="9" name="TextBox 8">
-            <a:extLst>
-              <a:ext uri="{FF2B5EF4-FFF2-40B4-BE49-F238E27FC236}">
-                <a16:creationId xmlns:a16="http://schemas.microsoft.com/office/drawing/2014/main" id="{E3F2E211-91A5-DD9B-70BF-573CB855077D}"/>
-              </a:ext>
-            </a:extLst>
-          </p:cNvPr>
-          <p:cNvSpPr txBox="1"/>
-          <p:nvPr/>
-        </p:nvSpPr>
-        <p:spPr>
-          <a:xfrm>
-            <a:off x="2121325" y="4564534"/>
-            <a:ext cx="3872835" cy="461665"/>
-          </a:xfrm>
-          <a:prstGeom prst="rect">
-            <a:avLst/>
-          </a:prstGeom>
-          <a:noFill/>
-        </p:spPr>
-        <p:txBody>
-          <a:bodyPr wrap="square" rtlCol="0">
-            <a:spAutoFit/>
-          </a:bodyPr>
-          <a:lstStyle/>
-          <a:p>
-            <a:pPr algn="ctr"/>
-            <a:r>
-              <a:rPr lang="en-US" sz="2400" dirty="0">
-                <a:latin typeface="Times New Roman" panose="02020603050405020304" pitchFamily="18" charset="0"/>
-                <a:cs typeface="Times New Roman" panose="02020603050405020304" pitchFamily="18" charset="0"/>
-              </a:rPr>
-              <a:t>ACM SIGCOMM’25</a:t>
-            </a:r>
-          </a:p>
-        </p:txBody>
-      </p:sp>
-      <p:sp>
-        <p:nvSpPr>
-          <p:cNvPr id="14" name="TextBox 13">
-            <a:extLst>
-              <a:ext uri="{FF2B5EF4-FFF2-40B4-BE49-F238E27FC236}">
-                <a16:creationId xmlns:a16="http://schemas.microsoft.com/office/drawing/2014/main" id="{AAC98C97-4F56-BA56-E984-2DBDF1E4D90E}"/>
-              </a:ext>
-            </a:extLst>
-          </p:cNvPr>
-          <p:cNvSpPr txBox="1"/>
-          <p:nvPr/>
-        </p:nvSpPr>
-        <p:spPr>
-          <a:xfrm>
-            <a:off x="7643442" y="4111538"/>
-            <a:ext cx="3872835" cy="461665"/>
-          </a:xfrm>
-          <a:prstGeom prst="rect">
-            <a:avLst/>
-          </a:prstGeom>
-          <a:noFill/>
-        </p:spPr>
-        <p:txBody>
-          <a:bodyPr wrap="square" rtlCol="0">
-            <a:spAutoFit/>
-          </a:bodyPr>
-          <a:lstStyle/>
-          <a:p>
-            <a:pPr algn="ctr"/>
-            <a:r>
-              <a:rPr lang="en-US" sz="2400" dirty="0">
-                <a:latin typeface="Times New Roman" panose="02020603050405020304" pitchFamily="18" charset="0"/>
-                <a:cs typeface="Times New Roman" panose="02020603050405020304" pitchFamily="18" charset="0"/>
-              </a:rPr>
-              <a:t>ACM HotNets’25</a:t>
-            </a:r>
-          </a:p>
-        </p:txBody>
-      </p:sp>
-      <p:sp>
-        <p:nvSpPr>
-          <p:cNvPr id="15" name="TextBox 14">
-            <a:extLst>
-              <a:ext uri="{FF2B5EF4-FFF2-40B4-BE49-F238E27FC236}">
-                <a16:creationId xmlns:a16="http://schemas.microsoft.com/office/drawing/2014/main" id="{887EE278-208A-4B93-637F-68B276C2F983}"/>
-              </a:ext>
-            </a:extLst>
-          </p:cNvPr>
-          <p:cNvSpPr txBox="1"/>
-          <p:nvPr/>
-        </p:nvSpPr>
-        <p:spPr>
-          <a:xfrm>
-            <a:off x="7643442" y="4507299"/>
-            <a:ext cx="3872835" cy="461665"/>
-          </a:xfrm>
-          <a:prstGeom prst="rect">
-            <a:avLst/>
-          </a:prstGeom>
-          <a:noFill/>
-        </p:spPr>
-        <p:txBody>
-          <a:bodyPr wrap="square" rtlCol="0">
-            <a:spAutoFit/>
-          </a:bodyPr>
-          <a:lstStyle/>
-          <a:p>
-            <a:pPr algn="ctr"/>
-            <a:r>
-              <a:rPr lang="en-US" sz="2400" dirty="0">
-                <a:latin typeface="Times New Roman" panose="02020603050405020304" pitchFamily="18" charset="0"/>
-                <a:cs typeface="Times New Roman" panose="02020603050405020304" pitchFamily="18" charset="0"/>
-              </a:rPr>
-              <a:t>Submitted to SIGCOMM’26</a:t>
-            </a:r>
-          </a:p>
-        </p:txBody>
-      </p:sp>
     </p:spTree>
     <p:extLst>
       <p:ext uri="{BB962C8B-B14F-4D97-AF65-F5344CB8AC3E}">
-        <p14:creationId xmlns:p14="http://schemas.microsoft.com/office/powerpoint/2010/main" val="229929111"/>
+        <p14:creationId xmlns:p14="http://schemas.microsoft.com/office/powerpoint/2010/main" val="2465174136"/>
       </p:ext>
     </p:extLst>
   </p:cSld>
@@ -14346,112 +15890,6 @@
       </p:transition>
     </mc:Fallback>
   </mc:AlternateContent>
-  <p:timing>
-    <p:tnLst>
-      <p:par>
-        <p:cTn id="1" dur="indefinite" restart="never" nodeType="tmRoot">
-          <p:childTnLst>
-            <p:seq concurrent="1" nextAc="seek">
-              <p:cTn id="2" dur="indefinite" nodeType="mainSeq">
-                <p:childTnLst>
-                  <p:par>
-                    <p:cTn id="3" fill="hold">
-                      <p:stCondLst>
-                        <p:cond delay="indefinite"/>
-                      </p:stCondLst>
-                      <p:childTnLst>
-                        <p:par>
-                          <p:cTn id="4" fill="hold">
-                            <p:stCondLst>
-                              <p:cond delay="0"/>
-                            </p:stCondLst>
-                            <p:childTnLst>
-                              <p:par>
-                                <p:cTn id="5" presetID="1" presetClass="entr" presetSubtype="0" fill="hold" grpId="0" nodeType="clickEffect">
-                                  <p:stCondLst>
-                                    <p:cond delay="0"/>
-                                  </p:stCondLst>
-                                  <p:childTnLst>
-                                    <p:set>
-                                      <p:cBhvr>
-                                        <p:cTn id="6" dur="1" fill="hold">
-                                          <p:stCondLst>
-                                            <p:cond delay="0"/>
-                                          </p:stCondLst>
-                                        </p:cTn>
-                                        <p:tgtEl>
-                                          <p:spTgt spid="14"/>
-                                        </p:tgtEl>
-                                        <p:attrNameLst>
-                                          <p:attrName>style.visibility</p:attrName>
-                                        </p:attrNameLst>
-                                      </p:cBhvr>
-                                      <p:to>
-                                        <p:strVal val="visible"/>
-                                      </p:to>
-                                    </p:set>
-                                  </p:childTnLst>
-                                </p:cTn>
-                              </p:par>
-                              <p:par>
-                                <p:cTn id="7" presetID="1" presetClass="entr" presetSubtype="0" fill="hold" grpId="0" nodeType="withEffect">
-                                  <p:stCondLst>
-                                    <p:cond delay="0"/>
-                                  </p:stCondLst>
-                                  <p:childTnLst>
-                                    <p:set>
-                                      <p:cBhvr>
-                                        <p:cTn id="8" dur="1" fill="hold">
-                                          <p:stCondLst>
-                                            <p:cond delay="0"/>
-                                          </p:stCondLst>
-                                        </p:cTn>
-                                        <p:tgtEl>
-                                          <p:spTgt spid="15"/>
-                                        </p:tgtEl>
-                                        <p:attrNameLst>
-                                          <p:attrName>style.visibility</p:attrName>
-                                        </p:attrNameLst>
-                                      </p:cBhvr>
-                                      <p:to>
-                                        <p:strVal val="visible"/>
-                                      </p:to>
-                                    </p:set>
-                                  </p:childTnLst>
-                                </p:cTn>
-                              </p:par>
-                            </p:childTnLst>
-                          </p:cTn>
-                        </p:par>
-                      </p:childTnLst>
-                    </p:cTn>
-                  </p:par>
-                </p:childTnLst>
-              </p:cTn>
-              <p:prevCondLst>
-                <p:cond evt="onPrev" delay="0">
-                  <p:tgtEl>
-                    <p:sldTgt/>
-                  </p:tgtEl>
-                </p:cond>
-              </p:prevCondLst>
-              <p:nextCondLst>
-                <p:cond evt="onNext" delay="0">
-                  <p:tgtEl>
-                    <p:sldTgt/>
-                  </p:tgtEl>
-                </p:cond>
-              </p:nextCondLst>
-            </p:seq>
-          </p:childTnLst>
-        </p:cTn>
-      </p:par>
-    </p:tnLst>
-    <p:bldLst>
-      <p:bldP spid="14" grpId="0"/>
-      <p:bldP spid="15" grpId="0"/>
-    </p:bldLst>
-  </p:timing>
 </p:sld>
 </file>
 
@@ -14899,6 +16337,868 @@
         <p:cNvPr id="1" name="">
           <a:extLst>
             <a:ext uri="{FF2B5EF4-FFF2-40B4-BE49-F238E27FC236}">
+              <a16:creationId xmlns:a16="http://schemas.microsoft.com/office/drawing/2014/main" id="{6CCA7BE4-2F6D-50E8-B5EA-E9BBB4763B05}"/>
+            </a:ext>
+          </a:extLst>
+        </p:cNvPr>
+        <p:cNvGrpSpPr/>
+        <p:nvPr/>
+      </p:nvGrpSpPr>
+      <p:grpSpPr>
+        <a:xfrm>
+          <a:off x="0" y="0"/>
+          <a:ext cx="0" cy="0"/>
+          <a:chOff x="0" y="0"/>
+          <a:chExt cx="0" cy="0"/>
+        </a:xfrm>
+      </p:grpSpPr>
+      <p:sp>
+        <p:nvSpPr>
+          <p:cNvPr id="6" name="Rounded Rectangle 5">
+            <a:extLst>
+              <a:ext uri="{FF2B5EF4-FFF2-40B4-BE49-F238E27FC236}">
+                <a16:creationId xmlns:a16="http://schemas.microsoft.com/office/drawing/2014/main" id="{805CE231-BAC5-9ED6-3C4F-062502954516}"/>
+              </a:ext>
+            </a:extLst>
+          </p:cNvPr>
+          <p:cNvSpPr/>
+          <p:nvPr/>
+        </p:nvSpPr>
+        <p:spPr>
+          <a:xfrm>
+            <a:off x="702884" y="2761827"/>
+            <a:ext cx="6709719" cy="2279729"/>
+          </a:xfrm>
+          <a:prstGeom prst="roundRect">
+            <a:avLst/>
+          </a:prstGeom>
+          <a:solidFill>
+            <a:schemeClr val="accent4">
+              <a:lumMod val="40000"/>
+              <a:lumOff val="60000"/>
+            </a:schemeClr>
+          </a:solidFill>
+          <a:ln>
+            <a:noFill/>
+          </a:ln>
+        </p:spPr>
+        <p:style>
+          <a:lnRef idx="2">
+            <a:schemeClr val="accent1">
+              <a:shade val="15000"/>
+            </a:schemeClr>
+          </a:lnRef>
+          <a:fillRef idx="1">
+            <a:schemeClr val="accent1"/>
+          </a:fillRef>
+          <a:effectRef idx="0">
+            <a:schemeClr val="accent1"/>
+          </a:effectRef>
+          <a:fontRef idx="minor">
+            <a:schemeClr val="lt1"/>
+          </a:fontRef>
+        </p:style>
+        <p:txBody>
+          <a:bodyPr rtlCol="0" anchor="ctr"/>
+          <a:lstStyle/>
+          <a:p>
+            <a:pPr algn="ctr"/>
+            <a:endParaRPr lang="en-US"/>
+          </a:p>
+        </p:txBody>
+      </p:sp>
+      <p:sp>
+        <p:nvSpPr>
+          <p:cNvPr id="17" name="Rectangle 16">
+            <a:extLst>
+              <a:ext uri="{FF2B5EF4-FFF2-40B4-BE49-F238E27FC236}">
+                <a16:creationId xmlns:a16="http://schemas.microsoft.com/office/drawing/2014/main" id="{F5FDFB00-D95F-435A-CB89-E87916646793}"/>
+              </a:ext>
+            </a:extLst>
+          </p:cNvPr>
+          <p:cNvSpPr/>
+          <p:nvPr/>
+        </p:nvSpPr>
+        <p:spPr>
+          <a:xfrm rot="16200000">
+            <a:off x="2522582" y="-387076"/>
+            <a:ext cx="68673" cy="3246390"/>
+          </a:xfrm>
+          <a:prstGeom prst="rect">
+            <a:avLst/>
+          </a:prstGeom>
+          <a:solidFill>
+            <a:srgbClr val="FF0000"/>
+          </a:solidFill>
+          <a:ln>
+            <a:solidFill>
+              <a:srgbClr val="FF0000"/>
+            </a:solidFill>
+          </a:ln>
+        </p:spPr>
+        <p:style>
+          <a:lnRef idx="2">
+            <a:schemeClr val="accent1">
+              <a:shade val="15000"/>
+            </a:schemeClr>
+          </a:lnRef>
+          <a:fillRef idx="1">
+            <a:schemeClr val="accent1"/>
+          </a:fillRef>
+          <a:effectRef idx="0">
+            <a:schemeClr val="accent1"/>
+          </a:effectRef>
+          <a:fontRef idx="minor">
+            <a:schemeClr val="lt1"/>
+          </a:fontRef>
+        </p:style>
+        <p:txBody>
+          <a:bodyPr rtlCol="0" anchor="ctr"/>
+          <a:lstStyle/>
+          <a:p>
+            <a:pPr algn="ctr"/>
+            <a:endParaRPr lang="en-US">
+              <a:latin typeface="Times New Roman" panose="02020603050405020304" pitchFamily="18" charset="0"/>
+              <a:cs typeface="Times New Roman" panose="02020603050405020304" pitchFamily="18" charset="0"/>
+            </a:endParaRPr>
+          </a:p>
+        </p:txBody>
+      </p:sp>
+      <p:sp>
+        <p:nvSpPr>
+          <p:cNvPr id="18" name="Rectangle 17">
+            <a:extLst>
+              <a:ext uri="{FF2B5EF4-FFF2-40B4-BE49-F238E27FC236}">
+                <a16:creationId xmlns:a16="http://schemas.microsoft.com/office/drawing/2014/main" id="{A4E7F626-103D-3BA1-42F9-211847917C12}"/>
+              </a:ext>
+            </a:extLst>
+          </p:cNvPr>
+          <p:cNvSpPr/>
+          <p:nvPr/>
+        </p:nvSpPr>
+        <p:spPr>
+          <a:xfrm rot="16200000">
+            <a:off x="2522581" y="-318404"/>
+            <a:ext cx="68674" cy="3246390"/>
+          </a:xfrm>
+          <a:prstGeom prst="rect">
+            <a:avLst/>
+          </a:prstGeom>
+          <a:solidFill>
+            <a:srgbClr val="7030A0"/>
+          </a:solidFill>
+          <a:ln>
+            <a:solidFill>
+              <a:srgbClr val="7030A0"/>
+            </a:solidFill>
+          </a:ln>
+        </p:spPr>
+        <p:style>
+          <a:lnRef idx="2">
+            <a:schemeClr val="accent1">
+              <a:shade val="15000"/>
+            </a:schemeClr>
+          </a:lnRef>
+          <a:fillRef idx="1">
+            <a:schemeClr val="accent1"/>
+          </a:fillRef>
+          <a:effectRef idx="0">
+            <a:schemeClr val="accent1"/>
+          </a:effectRef>
+          <a:fontRef idx="minor">
+            <a:schemeClr val="lt1"/>
+          </a:fontRef>
+        </p:style>
+        <p:txBody>
+          <a:bodyPr rtlCol="0" anchor="ctr"/>
+          <a:lstStyle/>
+          <a:p>
+            <a:pPr algn="ctr"/>
+            <a:endParaRPr lang="en-US">
+              <a:latin typeface="Times New Roman" panose="02020603050405020304" pitchFamily="18" charset="0"/>
+              <a:cs typeface="Times New Roman" panose="02020603050405020304" pitchFamily="18" charset="0"/>
+            </a:endParaRPr>
+          </a:p>
+        </p:txBody>
+      </p:sp>
+      <p:sp>
+        <p:nvSpPr>
+          <p:cNvPr id="12" name="TextBox 11">
+            <a:extLst>
+              <a:ext uri="{FF2B5EF4-FFF2-40B4-BE49-F238E27FC236}">
+                <a16:creationId xmlns:a16="http://schemas.microsoft.com/office/drawing/2014/main" id="{F350AFCA-CE89-1A02-B58E-1B2B22A28034}"/>
+              </a:ext>
+            </a:extLst>
+          </p:cNvPr>
+          <p:cNvSpPr txBox="1"/>
+          <p:nvPr/>
+        </p:nvSpPr>
+        <p:spPr>
+          <a:xfrm>
+            <a:off x="772906" y="405121"/>
+            <a:ext cx="6591721" cy="830997"/>
+          </a:xfrm>
+          <a:prstGeom prst="rect">
+            <a:avLst/>
+          </a:prstGeom>
+          <a:noFill/>
+        </p:spPr>
+        <p:txBody>
+          <a:bodyPr wrap="square" rtlCol="0">
+            <a:spAutoFit/>
+          </a:bodyPr>
+          <a:lstStyle/>
+          <a:p>
+            <a:r>
+              <a:rPr lang="en-US" sz="4800" dirty="0">
+                <a:latin typeface="Times New Roman" panose="02020603050405020304" pitchFamily="18" charset="0"/>
+                <a:cs typeface="Times New Roman" panose="02020603050405020304" pitchFamily="18" charset="0"/>
+              </a:rPr>
+              <a:t>Thesis: Latency Fairness</a:t>
+            </a:r>
+            <a:endParaRPr lang="en-US" sz="3000" dirty="0">
+              <a:latin typeface="Times New Roman" panose="02020603050405020304" pitchFamily="18" charset="0"/>
+              <a:cs typeface="Times New Roman" panose="02020603050405020304" pitchFamily="18" charset="0"/>
+            </a:endParaRPr>
+          </a:p>
+        </p:txBody>
+      </p:sp>
+      <p:sp>
+        <p:nvSpPr>
+          <p:cNvPr id="4" name="TextBox 3">
+            <a:extLst>
+              <a:ext uri="{FF2B5EF4-FFF2-40B4-BE49-F238E27FC236}">
+                <a16:creationId xmlns:a16="http://schemas.microsoft.com/office/drawing/2014/main" id="{A35CA6EB-E3C2-ED3F-1264-A7A554866077}"/>
+              </a:ext>
+            </a:extLst>
+          </p:cNvPr>
+          <p:cNvSpPr txBox="1"/>
+          <p:nvPr/>
+        </p:nvSpPr>
+        <p:spPr>
+          <a:xfrm>
+            <a:off x="4229584" y="3089189"/>
+            <a:ext cx="2830628" cy="1015663"/>
+          </a:xfrm>
+          <a:prstGeom prst="rect">
+            <a:avLst/>
+          </a:prstGeom>
+          <a:noFill/>
+        </p:spPr>
+        <p:txBody>
+          <a:bodyPr wrap="square" rtlCol="0">
+            <a:spAutoFit/>
+          </a:bodyPr>
+          <a:lstStyle/>
+          <a:p>
+            <a:pPr algn="ctr"/>
+            <a:r>
+              <a:rPr lang="en-US" sz="3000" dirty="0">
+                <a:solidFill>
+                  <a:srgbClr val="7030A0"/>
+                </a:solidFill>
+                <a:latin typeface="Times New Roman" panose="02020603050405020304" pitchFamily="18" charset="0"/>
+                <a:cs typeface="Times New Roman" panose="02020603050405020304" pitchFamily="18" charset="0"/>
+              </a:rPr>
+              <a:t>Inbound</a:t>
+            </a:r>
+            <a:br>
+              <a:rPr lang="en-US" sz="3000" dirty="0">
+                <a:solidFill>
+                  <a:srgbClr val="7030A0"/>
+                </a:solidFill>
+                <a:latin typeface="Times New Roman" panose="02020603050405020304" pitchFamily="18" charset="0"/>
+                <a:cs typeface="Times New Roman" panose="02020603050405020304" pitchFamily="18" charset="0"/>
+              </a:rPr>
+            </a:br>
+            <a:r>
+              <a:rPr lang="en-US" sz="3000" dirty="0">
+                <a:solidFill>
+                  <a:srgbClr val="7030A0"/>
+                </a:solidFill>
+                <a:latin typeface="Times New Roman" panose="02020603050405020304" pitchFamily="18" charset="0"/>
+                <a:cs typeface="Times New Roman" panose="02020603050405020304" pitchFamily="18" charset="0"/>
+              </a:rPr>
+              <a:t>Communication</a:t>
+            </a:r>
+          </a:p>
+        </p:txBody>
+      </p:sp>
+      <p:sp>
+        <p:nvSpPr>
+          <p:cNvPr id="10" name="TextBox 9">
+            <a:extLst>
+              <a:ext uri="{FF2B5EF4-FFF2-40B4-BE49-F238E27FC236}">
+                <a16:creationId xmlns:a16="http://schemas.microsoft.com/office/drawing/2014/main" id="{1A401610-C405-FE5D-753E-B5D7DFC24D10}"/>
+              </a:ext>
+            </a:extLst>
+          </p:cNvPr>
+          <p:cNvSpPr txBox="1"/>
+          <p:nvPr/>
+        </p:nvSpPr>
+        <p:spPr>
+          <a:xfrm>
+            <a:off x="933723" y="3095367"/>
+            <a:ext cx="2830628" cy="1015663"/>
+          </a:xfrm>
+          <a:prstGeom prst="rect">
+            <a:avLst/>
+          </a:prstGeom>
+          <a:noFill/>
+        </p:spPr>
+        <p:txBody>
+          <a:bodyPr wrap="square" rtlCol="0">
+            <a:spAutoFit/>
+          </a:bodyPr>
+          <a:lstStyle/>
+          <a:p>
+            <a:pPr algn="ctr"/>
+            <a:r>
+              <a:rPr lang="en-US" sz="3000" dirty="0">
+                <a:solidFill>
+                  <a:srgbClr val="7030A0"/>
+                </a:solidFill>
+                <a:latin typeface="Times New Roman" panose="02020603050405020304" pitchFamily="18" charset="0"/>
+                <a:cs typeface="Times New Roman" panose="02020603050405020304" pitchFamily="18" charset="0"/>
+              </a:rPr>
+              <a:t>Outbound</a:t>
+            </a:r>
+            <a:br>
+              <a:rPr lang="en-US" sz="3000" dirty="0">
+                <a:solidFill>
+                  <a:srgbClr val="7030A0"/>
+                </a:solidFill>
+                <a:latin typeface="Times New Roman" panose="02020603050405020304" pitchFamily="18" charset="0"/>
+                <a:cs typeface="Times New Roman" panose="02020603050405020304" pitchFamily="18" charset="0"/>
+              </a:rPr>
+            </a:br>
+            <a:r>
+              <a:rPr lang="en-US" sz="3000" dirty="0">
+                <a:solidFill>
+                  <a:srgbClr val="7030A0"/>
+                </a:solidFill>
+                <a:latin typeface="Times New Roman" panose="02020603050405020304" pitchFamily="18" charset="0"/>
+                <a:cs typeface="Times New Roman" panose="02020603050405020304" pitchFamily="18" charset="0"/>
+              </a:rPr>
+              <a:t>Communication</a:t>
+            </a:r>
+          </a:p>
+        </p:txBody>
+      </p:sp>
+      <p:pic>
+        <p:nvPicPr>
+          <p:cNvPr id="5" name="Graphic 4" descr="Clock with solid fill">
+            <a:extLst>
+              <a:ext uri="{FF2B5EF4-FFF2-40B4-BE49-F238E27FC236}">
+                <a16:creationId xmlns:a16="http://schemas.microsoft.com/office/drawing/2014/main" id="{C1E514BE-4A3E-6FCE-E902-24C3370D6763}"/>
+              </a:ext>
+            </a:extLst>
+          </p:cNvPr>
+          <p:cNvPicPr>
+            <a:picLocks noChangeAspect="1"/>
+          </p:cNvPicPr>
+          <p:nvPr/>
+        </p:nvPicPr>
+        <p:blipFill>
+          <a:blip>
+            <a:extLst>
+              <a:ext uri="{96DAC541-7B7A-43D3-8B79-37D633B846F1}">
+                <asvg:svgBlip xmlns:asvg="http://schemas.microsoft.com/office/drawing/2016/SVG/main" r:embed="rId3"/>
+              </a:ext>
+            </a:extLst>
+          </a:blip>
+          <a:stretch>
+            <a:fillRect/>
+          </a:stretch>
+        </p:blipFill>
+        <p:spPr>
+          <a:xfrm>
+            <a:off x="2625368" y="2338965"/>
+            <a:ext cx="914400" cy="914400"/>
+          </a:xfrm>
+          <a:prstGeom prst="rect">
+            <a:avLst/>
+          </a:prstGeom>
+        </p:spPr>
+      </p:pic>
+      <p:sp>
+        <p:nvSpPr>
+          <p:cNvPr id="7" name="TextBox 6">
+            <a:extLst>
+              <a:ext uri="{FF2B5EF4-FFF2-40B4-BE49-F238E27FC236}">
+                <a16:creationId xmlns:a16="http://schemas.microsoft.com/office/drawing/2014/main" id="{307F30E8-D4F8-B3FC-FDA8-BE0D7CB9AE5B}"/>
+              </a:ext>
+            </a:extLst>
+          </p:cNvPr>
+          <p:cNvSpPr txBox="1"/>
+          <p:nvPr/>
+        </p:nvSpPr>
+        <p:spPr>
+          <a:xfrm>
+            <a:off x="3445340" y="2288333"/>
+            <a:ext cx="3614872" cy="1015663"/>
+          </a:xfrm>
+          <a:prstGeom prst="rect">
+            <a:avLst/>
+          </a:prstGeom>
+          <a:noFill/>
+        </p:spPr>
+        <p:txBody>
+          <a:bodyPr wrap="square" rtlCol="0">
+            <a:spAutoFit/>
+          </a:bodyPr>
+          <a:lstStyle/>
+          <a:p>
+            <a:r>
+              <a:rPr lang="en-US" sz="3000" dirty="0"/>
+              <a:t>Tightly Synchronized Clocks</a:t>
+            </a:r>
+          </a:p>
+        </p:txBody>
+      </p:sp>
+      <p:sp>
+        <p:nvSpPr>
+          <p:cNvPr id="2" name="Rounded Rectangle 1">
+            <a:extLst>
+              <a:ext uri="{FF2B5EF4-FFF2-40B4-BE49-F238E27FC236}">
+                <a16:creationId xmlns:a16="http://schemas.microsoft.com/office/drawing/2014/main" id="{53274D20-301F-A4CB-EB38-3DD11CFC7147}"/>
+              </a:ext>
+            </a:extLst>
+          </p:cNvPr>
+          <p:cNvSpPr/>
+          <p:nvPr/>
+        </p:nvSpPr>
+        <p:spPr>
+          <a:xfrm>
+            <a:off x="7643442" y="2761827"/>
+            <a:ext cx="4032482" cy="2279729"/>
+          </a:xfrm>
+          <a:prstGeom prst="roundRect">
+            <a:avLst/>
+          </a:prstGeom>
+          <a:solidFill>
+            <a:schemeClr val="accent4">
+              <a:lumMod val="40000"/>
+              <a:lumOff val="60000"/>
+            </a:schemeClr>
+          </a:solidFill>
+          <a:ln>
+            <a:noFill/>
+          </a:ln>
+        </p:spPr>
+        <p:style>
+          <a:lnRef idx="2">
+            <a:schemeClr val="accent1">
+              <a:shade val="15000"/>
+            </a:schemeClr>
+          </a:lnRef>
+          <a:fillRef idx="1">
+            <a:schemeClr val="accent1"/>
+          </a:fillRef>
+          <a:effectRef idx="0">
+            <a:schemeClr val="accent1"/>
+          </a:effectRef>
+          <a:fontRef idx="minor">
+            <a:schemeClr val="lt1"/>
+          </a:fontRef>
+        </p:style>
+        <p:txBody>
+          <a:bodyPr rtlCol="0" anchor="ctr"/>
+          <a:lstStyle/>
+          <a:p>
+            <a:pPr algn="ctr"/>
+            <a:endParaRPr lang="en-US"/>
+          </a:p>
+        </p:txBody>
+      </p:sp>
+      <p:sp>
+        <p:nvSpPr>
+          <p:cNvPr id="8" name="TextBox 7">
+            <a:extLst>
+              <a:ext uri="{FF2B5EF4-FFF2-40B4-BE49-F238E27FC236}">
+                <a16:creationId xmlns:a16="http://schemas.microsoft.com/office/drawing/2014/main" id="{98D180D5-504B-B0A2-4348-AAE53CBD0D84}"/>
+              </a:ext>
+            </a:extLst>
+          </p:cNvPr>
+          <p:cNvSpPr txBox="1"/>
+          <p:nvPr/>
+        </p:nvSpPr>
+        <p:spPr>
+          <a:xfrm>
+            <a:off x="8232575" y="3089189"/>
+            <a:ext cx="2830628" cy="1015663"/>
+          </a:xfrm>
+          <a:prstGeom prst="rect">
+            <a:avLst/>
+          </a:prstGeom>
+          <a:noFill/>
+        </p:spPr>
+        <p:txBody>
+          <a:bodyPr wrap="square" rtlCol="0">
+            <a:spAutoFit/>
+          </a:bodyPr>
+          <a:lstStyle/>
+          <a:p>
+            <a:pPr algn="ctr"/>
+            <a:r>
+              <a:rPr lang="en-US" sz="3000" dirty="0">
+                <a:solidFill>
+                  <a:srgbClr val="7030A0"/>
+                </a:solidFill>
+                <a:latin typeface="Times New Roman" panose="02020603050405020304" pitchFamily="18" charset="0"/>
+                <a:cs typeface="Times New Roman" panose="02020603050405020304" pitchFamily="18" charset="0"/>
+              </a:rPr>
+              <a:t>Inbound</a:t>
+            </a:r>
+            <a:br>
+              <a:rPr lang="en-US" sz="3000" dirty="0">
+                <a:solidFill>
+                  <a:srgbClr val="7030A0"/>
+                </a:solidFill>
+                <a:latin typeface="Times New Roman" panose="02020603050405020304" pitchFamily="18" charset="0"/>
+                <a:cs typeface="Times New Roman" panose="02020603050405020304" pitchFamily="18" charset="0"/>
+              </a:rPr>
+            </a:br>
+            <a:r>
+              <a:rPr lang="en-US" sz="3000" dirty="0">
+                <a:solidFill>
+                  <a:srgbClr val="7030A0"/>
+                </a:solidFill>
+                <a:latin typeface="Times New Roman" panose="02020603050405020304" pitchFamily="18" charset="0"/>
+                <a:cs typeface="Times New Roman" panose="02020603050405020304" pitchFamily="18" charset="0"/>
+              </a:rPr>
+              <a:t>Communication</a:t>
+            </a:r>
+          </a:p>
+        </p:txBody>
+      </p:sp>
+      <p:pic>
+        <p:nvPicPr>
+          <p:cNvPr id="11" name="Graphic 10" descr="Normal Distribution with solid fill">
+            <a:extLst>
+              <a:ext uri="{FF2B5EF4-FFF2-40B4-BE49-F238E27FC236}">
+                <a16:creationId xmlns:a16="http://schemas.microsoft.com/office/drawing/2014/main" id="{B6B7790C-443C-3E07-213A-980A49AC4ED8}"/>
+              </a:ext>
+            </a:extLst>
+          </p:cNvPr>
+          <p:cNvPicPr>
+            <a:picLocks noChangeAspect="1"/>
+          </p:cNvPicPr>
+          <p:nvPr/>
+        </p:nvPicPr>
+        <p:blipFill>
+          <a:blip>
+            <a:extLst>
+              <a:ext uri="{96DAC541-7B7A-43D3-8B79-37D633B846F1}">
+                <asvg:svgBlip xmlns:asvg="http://schemas.microsoft.com/office/drawing/2016/SVG/main" r:embed="rId4"/>
+              </a:ext>
+            </a:extLst>
+          </a:blip>
+          <a:stretch>
+            <a:fillRect/>
+          </a:stretch>
+        </p:blipFill>
+        <p:spPr>
+          <a:xfrm>
+            <a:off x="8232575" y="2206810"/>
+            <a:ext cx="914400" cy="914400"/>
+          </a:xfrm>
+          <a:prstGeom prst="rect">
+            <a:avLst/>
+          </a:prstGeom>
+        </p:spPr>
+      </p:pic>
+      <p:sp>
+        <p:nvSpPr>
+          <p:cNvPr id="13" name="TextBox 12">
+            <a:extLst>
+              <a:ext uri="{FF2B5EF4-FFF2-40B4-BE49-F238E27FC236}">
+                <a16:creationId xmlns:a16="http://schemas.microsoft.com/office/drawing/2014/main" id="{06CAAFA5-F0F7-B64B-945B-F008BBFF8FEB}"/>
+              </a:ext>
+            </a:extLst>
+          </p:cNvPr>
+          <p:cNvSpPr txBox="1"/>
+          <p:nvPr/>
+        </p:nvSpPr>
+        <p:spPr>
+          <a:xfrm>
+            <a:off x="9059956" y="2152485"/>
+            <a:ext cx="2846807" cy="1015663"/>
+          </a:xfrm>
+          <a:prstGeom prst="rect">
+            <a:avLst/>
+          </a:prstGeom>
+          <a:noFill/>
+        </p:spPr>
+        <p:txBody>
+          <a:bodyPr wrap="square" rtlCol="0">
+            <a:spAutoFit/>
+          </a:bodyPr>
+          <a:lstStyle/>
+          <a:p>
+            <a:r>
+              <a:rPr lang="en-US" sz="3000" dirty="0"/>
+              <a:t>Time as a random variable</a:t>
+            </a:r>
+          </a:p>
+        </p:txBody>
+      </p:sp>
+      <p:sp>
+        <p:nvSpPr>
+          <p:cNvPr id="9" name="TextBox 8">
+            <a:extLst>
+              <a:ext uri="{FF2B5EF4-FFF2-40B4-BE49-F238E27FC236}">
+                <a16:creationId xmlns:a16="http://schemas.microsoft.com/office/drawing/2014/main" id="{E3F2E211-91A5-DD9B-70BF-573CB855077D}"/>
+              </a:ext>
+            </a:extLst>
+          </p:cNvPr>
+          <p:cNvSpPr txBox="1"/>
+          <p:nvPr/>
+        </p:nvSpPr>
+        <p:spPr>
+          <a:xfrm>
+            <a:off x="2121325" y="4564534"/>
+            <a:ext cx="3872835" cy="461665"/>
+          </a:xfrm>
+          <a:prstGeom prst="rect">
+            <a:avLst/>
+          </a:prstGeom>
+          <a:noFill/>
+        </p:spPr>
+        <p:txBody>
+          <a:bodyPr wrap="square" rtlCol="0">
+            <a:spAutoFit/>
+          </a:bodyPr>
+          <a:lstStyle/>
+          <a:p>
+            <a:pPr algn="ctr"/>
+            <a:r>
+              <a:rPr lang="en-US" sz="2400" dirty="0">
+                <a:latin typeface="Times New Roman" panose="02020603050405020304" pitchFamily="18" charset="0"/>
+                <a:cs typeface="Times New Roman" panose="02020603050405020304" pitchFamily="18" charset="0"/>
+              </a:rPr>
+              <a:t>ACM SIGCOMM’25</a:t>
+            </a:r>
+          </a:p>
+        </p:txBody>
+      </p:sp>
+      <p:sp>
+        <p:nvSpPr>
+          <p:cNvPr id="14" name="TextBox 13">
+            <a:extLst>
+              <a:ext uri="{FF2B5EF4-FFF2-40B4-BE49-F238E27FC236}">
+                <a16:creationId xmlns:a16="http://schemas.microsoft.com/office/drawing/2014/main" id="{AAC98C97-4F56-BA56-E984-2DBDF1E4D90E}"/>
+              </a:ext>
+            </a:extLst>
+          </p:cNvPr>
+          <p:cNvSpPr txBox="1"/>
+          <p:nvPr/>
+        </p:nvSpPr>
+        <p:spPr>
+          <a:xfrm>
+            <a:off x="7643442" y="4111538"/>
+            <a:ext cx="3872835" cy="461665"/>
+          </a:xfrm>
+          <a:prstGeom prst="rect">
+            <a:avLst/>
+          </a:prstGeom>
+          <a:noFill/>
+        </p:spPr>
+        <p:txBody>
+          <a:bodyPr wrap="square" rtlCol="0">
+            <a:spAutoFit/>
+          </a:bodyPr>
+          <a:lstStyle/>
+          <a:p>
+            <a:pPr algn="ctr"/>
+            <a:r>
+              <a:rPr lang="en-US" sz="2400" dirty="0">
+                <a:latin typeface="Times New Roman" panose="02020603050405020304" pitchFamily="18" charset="0"/>
+                <a:cs typeface="Times New Roman" panose="02020603050405020304" pitchFamily="18" charset="0"/>
+              </a:rPr>
+              <a:t>ACM HotNets’25</a:t>
+            </a:r>
+          </a:p>
+        </p:txBody>
+      </p:sp>
+      <p:sp>
+        <p:nvSpPr>
+          <p:cNvPr id="15" name="TextBox 14">
+            <a:extLst>
+              <a:ext uri="{FF2B5EF4-FFF2-40B4-BE49-F238E27FC236}">
+                <a16:creationId xmlns:a16="http://schemas.microsoft.com/office/drawing/2014/main" id="{887EE278-208A-4B93-637F-68B276C2F983}"/>
+              </a:ext>
+            </a:extLst>
+          </p:cNvPr>
+          <p:cNvSpPr txBox="1"/>
+          <p:nvPr/>
+        </p:nvSpPr>
+        <p:spPr>
+          <a:xfrm>
+            <a:off x="7643442" y="4507299"/>
+            <a:ext cx="3872835" cy="461665"/>
+          </a:xfrm>
+          <a:prstGeom prst="rect">
+            <a:avLst/>
+          </a:prstGeom>
+          <a:noFill/>
+        </p:spPr>
+        <p:txBody>
+          <a:bodyPr wrap="square" rtlCol="0">
+            <a:spAutoFit/>
+          </a:bodyPr>
+          <a:lstStyle/>
+          <a:p>
+            <a:pPr algn="ctr"/>
+            <a:r>
+              <a:rPr lang="en-US" sz="2400" dirty="0">
+                <a:latin typeface="Times New Roman" panose="02020603050405020304" pitchFamily="18" charset="0"/>
+                <a:cs typeface="Times New Roman" panose="02020603050405020304" pitchFamily="18" charset="0"/>
+              </a:rPr>
+              <a:t>Submitted to SIGCOMM’26</a:t>
+            </a:r>
+          </a:p>
+        </p:txBody>
+      </p:sp>
+    </p:spTree>
+    <p:extLst>
+      <p:ext uri="{BB962C8B-B14F-4D97-AF65-F5344CB8AC3E}">
+        <p14:creationId xmlns:p14="http://schemas.microsoft.com/office/powerpoint/2010/main" val="229929111"/>
+      </p:ext>
+    </p:extLst>
+  </p:cSld>
+  <p:clrMapOvr>
+    <a:masterClrMapping/>
+  </p:clrMapOvr>
+  <mc:AlternateContent xmlns:mc="http://schemas.openxmlformats.org/markup-compatibility/2006" xmlns:p159="http://schemas.microsoft.com/office/powerpoint/2015/09/main">
+    <mc:Choice Requires="p159">
+      <p:transition spd="med">
+        <p159:morph option="byWord"/>
+      </p:transition>
+    </mc:Choice>
+    <mc:Fallback xmlns="">
+      <p:transition spd="med">
+        <p:fade/>
+      </p:transition>
+    </mc:Fallback>
+  </mc:AlternateContent>
+  <p:timing>
+    <p:tnLst>
+      <p:par>
+        <p:cTn id="1" dur="indefinite" restart="never" nodeType="tmRoot">
+          <p:childTnLst>
+            <p:seq concurrent="1" nextAc="seek">
+              <p:cTn id="2" dur="indefinite" nodeType="mainSeq">
+                <p:childTnLst>
+                  <p:par>
+                    <p:cTn id="3" fill="hold">
+                      <p:stCondLst>
+                        <p:cond delay="indefinite"/>
+                      </p:stCondLst>
+                      <p:childTnLst>
+                        <p:par>
+                          <p:cTn id="4" fill="hold">
+                            <p:stCondLst>
+                              <p:cond delay="0"/>
+                            </p:stCondLst>
+                            <p:childTnLst>
+                              <p:par>
+                                <p:cTn id="5" presetID="1" presetClass="entr" presetSubtype="0" fill="hold" grpId="0" nodeType="clickEffect">
+                                  <p:stCondLst>
+                                    <p:cond delay="0"/>
+                                  </p:stCondLst>
+                                  <p:childTnLst>
+                                    <p:set>
+                                      <p:cBhvr>
+                                        <p:cTn id="6" dur="1" fill="hold">
+                                          <p:stCondLst>
+                                            <p:cond delay="0"/>
+                                          </p:stCondLst>
+                                        </p:cTn>
+                                        <p:tgtEl>
+                                          <p:spTgt spid="14"/>
+                                        </p:tgtEl>
+                                        <p:attrNameLst>
+                                          <p:attrName>style.visibility</p:attrName>
+                                        </p:attrNameLst>
+                                      </p:cBhvr>
+                                      <p:to>
+                                        <p:strVal val="visible"/>
+                                      </p:to>
+                                    </p:set>
+                                  </p:childTnLst>
+                                </p:cTn>
+                              </p:par>
+                              <p:par>
+                                <p:cTn id="7" presetID="1" presetClass="entr" presetSubtype="0" fill="hold" grpId="0" nodeType="withEffect">
+                                  <p:stCondLst>
+                                    <p:cond delay="0"/>
+                                  </p:stCondLst>
+                                  <p:childTnLst>
+                                    <p:set>
+                                      <p:cBhvr>
+                                        <p:cTn id="8" dur="1" fill="hold">
+                                          <p:stCondLst>
+                                            <p:cond delay="0"/>
+                                          </p:stCondLst>
+                                        </p:cTn>
+                                        <p:tgtEl>
+                                          <p:spTgt spid="15"/>
+                                        </p:tgtEl>
+                                        <p:attrNameLst>
+                                          <p:attrName>style.visibility</p:attrName>
+                                        </p:attrNameLst>
+                                      </p:cBhvr>
+                                      <p:to>
+                                        <p:strVal val="visible"/>
+                                      </p:to>
+                                    </p:set>
+                                  </p:childTnLst>
+                                </p:cTn>
+                              </p:par>
+                            </p:childTnLst>
+                          </p:cTn>
+                        </p:par>
+                      </p:childTnLst>
+                    </p:cTn>
+                  </p:par>
+                </p:childTnLst>
+              </p:cTn>
+              <p:prevCondLst>
+                <p:cond evt="onPrev" delay="0">
+                  <p:tgtEl>
+                    <p:sldTgt/>
+                  </p:tgtEl>
+                </p:cond>
+              </p:prevCondLst>
+              <p:nextCondLst>
+                <p:cond evt="onNext" delay="0">
+                  <p:tgtEl>
+                    <p:sldTgt/>
+                  </p:tgtEl>
+                </p:cond>
+              </p:nextCondLst>
+            </p:seq>
+          </p:childTnLst>
+        </p:cTn>
+      </p:par>
+    </p:tnLst>
+    <p:bldLst>
+      <p:bldP spid="14" grpId="0"/>
+      <p:bldP spid="15" grpId="0"/>
+    </p:bldLst>
+  </p:timing>
+</p:sld>
+</file>
+
+<file path=ppt/slides/slide21.xml><?xml version="1.0" encoding="utf-8"?>
+<p:sld xmlns:a="http://schemas.openxmlformats.org/drawingml/2006/main" xmlns:r="http://schemas.openxmlformats.org/officeDocument/2006/relationships" xmlns:p="http://schemas.openxmlformats.org/presentationml/2006/main">
+  <p:cSld>
+    <p:spTree>
+      <p:nvGrpSpPr>
+        <p:cNvPr id="1" name="">
+          <a:extLst>
+            <a:ext uri="{FF2B5EF4-FFF2-40B4-BE49-F238E27FC236}">
               <a16:creationId xmlns:a16="http://schemas.microsoft.com/office/drawing/2014/main" id="{70F06775-70DA-824D-D1F1-09F7A2F728C7}"/>
             </a:ext>
           </a:extLst>
@@ -15803,7 +18103,7 @@
 </p:sld>
 </file>
 
-<file path=ppt/slides/slide21.xml><?xml version="1.0" encoding="utf-8"?>
+<file path=ppt/slides/slide22.xml><?xml version="1.0" encoding="utf-8"?>
 <p:sld xmlns:a="http://schemas.openxmlformats.org/drawingml/2006/main" xmlns:r="http://schemas.openxmlformats.org/officeDocument/2006/relationships" xmlns:p="http://schemas.openxmlformats.org/presentationml/2006/main">
   <p:cSld>
     <p:spTree>

--- a/thesis-latency-fairness.pptx
+++ b/thesis-latency-fairness.pptx
@@ -5,7 +5,7 @@
     <p:sldMasterId id="2147483648" r:id="rId1"/>
   </p:sldMasterIdLst>
   <p:notesMasterIdLst>
-    <p:notesMasterId r:id="rId24"/>
+    <p:notesMasterId r:id="rId25"/>
   </p:notesMasterIdLst>
   <p:sldIdLst>
     <p:sldId id="256" r:id="rId2"/>
@@ -30,6 +30,7 @@
     <p:sldId id="273" r:id="rId21"/>
     <p:sldId id="274" r:id="rId22"/>
     <p:sldId id="276" r:id="rId23"/>
+    <p:sldId id="281" r:id="rId24"/>
   </p:sldIdLst>
   <p:sldSz cx="12192000" cy="6858000"/>
   <p:notesSz cx="6858000" cy="9144000"/>
@@ -1319,6 +1320,114 @@
     <p:extLst>
       <p:ext uri="{BB962C8B-B14F-4D97-AF65-F5344CB8AC3E}">
         <p14:creationId xmlns:p14="http://schemas.microsoft.com/office/powerpoint/2010/main" val="3780556609"/>
+      </p:ext>
+    </p:extLst>
+  </p:cSld>
+  <p:clrMapOvr>
+    <a:masterClrMapping/>
+  </p:clrMapOvr>
+</p:notes>
+</file>
+
+<file path=ppt/notesSlides/notesSlide17.xml><?xml version="1.0" encoding="utf-8"?>
+<p:notes xmlns:a="http://schemas.openxmlformats.org/drawingml/2006/main" xmlns:r="http://schemas.openxmlformats.org/officeDocument/2006/relationships" xmlns:p="http://schemas.openxmlformats.org/presentationml/2006/main">
+  <p:cSld>
+    <p:spTree>
+      <p:nvGrpSpPr>
+        <p:cNvPr id="1" name="">
+          <a:extLst>
+            <a:ext uri="{FF2B5EF4-FFF2-40B4-BE49-F238E27FC236}">
+              <a16:creationId xmlns:a16="http://schemas.microsoft.com/office/drawing/2014/main" id="{77A0CADE-31CB-CFD5-187D-FB90C4A8D2A3}"/>
+            </a:ext>
+          </a:extLst>
+        </p:cNvPr>
+        <p:cNvGrpSpPr/>
+        <p:nvPr/>
+      </p:nvGrpSpPr>
+      <p:grpSpPr>
+        <a:xfrm>
+          <a:off x="0" y="0"/>
+          <a:ext cx="0" cy="0"/>
+          <a:chOff x="0" y="0"/>
+          <a:chExt cx="0" cy="0"/>
+        </a:xfrm>
+      </p:grpSpPr>
+      <p:sp>
+        <p:nvSpPr>
+          <p:cNvPr id="2" name="Slide Image Placeholder 1">
+            <a:extLst>
+              <a:ext uri="{FF2B5EF4-FFF2-40B4-BE49-F238E27FC236}">
+                <a16:creationId xmlns:a16="http://schemas.microsoft.com/office/drawing/2014/main" id="{9C4CD94A-62E9-D64F-AC91-A9FD3919F712}"/>
+              </a:ext>
+            </a:extLst>
+          </p:cNvPr>
+          <p:cNvSpPr>
+            <a:spLocks noGrp="1" noRot="1" noChangeAspect="1"/>
+          </p:cNvSpPr>
+          <p:nvPr>
+            <p:ph type="sldImg"/>
+          </p:nvPr>
+        </p:nvSpPr>
+        <p:spPr/>
+      </p:sp>
+      <p:sp>
+        <p:nvSpPr>
+          <p:cNvPr id="3" name="Notes Placeholder 2">
+            <a:extLst>
+              <a:ext uri="{FF2B5EF4-FFF2-40B4-BE49-F238E27FC236}">
+                <a16:creationId xmlns:a16="http://schemas.microsoft.com/office/drawing/2014/main" id="{8AF4ADE3-3668-9E50-6FFE-F7B456C15C78}"/>
+              </a:ext>
+            </a:extLst>
+          </p:cNvPr>
+          <p:cNvSpPr>
+            <a:spLocks noGrp="1"/>
+          </p:cNvSpPr>
+          <p:nvPr>
+            <p:ph type="body" idx="1"/>
+          </p:nvPr>
+        </p:nvSpPr>
+        <p:spPr/>
+        <p:txBody>
+          <a:bodyPr/>
+          <a:lstStyle/>
+          <a:p>
+            <a:endParaRPr lang="en-US" dirty="0"/>
+          </a:p>
+        </p:txBody>
+      </p:sp>
+      <p:sp>
+        <p:nvSpPr>
+          <p:cNvPr id="4" name="Slide Number Placeholder 3">
+            <a:extLst>
+              <a:ext uri="{FF2B5EF4-FFF2-40B4-BE49-F238E27FC236}">
+                <a16:creationId xmlns:a16="http://schemas.microsoft.com/office/drawing/2014/main" id="{635C9549-C470-86BC-1EE8-67C3AB749131}"/>
+              </a:ext>
+            </a:extLst>
+          </p:cNvPr>
+          <p:cNvSpPr>
+            <a:spLocks noGrp="1"/>
+          </p:cNvSpPr>
+          <p:nvPr>
+            <p:ph type="sldNum" sz="quarter" idx="5"/>
+          </p:nvPr>
+        </p:nvSpPr>
+        <p:spPr/>
+        <p:txBody>
+          <a:bodyPr/>
+          <a:lstStyle/>
+          <a:p>
+            <a:fld id="{5AD2936D-68DF-C34D-84E6-1FDAB4C19BCF}" type="slidenum">
+              <a:rPr lang="en-US" smtClean="0"/>
+              <a:t>23</a:t>
+            </a:fld>
+            <a:endParaRPr lang="en-US"/>
+          </a:p>
+        </p:txBody>
+      </p:sp>
+    </p:spTree>
+    <p:extLst>
+      <p:ext uri="{BB962C8B-B14F-4D97-AF65-F5344CB8AC3E}">
+        <p14:creationId xmlns:p14="http://schemas.microsoft.com/office/powerpoint/2010/main" val="3546566508"/>
       </p:ext>
     </p:extLst>
   </p:cSld>
@@ -19000,6 +19109,312 @@
     <p:extLst>
       <p:ext uri="{BB962C8B-B14F-4D97-AF65-F5344CB8AC3E}">
         <p14:creationId xmlns:p14="http://schemas.microsoft.com/office/powerpoint/2010/main" val="3396139960"/>
+      </p:ext>
+    </p:extLst>
+  </p:cSld>
+  <p:clrMapOvr>
+    <a:masterClrMapping/>
+  </p:clrMapOvr>
+  <mc:AlternateContent xmlns:mc="http://schemas.openxmlformats.org/markup-compatibility/2006" xmlns:p159="http://schemas.microsoft.com/office/powerpoint/2015/09/main">
+    <mc:Choice Requires="p159">
+      <p:transition spd="med">
+        <p159:morph option="byWord"/>
+      </p:transition>
+    </mc:Choice>
+    <mc:Fallback xmlns="">
+      <p:transition spd="med">
+        <p:fade/>
+      </p:transition>
+    </mc:Fallback>
+  </mc:AlternateContent>
+</p:sld>
+</file>
+
+<file path=ppt/slides/slide23.xml><?xml version="1.0" encoding="utf-8"?>
+<p:sld xmlns:a="http://schemas.openxmlformats.org/drawingml/2006/main" xmlns:r="http://schemas.openxmlformats.org/officeDocument/2006/relationships" xmlns:p="http://schemas.openxmlformats.org/presentationml/2006/main">
+  <p:cSld>
+    <p:spTree>
+      <p:nvGrpSpPr>
+        <p:cNvPr id="1" name="">
+          <a:extLst>
+            <a:ext uri="{FF2B5EF4-FFF2-40B4-BE49-F238E27FC236}">
+              <a16:creationId xmlns:a16="http://schemas.microsoft.com/office/drawing/2014/main" id="{C0895072-D311-F68C-B2A5-279E63571EB3}"/>
+            </a:ext>
+          </a:extLst>
+        </p:cNvPr>
+        <p:cNvGrpSpPr/>
+        <p:nvPr/>
+      </p:nvGrpSpPr>
+      <p:grpSpPr>
+        <a:xfrm>
+          <a:off x="0" y="0"/>
+          <a:ext cx="0" cy="0"/>
+          <a:chOff x="0" y="0"/>
+          <a:chExt cx="0" cy="0"/>
+        </a:xfrm>
+      </p:grpSpPr>
+      <p:sp>
+        <p:nvSpPr>
+          <p:cNvPr id="17" name="Rectangle 16">
+            <a:extLst>
+              <a:ext uri="{FF2B5EF4-FFF2-40B4-BE49-F238E27FC236}">
+                <a16:creationId xmlns:a16="http://schemas.microsoft.com/office/drawing/2014/main" id="{FF082ADE-2353-BB96-6239-C215B9C48190}"/>
+              </a:ext>
+            </a:extLst>
+          </p:cNvPr>
+          <p:cNvSpPr/>
+          <p:nvPr/>
+        </p:nvSpPr>
+        <p:spPr>
+          <a:xfrm rot="16200000">
+            <a:off x="8170505" y="1124325"/>
+            <a:ext cx="45719" cy="4748172"/>
+          </a:xfrm>
+          <a:prstGeom prst="rect">
+            <a:avLst/>
+          </a:prstGeom>
+          <a:solidFill>
+            <a:srgbClr val="FF0000"/>
+          </a:solidFill>
+          <a:ln>
+            <a:solidFill>
+              <a:srgbClr val="FF0000"/>
+            </a:solidFill>
+          </a:ln>
+        </p:spPr>
+        <p:style>
+          <a:lnRef idx="2">
+            <a:schemeClr val="accent1">
+              <a:shade val="15000"/>
+            </a:schemeClr>
+          </a:lnRef>
+          <a:fillRef idx="1">
+            <a:schemeClr val="accent1"/>
+          </a:fillRef>
+          <a:effectRef idx="0">
+            <a:schemeClr val="accent1"/>
+          </a:effectRef>
+          <a:fontRef idx="minor">
+            <a:schemeClr val="lt1"/>
+          </a:fontRef>
+        </p:style>
+        <p:txBody>
+          <a:bodyPr rtlCol="0" anchor="ctr"/>
+          <a:lstStyle/>
+          <a:p>
+            <a:pPr algn="ctr"/>
+            <a:endParaRPr lang="en-US">
+              <a:latin typeface="Times New Roman" panose="02020603050405020304" pitchFamily="18" charset="0"/>
+              <a:cs typeface="Times New Roman" panose="02020603050405020304" pitchFamily="18" charset="0"/>
+            </a:endParaRPr>
+          </a:p>
+        </p:txBody>
+      </p:sp>
+      <p:pic>
+        <p:nvPicPr>
+          <p:cNvPr id="23" name="Picture 22">
+            <a:extLst>
+              <a:ext uri="{FF2B5EF4-FFF2-40B4-BE49-F238E27FC236}">
+                <a16:creationId xmlns:a16="http://schemas.microsoft.com/office/drawing/2014/main" id="{29CAEC30-4E16-3A5C-9CDD-6F84FC205990}"/>
+              </a:ext>
+            </a:extLst>
+          </p:cNvPr>
+          <p:cNvPicPr>
+            <a:picLocks noChangeAspect="1"/>
+          </p:cNvPicPr>
+          <p:nvPr/>
+        </p:nvPicPr>
+        <p:blipFill>
+          <a:blip r:embed="rId3"/>
+          <a:stretch>
+            <a:fillRect/>
+          </a:stretch>
+        </p:blipFill>
+        <p:spPr>
+          <a:xfrm>
+            <a:off x="1041006" y="1283720"/>
+            <a:ext cx="9948215" cy="2145280"/>
+          </a:xfrm>
+          <a:prstGeom prst="rect">
+            <a:avLst/>
+          </a:prstGeom>
+        </p:spPr>
+      </p:pic>
+      <p:sp>
+        <p:nvSpPr>
+          <p:cNvPr id="18" name="Rectangle 17">
+            <a:extLst>
+              <a:ext uri="{FF2B5EF4-FFF2-40B4-BE49-F238E27FC236}">
+                <a16:creationId xmlns:a16="http://schemas.microsoft.com/office/drawing/2014/main" id="{EC386F67-4617-C1E9-24BC-0E8729AABF75}"/>
+              </a:ext>
+            </a:extLst>
+          </p:cNvPr>
+          <p:cNvSpPr/>
+          <p:nvPr/>
+        </p:nvSpPr>
+        <p:spPr>
+          <a:xfrm rot="16200000">
+            <a:off x="3421012" y="1214037"/>
+            <a:ext cx="45719" cy="4568749"/>
+          </a:xfrm>
+          <a:prstGeom prst="rect">
+            <a:avLst/>
+          </a:prstGeom>
+          <a:solidFill>
+            <a:srgbClr val="7030A0"/>
+          </a:solidFill>
+          <a:ln>
+            <a:solidFill>
+              <a:srgbClr val="7030A0"/>
+            </a:solidFill>
+          </a:ln>
+        </p:spPr>
+        <p:style>
+          <a:lnRef idx="2">
+            <a:schemeClr val="accent1">
+              <a:shade val="15000"/>
+            </a:schemeClr>
+          </a:lnRef>
+          <a:fillRef idx="1">
+            <a:schemeClr val="accent1"/>
+          </a:fillRef>
+          <a:effectRef idx="0">
+            <a:schemeClr val="accent1"/>
+          </a:effectRef>
+          <a:fontRef idx="minor">
+            <a:schemeClr val="lt1"/>
+          </a:fontRef>
+        </p:style>
+        <p:txBody>
+          <a:bodyPr rtlCol="0" anchor="ctr"/>
+          <a:lstStyle/>
+          <a:p>
+            <a:pPr algn="ctr"/>
+            <a:endParaRPr lang="en-US">
+              <a:latin typeface="Times New Roman" panose="02020603050405020304" pitchFamily="18" charset="0"/>
+              <a:cs typeface="Times New Roman" panose="02020603050405020304" pitchFamily="18" charset="0"/>
+            </a:endParaRPr>
+          </a:p>
+        </p:txBody>
+      </p:sp>
+      <p:sp>
+        <p:nvSpPr>
+          <p:cNvPr id="19" name="TextBox 18">
+            <a:extLst>
+              <a:ext uri="{FF2B5EF4-FFF2-40B4-BE49-F238E27FC236}">
+                <a16:creationId xmlns:a16="http://schemas.microsoft.com/office/drawing/2014/main" id="{FEE93460-00C4-9471-E71C-67988F56158E}"/>
+              </a:ext>
+            </a:extLst>
+          </p:cNvPr>
+          <p:cNvSpPr txBox="1"/>
+          <p:nvPr/>
+        </p:nvSpPr>
+        <p:spPr>
+          <a:xfrm>
+            <a:off x="-210844" y="694172"/>
+            <a:ext cx="3872835" cy="923330"/>
+          </a:xfrm>
+          <a:prstGeom prst="rect">
+            <a:avLst/>
+          </a:prstGeom>
+          <a:noFill/>
+        </p:spPr>
+        <p:txBody>
+          <a:bodyPr wrap="square" rtlCol="0">
+            <a:spAutoFit/>
+          </a:bodyPr>
+          <a:lstStyle/>
+          <a:p>
+            <a:pPr algn="ctr"/>
+            <a:r>
+              <a:rPr lang="en-US" sz="5400" dirty="0">
+                <a:solidFill>
+                  <a:srgbClr val="FF0000"/>
+                </a:solidFill>
+                <a:latin typeface="Times New Roman" panose="02020603050405020304" pitchFamily="18" charset="0"/>
+                <a:cs typeface="Times New Roman" panose="02020603050405020304" pitchFamily="18" charset="0"/>
+              </a:rPr>
+              <a:t>Onyx</a:t>
+            </a:r>
+          </a:p>
+        </p:txBody>
+      </p:sp>
+      <p:sp>
+        <p:nvSpPr>
+          <p:cNvPr id="20" name="TextBox 19">
+            <a:extLst>
+              <a:ext uri="{FF2B5EF4-FFF2-40B4-BE49-F238E27FC236}">
+                <a16:creationId xmlns:a16="http://schemas.microsoft.com/office/drawing/2014/main" id="{85477FD3-0A11-FC88-E33A-30AC03A3243B}"/>
+              </a:ext>
+            </a:extLst>
+          </p:cNvPr>
+          <p:cNvSpPr txBox="1"/>
+          <p:nvPr/>
+        </p:nvSpPr>
+        <p:spPr>
+          <a:xfrm>
+            <a:off x="7433045" y="5569553"/>
+            <a:ext cx="3872835" cy="923330"/>
+          </a:xfrm>
+          <a:prstGeom prst="rect">
+            <a:avLst/>
+          </a:prstGeom>
+          <a:noFill/>
+        </p:spPr>
+        <p:txBody>
+          <a:bodyPr wrap="square" rtlCol="0">
+            <a:spAutoFit/>
+          </a:bodyPr>
+          <a:lstStyle/>
+          <a:p>
+            <a:pPr algn="ctr"/>
+            <a:r>
+              <a:rPr lang="en-US" sz="5400" dirty="0">
+                <a:solidFill>
+                  <a:srgbClr val="FF0000"/>
+                </a:solidFill>
+                <a:latin typeface="Times New Roman" panose="02020603050405020304" pitchFamily="18" charset="0"/>
+                <a:cs typeface="Times New Roman" panose="02020603050405020304" pitchFamily="18" charset="0"/>
+              </a:rPr>
+              <a:t>Tommy</a:t>
+            </a:r>
+          </a:p>
+        </p:txBody>
+      </p:sp>
+      <p:pic>
+        <p:nvPicPr>
+          <p:cNvPr id="25" name="Picture 24">
+            <a:extLst>
+              <a:ext uri="{FF2B5EF4-FFF2-40B4-BE49-F238E27FC236}">
+                <a16:creationId xmlns:a16="http://schemas.microsoft.com/office/drawing/2014/main" id="{DF448D99-0312-5AF1-763A-B28EC7528449}"/>
+              </a:ext>
+            </a:extLst>
+          </p:cNvPr>
+          <p:cNvPicPr>
+            <a:picLocks noChangeAspect="1"/>
+          </p:cNvPicPr>
+          <p:nvPr/>
+        </p:nvPicPr>
+        <p:blipFill>
+          <a:blip r:embed="rId4"/>
+          <a:stretch>
+            <a:fillRect/>
+          </a:stretch>
+        </p:blipFill>
+        <p:spPr>
+          <a:xfrm>
+            <a:off x="681675" y="3850326"/>
+            <a:ext cx="10417835" cy="1719227"/>
+          </a:xfrm>
+          <a:prstGeom prst="rect">
+            <a:avLst/>
+          </a:prstGeom>
+        </p:spPr>
+      </p:pic>
+    </p:spTree>
+    <p:extLst>
+      <p:ext uri="{BB962C8B-B14F-4D97-AF65-F5344CB8AC3E}">
+        <p14:creationId xmlns:p14="http://schemas.microsoft.com/office/powerpoint/2010/main" val="497941951"/>
       </p:ext>
     </p:extLst>
   </p:cSld>

--- a/thesis-latency-fairness.pptx
+++ b/thesis-latency-fairness.pptx
@@ -17161,6 +17161,11 @@
             <a:pPr algn="ctr"/>
             <a:r>
               <a:rPr lang="en-US" sz="2400" dirty="0">
+                <a:solidFill>
+                  <a:schemeClr val="bg1">
+                    <a:lumMod val="50000"/>
+                  </a:schemeClr>
+                </a:solidFill>
                 <a:latin typeface="Times New Roman" panose="02020603050405020304" pitchFamily="18" charset="0"/>
                 <a:cs typeface="Times New Roman" panose="02020603050405020304" pitchFamily="18" charset="0"/>
               </a:rPr>
@@ -18023,6 +18028,11 @@
             <a:pPr algn="ctr"/>
             <a:r>
               <a:rPr lang="en-US" sz="2400" dirty="0">
+                <a:solidFill>
+                  <a:schemeClr val="bg1">
+                    <a:lumMod val="50000"/>
+                  </a:schemeClr>
+                </a:solidFill>
                 <a:latin typeface="Times New Roman" panose="02020603050405020304" pitchFamily="18" charset="0"/>
                 <a:cs typeface="Times New Roman" panose="02020603050405020304" pitchFamily="18" charset="0"/>
               </a:rPr>
@@ -18935,6 +18945,11 @@
             <a:pPr algn="ctr"/>
             <a:r>
               <a:rPr lang="en-US" sz="2400" dirty="0">
+                <a:solidFill>
+                  <a:schemeClr val="bg1">
+                    <a:lumMod val="50000"/>
+                  </a:schemeClr>
+                </a:solidFill>
                 <a:latin typeface="Times New Roman" panose="02020603050405020304" pitchFamily="18" charset="0"/>
                 <a:cs typeface="Times New Roman" panose="02020603050405020304" pitchFamily="18" charset="0"/>
               </a:rPr>
